--- a/en/files/slides/Session_7_EN.pptx
+++ b/en/files/slides/Session_7_EN.pptx
@@ -2902,7 +2902,7 @@
           <a:p>
             <a:r>
               <a:rPr lang="en-US" sz="1400" b="0" dirty="0"/>
-              <a:t>WORKED EXAMPLE (Level 2). Read each sentence and point to its STROBE item on the right.</a:t>
+              <a:t>WORKED EXAMPLE (course dataset). Read each sentence and point to its STROBE item on the right.</a:t>
             </a:r>
           </a:p>
           <a:p>
@@ -3829,7 +3829,7 @@
           <a:p>
             <a:r>
               <a:rPr lang="en-US" sz="1400" b="0" dirty="0"/>
-              <a:t>MANUSCRIPT WORKSHOP 1 (2:05-2:55). Level 2. Each group writes the Methods and Results of its FLUID-ICU paper (Q1-Q5) from its results pack.</a:t>
+              <a:t>MANUSCRIPT WORKSHOP 1 (2:05-2:55). Course dataset. Each group writes the Methods and Results of its FLUID-ICU paper (Q1-Q5) from its results pack.</a:t>
             </a:r>
           </a:p>
           <a:p>

--- a/en/files/slides/Session_7_EN.pptx
+++ b/en/files/slides/Session_7_EN.pptx
@@ -733,7 +733,7 @@
           <a:p>
             <a:r>
               <a:rPr lang="en-US" sz="1400" b="0" dirty="0"/>
-              <a:t>SESSION 7 (0:00). Weekend 4, Saturday. Two halves today: before the break we protect the patient and the science (ethics, integrity) and finish Proposal Part 4; after the break we start WRITING the FLUID-ICU manuscript.</a:t>
+              <a:t>SESSION 7 (0:00). Week 7, Saturday. Two halves today: before the break we protect the patient and the science (ethics, integrity) and finish Proposal Part 4; after the break we start WRITING the FLUID-ICU manuscript.</a:t>
             </a:r>
           </a:p>
           <a:p>
@@ -2431,13 +2431,13 @@
           <a:p>
             <a:r>
               <a:rPr lang="en-US" sz="1400" b="0" dirty="0"/>
-              <a:t>The journal choice and EQUATOR checklist will be checked again in 8.2 tomorrow - a provisional answer is fine today.</a:t>
+              <a:t>The journal choice and EQUATOR checklist will be checked again in 8.2 next Saturday - a provisional answer is fine today.</a:t>
             </a:r>
           </a:p>
           <a:p>
             <a:r>
               <a:rPr lang="en-US" sz="1400" b="0" dirty="0"/>
-              <a:t>Remind: tomorrow each group presents (6 minutes, 6 slides) - slides 5 (ethics &amp; feasibility) and 6 (publication plan) come from this worksheet.</a:t>
+              <a:t>Remind: next Saturday each group presents (6 minutes, 6 slides) - slides 5 (ethics &amp; feasibility) and 6 (publication plan) come from this worksheet.</a:t>
             </a:r>
           </a:p>
         </p:txBody>
@@ -3007,13 +3007,13 @@
           <a:p>
             <a:r>
               <a:rPr lang="en-US" sz="1400" b="0" dirty="0"/>
-              <a:t>Two products, two rows. Product 1 - your own research proposal - gets its last part today (ethics, registration, feasibility, publication plan) and is presented tomorrow.</a:t>
+              <a:t>Two products, two rows. Product 1 - your own research proposal - gets its last part today (ethics, registration, feasibility, publication plan) and is presented next Saturday.</a:t>
             </a:r>
           </a:p>
           <a:p>
             <a:r>
               <a:rPr lang="en-US" sz="1400" b="0" dirty="0"/>
-              <a:t>Product 2 - the FLUID-ICU draft manuscript - moves from 'reading the analysis' (Session 6) to WRITING: today Methods and Results, tomorrow Introduction, Discussion, Abstract and Title.</a:t>
+              <a:t>Product 2 - the FLUID-ICU draft manuscript - moves from 'reading the analysis' (Session 6) to WRITING: today Methods and Results, next Saturday Introduction, Discussion, Abstract and Title.</a:t>
             </a:r>
           </a:p>
           <a:p>
@@ -3334,7 +3334,7 @@
           <a:p>
             <a:r>
               <a:rPr lang="en-US" sz="1400" b="0" dirty="0"/>
-              <a:t>Point out what is NOT in the paragraph: no 'because', no 'significant', no explanation of why the OR shrank - that belongs to the Discussion tomorrow.</a:t>
+              <a:t>Point out what is NOT in the paragraph: no 'because', no 'significant', no explanation of why the OR shrank - that belongs to the Discussion next Saturday.</a:t>
             </a:r>
           </a:p>
           <a:p>
@@ -3643,7 +3643,7 @@
           <a:p>
             <a:r>
               <a:rPr lang="en-US" sz="1400" b="0" dirty="0"/>
-              <a:t>The full checklist is in the s7 exercise sheet and on equator-network.org (demo tomorrow).</a:t>
+              <a:t>The full checklist is in the s7 exercise sheet and on equator-network.org (demo next Saturday).</a:t>
             </a:r>
           </a:p>
           <a:p>
@@ -4033,7 +4033,7 @@
           <a:p>
             <a:r>
               <a:rPr lang="en-US" sz="1400" b="0" dirty="0"/>
-              <a:t>At 2:52 ask each group to save and send its draft (email or shared folder) - it is the starting file for tomorrow's workshop 2.</a:t>
+              <a:t>At 2:52 ask each group to save and send its draft (email or shared folder) - it is the starting file for next Saturday's workshop 2.</a:t>
             </a:r>
           </a:p>
         </p:txBody>
@@ -4213,7 +4213,7 @@
           <a:p>
             <a:r>
               <a:rPr lang="en-US" sz="1400" b="0" dirty="0"/>
-              <a:t>These are also the words most likely to appear in the post-course quiz tomorrow.</a:t>
+              <a:t>These are also the words most likely to appear in the post-course quiz next Saturday.</a:t>
             </a:r>
           </a:p>
         </p:txBody>
@@ -4300,7 +4300,7 @@
           <a:p>
             <a:r>
               <a:rPr lang="en-US" sz="1400" b="0" dirty="0"/>
-              <a:t>Homework: proposal slides (presentation guide: 6 minutes, 6 slides), and a read-through of the manuscript draft. Tomorrow starts with a 5-minute recap and goes straight into writing.</a:t>
+              <a:t>Homework: proposal slides (presentation guide: 6 minutes, 6 slides), and a read-through of the manuscript draft. Next Saturday starts with a 5-minute recap and goes straight into writing.</a:t>
             </a:r>
           </a:p>
         </p:txBody>
@@ -8340,7 +8340,7 @@
                 <a:latin typeface="Century Gothic"/>
                 <a:cs typeface="Century Gothic"/>
               </a:rPr>
-              <a:t>Weekend 4 · Saturday</a:t>
+              <a:t>Week 7 · Saturday</a:t>
             </a:r>
           </a:p>
           <a:p>
@@ -15643,7 +15643,7 @@
                 <a:latin typeface="Century Gothic"/>
                 <a:cs typeface="Century Gothic"/>
               </a:rPr>
-              <a:t>Your slide 5 and 6 for tomorrow</a:t>
+              <a:t>Your slide 5 and 6 for next Saturday</a:t>
             </a:r>
           </a:p>
           <a:p>
@@ -15665,7 +15665,7 @@
                 <a:latin typeface="Century Gothic"/>
                 <a:cs typeface="Century Gothic"/>
               </a:rPr>
-              <a:t>Finish at home tonight</a:t>
+              <a:t>Finish at home this week</a:t>
             </a:r>
           </a:p>
         </p:txBody>
@@ -23010,7 +23010,7 @@
                 <a:latin typeface="Century Gothic"/>
                 <a:cs typeface="Century Gothic"/>
               </a:rPr>
-              <a:t>Wrap-up and homework for tomorrow</a:t>
+              <a:t>Wrap-up and homework for next Saturday</a:t>
             </a:r>
           </a:p>
         </p:txBody>
@@ -23167,7 +23167,7 @@
                 <a:latin typeface="Century Gothic"/>
                 <a:cs typeface="Century Gothic"/>
               </a:rPr>
-              <a:t>Tonight: finish Proposal Part 4 and your 6 presentation slides</a:t>
+              <a:t>This week: finish Proposal Part 4 and your 6 presentation slides</a:t>
             </a:r>
           </a:p>
           <a:p>
@@ -23198,7 +23198,7 @@
                 <a:latin typeface="Century Gothic"/>
                 <a:cs typeface="Century Gothic"/>
               </a:rPr>
-              <a:t>Tonight: read your Methods + Results draft once, aloud</a:t>
+              <a:t>This week: read your Methods + Results draft once, aloud</a:t>
             </a:r>
           </a:p>
           <a:p>
@@ -23229,7 +23229,7 @@
                 <a:latin typeface="Century Gothic"/>
                 <a:cs typeface="Century Gothic"/>
               </a:rPr>
-              <a:t>Tomorrow: Introduction, Discussion, Abstract, Title - then present</a:t>
+              <a:t>Next Saturday: Introduction, Discussion, Abstract, Title - then present</a:t>
             </a:r>
           </a:p>
         </p:txBody>

--- a/en/files/slides/Session_7_EN.pptx
+++ b/en/files/slides/Session_7_EN.pptx
@@ -739,7 +739,7 @@
           <a:p>
             <a:r>
               <a:rPr lang="en-US" sz="1400" b="0" dirty="0"/>
-              <a:t>Pace: slow. Every block has a worked example and a 1-minute check. If time is short, drop slides from the 'Extra slides - Session 7' section at the end, never the workshop.</a:t>
+              <a:t>Pace: slow. Every block has a worked example and a 1-minute check. If time is short, drop slides from the 'Extra slides: Session 7' section at the end, never the workshop.</a:t>
             </a:r>
           </a:p>
           <a:p>
@@ -832,19 +832,19 @@
           <a:p>
             <a:r>
               <a:rPr lang="en-US" sz="1400" b="0" dirty="0"/>
-              <a:t>Teaching point: valid consent needs all four - information, understanding, voluntariness and a record.</a:t>
+              <a:t>Teaching point: valid consent needs all four: information, understanding, voluntariness and a record.</a:t>
             </a:r>
           </a:p>
           <a:p>
             <a:r>
               <a:rPr lang="en-US" sz="1400" b="0" dirty="0"/>
-              <a:t>Nurses and pharmacists are often the ones patients ask afterwards 'what did I sign?' - this is everybody's job, not only the investigator's.</a:t>
+              <a:t>Patients often ask nurses and pharmacists afterwards 'what did I sign?', so this is everybody's job, not only the investigator's.</a:t>
             </a:r>
           </a:p>
           <a:p>
             <a:r>
               <a:rPr lang="en-US" sz="1400" b="0" dirty="0"/>
-              <a:t>Withdrawal: participants may leave at any time without giving a reason and without any effect on their care. Running example: in Paper 1, two control patients withdrew consent and were not analysed - that is the right respected, and it is why the trial analysed 48 of 50.</a:t>
+              <a:t>Withdrawal: participants may leave at any time without giving a reason and without any effect on their care. Running example: in Paper 1, two control patients withdrew consent and were not analysed. That is the right being respected, and it is why the trial analysed 48 of 50.</a:t>
             </a:r>
           </a:p>
           <a:p>
@@ -943,7 +943,7 @@
           <a:p>
             <a:r>
               <a:rPr lang="en-US" sz="1400" b="0" dirty="0"/>
-              <a:t>Read the flowchart left to right. 1) Can the patient decide now? Then the patient consents. 2) If not, a legally authorised representative (surrogate - usually family, as defined by local law) consents, and the patient is asked again when able. 3) If no representative can be reached in time and the treatment cannot wait, research may proceed ONLY if the protocol explains why and the ethics committee approved this emergency procedure in advance; consent to continue is then sought as soon as possible. This is 'deferred consent'. The 2024 Declaration of Helsinki allows exactly this, under these conditions.</a:t>
+              <a:t>Read the flowchart left to right. 1) Can the patient decide now? Then the patient consents. 2) If not, a legally authorised representative (surrogate: usually family, as defined by local law) consents, and the patient is asked again when able. 3) If no representative can be reached in time and the treatment cannot wait, research may proceed ONLY if the protocol explains why and the ethics committee approved this emergency procedure in advance; consent to continue is then sought as soon as possible. This is 'deferred consent'. The 2024 Declaration of Helsinki allows exactly this, under these conditions.</a:t>
             </a:r>
           </a:p>
           <a:p>
@@ -955,13 +955,13 @@
           <a:p>
             <a:r>
               <a:rPr lang="en-US" sz="1400" b="0" dirty="0"/>
-              <a:t>Paper 2 is different: a registry using routine data - the committee waived individual consent and the data were de-identified before analysis (page 8).</a:t>
+              <a:t>Paper 2 is different: a registry using routine data. The committee waived individual consent and the data were de-identified before analysis (page 8).</a:t>
             </a:r>
           </a:p>
           <a:p>
             <a:r>
               <a:rPr lang="en-US" sz="1400" b="0" dirty="0"/>
-              <a:t>Local law decides who may act as representative and whether deferred consent is allowed - check with your committee before you write the protocol.</a:t>
+              <a:t>Local law decides who may act as representative and whether deferred consent is allowed. Check with your committee before you write the protocol.</a:t>
             </a:r>
           </a:p>
           <a:p>
@@ -1054,25 +1054,25 @@
           <a:p>
             <a:r>
               <a:rPr lang="en-US" sz="1400" b="0" dirty="0"/>
-              <a:t>Mr A: capacity present - the patient decides.</a:t>
+              <a:t>Mr A: capacity present, so the patient decides.</a:t>
             </a:r>
           </a:p>
           <a:p>
             <a:r>
               <a:rPr lang="en-US" sz="1400" b="0" dirty="0"/>
-              <a:t>Mrs B: lacks capacity now; the legally authorised representative (here the daughter, if local law allows) consents; Mrs B is asked to continue when she regains capacity - she may withdraw.</a:t>
+              <a:t>Mrs B: lacks capacity now. The legally authorised representative (here the daughter, if local law allows) consents. Mrs B is asked to continue when she regains capacity, and she may withdraw.</a:t>
             </a:r>
           </a:p>
           <a:p>
             <a:r>
               <a:rPr lang="en-US" sz="1400" b="0" dirty="0"/>
-              <a:t>Mr C: no representative in time, treatment cannot wait - deferred consent ONLY if the protocol describes it and the committee approved it; seek consent from family or patient as soon as possible. Paper 1 used this route.</a:t>
+              <a:t>Mr C: no representative in time and treatment cannot wait. Deferred consent applies ONLY if the protocol describes it and the committee approved it; seek consent from family or patient as soon as possible. Paper 1 used this route.</a:t>
             </a:r>
           </a:p>
           <a:p>
             <a:r>
               <a:rPr lang="en-US" sz="1400" b="0" dirty="0"/>
-              <a:t>Misconception: 'the treating doctor can consent for the patient'. No - the treating doctor is not the representative.</a:t>
+              <a:t>Misconception: 'the treating doctor can consent for the patient'. No. The treating doctor is not the representative.</a:t>
             </a:r>
           </a:p>
         </p:txBody>
@@ -1159,7 +1159,7 @@
           <a:p>
             <a:r>
               <a:rPr lang="en-US" sz="1400" b="0" dirty="0"/>
-              <a:t>Before: direct identifiers - name, hospital number, exact date of birth, address, phone, photos. After: a study code, age instead of birth date, month instead of exact dates, and only the variables in your data dictionary.</a:t>
+              <a:t>Before: direct identifiers such as name, hospital number, exact date of birth, address, phone, photos. After: a study code, age instead of birth date, month instead of exact dates, and only the variables in your data dictionary.</a:t>
             </a:r>
           </a:p>
           <a:p>
@@ -1189,7 +1189,7 @@
           <a:p>
             <a:r>
               <a:rPr lang="en-US" sz="1400" b="0" dirty="0"/>
-              <a:t>Ask: where would your group's key file live? Expected answer: an institution-approved, password-protected location - not a USB stick in a pocket.</a:t>
+              <a:t>Ask: where would your group's key file live? Expected answer: an institution-approved, password-protected location, not a USB stick in a pocket.</a:t>
             </a:r>
           </a:p>
         </p:txBody>
@@ -1270,7 +1270,7 @@
           <a:p>
             <a:r>
               <a:rPr lang="en-US" sz="1400" b="0" dirty="0"/>
-              <a:t>WORKED EXAMPLE linking 7.1 to the manuscript. Make clear FLUID-ICU is a SIMULATED teaching dataset - there was no real approval - so in the course manuscripts groups write: 'This analysis uses a simulated teaching dataset; no ethics approval was required.' In a real cohort the paragraph would read like the four cards.</a:t>
+              <a:t>WORKED EXAMPLE linking 7.1 to the manuscript. Make clear FLUID-ICU is a SIMULATED teaching dataset with no real approval, so in the course manuscripts groups write: 'This analysis uses a simulated teaching dataset; no ethics approval was required.' In a real cohort the paragraph would read like the four cards.</a:t>
             </a:r>
           </a:p>
           <a:p>
@@ -1363,7 +1363,7 @@
           <a:p>
             <a:r>
               <a:rPr lang="en-US" sz="1400" b="0" dirty="0"/>
-              <a:t>Walk the five tiles. TIMELINE: ethics approval alone can take 1-3 months; recruitment always takes longer than planned. BUDGET: name the headings even if the amounts are small - staff time, materials or tests, publication fee. PEOPLE: who collects data on night shifts and weekends, who analyses, and is there protected time? RECRUITMENT: Paper 1 screened 1201 patients in three ICUs over 17 months to randomise 50 (about 4%) - most eligible-looking patients are not eligible or not enrolled. DATA: is the variable already recorded routinely? Paper 2 could not study diuretics because the registry never recorded them.</a:t>
+              <a:t>Walk the five tiles. TIMELINE: ethics approval alone can take 1-3 months; recruitment always takes longer than planned. BUDGET: name the headings even if the amounts are small (staff time, materials or tests, publication fee). PEOPLE: who collects data on night shifts and weekends, who analyses, and is there protected time? RECRUITMENT: Paper 1 screened 1201 patients in three ICUs over 17 months to randomise 50 (about 4%). Most eligible-looking patients are not eligible or not enrolled. DATA: is the variable already recorded routinely? Paper 2 could not study diuretics because the registry never recorded them.</a:t>
             </a:r>
           </a:p>
           <a:p>
@@ -1381,7 +1381,7 @@
           <a:p>
             <a:r>
               <a:rPr lang="en-US" sz="1400" b="0" dirty="0"/>
-              <a:t>This is the only feasibility slide in Level 1 - do not go deeper.</a:t>
+              <a:t>This is the only feasibility slide in Level 1. Do not go deeper.</a:t>
             </a:r>
           </a:p>
         </p:txBody>
@@ -1468,7 +1468,7 @@
           <a:p>
             <a:r>
               <a:rPr lang="en-US" sz="1400" b="0" dirty="0"/>
-              <a:t>Tone: this is not about catching cheats. Most integrity problems start as small shortcuts under pressure - a missing value 'filled in', an outlier 'cleaned', a boss added as author. We want people to recognise the slope early.</a:t>
+              <a:t>Tone: this is not about catching cheats. Most integrity problems start as small shortcuts under pressure: a missing value 'filled in', an outlier 'cleaned', a boss added as author. We want people to recognise the slope early.</a:t>
             </a:r>
           </a:p>
           <a:p>
@@ -1555,7 +1555,7 @@
           <a:p>
             <a:r>
               <a:rPr lang="en-US" sz="1400" b="0" dirty="0"/>
-              <a:t>Teaching point: the three classic forms of research misconduct.</a:t>
+              <a:t>Teaching point: the three classic forms of research misconduct (FFP).</a:t>
             </a:r>
           </a:p>
           <a:p>
@@ -1573,13 +1573,13 @@
           <a:p>
             <a:r>
               <a:rPr lang="en-US" sz="1400" b="0" dirty="0"/>
-              <a:t>Plagiarism: using other people's words, ideas or figures without credit - including copying a paragraph WITH a citation but without quotation marks.</a:t>
+              <a:t>Plagiarism: using other people's words, ideas or figures without credit, including copying a paragraph WITH a citation but without quotation marks.</a:t>
             </a:r>
           </a:p>
           <a:p>
             <a:r>
               <a:rPr lang="en-US" sz="1400" b="0" dirty="0"/>
-              <a:t>Honest error is not misconduct - but it must be corrected openly (a correction or erratum).</a:t>
+              <a:t>Honest error is not misconduct, but it must be corrected openly (a correction or erratum).</a:t>
             </a:r>
           </a:p>
           <a:p>
@@ -1591,7 +1591,7 @@
           <a:p>
             <a:r>
               <a:rPr lang="en-US" sz="1400" b="0" dirty="0"/>
-              <a:t>Ask: which of these three is the most common in student theses? Expected answer: plagiarism - often copy-paste in the introduction. Similarity-check software will find it.</a:t>
+              <a:t>Ask: which of these three is the most common in student theses? Expected answer: plagiarism, often copy-paste in the introduction. Similarity-check software will find it.</a:t>
             </a:r>
           </a:p>
         </p:txBody>
@@ -1678,7 +1678,7 @@
           <a:p>
             <a:r>
               <a:rPr lang="en-US" sz="1400" b="0" dirty="0"/>
-              <a:t>Duplicate publication counts the same patients twice in a meta-analysis and can exaggerate an effect. A legitimate secondary paper is fine - if it is clearly cross-referenced and adds something new.</a:t>
+              <a:t>Duplicate publication counts the same patients twice in a meta-analysis and can exaggerate an effect. A legitimate secondary paper is fine if it is clearly cross-referenced and adds something new.</a:t>
             </a:r>
           </a:p>
           <a:p>
@@ -1696,7 +1696,7 @@
           <a:p>
             <a:r>
               <a:rPr lang="en-US" sz="1400" b="0" dirty="0"/>
-              <a:t>Ask: Paper 1's primary outcome was negative. Why does it matter that it was published at all? Expected: publication bias - if only positive trials appear, the literature overstates benefit.</a:t>
+              <a:t>Ask: Paper 1's primary outcome was negative. Why does it matter that it was published at all? Expected: publication bias. If only positive trials appear, the literature overstates benefit.</a:t>
             </a:r>
           </a:p>
         </p:txBody>
@@ -1789,19 +1789,19 @@
           <a:p>
             <a:r>
               <a:rPr lang="en-US" sz="1400" b="0" dirty="0"/>
-              <a:t>Gift author: a name added for seniority or friendship. Ghost author: someone who did the work - often a junior or a paid writer - but is not named. Both are misconduct.</a:t>
+              <a:t>Gift author: a name added for seniority or friendship. Ghost author: someone who did the work (often a junior or a paid writer) but is not named. Both are misconduct.</a:t>
             </a:r>
           </a:p>
           <a:p>
             <a:r>
               <a:rPr lang="en-US" sz="1400" b="0" dirty="0"/>
-              <a:t>Running example: Paper 2 is published 'on behalf of' a study group; the group members are listed in the Acknowledgements - a correct way to credit a large network.</a:t>
+              <a:t>Running example: Paper 2 is published 'on behalf of' a study group, and the group members are listed in the Acknowledgements. That is a correct way to credit a large network.</a:t>
             </a:r>
           </a:p>
           <a:p>
             <a:r>
               <a:rPr lang="en-US" sz="1400" b="0" dirty="0"/>
-              <a:t>Ask: data collection alone - is that enough for authorship? Expected answer: no, not without criteria 2, 3 and 4.</a:t>
+              <a:t>Ask: data collection alone, is that enough for authorship? Expected answer: no, not without criteria 2, 3 and 4.</a:t>
             </a:r>
           </a:p>
           <a:p>
@@ -1900,7 +1900,7 @@
           <a:p>
             <a:r>
               <a:rPr lang="en-US" sz="1400" b="0" dirty="0"/>
-              <a:t>Q5: ask one person per group - this is the number they will write about after the break. If a group cannot say it, sit with them during the break and go through their results pack.</a:t>
+              <a:t>Q5: ask one person per group. This is the number they will write about after the break. If a group cannot say it, sit with them during the break and go through their results pack.</a:t>
             </a:r>
           </a:p>
           <a:p>
@@ -1987,7 +1987,7 @@
           <a:p>
             <a:r>
               <a:rPr lang="en-US" sz="1400" b="0" dirty="0"/>
-              <a:t>Teaching point: a conflict (competing) interest is anything that could be seen to influence your judgement - financial or not. Having one is common and not wrong; hiding it is.</a:t>
+              <a:t>Teaching point: a conflict (competing) interest is anything that could be seen to influence your judgement, financial or not. Having one is common and not wrong; hiding it is.</a:t>
             </a:r>
           </a:p>
           <a:p>
@@ -2011,13 +2011,13 @@
           <a:p>
             <a:r>
               <a:rPr lang="en-US" sz="1400" b="0" dirty="0"/>
-              <a:t>Running example: Paper 2 states its funder had no role in the design, data collection and analysis or manuscript preparation - an ICMJE requirement that is often forgotten (annotation #39). Paper 1 states an internal hospital grant and no competing interests (page 12).</a:t>
+              <a:t>Running example: Paper 2 states its funder had no role in the design, data collection and analysis or manuscript preparation, an ICMJE requirement that is often forgotten (annotation #39). Paper 1 states an internal hospital grant and no competing interests (page 12).</a:t>
             </a:r>
           </a:p>
           <a:p>
             <a:r>
               <a:rPr lang="en-US" sz="1400" b="0" dirty="0"/>
-              <a:t>Ask: a drug company paid your travel to a congress last year. Do you declare it on a fluids paper? Expected: yes if it could be perceived as relevant - when in doubt, declare.</a:t>
+              <a:t>Ask: a drug company paid your travel to a congress last year. Do you declare it on a fluids paper? Expected: yes if it could be perceived as relevant. When in doubt, declare.</a:t>
             </a:r>
           </a:p>
         </p:txBody>
@@ -2104,7 +2104,7 @@
           <a:p>
             <a:r>
               <a:rPr lang="en-US" sz="1400" b="0" dirty="0"/>
-              <a:t>The ladder: not available; 'available on reasonable request' (the weakest promise - both papers use it, pages 12 and 8); a controlled-access repository (researchers apply); an open repository with a DOI (for fully de-identified data).</a:t>
+              <a:t>The ladder: not available; 'available on reasonable request' (the weakest promise, used by both papers, pages 12 and 8); a controlled-access repository (researchers apply); an open repository with a DOI (for fully de-identified data).</a:t>
             </a:r>
           </a:p>
           <a:p>
@@ -2203,7 +2203,7 @@
           <a:p>
             <a:r>
               <a:rPr lang="en-US" sz="1400" b="0" dirty="0"/>
-              <a:t>Teaching point - the current positions of ICMJE and COPE (Committee on Publication Ethics): AI tools cannot be authors, because they cannot take responsibility or be accountable for the work. Authors who use AI must disclose it - for writing help usually in the Acknowledgements, for use in data collection, analysis or figures in the Methods - and they remain fully responsible for every word, number and reference, including anything the tool produced.</a:t>
+              <a:t>Teaching point: the current positions of ICMJE and COPE (Committee on Publication Ethics). AI tools cannot be authors, because they cannot take responsibility or be accountable for the work. Authors who use AI must disclose it (writing help usually in the Acknowledgements, use in data collection, analysis or figures in the Methods), and they remain fully responsible for every word, number and reference, including anything the tool produced.</a:t>
             </a:r>
           </a:p>
           <a:p>
@@ -2227,13 +2227,13 @@
           <a:p>
             <a:r>
               <a:rPr lang="en-US" sz="1400" b="0" dirty="0"/>
-              <a:t>Always check the target journal's own AI policy in its Guide for Authors - policies change.</a:t>
+              <a:t>Always check the target journal's own AI policy in its Guide for Authors, because policies change.</a:t>
             </a:r>
           </a:p>
           <a:p>
             <a:r>
               <a:rPr lang="en-US" sz="1400" b="0" dirty="0"/>
-              <a:t>Ask: a colleague asks a chatbot to 'write the discussion' and submits it unread. Which of the three NEVER boxes does this hit? Expected: invented references and an unaccountable text - and it is undisclosed.</a:t>
+              <a:t>Ask: a colleague asks a chatbot to 'write the discussion' and submits it unread. Which of the three NEVER boxes does this hit? Expected: invented references and an unaccountable text, and it is undisclosed.</a:t>
             </a:r>
           </a:p>
         </p:txBody>
@@ -2320,25 +2320,25 @@
           <a:p>
             <a:r>
               <a:rPr lang="en-US" sz="1400" b="0" dirty="0"/>
-              <a:t>Choose three: 1 (missing data 'filled from memory' - RED, fabrication), 3 (head of department as last author without contributing - RED, gift authorship, offer Acknowledgements), 4 (AI polish of the English, checked and disclosed - GREEN; same chatbot fed the patient spreadsheet - RED).</a:t>
+              <a:t>Choose three: 1 (missing data 'filled from memory': RED, fabrication), 3 (head of department as last author without contributing: RED, gift authorship, offer Acknowledgements), 4 (AI polish of the English, checked and disclosed: GREEN; same chatbot fed the patient spreadsheet: RED).</a:t>
             </a:r>
           </a:p>
           <a:p>
             <a:r>
               <a:rPr lang="en-US" sz="1400" b="0" dirty="0"/>
-              <a:t>Example on the slide: lending equipment is not authorship - AMBER/RED: thank them in the Acknowledgements.</a:t>
+              <a:t>Example on the slide: lending equipment is not authorship (AMBER/RED). Thank them in the Acknowledgements.</a:t>
             </a:r>
           </a:p>
           <a:p>
             <a:r>
               <a:rPr lang="en-US" sz="1400" b="0" dirty="0"/>
-              <a:t>Facilitation: coloured cards (or coloured paper) on each table; if you have none, use fingers - 1 = green, 2 = amber, 3 = red.</a:t>
+              <a:t>Facilitation: coloured cards (or coloured paper) on each table; if you have none, use fingers: 1 = green, 2 = amber, 3 = red.</a:t>
             </a:r>
           </a:p>
           <a:p>
             <a:r>
               <a:rPr lang="en-US" sz="1400" b="0" dirty="0"/>
-              <a:t>If groups disagree, that is the teaching moment - ask each side for one reason.</a:t>
+              <a:t>If groups disagree, that is the teaching moment. Ask each side for one reason.</a:t>
             </a:r>
           </a:p>
         </p:txBody>
@@ -2425,19 +2425,19 @@
           <a:p>
             <a:r>
               <a:rPr lang="en-US" sz="1400" b="0" dirty="0"/>
-              <a:t>Circulate. Typical problems: (1) 'consent will be obtained' with no who/when/how - push for the ICU pathway; (2) retrospective chart reviews assuming no ethics review is needed - wrong, the committee decides and may grant a waiver; (3) recruitment numbers taken from the sample-size calculation instead of the unit's admissions; (4) CONSORT chosen for an observational proposal.</a:t>
+              <a:t>Circulate. Typical problems: (1) 'consent will be obtained' with no who/when/how (push for the ICU pathway); (2) retrospective chart reviews assuming no ethics review is needed (wrong: the committee decides and may grant a waiver); (3) recruitment numbers taken from the sample-size calculation instead of the unit's admissions; (4) CONSORT chosen for an observational proposal.</a:t>
             </a:r>
           </a:p>
           <a:p>
             <a:r>
               <a:rPr lang="en-US" sz="1400" b="0" dirty="0"/>
-              <a:t>The journal choice and EQUATOR checklist will be checked again in 8.2 next Saturday - a provisional answer is fine today.</a:t>
+              <a:t>The journal choice and EQUATOR checklist will be checked again in 8.2 next Saturday. A provisional answer is fine today.</a:t>
             </a:r>
           </a:p>
           <a:p>
             <a:r>
               <a:rPr lang="en-US" sz="1400" b="0" dirty="0"/>
-              <a:t>Remind: next Saturday each group presents (6 minutes, 6 slides) - slides 5 (ethics &amp; feasibility) and 6 (publication plan) come from this worksheet.</a:t>
+              <a:t>Remind: next Saturday each group presents (6 minutes, 6 slides). Slides 5 (ethics &amp; feasibility) and 6 (publication plan) come from this worksheet.</a:t>
             </a:r>
           </a:p>
         </p:txBody>
@@ -2623,7 +2623,7 @@
           <a:p>
             <a:r>
               <a:rPr lang="en-US" sz="1400" b="0" dirty="0"/>
-              <a:t>Pace: 3 minutes per slide. The two worked examples are the heart of the block - read them slowly with the room.</a:t>
+              <a:t>Pace: 3 minutes per slide. The two worked examples are the heart of the block. Read them slowly with the room.</a:t>
             </a:r>
           </a:p>
         </p:txBody>
@@ -2704,13 +2704,13 @@
           <a:p>
             <a:r>
               <a:rPr lang="en-US" sz="1400" b="0" dirty="0"/>
-              <a:t>Teaching point: readers go title - abstract - introduction - methods - results - discussion. Writers should not. Start from the evidence: draft the tables and figures (the story is in your data), then the Methods (you know what you did - it can be drafted from the protocol even before the data), then Results (describe the tables), then the Introduction (set up exactly the question you answered), then the Discussion, and only then the abstract and the title.</a:t>
+              <a:t>Teaching point: readers go from title to abstract, introduction, methods, results and discussion. Writers should not. Start from the evidence: draft the tables and figures (the story is in your data), then the Methods (you know what you did, and it can be drafted from the protocol even before the data), then Results (describe the tables), then the Introduction (set up exactly the question you answered), then the Discussion, and only then the abstract and the title.</a:t>
             </a:r>
           </a:p>
           <a:p>
             <a:r>
               <a:rPr lang="en-US" sz="1400" b="0" dirty="0"/>
-              <a:t>Why it works: each section is written from something that already exists, and the abstract and title summarise a paper that is finished - so they cannot promise more than the paper delivers.</a:t>
+              <a:t>Why it works: each section is written from something that already exists, and the abstract and title summarise a paper that is finished, so they cannot promise more than the paper delivers.</a:t>
             </a:r>
           </a:p>
           <a:p>
@@ -2722,7 +2722,7 @@
           <a:p>
             <a:r>
               <a:rPr lang="en-US" sz="1400" b="0" dirty="0"/>
-              <a:t>Ask: which part of your proposal could already become the Methods of your paper? Expected: Parts 2 and 3 - design, participants, variables, analysis plan.</a:t>
+              <a:t>Ask: which part of your proposal could already become the Methods of your paper? Expected: Parts 2 and 3 (design, participants, variables, analysis plan).</a:t>
             </a:r>
           </a:p>
         </p:txBody>
@@ -2809,7 +2809,7 @@
           <a:p>
             <a:r>
               <a:rPr lang="en-US" sz="1400" b="0" dirty="0"/>
-              <a:t>Good practice: Paper 1 puts the ethics committee, approval number, consent procedure and funding inside the Methods (annotation #13); describes the intervention well enough to replicate - staff training, a daily pharmacist check, dilution charts in a supplement (#16); separates one primary outcome from secondary and safety outcomes (#17); states the software and version (#21). Paper 2 defines exactly which inputs and outputs make up fluid balance (#13) and cites its cohort-profile paper instead of repeating it (#12).</a:t>
+              <a:t>Good practice: Paper 1 puts the ethics committee, approval number, consent procedure and funding inside the Methods (annotation #13); describes the intervention well enough to replicate: staff training, a daily pharmacist check, dilution charts in a supplement (#16); separates one primary outcome from secondary and safety outcomes (#17); states the software and version (#21). Paper 2 defines exactly which inputs and outputs make up fluid balance (#13) and cites its cohort-profile paper instead of repeating it (#12).</a:t>
             </a:r>
           </a:p>
           <a:p>
@@ -2908,7 +2908,7 @@
           <a:p>
             <a:r>
               <a:rPr lang="en-US" sz="1400" b="0" dirty="0"/>
-              <a:t>All facts come from results pack Q1, section 2: prospective multicentre cohort, 4 ICUs, consecutive adults with sepsis, January 2023 - December 2024; exposure = cumulative balance (in minus out, days 1-3) &gt; 0 ml/kg; outcome = death within 28 days of ICU admission.</a:t>
+              <a:t>All facts come from results pack Q1, section 2: prospective multicentre cohort, 4 ICUs, consecutive adults with sepsis, January 2023 to December 2024; exposure = cumulative balance (in minus out, days 1-3) &gt; 0 ml/kg; outcome = death within 28 days of ICU admission.</a:t>
             </a:r>
           </a:p>
           <a:p>
@@ -2920,13 +2920,13 @@
           <a:p>
             <a:r>
               <a:rPr lang="en-US" sz="1400" b="0" dirty="0"/>
-              <a:t>The ethics sentence is specific to the course: FLUID-ICU is SIMULATED - every manuscript must say so.</a:t>
+              <a:t>The ethics sentence is specific to the course: FLUID-ICU is SIMULATED, and every manuscript must say so.</a:t>
             </a:r>
           </a:p>
           <a:p>
             <a:r>
               <a:rPr lang="en-US" sz="1400" b="0" dirty="0"/>
-              <a:t>Ask: which sentence would a reader need to repeat the study? Expected: the exposure definition - how fluid balance was calculated.</a:t>
+              <a:t>Ask: which sentence would a reader need to repeat the study? Expected: the exposure definition (how fluid balance was calculated).</a:t>
             </a:r>
           </a:p>
         </p:txBody>
@@ -3007,13 +3007,13 @@
           <a:p>
             <a:r>
               <a:rPr lang="en-US" sz="1400" b="0" dirty="0"/>
-              <a:t>Two products, two rows. Product 1 - your own research proposal - gets its last part today (ethics, registration, feasibility, publication plan) and is presented next Saturday.</a:t>
+              <a:t>Two products, two rows. Product 1, your own research proposal, gets its last part today (ethics, registration, feasibility, publication plan) and is presented next Saturday.</a:t>
             </a:r>
           </a:p>
           <a:p>
             <a:r>
               <a:rPr lang="en-US" sz="1400" b="0" dirty="0"/>
-              <a:t>Product 2 - the FLUID-ICU draft manuscript - moves from 'reading the analysis' (Session 6) to WRITING: today Methods and Results, next Saturday Introduction, Discussion, Abstract and Title.</a:t>
+              <a:t>Product 2, the FLUID-ICU draft manuscript, moves from 'reading the analysis' (Session 6) to WRITING: today Methods and Results, next Saturday Introduction, Discussion, Abstract and Title.</a:t>
             </a:r>
           </a:p>
           <a:p>
@@ -3106,7 +3106,7 @@
           <a:p>
             <a:r>
               <a:rPr lang="en-US" sz="1400" b="0" dirty="0"/>
-              <a:t>Covariates: age, SOFA, lactate, vasopressor, mechanical ventilation, chronic kidney disease - pre-specified in the statistical analysis plan (Session 6), not chosen by looking at p-values.</a:t>
+              <a:t>Covariates: age, SOFA, lactate, vasopressor, mechanical ventilation, chronic kidney disease. All were pre-specified in the statistical analysis plan (Session 6), not chosen by looking at p-values.</a:t>
             </a:r>
           </a:p>
           <a:p>
@@ -3205,7 +3205,7 @@
           <a:p>
             <a:r>
               <a:rPr lang="en-US" sz="1400" b="0" dirty="0"/>
-              <a:t>Four rules. 1) Participants first: how many were screened, included, analysed and why some were lost - with a flow diagram. Paper 1 has its CONSORT flow chart in the main text (annotations #23, #27); Paper 2 keeps it in the supplement although 79% of the registry was excluded (#20).</a:t>
+              <a:t>Four rules. 1) Participants first: how many were screened, included, analysed and why some were lost, with a flow diagram. Paper 1 has its CONSORT flow chart in the main text (annotations #23, #27); Paper 2 keeps it in the supplement although 79% of the registry was excluded (#20).</a:t>
             </a:r>
           </a:p>
           <a:p>
@@ -3223,7 +3223,7 @@
           <a:p>
             <a:r>
               <a:rPr lang="en-US" sz="1400" b="0" dirty="0"/>
-              <a:t>4) One home for each number: key numbers in the text, all details in the tables - and they must agree. Paper 1's text says creatinine was higher in the intervention group; Table 1 shows the opposite (#25). Text-table contradictions are a classic rejection reason.</a:t>
+              <a:t>4) One home for each number: key numbers in the text, all details in the tables, and they must agree. Paper 1's text says creatinine was higher in the intervention group; Table 1 shows the opposite (#25). Text-table contradictions are a classic rejection reason.</a:t>
             </a:r>
           </a:p>
           <a:p>
@@ -3316,7 +3316,7 @@
           <a:p>
             <a:r>
               <a:rPr lang="en-US" sz="1400" b="0" dirty="0"/>
-              <a:t>Flow: 620 enrolled -&gt; 618 with a day-3 balance -&gt; 527 in the complete-case adjusted model (91 without lactate or age).</a:t>
+              <a:t>Flow: 620 enrolled → 618 with a day-3 balance → 527 in the complete-case adjusted model (91 without lactate or age).</a:t>
             </a:r>
           </a:p>
           <a:p>
@@ -3334,7 +3334,7 @@
           <a:p>
             <a:r>
               <a:rPr lang="en-US" sz="1400" b="0" dirty="0"/>
-              <a:t>Point out what is NOT in the paragraph: no 'because', no 'significant', no explanation of why the OR shrank - that belongs to the Discussion next Saturday.</a:t>
+              <a:t>Point out what is NOT in the paragraph: no 'because', no 'significant', no explanation of why the OR shrank. That belongs to the Discussion next Saturday.</a:t>
             </a:r>
           </a:p>
           <a:p>
@@ -3427,7 +3427,7 @@
           <a:p>
             <a:r>
               <a:rPr lang="en-US" sz="1400" b="0" dirty="0"/>
-              <a:t>Good practice: Paper 1's Table 1 has n in each column, SD or IQR per row and no baseline p-values - correct for a randomised trial (annotation #31). Paper 2's Table 1 adds SMDs and footnotes with the number of patients with missing data (#30); its timeline figure has a self-contained legend (#21).</a:t>
+              <a:t>Good practice: Paper 1's Table 1 has n in each column, SD or IQR per row and no baseline p-values, which is correct for a randomised trial (annotation #31). Paper 2's Table 1 adds SMDs and footnotes with the number of patients with missing data (#30); its timeline figure has a self-contained legend (#21).</a:t>
             </a:r>
           </a:p>
           <a:p>
@@ -3439,7 +3439,7 @@
           <a:p>
             <a:r>
               <a:rPr lang="en-US" sz="1400" b="0" dirty="0"/>
-              <a:t>Link to Session 5: the publication-quality table rules. Your FLUID-ICU Table 1 in the results pack already follows them - check it against this list in the workshop.</a:t>
+              <a:t>Link to Session 5: the publication-quality table rules. Your FLUID-ICU Table 1 in the results pack already follows them. Check it against this list in the workshop.</a:t>
             </a:r>
           </a:p>
           <a:p>
@@ -3538,13 +3538,13 @@
           <a:p>
             <a:r>
               <a:rPr lang="en-US" sz="1400" b="0" dirty="0"/>
-              <a:t>Teaching point: the Table 1 sentence describes, it does not test - no p-values needed (observational Table 1s often show SMDs instead).</a:t>
+              <a:t>Teaching point: the Table 1 sentence describes, it does not test, so no p-values are needed (observational Table 1s often show SMDs instead).</a:t>
             </a:r>
           </a:p>
           <a:p>
             <a:r>
               <a:rPr lang="en-US" sz="1400" b="0" dirty="0"/>
-              <a:t>Heart failure is lower in the positive group because clinicians give less fluid in heart failure - a nice example of how treatment decisions shape the data.</a:t>
+              <a:t>Heart failure is lower in the positive group because clinicians give less fluid in heart failure: a good example of how treatment decisions shape the data.</a:t>
             </a:r>
           </a:p>
           <a:p>
@@ -3637,7 +3637,7 @@
           <a:p>
             <a:r>
               <a:rPr lang="en-US" sz="1400" b="0" dirty="0"/>
-              <a:t>Items groups most often forget: 9 (bias - say how you addressed confounding by indication: adjustment for severity); 10 (study size - for a fixed dataset say 'all eligible patients in the cohort were included'); 12 (missing data - how lactate was handled); 16 (give BOTH crude and adjusted estimates, with the variables adjusted for).</a:t>
+              <a:t>Items groups most often forget: 9 (bias: say how you addressed confounding by indication, i.e. adjustment for severity); 10 (study size: for a fixed dataset say 'all eligible patients in the cohort were included'); 12 (missing data: how lactate was handled); 16 (give BOTH crude and adjusted estimates, with the variables adjusted for).</a:t>
             </a:r>
           </a:p>
           <a:p>
@@ -3748,7 +3748,7 @@
           <a:p>
             <a:r>
               <a:rPr lang="en-US" sz="1400" b="0" dirty="0"/>
-              <a:t>Sentence 3 is the classic error - an interpretation slipped into the Results. Move it to the Discussion.</a:t>
+              <a:t>Sentence 3 is the classic error: an interpretation slipped into the Results. Move it to the Discussion.</a:t>
             </a:r>
           </a:p>
         </p:txBody>
@@ -3835,7 +3835,7 @@
           <a:p>
             <a:r>
               <a:rPr lang="en-US" sz="1400" b="0" dirty="0"/>
-              <a:t>Instructions for participants: Practicals/s7_exercises.md, Part C. Model paragraphs for Q1: Solutions/s7_solutions.md (do NOT hand these out before the workshop - show only the worked examples on the slides).</a:t>
+              <a:t>Instructions for participants: Practicals/s7_exercises.md, Part C. Model paragraphs for Q1: Solutions/s7_solutions.md. Do NOT hand these out before the workshop; show only the worked examples on the slides.</a:t>
             </a:r>
           </a:p>
         </p:txBody>
@@ -4027,13 +4027,13 @@
           <a:p>
             <a:r>
               <a:rPr lang="en-US" sz="1400" b="0" dirty="0"/>
-              <a:t>Q4 group (lactate): make sure they report BOTH complete-case and imputed estimates. Q5 group (length of stay): medians and IQR, not means. Q3 group: ventilator-free days are skewed - check the summary they chose.</a:t>
+              <a:t>Q4 group (lactate): make sure they report BOTH complete-case and imputed estimates. Q5 group (length of stay): medians and IQR, not means. Q3 group: ventilator-free days are skewed, so check the summary they chose.</a:t>
             </a:r>
           </a:p>
           <a:p>
             <a:r>
               <a:rPr lang="en-US" sz="1400" b="0" dirty="0"/>
-              <a:t>At 2:52 ask each group to save and send its draft (email or shared folder) - it is the starting file for next Saturday's workshop 2.</a:t>
+              <a:t>At 2:52 ask each group to save and send its draft (email or shared folder). It is the starting file for next Saturday's workshop 2.</a:t>
             </a:r>
           </a:p>
         </p:txBody>
@@ -4120,7 +4120,7 @@
           <a:p>
             <a:r>
               <a:rPr lang="en-US" sz="1400" b="0" dirty="0"/>
-              <a:t>About 2.5 minutes per slide. The ICU consent slide and its worked example deserve the most time - it is the real-life problem of this department.</a:t>
+              <a:t>About 2.5 minutes per slide. The ICU consent slide and its worked example deserve the most time: it is the real-life problem of this department.</a:t>
             </a:r>
           </a:p>
           <a:p>
@@ -4207,7 +4207,7 @@
           <a:p>
             <a:r>
               <a:rPr lang="en-US" sz="1400" b="0" dirty="0"/>
-              <a:t>Read the six terms with the room - ask someone to explain each in their own words before you read the right-hand column.</a:t>
+              <a:t>Read the six terms with the room. Ask someone to explain each in their own words before you read the right-hand column.</a:t>
             </a:r>
           </a:p>
           <a:p>
@@ -4462,7 +4462,7 @@
           <a:p>
             <a:r>
               <a:rPr lang="en-US" sz="1400" b="0" dirty="0"/>
-              <a:t>EXTRA: Teaching point: almost every clinical paper follows IMRaD - Introduction, Methods, Results and Discussion - framed by the title and abstract and closed by references and declarations.</a:t>
+              <a:t>EXTRA: Teaching point: almost every clinical paper follows IMRaD (Introduction, Methods, Results and Discussion), framed by the title and abstract and closed by references and declarations.</a:t>
             </a:r>
           </a:p>
           <a:p>
@@ -4480,13 +4480,13 @@
           <a:p>
             <a:r>
               <a:rPr lang="en-US" sz="1400" b="0" dirty="0"/>
-              <a:t>Tip for the appraisal after the break: the hourglass tells you where to look - PICO in the last paragraph of the Introduction, design and outcome in the Methods, the main effect in the first paragraph of the Results, limitations near the end of the Discussion.</a:t>
+              <a:t>Tip for the appraisal after the break: the hourglass tells you where to look. PICO is in the last paragraph of the Introduction, design and outcome in the Methods, the main effect in the first paragraph of the Results, limitations near the end of the Discussion.</a:t>
             </a:r>
           </a:p>
           <a:p>
             <a:r>
               <a:rPr lang="en-US" sz="1400" b="0" dirty="0"/>
-              <a:t>Ask: which section do you read first in a paper? Many will say the abstract and conclusion - fine, but the answer to 'can I believe it?' is in the Methods.</a:t>
+              <a:t>Ask: which section do you read first in a paper? Many will say the abstract and conclusion. That is fine, but the answer to 'can I believe it?' is in the Methods.</a:t>
             </a:r>
           </a:p>
         </p:txBody>
@@ -4573,7 +4573,7 @@
           <a:p>
             <a:r>
               <a:rPr lang="en-US" sz="1400" b="0" dirty="0"/>
-              <a:t>Running example: Paper 1 (page 12) gives a CRediT statement - e.g. the statistician is credited for Methodology and Formal analysis. Paper 2 (page 8) describes contributions in free text and states that all authors read and approved the final manuscript - acceptable, but CRediT is the format most journals now ask for.</a:t>
+              <a:t>Running example: Paper 1 (page 12) gives a CRediT statement; for example, the statistician is credited for Methodology and Formal analysis. Paper 2 (page 8) describes contributions in free text and states that all authors read and approved the final manuscript. That is acceptable, but CRediT is the format most journals now ask for.</a:t>
             </a:r>
           </a:p>
           <a:p>
@@ -4585,7 +4585,7 @@
           <a:p>
             <a:r>
               <a:rPr lang="en-US" sz="1400" b="0" dirty="0"/>
-              <a:t>Question: in a hospital, who usually ends up as last author, and why? Expected: the senior supervisor - legitimate if they meet all four criteria, a gift if they do not.</a:t>
+              <a:t>Question: in a hospital, who usually ends up as last author, and why? Expected: the senior supervisor. That is legitimate if they meet all four criteria, and a gift if they do not.</a:t>
             </a:r>
           </a:p>
         </p:txBody>
@@ -4666,7 +4666,7 @@
           <a:p>
             <a:r>
               <a:rPr lang="en-US" sz="1400" b="0" dirty="0"/>
-              <a:t>Copyright slide - leave on screen while participants leave.</a:t>
+              <a:t>Copyright slide. Leave on screen while participants leave.</a:t>
             </a:r>
           </a:p>
         </p:txBody>
@@ -4759,19 +4759,19 @@
           <a:p>
             <a:r>
               <a:rPr lang="en-US" sz="1400" b="0" dirty="0"/>
-              <a:t>Point to the foundation bar: changes after approval are made as formal amendments, approved before they are applied - not quietly.</a:t>
+              <a:t>Point to the foundation bar: changes after approval are made as formal amendments, approved before they are applied, never quietly.</a:t>
             </a:r>
           </a:p>
           <a:p>
             <a:r>
               <a:rPr lang="en-US" sz="1400" b="0" dirty="0"/>
-              <a:t>Running example: Paper 1 says its protocol and statistical analysis plan were registered at ClinicalTrials.gov (NCT04947904) before the first patient - that is what lets a reader check the authors did what they planned.</a:t>
+              <a:t>Running example: Paper 1 says its protocol and statistical analysis plan were registered at ClinicalTrials.gov (NCT04947904) before the first patient. That is what lets a reader check the authors did what they planned.</a:t>
             </a:r>
           </a:p>
           <a:p>
             <a:r>
               <a:rPr lang="en-US" sz="1400" b="0" dirty="0"/>
-              <a:t>Ask: which column of your proposal is weakest right now? Expected: HOW - sample size or analysis plan. Reassure: the template in Templates/ follows exactly this order.</a:t>
+              <a:t>Ask: which column of your proposal is weakest right now? Expected: HOW (sample size or analysis plan). Reassure: the template in Templates/ follows exactly this order.</a:t>
             </a:r>
           </a:p>
         </p:txBody>
@@ -4852,7 +4852,7 @@
           <a:p>
             <a:r>
               <a:rPr lang="en-US" sz="1400" b="0" dirty="0"/>
-              <a:t>Teaching point: the Declaration of Helsinki (World Medical Association, latest revision October 2024) is the ethical foundation for research with people. Its core: the rights and interests of the individual participant come before the goal of new knowledge; a protocol approved by an independent research ethics committee before the study starts; free, informed consent; risks minimised and justified; privacy protected; every study registered before the first participant and ALL results made public - including negative and inconclusive ones.</a:t>
+              <a:t>Teaching point: the Declaration of Helsinki (World Medical Association, latest revision October 2024) is the ethical foundation for research with people. Its core: the rights and interests of the individual participant come before the goal of new knowledge; a protocol approved by an independent research ethics committee before the study starts; free, informed consent; risks minimised and justified; privacy protected; every study registered before the first participant and ALL results made public, including negative and inconclusive ones.</a:t>
             </a:r>
           </a:p>
           <a:p>
@@ -4870,7 +4870,7 @@
           <a:p>
             <a:r>
               <a:rPr lang="en-US" sz="1400" b="0" dirty="0"/>
-              <a:t>Misconception: 'GCP is only for drug companies'. Paper 1 - an academic ICU trial - states its analyses followed ICH-GCP.</a:t>
+              <a:t>Misconception: 'GCP is only for drug companies'. Paper 1, an academic ICU trial, states its analyses followed ICH-GCP.</a:t>
             </a:r>
           </a:p>
           <a:p>
@@ -4969,13 +4969,13 @@
           <a:p>
             <a:r>
               <a:rPr lang="en-US" sz="1400" b="0" dirty="0"/>
-              <a:t>Review types: some low-risk studies are exempt or get an expedited review; trials and anything with more than minimal risk go to the full committee. Your committee decides the category - you do not.</a:t>
+              <a:t>Review types: some low-risk studies are exempt or get an expedited review; trials and anything with more than minimal risk go to the full committee. Your committee decides the category, not you.</a:t>
             </a:r>
           </a:p>
           <a:p>
             <a:r>
               <a:rPr lang="en-US" sz="1400" b="0" dirty="0"/>
-              <a:t>Questions and revisions are normal - plan 1-3 months for the whole journey.</a:t>
+              <a:t>Questions and revisions are normal. Plan 1-3 months for the whole journey.</a:t>
             </a:r>
           </a:p>
           <a:p>
@@ -5080,7 +5080,7 @@
           <a:p>
             <a:r>
               <a:rPr lang="en-US" sz="1400" b="0" dirty="0"/>
-              <a:t>Clinical trials: registration is mandatory. ICMJE journals will not publish a trial that was not registered before the first participant, and many countries require it by law. Use ClinicalTrials.gov or another WHO primary registry; the WHO ICTRP portal searches all of them at once - it is a search portal, not a registry itself.</a:t>
+              <a:t>Clinical trials: registration is mandatory. ICMJE journals will not publish a trial that was not registered before the first participant, and many countries require it by law. Use ClinicalTrials.gov or another WHO primary registry. The WHO ICTRP portal searches all of them at once; it is a search portal, not a registry itself.</a:t>
             </a:r>
           </a:p>
           <a:p>
@@ -5092,19 +5092,19 @@
           <a:p>
             <a:r>
               <a:rPr lang="en-US" sz="1400" b="0" dirty="0"/>
-              <a:t>Observational studies: registration is encouraged rather than required - check the target journal and local rules. The Declaration of Helsinki asks for every study with human participants to be registered.</a:t>
+              <a:t>Observational studies: registration is encouraged rather than required. Check the target journal and local rules. The Declaration of Helsinki asks for every study with human participants to be registered.</a:t>
             </a:r>
           </a:p>
           <a:p>
             <a:r>
               <a:rPr lang="en-US" sz="1400" b="0" dirty="0"/>
-              <a:t>Running example: Paper 1 was registered as NCT04947904 on 1 July 2021; the first patient was enrolled in September 2021 - prospective registration. Its registration number is in the abstract.</a:t>
+              <a:t>Running example: Paper 1 was registered as NCT04947904 on 1 July 2021, and the first patient was enrolled in September 2021, so registration was prospective. Its registration number is in the abstract.</a:t>
             </a:r>
           </a:p>
           <a:p>
             <a:r>
               <a:rPr lang="en-US" sz="1400" b="0" dirty="0"/>
-              <a:t>Ask: your group's study - does it need registration? Expected: trials yes; most cohort proposals 'recommended'.</a:t>
+              <a:t>Ask: your group's study, does it need registration? Expected: trials yes; most cohort proposals 'recommended'.</a:t>
             </a:r>
           </a:p>
         </p:txBody>
@@ -5191,7 +5191,7 @@
           <a:p>
             <a:r>
               <a:rPr lang="en-US" sz="1400" b="0" dirty="0"/>
-              <a:t>Scenario 4 starts a useful discussion: audit compares practice with a standard and is usually approved through the quality office, not registered; but if you plan to publish it as research, ask the ethics committee first (Session 1: research vs audit vs QI).</a:t>
+              <a:t>Scenario 4 starts a useful discussion: audit compares practice with a standard and is usually approved through the quality office, not registered. If you plan to publish it as research, ask the ethics committee first (Session 1: research vs audit vs QI).</a:t>
             </a:r>
           </a:p>
         </p:txBody>
@@ -9582,7 +9582,7 @@
                 <a:latin typeface="Century Gothic"/>
                 <a:cs typeface="Century Gothic"/>
               </a:rPr>
-              <a:t>Patient, then legal representative, then deferred consent - and only if approved.</a:t>
+              <a:t>Patient, then legal representative, then deferred consent (only if approved).</a:t>
             </a:r>
           </a:p>
         </p:txBody>
@@ -10784,7 +10784,7 @@
                 <a:latin typeface="Century Gothic"/>
                 <a:cs typeface="Century Gothic"/>
               </a:rPr>
-              <a:t>FLUID-ICU is simulated - but if it were real, this is what the paper would say.</a:t>
+              <a:t>FLUID-ICU is simulated. If it were real, this is what the paper would say.</a:t>
             </a:r>
           </a:p>
         </p:txBody>
@@ -12067,14 +12067,14 @@
               <a:buNone/>
             </a:pPr>
             <a:r>
-              <a:rPr lang="en-US" sz="2800" b="1" dirty="0">
+              <a:rPr lang="en-US" sz="2400" b="1" dirty="0">
                 <a:solidFill>
                   <a:srgbClr val="0D7377"/>
                 </a:solidFill>
                 <a:latin typeface="Century Gothic"/>
                 <a:cs typeface="Century Gothic"/>
               </a:rPr>
-              <a:t>Fabrication, falsification, plagiarism (FFP)</a:t>
+              <a:t>Research misconduct: fabrication, falsification, plagiarism</a:t>
             </a:r>
           </a:p>
         </p:txBody>
@@ -12181,7 +12181,7 @@
                 <a:latin typeface="Century Gothic"/>
                 <a:cs typeface="Century Gothic"/>
               </a:rPr>
-              <a:t>Missing data are reported as missing - never invented, never quietly removed.</a:t>
+              <a:t>Missing data are reported as missing: never invented, never quietly removed.</a:t>
             </a:r>
           </a:p>
         </p:txBody>
@@ -13148,7 +13148,7 @@
                 <a:latin typeface="Century Gothic"/>
                 <a:cs typeface="Century Gothic"/>
               </a:rPr>
-              <a:t>All four criteria, for every author - decide the list at the start.</a:t>
+              <a:t>All four criteria, for every author. Decide the list at the start.</a:t>
             </a:r>
           </a:p>
         </p:txBody>
@@ -13655,7 +13655,7 @@
                 <a:latin typeface="Century Gothic"/>
                 <a:cs typeface="Century Gothic"/>
               </a:rPr>
-              <a:t>2. No - the CI includes 1</a:t>
+              <a:t>2. No: the CI includes 1</a:t>
             </a:r>
           </a:p>
           <a:p>
@@ -14328,7 +14328,7 @@
                 <a:latin typeface="Century Gothic"/>
                 <a:cs typeface="Century Gothic"/>
               </a:rPr>
-              <a:t>Plan data sharing at the protocol stage - consent must allow it.</a:t>
+              <a:t>Plan data sharing at the protocol stage: consent must allow it.</a:t>
             </a:r>
           </a:p>
         </p:txBody>
@@ -16454,7 +16454,7 @@
                 <a:latin typeface="Century Gothic"/>
                 <a:cs typeface="Century Gothic"/>
               </a:rPr>
-              <a:t>Write what you did and what you found - nothing more</a:t>
+              <a:t>Write what you did and what you found, nothing more</a:t>
             </a:r>
           </a:p>
         </p:txBody>
@@ -17872,7 +17872,7 @@
                 <a:latin typeface="Century Gothic"/>
                 <a:cs typeface="Century Gothic"/>
               </a:rPr>
-              <a:t>One sentence per STROBE item - and say plainly that the data are simulated.</a:t>
+              <a:t>One sentence per STROBE item, and say plainly that the data are simulated.</a:t>
             </a:r>
           </a:p>
         </p:txBody>
@@ -18422,7 +18422,7 @@
                 <a:latin typeface="Century Gothic"/>
                 <a:cs typeface="Century Gothic"/>
               </a:rPr>
-              <a:t>Name a method for every comparison you report - chosen before you saw the data.</a:t>
+              <a:t>Name a method for every comparison you report, chosen before you saw the data.</a:t>
             </a:r>
           </a:p>
         </p:txBody>
@@ -18972,7 +18972,7 @@
                 <a:latin typeface="Century Gothic"/>
                 <a:cs typeface="Century Gothic"/>
               </a:rPr>
-              <a:t>Participants, Table 1, outcome numbers, crude and adjusted estimates - in that order.</a:t>
+              <a:t>Participants, Table 1, outcome numbers, crude and adjusted estimates, in that order.</a:t>
             </a:r>
           </a:p>
         </p:txBody>
@@ -20279,7 +20279,7 @@
                 <a:latin typeface="Century Gothic"/>
                 <a:cs typeface="Century Gothic"/>
               </a:rPr>
-              <a:t>Write with the STROBE checklist open - tick each item as you write it.</a:t>
+              <a:t>Write with the STROBE checklist open and tick each item as you write it.</a:t>
             </a:r>
           </a:p>
         </p:txBody>
@@ -21108,7 +21108,7 @@
                 <a:latin typeface="Century Gothic"/>
                 <a:cs typeface="Century Gothic"/>
               </a:rPr>
-              <a:t>About 600 words, Table 1 and one figure or table - from your results pack</a:t>
+              <a:t>About 600 words, Table 1 and one figure or table, from your results pack</a:t>
             </a:r>
           </a:p>
         </p:txBody>
@@ -21383,7 +21383,7 @@
                 <a:latin typeface="Century Gothic"/>
                 <a:cs typeface="Century Gothic"/>
               </a:rPr>
-              <a:t>Every number in your text must come from your results pack - nobody calculates anything.</a:t>
+              <a:t>Every number in your text must come from your results pack: nobody calculates anything.</a:t>
             </a:r>
           </a:p>
         </p:txBody>
@@ -21708,7 +21708,7 @@
                 <a:latin typeface="Century Gothic"/>
                 <a:cs typeface="Century Gothic"/>
               </a:rPr>
-              <a:t>5-25: Methods - design, setting, participants, variables, statistics</a:t>
+              <a:t>5-25: Methods (design, setting, participants, variables, statistics)</a:t>
             </a:r>
           </a:p>
           <a:p>
@@ -21739,7 +21739,7 @@
                 <a:latin typeface="Century Gothic"/>
                 <a:cs typeface="Century Gothic"/>
               </a:rPr>
-              <a:t>25-40: Results - participants, Table 1, main result (crude + adjusted)</a:t>
+              <a:t>25-40: Results (participants, Table 1, crude + adjusted main result)</a:t>
             </a:r>
           </a:p>
           <a:p>
@@ -22649,7 +22649,7 @@
                           </a:solidFill>
                           <a:latin typeface="Century Gothic"/>
                         </a:rPr>
-                        <a:t>Fabrication, falsification, plagiarism - research misconduct</a:t>
+                        <a:t>Research misconduct: fabrication, falsification, plagiarism</a:t>
                       </a:r>
                     </a:p>
                   </a:txBody>
@@ -22745,7 +22745,7 @@
                           </a:solidFill>
                           <a:latin typeface="Century Gothic"/>
                         </a:rPr>
-                        <a:t>Anything that could be seen to influence your judgement - declare it</a:t>
+                        <a:t>Anything that could be seen to influence your judgement. Declare it</a:t>
                       </a:r>
                     </a:p>
                   </a:txBody>
@@ -23229,7 +23229,7 @@
                 <a:latin typeface="Century Gothic"/>
                 <a:cs typeface="Century Gothic"/>
               </a:rPr>
-              <a:t>Next Saturday: Introduction, Discussion, Abstract, Title - then present</a:t>
+              <a:t>Next Saturday: Introduction, Discussion, Abstract, Title, then present</a:t>
             </a:r>
           </a:p>
         </p:txBody>
@@ -23296,7 +23296,7 @@
                 <a:latin typeface="Century Gothic"/>
                 <a:cs typeface="Century Gothic"/>
               </a:rPr>
-              <a:t>No approval, no data - not even 'a few patients'</a:t>
+              <a:t>No approval, no data: not even 'a few patients'</a:t>
             </a:r>
           </a:p>
           <a:p>
@@ -23635,7 +23635,7 @@
                 <a:latin typeface="Century Gothic"/>
                 <a:cs typeface="Century Gothic"/>
               </a:rPr>
-              <a:t>Extra slides - Session 7</a:t>
+              <a:t>Extra slides: Session 7</a:t>
             </a:r>
           </a:p>
           <a:p>
@@ -24297,7 +24297,7 @@
                 <a:latin typeface="Century Gothic"/>
                 <a:cs typeface="Century Gothic"/>
               </a:rPr>
-              <a:t>Writing - original draft</a:t>
+              <a:t>Writing – original draft</a:t>
             </a:r>
           </a:p>
           <a:p>
@@ -24318,7 +24318,7 @@
                 <a:latin typeface="Century Gothic"/>
                 <a:cs typeface="Century Gothic"/>
               </a:rPr>
-              <a:t>Writing - review &amp; editing</a:t>
+              <a:t>Writing – review &amp; editing</a:t>
             </a:r>
           </a:p>
           <a:p>
@@ -24431,7 +24431,7 @@
                 <a:latin typeface="Century Gothic"/>
                 <a:cs typeface="Century Gothic"/>
               </a:rPr>
-              <a:t>NB: Writing - original draft</a:t>
+              <a:t>NB: Writing – original draft</a:t>
             </a:r>
           </a:p>
           <a:p>
@@ -25656,7 +25656,7 @@
                 <a:latin typeface="Century Gothic"/>
                 <a:cs typeface="Century Gothic"/>
               </a:rPr>
-              <a:t>The ethics-committee journey</a:t>
+              <a:t>The ethics-committee journey: approval before data</a:t>
             </a:r>
           </a:p>
         </p:txBody>
@@ -25763,7 +25763,7 @@
                 <a:latin typeface="Century Gothic"/>
                 <a:cs typeface="Century Gothic"/>
               </a:rPr>
-              <a:t>No approval letter, no data collection - not even 'just a few patients'.</a:t>
+              <a:t>No approval letter, no data collection: not even 'just a few patients'.</a:t>
             </a:r>
           </a:p>
         </p:txBody>
@@ -26523,7 +26523,7 @@
                 <a:latin typeface="Century Gothic"/>
                 <a:cs typeface="Century Gothic"/>
               </a:rPr>
-              <a:t>1. Must - trial registry, before patient 1</a:t>
+              <a:t>1. Must: trial registry, before patient 1</a:t>
             </a:r>
           </a:p>
           <a:p>
@@ -26545,7 +26545,7 @@
                 <a:latin typeface="Century Gothic"/>
                 <a:cs typeface="Century Gothic"/>
               </a:rPr>
-              <a:t>2. Should - PROSPERO</a:t>
+              <a:t>2. Should: PROSPERO</a:t>
             </a:r>
           </a:p>
           <a:p>

--- a/en/files/slides/Session_7_EN.pptx
+++ b/en/files/slides/Session_7_EN.pptx
@@ -4480,7 +4480,7 @@
           <a:p>
             <a:r>
               <a:rPr lang="en-US" sz="1400" b="0" dirty="0"/>
-              <a:t>Tip for the appraisal after the break: the hourglass tells you where to look. PICO is in the last paragraph of the Introduction, design and outcome in the Methods, the main effect in the first paragraph of the Results, limitations near the end of the Discussion.</a:t>
+              <a:t>Tip for the appraisal in Session 8: the hourglass tells you where to look. PICO is in the last paragraph of the Introduction, design and outcome in the Methods, the main effect in the first paragraph of the Results, limitations near the end of the Discussion.</a:t>
             </a:r>
           </a:p>
           <a:p>
@@ -8269,8 +8269,8 @@
                 <a:solidFill>
                   <a:srgbClr val="0D7377"/>
                 </a:solidFill>
-                <a:latin typeface="Century Gothic"/>
-                <a:cs typeface="Century Gothic"/>
+                <a:latin typeface="Arial"/>
+                <a:cs typeface="Arial"/>
               </a:rPr>
               <a:t>Session 7 · Protect &amp; write: ethics, integrity, Methods and Results</a:t>
             </a:r>
@@ -8337,8 +8337,8 @@
                 <a:solidFill>
                   <a:srgbClr val="0070C0"/>
                 </a:solidFill>
-                <a:latin typeface="Century Gothic"/>
-                <a:cs typeface="Century Gothic"/>
+                <a:latin typeface="Arial"/>
+                <a:cs typeface="Arial"/>
               </a:rPr>
               <a:t>Week 7 · Saturday</a:t>
             </a:r>
@@ -8362,8 +8362,8 @@
                 <a:solidFill>
                   <a:srgbClr val="000000"/>
                 </a:solidFill>
-                <a:latin typeface="Century Gothic"/>
-                <a:cs typeface="Century Gothic"/>
+                <a:latin typeface="Arial"/>
+                <a:cs typeface="Arial"/>
               </a:rPr>
               <a:t>Recap quiz: Session 6</a:t>
             </a:r>
@@ -8381,8 +8381,8 @@
                 <a:solidFill>
                   <a:srgbClr val="000000"/>
                 </a:solidFill>
-                <a:latin typeface="Century Gothic"/>
-                <a:cs typeface="Century Gothic"/>
+                <a:latin typeface="Arial"/>
+                <a:cs typeface="Arial"/>
               </a:rPr>
               <a:t>7.1  Protocol, ethics, consent, registration, feasibility</a:t>
             </a:r>
@@ -8400,8 +8400,8 @@
                 <a:solidFill>
                   <a:srgbClr val="000000"/>
                 </a:solidFill>
-                <a:latin typeface="Century Gothic"/>
-                <a:cs typeface="Century Gothic"/>
+                <a:latin typeface="Arial"/>
+                <a:cs typeface="Arial"/>
               </a:rPr>
               <a:t>7.2  Research integrity: authorship, conflicts of interest, data sharing, AI</a:t>
             </a:r>
@@ -8419,8 +8419,8 @@
                 <a:solidFill>
                   <a:srgbClr val="000000"/>
                 </a:solidFill>
-                <a:latin typeface="Century Gothic"/>
-                <a:cs typeface="Century Gothic"/>
+                <a:latin typeface="Arial"/>
+                <a:cs typeface="Arial"/>
               </a:rPr>
               <a:t>Proposal builder 7: ethics + publication plan</a:t>
             </a:r>
@@ -8438,8 +8438,8 @@
                 <a:solidFill>
                   <a:srgbClr val="000000"/>
                 </a:solidFill>
-                <a:latin typeface="Century Gothic"/>
-                <a:cs typeface="Century Gothic"/>
+                <a:latin typeface="Arial"/>
+                <a:cs typeface="Arial"/>
               </a:rPr>
               <a:t>7.3  Writing the paper (I): Methods, Results, tables, STROBE</a:t>
             </a:r>
@@ -8457,8 +8457,8 @@
                 <a:solidFill>
                   <a:srgbClr val="000000"/>
                 </a:solidFill>
-                <a:latin typeface="Century Gothic"/>
-                <a:cs typeface="Century Gothic"/>
+                <a:latin typeface="Arial"/>
+                <a:cs typeface="Arial"/>
               </a:rPr>
               <a:t>Manuscript workshop 1: draft Methods + Results</a:t>
             </a:r>
@@ -8495,7 +8495,7 @@
                     <a:lumMod val="50000"/>
                   </a:schemeClr>
                 </a:solidFill>
-                <a:latin typeface="Verdana"/>
+                <a:latin typeface="Arial"/>
               </a:rPr>
               <a:t>Neudata | #ClearDataClearImpact</a:t>
             </a:r>
@@ -8625,8 +8625,8 @@
                 <a:solidFill>
                   <a:srgbClr val="0D7377"/>
                 </a:solidFill>
-                <a:latin typeface="Century Gothic"/>
-                <a:cs typeface="Century Gothic"/>
+                <a:latin typeface="Arial"/>
+                <a:cs typeface="Arial"/>
               </a:rPr>
               <a:t>Informed consent: four essentials</a:t>
             </a:r>
@@ -8692,8 +8692,8 @@
                 <a:solidFill>
                   <a:srgbClr val="595959"/>
                 </a:solidFill>
-                <a:latin typeface="Century Gothic"/>
-                <a:cs typeface="Century Gothic"/>
+                <a:latin typeface="Arial"/>
+                <a:cs typeface="Arial"/>
               </a:rPr>
               <a:t>Consent is a conversation, not a signature.</a:t>
             </a:r>
@@ -8735,8 +8735,8 @@
                 <a:solidFill>
                   <a:srgbClr val="FFFFFF"/>
                 </a:solidFill>
-                <a:latin typeface="Century Gothic"/>
-                <a:cs typeface="Century Gothic"/>
+                <a:latin typeface="Arial"/>
+                <a:cs typeface="Arial"/>
               </a:rPr>
               <a:t>Informed</a:t>
             </a:r>
@@ -8784,8 +8784,8 @@
                 <a:solidFill>
                   <a:srgbClr val="000000"/>
                 </a:solidFill>
-                <a:latin typeface="Century Gothic"/>
-                <a:cs typeface="Century Gothic"/>
+                <a:latin typeface="Arial"/>
+                <a:cs typeface="Arial"/>
               </a:rPr>
               <a:t>Purpose and what will happen</a:t>
             </a:r>
@@ -8805,8 +8805,8 @@
                 <a:solidFill>
                   <a:srgbClr val="000000"/>
                 </a:solidFill>
-                <a:latin typeface="Century Gothic"/>
-                <a:cs typeface="Century Gothic"/>
+                <a:latin typeface="Arial"/>
+                <a:cs typeface="Arial"/>
               </a:rPr>
               <a:t>Risks, benefits, alternatives</a:t>
             </a:r>
@@ -8826,8 +8826,8 @@
                 <a:solidFill>
                   <a:srgbClr val="000000"/>
                 </a:solidFill>
-                <a:latin typeface="Century Gothic"/>
-                <a:cs typeface="Century Gothic"/>
+                <a:latin typeface="Arial"/>
+                <a:cs typeface="Arial"/>
               </a:rPr>
               <a:t>How data are protected</a:t>
             </a:r>
@@ -8847,8 +8847,8 @@
                 <a:solidFill>
                   <a:srgbClr val="000000"/>
                 </a:solidFill>
-                <a:latin typeface="Century Gothic"/>
-                <a:cs typeface="Century Gothic"/>
+                <a:latin typeface="Arial"/>
+                <a:cs typeface="Arial"/>
               </a:rPr>
               <a:t>Who to contact</a:t>
             </a:r>
@@ -8890,8 +8890,8 @@
                 <a:solidFill>
                   <a:srgbClr val="FFFFFF"/>
                 </a:solidFill>
-                <a:latin typeface="Century Gothic"/>
-                <a:cs typeface="Century Gothic"/>
+                <a:latin typeface="Arial"/>
+                <a:cs typeface="Arial"/>
               </a:rPr>
               <a:t>Understood</a:t>
             </a:r>
@@ -8939,8 +8939,8 @@
                 <a:solidFill>
                   <a:srgbClr val="000000"/>
                 </a:solidFill>
-                <a:latin typeface="Century Gothic"/>
-                <a:cs typeface="Century Gothic"/>
+                <a:latin typeface="Arial"/>
+                <a:cs typeface="Arial"/>
               </a:rPr>
               <a:t>Plain, local language</a:t>
             </a:r>
@@ -8960,8 +8960,8 @@
                 <a:solidFill>
                   <a:srgbClr val="000000"/>
                 </a:solidFill>
-                <a:latin typeface="Century Gothic"/>
-                <a:cs typeface="Century Gothic"/>
+                <a:latin typeface="Arial"/>
+                <a:cs typeface="Arial"/>
               </a:rPr>
               <a:t>Time to ask questions</a:t>
             </a:r>
@@ -8981,8 +8981,8 @@
                 <a:solidFill>
                   <a:srgbClr val="000000"/>
                 </a:solidFill>
-                <a:latin typeface="Century Gothic"/>
-                <a:cs typeface="Century Gothic"/>
+                <a:latin typeface="Arial"/>
+                <a:cs typeface="Arial"/>
               </a:rPr>
               <a:t>Teach-back: 'tell me in your words'</a:t>
             </a:r>
@@ -9024,8 +9024,8 @@
                 <a:solidFill>
                   <a:srgbClr val="FFFFFF"/>
                 </a:solidFill>
-                <a:latin typeface="Century Gothic"/>
-                <a:cs typeface="Century Gothic"/>
+                <a:latin typeface="Arial"/>
+                <a:cs typeface="Arial"/>
               </a:rPr>
               <a:t>Voluntary</a:t>
             </a:r>
@@ -9073,8 +9073,8 @@
                 <a:solidFill>
                   <a:srgbClr val="000000"/>
                 </a:solidFill>
-                <a:latin typeface="Century Gothic"/>
-                <a:cs typeface="Century Gothic"/>
+                <a:latin typeface="Arial"/>
+                <a:cs typeface="Arial"/>
               </a:rPr>
               <a:t>No pressure</a:t>
             </a:r>
@@ -9094,8 +9094,8 @@
                 <a:solidFill>
                   <a:srgbClr val="000000"/>
                 </a:solidFill>
-                <a:latin typeface="Century Gothic"/>
-                <a:cs typeface="Century Gothic"/>
+                <a:latin typeface="Arial"/>
+                <a:cs typeface="Arial"/>
               </a:rPr>
               <a:t>Free to refuse or withdraw</a:t>
             </a:r>
@@ -9115,8 +9115,8 @@
                 <a:solidFill>
                   <a:srgbClr val="000000"/>
                 </a:solidFill>
-                <a:latin typeface="Century Gothic"/>
-                <a:cs typeface="Century Gothic"/>
+                <a:latin typeface="Arial"/>
+                <a:cs typeface="Arial"/>
               </a:rPr>
               <a:t>Care is NOT affected</a:t>
             </a:r>
@@ -9158,8 +9158,8 @@
                 <a:solidFill>
                   <a:srgbClr val="FFFFFF"/>
                 </a:solidFill>
-                <a:latin typeface="Century Gothic"/>
-                <a:cs typeface="Century Gothic"/>
+                <a:latin typeface="Arial"/>
+                <a:cs typeface="Arial"/>
               </a:rPr>
               <a:t>Documented</a:t>
             </a:r>
@@ -9207,8 +9207,8 @@
                 <a:solidFill>
                   <a:srgbClr val="000000"/>
                 </a:solidFill>
-                <a:latin typeface="Century Gothic"/>
-                <a:cs typeface="Century Gothic"/>
+                <a:latin typeface="Arial"/>
+                <a:cs typeface="Arial"/>
               </a:rPr>
               <a:t>Signed and dated form</a:t>
             </a:r>
@@ -9228,8 +9228,8 @@
                 <a:solidFill>
                   <a:srgbClr val="000000"/>
                 </a:solidFill>
-                <a:latin typeface="Century Gothic"/>
-                <a:cs typeface="Century Gothic"/>
+                <a:latin typeface="Arial"/>
+                <a:cs typeface="Arial"/>
               </a:rPr>
               <a:t>A copy for the participant</a:t>
             </a:r>
@@ -9249,8 +9249,8 @@
                 <a:solidFill>
                   <a:srgbClr val="000000"/>
                 </a:solidFill>
-                <a:latin typeface="Century Gothic"/>
-                <a:cs typeface="Century Gothic"/>
+                <a:latin typeface="Arial"/>
+                <a:cs typeface="Arial"/>
               </a:rPr>
               <a:t>Re-consent if the study changes</a:t>
             </a:r>
@@ -9294,8 +9294,8 @@
                 <a:solidFill>
                   <a:srgbClr val="FFFFFF"/>
                 </a:solidFill>
-                <a:latin typeface="Century Gothic"/>
-                <a:cs typeface="Century Gothic"/>
+                <a:latin typeface="Arial"/>
+                <a:cs typeface="Arial"/>
               </a:rPr>
               <a:t>KEY MESSAGE   </a:t>
             </a:r>
@@ -9304,8 +9304,8 @@
                 <a:solidFill>
                   <a:srgbClr val="FFFFFF"/>
                 </a:solidFill>
-                <a:latin typeface="Century Gothic"/>
-                <a:cs typeface="Century Gothic"/>
+                <a:latin typeface="Arial"/>
+                <a:cs typeface="Arial"/>
               </a:rPr>
               <a:t>If the patient cannot explain the study back to you, consent is not informed.</a:t>
             </a:r>
@@ -9342,7 +9342,7 @@
                     <a:lumMod val="50000"/>
                   </a:schemeClr>
                 </a:solidFill>
-                <a:latin typeface="Verdana"/>
+                <a:latin typeface="Arial"/>
               </a:rPr>
               <a:t>Neudata | #ClearDataClearImpact</a:t>
             </a:r>
@@ -9472,8 +9472,8 @@
                 <a:solidFill>
                   <a:srgbClr val="0D7377"/>
                 </a:solidFill>
-                <a:latin typeface="Century Gothic"/>
-                <a:cs typeface="Century Gothic"/>
+                <a:latin typeface="Arial"/>
+                <a:cs typeface="Arial"/>
               </a:rPr>
               <a:t>Consent in the ICU: when the patient cannot decide</a:t>
             </a:r>
@@ -9569,8 +9569,8 @@
                 <a:solidFill>
                   <a:srgbClr val="FFFFFF"/>
                 </a:solidFill>
-                <a:latin typeface="Century Gothic"/>
-                <a:cs typeface="Century Gothic"/>
+                <a:latin typeface="Arial"/>
+                <a:cs typeface="Arial"/>
               </a:rPr>
               <a:t>KEY MESSAGE   </a:t>
             </a:r>
@@ -9579,8 +9579,8 @@
                 <a:solidFill>
                   <a:srgbClr val="FFFFFF"/>
                 </a:solidFill>
-                <a:latin typeface="Century Gothic"/>
-                <a:cs typeface="Century Gothic"/>
+                <a:latin typeface="Arial"/>
+                <a:cs typeface="Arial"/>
               </a:rPr>
               <a:t>Patient, then legal representative, then deferred consent (only if approved).</a:t>
             </a:r>
@@ -9617,7 +9617,7 @@
                     <a:lumMod val="50000"/>
                   </a:schemeClr>
                 </a:solidFill>
-                <a:latin typeface="Verdana"/>
+                <a:latin typeface="Arial"/>
               </a:rPr>
               <a:t>Neudata | #ClearDataClearImpact</a:t>
             </a:r>
@@ -9747,8 +9747,8 @@
                 <a:solidFill>
                   <a:srgbClr val="0D7377"/>
                 </a:solidFill>
-                <a:latin typeface="Century Gothic"/>
-                <a:cs typeface="Century Gothic"/>
+                <a:latin typeface="Arial"/>
+                <a:cs typeface="Arial"/>
               </a:rPr>
               <a:t>Worked example: who consents for these three ICU patients?</a:t>
             </a:r>
@@ -9814,8 +9814,8 @@
                 <a:solidFill>
                   <a:srgbClr val="595959"/>
                 </a:solidFill>
-                <a:latin typeface="Century Gothic"/>
-                <a:cs typeface="Century Gothic"/>
+                <a:latin typeface="Arial"/>
+                <a:cs typeface="Arial"/>
               </a:rPr>
               <a:t>Walk each patient through the flowchart.</a:t>
             </a:r>
@@ -9857,8 +9857,8 @@
                 <a:solidFill>
                   <a:srgbClr val="FFFFFF"/>
                 </a:solidFill>
-                <a:latin typeface="Century Gothic"/>
-                <a:cs typeface="Century Gothic"/>
+                <a:latin typeface="Arial"/>
+                <a:cs typeface="Arial"/>
               </a:rPr>
               <a:t>Mr A, 54</a:t>
             </a:r>
@@ -9906,8 +9906,8 @@
                 <a:solidFill>
                   <a:srgbClr val="000000"/>
                 </a:solidFill>
-                <a:latin typeface="Century Gothic"/>
-                <a:cs typeface="Century Gothic"/>
+                <a:latin typeface="Arial"/>
+                <a:cs typeface="Arial"/>
               </a:rPr>
               <a:t>Pneumonia, awake, oriented</a:t>
             </a:r>
@@ -9927,8 +9927,8 @@
                 <a:solidFill>
                   <a:srgbClr val="000000"/>
                 </a:solidFill>
-                <a:latin typeface="Century Gothic"/>
-                <a:cs typeface="Century Gothic"/>
+                <a:latin typeface="Arial"/>
+                <a:cs typeface="Arial"/>
               </a:rPr>
               <a:t>Eligible for a fluid trial</a:t>
             </a:r>
@@ -9948,8 +9948,8 @@
                 <a:solidFill>
                   <a:srgbClr val="2E8B57"/>
                 </a:solidFill>
-                <a:latin typeface="Century Gothic"/>
-                <a:cs typeface="Century Gothic"/>
+                <a:latin typeface="Arial"/>
+                <a:cs typeface="Arial"/>
               </a:rPr>
               <a:t>Patient consents</a:t>
             </a:r>
@@ -9991,8 +9991,8 @@
                 <a:solidFill>
                   <a:srgbClr val="FFFFFF"/>
                 </a:solidFill>
-                <a:latin typeface="Century Gothic"/>
-                <a:cs typeface="Century Gothic"/>
+                <a:latin typeface="Arial"/>
+                <a:cs typeface="Arial"/>
               </a:rPr>
               <a:t>Mrs B, 71</a:t>
             </a:r>
@@ -10040,8 +10040,8 @@
                 <a:solidFill>
                   <a:srgbClr val="000000"/>
                 </a:solidFill>
-                <a:latin typeface="Century Gothic"/>
-                <a:cs typeface="Century Gothic"/>
+                <a:latin typeface="Arial"/>
+                <a:cs typeface="Arial"/>
               </a:rPr>
               <a:t>Septic shock, sedated</a:t>
             </a:r>
@@ -10061,8 +10061,8 @@
                 <a:solidFill>
                   <a:srgbClr val="000000"/>
                 </a:solidFill>
-                <a:latin typeface="Century Gothic"/>
-                <a:cs typeface="Century Gothic"/>
+                <a:latin typeface="Arial"/>
+                <a:cs typeface="Arial"/>
               </a:rPr>
               <a:t>Daughter at the bedside</a:t>
             </a:r>
@@ -10082,8 +10082,8 @@
                 <a:solidFill>
                   <a:srgbClr val="2E8B57"/>
                 </a:solidFill>
-                <a:latin typeface="Century Gothic"/>
-                <a:cs typeface="Century Gothic"/>
+                <a:latin typeface="Arial"/>
+                <a:cs typeface="Arial"/>
               </a:rPr>
               <a:t>Representative consents; ask Mrs B when awake</a:t>
             </a:r>
@@ -10125,8 +10125,8 @@
                 <a:solidFill>
                   <a:srgbClr val="FFFFFF"/>
                 </a:solidFill>
-                <a:latin typeface="Century Gothic"/>
-                <a:cs typeface="Century Gothic"/>
+                <a:latin typeface="Arial"/>
+                <a:cs typeface="Arial"/>
               </a:rPr>
               <a:t>Mr C, 38</a:t>
             </a:r>
@@ -10174,8 +10174,8 @@
                 <a:solidFill>
                   <a:srgbClr val="000000"/>
                 </a:solidFill>
-                <a:latin typeface="Century Gothic"/>
-                <a:cs typeface="Century Gothic"/>
+                <a:latin typeface="Arial"/>
+                <a:cs typeface="Arial"/>
               </a:rPr>
               <a:t>Shock at 03:00, no family yet</a:t>
             </a:r>
@@ -10195,8 +10195,8 @@
                 <a:solidFill>
                   <a:srgbClr val="000000"/>
                 </a:solidFill>
-                <a:latin typeface="Century Gothic"/>
-                <a:cs typeface="Century Gothic"/>
+                <a:latin typeface="Arial"/>
+                <a:cs typeface="Arial"/>
               </a:rPr>
               <a:t>Treatment cannot wait; committee approved</a:t>
             </a:r>
@@ -10216,8 +10216,8 @@
                 <a:solidFill>
                   <a:srgbClr val="D9822B"/>
                 </a:solidFill>
-                <a:latin typeface="Century Gothic"/>
-                <a:cs typeface="Century Gothic"/>
+                <a:latin typeface="Arial"/>
+                <a:cs typeface="Arial"/>
               </a:rPr>
               <a:t>Deferred consent: ask ASAP</a:t>
             </a:r>
@@ -10261,8 +10261,8 @@
                 <a:solidFill>
                   <a:srgbClr val="FFFFFF"/>
                 </a:solidFill>
-                <a:latin typeface="Century Gothic"/>
-                <a:cs typeface="Century Gothic"/>
+                <a:latin typeface="Arial"/>
+                <a:cs typeface="Arial"/>
               </a:rPr>
               <a:t>KEY MESSAGE   </a:t>
             </a:r>
@@ -10271,8 +10271,8 @@
                 <a:solidFill>
                   <a:srgbClr val="FFFFFF"/>
                 </a:solidFill>
-                <a:latin typeface="Century Gothic"/>
-                <a:cs typeface="Century Gothic"/>
+                <a:latin typeface="Arial"/>
+                <a:cs typeface="Arial"/>
               </a:rPr>
               <a:t>The pathway and the timing are written in the protocol before patient 1.</a:t>
             </a:r>
@@ -10309,7 +10309,7 @@
                     <a:lumMod val="50000"/>
                   </a:schemeClr>
                 </a:solidFill>
-                <a:latin typeface="Verdana"/>
+                <a:latin typeface="Arial"/>
               </a:rPr>
               <a:t>Neudata | #ClearDataClearImpact</a:t>
             </a:r>
@@ -10439,8 +10439,8 @@
                 <a:solidFill>
                   <a:srgbClr val="0D7377"/>
                 </a:solidFill>
-                <a:latin typeface="Century Gothic"/>
-                <a:cs typeface="Century Gothic"/>
+                <a:latin typeface="Arial"/>
+                <a:cs typeface="Arial"/>
               </a:rPr>
               <a:t>Confidentiality: de-identify before you analyse</a:t>
             </a:r>
@@ -10536,8 +10536,8 @@
                 <a:solidFill>
                   <a:srgbClr val="FFFFFF"/>
                 </a:solidFill>
-                <a:latin typeface="Century Gothic"/>
-                <a:cs typeface="Century Gothic"/>
+                <a:latin typeface="Arial"/>
+                <a:cs typeface="Arial"/>
               </a:rPr>
               <a:t>KEY MESSAGE   </a:t>
             </a:r>
@@ -10546,8 +10546,8 @@
                 <a:solidFill>
                   <a:srgbClr val="FFFFFF"/>
                 </a:solidFill>
-                <a:latin typeface="Century Gothic"/>
-                <a:cs typeface="Century Gothic"/>
+                <a:latin typeface="Arial"/>
+                <a:cs typeface="Arial"/>
               </a:rPr>
               <a:t>Names stay on the ward; only study codes travel.</a:t>
             </a:r>
@@ -10584,7 +10584,7 @@
                     <a:lumMod val="50000"/>
                   </a:schemeClr>
                 </a:solidFill>
-                <a:latin typeface="Verdana"/>
+                <a:latin typeface="Arial"/>
               </a:rPr>
               <a:t>Neudata | #ClearDataClearImpact</a:t>
             </a:r>
@@ -10714,8 +10714,8 @@
                 <a:solidFill>
                   <a:srgbClr val="0D7377"/>
                 </a:solidFill>
-                <a:latin typeface="Century Gothic"/>
-                <a:cs typeface="Century Gothic"/>
+                <a:latin typeface="Arial"/>
+                <a:cs typeface="Arial"/>
               </a:rPr>
               <a:t>Worked example: the ethics paragraph for a cohort like FLUID-ICU</a:t>
             </a:r>
@@ -10781,8 +10781,8 @@
                 <a:solidFill>
                   <a:srgbClr val="595959"/>
                 </a:solidFill>
-                <a:latin typeface="Century Gothic"/>
-                <a:cs typeface="Century Gothic"/>
+                <a:latin typeface="Arial"/>
+                <a:cs typeface="Arial"/>
               </a:rPr>
               <a:t>FLUID-ICU is simulated. If it were real, this is what the paper would say.</a:t>
             </a:r>
@@ -10824,8 +10824,8 @@
                 <a:solidFill>
                   <a:srgbClr val="FFFFFF"/>
                 </a:solidFill>
-                <a:latin typeface="Century Gothic"/>
-                <a:cs typeface="Century Gothic"/>
+                <a:latin typeface="Arial"/>
+                <a:cs typeface="Arial"/>
               </a:rPr>
               <a:t>Approval</a:t>
             </a:r>
@@ -10873,8 +10873,8 @@
                 <a:solidFill>
                   <a:srgbClr val="000000"/>
                 </a:solidFill>
-                <a:latin typeface="Century Gothic"/>
-                <a:cs typeface="Century Gothic"/>
+                <a:latin typeface="Arial"/>
+                <a:cs typeface="Arial"/>
               </a:rPr>
               <a:t>Ethics committee of each ICU</a:t>
             </a:r>
@@ -10894,8 +10894,8 @@
                 <a:solidFill>
                   <a:srgbClr val="000000"/>
                 </a:solidFill>
-                <a:latin typeface="Century Gothic"/>
-                <a:cs typeface="Century Gothic"/>
+                <a:latin typeface="Arial"/>
+                <a:cs typeface="Arial"/>
               </a:rPr>
               <a:t>Approval number + date</a:t>
             </a:r>
@@ -10915,8 +10915,8 @@
                 <a:solidFill>
                   <a:srgbClr val="000000"/>
                 </a:solidFill>
-                <a:latin typeface="Century Gothic"/>
-                <a:cs typeface="Century Gothic"/>
+                <a:latin typeface="Arial"/>
+                <a:cs typeface="Arial"/>
               </a:rPr>
               <a:t>Before data collection</a:t>
             </a:r>
@@ -10958,8 +10958,8 @@
                 <a:solidFill>
                   <a:srgbClr val="FFFFFF"/>
                 </a:solidFill>
-                <a:latin typeface="Century Gothic"/>
-                <a:cs typeface="Century Gothic"/>
+                <a:latin typeface="Arial"/>
+                <a:cs typeface="Arial"/>
               </a:rPr>
               <a:t>Consent</a:t>
             </a:r>
@@ -11007,8 +11007,8 @@
                 <a:solidFill>
                   <a:srgbClr val="000000"/>
                 </a:solidFill>
-                <a:latin typeface="Century Gothic"/>
-                <a:cs typeface="Century Gothic"/>
+                <a:latin typeface="Arial"/>
+                <a:cs typeface="Arial"/>
               </a:rPr>
               <a:t>Routine data, minimal risk</a:t>
             </a:r>
@@ -11028,8 +11028,8 @@
                 <a:solidFill>
                   <a:srgbClr val="000000"/>
                 </a:solidFill>
-                <a:latin typeface="Century Gothic"/>
-                <a:cs typeface="Century Gothic"/>
+                <a:latin typeface="Arial"/>
+                <a:cs typeface="Arial"/>
               </a:rPr>
               <a:t>Committee may WAIVE consent</a:t>
             </a:r>
@@ -11049,8 +11049,8 @@
                 <a:solidFill>
                   <a:srgbClr val="000000"/>
                 </a:solidFill>
-                <a:latin typeface="Century Gothic"/>
-                <a:cs typeface="Century Gothic"/>
+                <a:latin typeface="Arial"/>
+                <a:cs typeface="Arial"/>
               </a:rPr>
               <a:t>(as in Paper 2)</a:t>
             </a:r>
@@ -11092,8 +11092,8 @@
                 <a:solidFill>
                   <a:srgbClr val="FFFFFF"/>
                 </a:solidFill>
-                <a:latin typeface="Century Gothic"/>
-                <a:cs typeface="Century Gothic"/>
+                <a:latin typeface="Arial"/>
+                <a:cs typeface="Arial"/>
               </a:rPr>
               <a:t>Confidentiality</a:t>
             </a:r>
@@ -11141,8 +11141,8 @@
                 <a:solidFill>
                   <a:srgbClr val="000000"/>
                 </a:solidFill>
-                <a:latin typeface="Century Gothic"/>
-                <a:cs typeface="Century Gothic"/>
+                <a:latin typeface="Arial"/>
+                <a:cs typeface="Arial"/>
               </a:rPr>
               <a:t>Study codes only</a:t>
             </a:r>
@@ -11162,8 +11162,8 @@
                 <a:solidFill>
                   <a:srgbClr val="000000"/>
                 </a:solidFill>
-                <a:latin typeface="Century Gothic"/>
-                <a:cs typeface="Century Gothic"/>
+                <a:latin typeface="Arial"/>
+                <a:cs typeface="Arial"/>
               </a:rPr>
               <a:t>Key file kept in each ICU</a:t>
             </a:r>
@@ -11183,8 +11183,8 @@
                 <a:solidFill>
                   <a:srgbClr val="000000"/>
                 </a:solidFill>
-                <a:latin typeface="Century Gothic"/>
-                <a:cs typeface="Century Gothic"/>
+                <a:latin typeface="Arial"/>
+                <a:cs typeface="Arial"/>
               </a:rPr>
               <a:t>Data de-identified before analysis</a:t>
             </a:r>
@@ -11226,8 +11226,8 @@
                 <a:solidFill>
                   <a:srgbClr val="FFFFFF"/>
                 </a:solidFill>
-                <a:latin typeface="Century Gothic"/>
-                <a:cs typeface="Century Gothic"/>
+                <a:latin typeface="Arial"/>
+                <a:cs typeface="Arial"/>
               </a:rPr>
               <a:t>Registration &amp; sharing</a:t>
             </a:r>
@@ -11275,8 +11275,8 @@
                 <a:solidFill>
                   <a:srgbClr val="000000"/>
                 </a:solidFill>
-                <a:latin typeface="Century Gothic"/>
-                <a:cs typeface="Century Gothic"/>
+                <a:latin typeface="Arial"/>
+                <a:cs typeface="Arial"/>
               </a:rPr>
               <a:t>Registration recommended</a:t>
             </a:r>
@@ -11296,8 +11296,8 @@
                 <a:solidFill>
                   <a:srgbClr val="000000"/>
                 </a:solidFill>
-                <a:latin typeface="Century Gothic"/>
-                <a:cs typeface="Century Gothic"/>
+                <a:latin typeface="Arial"/>
+                <a:cs typeface="Arial"/>
               </a:rPr>
               <a:t>Data-sharing statement</a:t>
             </a:r>
@@ -11317,8 +11317,8 @@
                 <a:solidFill>
                   <a:srgbClr val="000000"/>
                 </a:solidFill>
-                <a:latin typeface="Century Gothic"/>
-                <a:cs typeface="Century Gothic"/>
+                <a:latin typeface="Arial"/>
+                <a:cs typeface="Arial"/>
               </a:rPr>
               <a:t>Data dictionary shared</a:t>
             </a:r>
@@ -11362,8 +11362,8 @@
                 <a:solidFill>
                   <a:srgbClr val="FFFFFF"/>
                 </a:solidFill>
-                <a:latin typeface="Century Gothic"/>
-                <a:cs typeface="Century Gothic"/>
+                <a:latin typeface="Arial"/>
+                <a:cs typeface="Arial"/>
               </a:rPr>
               <a:t>KEY MESSAGE   </a:t>
             </a:r>
@@ -11372,8 +11372,8 @@
                 <a:solidFill>
                   <a:srgbClr val="FFFFFF"/>
                 </a:solidFill>
-                <a:latin typeface="Century Gothic"/>
-                <a:cs typeface="Century Gothic"/>
+                <a:latin typeface="Arial"/>
+                <a:cs typeface="Arial"/>
               </a:rPr>
               <a:t>Your manuscript's ethics paragraph answers four questions in four sentences.</a:t>
             </a:r>
@@ -11410,7 +11410,7 @@
                     <a:lumMod val="50000"/>
                   </a:schemeClr>
                 </a:solidFill>
-                <a:latin typeface="Verdana"/>
+                <a:latin typeface="Arial"/>
               </a:rPr>
               <a:t>Neudata | #ClearDataClearImpact</a:t>
             </a:r>
@@ -11540,8 +11540,8 @@
                 <a:solidFill>
                   <a:srgbClr val="0D7377"/>
                 </a:solidFill>
-                <a:latin typeface="Century Gothic"/>
-                <a:cs typeface="Century Gothic"/>
+                <a:latin typeface="Arial"/>
+                <a:cs typeface="Arial"/>
               </a:rPr>
               <a:t>Feasibility in one picture: five honest questions</a:t>
             </a:r>
@@ -11637,8 +11637,8 @@
                 <a:solidFill>
                   <a:srgbClr val="FFFFFF"/>
                 </a:solidFill>
-                <a:latin typeface="Century Gothic"/>
-                <a:cs typeface="Century Gothic"/>
+                <a:latin typeface="Arial"/>
+                <a:cs typeface="Arial"/>
               </a:rPr>
               <a:t>KEY MESSAGE   </a:t>
             </a:r>
@@ -11647,8 +11647,8 @@
                 <a:solidFill>
                   <a:srgbClr val="FFFFFF"/>
                 </a:solidFill>
-                <a:latin typeface="Century Gothic"/>
-                <a:cs typeface="Century Gothic"/>
+                <a:latin typeface="Arial"/>
+                <a:cs typeface="Arial"/>
               </a:rPr>
               <a:t>Count the eligible patients in your unit BEFORE you write the sample size.</a:t>
             </a:r>
@@ -11685,7 +11685,7 @@
                     <a:lumMod val="50000"/>
                   </a:schemeClr>
                 </a:solidFill>
-                <a:latin typeface="Verdana"/>
+                <a:latin typeface="Arial"/>
               </a:rPr>
               <a:t>Neudata | #ClearDataClearImpact</a:t>
             </a:r>
@@ -11815,8 +11815,8 @@
                 <a:solidFill>
                   <a:srgbClr val="0D7377"/>
                 </a:solidFill>
-                <a:latin typeface="Century Gothic"/>
-                <a:cs typeface="Century Gothic"/>
+                <a:latin typeface="Arial"/>
+                <a:cs typeface="Arial"/>
               </a:rPr>
               <a:t>7.2  |  20 minutes</a:t>
             </a:r>
@@ -11885,8 +11885,8 @@
                 <a:solidFill>
                   <a:srgbClr val="0D7377"/>
                 </a:solidFill>
-                <a:latin typeface="Century Gothic"/>
-                <a:cs typeface="Century Gothic"/>
+                <a:latin typeface="Arial"/>
+                <a:cs typeface="Arial"/>
               </a:rPr>
               <a:t>Research integrity</a:t>
             </a:r>
@@ -11903,8 +11903,8 @@
                 <a:solidFill>
                   <a:srgbClr val="595959"/>
                 </a:solidFill>
-                <a:latin typeface="Century Gothic"/>
-                <a:cs typeface="Century Gothic"/>
+                <a:latin typeface="Arial"/>
+                <a:cs typeface="Arial"/>
               </a:rPr>
               <a:t>Honest data, honest credit, honest use of AI</a:t>
             </a:r>
@@ -11941,7 +11941,7 @@
                     <a:lumMod val="50000"/>
                   </a:schemeClr>
                 </a:solidFill>
-                <a:latin typeface="Verdana"/>
+                <a:latin typeface="Arial"/>
               </a:rPr>
               <a:t>Neudata | #ClearDataClearImpact</a:t>
             </a:r>
@@ -12071,8 +12071,8 @@
                 <a:solidFill>
                   <a:srgbClr val="0D7377"/>
                 </a:solidFill>
-                <a:latin typeface="Century Gothic"/>
-                <a:cs typeface="Century Gothic"/>
+                <a:latin typeface="Arial"/>
+                <a:cs typeface="Arial"/>
               </a:rPr>
               <a:t>Research misconduct: fabrication, falsification, plagiarism</a:t>
             </a:r>
@@ -12168,8 +12168,8 @@
                 <a:solidFill>
                   <a:srgbClr val="FFFFFF"/>
                 </a:solidFill>
-                <a:latin typeface="Century Gothic"/>
-                <a:cs typeface="Century Gothic"/>
+                <a:latin typeface="Arial"/>
+                <a:cs typeface="Arial"/>
               </a:rPr>
               <a:t>KEY MESSAGE   </a:t>
             </a:r>
@@ -12178,8 +12178,8 @@
                 <a:solidFill>
                   <a:srgbClr val="FFFFFF"/>
                 </a:solidFill>
-                <a:latin typeface="Century Gothic"/>
-                <a:cs typeface="Century Gothic"/>
+                <a:latin typeface="Arial"/>
+                <a:cs typeface="Arial"/>
               </a:rPr>
               <a:t>Missing data are reported as missing: never invented, never quietly removed.</a:t>
             </a:r>
@@ -12216,7 +12216,7 @@
                     <a:lumMod val="50000"/>
                   </a:schemeClr>
                 </a:solidFill>
-                <a:latin typeface="Verdana"/>
+                <a:latin typeface="Arial"/>
               </a:rPr>
               <a:t>Neudata | #ClearDataClearImpact</a:t>
             </a:r>
@@ -12346,8 +12346,8 @@
                 <a:solidFill>
                   <a:srgbClr val="0D7377"/>
                 </a:solidFill>
-                <a:latin typeface="Century Gothic"/>
-                <a:cs typeface="Century Gothic"/>
+                <a:latin typeface="Arial"/>
+                <a:cs typeface="Arial"/>
               </a:rPr>
               <a:t>Also off-limits: tricks that distort the record</a:t>
             </a:r>
@@ -12413,8 +12413,8 @@
                 <a:solidFill>
                   <a:srgbClr val="595959"/>
                 </a:solidFill>
-                <a:latin typeface="Century Gothic"/>
-                <a:cs typeface="Century Gothic"/>
+                <a:latin typeface="Arial"/>
+                <a:cs typeface="Arial"/>
               </a:rPr>
               <a:t>One study should tell one complete, honest story.</a:t>
             </a:r>
@@ -12456,8 +12456,8 @@
                 <a:solidFill>
                   <a:srgbClr val="FFFFFF"/>
                 </a:solidFill>
-                <a:latin typeface="Century Gothic"/>
-                <a:cs typeface="Century Gothic"/>
+                <a:latin typeface="Arial"/>
+                <a:cs typeface="Arial"/>
               </a:rPr>
               <a:t>Duplicate publication</a:t>
             </a:r>
@@ -12505,8 +12505,8 @@
                 <a:solidFill>
                   <a:srgbClr val="000000"/>
                 </a:solidFill>
-                <a:latin typeface="Century Gothic"/>
-                <a:cs typeface="Century Gothic"/>
+                <a:latin typeface="Arial"/>
+                <a:cs typeface="Arial"/>
               </a:rPr>
               <a:t>Same study, same results</a:t>
             </a:r>
@@ -12526,8 +12526,8 @@
                 <a:solidFill>
                   <a:srgbClr val="000000"/>
                 </a:solidFill>
-                <a:latin typeface="Century Gothic"/>
-                <a:cs typeface="Century Gothic"/>
+                <a:latin typeface="Arial"/>
+                <a:cs typeface="Arial"/>
               </a:rPr>
               <a:t>in a second journal</a:t>
             </a:r>
@@ -12547,8 +12547,8 @@
                 <a:solidFill>
                   <a:srgbClr val="000000"/>
                 </a:solidFill>
-                <a:latin typeface="Century Gothic"/>
-                <a:cs typeface="Century Gothic"/>
+                <a:latin typeface="Arial"/>
+                <a:cs typeface="Arial"/>
               </a:rPr>
               <a:t>without saying so</a:t>
             </a:r>
@@ -12590,8 +12590,8 @@
                 <a:solidFill>
                   <a:srgbClr val="FFFFFF"/>
                 </a:solidFill>
-                <a:latin typeface="Century Gothic"/>
-                <a:cs typeface="Century Gothic"/>
+                <a:latin typeface="Arial"/>
+                <a:cs typeface="Arial"/>
               </a:rPr>
               <a:t>Salami slicing</a:t>
             </a:r>
@@ -12639,8 +12639,8 @@
                 <a:solidFill>
                   <a:srgbClr val="000000"/>
                 </a:solidFill>
-                <a:latin typeface="Century Gothic"/>
-                <a:cs typeface="Century Gothic"/>
+                <a:latin typeface="Arial"/>
+                <a:cs typeface="Arial"/>
               </a:rPr>
               <a:t>One study cut into thin papers</a:t>
             </a:r>
@@ -12660,8 +12660,8 @@
                 <a:solidFill>
                   <a:srgbClr val="000000"/>
                 </a:solidFill>
-                <a:latin typeface="Century Gothic"/>
-                <a:cs typeface="Century Gothic"/>
+                <a:latin typeface="Arial"/>
+                <a:cs typeface="Arial"/>
               </a:rPr>
               <a:t>to multiply publications</a:t>
             </a:r>
@@ -12681,8 +12681,8 @@
                 <a:solidFill>
                   <a:srgbClr val="000000"/>
                 </a:solidFill>
-                <a:latin typeface="Century Gothic"/>
-                <a:cs typeface="Century Gothic"/>
+                <a:latin typeface="Arial"/>
+                <a:cs typeface="Arial"/>
               </a:rPr>
               <a:t>Reader never sees the whole</a:t>
             </a:r>
@@ -12724,8 +12724,8 @@
                 <a:solidFill>
                   <a:srgbClr val="FFFFFF"/>
                 </a:solidFill>
-                <a:latin typeface="Century Gothic"/>
-                <a:cs typeface="Century Gothic"/>
+                <a:latin typeface="Arial"/>
+                <a:cs typeface="Arial"/>
               </a:rPr>
               <a:t>Selective reporting</a:t>
             </a:r>
@@ -12773,8 +12773,8 @@
                 <a:solidFill>
                   <a:srgbClr val="000000"/>
                 </a:solidFill>
-                <a:latin typeface="Century Gothic"/>
-                <a:cs typeface="Century Gothic"/>
+                <a:latin typeface="Arial"/>
+                <a:cs typeface="Arial"/>
               </a:rPr>
               <a:t>Only the 'significant' outcomes</a:t>
             </a:r>
@@ -12794,8 +12794,8 @@
                 <a:solidFill>
                   <a:srgbClr val="000000"/>
                 </a:solidFill>
-                <a:latin typeface="Century Gothic"/>
-                <a:cs typeface="Century Gothic"/>
+                <a:latin typeface="Arial"/>
+                <a:cs typeface="Arial"/>
               </a:rPr>
               <a:t>Primary outcome switched</a:t>
             </a:r>
@@ -12815,8 +12815,8 @@
                 <a:solidFill>
                   <a:srgbClr val="000000"/>
                 </a:solidFill>
-                <a:latin typeface="Century Gothic"/>
-                <a:cs typeface="Century Gothic"/>
+                <a:latin typeface="Arial"/>
+                <a:cs typeface="Arial"/>
               </a:rPr>
               <a:t>after seeing the data</a:t>
             </a:r>
@@ -12860,8 +12860,8 @@
                 <a:solidFill>
                   <a:srgbClr val="FFFFFF"/>
                 </a:solidFill>
-                <a:latin typeface="Century Gothic"/>
-                <a:cs typeface="Century Gothic"/>
+                <a:latin typeface="Arial"/>
+                <a:cs typeface="Arial"/>
               </a:rPr>
               <a:t>KEY MESSAGE   </a:t>
             </a:r>
@@ -12870,8 +12870,8 @@
                 <a:solidFill>
                   <a:srgbClr val="FFFFFF"/>
                 </a:solidFill>
-                <a:latin typeface="Century Gothic"/>
-                <a:cs typeface="Century Gothic"/>
+                <a:latin typeface="Arial"/>
+                <a:cs typeface="Arial"/>
               </a:rPr>
               <a:t>Register first, pre-specify the primary outcome, report all of it.</a:t>
             </a:r>
@@ -12908,7 +12908,7 @@
                     <a:lumMod val="50000"/>
                   </a:schemeClr>
                 </a:solidFill>
-                <a:latin typeface="Verdana"/>
+                <a:latin typeface="Arial"/>
               </a:rPr>
               <a:t>Neudata | #ClearDataClearImpact</a:t>
             </a:r>
@@ -13038,8 +13038,8 @@
                 <a:solidFill>
                   <a:srgbClr val="0D7377"/>
                 </a:solidFill>
-                <a:latin typeface="Century Gothic"/>
-                <a:cs typeface="Century Gothic"/>
+                <a:latin typeface="Arial"/>
+                <a:cs typeface="Arial"/>
               </a:rPr>
               <a:t>Who is an author? The four ICMJE criteria</a:t>
             </a:r>
@@ -13135,8 +13135,8 @@
                 <a:solidFill>
                   <a:srgbClr val="FFFFFF"/>
                 </a:solidFill>
-                <a:latin typeface="Century Gothic"/>
-                <a:cs typeface="Century Gothic"/>
+                <a:latin typeface="Arial"/>
+                <a:cs typeface="Arial"/>
               </a:rPr>
               <a:t>KEY MESSAGE   </a:t>
             </a:r>
@@ -13145,8 +13145,8 @@
                 <a:solidFill>
                   <a:srgbClr val="FFFFFF"/>
                 </a:solidFill>
-                <a:latin typeface="Century Gothic"/>
-                <a:cs typeface="Century Gothic"/>
+                <a:latin typeface="Arial"/>
+                <a:cs typeface="Arial"/>
               </a:rPr>
               <a:t>All four criteria, for every author. Decide the list at the start.</a:t>
             </a:r>
@@ -13183,7 +13183,7 @@
                     <a:lumMod val="50000"/>
                   </a:schemeClr>
                 </a:solidFill>
-                <a:latin typeface="Verdana"/>
+                <a:latin typeface="Arial"/>
               </a:rPr>
               <a:t>Neudata | #ClearDataClearImpact</a:t>
             </a:r>
@@ -13313,8 +13313,8 @@
                 <a:solidFill>
                   <a:srgbClr val="0D7377"/>
                 </a:solidFill>
-                <a:latin typeface="Century Gothic"/>
-                <a:cs typeface="Century Gothic"/>
+                <a:latin typeface="Arial"/>
+                <a:cs typeface="Arial"/>
               </a:rPr>
               <a:t>Recap quiz: Session 6 in five questions</a:t>
             </a:r>
@@ -13384,8 +13384,8 @@
                 <a:solidFill>
                   <a:srgbClr val="FFFFFF"/>
                 </a:solidFill>
-                <a:latin typeface="Century Gothic"/>
-                <a:cs typeface="Century Gothic"/>
+                <a:latin typeface="Arial"/>
+                <a:cs typeface="Arial"/>
               </a:rPr>
               <a:t>QUICK QUIZ   |   10 min</a:t>
             </a:r>
@@ -13422,25 +13422,19 @@
               <a:spcBef>
                 <a:spcPts val="450"/>
               </a:spcBef>
-              <a:buNone/>
-            </a:pPr>
-            <a:r>
-              <a:rPr lang="en-US" sz="1650" b="1" dirty="0">
-                <a:solidFill>
-                  <a:srgbClr val="6C3483"/>
-                </a:solidFill>
-                <a:latin typeface="Century Gothic"/>
-                <a:cs typeface="Century Gothic"/>
-              </a:rPr>
-              <a:t>1.  </a:t>
-            </a:r>
+              <a:buClr>
+                <a:srgbClr val="6C3483"/>
+              </a:buClr>
+              <a:buFont typeface="Arial"/>
+              <a:buChar char="•"/>
+            </a:pPr>
             <a:r>
               <a:rPr lang="en-US" sz="1650" dirty="0">
                 <a:solidFill>
                   <a:srgbClr val="000000"/>
                 </a:solidFill>
-                <a:latin typeface="Century Gothic"/>
-                <a:cs typeface="Century Gothic"/>
+                <a:latin typeface="Arial"/>
+                <a:cs typeface="Arial"/>
               </a:rPr>
               <a:t>A crude OR is 2.1; the adjusted OR is 1.4. What happened?</a:t>
             </a:r>
@@ -13453,25 +13447,19 @@
               <a:spcBef>
                 <a:spcPts val="450"/>
               </a:spcBef>
-              <a:buNone/>
-            </a:pPr>
-            <a:r>
-              <a:rPr lang="en-US" sz="1650" b="1" dirty="0">
-                <a:solidFill>
-                  <a:srgbClr val="6C3483"/>
-                </a:solidFill>
-                <a:latin typeface="Century Gothic"/>
-                <a:cs typeface="Century Gothic"/>
-              </a:rPr>
-              <a:t>2.  </a:t>
-            </a:r>
+              <a:buClr>
+                <a:srgbClr val="6C3483"/>
+              </a:buClr>
+              <a:buFont typeface="Arial"/>
+              <a:buChar char="•"/>
+            </a:pPr>
             <a:r>
               <a:rPr lang="en-US" sz="1650" dirty="0">
                 <a:solidFill>
                   <a:srgbClr val="000000"/>
                 </a:solidFill>
-                <a:latin typeface="Century Gothic"/>
-                <a:cs typeface="Century Gothic"/>
+                <a:latin typeface="Arial"/>
+                <a:cs typeface="Arial"/>
               </a:rPr>
               <a:t>HR 0.85 (95% CI 0.60 to 1.20): clear benefit?</a:t>
             </a:r>
@@ -13484,25 +13472,19 @@
               <a:spcBef>
                 <a:spcPts val="450"/>
               </a:spcBef>
-              <a:buNone/>
-            </a:pPr>
-            <a:r>
-              <a:rPr lang="en-US" sz="1650" b="1" dirty="0">
-                <a:solidFill>
-                  <a:srgbClr val="6C3483"/>
-                </a:solidFill>
-                <a:latin typeface="Century Gothic"/>
-                <a:cs typeface="Century Gothic"/>
-              </a:rPr>
-              <a:t>3.  </a:t>
-            </a:r>
+              <a:buClr>
+                <a:srgbClr val="6C3483"/>
+              </a:buClr>
+              <a:buFont typeface="Arial"/>
+              <a:buChar char="•"/>
+            </a:pPr>
             <a:r>
               <a:rPr lang="en-US" sz="1650" dirty="0">
                 <a:solidFill>
                   <a:srgbClr val="000000"/>
                 </a:solidFill>
-                <a:latin typeface="Century Gothic"/>
-                <a:cs typeface="Century Gothic"/>
+                <a:latin typeface="Arial"/>
+                <a:cs typeface="Arial"/>
               </a:rPr>
               <a:t>Lactate is missing for 15% of patients. Name one way to handle it</a:t>
             </a:r>
@@ -13515,25 +13497,19 @@
               <a:spcBef>
                 <a:spcPts val="450"/>
               </a:spcBef>
-              <a:buNone/>
-            </a:pPr>
-            <a:r>
-              <a:rPr lang="en-US" sz="1650" b="1" dirty="0">
-                <a:solidFill>
-                  <a:srgbClr val="6C3483"/>
-                </a:solidFill>
-                <a:latin typeface="Century Gothic"/>
-                <a:cs typeface="Century Gothic"/>
-              </a:rPr>
-              <a:t>4.  </a:t>
-            </a:r>
+              <a:buClr>
+                <a:srgbClr val="6C3483"/>
+              </a:buClr>
+              <a:buFont typeface="Arial"/>
+              <a:buChar char="•"/>
+            </a:pPr>
             <a:r>
               <a:rPr lang="en-US" sz="1650" dirty="0">
                 <a:solidFill>
                   <a:srgbClr val="000000"/>
                 </a:solidFill>
-                <a:latin typeface="Century Gothic"/>
-                <a:cs typeface="Century Gothic"/>
+                <a:latin typeface="Arial"/>
+                <a:cs typeface="Arial"/>
               </a:rPr>
               <a:t>Kaplan-Meier: what does a 'censored' patient mean?</a:t>
             </a:r>
@@ -13546,25 +13522,19 @@
               <a:spcBef>
                 <a:spcPts val="450"/>
               </a:spcBef>
-              <a:buNone/>
-            </a:pPr>
-            <a:r>
-              <a:rPr lang="en-US" sz="1650" b="1" dirty="0">
-                <a:solidFill>
-                  <a:srgbClr val="6C3483"/>
-                </a:solidFill>
-                <a:latin typeface="Century Gothic"/>
-                <a:cs typeface="Century Gothic"/>
-              </a:rPr>
-              <a:t>5.  </a:t>
-            </a:r>
+              <a:buClr>
+                <a:srgbClr val="6C3483"/>
+              </a:buClr>
+              <a:buFont typeface="Arial"/>
+              <a:buChar char="•"/>
+            </a:pPr>
             <a:r>
               <a:rPr lang="en-US" sz="1650" dirty="0">
                 <a:solidFill>
                   <a:srgbClr val="000000"/>
                 </a:solidFill>
-                <a:latin typeface="Century Gothic"/>
-                <a:cs typeface="Century Gothic"/>
+                <a:latin typeface="Arial"/>
+                <a:cs typeface="Arial"/>
               </a:rPr>
               <a:t>Your group's FLUID-ICU question: what is its main result?</a:t>
             </a:r>
@@ -13608,8 +13578,8 @@
                 <a:solidFill>
                   <a:srgbClr val="6C3483"/>
                 </a:solidFill>
-                <a:latin typeface="Century Gothic"/>
-                <a:cs typeface="Century Gothic"/>
+                <a:latin typeface="Arial"/>
+                <a:cs typeface="Arial"/>
               </a:rPr>
               <a:t>Answers</a:t>
             </a:r>
@@ -13630,10 +13600,10 @@
                 <a:solidFill>
                   <a:srgbClr val="000000"/>
                 </a:solidFill>
-                <a:latin typeface="Century Gothic"/>
-                <a:cs typeface="Century Gothic"/>
-              </a:rPr>
-              <a:t>1. Confounding: part of the crude link came from severity</a:t>
+                <a:latin typeface="Arial"/>
+                <a:cs typeface="Arial"/>
+              </a:rPr>
+              <a:t>Confounding: part of the crude link came from severity</a:t>
             </a:r>
           </a:p>
           <a:p>
@@ -13652,10 +13622,10 @@
                 <a:solidFill>
                   <a:srgbClr val="000000"/>
                 </a:solidFill>
-                <a:latin typeface="Century Gothic"/>
-                <a:cs typeface="Century Gothic"/>
-              </a:rPr>
-              <a:t>2. No: the CI includes 1</a:t>
+                <a:latin typeface="Arial"/>
+                <a:cs typeface="Arial"/>
+              </a:rPr>
+              <a:t>No: the CI includes 1</a:t>
             </a:r>
           </a:p>
           <a:p>
@@ -13674,10 +13644,10 @@
                 <a:solidFill>
                   <a:srgbClr val="000000"/>
                 </a:solidFill>
-                <a:latin typeface="Century Gothic"/>
-                <a:cs typeface="Century Gothic"/>
-              </a:rPr>
-              <a:t>3. Complete-case, or multiple imputation + sensitivity</a:t>
+                <a:latin typeface="Arial"/>
+                <a:cs typeface="Arial"/>
+              </a:rPr>
+              <a:t>Complete-case, or multiple imputation + sensitivity</a:t>
             </a:r>
           </a:p>
           <a:p>
@@ -13696,10 +13666,10 @@
                 <a:solidFill>
                   <a:srgbClr val="000000"/>
                 </a:solidFill>
-                <a:latin typeface="Century Gothic"/>
-                <a:cs typeface="Century Gothic"/>
-              </a:rPr>
-              <a:t>4. Left the study alive, outcome unknown after that</a:t>
+                <a:latin typeface="Arial"/>
+                <a:cs typeface="Arial"/>
+              </a:rPr>
+              <a:t>Left the study alive, outcome unknown after that</a:t>
             </a:r>
           </a:p>
           <a:p>
@@ -13718,10 +13688,10 @@
                 <a:solidFill>
                   <a:srgbClr val="000000"/>
                 </a:solidFill>
-                <a:latin typeface="Century Gothic"/>
-                <a:cs typeface="Century Gothic"/>
-              </a:rPr>
-              <a:t>5. From your results pack</a:t>
+                <a:latin typeface="Arial"/>
+                <a:cs typeface="Arial"/>
+              </a:rPr>
+              <a:t>From your results pack</a:t>
             </a:r>
           </a:p>
         </p:txBody>
@@ -13765,8 +13735,8 @@
                 <a:solidFill>
                   <a:srgbClr val="6C3483"/>
                 </a:solidFill>
-                <a:latin typeface="Century Gothic"/>
-                <a:cs typeface="Century Gothic"/>
+                <a:latin typeface="Arial"/>
+                <a:cs typeface="Arial"/>
               </a:rPr>
               <a:t>OUTPUT   </a:t>
             </a:r>
@@ -13775,8 +13745,8 @@
                 <a:solidFill>
                   <a:srgbClr val="000000"/>
                 </a:solidFill>
-                <a:latin typeface="Century Gothic"/>
-                <a:cs typeface="Century Gothic"/>
+                <a:latin typeface="Arial"/>
+                <a:cs typeface="Arial"/>
               </a:rPr>
               <a:t>Everyone re-activated: adjustment, CIs, missing data, survival</a:t>
             </a:r>
@@ -13813,7 +13783,7 @@
                     <a:lumMod val="50000"/>
                   </a:schemeClr>
                 </a:solidFill>
-                <a:latin typeface="Verdana"/>
+                <a:latin typeface="Arial"/>
               </a:rPr>
               <a:t>Neudata | #ClearDataClearImpact</a:t>
             </a:r>
@@ -13943,8 +13913,8 @@
                 <a:solidFill>
                   <a:srgbClr val="0D7377"/>
                 </a:solidFill>
-                <a:latin typeface="Century Gothic"/>
-                <a:cs typeface="Century Gothic"/>
+                <a:latin typeface="Arial"/>
+                <a:cs typeface="Arial"/>
               </a:rPr>
               <a:t>Conflicts of interest and funding: declare them all</a:t>
             </a:r>
@@ -14040,8 +14010,8 @@
                 <a:solidFill>
                   <a:srgbClr val="FFFFFF"/>
                 </a:solidFill>
-                <a:latin typeface="Century Gothic"/>
-                <a:cs typeface="Century Gothic"/>
+                <a:latin typeface="Arial"/>
+                <a:cs typeface="Arial"/>
               </a:rPr>
               <a:t>KEY MESSAGE   </a:t>
             </a:r>
@@ -14050,8 +14020,8 @@
                 <a:solidFill>
                   <a:srgbClr val="FFFFFF"/>
                 </a:solidFill>
-                <a:latin typeface="Century Gothic"/>
-                <a:cs typeface="Century Gothic"/>
+                <a:latin typeface="Arial"/>
+                <a:cs typeface="Arial"/>
               </a:rPr>
               <a:t>A declared interest is information; a hidden one is a scandal.</a:t>
             </a:r>
@@ -14088,7 +14058,7 @@
                     <a:lumMod val="50000"/>
                   </a:schemeClr>
                 </a:solidFill>
-                <a:latin typeface="Verdana"/>
+                <a:latin typeface="Arial"/>
               </a:rPr>
               <a:t>Neudata | #ClearDataClearImpact</a:t>
             </a:r>
@@ -14218,8 +14188,8 @@
                 <a:solidFill>
                   <a:srgbClr val="0D7377"/>
                 </a:solidFill>
-                <a:latin typeface="Century Gothic"/>
-                <a:cs typeface="Century Gothic"/>
+                <a:latin typeface="Arial"/>
+                <a:cs typeface="Arial"/>
               </a:rPr>
               <a:t>Data sharing: from 'on request' to open</a:t>
             </a:r>
@@ -14315,8 +14285,8 @@
                 <a:solidFill>
                   <a:srgbClr val="FFFFFF"/>
                 </a:solidFill>
-                <a:latin typeface="Century Gothic"/>
-                <a:cs typeface="Century Gothic"/>
+                <a:latin typeface="Arial"/>
+                <a:cs typeface="Arial"/>
               </a:rPr>
               <a:t>KEY MESSAGE   </a:t>
             </a:r>
@@ -14325,8 +14295,8 @@
                 <a:solidFill>
                   <a:srgbClr val="FFFFFF"/>
                 </a:solidFill>
-                <a:latin typeface="Century Gothic"/>
-                <a:cs typeface="Century Gothic"/>
+                <a:latin typeface="Arial"/>
+                <a:cs typeface="Arial"/>
               </a:rPr>
               <a:t>Plan data sharing at the protocol stage: consent must allow it.</a:t>
             </a:r>
@@ -14363,7 +14333,7 @@
                     <a:lumMod val="50000"/>
                   </a:schemeClr>
                 </a:solidFill>
-                <a:latin typeface="Verdana"/>
+                <a:latin typeface="Arial"/>
               </a:rPr>
               <a:t>Neudata | #ClearDataClearImpact</a:t>
             </a:r>
@@ -14493,8 +14463,8 @@
                 <a:solidFill>
                   <a:srgbClr val="0D7377"/>
                 </a:solidFill>
-                <a:latin typeface="Century Gothic"/>
-                <a:cs typeface="Century Gothic"/>
+                <a:latin typeface="Arial"/>
+                <a:cs typeface="Arial"/>
               </a:rPr>
               <a:t>AI in research and writing: what is allowed</a:t>
             </a:r>
@@ -14590,8 +14560,8 @@
                 <a:solidFill>
                   <a:srgbClr val="FFFFFF"/>
                 </a:solidFill>
-                <a:latin typeface="Century Gothic"/>
-                <a:cs typeface="Century Gothic"/>
+                <a:latin typeface="Arial"/>
+                <a:cs typeface="Arial"/>
               </a:rPr>
               <a:t>KEY MESSAGE   </a:t>
             </a:r>
@@ -14600,8 +14570,8 @@
                 <a:solidFill>
                   <a:srgbClr val="FFFFFF"/>
                 </a:solidFill>
-                <a:latin typeface="Century Gothic"/>
-                <a:cs typeface="Century Gothic"/>
+                <a:latin typeface="Arial"/>
+                <a:cs typeface="Arial"/>
               </a:rPr>
               <a:t>Use AI like a junior assistant: check everything, disclose it, keep patient data out.</a:t>
             </a:r>
@@ -14638,7 +14608,7 @@
                     <a:lumMod val="50000"/>
                   </a:schemeClr>
                 </a:solidFill>
-                <a:latin typeface="Verdana"/>
+                <a:latin typeface="Arial"/>
               </a:rPr>
               <a:t>Neudata | #ClearDataClearImpact</a:t>
             </a:r>
@@ -14768,8 +14738,8 @@
                 <a:solidFill>
                   <a:srgbClr val="0D7377"/>
                 </a:solidFill>
-                <a:latin typeface="Century Gothic"/>
-                <a:cs typeface="Century Gothic"/>
+                <a:latin typeface="Arial"/>
+                <a:cs typeface="Arial"/>
               </a:rPr>
               <a:t>Integrity scenarios: green, amber or red?</a:t>
             </a:r>
@@ -14839,8 +14809,8 @@
                 <a:solidFill>
                   <a:srgbClr val="FFFFFF"/>
                 </a:solidFill>
-                <a:latin typeface="Century Gothic"/>
-                <a:cs typeface="Century Gothic"/>
+                <a:latin typeface="Arial"/>
+                <a:cs typeface="Arial"/>
               </a:rPr>
               <a:t>QUICK QUIZ   |   5 min</a:t>
             </a:r>
@@ -14877,25 +14847,19 @@
               <a:spcBef>
                 <a:spcPts val="450"/>
               </a:spcBef>
-              <a:buNone/>
-            </a:pPr>
-            <a:r>
-              <a:rPr lang="en-US" sz="1650" b="1" dirty="0">
-                <a:solidFill>
-                  <a:srgbClr val="6C3483"/>
-                </a:solidFill>
-                <a:latin typeface="Century Gothic"/>
-                <a:cs typeface="Century Gothic"/>
-              </a:rPr>
-              <a:t>1.  </a:t>
-            </a:r>
+              <a:buClr>
+                <a:srgbClr val="6C3483"/>
+              </a:buClr>
+              <a:buFont typeface="Arial"/>
+              <a:buChar char="•"/>
+            </a:pPr>
             <a:r>
               <a:rPr lang="en-US" sz="1650" dirty="0">
                 <a:solidFill>
                   <a:srgbClr val="000000"/>
                 </a:solidFill>
-                <a:latin typeface="Century Gothic"/>
-                <a:cs typeface="Century Gothic"/>
+                <a:latin typeface="Arial"/>
+                <a:cs typeface="Arial"/>
               </a:rPr>
               <a:t>Read the scenario on the screen or in your handout (6 scenarios)</a:t>
             </a:r>
@@ -14908,25 +14872,19 @@
               <a:spcBef>
                 <a:spcPts val="450"/>
               </a:spcBef>
-              <a:buNone/>
-            </a:pPr>
-            <a:r>
-              <a:rPr lang="en-US" sz="1650" b="1" dirty="0">
-                <a:solidFill>
-                  <a:srgbClr val="6C3483"/>
-                </a:solidFill>
-                <a:latin typeface="Century Gothic"/>
-                <a:cs typeface="Century Gothic"/>
-              </a:rPr>
-              <a:t>2.  </a:t>
-            </a:r>
+              <a:buClr>
+                <a:srgbClr val="6C3483"/>
+              </a:buClr>
+              <a:buFont typeface="Arial"/>
+              <a:buChar char="•"/>
+            </a:pPr>
             <a:r>
               <a:rPr lang="en-US" sz="1650" dirty="0">
                 <a:solidFill>
                   <a:srgbClr val="000000"/>
                 </a:solidFill>
-                <a:latin typeface="Century Gothic"/>
-                <a:cs typeface="Century Gothic"/>
+                <a:latin typeface="Arial"/>
+                <a:cs typeface="Arial"/>
               </a:rPr>
               <a:t>Each group holds up GREEN (fine), AMBER (fine only if fixed or disclosed) or RED (misconduct)</a:t>
             </a:r>
@@ -14939,25 +14897,19 @@
               <a:spcBef>
                 <a:spcPts val="450"/>
               </a:spcBef>
-              <a:buNone/>
-            </a:pPr>
-            <a:r>
-              <a:rPr lang="en-US" sz="1650" b="1" dirty="0">
-                <a:solidFill>
-                  <a:srgbClr val="6C3483"/>
-                </a:solidFill>
-                <a:latin typeface="Century Gothic"/>
-                <a:cs typeface="Century Gothic"/>
-              </a:rPr>
-              <a:t>3.  </a:t>
-            </a:r>
+              <a:buClr>
+                <a:srgbClr val="6C3483"/>
+              </a:buClr>
+              <a:buFont typeface="Arial"/>
+              <a:buChar char="•"/>
+            </a:pPr>
             <a:r>
               <a:rPr lang="en-US" sz="1650" dirty="0">
                 <a:solidFill>
                   <a:srgbClr val="000000"/>
                 </a:solidFill>
-                <a:latin typeface="Century Gothic"/>
-                <a:cs typeface="Century Gothic"/>
+                <a:latin typeface="Arial"/>
+                <a:cs typeface="Arial"/>
               </a:rPr>
               <a:t>The instructor asks one group to justify its colour</a:t>
             </a:r>
@@ -14970,25 +14922,19 @@
               <a:spcBef>
                 <a:spcPts val="450"/>
               </a:spcBef>
-              <a:buNone/>
-            </a:pPr>
-            <a:r>
-              <a:rPr lang="en-US" sz="1650" b="1" dirty="0">
-                <a:solidFill>
-                  <a:srgbClr val="6C3483"/>
-                </a:solidFill>
-                <a:latin typeface="Century Gothic"/>
-                <a:cs typeface="Century Gothic"/>
-              </a:rPr>
-              <a:t>4.  </a:t>
-            </a:r>
+              <a:buClr>
+                <a:srgbClr val="6C3483"/>
+              </a:buClr>
+              <a:buFont typeface="Arial"/>
+              <a:buChar char="•"/>
+            </a:pPr>
             <a:r>
               <a:rPr lang="en-US" sz="1650" dirty="0">
                 <a:solidFill>
                   <a:srgbClr val="000000"/>
                 </a:solidFill>
-                <a:latin typeface="Century Gothic"/>
-                <a:cs typeface="Century Gothic"/>
+                <a:latin typeface="Arial"/>
+                <a:cs typeface="Arial"/>
               </a:rPr>
               <a:t>We do 3 together now; the rest are in the handout</a:t>
             </a:r>
@@ -15032,8 +14978,8 @@
                 <a:solidFill>
                   <a:srgbClr val="6C3483"/>
                 </a:solidFill>
-                <a:latin typeface="Century Gothic"/>
-                <a:cs typeface="Century Gothic"/>
+                <a:latin typeface="Arial"/>
+                <a:cs typeface="Arial"/>
               </a:rPr>
               <a:t>Example</a:t>
             </a:r>
@@ -15054,8 +15000,8 @@
                 <a:solidFill>
                   <a:srgbClr val="000000"/>
                 </a:solidFill>
-                <a:latin typeface="Century Gothic"/>
-                <a:cs typeface="Century Gothic"/>
+                <a:latin typeface="Arial"/>
+                <a:cs typeface="Arial"/>
               </a:rPr>
               <a:t>A colleague lent you an ultrasound machine and asks to be an author.</a:t>
             </a:r>
@@ -15076,8 +15022,8 @@
                 <a:solidFill>
                   <a:srgbClr val="000000"/>
                 </a:solidFill>
-                <a:latin typeface="Century Gothic"/>
-                <a:cs typeface="Century Gothic"/>
+                <a:latin typeface="Arial"/>
+                <a:cs typeface="Arial"/>
               </a:rPr>
               <a:t>Your colour?</a:t>
             </a:r>
@@ -15123,8 +15069,8 @@
                 <a:solidFill>
                   <a:srgbClr val="6C3483"/>
                 </a:solidFill>
-                <a:latin typeface="Century Gothic"/>
-                <a:cs typeface="Century Gothic"/>
+                <a:latin typeface="Arial"/>
+                <a:cs typeface="Arial"/>
               </a:rPr>
               <a:t>OUTPUT   </a:t>
             </a:r>
@@ -15133,8 +15079,8 @@
                 <a:solidFill>
                   <a:srgbClr val="000000"/>
                 </a:solidFill>
-                <a:latin typeface="Century Gothic"/>
-                <a:cs typeface="Century Gothic"/>
+                <a:latin typeface="Arial"/>
+                <a:cs typeface="Arial"/>
               </a:rPr>
               <a:t>Each participant can name FFP, gift/ghost authorship and the AI rules</a:t>
             </a:r>
@@ -15171,7 +15117,7 @@
                     <a:lumMod val="50000"/>
                   </a:schemeClr>
                 </a:solidFill>
-                <a:latin typeface="Verdana"/>
+                <a:latin typeface="Arial"/>
               </a:rPr>
               <a:t>Neudata | #ClearDataClearImpact</a:t>
             </a:r>
@@ -15301,8 +15247,8 @@
                 <a:solidFill>
                   <a:srgbClr val="0D7377"/>
                 </a:solidFill>
-                <a:latin typeface="Century Gothic"/>
-                <a:cs typeface="Century Gothic"/>
+                <a:latin typeface="Arial"/>
+                <a:cs typeface="Arial"/>
               </a:rPr>
               <a:t>Proposal builder 7: ethics, registration, feasibility, publication plan</a:t>
             </a:r>
@@ -15372,8 +15318,8 @@
                 <a:solidFill>
                   <a:srgbClr val="FFFFFF"/>
                 </a:solidFill>
-                <a:latin typeface="Century Gothic"/>
-                <a:cs typeface="Century Gothic"/>
+                <a:latin typeface="Arial"/>
+                <a:cs typeface="Arial"/>
               </a:rPr>
               <a:t>PROPOSAL BUILDER   |   15 min</a:t>
             </a:r>
@@ -15410,25 +15356,19 @@
               <a:spcBef>
                 <a:spcPts val="450"/>
               </a:spcBef>
-              <a:buNone/>
-            </a:pPr>
-            <a:r>
-              <a:rPr lang="en-US" sz="1650" b="1" dirty="0">
-                <a:solidFill>
-                  <a:srgbClr val="055F56"/>
-                </a:solidFill>
-                <a:latin typeface="Century Gothic"/>
-                <a:cs typeface="Century Gothic"/>
-              </a:rPr>
-              <a:t>1.  </a:t>
-            </a:r>
+              <a:buClr>
+                <a:srgbClr val="055F56"/>
+              </a:buClr>
+              <a:buFont typeface="Arial"/>
+              <a:buChar char="•"/>
+            </a:pPr>
             <a:r>
               <a:rPr lang="en-US" sz="1650" dirty="0">
                 <a:solidFill>
                   <a:srgbClr val="000000"/>
                 </a:solidFill>
-                <a:latin typeface="Century Gothic"/>
-                <a:cs typeface="Century Gothic"/>
+                <a:latin typeface="Arial"/>
+                <a:cs typeface="Arial"/>
               </a:rPr>
               <a:t>Who consents in your study? Use the ICU flowchart (5 min)</a:t>
             </a:r>
@@ -15441,25 +15381,19 @@
               <a:spcBef>
                 <a:spcPts val="450"/>
               </a:spcBef>
-              <a:buNone/>
-            </a:pPr>
-            <a:r>
-              <a:rPr lang="en-US" sz="1650" b="1" dirty="0">
-                <a:solidFill>
-                  <a:srgbClr val="055F56"/>
-                </a:solidFill>
-                <a:latin typeface="Century Gothic"/>
-                <a:cs typeface="Century Gothic"/>
-              </a:rPr>
-              <a:t>2.  </a:t>
-            </a:r>
+              <a:buClr>
+                <a:srgbClr val="055F56"/>
+              </a:buClr>
+              <a:buFont typeface="Arial"/>
+              <a:buChar char="•"/>
+            </a:pPr>
             <a:r>
               <a:rPr lang="en-US" sz="1650" dirty="0">
                 <a:solidFill>
                   <a:srgbClr val="000000"/>
                 </a:solidFill>
-                <a:latin typeface="Century Gothic"/>
-                <a:cs typeface="Century Gothic"/>
+                <a:latin typeface="Arial"/>
+                <a:cs typeface="Arial"/>
               </a:rPr>
               <a:t>Registration: needed? which registry? Where is the key file?</a:t>
             </a:r>
@@ -15472,25 +15406,19 @@
               <a:spcBef>
                 <a:spcPts val="450"/>
               </a:spcBef>
-              <a:buNone/>
-            </a:pPr>
-            <a:r>
-              <a:rPr lang="en-US" sz="1650" b="1" dirty="0">
-                <a:solidFill>
-                  <a:srgbClr val="055F56"/>
-                </a:solidFill>
-                <a:latin typeface="Century Gothic"/>
-                <a:cs typeface="Century Gothic"/>
-              </a:rPr>
-              <a:t>3.  </a:t>
-            </a:r>
+              <a:buClr>
+                <a:srgbClr val="055F56"/>
+              </a:buClr>
+              <a:buFont typeface="Arial"/>
+              <a:buChar char="•"/>
+            </a:pPr>
             <a:r>
               <a:rPr lang="en-US" sz="1650" dirty="0">
                 <a:solidFill>
                   <a:srgbClr val="000000"/>
                 </a:solidFill>
-                <a:latin typeface="Century Gothic"/>
-                <a:cs typeface="Century Gothic"/>
+                <a:latin typeface="Arial"/>
+                <a:cs typeface="Arial"/>
               </a:rPr>
               <a:t>Feasibility: biggest risk and one fix (3 min)</a:t>
             </a:r>
@@ -15503,25 +15431,19 @@
               <a:spcBef>
                 <a:spcPts val="450"/>
               </a:spcBef>
-              <a:buNone/>
-            </a:pPr>
-            <a:r>
-              <a:rPr lang="en-US" sz="1650" b="1" dirty="0">
-                <a:solidFill>
-                  <a:srgbClr val="055F56"/>
-                </a:solidFill>
-                <a:latin typeface="Century Gothic"/>
-                <a:cs typeface="Century Gothic"/>
-              </a:rPr>
-              <a:t>4.  </a:t>
-            </a:r>
+              <a:buClr>
+                <a:srgbClr val="055F56"/>
+              </a:buClr>
+              <a:buFont typeface="Arial"/>
+              <a:buChar char="•"/>
+            </a:pPr>
             <a:r>
               <a:rPr lang="en-US" sz="1650" dirty="0">
                 <a:solidFill>
                   <a:srgbClr val="000000"/>
                 </a:solidFill>
-                <a:latin typeface="Century Gothic"/>
-                <a:cs typeface="Century Gothic"/>
+                <a:latin typeface="Arial"/>
+                <a:cs typeface="Arial"/>
               </a:rPr>
               <a:t>Publication plan: target journal, guideline, authors + CRediT (5 min)</a:t>
             </a:r>
@@ -15534,25 +15456,19 @@
               <a:spcBef>
                 <a:spcPts val="450"/>
               </a:spcBef>
-              <a:buNone/>
-            </a:pPr>
-            <a:r>
-              <a:rPr lang="en-US" sz="1650" b="1" dirty="0">
-                <a:solidFill>
-                  <a:srgbClr val="055F56"/>
-                </a:solidFill>
-                <a:latin typeface="Century Gothic"/>
-                <a:cs typeface="Century Gothic"/>
-              </a:rPr>
-              <a:t>5.  </a:t>
-            </a:r>
+              <a:buClr>
+                <a:srgbClr val="055F56"/>
+              </a:buClr>
+              <a:buFont typeface="Arial"/>
+              <a:buChar char="•"/>
+            </a:pPr>
             <a:r>
               <a:rPr lang="en-US" sz="1650" dirty="0">
                 <a:solidFill>
                   <a:srgbClr val="000000"/>
                 </a:solidFill>
-                <a:latin typeface="Century Gothic"/>
-                <a:cs typeface="Century Gothic"/>
+                <a:latin typeface="Arial"/>
+                <a:cs typeface="Arial"/>
               </a:rPr>
               <a:t>Working title from your PICO (2 min)</a:t>
             </a:r>
@@ -15596,8 +15512,8 @@
                 <a:solidFill>
                   <a:srgbClr val="055F56"/>
                 </a:solidFill>
-                <a:latin typeface="Century Gothic"/>
-                <a:cs typeface="Century Gothic"/>
+                <a:latin typeface="Arial"/>
+                <a:cs typeface="Arial"/>
               </a:rPr>
               <a:t>Worksheet</a:t>
             </a:r>
@@ -15618,8 +15534,8 @@
                 <a:solidFill>
                   <a:srgbClr val="000000"/>
                 </a:solidFill>
-                <a:latin typeface="Century Gothic"/>
-                <a:cs typeface="Century Gothic"/>
+                <a:latin typeface="Arial"/>
+                <a:cs typeface="Arial"/>
               </a:rPr>
               <a:t>Practicals/s7_exercises.md, Part B</a:t>
             </a:r>
@@ -15640,8 +15556,8 @@
                 <a:solidFill>
                   <a:srgbClr val="000000"/>
                 </a:solidFill>
-                <a:latin typeface="Century Gothic"/>
-                <a:cs typeface="Century Gothic"/>
+                <a:latin typeface="Arial"/>
+                <a:cs typeface="Arial"/>
               </a:rPr>
               <a:t>Your slide 5 and 6 for next Saturday</a:t>
             </a:r>
@@ -15662,8 +15578,8 @@
                 <a:solidFill>
                   <a:srgbClr val="000000"/>
                 </a:solidFill>
-                <a:latin typeface="Century Gothic"/>
-                <a:cs typeface="Century Gothic"/>
+                <a:latin typeface="Arial"/>
+                <a:cs typeface="Arial"/>
               </a:rPr>
               <a:t>Finish at home this week</a:t>
             </a:r>
@@ -15709,8 +15625,8 @@
                 <a:solidFill>
                   <a:srgbClr val="055F56"/>
                 </a:solidFill>
-                <a:latin typeface="Century Gothic"/>
-                <a:cs typeface="Century Gothic"/>
+                <a:latin typeface="Arial"/>
+                <a:cs typeface="Arial"/>
               </a:rPr>
               <a:t>OUTPUT   </a:t>
             </a:r>
@@ -15719,8 +15635,8 @@
                 <a:solidFill>
                   <a:srgbClr val="000000"/>
                 </a:solidFill>
-                <a:latin typeface="Century Gothic"/>
-                <a:cs typeface="Century Gothic"/>
+                <a:latin typeface="Arial"/>
+                <a:cs typeface="Arial"/>
               </a:rPr>
               <a:t>Proposal Part 4 drafted; slides 5-6 of the presentation outlined</a:t>
             </a:r>
@@ -15757,7 +15673,7 @@
                     <a:lumMod val="50000"/>
                   </a:schemeClr>
                 </a:solidFill>
-                <a:latin typeface="Verdana"/>
+                <a:latin typeface="Arial"/>
               </a:rPr>
               <a:t>Neudata | #ClearDataClearImpact</a:t>
             </a:r>
@@ -15887,8 +15803,8 @@
                 <a:solidFill>
                   <a:srgbClr val="0D7377"/>
                 </a:solidFill>
-                <a:latin typeface="Century Gothic"/>
-                <a:cs typeface="Century Gothic"/>
+                <a:latin typeface="Arial"/>
+                <a:cs typeface="Arial"/>
               </a:rPr>
               <a:t>Break</a:t>
             </a:r>
@@ -15958,8 +15874,8 @@
                 <a:solidFill>
                   <a:srgbClr val="FFFFFF"/>
                 </a:solidFill>
-                <a:latin typeface="Century Gothic"/>
-                <a:cs typeface="Century Gothic"/>
+                <a:latin typeface="Arial"/>
+                <a:cs typeface="Arial"/>
               </a:rPr>
               <a:t>BREAK   |   15 min</a:t>
             </a:r>
@@ -15996,25 +15912,19 @@
               <a:spcBef>
                 <a:spcPts val="450"/>
               </a:spcBef>
-              <a:buNone/>
-            </a:pPr>
-            <a:r>
-              <a:rPr lang="en-US" sz="1650" b="1" dirty="0">
-                <a:solidFill>
-                  <a:srgbClr val="8A99A3"/>
-                </a:solidFill>
-                <a:latin typeface="Century Gothic"/>
-                <a:cs typeface="Century Gothic"/>
-              </a:rPr>
-              <a:t>1.  </a:t>
-            </a:r>
+              <a:buClr>
+                <a:srgbClr val="8A99A3"/>
+              </a:buClr>
+              <a:buFont typeface="Arial"/>
+              <a:buChar char="•"/>
+            </a:pPr>
             <a:r>
               <a:rPr lang="en-US" sz="1650" dirty="0">
                 <a:solidFill>
                   <a:srgbClr val="000000"/>
                 </a:solidFill>
-                <a:latin typeface="Century Gothic"/>
-                <a:cs typeface="Century Gothic"/>
+                <a:latin typeface="Arial"/>
+                <a:cs typeface="Arial"/>
               </a:rPr>
               <a:t>Collect your group's FLUID-ICU results pack</a:t>
             </a:r>
@@ -16027,25 +15937,19 @@
               <a:spcBef>
                 <a:spcPts val="450"/>
               </a:spcBef>
-              <a:buNone/>
-            </a:pPr>
-            <a:r>
-              <a:rPr lang="en-US" sz="1650" b="1" dirty="0">
-                <a:solidFill>
-                  <a:srgbClr val="8A99A3"/>
-                </a:solidFill>
-                <a:latin typeface="Century Gothic"/>
-                <a:cs typeface="Century Gothic"/>
-              </a:rPr>
-              <a:t>2.  </a:t>
-            </a:r>
+              <a:buClr>
+                <a:srgbClr val="8A99A3"/>
+              </a:buClr>
+              <a:buFont typeface="Arial"/>
+              <a:buChar char="•"/>
+            </a:pPr>
             <a:r>
               <a:rPr lang="en-US" sz="1650" dirty="0">
                 <a:solidFill>
                   <a:srgbClr val="000000"/>
                 </a:solidFill>
-                <a:latin typeface="Century Gothic"/>
-                <a:cs typeface="Century Gothic"/>
+                <a:latin typeface="Arial"/>
+                <a:cs typeface="Arial"/>
               </a:rPr>
               <a:t>Open the manuscript template (or take paper)</a:t>
             </a:r>
@@ -16058,25 +15962,19 @@
               <a:spcBef>
                 <a:spcPts val="450"/>
               </a:spcBef>
-              <a:buNone/>
-            </a:pPr>
-            <a:r>
-              <a:rPr lang="en-US" sz="1650" b="1" dirty="0">
-                <a:solidFill>
-                  <a:srgbClr val="8A99A3"/>
-                </a:solidFill>
-                <a:latin typeface="Century Gothic"/>
-                <a:cs typeface="Century Gothic"/>
-              </a:rPr>
-              <a:t>3.  </a:t>
-            </a:r>
+              <a:buClr>
+                <a:srgbClr val="8A99A3"/>
+              </a:buClr>
+              <a:buFont typeface="Arial"/>
+              <a:buChar char="•"/>
+            </a:pPr>
             <a:r>
               <a:rPr lang="en-US" sz="1650" dirty="0">
                 <a:solidFill>
                   <a:srgbClr val="000000"/>
                 </a:solidFill>
-                <a:latin typeface="Century Gothic"/>
-                <a:cs typeface="Century Gothic"/>
+                <a:latin typeface="Arial"/>
+                <a:cs typeface="Arial"/>
               </a:rPr>
               <a:t>Decide who writes Methods, who writes Results</a:t>
             </a:r>
@@ -16089,25 +15987,19 @@
               <a:spcBef>
                 <a:spcPts val="450"/>
               </a:spcBef>
-              <a:buNone/>
-            </a:pPr>
-            <a:r>
-              <a:rPr lang="en-US" sz="1650" b="1" dirty="0">
-                <a:solidFill>
-                  <a:srgbClr val="8A99A3"/>
-                </a:solidFill>
-                <a:latin typeface="Century Gothic"/>
-                <a:cs typeface="Century Gothic"/>
-              </a:rPr>
-              <a:t>4.  </a:t>
-            </a:r>
+              <a:buClr>
+                <a:srgbClr val="8A99A3"/>
+              </a:buClr>
+              <a:buFont typeface="Arial"/>
+              <a:buChar char="•"/>
+            </a:pPr>
             <a:r>
               <a:rPr lang="en-US" sz="1650" dirty="0">
                 <a:solidFill>
                   <a:srgbClr val="000000"/>
                 </a:solidFill>
-                <a:latin typeface="Century Gothic"/>
-                <a:cs typeface="Century Gothic"/>
+                <a:latin typeface="Arial"/>
+                <a:cs typeface="Arial"/>
               </a:rPr>
               <a:t>Back at 1:30 sharp</a:t>
             </a:r>
@@ -16151,8 +16043,8 @@
                 <a:solidFill>
                   <a:srgbClr val="8A99A3"/>
                 </a:solidFill>
-                <a:latin typeface="Century Gothic"/>
-                <a:cs typeface="Century Gothic"/>
+                <a:latin typeface="Arial"/>
+                <a:cs typeface="Arial"/>
               </a:rPr>
               <a:t>After the break</a:t>
             </a:r>
@@ -16173,8 +16065,8 @@
                 <a:solidFill>
                   <a:srgbClr val="000000"/>
                 </a:solidFill>
-                <a:latin typeface="Century Gothic"/>
-                <a:cs typeface="Century Gothic"/>
+                <a:latin typeface="Arial"/>
+                <a:cs typeface="Arial"/>
               </a:rPr>
               <a:t>7.3 Writing the paper (35 min)</a:t>
             </a:r>
@@ -16195,8 +16087,8 @@
                 <a:solidFill>
                   <a:srgbClr val="000000"/>
                 </a:solidFill>
-                <a:latin typeface="Century Gothic"/>
-                <a:cs typeface="Century Gothic"/>
+                <a:latin typeface="Arial"/>
+                <a:cs typeface="Arial"/>
               </a:rPr>
               <a:t>Manuscript workshop 1 (50 min)</a:t>
             </a:r>
@@ -16233,7 +16125,7 @@
                     <a:lumMod val="50000"/>
                   </a:schemeClr>
                 </a:solidFill>
-                <a:latin typeface="Verdana"/>
+                <a:latin typeface="Arial"/>
               </a:rPr>
               <a:t>Neudata | #ClearDataClearImpact</a:t>
             </a:r>
@@ -16363,8 +16255,8 @@
                 <a:solidFill>
                   <a:srgbClr val="0D7377"/>
                 </a:solidFill>
-                <a:latin typeface="Century Gothic"/>
-                <a:cs typeface="Century Gothic"/>
+                <a:latin typeface="Arial"/>
+                <a:cs typeface="Arial"/>
               </a:rPr>
               <a:t>7.3  |  35 minutes</a:t>
             </a:r>
@@ -16433,8 +16325,8 @@
                 <a:solidFill>
                   <a:srgbClr val="0D7377"/>
                 </a:solidFill>
-                <a:latin typeface="Century Gothic"/>
-                <a:cs typeface="Century Gothic"/>
+                <a:latin typeface="Arial"/>
+                <a:cs typeface="Arial"/>
               </a:rPr>
               <a:t>Writing the paper (I): Methods and Results</a:t>
             </a:r>
@@ -16451,8 +16343,8 @@
                 <a:solidFill>
                   <a:srgbClr val="595959"/>
                 </a:solidFill>
-                <a:latin typeface="Century Gothic"/>
-                <a:cs typeface="Century Gothic"/>
+                <a:latin typeface="Arial"/>
+                <a:cs typeface="Arial"/>
               </a:rPr>
               <a:t>Write what you did and what you found, nothing more</a:t>
             </a:r>
@@ -16489,7 +16381,7 @@
                     <a:lumMod val="50000"/>
                   </a:schemeClr>
                 </a:solidFill>
-                <a:latin typeface="Verdana"/>
+                <a:latin typeface="Arial"/>
               </a:rPr>
               <a:t>Neudata | #ClearDataClearImpact</a:t>
             </a:r>
@@ -16619,8 +16511,8 @@
                 <a:solidFill>
                   <a:srgbClr val="0D7377"/>
                 </a:solidFill>
-                <a:latin typeface="Century Gothic"/>
-                <a:cs typeface="Century Gothic"/>
+                <a:latin typeface="Arial"/>
+                <a:cs typeface="Arial"/>
               </a:rPr>
               <a:t>Write in a different order from the one readers read</a:t>
             </a:r>
@@ -16716,8 +16608,8 @@
                 <a:solidFill>
                   <a:srgbClr val="FFFFFF"/>
                 </a:solidFill>
-                <a:latin typeface="Century Gothic"/>
-                <a:cs typeface="Century Gothic"/>
+                <a:latin typeface="Arial"/>
+                <a:cs typeface="Arial"/>
               </a:rPr>
               <a:t>KEY MESSAGE   </a:t>
             </a:r>
@@ -16726,8 +16618,8 @@
                 <a:solidFill>
                   <a:srgbClr val="FFFFFF"/>
                 </a:solidFill>
-                <a:latin typeface="Century Gothic"/>
-                <a:cs typeface="Century Gothic"/>
+                <a:latin typeface="Arial"/>
+                <a:cs typeface="Arial"/>
               </a:rPr>
               <a:t>Start with your tables; write the title last.</a:t>
             </a:r>
@@ -16764,7 +16656,7 @@
                     <a:lumMod val="50000"/>
                   </a:schemeClr>
                 </a:solidFill>
-                <a:latin typeface="Verdana"/>
+                <a:latin typeface="Arial"/>
               </a:rPr>
               <a:t>Neudata | #ClearDataClearImpact</a:t>
             </a:r>
@@ -16894,8 +16786,8 @@
                 <a:solidFill>
                   <a:srgbClr val="0D7377"/>
                 </a:solidFill>
-                <a:latin typeface="Century Gothic"/>
-                <a:cs typeface="Century Gothic"/>
+                <a:latin typeface="Arial"/>
+                <a:cs typeface="Arial"/>
               </a:rPr>
               <a:t>Methods: enough detail for someone to repeat it</a:t>
             </a:r>
@@ -16961,8 +16853,8 @@
                 <a:solidFill>
                   <a:srgbClr val="595959"/>
                 </a:solidFill>
-                <a:latin typeface="Century Gothic"/>
-                <a:cs typeface="Century Gothic"/>
+                <a:latin typeface="Arial"/>
+                <a:cs typeface="Arial"/>
               </a:rPr>
               <a:t>If a colleague could not redo your study from the Methods, add detail.</a:t>
             </a:r>
@@ -17004,8 +16896,8 @@
                 <a:solidFill>
                   <a:srgbClr val="FFFFFF"/>
                 </a:solidFill>
-                <a:latin typeface="Century Gothic"/>
-                <a:cs typeface="Century Gothic"/>
+                <a:latin typeface="Arial"/>
+                <a:cs typeface="Arial"/>
               </a:rPr>
               <a:t>Who and where</a:t>
             </a:r>
@@ -17053,8 +16945,8 @@
                 <a:solidFill>
                   <a:srgbClr val="000000"/>
                 </a:solidFill>
-                <a:latin typeface="Century Gothic"/>
-                <a:cs typeface="Century Gothic"/>
+                <a:latin typeface="Arial"/>
+                <a:cs typeface="Arial"/>
               </a:rPr>
               <a:t>Design, setting, dates</a:t>
             </a:r>
@@ -17074,8 +16966,8 @@
                 <a:solidFill>
                   <a:srgbClr val="000000"/>
                 </a:solidFill>
-                <a:latin typeface="Century Gothic"/>
-                <a:cs typeface="Century Gothic"/>
+                <a:latin typeface="Arial"/>
+                <a:cs typeface="Arial"/>
               </a:rPr>
               <a:t>Eligibility criteria</a:t>
             </a:r>
@@ -17095,8 +16987,8 @@
                 <a:solidFill>
                   <a:srgbClr val="000000"/>
                 </a:solidFill>
-                <a:latin typeface="Century Gothic"/>
-                <a:cs typeface="Century Gothic"/>
+                <a:latin typeface="Arial"/>
+                <a:cs typeface="Arial"/>
               </a:rPr>
               <a:t>Ethics no. and consent</a:t>
             </a:r>
@@ -17116,8 +17008,8 @@
                 <a:solidFill>
                   <a:srgbClr val="000000"/>
                 </a:solidFill>
-                <a:latin typeface="Century Gothic"/>
-                <a:cs typeface="Century Gothic"/>
+                <a:latin typeface="Arial"/>
+                <a:cs typeface="Arial"/>
               </a:rPr>
               <a:t>Registration no.</a:t>
             </a:r>
@@ -17159,8 +17051,8 @@
                 <a:solidFill>
                   <a:srgbClr val="FFFFFF"/>
                 </a:solidFill>
-                <a:latin typeface="Century Gothic"/>
-                <a:cs typeface="Century Gothic"/>
+                <a:latin typeface="Arial"/>
+                <a:cs typeface="Arial"/>
               </a:rPr>
               <a:t>What was done</a:t>
             </a:r>
@@ -17208,8 +17100,8 @@
                 <a:solidFill>
                   <a:srgbClr val="000000"/>
                 </a:solidFill>
-                <a:latin typeface="Century Gothic"/>
-                <a:cs typeface="Century Gothic"/>
+                <a:latin typeface="Arial"/>
+                <a:cs typeface="Arial"/>
               </a:rPr>
               <a:t>Intervention in full</a:t>
             </a:r>
@@ -17229,8 +17121,8 @@
                 <a:solidFill>
                   <a:srgbClr val="000000"/>
                 </a:solidFill>
-                <a:latin typeface="Century Gothic"/>
-                <a:cs typeface="Century Gothic"/>
+                <a:latin typeface="Arial"/>
+                <a:cs typeface="Arial"/>
               </a:rPr>
               <a:t>Variables defined</a:t>
             </a:r>
@@ -17250,8 +17142,8 @@
                 <a:solidFill>
                   <a:srgbClr val="000000"/>
                 </a:solidFill>
-                <a:latin typeface="Century Gothic"/>
-                <a:cs typeface="Century Gothic"/>
+                <a:latin typeface="Arial"/>
+                <a:cs typeface="Arial"/>
               </a:rPr>
               <a:t>P1: training, daily pharmacist check</a:t>
             </a:r>
@@ -17293,8 +17185,8 @@
                 <a:solidFill>
                   <a:srgbClr val="FFFFFF"/>
                 </a:solidFill>
-                <a:latin typeface="Century Gothic"/>
-                <a:cs typeface="Century Gothic"/>
+                <a:latin typeface="Arial"/>
+                <a:cs typeface="Arial"/>
               </a:rPr>
               <a:t>Outcomes and size</a:t>
             </a:r>
@@ -17342,8 +17234,8 @@
                 <a:solidFill>
                   <a:srgbClr val="000000"/>
                 </a:solidFill>
-                <a:latin typeface="Century Gothic"/>
-                <a:cs typeface="Century Gothic"/>
+                <a:latin typeface="Arial"/>
+                <a:cs typeface="Arial"/>
               </a:rPr>
               <a:t>ONE primary outcome: how, when</a:t>
             </a:r>
@@ -17363,8 +17255,8 @@
                 <a:solidFill>
                   <a:srgbClr val="000000"/>
                 </a:solidFill>
-                <a:latin typeface="Century Gothic"/>
-                <a:cs typeface="Century Gothic"/>
+                <a:latin typeface="Arial"/>
+                <a:cs typeface="Arial"/>
               </a:rPr>
               <a:t>Sample size: assumptions + source</a:t>
             </a:r>
@@ -17384,8 +17276,8 @@
                 <a:solidFill>
                   <a:srgbClr val="000000"/>
                 </a:solidFill>
-                <a:latin typeface="Century Gothic"/>
-                <a:cs typeface="Century Gothic"/>
+                <a:latin typeface="Arial"/>
+                <a:cs typeface="Arial"/>
               </a:rPr>
               <a:t>P2: no sample-size statement</a:t>
             </a:r>
@@ -17427,8 +17319,8 @@
                 <a:solidFill>
                   <a:srgbClr val="FFFFFF"/>
                 </a:solidFill>
-                <a:latin typeface="Century Gothic"/>
-                <a:cs typeface="Century Gothic"/>
+                <a:latin typeface="Arial"/>
+                <a:cs typeface="Arial"/>
               </a:rPr>
               <a:t>Statistical analysis</a:t>
             </a:r>
@@ -17476,8 +17368,8 @@
                 <a:solidFill>
                   <a:srgbClr val="000000"/>
                 </a:solidFill>
-                <a:latin typeface="Century Gothic"/>
-                <a:cs typeface="Century Gothic"/>
+                <a:latin typeface="Arial"/>
+                <a:cs typeface="Arial"/>
               </a:rPr>
               <a:t>A test for each comparison</a:t>
             </a:r>
@@ -17497,8 +17389,8 @@
                 <a:solidFill>
                   <a:srgbClr val="000000"/>
                 </a:solidFill>
-                <a:latin typeface="Century Gothic"/>
-                <a:cs typeface="Century Gothic"/>
+                <a:latin typeface="Arial"/>
+                <a:cs typeface="Arial"/>
               </a:rPr>
               <a:t>Estimate matches the test</a:t>
             </a:r>
@@ -17518,8 +17410,8 @@
                 <a:solidFill>
                   <a:srgbClr val="000000"/>
                 </a:solidFill>
-                <a:latin typeface="Century Gothic"/>
-                <a:cs typeface="Century Gothic"/>
+                <a:latin typeface="Arial"/>
+                <a:cs typeface="Arial"/>
               </a:rPr>
               <a:t>Missing data, multiplicity</a:t>
             </a:r>
@@ -17539,8 +17431,8 @@
                 <a:solidFill>
                   <a:srgbClr val="000000"/>
                 </a:solidFill>
-                <a:latin typeface="Century Gothic"/>
-                <a:cs typeface="Century Gothic"/>
+                <a:latin typeface="Arial"/>
+                <a:cs typeface="Arial"/>
               </a:rPr>
               <a:t>Software and version</a:t>
             </a:r>
@@ -17584,8 +17476,8 @@
                 <a:solidFill>
                   <a:srgbClr val="FFFFFF"/>
                 </a:solidFill>
-                <a:latin typeface="Century Gothic"/>
-                <a:cs typeface="Century Gothic"/>
+                <a:latin typeface="Arial"/>
+                <a:cs typeface="Arial"/>
               </a:rPr>
               <a:t>KEY MESSAGE   </a:t>
             </a:r>
@@ -17594,8 +17486,8 @@
                 <a:solidFill>
                   <a:srgbClr val="FFFFFF"/>
                 </a:solidFill>
-                <a:latin typeface="Century Gothic"/>
-                <a:cs typeface="Century Gothic"/>
+                <a:latin typeface="Arial"/>
+                <a:cs typeface="Arial"/>
               </a:rPr>
               <a:t>The statistical paragraph names a method for every comparison you report.</a:t>
             </a:r>
@@ -17632,7 +17524,7 @@
                     <a:lumMod val="50000"/>
                   </a:schemeClr>
                 </a:solidFill>
-                <a:latin typeface="Verdana"/>
+                <a:latin typeface="Arial"/>
               </a:rPr>
               <a:t>Neudata | #ClearDataClearImpact</a:t>
             </a:r>
@@ -17762,8 +17654,8 @@
                 <a:solidFill>
                   <a:srgbClr val="0D7377"/>
                 </a:solidFill>
-                <a:latin typeface="Century Gothic"/>
-                <a:cs typeface="Century Gothic"/>
+                <a:latin typeface="Arial"/>
+                <a:cs typeface="Arial"/>
               </a:rPr>
               <a:t>Worked example: Methods for FLUID-ICU question 1</a:t>
             </a:r>
@@ -17859,8 +17751,8 @@
                 <a:solidFill>
                   <a:srgbClr val="FFFFFF"/>
                 </a:solidFill>
-                <a:latin typeface="Century Gothic"/>
-                <a:cs typeface="Century Gothic"/>
+                <a:latin typeface="Arial"/>
+                <a:cs typeface="Arial"/>
               </a:rPr>
               <a:t>KEY MESSAGE   </a:t>
             </a:r>
@@ -17869,8 +17761,8 @@
                 <a:solidFill>
                   <a:srgbClr val="FFFFFF"/>
                 </a:solidFill>
-                <a:latin typeface="Century Gothic"/>
-                <a:cs typeface="Century Gothic"/>
+                <a:latin typeface="Arial"/>
+                <a:cs typeface="Arial"/>
               </a:rPr>
               <a:t>One sentence per STROBE item, and say plainly that the data are simulated.</a:t>
             </a:r>
@@ -17907,7 +17799,7 @@
                     <a:lumMod val="50000"/>
                   </a:schemeClr>
                 </a:solidFill>
-                <a:latin typeface="Verdana"/>
+                <a:latin typeface="Arial"/>
               </a:rPr>
               <a:t>Neudata | #ClearDataClearImpact</a:t>
             </a:r>
@@ -18037,8 +17929,8 @@
                 <a:solidFill>
                   <a:srgbClr val="0D7377"/>
                 </a:solidFill>
-                <a:latin typeface="Century Gothic"/>
-                <a:cs typeface="Century Gothic"/>
+                <a:latin typeface="Arial"/>
+                <a:cs typeface="Arial"/>
               </a:rPr>
               <a:t>Today: finish the proposal, start the paper</a:t>
             </a:r>
@@ -18134,8 +18026,8 @@
                 <a:solidFill>
                   <a:srgbClr val="FFFFFF"/>
                 </a:solidFill>
-                <a:latin typeface="Century Gothic"/>
-                <a:cs typeface="Century Gothic"/>
+                <a:latin typeface="Arial"/>
+                <a:cs typeface="Arial"/>
               </a:rPr>
               <a:t>KEY MESSAGE   </a:t>
             </a:r>
@@ -18144,8 +18036,8 @@
                 <a:solidFill>
                   <a:srgbClr val="FFFFFF"/>
                 </a:solidFill>
-                <a:latin typeface="Century Gothic"/>
-                <a:cs typeface="Century Gothic"/>
+                <a:latin typeface="Arial"/>
+                <a:cs typeface="Arial"/>
               </a:rPr>
               <a:t>Before the break: Proposal Part 4. After the break: Methods and Results.</a:t>
             </a:r>
@@ -18182,7 +18074,7 @@
                     <a:lumMod val="50000"/>
                   </a:schemeClr>
                 </a:solidFill>
-                <a:latin typeface="Verdana"/>
+                <a:latin typeface="Arial"/>
               </a:rPr>
               <a:t>Neudata | #ClearDataClearImpact</a:t>
             </a:r>
@@ -18312,8 +18204,8 @@
                 <a:solidFill>
                   <a:srgbClr val="0D7377"/>
                 </a:solidFill>
-                <a:latin typeface="Century Gothic"/>
-                <a:cs typeface="Century Gothic"/>
+                <a:latin typeface="Arial"/>
+                <a:cs typeface="Arial"/>
               </a:rPr>
               <a:t>Worked example: the statistical-analysis paragraph</a:t>
             </a:r>
@@ -18409,8 +18301,8 @@
                 <a:solidFill>
                   <a:srgbClr val="FFFFFF"/>
                 </a:solidFill>
-                <a:latin typeface="Century Gothic"/>
-                <a:cs typeface="Century Gothic"/>
+                <a:latin typeface="Arial"/>
+                <a:cs typeface="Arial"/>
               </a:rPr>
               <a:t>KEY MESSAGE   </a:t>
             </a:r>
@@ -18419,8 +18311,8 @@
                 <a:solidFill>
                   <a:srgbClr val="FFFFFF"/>
                 </a:solidFill>
-                <a:latin typeface="Century Gothic"/>
-                <a:cs typeface="Century Gothic"/>
+                <a:latin typeface="Arial"/>
+                <a:cs typeface="Arial"/>
               </a:rPr>
               <a:t>Name a method for every comparison you report, chosen before you saw the data.</a:t>
             </a:r>
@@ -18457,7 +18349,7 @@
                     <a:lumMod val="50000"/>
                   </a:schemeClr>
                 </a:solidFill>
-                <a:latin typeface="Verdana"/>
+                <a:latin typeface="Arial"/>
               </a:rPr>
               <a:t>Neudata | #ClearDataClearImpact</a:t>
             </a:r>
@@ -18587,8 +18479,8 @@
                 <a:solidFill>
                   <a:srgbClr val="0D7377"/>
                 </a:solidFill>
-                <a:latin typeface="Century Gothic"/>
-                <a:cs typeface="Century Gothic"/>
+                <a:latin typeface="Arial"/>
+                <a:cs typeface="Arial"/>
               </a:rPr>
               <a:t>Results: report, do not interpret</a:t>
             </a:r>
@@ -18684,8 +18576,8 @@
                 <a:solidFill>
                   <a:srgbClr val="FFFFFF"/>
                 </a:solidFill>
-                <a:latin typeface="Century Gothic"/>
-                <a:cs typeface="Century Gothic"/>
+                <a:latin typeface="Arial"/>
+                <a:cs typeface="Arial"/>
               </a:rPr>
               <a:t>KEY MESSAGE   </a:t>
             </a:r>
@@ -18694,8 +18586,8 @@
                 <a:solidFill>
                   <a:srgbClr val="FFFFFF"/>
                 </a:solidFill>
-                <a:latin typeface="Century Gothic"/>
-                <a:cs typeface="Century Gothic"/>
+                <a:latin typeface="Arial"/>
+                <a:cs typeface="Arial"/>
               </a:rPr>
               <a:t>Participants first, then each outcome as an effect size with its 95% CI.</a:t>
             </a:r>
@@ -18732,7 +18624,7 @@
                     <a:lumMod val="50000"/>
                   </a:schemeClr>
                 </a:solidFill>
-                <a:latin typeface="Verdana"/>
+                <a:latin typeface="Arial"/>
               </a:rPr>
               <a:t>Neudata | #ClearDataClearImpact</a:t>
             </a:r>
@@ -18862,8 +18754,8 @@
                 <a:solidFill>
                   <a:srgbClr val="0D7377"/>
                 </a:solidFill>
-                <a:latin typeface="Century Gothic"/>
-                <a:cs typeface="Century Gothic"/>
+                <a:latin typeface="Arial"/>
+                <a:cs typeface="Arial"/>
               </a:rPr>
               <a:t>Worked example: Results for FLUID-ICU question 1</a:t>
             </a:r>
@@ -18959,8 +18851,8 @@
                 <a:solidFill>
                   <a:srgbClr val="FFFFFF"/>
                 </a:solidFill>
-                <a:latin typeface="Century Gothic"/>
-                <a:cs typeface="Century Gothic"/>
+                <a:latin typeface="Arial"/>
+                <a:cs typeface="Arial"/>
               </a:rPr>
               <a:t>KEY MESSAGE   </a:t>
             </a:r>
@@ -18969,8 +18861,8 @@
                 <a:solidFill>
                   <a:srgbClr val="FFFFFF"/>
                 </a:solidFill>
-                <a:latin typeface="Century Gothic"/>
-                <a:cs typeface="Century Gothic"/>
+                <a:latin typeface="Arial"/>
+                <a:cs typeface="Arial"/>
               </a:rPr>
               <a:t>Participants, Table 1, outcome numbers, crude and adjusted estimates, in that order.</a:t>
             </a:r>
@@ -19007,7 +18899,7 @@
                     <a:lumMod val="50000"/>
                   </a:schemeClr>
                 </a:solidFill>
-                <a:latin typeface="Verdana"/>
+                <a:latin typeface="Arial"/>
               </a:rPr>
               <a:t>Neudata | #ClearDataClearImpact</a:t>
             </a:r>
@@ -19137,8 +19029,8 @@
                 <a:solidFill>
                   <a:srgbClr val="0D7377"/>
                 </a:solidFill>
-                <a:latin typeface="Century Gothic"/>
-                <a:cs typeface="Century Gothic"/>
+                <a:latin typeface="Arial"/>
+                <a:cs typeface="Arial"/>
               </a:rPr>
               <a:t>Tables and figures that stand alone</a:t>
             </a:r>
@@ -19234,8 +19126,8 @@
                 <a:solidFill>
                   <a:srgbClr val="FFFFFF"/>
                 </a:solidFill>
-                <a:latin typeface="Century Gothic"/>
-                <a:cs typeface="Century Gothic"/>
+                <a:latin typeface="Arial"/>
+                <a:cs typeface="Arial"/>
               </a:rPr>
               <a:t>KEY MESSAGE   </a:t>
             </a:r>
@@ -19244,8 +19136,8 @@
                 <a:solidFill>
                   <a:srgbClr val="FFFFFF"/>
                 </a:solidFill>
-                <a:latin typeface="Century Gothic"/>
-                <a:cs typeface="Century Gothic"/>
+                <a:latin typeface="Arial"/>
+                <a:cs typeface="Arial"/>
               </a:rPr>
               <a:t>A reader should understand each table without reading the text.</a:t>
             </a:r>
@@ -19282,7 +19174,7 @@
                     <a:lumMod val="50000"/>
                   </a:schemeClr>
                 </a:solidFill>
-                <a:latin typeface="Verdana"/>
+                <a:latin typeface="Arial"/>
               </a:rPr>
               <a:t>Neudata | #ClearDataClearImpact</a:t>
             </a:r>
@@ -19412,8 +19304,8 @@
                 <a:solidFill>
                   <a:srgbClr val="0D7377"/>
                 </a:solidFill>
-                <a:latin typeface="Century Gothic"/>
-                <a:cs typeface="Century Gothic"/>
+                <a:latin typeface="Arial"/>
+                <a:cs typeface="Arial"/>
               </a:rPr>
               <a:t>Worked example: FLUID-ICU Table 1 in one sentence</a:t>
             </a:r>
@@ -19481,7 +19373,7 @@
                           <a:solidFill>
                             <a:srgbClr val="FFFFFF"/>
                           </a:solidFill>
-                          <a:latin typeface="Century Gothic"/>
+                          <a:latin typeface="Arial"/>
                         </a:rPr>
                         <a:t>Characteristic</a:t>
                       </a:r>
@@ -19504,7 +19396,7 @@
                           <a:solidFill>
                             <a:srgbClr val="FFFFFF"/>
                           </a:solidFill>
-                          <a:latin typeface="Century Gothic"/>
+                          <a:latin typeface="Arial"/>
                         </a:rPr>
                         <a:t>Negative balance (n = 245)</a:t>
                       </a:r>
@@ -19527,7 +19419,7 @@
                           <a:solidFill>
                             <a:srgbClr val="FFFFFF"/>
                           </a:solidFill>
-                          <a:latin typeface="Century Gothic"/>
+                          <a:latin typeface="Arial"/>
                         </a:rPr>
                         <a:t>Positive balance (n = 373)</a:t>
                       </a:r>
@@ -19552,7 +19444,7 @@
                           <a:solidFill>
                             <a:srgbClr val="000000"/>
                           </a:solidFill>
-                          <a:latin typeface="Century Gothic"/>
+                          <a:latin typeface="Arial"/>
                         </a:rPr>
                         <a:t>Age, years, mean</a:t>
                       </a:r>
@@ -19575,7 +19467,7 @@
                           <a:solidFill>
                             <a:srgbClr val="000000"/>
                           </a:solidFill>
-                          <a:latin typeface="Century Gothic"/>
+                          <a:latin typeface="Arial"/>
                         </a:rPr>
                         <a:t>64.6</a:t>
                       </a:r>
@@ -19598,7 +19490,7 @@
                           <a:solidFill>
                             <a:srgbClr val="000000"/>
                           </a:solidFill>
-                          <a:latin typeface="Century Gothic"/>
+                          <a:latin typeface="Arial"/>
                         </a:rPr>
                         <a:t>61.4</a:t>
                       </a:r>
@@ -19623,7 +19515,7 @@
                           <a:solidFill>
                             <a:srgbClr val="000000"/>
                           </a:solidFill>
-                          <a:latin typeface="Century Gothic"/>
+                          <a:latin typeface="Arial"/>
                         </a:rPr>
                         <a:t>SOFA score, median (IQR)</a:t>
                       </a:r>
@@ -19646,7 +19538,7 @@
                           <a:solidFill>
                             <a:srgbClr val="000000"/>
                           </a:solidFill>
-                          <a:latin typeface="Century Gothic"/>
+                          <a:latin typeface="Arial"/>
                         </a:rPr>
                         <a:t>6 (4 to 8)</a:t>
                       </a:r>
@@ -19669,7 +19561,7 @@
                           <a:solidFill>
                             <a:srgbClr val="000000"/>
                           </a:solidFill>
-                          <a:latin typeface="Century Gothic"/>
+                          <a:latin typeface="Arial"/>
                         </a:rPr>
                         <a:t>8 (6 to 10)</a:t>
                       </a:r>
@@ -19694,7 +19586,7 @@
                           <a:solidFill>
                             <a:srgbClr val="000000"/>
                           </a:solidFill>
-                          <a:latin typeface="Century Gothic"/>
+                          <a:latin typeface="Arial"/>
                         </a:rPr>
                         <a:t>Vasopressor, n (%)</a:t>
                       </a:r>
@@ -19717,7 +19609,7 @@
                           <a:solidFill>
                             <a:srgbClr val="000000"/>
                           </a:solidFill>
-                          <a:latin typeface="Century Gothic"/>
+                          <a:latin typeface="Arial"/>
                         </a:rPr>
                         <a:t>61 (24.9%)</a:t>
                       </a:r>
@@ -19740,7 +19632,7 @@
                           <a:solidFill>
                             <a:srgbClr val="000000"/>
                           </a:solidFill>
-                          <a:latin typeface="Century Gothic"/>
+                          <a:latin typeface="Arial"/>
                         </a:rPr>
                         <a:t>205 (55.0%)</a:t>
                       </a:r>
@@ -19765,7 +19657,7 @@
                           <a:solidFill>
                             <a:srgbClr val="000000"/>
                           </a:solidFill>
-                          <a:latin typeface="Century Gothic"/>
+                          <a:latin typeface="Arial"/>
                         </a:rPr>
                         <a:t>Mechanical ventilation, n (%)</a:t>
                       </a:r>
@@ -19788,7 +19680,7 @@
                           <a:solidFill>
                             <a:srgbClr val="000000"/>
                           </a:solidFill>
-                          <a:latin typeface="Century Gothic"/>
+                          <a:latin typeface="Arial"/>
                         </a:rPr>
                         <a:t>97 (39.6%)</a:t>
                       </a:r>
@@ -19811,7 +19703,7 @@
                           <a:solidFill>
                             <a:srgbClr val="000000"/>
                           </a:solidFill>
-                          <a:latin typeface="Century Gothic"/>
+                          <a:latin typeface="Arial"/>
                         </a:rPr>
                         <a:t>216 (57.9%)</a:t>
                       </a:r>
@@ -19836,7 +19728,7 @@
                           <a:solidFill>
                             <a:srgbClr val="000000"/>
                           </a:solidFill>
-                          <a:latin typeface="Century Gothic"/>
+                          <a:latin typeface="Arial"/>
                         </a:rPr>
                         <a:t>Lactate, mmol/L, median (IQR)</a:t>
                       </a:r>
@@ -19859,7 +19751,7 @@
                           <a:solidFill>
                             <a:srgbClr val="000000"/>
                           </a:solidFill>
-                          <a:latin typeface="Century Gothic"/>
+                          <a:latin typeface="Arial"/>
                         </a:rPr>
                         <a:t>2.2 (1.4 to 3.0)</a:t>
                       </a:r>
@@ -19882,7 +19774,7 @@
                           <a:solidFill>
                             <a:srgbClr val="000000"/>
                           </a:solidFill>
-                          <a:latin typeface="Century Gothic"/>
+                          <a:latin typeface="Arial"/>
                         </a:rPr>
                         <a:t>2.9 (1.9 to 4.0)</a:t>
                       </a:r>
@@ -19907,7 +19799,7 @@
                           <a:solidFill>
                             <a:srgbClr val="000000"/>
                           </a:solidFill>
-                          <a:latin typeface="Century Gothic"/>
+                          <a:latin typeface="Arial"/>
                         </a:rPr>
                         <a:t>Heart failure, n (%)</a:t>
                       </a:r>
@@ -19930,7 +19822,7 @@
                           <a:solidFill>
                             <a:srgbClr val="000000"/>
                           </a:solidFill>
-                          <a:latin typeface="Century Gothic"/>
+                          <a:latin typeface="Arial"/>
                         </a:rPr>
                         <a:t>54 (22.0%)</a:t>
                       </a:r>
@@ -19953,7 +19845,7 @@
                           <a:solidFill>
                             <a:srgbClr val="000000"/>
                           </a:solidFill>
-                          <a:latin typeface="Century Gothic"/>
+                          <a:latin typeface="Arial"/>
                         </a:rPr>
                         <a:t>43 (11.5%)</a:t>
                       </a:r>
@@ -20001,8 +19893,8 @@
                 <a:solidFill>
                   <a:srgbClr val="595959"/>
                 </a:solidFill>
-                <a:latin typeface="Century Gothic"/>
-                <a:cs typeface="Century Gothic"/>
+                <a:latin typeface="Arial"/>
+                <a:cs typeface="Arial"/>
               </a:rPr>
               <a:t>SIMULATED data (results pack Q1, Table 1). Sentence: 'Patients with a positive balance were sicker at baseline.'</a:t>
             </a:r>
@@ -20039,7 +19931,7 @@
                     <a:lumMod val="50000"/>
                   </a:schemeClr>
                 </a:solidFill>
-                <a:latin typeface="Verdana"/>
+                <a:latin typeface="Arial"/>
               </a:rPr>
               <a:t>Neudata | #ClearDataClearImpact</a:t>
             </a:r>
@@ -20169,8 +20061,8 @@
                 <a:solidFill>
                   <a:srgbClr val="0D7377"/>
                 </a:solidFill>
-                <a:latin typeface="Century Gothic"/>
-                <a:cs typeface="Century Gothic"/>
+                <a:latin typeface="Arial"/>
+                <a:cs typeface="Arial"/>
               </a:rPr>
               <a:t>STROBE for the FLUID-ICU paper: which item goes where</a:t>
             </a:r>
@@ -20266,8 +20158,8 @@
                 <a:solidFill>
                   <a:srgbClr val="FFFFFF"/>
                 </a:solidFill>
-                <a:latin typeface="Century Gothic"/>
-                <a:cs typeface="Century Gothic"/>
+                <a:latin typeface="Arial"/>
+                <a:cs typeface="Arial"/>
               </a:rPr>
               <a:t>KEY MESSAGE   </a:t>
             </a:r>
@@ -20276,8 +20168,8 @@
                 <a:solidFill>
                   <a:srgbClr val="FFFFFF"/>
                 </a:solidFill>
-                <a:latin typeface="Century Gothic"/>
-                <a:cs typeface="Century Gothic"/>
+                <a:latin typeface="Arial"/>
+                <a:cs typeface="Arial"/>
               </a:rPr>
               <a:t>Write with the STROBE checklist open and tick each item as you write it.</a:t>
             </a:r>
@@ -20314,7 +20206,7 @@
                     <a:lumMod val="50000"/>
                   </a:schemeClr>
                 </a:solidFill>
-                <a:latin typeface="Verdana"/>
+                <a:latin typeface="Arial"/>
               </a:rPr>
               <a:t>Neudata | #ClearDataClearImpact</a:t>
             </a:r>
@@ -20444,8 +20336,8 @@
                 <a:solidFill>
                   <a:srgbClr val="0D7377"/>
                 </a:solidFill>
-                <a:latin typeface="Century Gothic"/>
-                <a:cs typeface="Century Gothic"/>
+                <a:latin typeface="Arial"/>
+                <a:cs typeface="Arial"/>
               </a:rPr>
               <a:t>Check: Methods, Results or Discussion?</a:t>
             </a:r>
@@ -20515,8 +20407,8 @@
                 <a:solidFill>
                   <a:srgbClr val="FFFFFF"/>
                 </a:solidFill>
-                <a:latin typeface="Century Gothic"/>
-                <a:cs typeface="Century Gothic"/>
+                <a:latin typeface="Arial"/>
+                <a:cs typeface="Arial"/>
               </a:rPr>
               <a:t>QUICK QUIZ   |   3 min</a:t>
             </a:r>
@@ -20553,25 +20445,19 @@
               <a:spcBef>
                 <a:spcPts val="450"/>
               </a:spcBef>
-              <a:buNone/>
-            </a:pPr>
-            <a:r>
-              <a:rPr lang="en-US" sz="1650" b="1" dirty="0">
-                <a:solidFill>
-                  <a:srgbClr val="6C3483"/>
-                </a:solidFill>
-                <a:latin typeface="Century Gothic"/>
-                <a:cs typeface="Century Gothic"/>
-              </a:rPr>
-              <a:t>1.  </a:t>
-            </a:r>
+              <a:buClr>
+                <a:srgbClr val="6C3483"/>
+              </a:buClr>
+              <a:buFont typeface="Arial"/>
+              <a:buChar char="•"/>
+            </a:pPr>
             <a:r>
               <a:rPr lang="en-US" sz="1650" dirty="0">
                 <a:solidFill>
                   <a:srgbClr val="000000"/>
                 </a:solidFill>
-                <a:latin typeface="Century Gothic"/>
-                <a:cs typeface="Century Gothic"/>
+                <a:latin typeface="Arial"/>
+                <a:cs typeface="Arial"/>
               </a:rPr>
               <a:t>'We used logistic regression adjusted for SOFA and age.'</a:t>
             </a:r>
@@ -20584,25 +20470,19 @@
               <a:spcBef>
                 <a:spcPts val="450"/>
               </a:spcBef>
-              <a:buNone/>
-            </a:pPr>
-            <a:r>
-              <a:rPr lang="en-US" sz="1650" b="1" dirty="0">
-                <a:solidFill>
-                  <a:srgbClr val="6C3483"/>
-                </a:solidFill>
-                <a:latin typeface="Century Gothic"/>
-                <a:cs typeface="Century Gothic"/>
-              </a:rPr>
-              <a:t>2.  </a:t>
-            </a:r>
+              <a:buClr>
+                <a:srgbClr val="6C3483"/>
+              </a:buClr>
+              <a:buFont typeface="Arial"/>
+              <a:buChar char="•"/>
+            </a:pPr>
             <a:r>
               <a:rPr lang="en-US" sz="1650" dirty="0">
                 <a:solidFill>
                   <a:srgbClr val="000000"/>
                 </a:solidFill>
-                <a:latin typeface="Century Gothic"/>
-                <a:cs typeface="Century Gothic"/>
+                <a:latin typeface="Arial"/>
+                <a:cs typeface="Arial"/>
               </a:rPr>
               <a:t>'Of 640 patients screened, 600 were included.'</a:t>
             </a:r>
@@ -20615,25 +20495,19 @@
               <a:spcBef>
                 <a:spcPts val="450"/>
               </a:spcBef>
-              <a:buNone/>
-            </a:pPr>
-            <a:r>
-              <a:rPr lang="en-US" sz="1650" b="1" dirty="0">
-                <a:solidFill>
-                  <a:srgbClr val="6C3483"/>
-                </a:solidFill>
-                <a:latin typeface="Century Gothic"/>
-                <a:cs typeface="Century Gothic"/>
-              </a:rPr>
-              <a:t>3.  </a:t>
-            </a:r>
+              <a:buClr>
+                <a:srgbClr val="6C3483"/>
+              </a:buClr>
+              <a:buFont typeface="Arial"/>
+              <a:buChar char="•"/>
+            </a:pPr>
             <a:r>
               <a:rPr lang="en-US" sz="1650" dirty="0">
                 <a:solidFill>
                   <a:srgbClr val="000000"/>
                 </a:solidFill>
-                <a:latin typeface="Century Gothic"/>
-                <a:cs typeface="Century Gothic"/>
+                <a:latin typeface="Arial"/>
+                <a:cs typeface="Arial"/>
               </a:rPr>
               <a:t>'This may be because sicker patients received more fluid.'</a:t>
             </a:r>
@@ -20646,25 +20520,19 @@
               <a:spcBef>
                 <a:spcPts val="450"/>
               </a:spcBef>
-              <a:buNone/>
-            </a:pPr>
-            <a:r>
-              <a:rPr lang="en-US" sz="1650" b="1" dirty="0">
-                <a:solidFill>
-                  <a:srgbClr val="6C3483"/>
-                </a:solidFill>
-                <a:latin typeface="Century Gothic"/>
-                <a:cs typeface="Century Gothic"/>
-              </a:rPr>
-              <a:t>4.  </a:t>
-            </a:r>
+              <a:buClr>
+                <a:srgbClr val="6C3483"/>
+              </a:buClr>
+              <a:buFont typeface="Arial"/>
+              <a:buChar char="•"/>
+            </a:pPr>
             <a:r>
               <a:rPr lang="en-US" sz="1650" dirty="0">
                 <a:solidFill>
                   <a:srgbClr val="000000"/>
                 </a:solidFill>
-                <a:latin typeface="Century Gothic"/>
-                <a:cs typeface="Century Gothic"/>
+                <a:latin typeface="Arial"/>
+                <a:cs typeface="Arial"/>
               </a:rPr>
               <a:t>'Lactate was missing in 15% and was imputed.'</a:t>
             </a:r>
@@ -20677,25 +20545,19 @@
               <a:spcBef>
                 <a:spcPts val="450"/>
               </a:spcBef>
-              <a:buNone/>
-            </a:pPr>
-            <a:r>
-              <a:rPr lang="en-US" sz="1650" b="1" dirty="0">
-                <a:solidFill>
-                  <a:srgbClr val="6C3483"/>
-                </a:solidFill>
-                <a:latin typeface="Century Gothic"/>
-                <a:cs typeface="Century Gothic"/>
-              </a:rPr>
-              <a:t>5.  </a:t>
-            </a:r>
+              <a:buClr>
+                <a:srgbClr val="6C3483"/>
+              </a:buClr>
+              <a:buFont typeface="Arial"/>
+              <a:buChar char="•"/>
+            </a:pPr>
             <a:r>
               <a:rPr lang="en-US" sz="1650" dirty="0">
                 <a:solidFill>
                   <a:srgbClr val="000000"/>
                 </a:solidFill>
-                <a:latin typeface="Century Gothic"/>
-                <a:cs typeface="Century Gothic"/>
+                <a:latin typeface="Arial"/>
+                <a:cs typeface="Arial"/>
               </a:rPr>
               <a:t>'28-day mortality was higher with a positive balance (OR ..., 95% CI ...).'</a:t>
             </a:r>
@@ -20739,8 +20601,8 @@
                 <a:solidFill>
                   <a:srgbClr val="6C3483"/>
                 </a:solidFill>
-                <a:latin typeface="Century Gothic"/>
-                <a:cs typeface="Century Gothic"/>
+                <a:latin typeface="Arial"/>
+                <a:cs typeface="Arial"/>
               </a:rPr>
               <a:t>Answers</a:t>
             </a:r>
@@ -20761,8 +20623,8 @@
                 <a:solidFill>
                   <a:srgbClr val="000000"/>
                 </a:solidFill>
-                <a:latin typeface="Century Gothic"/>
-                <a:cs typeface="Century Gothic"/>
+                <a:latin typeface="Arial"/>
+                <a:cs typeface="Arial"/>
               </a:rPr>
               <a:t>1 Methods</a:t>
             </a:r>
@@ -20783,8 +20645,8 @@
                 <a:solidFill>
                   <a:srgbClr val="000000"/>
                 </a:solidFill>
-                <a:latin typeface="Century Gothic"/>
-                <a:cs typeface="Century Gothic"/>
+                <a:latin typeface="Arial"/>
+                <a:cs typeface="Arial"/>
               </a:rPr>
               <a:t>2 Results (participants)</a:t>
             </a:r>
@@ -20805,8 +20667,8 @@
                 <a:solidFill>
                   <a:srgbClr val="000000"/>
                 </a:solidFill>
-                <a:latin typeface="Century Gothic"/>
-                <a:cs typeface="Century Gothic"/>
+                <a:latin typeface="Arial"/>
+                <a:cs typeface="Arial"/>
               </a:rPr>
               <a:t>3 Discussion (explain)</a:t>
             </a:r>
@@ -20827,8 +20689,8 @@
                 <a:solidFill>
                   <a:srgbClr val="000000"/>
                 </a:solidFill>
-                <a:latin typeface="Century Gothic"/>
-                <a:cs typeface="Century Gothic"/>
+                <a:latin typeface="Arial"/>
+                <a:cs typeface="Arial"/>
               </a:rPr>
               <a:t>4 Methods (+ Results: how many)</a:t>
             </a:r>
@@ -20849,8 +20711,8 @@
                 <a:solidFill>
                   <a:srgbClr val="000000"/>
                 </a:solidFill>
-                <a:latin typeface="Century Gothic"/>
-                <a:cs typeface="Century Gothic"/>
+                <a:latin typeface="Arial"/>
+                <a:cs typeface="Arial"/>
               </a:rPr>
               <a:t>5 Results</a:t>
             </a:r>
@@ -20887,7 +20749,7 @@
                     <a:lumMod val="50000"/>
                   </a:schemeClr>
                 </a:solidFill>
-                <a:latin typeface="Verdana"/>
+                <a:latin typeface="Arial"/>
               </a:rPr>
               <a:t>Neudata | #ClearDataClearImpact</a:t>
             </a:r>
@@ -21017,8 +20879,8 @@
                 <a:solidFill>
                   <a:srgbClr val="0D7377"/>
                 </a:solidFill>
-                <a:latin typeface="Century Gothic"/>
-                <a:cs typeface="Century Gothic"/>
+                <a:latin typeface="Arial"/>
+                <a:cs typeface="Arial"/>
               </a:rPr>
               <a:t>Manuscript workshop 1  |  50 minutes</a:t>
             </a:r>
@@ -21087,8 +20949,8 @@
                 <a:solidFill>
                   <a:srgbClr val="0D7377"/>
                 </a:solidFill>
-                <a:latin typeface="Century Gothic"/>
-                <a:cs typeface="Century Gothic"/>
+                <a:latin typeface="Arial"/>
+                <a:cs typeface="Arial"/>
               </a:rPr>
               <a:t>Write your Methods and Results</a:t>
             </a:r>
@@ -21105,8 +20967,8 @@
                 <a:solidFill>
                   <a:srgbClr val="595959"/>
                 </a:solidFill>
-                <a:latin typeface="Century Gothic"/>
-                <a:cs typeface="Century Gothic"/>
+                <a:latin typeface="Arial"/>
+                <a:cs typeface="Arial"/>
               </a:rPr>
               <a:t>About 600 words, Table 1 and one figure or table, from your results pack</a:t>
             </a:r>
@@ -21143,7 +21005,7 @@
                     <a:lumMod val="50000"/>
                   </a:schemeClr>
                 </a:solidFill>
-                <a:latin typeface="Verdana"/>
+                <a:latin typeface="Arial"/>
               </a:rPr>
               <a:t>Neudata | #ClearDataClearImpact</a:t>
             </a:r>
@@ -21273,8 +21135,8 @@
                 <a:solidFill>
                   <a:srgbClr val="0D7377"/>
                 </a:solidFill>
-                <a:latin typeface="Century Gothic"/>
-                <a:cs typeface="Century Gothic"/>
+                <a:latin typeface="Arial"/>
+                <a:cs typeface="Arial"/>
               </a:rPr>
               <a:t>Fifty minutes, six people, one draft</a:t>
             </a:r>
@@ -21370,8 +21232,8 @@
                 <a:solidFill>
                   <a:srgbClr val="FFFFFF"/>
                 </a:solidFill>
-                <a:latin typeface="Century Gothic"/>
-                <a:cs typeface="Century Gothic"/>
+                <a:latin typeface="Arial"/>
+                <a:cs typeface="Arial"/>
               </a:rPr>
               <a:t>KEY MESSAGE   </a:t>
             </a:r>
@@ -21380,8 +21242,8 @@
                 <a:solidFill>
                   <a:srgbClr val="FFFFFF"/>
                 </a:solidFill>
-                <a:latin typeface="Century Gothic"/>
-                <a:cs typeface="Century Gothic"/>
+                <a:latin typeface="Arial"/>
+                <a:cs typeface="Arial"/>
               </a:rPr>
               <a:t>Every number in your text must come from your results pack: nobody calculates anything.</a:t>
             </a:r>
@@ -21418,7 +21280,7 @@
                     <a:lumMod val="50000"/>
                   </a:schemeClr>
                 </a:solidFill>
-                <a:latin typeface="Verdana"/>
+                <a:latin typeface="Arial"/>
               </a:rPr>
               <a:t>Neudata | #ClearDataClearImpact</a:t>
             </a:r>
@@ -21548,8 +21410,8 @@
                 <a:solidFill>
                   <a:srgbClr val="0D7377"/>
                 </a:solidFill>
-                <a:latin typeface="Century Gothic"/>
-                <a:cs typeface="Century Gothic"/>
+                <a:latin typeface="Arial"/>
+                <a:cs typeface="Arial"/>
               </a:rPr>
               <a:t>Manuscript workshop 1: draft Methods + Results</a:t>
             </a:r>
@@ -21619,8 +21481,8 @@
                 <a:solidFill>
                   <a:srgbClr val="FFFFFF"/>
                 </a:solidFill>
-                <a:latin typeface="Century Gothic"/>
-                <a:cs typeface="Century Gothic"/>
+                <a:latin typeface="Arial"/>
+                <a:cs typeface="Arial"/>
               </a:rPr>
               <a:t>GROUP WORK   |   50 min</a:t>
             </a:r>
@@ -21657,25 +21519,19 @@
               <a:spcBef>
                 <a:spcPts val="450"/>
               </a:spcBef>
-              <a:buNone/>
-            </a:pPr>
-            <a:r>
-              <a:rPr lang="en-US" sz="1650" b="1" dirty="0">
-                <a:solidFill>
-                  <a:srgbClr val="0D7377"/>
-                </a:solidFill>
-                <a:latin typeface="Century Gothic"/>
-                <a:cs typeface="Century Gothic"/>
-              </a:rPr>
-              <a:t>1.  </a:t>
-            </a:r>
+              <a:buClr>
+                <a:srgbClr val="0D7377"/>
+              </a:buClr>
+              <a:buFont typeface="Arial"/>
+              <a:buChar char="•"/>
+            </a:pPr>
             <a:r>
               <a:rPr lang="en-US" sz="1650" dirty="0">
                 <a:solidFill>
                   <a:srgbClr val="000000"/>
                 </a:solidFill>
-                <a:latin typeface="Century Gothic"/>
-                <a:cs typeface="Century Gothic"/>
+                <a:latin typeface="Arial"/>
+                <a:cs typeface="Arial"/>
               </a:rPr>
               <a:t>0-5: read your results pack; agree the main result in one sentence</a:t>
             </a:r>
@@ -21688,25 +21544,19 @@
               <a:spcBef>
                 <a:spcPts val="450"/>
               </a:spcBef>
-              <a:buNone/>
-            </a:pPr>
-            <a:r>
-              <a:rPr lang="en-US" sz="1650" b="1" dirty="0">
-                <a:solidFill>
-                  <a:srgbClr val="0D7377"/>
-                </a:solidFill>
-                <a:latin typeface="Century Gothic"/>
-                <a:cs typeface="Century Gothic"/>
-              </a:rPr>
-              <a:t>2.  </a:t>
-            </a:r>
+              <a:buClr>
+                <a:srgbClr val="0D7377"/>
+              </a:buClr>
+              <a:buFont typeface="Arial"/>
+              <a:buChar char="•"/>
+            </a:pPr>
             <a:r>
               <a:rPr lang="en-US" sz="1650" dirty="0">
                 <a:solidFill>
                   <a:srgbClr val="000000"/>
                 </a:solidFill>
-                <a:latin typeface="Century Gothic"/>
-                <a:cs typeface="Century Gothic"/>
+                <a:latin typeface="Arial"/>
+                <a:cs typeface="Arial"/>
               </a:rPr>
               <a:t>5-25: Methods (design, setting, participants, variables, statistics)</a:t>
             </a:r>
@@ -21719,25 +21569,19 @@
               <a:spcBef>
                 <a:spcPts val="450"/>
               </a:spcBef>
-              <a:buNone/>
-            </a:pPr>
-            <a:r>
-              <a:rPr lang="en-US" sz="1650" b="1" dirty="0">
-                <a:solidFill>
-                  <a:srgbClr val="0D7377"/>
-                </a:solidFill>
-                <a:latin typeface="Century Gothic"/>
-                <a:cs typeface="Century Gothic"/>
-              </a:rPr>
-              <a:t>3.  </a:t>
-            </a:r>
+              <a:buClr>
+                <a:srgbClr val="0D7377"/>
+              </a:buClr>
+              <a:buFont typeface="Arial"/>
+              <a:buChar char="•"/>
+            </a:pPr>
             <a:r>
               <a:rPr lang="en-US" sz="1650" dirty="0">
                 <a:solidFill>
                   <a:srgbClr val="000000"/>
                 </a:solidFill>
-                <a:latin typeface="Century Gothic"/>
-                <a:cs typeface="Century Gothic"/>
+                <a:latin typeface="Arial"/>
+                <a:cs typeface="Arial"/>
               </a:rPr>
               <a:t>25-40: Results (participants, Table 1, crude + adjusted main result)</a:t>
             </a:r>
@@ -21750,25 +21594,19 @@
               <a:spcBef>
                 <a:spcPts val="450"/>
               </a:spcBef>
-              <a:buNone/>
-            </a:pPr>
-            <a:r>
-              <a:rPr lang="en-US" sz="1650" b="1" dirty="0">
-                <a:solidFill>
-                  <a:srgbClr val="0D7377"/>
-                </a:solidFill>
-                <a:latin typeface="Century Gothic"/>
-                <a:cs typeface="Century Gothic"/>
-              </a:rPr>
-              <a:t>4.  </a:t>
-            </a:r>
+              <a:buClr>
+                <a:srgbClr val="0D7377"/>
+              </a:buClr>
+              <a:buFont typeface="Arial"/>
+              <a:buChar char="•"/>
+            </a:pPr>
             <a:r>
               <a:rPr lang="en-US" sz="1650" dirty="0">
                 <a:solidFill>
                   <a:srgbClr val="000000"/>
                 </a:solidFill>
-                <a:latin typeface="Century Gothic"/>
-                <a:cs typeface="Century Gothic"/>
+                <a:latin typeface="Arial"/>
+                <a:cs typeface="Arial"/>
               </a:rPr>
               <a:t>40-47: Table 1 + one figure/table with titles and footnotes</a:t>
             </a:r>
@@ -21781,25 +21619,19 @@
               <a:spcBef>
                 <a:spcPts val="450"/>
               </a:spcBef>
-              <a:buNone/>
-            </a:pPr>
-            <a:r>
-              <a:rPr lang="en-US" sz="1650" b="1" dirty="0">
-                <a:solidFill>
-                  <a:srgbClr val="0D7377"/>
-                </a:solidFill>
-                <a:latin typeface="Century Gothic"/>
-                <a:cs typeface="Century Gothic"/>
-              </a:rPr>
-              <a:t>5.  </a:t>
-            </a:r>
+              <a:buClr>
+                <a:srgbClr val="0D7377"/>
+              </a:buClr>
+              <a:buFont typeface="Arial"/>
+              <a:buChar char="•"/>
+            </a:pPr>
             <a:r>
               <a:rPr lang="en-US" sz="1650" dirty="0">
                 <a:solidFill>
                   <a:srgbClr val="000000"/>
                 </a:solidFill>
-                <a:latin typeface="Century Gothic"/>
-                <a:cs typeface="Century Gothic"/>
+                <a:latin typeface="Arial"/>
+                <a:cs typeface="Arial"/>
               </a:rPr>
               <a:t>47-50: tick STROBE items 4-17; check every number</a:t>
             </a:r>
@@ -21843,8 +21675,8 @@
                 <a:solidFill>
                   <a:srgbClr val="0D7377"/>
                 </a:solidFill>
-                <a:latin typeface="Century Gothic"/>
-                <a:cs typeface="Century Gothic"/>
+                <a:latin typeface="Arial"/>
+                <a:cs typeface="Arial"/>
               </a:rPr>
               <a:t>Use</a:t>
             </a:r>
@@ -21865,8 +21697,8 @@
                 <a:solidFill>
                   <a:srgbClr val="000000"/>
                 </a:solidFill>
-                <a:latin typeface="Century Gothic"/>
-                <a:cs typeface="Century Gothic"/>
+                <a:latin typeface="Arial"/>
+                <a:cs typeface="Arial"/>
               </a:rPr>
               <a:t>Your results pack (Q1-Q5)</a:t>
             </a:r>
@@ -21887,8 +21719,8 @@
                 <a:solidFill>
                   <a:srgbClr val="000000"/>
                 </a:solidFill>
-                <a:latin typeface="Century Gothic"/>
-                <a:cs typeface="Century Gothic"/>
+                <a:latin typeface="Arial"/>
+                <a:cs typeface="Arial"/>
               </a:rPr>
               <a:t>Manuscript template</a:t>
             </a:r>
@@ -21909,8 +21741,8 @@
                 <a:solidFill>
                   <a:srgbClr val="000000"/>
                 </a:solidFill>
-                <a:latin typeface="Century Gothic"/>
-                <a:cs typeface="Century Gothic"/>
+                <a:latin typeface="Arial"/>
+                <a:cs typeface="Arial"/>
               </a:rPr>
               <a:t>Worked examples (slides)</a:t>
             </a:r>
@@ -21931,8 +21763,8 @@
                 <a:solidFill>
                   <a:srgbClr val="000000"/>
                 </a:solidFill>
-                <a:latin typeface="Century Gothic"/>
-                <a:cs typeface="Century Gothic"/>
+                <a:latin typeface="Arial"/>
+                <a:cs typeface="Arial"/>
               </a:rPr>
               <a:t>STROBE items 4-17</a:t>
             </a:r>
@@ -21978,8 +21810,8 @@
                 <a:solidFill>
                   <a:srgbClr val="0D7377"/>
                 </a:solidFill>
-                <a:latin typeface="Century Gothic"/>
-                <a:cs typeface="Century Gothic"/>
+                <a:latin typeface="Arial"/>
+                <a:cs typeface="Arial"/>
               </a:rPr>
               <a:t>OUTPUT   </a:t>
             </a:r>
@@ -21988,8 +21820,8 @@
                 <a:solidFill>
                   <a:srgbClr val="000000"/>
                 </a:solidFill>
-                <a:latin typeface="Century Gothic"/>
-                <a:cs typeface="Century Gothic"/>
+                <a:latin typeface="Arial"/>
+                <a:cs typeface="Arial"/>
               </a:rPr>
               <a:t>Methods + Results (~600 words) + Table 1 + one figure/table, saved and shared</a:t>
             </a:r>
@@ -22026,7 +21858,7 @@
                     <a:lumMod val="50000"/>
                   </a:schemeClr>
                 </a:solidFill>
-                <a:latin typeface="Verdana"/>
+                <a:latin typeface="Arial"/>
               </a:rPr>
               <a:t>Neudata | #ClearDataClearImpact</a:t>
             </a:r>
@@ -22156,8 +21988,8 @@
                 <a:solidFill>
                   <a:srgbClr val="0D7377"/>
                 </a:solidFill>
-                <a:latin typeface="Century Gothic"/>
-                <a:cs typeface="Century Gothic"/>
+                <a:latin typeface="Arial"/>
+                <a:cs typeface="Arial"/>
               </a:rPr>
               <a:t>7.1  |  30 minutes</a:t>
             </a:r>
@@ -22226,8 +22058,8 @@
                 <a:solidFill>
                   <a:srgbClr val="0D7377"/>
                 </a:solidFill>
-                <a:latin typeface="Century Gothic"/>
-                <a:cs typeface="Century Gothic"/>
+                <a:latin typeface="Arial"/>
+                <a:cs typeface="Arial"/>
               </a:rPr>
               <a:t>Protocol, ethics and consent</a:t>
             </a:r>
@@ -22244,8 +22076,8 @@
                 <a:solidFill>
                   <a:srgbClr val="595959"/>
                 </a:solidFill>
-                <a:latin typeface="Century Gothic"/>
-                <a:cs typeface="Century Gothic"/>
+                <a:latin typeface="Arial"/>
+                <a:cs typeface="Arial"/>
               </a:rPr>
               <a:t>Protect the patient before the first data point</a:t>
             </a:r>
@@ -22282,7 +22114,7 @@
                     <a:lumMod val="50000"/>
                   </a:schemeClr>
                 </a:solidFill>
-                <a:latin typeface="Verdana"/>
+                <a:latin typeface="Arial"/>
               </a:rPr>
               <a:t>Neudata | #ClearDataClearImpact</a:t>
             </a:r>
@@ -22412,8 +22244,8 @@
                 <a:solidFill>
                   <a:srgbClr val="0D7377"/>
                 </a:solidFill>
-                <a:latin typeface="Century Gothic"/>
-                <a:cs typeface="Century Gothic"/>
+                <a:latin typeface="Arial"/>
+                <a:cs typeface="Arial"/>
               </a:rPr>
               <a:t>Key words of Session 7</a:t>
             </a:r>
@@ -22480,7 +22312,7 @@
                           <a:solidFill>
                             <a:srgbClr val="FFFFFF"/>
                           </a:solidFill>
-                          <a:latin typeface="Century Gothic"/>
+                          <a:latin typeface="Arial"/>
                         </a:rPr>
                         <a:t>Term</a:t>
                       </a:r>
@@ -22503,7 +22335,7 @@
                           <a:solidFill>
                             <a:srgbClr val="FFFFFF"/>
                           </a:solidFill>
-                          <a:latin typeface="Century Gothic"/>
+                          <a:latin typeface="Arial"/>
                         </a:rPr>
                         <a:t>In plain words</a:t>
                       </a:r>
@@ -22528,7 +22360,7 @@
                           <a:solidFill>
                             <a:srgbClr val="000000"/>
                           </a:solidFill>
-                          <a:latin typeface="Century Gothic"/>
+                          <a:latin typeface="Arial"/>
                         </a:rPr>
                         <a:t>Deferred consent</a:t>
                       </a:r>
@@ -22551,7 +22383,7 @@
                           <a:solidFill>
                             <a:srgbClr val="000000"/>
                           </a:solidFill>
-                          <a:latin typeface="Century Gothic"/>
+                          <a:latin typeface="Arial"/>
                         </a:rPr>
                         <a:t>Enrol first in an emergency, ask consent as soon as possible (committee-approved)</a:t>
                       </a:r>
@@ -22576,7 +22408,7 @@
                           <a:solidFill>
                             <a:srgbClr val="000000"/>
                           </a:solidFill>
-                          <a:latin typeface="Century Gothic"/>
+                          <a:latin typeface="Arial"/>
                         </a:rPr>
                         <a:t>Registration</a:t>
                       </a:r>
@@ -22599,7 +22431,7 @@
                           <a:solidFill>
                             <a:srgbClr val="000000"/>
                           </a:solidFill>
-                          <a:latin typeface="Century Gothic"/>
+                          <a:latin typeface="Arial"/>
                         </a:rPr>
                         <a:t>Public record of a study before patient 1 (mandatory for trials)</a:t>
                       </a:r>
@@ -22624,7 +22456,7 @@
                           <a:solidFill>
                             <a:srgbClr val="000000"/>
                           </a:solidFill>
-                          <a:latin typeface="Century Gothic"/>
+                          <a:latin typeface="Arial"/>
                         </a:rPr>
                         <a:t>FFP</a:t>
                       </a:r>
@@ -22647,7 +22479,7 @@
                           <a:solidFill>
                             <a:srgbClr val="000000"/>
                           </a:solidFill>
-                          <a:latin typeface="Century Gothic"/>
+                          <a:latin typeface="Arial"/>
                         </a:rPr>
                         <a:t>Research misconduct: fabrication, falsification, plagiarism</a:t>
                       </a:r>
@@ -22672,7 +22504,7 @@
                           <a:solidFill>
                             <a:srgbClr val="000000"/>
                           </a:solidFill>
-                          <a:latin typeface="Century Gothic"/>
+                          <a:latin typeface="Arial"/>
                         </a:rPr>
                         <a:t>ICMJE criteria / CRediT</a:t>
                       </a:r>
@@ -22695,7 +22527,7 @@
                           <a:solidFill>
                             <a:srgbClr val="000000"/>
                           </a:solidFill>
-                          <a:latin typeface="Century Gothic"/>
+                          <a:latin typeface="Arial"/>
                         </a:rPr>
                         <a:t>Who may be an author / who did what</a:t>
                       </a:r>
@@ -22720,7 +22552,7 @@
                           <a:solidFill>
                             <a:srgbClr val="000000"/>
                           </a:solidFill>
-                          <a:latin typeface="Century Gothic"/>
+                          <a:latin typeface="Arial"/>
                         </a:rPr>
                         <a:t>Conflict of interest</a:t>
                       </a:r>
@@ -22743,7 +22575,7 @@
                           <a:solidFill>
                             <a:srgbClr val="000000"/>
                           </a:solidFill>
-                          <a:latin typeface="Century Gothic"/>
+                          <a:latin typeface="Arial"/>
                         </a:rPr>
                         <a:t>Anything that could be seen to influence your judgement. Declare it</a:t>
                       </a:r>
@@ -22768,7 +22600,7 @@
                           <a:solidFill>
                             <a:srgbClr val="000000"/>
                           </a:solidFill>
-                          <a:latin typeface="Century Gothic"/>
+                          <a:latin typeface="Arial"/>
                         </a:rPr>
                         <a:t>STROBE</a:t>
                       </a:r>
@@ -22791,7 +22623,7 @@
                           <a:solidFill>
                             <a:srgbClr val="000000"/>
                           </a:solidFill>
-                          <a:latin typeface="Century Gothic"/>
+                          <a:latin typeface="Arial"/>
                         </a:rPr>
                         <a:t>Reporting checklist for observational studies: Methods items 4-12, Results 13-17</a:t>
                       </a:r>
@@ -22839,8 +22671,8 @@
                 <a:solidFill>
                   <a:srgbClr val="595959"/>
                 </a:solidFill>
-                <a:latin typeface="Century Gothic"/>
-                <a:cs typeface="Century Gothic"/>
+                <a:latin typeface="Arial"/>
+                <a:cs typeface="Arial"/>
               </a:rPr>
               <a:t>Full glossary (EN-VN): Course/References/</a:t>
             </a:r>
@@ -22877,7 +22709,7 @@
                     <a:lumMod val="50000"/>
                   </a:schemeClr>
                 </a:solidFill>
-                <a:latin typeface="Verdana"/>
+                <a:latin typeface="Arial"/>
               </a:rPr>
               <a:t>Neudata | #ClearDataClearImpact</a:t>
             </a:r>
@@ -23007,8 +22839,8 @@
                 <a:solidFill>
                   <a:srgbClr val="0D7377"/>
                 </a:solidFill>
-                <a:latin typeface="Century Gothic"/>
-                <a:cs typeface="Century Gothic"/>
+                <a:latin typeface="Arial"/>
+                <a:cs typeface="Arial"/>
               </a:rPr>
               <a:t>Wrap-up and homework for next Saturday</a:t>
             </a:r>
@@ -23078,8 +22910,8 @@
                 <a:solidFill>
                   <a:srgbClr val="FFFFFF"/>
                 </a:solidFill>
-                <a:latin typeface="Century Gothic"/>
-                <a:cs typeface="Century Gothic"/>
+                <a:latin typeface="Arial"/>
+                <a:cs typeface="Arial"/>
               </a:rPr>
               <a:t>DISCUSSION   |   5 min</a:t>
             </a:r>
@@ -23116,25 +22948,19 @@
               <a:spcBef>
                 <a:spcPts val="450"/>
               </a:spcBef>
-              <a:buNone/>
-            </a:pPr>
-            <a:r>
-              <a:rPr lang="en-US" sz="1650" b="1" dirty="0">
-                <a:solidFill>
-                  <a:srgbClr val="1F5C7A"/>
-                </a:solidFill>
-                <a:latin typeface="Century Gothic"/>
-                <a:cs typeface="Century Gothic"/>
-              </a:rPr>
-              <a:t>1.  </a:t>
-            </a:r>
+              <a:buClr>
+                <a:srgbClr val="1F5C7A"/>
+              </a:buClr>
+              <a:buFont typeface="Arial"/>
+              <a:buChar char="•"/>
+            </a:pPr>
             <a:r>
               <a:rPr lang="en-US" sz="1650" dirty="0">
                 <a:solidFill>
                   <a:srgbClr val="000000"/>
                 </a:solidFill>
-                <a:latin typeface="Century Gothic"/>
-                <a:cs typeface="Century Gothic"/>
+                <a:latin typeface="Arial"/>
+                <a:cs typeface="Arial"/>
               </a:rPr>
               <a:t>Three take-home messages (next to this list)</a:t>
             </a:r>
@@ -23147,25 +22973,19 @@
               <a:spcBef>
                 <a:spcPts val="450"/>
               </a:spcBef>
-              <a:buNone/>
-            </a:pPr>
-            <a:r>
-              <a:rPr lang="en-US" sz="1650" b="1" dirty="0">
-                <a:solidFill>
-                  <a:srgbClr val="1F5C7A"/>
-                </a:solidFill>
-                <a:latin typeface="Century Gothic"/>
-                <a:cs typeface="Century Gothic"/>
-              </a:rPr>
-              <a:t>2.  </a:t>
-            </a:r>
+              <a:buClr>
+                <a:srgbClr val="1F5C7A"/>
+              </a:buClr>
+              <a:buFont typeface="Arial"/>
+              <a:buChar char="•"/>
+            </a:pPr>
             <a:r>
               <a:rPr lang="en-US" sz="1650" dirty="0">
                 <a:solidFill>
                   <a:srgbClr val="000000"/>
                 </a:solidFill>
-                <a:latin typeface="Century Gothic"/>
-                <a:cs typeface="Century Gothic"/>
+                <a:latin typeface="Arial"/>
+                <a:cs typeface="Arial"/>
               </a:rPr>
               <a:t>This week: finish Proposal Part 4 and your 6 presentation slides</a:t>
             </a:r>
@@ -23178,25 +22998,19 @@
               <a:spcBef>
                 <a:spcPts val="450"/>
               </a:spcBef>
-              <a:buNone/>
-            </a:pPr>
-            <a:r>
-              <a:rPr lang="en-US" sz="1650" b="1" dirty="0">
-                <a:solidFill>
-                  <a:srgbClr val="1F5C7A"/>
-                </a:solidFill>
-                <a:latin typeface="Century Gothic"/>
-                <a:cs typeface="Century Gothic"/>
-              </a:rPr>
-              <a:t>3.  </a:t>
-            </a:r>
+              <a:buClr>
+                <a:srgbClr val="1F5C7A"/>
+              </a:buClr>
+              <a:buFont typeface="Arial"/>
+              <a:buChar char="•"/>
+            </a:pPr>
             <a:r>
               <a:rPr lang="en-US" sz="1650" dirty="0">
                 <a:solidFill>
                   <a:srgbClr val="000000"/>
                 </a:solidFill>
-                <a:latin typeface="Century Gothic"/>
-                <a:cs typeface="Century Gothic"/>
+                <a:latin typeface="Arial"/>
+                <a:cs typeface="Arial"/>
               </a:rPr>
               <a:t>This week: read your Methods + Results draft once, aloud</a:t>
             </a:r>
@@ -23209,25 +23023,19 @@
               <a:spcBef>
                 <a:spcPts val="450"/>
               </a:spcBef>
-              <a:buNone/>
-            </a:pPr>
-            <a:r>
-              <a:rPr lang="en-US" sz="1650" b="1" dirty="0">
-                <a:solidFill>
-                  <a:srgbClr val="1F5C7A"/>
-                </a:solidFill>
-                <a:latin typeface="Century Gothic"/>
-                <a:cs typeface="Century Gothic"/>
-              </a:rPr>
-              <a:t>4.  </a:t>
-            </a:r>
+              <a:buClr>
+                <a:srgbClr val="1F5C7A"/>
+              </a:buClr>
+              <a:buFont typeface="Arial"/>
+              <a:buChar char="•"/>
+            </a:pPr>
             <a:r>
               <a:rPr lang="en-US" sz="1650" dirty="0">
                 <a:solidFill>
                   <a:srgbClr val="000000"/>
                 </a:solidFill>
-                <a:latin typeface="Century Gothic"/>
-                <a:cs typeface="Century Gothic"/>
+                <a:latin typeface="Arial"/>
+                <a:cs typeface="Arial"/>
               </a:rPr>
               <a:t>Next Saturday: Introduction, Discussion, Abstract, Title, then present</a:t>
             </a:r>
@@ -23271,8 +23079,8 @@
                 <a:solidFill>
                   <a:srgbClr val="1F5C7A"/>
                 </a:solidFill>
-                <a:latin typeface="Century Gothic"/>
-                <a:cs typeface="Century Gothic"/>
+                <a:latin typeface="Arial"/>
+                <a:cs typeface="Arial"/>
               </a:rPr>
               <a:t>Take home</a:t>
             </a:r>
@@ -23293,8 +23101,8 @@
                 <a:solidFill>
                   <a:srgbClr val="000000"/>
                 </a:solidFill>
-                <a:latin typeface="Century Gothic"/>
-                <a:cs typeface="Century Gothic"/>
+                <a:latin typeface="Arial"/>
+                <a:cs typeface="Arial"/>
               </a:rPr>
               <a:t>No approval, no data: not even 'a few patients'</a:t>
             </a:r>
@@ -23315,8 +23123,8 @@
                 <a:solidFill>
                   <a:srgbClr val="000000"/>
                 </a:solidFill>
-                <a:latin typeface="Century Gothic"/>
-                <a:cs typeface="Century Gothic"/>
+                <a:latin typeface="Arial"/>
+                <a:cs typeface="Arial"/>
               </a:rPr>
               <a:t>Every author meets all four criteria; declare every interest</a:t>
             </a:r>
@@ -23337,8 +23145,8 @@
                 <a:solidFill>
                   <a:srgbClr val="000000"/>
                 </a:solidFill>
-                <a:latin typeface="Century Gothic"/>
-                <a:cs typeface="Century Gothic"/>
+                <a:latin typeface="Arial"/>
+                <a:cs typeface="Arial"/>
               </a:rPr>
               <a:t>Methods = what you did; Results = numbers with CIs, no opinions</a:t>
             </a:r>
@@ -23384,8 +23192,8 @@
                 <a:solidFill>
                   <a:srgbClr val="1F5C7A"/>
                 </a:solidFill>
-                <a:latin typeface="Century Gothic"/>
-                <a:cs typeface="Century Gothic"/>
+                <a:latin typeface="Arial"/>
+                <a:cs typeface="Arial"/>
               </a:rPr>
               <a:t>OUTPUT   </a:t>
             </a:r>
@@ -23394,8 +23202,8 @@
                 <a:solidFill>
                   <a:srgbClr val="000000"/>
                 </a:solidFill>
-                <a:latin typeface="Century Gothic"/>
-                <a:cs typeface="Century Gothic"/>
+                <a:latin typeface="Arial"/>
+                <a:cs typeface="Arial"/>
               </a:rPr>
               <a:t>Proposal slides ready; Methods + Results draft saved</a:t>
             </a:r>
@@ -23432,7 +23240,7 @@
                     <a:lumMod val="50000"/>
                   </a:schemeClr>
                 </a:solidFill>
-                <a:latin typeface="Verdana"/>
+                <a:latin typeface="Arial"/>
               </a:rPr>
               <a:t>Neudata | #ClearDataClearImpact</a:t>
             </a:r>
@@ -23562,8 +23370,8 @@
                 <a:solidFill>
                   <a:srgbClr val="0D7377"/>
                 </a:solidFill>
-                <a:latin typeface="Century Gothic"/>
-                <a:cs typeface="Century Gothic"/>
+                <a:latin typeface="Arial"/>
+                <a:cs typeface="Arial"/>
               </a:rPr>
               <a:t>Extra slides  |  Session 7</a:t>
             </a:r>
@@ -23632,8 +23440,8 @@
                 <a:solidFill>
                   <a:srgbClr val="0D7377"/>
                 </a:solidFill>
-                <a:latin typeface="Century Gothic"/>
-                <a:cs typeface="Century Gothic"/>
+                <a:latin typeface="Arial"/>
+                <a:cs typeface="Arial"/>
               </a:rPr>
               <a:t>Extra slides: Session 7</a:t>
             </a:r>
@@ -23650,8 +23458,8 @@
                 <a:solidFill>
                   <a:srgbClr val="595959"/>
                 </a:solidFill>
-                <a:latin typeface="Century Gothic"/>
-                <a:cs typeface="Century Gothic"/>
+                <a:latin typeface="Arial"/>
+                <a:cs typeface="Arial"/>
               </a:rPr>
               <a:t>Use only if time allows, or for self-study</a:t>
             </a:r>
@@ -23688,7 +23496,7 @@
                     <a:lumMod val="50000"/>
                   </a:schemeClr>
                 </a:solidFill>
-                <a:latin typeface="Verdana"/>
+                <a:latin typeface="Arial"/>
               </a:rPr>
               <a:t>Neudata | #ClearDataClearImpact</a:t>
             </a:r>
@@ -23818,8 +23626,8 @@
                 <a:solidFill>
                   <a:srgbClr val="0D7377"/>
                 </a:solidFill>
-                <a:latin typeface="Century Gothic"/>
-                <a:cs typeface="Century Gothic"/>
+                <a:latin typeface="Arial"/>
+                <a:cs typeface="Arial"/>
               </a:rPr>
               <a:t>IMRaD: the hourglass shape of every paper</a:t>
             </a:r>
@@ -23915,8 +23723,8 @@
                 <a:solidFill>
                   <a:srgbClr val="FFFFFF"/>
                 </a:solidFill>
-                <a:latin typeface="Century Gothic"/>
-                <a:cs typeface="Century Gothic"/>
+                <a:latin typeface="Arial"/>
+                <a:cs typeface="Arial"/>
               </a:rPr>
               <a:t>KEY MESSAGE   </a:t>
             </a:r>
@@ -23925,8 +23733,8 @@
                 <a:solidFill>
                   <a:srgbClr val="FFFFFF"/>
                 </a:solidFill>
-                <a:latin typeface="Century Gothic"/>
-                <a:cs typeface="Century Gothic"/>
+                <a:latin typeface="Arial"/>
+                <a:cs typeface="Arial"/>
               </a:rPr>
               <a:t>Introduction narrows to your question; Discussion widens back to practice.</a:t>
             </a:r>
@@ -23963,7 +23771,7 @@
                     <a:lumMod val="50000"/>
                   </a:schemeClr>
                 </a:solidFill>
-                <a:latin typeface="Verdana"/>
+                <a:latin typeface="Arial"/>
               </a:rPr>
               <a:t>Neudata | #ClearDataClearImpact</a:t>
             </a:r>
@@ -24093,8 +23901,8 @@
                 <a:solidFill>
                   <a:srgbClr val="0D7377"/>
                 </a:solidFill>
-                <a:latin typeface="Century Gothic"/>
-                <a:cs typeface="Century Gothic"/>
+                <a:latin typeface="Arial"/>
+                <a:cs typeface="Arial"/>
               </a:rPr>
               <a:t>CRediT: say who did what</a:t>
             </a:r>
@@ -24160,8 +23968,8 @@
                 <a:solidFill>
                   <a:srgbClr val="595959"/>
                 </a:solidFill>
-                <a:latin typeface="Century Gothic"/>
-                <a:cs typeface="Century Gothic"/>
+                <a:latin typeface="Arial"/>
+                <a:cs typeface="Arial"/>
               </a:rPr>
               <a:t>Journals now ask for each author's role in standard words.</a:t>
             </a:r>
@@ -24203,8 +24011,8 @@
                 <a:solidFill>
                   <a:srgbClr val="FFFFFF"/>
                 </a:solidFill>
-                <a:latin typeface="Century Gothic"/>
-                <a:cs typeface="Century Gothic"/>
+                <a:latin typeface="Arial"/>
+                <a:cs typeface="Arial"/>
               </a:rPr>
               <a:t>The 14 CRediT roles</a:t>
             </a:r>
@@ -24252,8 +24060,8 @@
                 <a:solidFill>
                   <a:srgbClr val="000000"/>
                 </a:solidFill>
-                <a:latin typeface="Century Gothic"/>
-                <a:cs typeface="Century Gothic"/>
+                <a:latin typeface="Arial"/>
+                <a:cs typeface="Arial"/>
               </a:rPr>
               <a:t>Conceptualization, Methodology</a:t>
             </a:r>
@@ -24273,8 +24081,8 @@
                 <a:solidFill>
                   <a:srgbClr val="000000"/>
                 </a:solidFill>
-                <a:latin typeface="Century Gothic"/>
-                <a:cs typeface="Century Gothic"/>
+                <a:latin typeface="Arial"/>
+                <a:cs typeface="Arial"/>
               </a:rPr>
               <a:t>Investigation, Formal analysis</a:t>
             </a:r>
@@ -24294,8 +24102,8 @@
                 <a:solidFill>
                   <a:srgbClr val="000000"/>
                 </a:solidFill>
-                <a:latin typeface="Century Gothic"/>
-                <a:cs typeface="Century Gothic"/>
+                <a:latin typeface="Arial"/>
+                <a:cs typeface="Arial"/>
               </a:rPr>
               <a:t>Writing – original draft</a:t>
             </a:r>
@@ -24315,8 +24123,8 @@
                 <a:solidFill>
                   <a:srgbClr val="000000"/>
                 </a:solidFill>
-                <a:latin typeface="Century Gothic"/>
-                <a:cs typeface="Century Gothic"/>
+                <a:latin typeface="Arial"/>
+                <a:cs typeface="Arial"/>
               </a:rPr>
               <a:t>Writing – review &amp; editing</a:t>
             </a:r>
@@ -24336,8 +24144,8 @@
                 <a:solidFill>
                   <a:srgbClr val="000000"/>
                 </a:solidFill>
-                <a:latin typeface="Century Gothic"/>
-                <a:cs typeface="Century Gothic"/>
+                <a:latin typeface="Arial"/>
+                <a:cs typeface="Arial"/>
               </a:rPr>
               <a:t>Supervision, Funding ...</a:t>
             </a:r>
@@ -24379,8 +24187,8 @@
                 <a:solidFill>
                   <a:srgbClr val="FFFFFF"/>
                 </a:solidFill>
-                <a:latin typeface="Century Gothic"/>
-                <a:cs typeface="Century Gothic"/>
+                <a:latin typeface="Arial"/>
+                <a:cs typeface="Arial"/>
               </a:rPr>
               <a:t>Paper 1 did it</a:t>
             </a:r>
@@ -24428,8 +24236,8 @@
                 <a:solidFill>
                   <a:srgbClr val="000000"/>
                 </a:solidFill>
-                <a:latin typeface="Century Gothic"/>
-                <a:cs typeface="Century Gothic"/>
+                <a:latin typeface="Arial"/>
+                <a:cs typeface="Arial"/>
               </a:rPr>
               <a:t>NB: Writing – original draft</a:t>
             </a:r>
@@ -24449,8 +24257,8 @@
                 <a:solidFill>
                   <a:srgbClr val="000000"/>
                 </a:solidFill>
-                <a:latin typeface="Century Gothic"/>
-                <a:cs typeface="Century Gothic"/>
+                <a:latin typeface="Arial"/>
+                <a:cs typeface="Arial"/>
               </a:rPr>
               <a:t>CS: Methodology, Formal analysis</a:t>
             </a:r>
@@ -24470,8 +24278,8 @@
                 <a:solidFill>
                   <a:srgbClr val="000000"/>
                 </a:solidFill>
-                <a:latin typeface="Century Gothic"/>
-                <a:cs typeface="Century Gothic"/>
+                <a:latin typeface="Arial"/>
+                <a:cs typeface="Arial"/>
               </a:rPr>
               <a:t>SDB: Conceptualization, Supervision, Funding acquisition</a:t>
             </a:r>
@@ -24513,8 +24321,8 @@
                 <a:solidFill>
                   <a:srgbClr val="FFFFFF"/>
                 </a:solidFill>
-                <a:latin typeface="Century Gothic"/>
-                <a:cs typeface="Century Gothic"/>
+                <a:latin typeface="Arial"/>
+                <a:cs typeface="Arial"/>
               </a:rPr>
               <a:t>Your group, today</a:t>
             </a:r>
@@ -24562,8 +24370,8 @@
                 <a:solidFill>
                   <a:srgbClr val="000000"/>
                 </a:solidFill>
-                <a:latin typeface="Century Gothic"/>
-                <a:cs typeface="Century Gothic"/>
+                <a:latin typeface="Arial"/>
+                <a:cs typeface="Arial"/>
               </a:rPr>
               <a:t>Agree the author list now</a:t>
             </a:r>
@@ -24583,8 +24391,8 @@
                 <a:solidFill>
                   <a:srgbClr val="000000"/>
                 </a:solidFill>
-                <a:latin typeface="Century Gothic"/>
-                <a:cs typeface="Century Gothic"/>
+                <a:latin typeface="Arial"/>
+                <a:cs typeface="Arial"/>
               </a:rPr>
               <a:t>Write each person's roles</a:t>
             </a:r>
@@ -24604,8 +24412,8 @@
                 <a:solidFill>
                   <a:srgbClr val="000000"/>
                 </a:solidFill>
-                <a:latin typeface="Century Gothic"/>
-                <a:cs typeface="Century Gothic"/>
+                <a:latin typeface="Arial"/>
+                <a:cs typeface="Arial"/>
               </a:rPr>
               <a:t>Revisit before submission</a:t>
             </a:r>
@@ -24649,8 +24457,8 @@
                 <a:solidFill>
                   <a:srgbClr val="FFFFFF"/>
                 </a:solidFill>
-                <a:latin typeface="Century Gothic"/>
-                <a:cs typeface="Century Gothic"/>
+                <a:latin typeface="Arial"/>
+                <a:cs typeface="Arial"/>
               </a:rPr>
               <a:t>KEY MESSAGE   </a:t>
             </a:r>
@@ -24659,8 +24467,8 @@
                 <a:solidFill>
                   <a:srgbClr val="FFFFFF"/>
                 </a:solidFill>
-                <a:latin typeface="Century Gothic"/>
-                <a:cs typeface="Century Gothic"/>
+                <a:latin typeface="Arial"/>
+                <a:cs typeface="Arial"/>
               </a:rPr>
               <a:t>Transparent roles prevent gift and ghost authorship.</a:t>
             </a:r>
@@ -24697,7 +24505,7 @@
                     <a:lumMod val="50000"/>
                   </a:schemeClr>
                 </a:solidFill>
-                <a:latin typeface="Verdana"/>
+                <a:latin typeface="Arial"/>
               </a:rPr>
               <a:t>Neudata | #ClearDataClearImpact</a:t>
             </a:r>
@@ -24851,8 +24659,8 @@
                 <a:solidFill>
                   <a:srgbClr val="4472C4"/>
                 </a:solidFill>
-                <a:latin typeface="Century Gothic"/>
-                <a:cs typeface="Century Gothic"/>
+                <a:latin typeface="Arial"/>
+                <a:cs typeface="Arial"/>
               </a:rPr>
               <a:t>Copyright © Neudata, 2026</a:t>
             </a:r>
@@ -24997,7 +24805,7 @@
                     <a:lumMod val="50000"/>
                   </a:schemeClr>
                 </a:solidFill>
-                <a:latin typeface="Verdana"/>
+                <a:latin typeface="Arial"/>
               </a:rPr>
               <a:t>Neudata | #ClearDataClearImpact</a:t>
             </a:r>
@@ -25103,8 +24911,8 @@
                 <a:solidFill>
                   <a:srgbClr val="0D7377"/>
                 </a:solidFill>
-                <a:latin typeface="Century Gothic"/>
-                <a:cs typeface="Century Gothic"/>
+                <a:latin typeface="Arial"/>
+                <a:cs typeface="Arial"/>
               </a:rPr>
               <a:t>The protocol: your study's building plan</a:t>
             </a:r>
@@ -25200,8 +25008,8 @@
                 <a:solidFill>
                   <a:srgbClr val="FFFFFF"/>
                 </a:solidFill>
-                <a:latin typeface="Century Gothic"/>
-                <a:cs typeface="Century Gothic"/>
+                <a:latin typeface="Arial"/>
+                <a:cs typeface="Arial"/>
               </a:rPr>
               <a:t>KEY MESSAGE   </a:t>
             </a:r>
@@ -25210,8 +25018,8 @@
                 <a:solidFill>
                   <a:srgbClr val="FFFFFF"/>
                 </a:solidFill>
-                <a:latin typeface="Century Gothic"/>
-                <a:cs typeface="Century Gothic"/>
+                <a:latin typeface="Arial"/>
+                <a:cs typeface="Arial"/>
               </a:rPr>
               <a:t>Your four proposal parts ARE the skeleton of a protocol.</a:t>
             </a:r>
@@ -25248,7 +25056,7 @@
                     <a:lumMod val="50000"/>
                   </a:schemeClr>
                 </a:solidFill>
-                <a:latin typeface="Verdana"/>
+                <a:latin typeface="Arial"/>
               </a:rPr>
               <a:t>Neudata | #ClearDataClearImpact</a:t>
             </a:r>
@@ -25378,8 +25186,8 @@
                 <a:solidFill>
                   <a:srgbClr val="0D7377"/>
                 </a:solidFill>
-                <a:latin typeface="Century Gothic"/>
-                <a:cs typeface="Century Gothic"/>
+                <a:latin typeface="Arial"/>
+                <a:cs typeface="Arial"/>
               </a:rPr>
               <a:t>Two rule books: Helsinki and Good Clinical Practice</a:t>
             </a:r>
@@ -25475,8 +25283,8 @@
                 <a:solidFill>
                   <a:srgbClr val="FFFFFF"/>
                 </a:solidFill>
-                <a:latin typeface="Century Gothic"/>
-                <a:cs typeface="Century Gothic"/>
+                <a:latin typeface="Arial"/>
+                <a:cs typeface="Arial"/>
               </a:rPr>
               <a:t>KEY MESSAGE   </a:t>
             </a:r>
@@ -25485,8 +25293,8 @@
                 <a:solidFill>
                   <a:srgbClr val="FFFFFF"/>
                 </a:solidFill>
-                <a:latin typeface="Century Gothic"/>
-                <a:cs typeface="Century Gothic"/>
+                <a:latin typeface="Arial"/>
+                <a:cs typeface="Arial"/>
               </a:rPr>
               <a:t>Helsinki says WHY we protect participants; GCP says HOW we run a trial well.</a:t>
             </a:r>
@@ -25523,7 +25331,7 @@
                     <a:lumMod val="50000"/>
                   </a:schemeClr>
                 </a:solidFill>
-                <a:latin typeface="Verdana"/>
+                <a:latin typeface="Arial"/>
               </a:rPr>
               <a:t>Neudata | #ClearDataClearImpact</a:t>
             </a:r>
@@ -25653,8 +25461,8 @@
                 <a:solidFill>
                   <a:srgbClr val="0D7377"/>
                 </a:solidFill>
-                <a:latin typeface="Century Gothic"/>
-                <a:cs typeface="Century Gothic"/>
+                <a:latin typeface="Arial"/>
+                <a:cs typeface="Arial"/>
               </a:rPr>
               <a:t>The ethics-committee journey: approval before data</a:t>
             </a:r>
@@ -25750,8 +25558,8 @@
                 <a:solidFill>
                   <a:srgbClr val="FFFFFF"/>
                 </a:solidFill>
-                <a:latin typeface="Century Gothic"/>
-                <a:cs typeface="Century Gothic"/>
+                <a:latin typeface="Arial"/>
+                <a:cs typeface="Arial"/>
               </a:rPr>
               <a:t>KEY MESSAGE   </a:t>
             </a:r>
@@ -25760,8 +25568,8 @@
                 <a:solidFill>
                   <a:srgbClr val="FFFFFF"/>
                 </a:solidFill>
-                <a:latin typeface="Century Gothic"/>
-                <a:cs typeface="Century Gothic"/>
+                <a:latin typeface="Arial"/>
+                <a:cs typeface="Arial"/>
               </a:rPr>
               <a:t>No approval letter, no data collection: not even 'just a few patients'.</a:t>
             </a:r>
@@ -25798,7 +25606,7 @@
                     <a:lumMod val="50000"/>
                   </a:schemeClr>
                 </a:solidFill>
-                <a:latin typeface="Verdana"/>
+                <a:latin typeface="Arial"/>
               </a:rPr>
               <a:t>Neudata | #ClearDataClearImpact</a:t>
             </a:r>
@@ -25928,8 +25736,8 @@
                 <a:solidFill>
                   <a:srgbClr val="0D7377"/>
                 </a:solidFill>
-                <a:latin typeface="Century Gothic"/>
-                <a:cs typeface="Century Gothic"/>
+                <a:latin typeface="Arial"/>
+                <a:cs typeface="Arial"/>
               </a:rPr>
               <a:t>Register before the first participant</a:t>
             </a:r>
@@ -26025,8 +25833,8 @@
                 <a:solidFill>
                   <a:srgbClr val="FFFFFF"/>
                 </a:solidFill>
-                <a:latin typeface="Century Gothic"/>
-                <a:cs typeface="Century Gothic"/>
+                <a:latin typeface="Arial"/>
+                <a:cs typeface="Arial"/>
               </a:rPr>
               <a:t>KEY MESSAGE   </a:t>
             </a:r>
@@ -26035,8 +25843,8 @@
                 <a:solidFill>
                   <a:srgbClr val="FFFFFF"/>
                 </a:solidFill>
-                <a:latin typeface="Century Gothic"/>
-                <a:cs typeface="Century Gothic"/>
+                <a:latin typeface="Arial"/>
+                <a:cs typeface="Arial"/>
               </a:rPr>
               <a:t>Trials: no registration before the first patient, no publication.</a:t>
             </a:r>
@@ -26073,7 +25881,7 @@
                     <a:lumMod val="50000"/>
                   </a:schemeClr>
                 </a:solidFill>
-                <a:latin typeface="Verdana"/>
+                <a:latin typeface="Arial"/>
               </a:rPr>
               <a:t>Neudata | #ClearDataClearImpact</a:t>
             </a:r>
@@ -26203,8 +26011,8 @@
                 <a:solidFill>
                   <a:srgbClr val="0D7377"/>
                 </a:solidFill>
-                <a:latin typeface="Century Gothic"/>
-                <a:cs typeface="Century Gothic"/>
+                <a:latin typeface="Arial"/>
+                <a:cs typeface="Arial"/>
               </a:rPr>
               <a:t>Check: register or not?</a:t>
             </a:r>
@@ -26274,8 +26082,8 @@
                 <a:solidFill>
                   <a:srgbClr val="FFFFFF"/>
                 </a:solidFill>
-                <a:latin typeface="Century Gothic"/>
-                <a:cs typeface="Century Gothic"/>
+                <a:latin typeface="Arial"/>
+                <a:cs typeface="Arial"/>
               </a:rPr>
               <a:t>QUICK QUIZ   |   2 min</a:t>
             </a:r>
@@ -26312,25 +26120,19 @@
               <a:spcBef>
                 <a:spcPts val="450"/>
               </a:spcBef>
-              <a:buNone/>
-            </a:pPr>
-            <a:r>
-              <a:rPr lang="en-US" sz="1650" b="1" dirty="0">
-                <a:solidFill>
-                  <a:srgbClr val="6C3483"/>
-                </a:solidFill>
-                <a:latin typeface="Century Gothic"/>
-                <a:cs typeface="Century Gothic"/>
-              </a:rPr>
-              <a:t>1.  </a:t>
-            </a:r>
+              <a:buClr>
+                <a:srgbClr val="6C3483"/>
+              </a:buClr>
+              <a:buFont typeface="Arial"/>
+              <a:buChar char="•"/>
+            </a:pPr>
             <a:r>
               <a:rPr lang="en-US" sz="1650" dirty="0">
                 <a:solidFill>
                   <a:srgbClr val="000000"/>
                 </a:solidFill>
-                <a:latin typeface="Century Gothic"/>
-                <a:cs typeface="Century Gothic"/>
+                <a:latin typeface="Arial"/>
+                <a:cs typeface="Arial"/>
               </a:rPr>
               <a:t>A randomised trial of two dressings for pressure injuries</a:t>
             </a:r>
@@ -26343,25 +26145,19 @@
               <a:spcBef>
                 <a:spcPts val="450"/>
               </a:spcBef>
-              <a:buNone/>
-            </a:pPr>
-            <a:r>
-              <a:rPr lang="en-US" sz="1650" b="1" dirty="0">
-                <a:solidFill>
-                  <a:srgbClr val="6C3483"/>
-                </a:solidFill>
-                <a:latin typeface="Century Gothic"/>
-                <a:cs typeface="Century Gothic"/>
-              </a:rPr>
-              <a:t>2.  </a:t>
-            </a:r>
+              <a:buClr>
+                <a:srgbClr val="6C3483"/>
+              </a:buClr>
+              <a:buFont typeface="Arial"/>
+              <a:buChar char="•"/>
+            </a:pPr>
             <a:r>
               <a:rPr lang="en-US" sz="1650" dirty="0">
                 <a:solidFill>
                   <a:srgbClr val="000000"/>
                 </a:solidFill>
-                <a:latin typeface="Century Gothic"/>
-                <a:cs typeface="Century Gothic"/>
+                <a:latin typeface="Arial"/>
+                <a:cs typeface="Arial"/>
               </a:rPr>
               <a:t>A systematic review of fluid strategies in sepsis</a:t>
             </a:r>
@@ -26374,25 +26170,19 @@
               <a:spcBef>
                 <a:spcPts val="450"/>
               </a:spcBef>
-              <a:buNone/>
-            </a:pPr>
-            <a:r>
-              <a:rPr lang="en-US" sz="1650" b="1" dirty="0">
-                <a:solidFill>
-                  <a:srgbClr val="6C3483"/>
-                </a:solidFill>
-                <a:latin typeface="Century Gothic"/>
-                <a:cs typeface="Century Gothic"/>
-              </a:rPr>
-              <a:t>3.  </a:t>
-            </a:r>
+              <a:buClr>
+                <a:srgbClr val="6C3483"/>
+              </a:buClr>
+              <a:buFont typeface="Arial"/>
+              <a:buChar char="•"/>
+            </a:pPr>
             <a:r>
               <a:rPr lang="en-US" sz="1650" dirty="0">
                 <a:solidFill>
                   <a:srgbClr val="000000"/>
                 </a:solidFill>
-                <a:latin typeface="Century Gothic"/>
-                <a:cs typeface="Century Gothic"/>
+                <a:latin typeface="Arial"/>
+                <a:cs typeface="Arial"/>
               </a:rPr>
               <a:t>A retrospective cohort from ICU charts (like FLUID-ICU)</a:t>
             </a:r>
@@ -26405,25 +26195,19 @@
               <a:spcBef>
                 <a:spcPts val="450"/>
               </a:spcBef>
-              <a:buNone/>
-            </a:pPr>
-            <a:r>
-              <a:rPr lang="en-US" sz="1650" b="1" dirty="0">
-                <a:solidFill>
-                  <a:srgbClr val="6C3483"/>
-                </a:solidFill>
-                <a:latin typeface="Century Gothic"/>
-                <a:cs typeface="Century Gothic"/>
-              </a:rPr>
-              <a:t>4.  </a:t>
-            </a:r>
+              <a:buClr>
+                <a:srgbClr val="6C3483"/>
+              </a:buClr>
+              <a:buFont typeface="Arial"/>
+              <a:buChar char="•"/>
+            </a:pPr>
             <a:r>
               <a:rPr lang="en-US" sz="1650" dirty="0">
                 <a:solidFill>
                   <a:srgbClr val="000000"/>
                 </a:solidFill>
-                <a:latin typeface="Century Gothic"/>
-                <a:cs typeface="Century Gothic"/>
+                <a:latin typeface="Arial"/>
+                <a:cs typeface="Arial"/>
               </a:rPr>
               <a:t>A clinical audit of hand-hygiene compliance</a:t>
             </a:r>
@@ -26436,25 +26220,19 @@
               <a:spcBef>
                 <a:spcPts val="450"/>
               </a:spcBef>
-              <a:buNone/>
-            </a:pPr>
-            <a:r>
-              <a:rPr lang="en-US" sz="1650" b="1" dirty="0">
-                <a:solidFill>
-                  <a:srgbClr val="6C3483"/>
-                </a:solidFill>
-                <a:latin typeface="Century Gothic"/>
-                <a:cs typeface="Century Gothic"/>
-              </a:rPr>
-              <a:t>5.  </a:t>
-            </a:r>
+              <a:buClr>
+                <a:srgbClr val="6C3483"/>
+              </a:buClr>
+              <a:buFont typeface="Arial"/>
+              <a:buChar char="•"/>
+            </a:pPr>
             <a:r>
               <a:rPr lang="en-US" sz="1650" dirty="0">
                 <a:solidFill>
                   <a:srgbClr val="000000"/>
                 </a:solidFill>
-                <a:latin typeface="Century Gothic"/>
-                <a:cs typeface="Century Gothic"/>
+                <a:latin typeface="Arial"/>
+                <a:cs typeface="Arial"/>
               </a:rPr>
               <a:t>Show: 1 finger = must, 2 = should, 3 = not needed</a:t>
             </a:r>
@@ -26498,8 +26276,8 @@
                 <a:solidFill>
                   <a:srgbClr val="6C3483"/>
                 </a:solidFill>
-                <a:latin typeface="Century Gothic"/>
-                <a:cs typeface="Century Gothic"/>
+                <a:latin typeface="Arial"/>
+                <a:cs typeface="Arial"/>
               </a:rPr>
               <a:t>Answers</a:t>
             </a:r>
@@ -26520,10 +26298,10 @@
                 <a:solidFill>
                   <a:srgbClr val="000000"/>
                 </a:solidFill>
-                <a:latin typeface="Century Gothic"/>
-                <a:cs typeface="Century Gothic"/>
-              </a:rPr>
-              <a:t>1. Must: trial registry, before patient 1</a:t>
+                <a:latin typeface="Arial"/>
+                <a:cs typeface="Arial"/>
+              </a:rPr>
+              <a:t>Must: trial registry, before patient 1</a:t>
             </a:r>
           </a:p>
           <a:p>
@@ -26542,10 +26320,10 @@
                 <a:solidFill>
                   <a:srgbClr val="000000"/>
                 </a:solidFill>
-                <a:latin typeface="Century Gothic"/>
-                <a:cs typeface="Century Gothic"/>
-              </a:rPr>
-              <a:t>2. Should: PROSPERO</a:t>
+                <a:latin typeface="Arial"/>
+                <a:cs typeface="Arial"/>
+              </a:rPr>
+              <a:t>Should: PROSPERO</a:t>
             </a:r>
           </a:p>
           <a:p>
@@ -26564,10 +26342,10 @@
                 <a:solidFill>
                   <a:srgbClr val="000000"/>
                 </a:solidFill>
-                <a:latin typeface="Century Gothic"/>
-                <a:cs typeface="Century Gothic"/>
-              </a:rPr>
-              <a:t>3. Recommended, not required</a:t>
+                <a:latin typeface="Arial"/>
+                <a:cs typeface="Arial"/>
+              </a:rPr>
+              <a:t>Recommended, not required</a:t>
             </a:r>
           </a:p>
           <a:p>
@@ -26586,10 +26364,10 @@
                 <a:solidFill>
                   <a:srgbClr val="000000"/>
                 </a:solidFill>
-                <a:latin typeface="Century Gothic"/>
-                <a:cs typeface="Century Gothic"/>
-              </a:rPr>
-              <a:t>4. Audit: not research registration; local approval</a:t>
+                <a:latin typeface="Arial"/>
+                <a:cs typeface="Arial"/>
+              </a:rPr>
+              <a:t>Audit: not research registration; local approval</a:t>
             </a:r>
           </a:p>
         </p:txBody>
@@ -26624,7 +26402,7 @@
                     <a:lumMod val="50000"/>
                   </a:schemeClr>
                 </a:solidFill>
-                <a:latin typeface="Verdana"/>
+                <a:latin typeface="Arial"/>
               </a:rPr>
               <a:t>Neudata | #ClearDataClearImpact</a:t>
             </a:r>
@@ -26741,7 +26519,7 @@
     </a:clrScheme>
     <a:fontScheme name="Office">
       <a:majorFont>
-        <a:latin typeface="Calibri"/>
+        <a:latin typeface="Arial"/>
         <a:ea typeface=""/>
         <a:cs typeface=""/>
         <a:font script="Jpan" typeface="ＭＳ Ｐゴシック"/>
@@ -26776,7 +26554,7 @@
         <a:font script="Geor" typeface="Sylfaen"/>
       </a:majorFont>
       <a:minorFont>
-        <a:latin typeface="Calibri"/>
+        <a:latin typeface="Arial"/>
         <a:ea typeface=""/>
         <a:cs typeface=""/>
         <a:font script="Jpan" typeface="ＭＳ Ｐゴシック"/>
@@ -27061,7 +26839,7 @@
     </a:clrScheme>
     <a:fontScheme name="Office">
       <a:majorFont>
-        <a:latin typeface="Calibri Light" panose="020F0302020204030204"/>
+        <a:latin typeface="Arial" panose="020F0302020204030204"/>
         <a:ea typeface=""/>
         <a:cs typeface=""/>
         <a:font script="Jpan" typeface="游ゴシック Light"/>
@@ -27096,7 +26874,7 @@
         <a:font script="Geor" typeface="Sylfaen"/>
       </a:majorFont>
       <a:minorFont>
-        <a:latin typeface="Calibri" panose="020F0502020204030204"/>
+        <a:latin typeface="Arial" panose="020F0502020204030204"/>
         <a:ea typeface=""/>
         <a:cs typeface=""/>
         <a:font script="Jpan" typeface="游ゴシック"/>
@@ -27322,7 +27100,7 @@
     </a:clrScheme>
     <a:fontScheme name="Office">
       <a:majorFont>
-        <a:latin typeface="Calibri Light" panose="020F0302020204030204"/>
+        <a:latin typeface="Arial" panose="020F0302020204030204"/>
         <a:ea typeface=""/>
         <a:cs typeface=""/>
         <a:font script="Jpan" typeface="游ゴシック Light"/>
@@ -27357,7 +27135,7 @@
         <a:font script="Geor" typeface="Sylfaen"/>
       </a:majorFont>
       <a:minorFont>
-        <a:latin typeface="Calibri" panose="020F0502020204030204"/>
+        <a:latin typeface="Arial" panose="020F0502020204030204"/>
         <a:ea typeface=""/>
         <a:cs typeface=""/>
         <a:font script="Jpan" typeface="游ゴシック"/>

--- a/en/files/slides/Session_7_EN.pptx
+++ b/en/files/slides/Session_7_EN.pptx
@@ -9040,12 +9040,12 @@
           </a:ln>
         </p:spPr>
         <p:txBody>
-          <a:bodyPr wrap="square" lIns="137160" tIns="91440" rIns="137160" bIns="91440" rtlCol="0" anchor="t">
+          <a:bodyPr wrap="square" lIns="137160" tIns="91440" rIns="137160" bIns="91440" rtlCol="0" anchor="ctr">
             <a:normAutofit/>
           </a:bodyPr>
           <a:lstStyle/>
           <a:p>
-            <a:pPr marL="0" indent="0" algn="l">
+            <a:pPr marL="0" indent="0" algn="ctr">
               <a:lnSpc>
                 <a:spcPct val="104000"/>
               </a:lnSpc>
@@ -9066,7 +9066,7 @@
             </a:r>
           </a:p>
           <a:p>
-            <a:pPr marL="0" indent="0" algn="l">
+            <a:pPr marL="0" indent="0" algn="ctr">
               <a:lnSpc>
                 <a:spcPct val="104000"/>
               </a:lnSpc>
@@ -9087,7 +9087,7 @@
             </a:r>
           </a:p>
           <a:p>
-            <a:pPr marL="0" indent="0" algn="l">
+            <a:pPr marL="0" indent="0" algn="ctr">
               <a:lnSpc>
                 <a:spcPct val="104000"/>
               </a:lnSpc>
@@ -9174,12 +9174,12 @@
           </a:ln>
         </p:spPr>
         <p:txBody>
-          <a:bodyPr wrap="square" lIns="137160" tIns="91440" rIns="137160" bIns="91440" rtlCol="0" anchor="t">
+          <a:bodyPr wrap="square" lIns="137160" tIns="91440" rIns="137160" bIns="91440" rtlCol="0" anchor="ctr">
             <a:normAutofit/>
           </a:bodyPr>
           <a:lstStyle/>
           <a:p>
-            <a:pPr marL="0" indent="0" algn="l">
+            <a:pPr marL="0" indent="0" algn="ctr">
               <a:lnSpc>
                 <a:spcPct val="104000"/>
               </a:lnSpc>
@@ -9200,7 +9200,7 @@
             </a:r>
           </a:p>
           <a:p>
-            <a:pPr marL="0" indent="0" algn="l">
+            <a:pPr marL="0" indent="0" algn="ctr">
               <a:lnSpc>
                 <a:spcPct val="104000"/>
               </a:lnSpc>
@@ -9221,7 +9221,7 @@
             </a:r>
           </a:p>
           <a:p>
-            <a:pPr marL="0" indent="0" algn="l">
+            <a:pPr marL="0" indent="0" algn="ctr">
               <a:lnSpc>
                 <a:spcPct val="104000"/>
               </a:lnSpc>
@@ -9308,12 +9308,12 @@
           </a:ln>
         </p:spPr>
         <p:txBody>
-          <a:bodyPr wrap="square" lIns="137160" tIns="91440" rIns="137160" bIns="91440" rtlCol="0" anchor="t">
+          <a:bodyPr wrap="square" lIns="137160" tIns="91440" rIns="137160" bIns="91440" rtlCol="0" anchor="ctr">
             <a:normAutofit/>
           </a:bodyPr>
           <a:lstStyle/>
           <a:p>
-            <a:pPr marL="0" indent="0" algn="l">
+            <a:pPr marL="0" indent="0" algn="ctr">
               <a:lnSpc>
                 <a:spcPct val="104000"/>
               </a:lnSpc>
@@ -9334,7 +9334,7 @@
             </a:r>
           </a:p>
           <a:p>
-            <a:pPr marL="0" indent="0" algn="l">
+            <a:pPr marL="0" indent="0" algn="ctr">
               <a:lnSpc>
                 <a:spcPct val="104000"/>
               </a:lnSpc>
@@ -9355,7 +9355,7 @@
             </a:r>
           </a:p>
           <a:p>
-            <a:pPr marL="0" indent="0" algn="l">
+            <a:pPr marL="0" indent="0" algn="ctr">
               <a:lnSpc>
                 <a:spcPct val="104000"/>
               </a:lnSpc>
@@ -10436,12 +10436,12 @@
           </a:ln>
         </p:spPr>
         <p:txBody>
-          <a:bodyPr wrap="square" lIns="137160" tIns="91440" rIns="137160" bIns="91440" rtlCol="0" anchor="t">
+          <a:bodyPr wrap="square" lIns="137160" tIns="91440" rIns="137160" bIns="91440" rtlCol="0" anchor="ctr">
             <a:normAutofit/>
           </a:bodyPr>
           <a:lstStyle/>
           <a:p>
-            <a:pPr marL="0" indent="0" algn="l">
+            <a:pPr marL="0" indent="0" algn="ctr">
               <a:lnSpc>
                 <a:spcPct val="104000"/>
               </a:lnSpc>
@@ -10462,7 +10462,7 @@
             </a:r>
           </a:p>
           <a:p>
-            <a:pPr marL="0" indent="0" algn="l">
+            <a:pPr marL="0" indent="0" algn="ctr">
               <a:lnSpc>
                 <a:spcPct val="104000"/>
               </a:lnSpc>
@@ -10483,7 +10483,7 @@
             </a:r>
           </a:p>
           <a:p>
-            <a:pPr marL="0" indent="0" algn="l">
+            <a:pPr marL="0" indent="0" algn="ctr">
               <a:lnSpc>
                 <a:spcPct val="104000"/>
               </a:lnSpc>
@@ -10570,12 +10570,12 @@
           </a:ln>
         </p:spPr>
         <p:txBody>
-          <a:bodyPr wrap="square" lIns="137160" tIns="91440" rIns="137160" bIns="91440" rtlCol="0" anchor="t">
+          <a:bodyPr wrap="square" lIns="137160" tIns="91440" rIns="137160" bIns="91440" rtlCol="0" anchor="ctr">
             <a:normAutofit/>
           </a:bodyPr>
           <a:lstStyle/>
           <a:p>
-            <a:pPr marL="0" indent="0" algn="l">
+            <a:pPr marL="0" indent="0" algn="ctr">
               <a:lnSpc>
                 <a:spcPct val="104000"/>
               </a:lnSpc>
@@ -10596,7 +10596,7 @@
             </a:r>
           </a:p>
           <a:p>
-            <a:pPr marL="0" indent="0" algn="l">
+            <a:pPr marL="0" indent="0" algn="ctr">
               <a:lnSpc>
                 <a:spcPct val="104000"/>
               </a:lnSpc>
@@ -10683,12 +10683,12 @@
           </a:ln>
         </p:spPr>
         <p:txBody>
-          <a:bodyPr wrap="square" lIns="137160" tIns="91440" rIns="137160" bIns="91440" rtlCol="0" anchor="t">
+          <a:bodyPr wrap="square" lIns="137160" tIns="91440" rIns="137160" bIns="91440" rtlCol="0" anchor="ctr">
             <a:normAutofit/>
           </a:bodyPr>
           <a:lstStyle/>
           <a:p>
-            <a:pPr marL="0" indent="0" algn="l">
+            <a:pPr marL="0" indent="0" algn="ctr">
               <a:lnSpc>
                 <a:spcPct val="104000"/>
               </a:lnSpc>
@@ -10709,7 +10709,7 @@
             </a:r>
           </a:p>
           <a:p>
-            <a:pPr marL="0" indent="0" algn="l">
+            <a:pPr marL="0" indent="0" algn="ctr">
               <a:lnSpc>
                 <a:spcPct val="104000"/>
               </a:lnSpc>
@@ -10730,7 +10730,7 @@
             </a:r>
           </a:p>
           <a:p>
-            <a:pPr marL="0" indent="0" algn="l">
+            <a:pPr marL="0" indent="0" algn="ctr">
               <a:lnSpc>
                 <a:spcPct val="104000"/>
               </a:lnSpc>
@@ -10817,12 +10817,12 @@
           </a:ln>
         </p:spPr>
         <p:txBody>
-          <a:bodyPr wrap="square" lIns="137160" tIns="91440" rIns="137160" bIns="91440" rtlCol="0" anchor="t">
+          <a:bodyPr wrap="square" lIns="137160" tIns="91440" rIns="137160" bIns="91440" rtlCol="0" anchor="ctr">
             <a:normAutofit/>
           </a:bodyPr>
           <a:lstStyle/>
           <a:p>
-            <a:pPr marL="0" indent="0" algn="l">
+            <a:pPr marL="0" indent="0" algn="ctr">
               <a:lnSpc>
                 <a:spcPct val="104000"/>
               </a:lnSpc>
@@ -10843,7 +10843,7 @@
             </a:r>
           </a:p>
           <a:p>
-            <a:pPr marL="0" indent="0" algn="l">
+            <a:pPr marL="0" indent="0" algn="ctr">
               <a:lnSpc>
                 <a:spcPct val="104000"/>
               </a:lnSpc>
@@ -10864,7 +10864,7 @@
             </a:r>
           </a:p>
           <a:p>
-            <a:pPr marL="0" indent="0" algn="l">
+            <a:pPr marL="0" indent="0" algn="ctr">
               <a:lnSpc>
                 <a:spcPct val="104000"/>
               </a:lnSpc>
@@ -11202,12 +11202,12 @@
           </a:ln>
         </p:spPr>
         <p:txBody>
-          <a:bodyPr wrap="square" lIns="137160" tIns="91440" rIns="137160" bIns="91440" rtlCol="0" anchor="t">
+          <a:bodyPr wrap="square" lIns="137160" tIns="91440" rIns="137160" bIns="91440" rtlCol="0" anchor="ctr">
             <a:normAutofit/>
           </a:bodyPr>
           <a:lstStyle/>
           <a:p>
-            <a:pPr marL="0" indent="0" algn="l">
+            <a:pPr marL="0" indent="0" algn="ctr">
               <a:lnSpc>
                 <a:spcPct val="104000"/>
               </a:lnSpc>
@@ -11228,7 +11228,7 @@
             </a:r>
           </a:p>
           <a:p>
-            <a:pPr marL="0" indent="0" algn="l">
+            <a:pPr marL="0" indent="0" algn="ctr">
               <a:lnSpc>
                 <a:spcPct val="104000"/>
               </a:lnSpc>
@@ -11249,7 +11249,7 @@
             </a:r>
           </a:p>
           <a:p>
-            <a:pPr marL="0" indent="0" algn="l">
+            <a:pPr marL="0" indent="0" algn="ctr">
               <a:lnSpc>
                 <a:spcPct val="104000"/>
               </a:lnSpc>
@@ -11336,12 +11336,12 @@
           </a:ln>
         </p:spPr>
         <p:txBody>
-          <a:bodyPr wrap="square" lIns="137160" tIns="91440" rIns="137160" bIns="91440" rtlCol="0" anchor="t">
+          <a:bodyPr wrap="square" lIns="137160" tIns="91440" rIns="137160" bIns="91440" rtlCol="0" anchor="ctr">
             <a:normAutofit/>
           </a:bodyPr>
           <a:lstStyle/>
           <a:p>
-            <a:pPr marL="0" indent="0" algn="l">
+            <a:pPr marL="0" indent="0" algn="ctr">
               <a:lnSpc>
                 <a:spcPct val="104000"/>
               </a:lnSpc>
@@ -11362,7 +11362,7 @@
             </a:r>
           </a:p>
           <a:p>
-            <a:pPr marL="0" indent="0" algn="l">
+            <a:pPr marL="0" indent="0" algn="ctr">
               <a:lnSpc>
                 <a:spcPct val="104000"/>
               </a:lnSpc>
@@ -11383,7 +11383,7 @@
             </a:r>
           </a:p>
           <a:p>
-            <a:pPr marL="0" indent="0" algn="l">
+            <a:pPr marL="0" indent="0" algn="ctr">
               <a:lnSpc>
                 <a:spcPct val="104000"/>
               </a:lnSpc>
@@ -11470,12 +11470,12 @@
           </a:ln>
         </p:spPr>
         <p:txBody>
-          <a:bodyPr wrap="square" lIns="137160" tIns="91440" rIns="137160" bIns="91440" rtlCol="0" anchor="t">
+          <a:bodyPr wrap="square" lIns="137160" tIns="91440" rIns="137160" bIns="91440" rtlCol="0" anchor="ctr">
             <a:normAutofit/>
           </a:bodyPr>
           <a:lstStyle/>
           <a:p>
-            <a:pPr marL="0" indent="0" algn="l">
+            <a:pPr marL="0" indent="0" algn="ctr">
               <a:lnSpc>
                 <a:spcPct val="104000"/>
               </a:lnSpc>
@@ -11496,7 +11496,7 @@
             </a:r>
           </a:p>
           <a:p>
-            <a:pPr marL="0" indent="0" algn="l">
+            <a:pPr marL="0" indent="0" algn="ctr">
               <a:lnSpc>
                 <a:spcPct val="104000"/>
               </a:lnSpc>
@@ -11517,7 +11517,7 @@
             </a:r>
           </a:p>
           <a:p>
-            <a:pPr marL="0" indent="0" algn="l">
+            <a:pPr marL="0" indent="0" algn="ctr">
               <a:lnSpc>
                 <a:spcPct val="104000"/>
               </a:lnSpc>
@@ -11604,12 +11604,12 @@
           </a:ln>
         </p:spPr>
         <p:txBody>
-          <a:bodyPr wrap="square" lIns="137160" tIns="91440" rIns="137160" bIns="91440" rtlCol="0" anchor="t">
+          <a:bodyPr wrap="square" lIns="137160" tIns="91440" rIns="137160" bIns="91440" rtlCol="0" anchor="ctr">
             <a:normAutofit/>
           </a:bodyPr>
           <a:lstStyle/>
           <a:p>
-            <a:pPr marL="0" indent="0" algn="l">
+            <a:pPr marL="0" indent="0" algn="ctr">
               <a:lnSpc>
                 <a:spcPct val="104000"/>
               </a:lnSpc>
@@ -11630,7 +11630,7 @@
             </a:r>
           </a:p>
           <a:p>
-            <a:pPr marL="0" indent="0" algn="l">
+            <a:pPr marL="0" indent="0" algn="ctr">
               <a:lnSpc>
                 <a:spcPct val="104000"/>
               </a:lnSpc>
@@ -11717,12 +11717,12 @@
           </a:ln>
         </p:spPr>
         <p:txBody>
-          <a:bodyPr wrap="square" lIns="137160" tIns="91440" rIns="137160" bIns="91440" rtlCol="0" anchor="t">
+          <a:bodyPr wrap="square" lIns="137160" tIns="91440" rIns="137160" bIns="91440" rtlCol="0" anchor="ctr">
             <a:normAutofit/>
           </a:bodyPr>
           <a:lstStyle/>
           <a:p>
-            <a:pPr marL="0" indent="0" algn="l">
+            <a:pPr marL="0" indent="0" algn="ctr">
               <a:lnSpc>
                 <a:spcPct val="104000"/>
               </a:lnSpc>
@@ -11743,7 +11743,7 @@
             </a:r>
           </a:p>
           <a:p>
-            <a:pPr marL="0" indent="0" algn="l">
+            <a:pPr marL="0" indent="0" algn="ctr">
               <a:lnSpc>
                 <a:spcPct val="104000"/>
               </a:lnSpc>
@@ -11764,7 +11764,7 @@
             </a:r>
           </a:p>
           <a:p>
-            <a:pPr marL="0" indent="0" algn="l">
+            <a:pPr marL="0" indent="0" algn="ctr">
               <a:lnSpc>
                 <a:spcPct val="104000"/>
               </a:lnSpc>
@@ -12397,12 +12397,12 @@
           </a:ln>
         </p:spPr>
         <p:txBody>
-          <a:bodyPr wrap="square" lIns="137160" tIns="91440" rIns="137160" bIns="91440" rtlCol="0" anchor="t">
+          <a:bodyPr wrap="square" lIns="137160" tIns="91440" rIns="137160" bIns="91440" rtlCol="0" anchor="ctr">
             <a:normAutofit/>
           </a:bodyPr>
           <a:lstStyle/>
           <a:p>
-            <a:pPr marL="0" indent="0" algn="l">
+            <a:pPr marL="0" indent="0" algn="ctr">
               <a:lnSpc>
                 <a:spcPct val="104000"/>
               </a:lnSpc>
@@ -12423,7 +12423,7 @@
             </a:r>
           </a:p>
           <a:p>
-            <a:pPr marL="0" indent="0" algn="l">
+            <a:pPr marL="0" indent="0" algn="ctr">
               <a:lnSpc>
                 <a:spcPct val="104000"/>
               </a:lnSpc>
@@ -12510,12 +12510,12 @@
           </a:ln>
         </p:spPr>
         <p:txBody>
-          <a:bodyPr wrap="square" lIns="137160" tIns="91440" rIns="137160" bIns="91440" rtlCol="0" anchor="t">
+          <a:bodyPr wrap="square" lIns="137160" tIns="91440" rIns="137160" bIns="91440" rtlCol="0" anchor="ctr">
             <a:normAutofit/>
           </a:bodyPr>
           <a:lstStyle/>
           <a:p>
-            <a:pPr marL="0" indent="0" algn="l">
+            <a:pPr marL="0" indent="0" algn="ctr">
               <a:lnSpc>
                 <a:spcPct val="104000"/>
               </a:lnSpc>
@@ -12536,7 +12536,7 @@
             </a:r>
           </a:p>
           <a:p>
-            <a:pPr marL="0" indent="0" algn="l">
+            <a:pPr marL="0" indent="0" algn="ctr">
               <a:lnSpc>
                 <a:spcPct val="104000"/>
               </a:lnSpc>
@@ -12623,12 +12623,12 @@
           </a:ln>
         </p:spPr>
         <p:txBody>
-          <a:bodyPr wrap="square" lIns="137160" tIns="91440" rIns="137160" bIns="91440" rtlCol="0" anchor="t">
+          <a:bodyPr wrap="square" lIns="137160" tIns="91440" rIns="137160" bIns="91440" rtlCol="0" anchor="ctr">
             <a:normAutofit/>
           </a:bodyPr>
           <a:lstStyle/>
           <a:p>
-            <a:pPr marL="0" indent="0" algn="l">
+            <a:pPr marL="0" indent="0" algn="ctr">
               <a:lnSpc>
                 <a:spcPct val="104000"/>
               </a:lnSpc>
@@ -12649,7 +12649,7 @@
             </a:r>
           </a:p>
           <a:p>
-            <a:pPr marL="0" indent="0" algn="l">
+            <a:pPr marL="0" indent="0" algn="ctr">
               <a:lnSpc>
                 <a:spcPct val="104000"/>
               </a:lnSpc>
@@ -13026,12 +13026,12 @@
           </a:ln>
         </p:spPr>
         <p:txBody>
-          <a:bodyPr wrap="square" lIns="137160" tIns="91440" rIns="137160" bIns="91440" rtlCol="0" anchor="t">
+          <a:bodyPr wrap="square" lIns="137160" tIns="91440" rIns="137160" bIns="91440" rtlCol="0" anchor="ctr">
             <a:normAutofit/>
           </a:bodyPr>
           <a:lstStyle/>
           <a:p>
-            <a:pPr marL="0" indent="0" algn="l">
+            <a:pPr marL="0" indent="0" algn="ctr">
               <a:lnSpc>
                 <a:spcPct val="104000"/>
               </a:lnSpc>
@@ -13052,7 +13052,7 @@
             </a:r>
           </a:p>
           <a:p>
-            <a:pPr marL="0" indent="0" algn="l">
+            <a:pPr marL="0" indent="0" algn="ctr">
               <a:lnSpc>
                 <a:spcPct val="104000"/>
               </a:lnSpc>
@@ -13139,12 +13139,12 @@
           </a:ln>
         </p:spPr>
         <p:txBody>
-          <a:bodyPr wrap="square" lIns="137160" tIns="91440" rIns="137160" bIns="91440" rtlCol="0" anchor="t">
+          <a:bodyPr wrap="square" lIns="137160" tIns="91440" rIns="137160" bIns="91440" rtlCol="0" anchor="ctr">
             <a:normAutofit/>
           </a:bodyPr>
           <a:lstStyle/>
           <a:p>
-            <a:pPr marL="0" indent="0" algn="l">
+            <a:pPr marL="0" indent="0" algn="ctr">
               <a:lnSpc>
                 <a:spcPct val="104000"/>
               </a:lnSpc>
@@ -13165,7 +13165,7 @@
             </a:r>
           </a:p>
           <a:p>
-            <a:pPr marL="0" indent="0" algn="l">
+            <a:pPr marL="0" indent="0" algn="ctr">
               <a:lnSpc>
                 <a:spcPct val="104000"/>
               </a:lnSpc>
@@ -13186,7 +13186,7 @@
             </a:r>
           </a:p>
           <a:p>
-            <a:pPr marL="0" indent="0" algn="l">
+            <a:pPr marL="0" indent="0" algn="ctr">
               <a:lnSpc>
                 <a:spcPct val="104000"/>
               </a:lnSpc>
@@ -13273,12 +13273,12 @@
           </a:ln>
         </p:spPr>
         <p:txBody>
-          <a:bodyPr wrap="square" lIns="137160" tIns="91440" rIns="137160" bIns="91440" rtlCol="0" anchor="t">
+          <a:bodyPr wrap="square" lIns="137160" tIns="91440" rIns="137160" bIns="91440" rtlCol="0" anchor="ctr">
             <a:normAutofit/>
           </a:bodyPr>
           <a:lstStyle/>
           <a:p>
-            <a:pPr marL="0" indent="0" algn="l">
+            <a:pPr marL="0" indent="0" algn="ctr">
               <a:lnSpc>
                 <a:spcPct val="104000"/>
               </a:lnSpc>
@@ -13299,7 +13299,7 @@
             </a:r>
           </a:p>
           <a:p>
-            <a:pPr marL="0" indent="0" algn="l">
+            <a:pPr marL="0" indent="0" algn="ctr">
               <a:lnSpc>
                 <a:spcPct val="104000"/>
               </a:lnSpc>
@@ -13676,12 +13676,12 @@
           </a:ln>
         </p:spPr>
         <p:txBody>
-          <a:bodyPr wrap="square" lIns="137160" tIns="91440" rIns="137160" bIns="91440" rtlCol="0" anchor="t">
+          <a:bodyPr wrap="square" lIns="137160" tIns="91440" rIns="137160" bIns="91440" rtlCol="0" anchor="ctr">
             <a:normAutofit/>
           </a:bodyPr>
           <a:lstStyle/>
           <a:p>
-            <a:pPr marL="0" indent="0" algn="l">
+            <a:pPr marL="0" indent="0" algn="ctr">
               <a:lnSpc>
                 <a:spcPct val="104000"/>
               </a:lnSpc>
@@ -13768,12 +13768,12 @@
           </a:ln>
         </p:spPr>
         <p:txBody>
-          <a:bodyPr wrap="square" lIns="137160" tIns="91440" rIns="137160" bIns="91440" rtlCol="0" anchor="t">
+          <a:bodyPr wrap="square" lIns="137160" tIns="91440" rIns="137160" bIns="91440" rtlCol="0" anchor="ctr">
             <a:normAutofit/>
           </a:bodyPr>
           <a:lstStyle/>
           <a:p>
-            <a:pPr marL="0" indent="0" algn="l">
+            <a:pPr marL="0" indent="0" algn="ctr">
               <a:lnSpc>
                 <a:spcPct val="104000"/>
               </a:lnSpc>
@@ -13860,12 +13860,12 @@
           </a:ln>
         </p:spPr>
         <p:txBody>
-          <a:bodyPr wrap="square" lIns="137160" tIns="91440" rIns="137160" bIns="91440" rtlCol="0" anchor="t">
+          <a:bodyPr wrap="square" lIns="137160" tIns="91440" rIns="137160" bIns="91440" rtlCol="0" anchor="ctr">
             <a:normAutofit/>
           </a:bodyPr>
           <a:lstStyle/>
           <a:p>
-            <a:pPr marL="0" indent="0" algn="l">
+            <a:pPr marL="0" indent="0" algn="ctr">
               <a:lnSpc>
                 <a:spcPct val="104000"/>
               </a:lnSpc>
@@ -13952,12 +13952,12 @@
           </a:ln>
         </p:spPr>
         <p:txBody>
-          <a:bodyPr wrap="square" lIns="137160" tIns="91440" rIns="137160" bIns="91440" rtlCol="0" anchor="t">
+          <a:bodyPr wrap="square" lIns="137160" tIns="91440" rIns="137160" bIns="91440" rtlCol="0" anchor="ctr">
             <a:normAutofit/>
           </a:bodyPr>
           <a:lstStyle/>
           <a:p>
-            <a:pPr marL="0" indent="0" algn="l">
+            <a:pPr marL="0" indent="0" algn="ctr">
               <a:lnSpc>
                 <a:spcPct val="104000"/>
               </a:lnSpc>
@@ -14044,12 +14044,12 @@
           </a:ln>
         </p:spPr>
         <p:txBody>
-          <a:bodyPr wrap="square" lIns="137160" tIns="91440" rIns="137160" bIns="91440" rtlCol="0" anchor="t">
+          <a:bodyPr wrap="square" lIns="137160" tIns="91440" rIns="137160" bIns="91440" rtlCol="0" anchor="ctr">
             <a:normAutofit/>
           </a:bodyPr>
           <a:lstStyle/>
           <a:p>
-            <a:pPr marL="0" indent="0" algn="l">
+            <a:pPr marL="0" indent="0" algn="ctr">
               <a:lnSpc>
                 <a:spcPct val="104000"/>
               </a:lnSpc>
@@ -14070,7 +14070,7 @@
             </a:r>
           </a:p>
           <a:p>
-            <a:pPr marL="0" indent="0" algn="l">
+            <a:pPr marL="0" indent="0" algn="ctr">
               <a:lnSpc>
                 <a:spcPct val="104000"/>
               </a:lnSpc>
@@ -14091,7 +14091,7 @@
             </a:r>
           </a:p>
           <a:p>
-            <a:pPr marL="0" indent="0" algn="l">
+            <a:pPr marL="0" indent="0" algn="ctr">
               <a:lnSpc>
                 <a:spcPct val="104000"/>
               </a:lnSpc>
@@ -14429,12 +14429,12 @@
           </a:ln>
         </p:spPr>
         <p:txBody>
-          <a:bodyPr wrap="square" lIns="137160" tIns="91440" rIns="137160" bIns="91440" rtlCol="0" anchor="t">
+          <a:bodyPr wrap="square" lIns="137160" tIns="91440" rIns="137160" bIns="91440" rtlCol="0" anchor="ctr">
             <a:normAutofit/>
           </a:bodyPr>
           <a:lstStyle/>
           <a:p>
-            <a:pPr marL="0" indent="0" algn="l">
+            <a:pPr marL="0" indent="0" algn="ctr">
               <a:lnSpc>
                 <a:spcPct val="104000"/>
               </a:lnSpc>
@@ -14455,7 +14455,7 @@
             </a:r>
           </a:p>
           <a:p>
-            <a:pPr marL="0" indent="0" algn="l">
+            <a:pPr marL="0" indent="0" algn="ctr">
               <a:lnSpc>
                 <a:spcPct val="104000"/>
               </a:lnSpc>
@@ -14476,7 +14476,7 @@
             </a:r>
           </a:p>
           <a:p>
-            <a:pPr marL="0" indent="0" algn="l">
+            <a:pPr marL="0" indent="0" algn="ctr">
               <a:lnSpc>
                 <a:spcPct val="104000"/>
               </a:lnSpc>
@@ -14497,7 +14497,7 @@
             </a:r>
           </a:p>
           <a:p>
-            <a:pPr marL="0" indent="0" algn="l">
+            <a:pPr marL="0" indent="0" algn="ctr">
               <a:lnSpc>
                 <a:spcPct val="104000"/>
               </a:lnSpc>
@@ -14584,12 +14584,12 @@
           </a:ln>
         </p:spPr>
         <p:txBody>
-          <a:bodyPr wrap="square" lIns="137160" tIns="91440" rIns="137160" bIns="91440" rtlCol="0" anchor="t">
+          <a:bodyPr wrap="square" lIns="137160" tIns="91440" rIns="137160" bIns="91440" rtlCol="0" anchor="ctr">
             <a:normAutofit/>
           </a:bodyPr>
           <a:lstStyle/>
           <a:p>
-            <a:pPr marL="0" indent="0" algn="l">
+            <a:pPr marL="0" indent="0" algn="ctr">
               <a:lnSpc>
                 <a:spcPct val="104000"/>
               </a:lnSpc>
@@ -14610,7 +14610,7 @@
             </a:r>
           </a:p>
           <a:p>
-            <a:pPr marL="0" indent="0" algn="l">
+            <a:pPr marL="0" indent="0" algn="ctr">
               <a:lnSpc>
                 <a:spcPct val="104000"/>
               </a:lnSpc>
@@ -14631,7 +14631,7 @@
             </a:r>
           </a:p>
           <a:p>
-            <a:pPr marL="0" indent="0" algn="l">
+            <a:pPr marL="0" indent="0" algn="ctr">
               <a:lnSpc>
                 <a:spcPct val="104000"/>
               </a:lnSpc>
@@ -14652,7 +14652,7 @@
             </a:r>
           </a:p>
           <a:p>
-            <a:pPr marL="0" indent="0" algn="l">
+            <a:pPr marL="0" indent="0" algn="ctr">
               <a:lnSpc>
                 <a:spcPct val="104000"/>
               </a:lnSpc>
@@ -14739,12 +14739,12 @@
           </a:ln>
         </p:spPr>
         <p:txBody>
-          <a:bodyPr wrap="square" lIns="137160" tIns="91440" rIns="137160" bIns="91440" rtlCol="0" anchor="t">
+          <a:bodyPr wrap="square" lIns="137160" tIns="91440" rIns="137160" bIns="91440" rtlCol="0" anchor="ctr">
             <a:normAutofit/>
           </a:bodyPr>
           <a:lstStyle/>
           <a:p>
-            <a:pPr marL="0" indent="0" algn="l">
+            <a:pPr marL="0" indent="0" algn="ctr">
               <a:lnSpc>
                 <a:spcPct val="104000"/>
               </a:lnSpc>
@@ -14765,7 +14765,7 @@
             </a:r>
           </a:p>
           <a:p>
-            <a:pPr marL="0" indent="0" algn="l">
+            <a:pPr marL="0" indent="0" algn="ctr">
               <a:lnSpc>
                 <a:spcPct val="104000"/>
               </a:lnSpc>
@@ -14786,7 +14786,7 @@
             </a:r>
           </a:p>
           <a:p>
-            <a:pPr marL="0" indent="0" algn="l">
+            <a:pPr marL="0" indent="0" algn="ctr">
               <a:lnSpc>
                 <a:spcPct val="104000"/>
               </a:lnSpc>
@@ -15275,12 +15275,12 @@
           </a:ln>
         </p:spPr>
         <p:txBody>
-          <a:bodyPr wrap="square" lIns="137160" tIns="91440" rIns="137160" bIns="91440" rtlCol="0" anchor="t">
+          <a:bodyPr wrap="square" lIns="137160" tIns="91440" rIns="137160" bIns="91440" rtlCol="0" anchor="ctr">
             <a:normAutofit/>
           </a:bodyPr>
           <a:lstStyle/>
           <a:p>
-            <a:pPr marL="0" indent="0" algn="l">
+            <a:pPr marL="0" indent="0" algn="ctr">
               <a:buNone/>
             </a:pPr>
             <a:r>
@@ -15295,15 +15295,14 @@
             </a:r>
           </a:p>
           <a:p>
-            <a:pPr marL="274320" indent="-274320" algn="l">
+            <a:pPr marL="0" indent="0" algn="ctr">
               <a:lnSpc>
                 <a:spcPct val="104000"/>
               </a:lnSpc>
               <a:spcBef>
                 <a:spcPts val="300"/>
               </a:spcBef>
-              <a:buFont typeface="Arial"/>
-              <a:buChar char="•"/>
+              <a:buNone/>
             </a:pPr>
             <a:r>
               <a:rPr lang="en-US" sz="1500" dirty="0">
@@ -15317,15 +15316,14 @@
             </a:r>
           </a:p>
           <a:p>
-            <a:pPr marL="274320" indent="-274320" algn="l">
+            <a:pPr marL="0" indent="0" algn="ctr">
               <a:lnSpc>
                 <a:spcPct val="104000"/>
               </a:lnSpc>
               <a:spcBef>
                 <a:spcPts val="300"/>
               </a:spcBef>
-              <a:buFont typeface="Arial"/>
-              <a:buChar char="•"/>
+              <a:buNone/>
             </a:pPr>
             <a:r>
               <a:rPr lang="en-US" sz="1500" dirty="0">
@@ -15339,15 +15337,14 @@
             </a:r>
           </a:p>
           <a:p>
-            <a:pPr marL="274320" indent="-274320" algn="l">
+            <a:pPr marL="0" indent="0" algn="ctr">
               <a:lnSpc>
                 <a:spcPct val="104000"/>
               </a:lnSpc>
               <a:spcBef>
                 <a:spcPts val="300"/>
               </a:spcBef>
-              <a:buFont typeface="Arial"/>
-              <a:buChar char="•"/>
+              <a:buNone/>
             </a:pPr>
             <a:r>
               <a:rPr lang="en-US" sz="1500" dirty="0">
@@ -15361,15 +15358,14 @@
             </a:r>
           </a:p>
           <a:p>
-            <a:pPr marL="274320" indent="-274320" algn="l">
+            <a:pPr marL="0" indent="0" algn="ctr">
               <a:lnSpc>
                 <a:spcPct val="104000"/>
               </a:lnSpc>
               <a:spcBef>
                 <a:spcPts val="300"/>
               </a:spcBef>
-              <a:buFont typeface="Arial"/>
-              <a:buChar char="•"/>
+              <a:buNone/>
             </a:pPr>
             <a:r>
               <a:rPr lang="en-US" sz="1500" dirty="0">
@@ -15383,15 +15379,14 @@
             </a:r>
           </a:p>
           <a:p>
-            <a:pPr marL="274320" indent="-274320" algn="l">
+            <a:pPr marL="0" indent="0" algn="ctr">
               <a:lnSpc>
                 <a:spcPct val="104000"/>
               </a:lnSpc>
               <a:spcBef>
                 <a:spcPts val="300"/>
               </a:spcBef>
-              <a:buFont typeface="Arial"/>
-              <a:buChar char="•"/>
+              <a:buNone/>
             </a:pPr>
             <a:r>
               <a:rPr lang="en-US" sz="1500" dirty="0">
@@ -15724,7 +15719,7 @@
           </a:ln>
         </p:spPr>
         <p:txBody>
-          <a:bodyPr wrap="square" lIns="137160" tIns="91440" rIns="137160" bIns="91440" rtlCol="0" anchor="t">
+          <a:bodyPr wrap="square" lIns="137160" tIns="91440" rIns="137160" bIns="91440" rtlCol="0" anchor="ctr">
             <a:normAutofit/>
           </a:bodyPr>
           <a:lstStyle/>
@@ -15883,7 +15878,7 @@
           </a:ln>
         </p:spPr>
         <p:txBody>
-          <a:bodyPr wrap="square" lIns="137160" tIns="91440" rIns="137160" bIns="91440" rtlCol="0" anchor="t">
+          <a:bodyPr wrap="square" lIns="137160" tIns="91440" rIns="137160" bIns="91440" rtlCol="0" anchor="ctr">
             <a:normAutofit/>
           </a:bodyPr>
           <a:lstStyle/>
@@ -16293,7 +16288,7 @@
           </a:ln>
         </p:spPr>
         <p:txBody>
-          <a:bodyPr wrap="square" lIns="137160" tIns="91440" rIns="137160" bIns="91440" rtlCol="0" anchor="t">
+          <a:bodyPr wrap="square" lIns="137160" tIns="91440" rIns="137160" bIns="91440" rtlCol="0" anchor="ctr">
             <a:normAutofit/>
           </a:bodyPr>
           <a:lstStyle/>
@@ -16430,7 +16425,7 @@
           </a:ln>
         </p:spPr>
         <p:txBody>
-          <a:bodyPr wrap="square" lIns="137160" tIns="91440" rIns="137160" bIns="91440" rtlCol="0" anchor="t">
+          <a:bodyPr wrap="square" lIns="137160" tIns="91440" rIns="137160" bIns="91440" rtlCol="0" anchor="ctr">
             <a:normAutofit/>
           </a:bodyPr>
           <a:lstStyle/>
@@ -16944,12 +16939,12 @@
           </a:ln>
         </p:spPr>
         <p:txBody>
-          <a:bodyPr wrap="square" lIns="137160" tIns="91440" rIns="137160" bIns="91440" rtlCol="0" anchor="t">
+          <a:bodyPr wrap="square" lIns="137160" tIns="91440" rIns="137160" bIns="91440" rtlCol="0" anchor="ctr">
             <a:normAutofit/>
           </a:bodyPr>
           <a:lstStyle/>
           <a:p>
-            <a:pPr marL="0" indent="0" algn="l">
+            <a:pPr marL="0" indent="0" algn="ctr">
               <a:buNone/>
             </a:pPr>
             <a:r>
@@ -16964,15 +16959,14 @@
             </a:r>
           </a:p>
           <a:p>
-            <a:pPr marL="274320" indent="-274320" algn="l">
+            <a:pPr marL="0" indent="0" algn="ctr">
               <a:lnSpc>
                 <a:spcPct val="104000"/>
               </a:lnSpc>
               <a:spcBef>
                 <a:spcPts val="300"/>
               </a:spcBef>
-              <a:buFont typeface="Arial"/>
-              <a:buChar char="•"/>
+              <a:buNone/>
             </a:pPr>
             <a:r>
               <a:rPr lang="en-US" sz="1500" dirty="0">
@@ -16986,15 +16980,14 @@
             </a:r>
           </a:p>
           <a:p>
-            <a:pPr marL="274320" indent="-274320" algn="l">
+            <a:pPr marL="0" indent="0" algn="ctr">
               <a:lnSpc>
                 <a:spcPct val="104000"/>
               </a:lnSpc>
               <a:spcBef>
                 <a:spcPts val="300"/>
               </a:spcBef>
-              <a:buFont typeface="Arial"/>
-              <a:buChar char="•"/>
+              <a:buNone/>
             </a:pPr>
             <a:r>
               <a:rPr lang="en-US" sz="1500" dirty="0">
@@ -17478,12 +17471,12 @@
           </a:ln>
         </p:spPr>
         <p:txBody>
-          <a:bodyPr wrap="square" lIns="137160" tIns="91440" rIns="137160" bIns="91440" rtlCol="0" anchor="t">
+          <a:bodyPr wrap="square" lIns="137160" tIns="91440" rIns="137160" bIns="91440" rtlCol="0" anchor="ctr">
             <a:normAutofit/>
           </a:bodyPr>
           <a:lstStyle/>
           <a:p>
-            <a:pPr marL="0" indent="0" algn="l">
+            <a:pPr marL="0" indent="0" algn="ctr">
               <a:buNone/>
             </a:pPr>
             <a:r>
@@ -17498,15 +17491,14 @@
             </a:r>
           </a:p>
           <a:p>
-            <a:pPr marL="274320" indent="-274320" algn="l">
+            <a:pPr marL="0" indent="0" algn="ctr">
               <a:lnSpc>
                 <a:spcPct val="104000"/>
               </a:lnSpc>
               <a:spcBef>
                 <a:spcPts val="300"/>
               </a:spcBef>
-              <a:buFont typeface="Arial"/>
-              <a:buChar char="•"/>
+              <a:buNone/>
             </a:pPr>
             <a:r>
               <a:rPr lang="en-US" sz="1500" dirty="0">
@@ -17520,15 +17512,14 @@
             </a:r>
           </a:p>
           <a:p>
-            <a:pPr marL="274320" indent="-274320" algn="l">
+            <a:pPr marL="0" indent="0" algn="ctr">
               <a:lnSpc>
                 <a:spcPct val="104000"/>
               </a:lnSpc>
               <a:spcBef>
                 <a:spcPts val="300"/>
               </a:spcBef>
-              <a:buFont typeface="Arial"/>
-              <a:buChar char="•"/>
+              <a:buNone/>
             </a:pPr>
             <a:r>
               <a:rPr lang="en-US" sz="1500" dirty="0">
@@ -17542,15 +17533,14 @@
             </a:r>
           </a:p>
           <a:p>
-            <a:pPr marL="274320" indent="-274320" algn="l">
+            <a:pPr marL="0" indent="0" algn="ctr">
               <a:lnSpc>
                 <a:spcPct val="104000"/>
               </a:lnSpc>
               <a:spcBef>
                 <a:spcPts val="300"/>
               </a:spcBef>
-              <a:buFont typeface="Arial"/>
-              <a:buChar char="•"/>
+              <a:buNone/>
             </a:pPr>
             <a:r>
               <a:rPr lang="en-US" sz="1500" dirty="0">
@@ -18650,12 +18640,12 @@
           </a:ln>
         </p:spPr>
         <p:txBody>
-          <a:bodyPr wrap="square" lIns="110000" tIns="91440" rIns="110000" bIns="91440" rtlCol="0" anchor="t">
+          <a:bodyPr wrap="square" lIns="110000" tIns="91440" rIns="110000" bIns="91440" rtlCol="0" anchor="ctr">
             <a:normAutofit/>
           </a:bodyPr>
           <a:lstStyle/>
           <a:p>
-            <a:pPr marL="0" indent="0" algn="l">
+            <a:pPr marL="0" indent="0" algn="ctr">
               <a:lnSpc>
                 <a:spcPct val="104000"/>
               </a:lnSpc>
@@ -18744,12 +18734,12 @@
           </a:ln>
         </p:spPr>
         <p:txBody>
-          <a:bodyPr wrap="square" lIns="110000" tIns="91440" rIns="110000" bIns="91440" rtlCol="0" anchor="t">
+          <a:bodyPr wrap="square" lIns="110000" tIns="91440" rIns="110000" bIns="91440" rtlCol="0" anchor="ctr">
             <a:normAutofit/>
           </a:bodyPr>
           <a:lstStyle/>
           <a:p>
-            <a:pPr marL="0" indent="0" algn="l">
+            <a:pPr marL="0" indent="0" algn="ctr">
               <a:lnSpc>
                 <a:spcPct val="104000"/>
               </a:lnSpc>
@@ -18838,12 +18828,12 @@
           </a:ln>
         </p:spPr>
         <p:txBody>
-          <a:bodyPr wrap="square" lIns="110000" tIns="91440" rIns="110000" bIns="91440" rtlCol="0" anchor="t">
+          <a:bodyPr wrap="square" lIns="110000" tIns="91440" rIns="110000" bIns="91440" rtlCol="0" anchor="ctr">
             <a:normAutofit/>
           </a:bodyPr>
           <a:lstStyle/>
           <a:p>
-            <a:pPr marL="0" indent="0" algn="l">
+            <a:pPr marL="0" indent="0" algn="ctr">
               <a:lnSpc>
                 <a:spcPct val="104000"/>
               </a:lnSpc>
@@ -18932,12 +18922,12 @@
           </a:ln>
         </p:spPr>
         <p:txBody>
-          <a:bodyPr wrap="square" lIns="110000" tIns="91440" rIns="110000" bIns="91440" rtlCol="0" anchor="t">
+          <a:bodyPr wrap="square" lIns="110000" tIns="91440" rIns="110000" bIns="91440" rtlCol="0" anchor="ctr">
             <a:normAutofit/>
           </a:bodyPr>
           <a:lstStyle/>
           <a:p>
-            <a:pPr marL="0" indent="0" algn="l">
+            <a:pPr marL="0" indent="0" algn="ctr">
               <a:lnSpc>
                 <a:spcPct val="104000"/>
               </a:lnSpc>
@@ -19026,12 +19016,12 @@
           </a:ln>
         </p:spPr>
         <p:txBody>
-          <a:bodyPr wrap="square" lIns="110000" tIns="91440" rIns="110000" bIns="91440" rtlCol="0" anchor="t">
+          <a:bodyPr wrap="square" lIns="110000" tIns="91440" rIns="110000" bIns="91440" rtlCol="0" anchor="ctr">
             <a:normAutofit/>
           </a:bodyPr>
           <a:lstStyle/>
           <a:p>
-            <a:pPr marL="0" indent="0" algn="l">
+            <a:pPr marL="0" indent="0" algn="ctr">
               <a:lnSpc>
                 <a:spcPct val="104000"/>
               </a:lnSpc>
@@ -19120,12 +19110,12 @@
           </a:ln>
         </p:spPr>
         <p:txBody>
-          <a:bodyPr wrap="square" lIns="110000" tIns="91440" rIns="110000" bIns="91440" rtlCol="0" anchor="t">
+          <a:bodyPr wrap="square" lIns="110000" tIns="91440" rIns="110000" bIns="91440" rtlCol="0" anchor="ctr">
             <a:normAutofit/>
           </a:bodyPr>
           <a:lstStyle/>
           <a:p>
-            <a:pPr marL="0" indent="0" algn="l">
+            <a:pPr marL="0" indent="0" algn="ctr">
               <a:lnSpc>
                 <a:spcPct val="104000"/>
               </a:lnSpc>
@@ -19502,12 +19492,12 @@
           </a:ln>
         </p:spPr>
         <p:txBody>
-          <a:bodyPr wrap="square" lIns="137160" tIns="91440" rIns="137160" bIns="91440" rtlCol="0" anchor="t">
+          <a:bodyPr wrap="square" lIns="137160" tIns="91440" rIns="137160" bIns="91440" rtlCol="0" anchor="ctr">
             <a:normAutofit/>
           </a:bodyPr>
           <a:lstStyle/>
           <a:p>
-            <a:pPr marL="0" indent="0" algn="l">
+            <a:pPr marL="0" indent="0" algn="ctr">
               <a:lnSpc>
                 <a:spcPct val="104000"/>
               </a:lnSpc>
@@ -19528,7 +19518,7 @@
             </a:r>
           </a:p>
           <a:p>
-            <a:pPr marL="0" indent="0" algn="l">
+            <a:pPr marL="0" indent="0" algn="ctr">
               <a:lnSpc>
                 <a:spcPct val="104000"/>
               </a:lnSpc>
@@ -19549,7 +19539,7 @@
             </a:r>
           </a:p>
           <a:p>
-            <a:pPr marL="0" indent="0" algn="l">
+            <a:pPr marL="0" indent="0" algn="ctr">
               <a:lnSpc>
                 <a:spcPct val="104000"/>
               </a:lnSpc>
@@ -19570,7 +19560,7 @@
             </a:r>
           </a:p>
           <a:p>
-            <a:pPr marL="0" indent="0" algn="l">
+            <a:pPr marL="0" indent="0" algn="ctr">
               <a:lnSpc>
                 <a:spcPct val="104000"/>
               </a:lnSpc>
@@ -19657,12 +19647,12 @@
           </a:ln>
         </p:spPr>
         <p:txBody>
-          <a:bodyPr wrap="square" lIns="137160" tIns="91440" rIns="137160" bIns="91440" rtlCol="0" anchor="t">
+          <a:bodyPr wrap="square" lIns="137160" tIns="91440" rIns="137160" bIns="91440" rtlCol="0" anchor="ctr">
             <a:normAutofit/>
           </a:bodyPr>
           <a:lstStyle/>
           <a:p>
-            <a:pPr marL="0" indent="0" algn="l">
+            <a:pPr marL="0" indent="0" algn="ctr">
               <a:lnSpc>
                 <a:spcPct val="104000"/>
               </a:lnSpc>
@@ -19683,7 +19673,7 @@
             </a:r>
           </a:p>
           <a:p>
-            <a:pPr marL="0" indent="0" algn="l">
+            <a:pPr marL="0" indent="0" algn="ctr">
               <a:lnSpc>
                 <a:spcPct val="104000"/>
               </a:lnSpc>
@@ -19704,7 +19694,7 @@
             </a:r>
           </a:p>
           <a:p>
-            <a:pPr marL="0" indent="0" algn="l">
+            <a:pPr marL="0" indent="0" algn="ctr">
               <a:lnSpc>
                 <a:spcPct val="104000"/>
               </a:lnSpc>
@@ -19791,12 +19781,12 @@
           </a:ln>
         </p:spPr>
         <p:txBody>
-          <a:bodyPr wrap="square" lIns="137160" tIns="91440" rIns="137160" bIns="91440" rtlCol="0" anchor="t">
+          <a:bodyPr wrap="square" lIns="137160" tIns="91440" rIns="137160" bIns="91440" rtlCol="0" anchor="ctr">
             <a:normAutofit/>
           </a:bodyPr>
           <a:lstStyle/>
           <a:p>
-            <a:pPr marL="0" indent="0" algn="l">
+            <a:pPr marL="0" indent="0" algn="ctr">
               <a:lnSpc>
                 <a:spcPct val="104000"/>
               </a:lnSpc>
@@ -19817,7 +19807,7 @@
             </a:r>
           </a:p>
           <a:p>
-            <a:pPr marL="0" indent="0" algn="l">
+            <a:pPr marL="0" indent="0" algn="ctr">
               <a:lnSpc>
                 <a:spcPct val="104000"/>
               </a:lnSpc>
@@ -19838,7 +19828,7 @@
             </a:r>
           </a:p>
           <a:p>
-            <a:pPr marL="0" indent="0" algn="l">
+            <a:pPr marL="0" indent="0" algn="ctr">
               <a:lnSpc>
                 <a:spcPct val="104000"/>
               </a:lnSpc>
@@ -19925,12 +19915,12 @@
           </a:ln>
         </p:spPr>
         <p:txBody>
-          <a:bodyPr wrap="square" lIns="137160" tIns="91440" rIns="137160" bIns="91440" rtlCol="0" anchor="t">
+          <a:bodyPr wrap="square" lIns="137160" tIns="91440" rIns="137160" bIns="91440" rtlCol="0" anchor="ctr">
             <a:normAutofit/>
           </a:bodyPr>
           <a:lstStyle/>
           <a:p>
-            <a:pPr marL="0" indent="0" algn="l">
+            <a:pPr marL="0" indent="0" algn="ctr">
               <a:lnSpc>
                 <a:spcPct val="104000"/>
               </a:lnSpc>
@@ -19951,7 +19941,7 @@
             </a:r>
           </a:p>
           <a:p>
-            <a:pPr marL="0" indent="0" algn="l">
+            <a:pPr marL="0" indent="0" algn="ctr">
               <a:lnSpc>
                 <a:spcPct val="104000"/>
               </a:lnSpc>
@@ -19972,7 +19962,7 @@
             </a:r>
           </a:p>
           <a:p>
-            <a:pPr marL="0" indent="0" algn="l">
+            <a:pPr marL="0" indent="0" algn="ctr">
               <a:lnSpc>
                 <a:spcPct val="104000"/>
               </a:lnSpc>
@@ -19993,7 +19983,7 @@
             </a:r>
           </a:p>
           <a:p>
-            <a:pPr marL="0" indent="0" algn="l">
+            <a:pPr marL="0" indent="0" algn="ctr">
               <a:lnSpc>
                 <a:spcPct val="104000"/>
               </a:lnSpc>
@@ -21122,12 +21112,12 @@
           </a:ln>
         </p:spPr>
         <p:txBody>
-          <a:bodyPr wrap="square" lIns="137160" tIns="91440" rIns="137160" bIns="91440" rtlCol="0" anchor="t">
+          <a:bodyPr wrap="square" lIns="137160" tIns="91440" rIns="137160" bIns="91440" rtlCol="0" anchor="ctr">
             <a:normAutofit/>
           </a:bodyPr>
           <a:lstStyle/>
           <a:p>
-            <a:pPr marL="0" indent="0" algn="l">
+            <a:pPr marL="0" indent="0" algn="ctr">
               <a:lnSpc>
                 <a:spcPct val="104000"/>
               </a:lnSpc>
@@ -21148,7 +21138,7 @@
             </a:r>
           </a:p>
           <a:p>
-            <a:pPr marL="0" indent="0" algn="l">
+            <a:pPr marL="0" indent="0" algn="ctr">
               <a:lnSpc>
                 <a:spcPct val="104000"/>
               </a:lnSpc>
@@ -21169,7 +21159,7 @@
             </a:r>
           </a:p>
           <a:p>
-            <a:pPr marL="0" indent="0" algn="l">
+            <a:pPr marL="0" indent="0" algn="ctr">
               <a:lnSpc>
                 <a:spcPct val="104000"/>
               </a:lnSpc>
@@ -21256,12 +21246,12 @@
           </a:ln>
         </p:spPr>
         <p:txBody>
-          <a:bodyPr wrap="square" lIns="137160" tIns="91440" rIns="137160" bIns="91440" rtlCol="0" anchor="t">
+          <a:bodyPr wrap="square" lIns="137160" tIns="91440" rIns="137160" bIns="91440" rtlCol="0" anchor="ctr">
             <a:normAutofit/>
           </a:bodyPr>
           <a:lstStyle/>
           <a:p>
-            <a:pPr marL="0" indent="0" algn="l">
+            <a:pPr marL="0" indent="0" algn="ctr">
               <a:lnSpc>
                 <a:spcPct val="104000"/>
               </a:lnSpc>
@@ -21282,7 +21272,7 @@
             </a:r>
           </a:p>
           <a:p>
-            <a:pPr marL="0" indent="0" algn="l">
+            <a:pPr marL="0" indent="0" algn="ctr">
               <a:lnSpc>
                 <a:spcPct val="104000"/>
               </a:lnSpc>
@@ -21303,7 +21293,7 @@
             </a:r>
           </a:p>
           <a:p>
-            <a:pPr marL="0" indent="0" algn="l">
+            <a:pPr marL="0" indent="0" algn="ctr">
               <a:lnSpc>
                 <a:spcPct val="104000"/>
               </a:lnSpc>
@@ -21324,7 +21314,7 @@
             </a:r>
           </a:p>
           <a:p>
-            <a:pPr marL="0" indent="0" algn="l">
+            <a:pPr marL="0" indent="0" algn="ctr">
               <a:lnSpc>
                 <a:spcPct val="104000"/>
               </a:lnSpc>
@@ -21411,12 +21401,12 @@
           </a:ln>
         </p:spPr>
         <p:txBody>
-          <a:bodyPr wrap="square" lIns="137160" tIns="91440" rIns="137160" bIns="91440" rtlCol="0" anchor="t">
+          <a:bodyPr wrap="square" lIns="137160" tIns="91440" rIns="137160" bIns="91440" rtlCol="0" anchor="ctr">
             <a:normAutofit/>
           </a:bodyPr>
           <a:lstStyle/>
           <a:p>
-            <a:pPr marL="0" indent="0" algn="l">
+            <a:pPr marL="0" indent="0" algn="ctr">
               <a:lnSpc>
                 <a:spcPct val="104000"/>
               </a:lnSpc>
@@ -21437,7 +21427,7 @@
             </a:r>
           </a:p>
           <a:p>
-            <a:pPr marL="0" indent="0" algn="l">
+            <a:pPr marL="0" indent="0" algn="ctr">
               <a:lnSpc>
                 <a:spcPct val="104000"/>
               </a:lnSpc>
@@ -21458,7 +21448,7 @@
             </a:r>
           </a:p>
           <a:p>
-            <a:pPr marL="0" indent="0" algn="l">
+            <a:pPr marL="0" indent="0" algn="ctr">
               <a:lnSpc>
                 <a:spcPct val="104000"/>
               </a:lnSpc>
@@ -21796,12 +21786,12 @@
           </a:ln>
         </p:spPr>
         <p:txBody>
-          <a:bodyPr wrap="square" lIns="137160" tIns="91440" rIns="137160" bIns="91440" rtlCol="0" anchor="t">
+          <a:bodyPr wrap="square" lIns="137160" tIns="91440" rIns="137160" bIns="91440" rtlCol="0" anchor="ctr">
             <a:normAutofit/>
           </a:bodyPr>
           <a:lstStyle/>
           <a:p>
-            <a:pPr marL="0" indent="0" algn="l">
+            <a:pPr marL="0" indent="0" algn="ctr">
               <a:lnSpc>
                 <a:spcPct val="104000"/>
               </a:lnSpc>
@@ -21822,7 +21812,7 @@
             </a:r>
           </a:p>
           <a:p>
-            <a:pPr marL="0" indent="0" algn="l">
+            <a:pPr marL="0" indent="0" algn="ctr">
               <a:lnSpc>
                 <a:spcPct val="104000"/>
               </a:lnSpc>
@@ -21909,12 +21899,12 @@
           </a:ln>
         </p:spPr>
         <p:txBody>
-          <a:bodyPr wrap="square" lIns="137160" tIns="91440" rIns="137160" bIns="91440" rtlCol="0" anchor="t">
+          <a:bodyPr wrap="square" lIns="137160" tIns="91440" rIns="137160" bIns="91440" rtlCol="0" anchor="ctr">
             <a:normAutofit/>
           </a:bodyPr>
           <a:lstStyle/>
           <a:p>
-            <a:pPr marL="0" indent="0" algn="l">
+            <a:pPr marL="0" indent="0" algn="ctr">
               <a:lnSpc>
                 <a:spcPct val="104000"/>
               </a:lnSpc>
@@ -21935,7 +21925,7 @@
             </a:r>
           </a:p>
           <a:p>
-            <a:pPr marL="0" indent="0" algn="l">
+            <a:pPr marL="0" indent="0" algn="ctr">
               <a:lnSpc>
                 <a:spcPct val="104000"/>
               </a:lnSpc>
@@ -22022,12 +22012,12 @@
           </a:ln>
         </p:spPr>
         <p:txBody>
-          <a:bodyPr wrap="square" lIns="137160" tIns="91440" rIns="137160" bIns="91440" rtlCol="0" anchor="t">
+          <a:bodyPr wrap="square" lIns="137160" tIns="91440" rIns="137160" bIns="91440" rtlCol="0" anchor="ctr">
             <a:normAutofit/>
           </a:bodyPr>
           <a:lstStyle/>
           <a:p>
-            <a:pPr marL="0" indent="0" algn="l">
+            <a:pPr marL="0" indent="0" algn="ctr">
               <a:lnSpc>
                 <a:spcPct val="104000"/>
               </a:lnSpc>
@@ -22048,7 +22038,7 @@
             </a:r>
           </a:p>
           <a:p>
-            <a:pPr marL="0" indent="0" algn="l">
+            <a:pPr marL="0" indent="0" algn="ctr">
               <a:lnSpc>
                 <a:spcPct val="104000"/>
               </a:lnSpc>
@@ -22135,12 +22125,12 @@
           </a:ln>
         </p:spPr>
         <p:txBody>
-          <a:bodyPr wrap="square" lIns="137160" tIns="91440" rIns="137160" bIns="91440" rtlCol="0" anchor="t">
+          <a:bodyPr wrap="square" lIns="137160" tIns="91440" rIns="137160" bIns="91440" rtlCol="0" anchor="ctr">
             <a:normAutofit/>
           </a:bodyPr>
           <a:lstStyle/>
           <a:p>
-            <a:pPr marL="0" indent="0" algn="l">
+            <a:pPr marL="0" indent="0" algn="ctr">
               <a:lnSpc>
                 <a:spcPct val="104000"/>
               </a:lnSpc>
@@ -22161,7 +22151,7 @@
             </a:r>
           </a:p>
           <a:p>
-            <a:pPr marL="0" indent="0" algn="l">
+            <a:pPr marL="0" indent="0" algn="ctr">
               <a:lnSpc>
                 <a:spcPct val="104000"/>
               </a:lnSpc>
@@ -23967,12 +23957,12 @@
           </a:ln>
         </p:spPr>
         <p:txBody>
-          <a:bodyPr wrap="square" lIns="137160" tIns="91440" rIns="137160" bIns="91440" rtlCol="0" anchor="t">
+          <a:bodyPr wrap="square" lIns="137160" tIns="91440" rIns="137160" bIns="91440" rtlCol="0" anchor="ctr">
             <a:normAutofit/>
           </a:bodyPr>
           <a:lstStyle/>
           <a:p>
-            <a:pPr marL="0" indent="0" algn="l">
+            <a:pPr marL="0" indent="0" algn="ctr">
               <a:lnSpc>
                 <a:spcPct val="104000"/>
               </a:lnSpc>
@@ -23993,7 +23983,7 @@
             </a:r>
           </a:p>
           <a:p>
-            <a:pPr marL="0" indent="0" algn="l">
+            <a:pPr marL="0" indent="0" algn="ctr">
               <a:lnSpc>
                 <a:spcPct val="104000"/>
               </a:lnSpc>
@@ -24014,7 +24004,7 @@
             </a:r>
           </a:p>
           <a:p>
-            <a:pPr marL="0" indent="0" algn="l">
+            <a:pPr marL="0" indent="0" algn="ctr">
               <a:lnSpc>
                 <a:spcPct val="104000"/>
               </a:lnSpc>
@@ -24035,7 +24025,7 @@
             </a:r>
           </a:p>
           <a:p>
-            <a:pPr marL="0" indent="0" algn="l">
+            <a:pPr marL="0" indent="0" algn="ctr">
               <a:lnSpc>
                 <a:spcPct val="104000"/>
               </a:lnSpc>
@@ -24056,7 +24046,7 @@
             </a:r>
           </a:p>
           <a:p>
-            <a:pPr marL="0" indent="0" algn="l">
+            <a:pPr marL="0" indent="0" algn="ctr">
               <a:lnSpc>
                 <a:spcPct val="104000"/>
               </a:lnSpc>
@@ -24077,7 +24067,7 @@
             </a:r>
           </a:p>
           <a:p>
-            <a:pPr marL="0" indent="0" algn="l">
+            <a:pPr marL="0" indent="0" algn="ctr">
               <a:lnSpc>
                 <a:spcPct val="104000"/>
               </a:lnSpc>
@@ -24098,7 +24088,7 @@
             </a:r>
           </a:p>
           <a:p>
-            <a:pPr marL="0" indent="0" algn="l">
+            <a:pPr marL="0" indent="0" algn="ctr">
               <a:lnSpc>
                 <a:spcPct val="104000"/>
               </a:lnSpc>
@@ -24119,7 +24109,7 @@
             </a:r>
           </a:p>
           <a:p>
-            <a:pPr marL="0" indent="0" algn="l">
+            <a:pPr marL="0" indent="0" algn="ctr">
               <a:lnSpc>
                 <a:spcPct val="104000"/>
               </a:lnSpc>
@@ -24206,12 +24196,12 @@
           </a:ln>
         </p:spPr>
         <p:txBody>
-          <a:bodyPr wrap="square" lIns="137160" tIns="91440" rIns="137160" bIns="91440" rtlCol="0" anchor="t">
+          <a:bodyPr wrap="square" lIns="137160" tIns="91440" rIns="137160" bIns="91440" rtlCol="0" anchor="ctr">
             <a:normAutofit/>
           </a:bodyPr>
           <a:lstStyle/>
           <a:p>
-            <a:pPr marL="0" indent="0" algn="l">
+            <a:pPr marL="0" indent="0" algn="ctr">
               <a:lnSpc>
                 <a:spcPct val="104000"/>
               </a:lnSpc>
@@ -24232,7 +24222,7 @@
             </a:r>
           </a:p>
           <a:p>
-            <a:pPr marL="0" indent="0" algn="l">
+            <a:pPr marL="0" indent="0" algn="ctr">
               <a:lnSpc>
                 <a:spcPct val="104000"/>
               </a:lnSpc>
@@ -24253,7 +24243,7 @@
             </a:r>
           </a:p>
           <a:p>
-            <a:pPr marL="0" indent="0" algn="l">
+            <a:pPr marL="0" indent="0" algn="ctr">
               <a:lnSpc>
                 <a:spcPct val="104000"/>
               </a:lnSpc>
@@ -24274,7 +24264,7 @@
             </a:r>
           </a:p>
           <a:p>
-            <a:pPr marL="0" indent="0" algn="l">
+            <a:pPr marL="0" indent="0" algn="ctr">
               <a:lnSpc>
                 <a:spcPct val="104000"/>
               </a:lnSpc>
@@ -24295,7 +24285,7 @@
             </a:r>
           </a:p>
           <a:p>
-            <a:pPr marL="0" indent="0" algn="l">
+            <a:pPr marL="0" indent="0" algn="ctr">
               <a:lnSpc>
                 <a:spcPct val="104000"/>
               </a:lnSpc>
@@ -24784,12 +24774,12 @@
           </a:ln>
         </p:spPr>
         <p:txBody>
-          <a:bodyPr wrap="square" lIns="137160" tIns="91440" rIns="137160" bIns="91440" rtlCol="0" anchor="t">
+          <a:bodyPr wrap="square" lIns="137160" tIns="91440" rIns="137160" bIns="91440" rtlCol="0" anchor="ctr">
             <a:normAutofit/>
           </a:bodyPr>
           <a:lstStyle/>
           <a:p>
-            <a:pPr marL="0" indent="0" algn="l">
+            <a:pPr marL="0" indent="0" algn="ctr">
               <a:buNone/>
             </a:pPr>
             <a:r>
@@ -24804,15 +24794,14 @@
             </a:r>
           </a:p>
           <a:p>
-            <a:pPr marL="274320" indent="-274320" algn="l">
+            <a:pPr marL="0" indent="0" algn="ctr">
               <a:lnSpc>
                 <a:spcPct val="104000"/>
               </a:lnSpc>
               <a:spcBef>
                 <a:spcPts val="300"/>
               </a:spcBef>
-              <a:buFont typeface="Arial"/>
-              <a:buChar char="•"/>
+              <a:buNone/>
             </a:pPr>
             <a:r>
               <a:rPr lang="en-US" sz="1500" dirty="0">
@@ -24826,15 +24815,14 @@
             </a:r>
           </a:p>
           <a:p>
-            <a:pPr marL="274320" indent="-274320" algn="l">
+            <a:pPr marL="0" indent="0" algn="ctr">
               <a:lnSpc>
                 <a:spcPct val="104000"/>
               </a:lnSpc>
               <a:spcBef>
                 <a:spcPts val="300"/>
               </a:spcBef>
-              <a:buFont typeface="Arial"/>
-              <a:buChar char="•"/>
+              <a:buNone/>
             </a:pPr>
             <a:r>
               <a:rPr lang="en-US" sz="1500" dirty="0">
@@ -24848,15 +24836,14 @@
             </a:r>
           </a:p>
           <a:p>
-            <a:pPr marL="274320" indent="-274320" algn="l">
+            <a:pPr marL="0" indent="0" algn="ctr">
               <a:lnSpc>
                 <a:spcPct val="104000"/>
               </a:lnSpc>
               <a:spcBef>
                 <a:spcPts val="300"/>
               </a:spcBef>
-              <a:buFont typeface="Arial"/>
-              <a:buChar char="•"/>
+              <a:buNone/>
             </a:pPr>
             <a:r>
               <a:rPr lang="en-US" sz="1500" dirty="0">
@@ -24870,15 +24857,14 @@
             </a:r>
           </a:p>
           <a:p>
-            <a:pPr marL="274320" indent="-274320" algn="l">
+            <a:pPr marL="0" indent="0" algn="ctr">
               <a:lnSpc>
                 <a:spcPct val="104000"/>
               </a:lnSpc>
               <a:spcBef>
                 <a:spcPts val="300"/>
               </a:spcBef>
-              <a:buFont typeface="Arial"/>
-              <a:buChar char="•"/>
+              <a:buNone/>
             </a:pPr>
             <a:r>
               <a:rPr lang="en-US" sz="1500" dirty="0">
@@ -24892,15 +24878,14 @@
             </a:r>
           </a:p>
           <a:p>
-            <a:pPr marL="274320" indent="-274320" algn="l">
+            <a:pPr marL="0" indent="0" algn="ctr">
               <a:lnSpc>
                 <a:spcPct val="104000"/>
               </a:lnSpc>
               <a:spcBef>
                 <a:spcPts val="300"/>
               </a:spcBef>
-              <a:buFont typeface="Arial"/>
-              <a:buChar char="•"/>
+              <a:buNone/>
             </a:pPr>
             <a:r>
               <a:rPr lang="en-US" sz="1500" dirty="0">
@@ -25558,12 +25543,12 @@
           </a:ln>
         </p:spPr>
         <p:txBody>
-          <a:bodyPr wrap="square" lIns="137160" tIns="91440" rIns="137160" bIns="91440" rtlCol="0" anchor="t">
+          <a:bodyPr wrap="square" lIns="137160" tIns="91440" rIns="137160" bIns="91440" rtlCol="0" anchor="ctr">
             <a:normAutofit/>
           </a:bodyPr>
           <a:lstStyle/>
           <a:p>
-            <a:pPr marL="0" indent="0" algn="l">
+            <a:pPr marL="0" indent="0" algn="ctr">
               <a:buNone/>
             </a:pPr>
             <a:r>
@@ -25578,15 +25563,14 @@
             </a:r>
           </a:p>
           <a:p>
-            <a:pPr marL="274320" indent="-274320" algn="l">
+            <a:pPr marL="0" indent="0" algn="ctr">
               <a:lnSpc>
                 <a:spcPct val="104000"/>
               </a:lnSpc>
               <a:spcBef>
                 <a:spcPts val="300"/>
               </a:spcBef>
-              <a:buFont typeface="Arial"/>
-              <a:buChar char="•"/>
+              <a:buNone/>
             </a:pPr>
             <a:r>
               <a:rPr lang="en-US" sz="1500" dirty="0">
@@ -25600,15 +25584,14 @@
             </a:r>
           </a:p>
           <a:p>
-            <a:pPr marL="274320" indent="-274320" algn="l">
+            <a:pPr marL="0" indent="0" algn="ctr">
               <a:lnSpc>
                 <a:spcPct val="104000"/>
               </a:lnSpc>
               <a:spcBef>
                 <a:spcPts val="300"/>
               </a:spcBef>
-              <a:buFont typeface="Arial"/>
-              <a:buChar char="•"/>
+              <a:buNone/>
             </a:pPr>
             <a:r>
               <a:rPr lang="en-US" sz="1500" dirty="0">
@@ -25622,15 +25605,14 @@
             </a:r>
           </a:p>
           <a:p>
-            <a:pPr marL="274320" indent="-274320" algn="l">
+            <a:pPr marL="0" indent="0" algn="ctr">
               <a:lnSpc>
                 <a:spcPct val="104000"/>
               </a:lnSpc>
               <a:spcBef>
                 <a:spcPts val="300"/>
               </a:spcBef>
-              <a:buFont typeface="Arial"/>
-              <a:buChar char="•"/>
+              <a:buNone/>
             </a:pPr>
             <a:r>
               <a:rPr lang="en-US" sz="1500" dirty="0">
@@ -25644,15 +25626,14 @@
             </a:r>
           </a:p>
           <a:p>
-            <a:pPr marL="274320" indent="-274320" algn="l">
+            <a:pPr marL="0" indent="0" algn="ctr">
               <a:lnSpc>
                 <a:spcPct val="104000"/>
               </a:lnSpc>
               <a:spcBef>
                 <a:spcPts val="300"/>
               </a:spcBef>
-              <a:buFont typeface="Arial"/>
-              <a:buChar char="•"/>
+              <a:buNone/>
             </a:pPr>
             <a:r>
               <a:rPr lang="en-US" sz="1500" dirty="0">
@@ -26136,12 +26117,12 @@
           </a:ln>
         </p:spPr>
         <p:txBody>
-          <a:bodyPr wrap="square" lIns="137160" tIns="91440" rIns="137160" bIns="91440" rtlCol="0" anchor="t">
+          <a:bodyPr wrap="square" lIns="137160" tIns="91440" rIns="137160" bIns="91440" rtlCol="0" anchor="ctr">
             <a:normAutofit/>
           </a:bodyPr>
           <a:lstStyle/>
           <a:p>
-            <a:pPr marL="0" indent="0" algn="l">
+            <a:pPr marL="0" indent="0" algn="ctr">
               <a:buNone/>
             </a:pPr>
             <a:r>
@@ -26156,15 +26137,14 @@
             </a:r>
           </a:p>
           <a:p>
-            <a:pPr marL="274320" indent="-274320" algn="l">
+            <a:pPr marL="0" indent="0" algn="ctr">
               <a:lnSpc>
                 <a:spcPct val="104000"/>
               </a:lnSpc>
               <a:spcBef>
                 <a:spcPts val="300"/>
               </a:spcBef>
-              <a:buFont typeface="Arial"/>
-              <a:buChar char="•"/>
+              <a:buNone/>
             </a:pPr>
             <a:r>
               <a:rPr lang="en-US" sz="1500" dirty="0">
@@ -26178,15 +26158,14 @@
             </a:r>
           </a:p>
           <a:p>
-            <a:pPr marL="274320" indent="-274320" algn="l">
+            <a:pPr marL="0" indent="0" algn="ctr">
               <a:lnSpc>
                 <a:spcPct val="104000"/>
               </a:lnSpc>
               <a:spcBef>
                 <a:spcPts val="300"/>
               </a:spcBef>
-              <a:buFont typeface="Arial"/>
-              <a:buChar char="•"/>
+              <a:buNone/>
             </a:pPr>
             <a:r>
               <a:rPr lang="en-US" sz="1500" dirty="0">
@@ -26200,15 +26179,14 @@
             </a:r>
           </a:p>
           <a:p>
-            <a:pPr marL="274320" indent="-274320" algn="l">
+            <a:pPr marL="0" indent="0" algn="ctr">
               <a:lnSpc>
                 <a:spcPct val="104000"/>
               </a:lnSpc>
               <a:spcBef>
                 <a:spcPts val="300"/>
               </a:spcBef>
-              <a:buFont typeface="Arial"/>
-              <a:buChar char="•"/>
+              <a:buNone/>
             </a:pPr>
             <a:r>
               <a:rPr lang="en-US" sz="1500" dirty="0">
@@ -26222,15 +26200,14 @@
             </a:r>
           </a:p>
           <a:p>
-            <a:pPr marL="274320" indent="-274320" algn="l">
+            <a:pPr marL="0" indent="0" algn="ctr">
               <a:lnSpc>
                 <a:spcPct val="104000"/>
               </a:lnSpc>
               <a:spcBef>
                 <a:spcPts val="300"/>
               </a:spcBef>
-              <a:buFont typeface="Arial"/>
-              <a:buChar char="•"/>
+              <a:buNone/>
             </a:pPr>
             <a:r>
               <a:rPr lang="en-US" sz="1500" dirty="0">
@@ -26244,15 +26221,14 @@
             </a:r>
           </a:p>
           <a:p>
-            <a:pPr marL="274320" indent="-274320" algn="l">
+            <a:pPr marL="0" indent="0" algn="ctr">
               <a:lnSpc>
                 <a:spcPct val="104000"/>
               </a:lnSpc>
               <a:spcBef>
                 <a:spcPts val="300"/>
               </a:spcBef>
-              <a:buFont typeface="Arial"/>
-              <a:buChar char="•"/>
+              <a:buNone/>
             </a:pPr>
             <a:r>
               <a:rPr lang="en-US" sz="1500" dirty="0">
@@ -27601,12 +27577,12 @@
           </a:ln>
         </p:spPr>
         <p:txBody>
-          <a:bodyPr wrap="square" lIns="137160" tIns="91440" rIns="137160" bIns="91440" rtlCol="0" anchor="t">
+          <a:bodyPr wrap="square" lIns="137160" tIns="91440" rIns="137160" bIns="91440" rtlCol="0" anchor="ctr">
             <a:normAutofit/>
           </a:bodyPr>
           <a:lstStyle/>
           <a:p>
-            <a:pPr marL="0" indent="0" algn="l">
+            <a:pPr marL="0" indent="0" algn="ctr">
               <a:buNone/>
             </a:pPr>
             <a:r>
@@ -27621,15 +27597,14 @@
             </a:r>
           </a:p>
           <a:p>
-            <a:pPr marL="274320" indent="-274320" algn="l">
+            <a:pPr marL="0" indent="0" algn="ctr">
               <a:lnSpc>
                 <a:spcPct val="104000"/>
               </a:lnSpc>
               <a:spcBef>
                 <a:spcPts val="300"/>
               </a:spcBef>
-              <a:buFont typeface="Arial"/>
-              <a:buChar char="•"/>
+              <a:buNone/>
             </a:pPr>
             <a:r>
               <a:rPr lang="en-US" sz="1500" dirty="0">
@@ -27643,15 +27618,14 @@
             </a:r>
           </a:p>
           <a:p>
-            <a:pPr marL="274320" indent="-274320" algn="l">
+            <a:pPr marL="0" indent="0" algn="ctr">
               <a:lnSpc>
                 <a:spcPct val="104000"/>
               </a:lnSpc>
               <a:spcBef>
                 <a:spcPts val="300"/>
               </a:spcBef>
-              <a:buFont typeface="Arial"/>
-              <a:buChar char="•"/>
+              <a:buNone/>
             </a:pPr>
             <a:r>
               <a:rPr lang="en-US" sz="1500" dirty="0">
@@ -27665,15 +27639,14 @@
             </a:r>
           </a:p>
           <a:p>
-            <a:pPr marL="274320" indent="-274320" algn="l">
+            <a:pPr marL="0" indent="0" algn="ctr">
               <a:lnSpc>
                 <a:spcPct val="104000"/>
               </a:lnSpc>
               <a:spcBef>
                 <a:spcPts val="300"/>
               </a:spcBef>
-              <a:buFont typeface="Arial"/>
-              <a:buChar char="•"/>
+              <a:buNone/>
             </a:pPr>
             <a:r>
               <a:rPr lang="en-US" sz="1500" dirty="0">
@@ -28388,12 +28361,12 @@
           </a:ln>
         </p:spPr>
         <p:txBody>
-          <a:bodyPr wrap="square" lIns="137160" tIns="91440" rIns="137160" bIns="91440" rtlCol="0" anchor="t">
+          <a:bodyPr wrap="square" lIns="137160" tIns="91440" rIns="137160" bIns="91440" rtlCol="0" anchor="ctr">
             <a:normAutofit/>
           </a:bodyPr>
           <a:lstStyle/>
           <a:p>
-            <a:pPr marL="0" indent="0" algn="l">
+            <a:pPr marL="0" indent="0" algn="ctr">
               <a:buNone/>
             </a:pPr>
             <a:r>
@@ -28408,15 +28381,14 @@
             </a:r>
           </a:p>
           <a:p>
-            <a:pPr marL="274320" indent="-274320" algn="l">
+            <a:pPr marL="0" indent="0" algn="ctr">
               <a:lnSpc>
                 <a:spcPct val="104000"/>
               </a:lnSpc>
               <a:spcBef>
                 <a:spcPts val="300"/>
               </a:spcBef>
-              <a:buFont typeface="Arial"/>
-              <a:buChar char="•"/>
+              <a:buNone/>
             </a:pPr>
             <a:r>
               <a:rPr lang="en-US" sz="1500" dirty="0">
@@ -28430,15 +28402,14 @@
             </a:r>
           </a:p>
           <a:p>
-            <a:pPr marL="274320" indent="-274320" algn="l">
+            <a:pPr marL="0" indent="0" algn="ctr">
               <a:lnSpc>
                 <a:spcPct val="104000"/>
               </a:lnSpc>
               <a:spcBef>
                 <a:spcPts val="300"/>
               </a:spcBef>
-              <a:buFont typeface="Arial"/>
-              <a:buChar char="•"/>
+              <a:buNone/>
             </a:pPr>
             <a:r>
               <a:rPr lang="en-US" sz="1500" dirty="0">
@@ -28452,15 +28423,14 @@
             </a:r>
           </a:p>
           <a:p>
-            <a:pPr marL="274320" indent="-274320" algn="l">
+            <a:pPr marL="0" indent="0" algn="ctr">
               <a:lnSpc>
                 <a:spcPct val="104000"/>
               </a:lnSpc>
               <a:spcBef>
                 <a:spcPts val="300"/>
               </a:spcBef>
-              <a:buFont typeface="Arial"/>
-              <a:buChar char="•"/>
+              <a:buNone/>
             </a:pPr>
             <a:r>
               <a:rPr lang="en-US" sz="1500" dirty="0">
@@ -28474,15 +28444,14 @@
             </a:r>
           </a:p>
           <a:p>
-            <a:pPr marL="274320" indent="-274320" algn="l">
+            <a:pPr marL="0" indent="0" algn="ctr">
               <a:lnSpc>
                 <a:spcPct val="104000"/>
               </a:lnSpc>
               <a:spcBef>
                 <a:spcPts val="300"/>
               </a:spcBef>
-              <a:buFont typeface="Arial"/>
-              <a:buChar char="•"/>
+              <a:buNone/>
             </a:pPr>
             <a:r>
               <a:rPr lang="en-US" sz="1500" dirty="0">
@@ -29072,12 +29041,12 @@
           </a:ln>
         </p:spPr>
         <p:txBody>
-          <a:bodyPr wrap="square" lIns="137160" tIns="91440" rIns="137160" bIns="91440" rtlCol="0" anchor="t">
+          <a:bodyPr wrap="square" lIns="137160" tIns="91440" rIns="137160" bIns="91440" rtlCol="0" anchor="ctr">
             <a:normAutofit/>
           </a:bodyPr>
           <a:lstStyle/>
           <a:p>
-            <a:pPr marL="0" indent="0" algn="l">
+            <a:pPr marL="0" indent="0" algn="ctr">
               <a:lnSpc>
                 <a:spcPct val="104000"/>
               </a:lnSpc>
@@ -29098,7 +29067,7 @@
             </a:r>
           </a:p>
           <a:p>
-            <a:pPr marL="0" indent="0" algn="l">
+            <a:pPr marL="0" indent="0" algn="ctr">
               <a:lnSpc>
                 <a:spcPct val="104000"/>
               </a:lnSpc>
@@ -29119,7 +29088,7 @@
             </a:r>
           </a:p>
           <a:p>
-            <a:pPr marL="0" indent="0" algn="l">
+            <a:pPr marL="0" indent="0" algn="ctr">
               <a:lnSpc>
                 <a:spcPct val="104000"/>
               </a:lnSpc>
@@ -29140,7 +29109,7 @@
             </a:r>
           </a:p>
           <a:p>
-            <a:pPr marL="0" indent="0" algn="l">
+            <a:pPr marL="0" indent="0" algn="ctr">
               <a:lnSpc>
                 <a:spcPct val="104000"/>
               </a:lnSpc>
@@ -29161,7 +29130,7 @@
             </a:r>
           </a:p>
           <a:p>
-            <a:pPr marL="0" indent="0" algn="l">
+            <a:pPr marL="0" indent="0" algn="ctr">
               <a:lnSpc>
                 <a:spcPct val="104000"/>
               </a:lnSpc>
@@ -29182,7 +29151,7 @@
             </a:r>
           </a:p>
           <a:p>
-            <a:pPr marL="0" indent="0" algn="l">
+            <a:pPr marL="0" indent="0" algn="ctr">
               <a:lnSpc>
                 <a:spcPct val="104000"/>
               </a:lnSpc>
@@ -29203,7 +29172,7 @@
             </a:r>
           </a:p>
           <a:p>
-            <a:pPr marL="0" indent="0" algn="l">
+            <a:pPr marL="0" indent="0" algn="ctr">
               <a:lnSpc>
                 <a:spcPct val="104000"/>
               </a:lnSpc>
@@ -29290,12 +29259,12 @@
           </a:ln>
         </p:spPr>
         <p:txBody>
-          <a:bodyPr wrap="square" lIns="137160" tIns="91440" rIns="137160" bIns="91440" rtlCol="0" anchor="t">
+          <a:bodyPr wrap="square" lIns="137160" tIns="91440" rIns="137160" bIns="91440" rtlCol="0" anchor="ctr">
             <a:normAutofit/>
           </a:bodyPr>
           <a:lstStyle/>
           <a:p>
-            <a:pPr marL="0" indent="0" algn="l">
+            <a:pPr marL="0" indent="0" algn="ctr">
               <a:lnSpc>
                 <a:spcPct val="104000"/>
               </a:lnSpc>
@@ -29316,7 +29285,7 @@
             </a:r>
           </a:p>
           <a:p>
-            <a:pPr marL="0" indent="0" algn="l">
+            <a:pPr marL="0" indent="0" algn="ctr">
               <a:lnSpc>
                 <a:spcPct val="104000"/>
               </a:lnSpc>
@@ -29337,7 +29306,7 @@
             </a:r>
           </a:p>
           <a:p>
-            <a:pPr marL="0" indent="0" algn="l">
+            <a:pPr marL="0" indent="0" algn="ctr">
               <a:lnSpc>
                 <a:spcPct val="104000"/>
               </a:lnSpc>
@@ -29424,12 +29393,12 @@
           </a:ln>
         </p:spPr>
         <p:txBody>
-          <a:bodyPr wrap="square" lIns="137160" tIns="91440" rIns="137160" bIns="91440" rtlCol="0" anchor="t">
+          <a:bodyPr wrap="square" lIns="137160" tIns="91440" rIns="137160" bIns="91440" rtlCol="0" anchor="ctr">
             <a:normAutofit/>
           </a:bodyPr>
           <a:lstStyle/>
           <a:p>
-            <a:pPr marL="0" indent="0" algn="l">
+            <a:pPr marL="0" indent="0" algn="ctr">
               <a:lnSpc>
                 <a:spcPct val="104000"/>
               </a:lnSpc>
@@ -29450,7 +29419,7 @@
             </a:r>
           </a:p>
           <a:p>
-            <a:pPr marL="0" indent="0" algn="l">
+            <a:pPr marL="0" indent="0" algn="ctr">
               <a:lnSpc>
                 <a:spcPct val="104000"/>
               </a:lnSpc>
@@ -29471,7 +29440,7 @@
             </a:r>
           </a:p>
           <a:p>
-            <a:pPr marL="0" indent="0" algn="l">
+            <a:pPr marL="0" indent="0" algn="ctr">
               <a:lnSpc>
                 <a:spcPct val="104000"/>
               </a:lnSpc>
@@ -30124,12 +30093,12 @@
           </a:ln>
         </p:spPr>
         <p:txBody>
-          <a:bodyPr wrap="square" lIns="137160" tIns="91440" rIns="137160" bIns="91440" rtlCol="0" anchor="t">
+          <a:bodyPr wrap="square" lIns="137160" tIns="91440" rIns="137160" bIns="91440" rtlCol="0" anchor="ctr">
             <a:normAutofit/>
           </a:bodyPr>
           <a:lstStyle/>
           <a:p>
-            <a:pPr marL="0" indent="0" algn="l">
+            <a:pPr marL="0" indent="0" algn="ctr">
               <a:lnSpc>
                 <a:spcPct val="104000"/>
               </a:lnSpc>
@@ -30150,7 +30119,7 @@
             </a:r>
           </a:p>
           <a:p>
-            <a:pPr marL="0" indent="0" algn="l">
+            <a:pPr marL="0" indent="0" algn="ctr">
               <a:lnSpc>
                 <a:spcPct val="104000"/>
               </a:lnSpc>
@@ -30171,7 +30140,7 @@
             </a:r>
           </a:p>
           <a:p>
-            <a:pPr marL="0" indent="0" algn="l">
+            <a:pPr marL="0" indent="0" algn="ctr">
               <a:lnSpc>
                 <a:spcPct val="104000"/>
               </a:lnSpc>
@@ -30192,7 +30161,7 @@
             </a:r>
           </a:p>
           <a:p>
-            <a:pPr marL="0" indent="0" algn="l">
+            <a:pPr marL="0" indent="0" algn="ctr">
               <a:lnSpc>
                 <a:spcPct val="104000"/>
               </a:lnSpc>
@@ -30279,12 +30248,12 @@
           </a:ln>
         </p:spPr>
         <p:txBody>
-          <a:bodyPr wrap="square" lIns="137160" tIns="91440" rIns="137160" bIns="91440" rtlCol="0" anchor="t">
+          <a:bodyPr wrap="square" lIns="137160" tIns="91440" rIns="137160" bIns="91440" rtlCol="0" anchor="ctr">
             <a:normAutofit/>
           </a:bodyPr>
           <a:lstStyle/>
           <a:p>
-            <a:pPr marL="0" indent="0" algn="l">
+            <a:pPr marL="0" indent="0" algn="ctr">
               <a:lnSpc>
                 <a:spcPct val="104000"/>
               </a:lnSpc>
@@ -30305,7 +30274,7 @@
             </a:r>
           </a:p>
           <a:p>
-            <a:pPr marL="0" indent="0" algn="l">
+            <a:pPr marL="0" indent="0" algn="ctr">
               <a:lnSpc>
                 <a:spcPct val="104000"/>
               </a:lnSpc>
@@ -30326,7 +30295,7 @@
             </a:r>
           </a:p>
           <a:p>
-            <a:pPr marL="0" indent="0" algn="l">
+            <a:pPr marL="0" indent="0" algn="ctr">
               <a:lnSpc>
                 <a:spcPct val="104000"/>
               </a:lnSpc>
@@ -30347,7 +30316,7 @@
             </a:r>
           </a:p>
           <a:p>
-            <a:pPr marL="0" indent="0" algn="l">
+            <a:pPr marL="0" indent="0" algn="ctr">
               <a:lnSpc>
                 <a:spcPct val="104000"/>
               </a:lnSpc>
@@ -30434,12 +30403,12 @@
           </a:ln>
         </p:spPr>
         <p:txBody>
-          <a:bodyPr wrap="square" lIns="137160" tIns="91440" rIns="137160" bIns="91440" rtlCol="0" anchor="t">
+          <a:bodyPr wrap="square" lIns="137160" tIns="91440" rIns="137160" bIns="91440" rtlCol="0" anchor="ctr">
             <a:normAutofit/>
           </a:bodyPr>
           <a:lstStyle/>
           <a:p>
-            <a:pPr marL="0" indent="0" algn="l">
+            <a:pPr marL="0" indent="0" algn="ctr">
               <a:lnSpc>
                 <a:spcPct val="104000"/>
               </a:lnSpc>
@@ -30460,7 +30429,7 @@
             </a:r>
           </a:p>
           <a:p>
-            <a:pPr marL="0" indent="0" algn="l">
+            <a:pPr marL="0" indent="0" algn="ctr">
               <a:lnSpc>
                 <a:spcPct val="104000"/>
               </a:lnSpc>
@@ -30481,7 +30450,7 @@
             </a:r>
           </a:p>
           <a:p>
-            <a:pPr marL="0" indent="0" algn="l">
+            <a:pPr marL="0" indent="0" algn="ctr">
               <a:lnSpc>
                 <a:spcPct val="104000"/>
               </a:lnSpc>
@@ -30502,7 +30471,7 @@
             </a:r>
           </a:p>
           <a:p>
-            <a:pPr marL="0" indent="0" algn="l">
+            <a:pPr marL="0" indent="0" algn="ctr">
               <a:lnSpc>
                 <a:spcPct val="104000"/>
               </a:lnSpc>
@@ -30589,12 +30558,12 @@
           </a:ln>
         </p:spPr>
         <p:txBody>
-          <a:bodyPr wrap="square" lIns="137160" tIns="91440" rIns="137160" bIns="91440" rtlCol="0" anchor="t">
+          <a:bodyPr wrap="square" lIns="137160" tIns="91440" rIns="137160" bIns="91440" rtlCol="0" anchor="ctr">
             <a:normAutofit/>
           </a:bodyPr>
           <a:lstStyle/>
           <a:p>
-            <a:pPr marL="0" indent="0" algn="l">
+            <a:pPr marL="0" indent="0" algn="ctr">
               <a:lnSpc>
                 <a:spcPct val="104000"/>
               </a:lnSpc>
@@ -30615,7 +30584,7 @@
             </a:r>
           </a:p>
           <a:p>
-            <a:pPr marL="0" indent="0" algn="l">
+            <a:pPr marL="0" indent="0" algn="ctr">
               <a:lnSpc>
                 <a:spcPct val="104000"/>
               </a:lnSpc>
@@ -30636,7 +30605,7 @@
             </a:r>
           </a:p>
           <a:p>
-            <a:pPr marL="0" indent="0" algn="l">
+            <a:pPr marL="0" indent="0" algn="ctr">
               <a:lnSpc>
                 <a:spcPct val="104000"/>
               </a:lnSpc>
@@ -30657,7 +30626,7 @@
             </a:r>
           </a:p>
           <a:p>
-            <a:pPr marL="0" indent="0" algn="l">
+            <a:pPr marL="0" indent="0" algn="ctr">
               <a:lnSpc>
                 <a:spcPct val="104000"/>
               </a:lnSpc>
@@ -30995,7 +30964,7 @@
           </a:ln>
         </p:spPr>
         <p:txBody>
-          <a:bodyPr wrap="square" lIns="137160" tIns="91440" rIns="137160" bIns="91440" rtlCol="0" anchor="t">
+          <a:bodyPr wrap="square" lIns="137160" tIns="91440" rIns="137160" bIns="91440" rtlCol="0" anchor="ctr">
             <a:normAutofit/>
           </a:bodyPr>
           <a:lstStyle/>
@@ -31198,7 +31167,7 @@
           </a:ln>
         </p:spPr>
         <p:txBody>
-          <a:bodyPr wrap="square" lIns="137160" tIns="91440" rIns="137160" bIns="91440" rtlCol="0" anchor="t">
+          <a:bodyPr wrap="square" lIns="137160" tIns="91440" rIns="137160" bIns="91440" rtlCol="0" anchor="ctr">
             <a:normAutofit/>
           </a:bodyPr>
           <a:lstStyle/>
@@ -31693,12 +31662,12 @@
           </a:ln>
         </p:spPr>
         <p:txBody>
-          <a:bodyPr wrap="square" lIns="110000" tIns="91440" rIns="110000" bIns="91440" rtlCol="0" anchor="t">
+          <a:bodyPr wrap="square" lIns="110000" tIns="91440" rIns="110000" bIns="91440" rtlCol="0" anchor="ctr">
             <a:normAutofit/>
           </a:bodyPr>
           <a:lstStyle/>
           <a:p>
-            <a:pPr marL="0" indent="0" algn="l">
+            <a:pPr marL="0" indent="0" algn="ctr">
               <a:lnSpc>
                 <a:spcPct val="104000"/>
               </a:lnSpc>
@@ -31719,7 +31688,7 @@
             </a:r>
           </a:p>
           <a:p>
-            <a:pPr marL="0" indent="0" algn="l">
+            <a:pPr marL="0" indent="0" algn="ctr">
               <a:lnSpc>
                 <a:spcPct val="104000"/>
               </a:lnSpc>
@@ -31740,7 +31709,7 @@
             </a:r>
           </a:p>
           <a:p>
-            <a:pPr marL="0" indent="0" algn="l">
+            <a:pPr marL="0" indent="0" algn="ctr">
               <a:lnSpc>
                 <a:spcPct val="104000"/>
               </a:lnSpc>
@@ -31829,12 +31798,12 @@
           </a:ln>
         </p:spPr>
         <p:txBody>
-          <a:bodyPr wrap="square" lIns="110000" tIns="91440" rIns="110000" bIns="91440" rtlCol="0" anchor="t">
+          <a:bodyPr wrap="square" lIns="110000" tIns="91440" rIns="110000" bIns="91440" rtlCol="0" anchor="ctr">
             <a:normAutofit/>
           </a:bodyPr>
           <a:lstStyle/>
           <a:p>
-            <a:pPr marL="0" indent="0" algn="l">
+            <a:pPr marL="0" indent="0" algn="ctr">
               <a:lnSpc>
                 <a:spcPct val="104000"/>
               </a:lnSpc>
@@ -31923,12 +31892,12 @@
           </a:ln>
         </p:spPr>
         <p:txBody>
-          <a:bodyPr wrap="square" lIns="110000" tIns="91440" rIns="110000" bIns="91440" rtlCol="0" anchor="t">
+          <a:bodyPr wrap="square" lIns="110000" tIns="91440" rIns="110000" bIns="91440" rtlCol="0" anchor="ctr">
             <a:normAutofit/>
           </a:bodyPr>
           <a:lstStyle/>
           <a:p>
-            <a:pPr marL="0" indent="0" algn="l">
+            <a:pPr marL="0" indent="0" algn="ctr">
               <a:lnSpc>
                 <a:spcPct val="104000"/>
               </a:lnSpc>
@@ -32017,12 +31986,12 @@
           </a:ln>
         </p:spPr>
         <p:txBody>
-          <a:bodyPr wrap="square" lIns="110000" tIns="91440" rIns="110000" bIns="91440" rtlCol="0" anchor="t">
+          <a:bodyPr wrap="square" lIns="110000" tIns="91440" rIns="110000" bIns="91440" rtlCol="0" anchor="ctr">
             <a:normAutofit/>
           </a:bodyPr>
           <a:lstStyle/>
           <a:p>
-            <a:pPr marL="0" indent="0" algn="l">
+            <a:pPr marL="0" indent="0" algn="ctr">
               <a:lnSpc>
                 <a:spcPct val="104000"/>
               </a:lnSpc>
@@ -32043,7 +32012,7 @@
             </a:r>
           </a:p>
           <a:p>
-            <a:pPr marL="0" indent="0" algn="l">
+            <a:pPr marL="0" indent="0" algn="ctr">
               <a:lnSpc>
                 <a:spcPct val="104000"/>
               </a:lnSpc>
@@ -32132,12 +32101,12 @@
           </a:ln>
         </p:spPr>
         <p:txBody>
-          <a:bodyPr wrap="square" lIns="110000" tIns="91440" rIns="110000" bIns="91440" rtlCol="0" anchor="t">
+          <a:bodyPr wrap="square" lIns="110000" tIns="91440" rIns="110000" bIns="91440" rtlCol="0" anchor="ctr">
             <a:normAutofit/>
           </a:bodyPr>
           <a:lstStyle/>
           <a:p>
-            <a:pPr marL="0" indent="0" algn="l">
+            <a:pPr marL="0" indent="0" algn="ctr">
               <a:lnSpc>
                 <a:spcPct val="104000"/>
               </a:lnSpc>
@@ -32226,12 +32195,12 @@
           </a:ln>
         </p:spPr>
         <p:txBody>
-          <a:bodyPr wrap="square" lIns="110000" tIns="91440" rIns="110000" bIns="91440" rtlCol="0" anchor="t">
+          <a:bodyPr wrap="square" lIns="110000" tIns="91440" rIns="110000" bIns="91440" rtlCol="0" anchor="ctr">
             <a:normAutofit/>
           </a:bodyPr>
           <a:lstStyle/>
           <a:p>
-            <a:pPr marL="0" indent="0" algn="l">
+            <a:pPr marL="0" indent="0" algn="ctr">
               <a:lnSpc>
                 <a:spcPct val="104000"/>
               </a:lnSpc>
@@ -32252,7 +32221,7 @@
             </a:r>
           </a:p>
           <a:p>
-            <a:pPr marL="0" indent="0" algn="l">
+            <a:pPr marL="0" indent="0" algn="ctr">
               <a:lnSpc>
                 <a:spcPct val="104000"/>
               </a:lnSpc>
@@ -32629,12 +32598,12 @@
           </a:ln>
         </p:spPr>
         <p:txBody>
-          <a:bodyPr wrap="square" lIns="137160" tIns="91440" rIns="137160" bIns="91440" rtlCol="0" anchor="t">
+          <a:bodyPr wrap="square" lIns="137160" tIns="91440" rIns="137160" bIns="91440" rtlCol="0" anchor="ctr">
             <a:normAutofit/>
           </a:bodyPr>
           <a:lstStyle/>
           <a:p>
-            <a:pPr marL="0" indent="0" algn="l">
+            <a:pPr marL="0" indent="0" algn="ctr">
               <a:lnSpc>
                 <a:spcPct val="104000"/>
               </a:lnSpc>
@@ -32655,7 +32624,7 @@
             </a:r>
           </a:p>
           <a:p>
-            <a:pPr marL="0" indent="0" algn="l">
+            <a:pPr marL="0" indent="0" algn="ctr">
               <a:lnSpc>
                 <a:spcPct val="104000"/>
               </a:lnSpc>
@@ -32676,7 +32645,7 @@
             </a:r>
           </a:p>
           <a:p>
-            <a:pPr marL="0" indent="0" algn="l">
+            <a:pPr marL="0" indent="0" algn="ctr">
               <a:lnSpc>
                 <a:spcPct val="104000"/>
               </a:lnSpc>
@@ -32763,12 +32732,12 @@
           </a:ln>
         </p:spPr>
         <p:txBody>
-          <a:bodyPr wrap="square" lIns="137160" tIns="91440" rIns="137160" bIns="91440" rtlCol="0" anchor="t">
+          <a:bodyPr wrap="square" lIns="137160" tIns="91440" rIns="137160" bIns="91440" rtlCol="0" anchor="ctr">
             <a:normAutofit/>
           </a:bodyPr>
           <a:lstStyle/>
           <a:p>
-            <a:pPr marL="0" indent="0" algn="l">
+            <a:pPr marL="0" indent="0" algn="ctr">
               <a:lnSpc>
                 <a:spcPct val="104000"/>
               </a:lnSpc>
@@ -32789,7 +32758,7 @@
             </a:r>
           </a:p>
           <a:p>
-            <a:pPr marL="0" indent="0" algn="l">
+            <a:pPr marL="0" indent="0" algn="ctr">
               <a:lnSpc>
                 <a:spcPct val="104000"/>
               </a:lnSpc>
@@ -32810,7 +32779,7 @@
             </a:r>
           </a:p>
           <a:p>
-            <a:pPr marL="0" indent="0" algn="l">
+            <a:pPr marL="0" indent="0" algn="ctr">
               <a:lnSpc>
                 <a:spcPct val="104000"/>
               </a:lnSpc>
@@ -32897,12 +32866,12 @@
           </a:ln>
         </p:spPr>
         <p:txBody>
-          <a:bodyPr wrap="square" lIns="137160" tIns="91440" rIns="137160" bIns="91440" rtlCol="0" anchor="t">
+          <a:bodyPr wrap="square" lIns="137160" tIns="91440" rIns="137160" bIns="91440" rtlCol="0" anchor="ctr">
             <a:normAutofit/>
           </a:bodyPr>
           <a:lstStyle/>
           <a:p>
-            <a:pPr marL="0" indent="0" algn="l">
+            <a:pPr marL="0" indent="0" algn="ctr">
               <a:lnSpc>
                 <a:spcPct val="104000"/>
               </a:lnSpc>
@@ -32923,7 +32892,7 @@
             </a:r>
           </a:p>
           <a:p>
-            <a:pPr marL="0" indent="0" algn="l">
+            <a:pPr marL="0" indent="0" algn="ctr">
               <a:lnSpc>
                 <a:spcPct val="104000"/>
               </a:lnSpc>
@@ -32944,7 +32913,7 @@
             </a:r>
           </a:p>
           <a:p>
-            <a:pPr marL="0" indent="0" algn="l">
+            <a:pPr marL="0" indent="0" algn="ctr">
               <a:lnSpc>
                 <a:spcPct val="104000"/>
               </a:lnSpc>
@@ -33321,12 +33290,12 @@
           </a:ln>
         </p:spPr>
         <p:txBody>
-          <a:bodyPr wrap="square" lIns="137160" tIns="91440" rIns="137160" bIns="91440" rtlCol="0" anchor="t">
+          <a:bodyPr wrap="square" lIns="137160" tIns="91440" rIns="137160" bIns="91440" rtlCol="0" anchor="ctr">
             <a:normAutofit/>
           </a:bodyPr>
           <a:lstStyle/>
           <a:p>
-            <a:pPr marL="0" indent="0" algn="l">
+            <a:pPr marL="0" indent="0" algn="ctr">
               <a:lnSpc>
                 <a:spcPct val="104000"/>
               </a:lnSpc>
@@ -33347,7 +33316,7 @@
             </a:r>
           </a:p>
           <a:p>
-            <a:pPr marL="0" indent="0" algn="l">
+            <a:pPr marL="0" indent="0" algn="ctr">
               <a:lnSpc>
                 <a:spcPct val="104000"/>
               </a:lnSpc>
@@ -33368,7 +33337,7 @@
             </a:r>
           </a:p>
           <a:p>
-            <a:pPr marL="0" indent="0" algn="l">
+            <a:pPr marL="0" indent="0" algn="ctr">
               <a:lnSpc>
                 <a:spcPct val="104000"/>
               </a:lnSpc>
@@ -33389,7 +33358,7 @@
             </a:r>
           </a:p>
           <a:p>
-            <a:pPr marL="0" indent="0" algn="l">
+            <a:pPr marL="0" indent="0" algn="ctr">
               <a:lnSpc>
                 <a:spcPct val="104000"/>
               </a:lnSpc>
@@ -33476,12 +33445,12 @@
           </a:ln>
         </p:spPr>
         <p:txBody>
-          <a:bodyPr wrap="square" lIns="137160" tIns="91440" rIns="137160" bIns="91440" rtlCol="0" anchor="t">
+          <a:bodyPr wrap="square" lIns="137160" tIns="91440" rIns="137160" bIns="91440" rtlCol="0" anchor="ctr">
             <a:normAutofit/>
           </a:bodyPr>
           <a:lstStyle/>
           <a:p>
-            <a:pPr marL="0" indent="0" algn="l">
+            <a:pPr marL="0" indent="0" algn="ctr">
               <a:lnSpc>
                 <a:spcPct val="104000"/>
               </a:lnSpc>
@@ -33502,7 +33471,7 @@
             </a:r>
           </a:p>
           <a:p>
-            <a:pPr marL="0" indent="0" algn="l">
+            <a:pPr marL="0" indent="0" algn="ctr">
               <a:lnSpc>
                 <a:spcPct val="104000"/>
               </a:lnSpc>
@@ -33523,7 +33492,7 @@
             </a:r>
           </a:p>
           <a:p>
-            <a:pPr marL="0" indent="0" algn="l">
+            <a:pPr marL="0" indent="0" algn="ctr">
               <a:lnSpc>
                 <a:spcPct val="104000"/>
               </a:lnSpc>
@@ -33610,12 +33579,12 @@
           </a:ln>
         </p:spPr>
         <p:txBody>
-          <a:bodyPr wrap="square" lIns="137160" tIns="91440" rIns="137160" bIns="91440" rtlCol="0" anchor="t">
+          <a:bodyPr wrap="square" lIns="137160" tIns="91440" rIns="137160" bIns="91440" rtlCol="0" anchor="ctr">
             <a:normAutofit/>
           </a:bodyPr>
           <a:lstStyle/>
           <a:p>
-            <a:pPr marL="0" indent="0" algn="l">
+            <a:pPr marL="0" indent="0" algn="ctr">
               <a:lnSpc>
                 <a:spcPct val="104000"/>
               </a:lnSpc>
@@ -33636,7 +33605,7 @@
             </a:r>
           </a:p>
           <a:p>
-            <a:pPr marL="0" indent="0" algn="l">
+            <a:pPr marL="0" indent="0" algn="ctr">
               <a:lnSpc>
                 <a:spcPct val="104000"/>
               </a:lnSpc>
@@ -33657,7 +33626,7 @@
             </a:r>
           </a:p>
           <a:p>
-            <a:pPr marL="0" indent="0" algn="l">
+            <a:pPr marL="0" indent="0" algn="ctr">
               <a:lnSpc>
                 <a:spcPct val="104000"/>
               </a:lnSpc>
@@ -33744,12 +33713,12 @@
           </a:ln>
         </p:spPr>
         <p:txBody>
-          <a:bodyPr wrap="square" lIns="137160" tIns="91440" rIns="137160" bIns="91440" rtlCol="0" anchor="t">
+          <a:bodyPr wrap="square" lIns="137160" tIns="91440" rIns="137160" bIns="91440" rtlCol="0" anchor="ctr">
             <a:normAutofit/>
           </a:bodyPr>
           <a:lstStyle/>
           <a:p>
-            <a:pPr marL="0" indent="0" algn="l">
+            <a:pPr marL="0" indent="0" algn="ctr">
               <a:lnSpc>
                 <a:spcPct val="104000"/>
               </a:lnSpc>
@@ -33770,7 +33739,7 @@
             </a:r>
           </a:p>
           <a:p>
-            <a:pPr marL="0" indent="0" algn="l">
+            <a:pPr marL="0" indent="0" algn="ctr">
               <a:lnSpc>
                 <a:spcPct val="104000"/>
               </a:lnSpc>
@@ -33791,7 +33760,7 @@
             </a:r>
           </a:p>
           <a:p>
-            <a:pPr marL="0" indent="0" algn="l">
+            <a:pPr marL="0" indent="0" algn="ctr">
               <a:lnSpc>
                 <a:spcPct val="104000"/>
               </a:lnSpc>

--- a/en/files/slides/Session_7_EN.pptx
+++ b/en/files/slides/Session_7_EN.pptx
@@ -3934,7 +3934,7 @@
           <a:p>
             <a:r>
               <a:rPr lang="en-US" sz="1400" b="0" dirty="0"/>
-              <a:t>Deadline for the Methods and Results draft: before Session 8 (course folder or email). Next Saturday's workshop adds the Introduction, Discussion, Abstract and Title.</a:t>
+              <a:t>Deadline for the Methods and Results draft: before Session 8 (by email). Next Saturday's workshop adds the Introduction, Discussion, Abstract and Title.</a:t>
             </a:r>
           </a:p>
         </p:txBody>
@@ -26295,7 +26295,7 @@
                 <a:latin typeface="Arial"/>
                 <a:cs typeface="Arial"/>
               </a:rPr>
-              <a:t>Your own Methods and Results (about 600 words), sent to the course folder before Session 8</a:t>
+              <a:t>Your own Methods and Results (about 600 words), sent by email before Session 8</a:t>
             </a:r>
           </a:p>
         </p:txBody>
@@ -26904,7 +26904,7 @@
                 <a:latin typeface="Arial"/>
                 <a:cs typeface="Arial"/>
               </a:rPr>
-              <a:t>Full glossary (English-Vietnamese): Course/References/glossary_EN_VN (PDF in the course folder)</a:t>
+              <a:t>Full glossary (English-Vietnamese): the PDF sent by email</a:t>
             </a:r>
           </a:p>
         </p:txBody>

--- a/en/files/slides/Session_7_EN.pptx
+++ b/en/files/slides/Session_7_EN.pptx
@@ -56,6 +56,7 @@
     <p:sldId id="298" r:id="rId142"/>
     <p:sldId id="299" r:id="rId143"/>
     <p:sldId id="300" r:id="rId144"/>
+    <p:sldId id="301" r:id="rId145"/>
   </p:sldIdLst>
   <p:sldSz cx="12192000" cy="6858000"/>
   <p:notesSz cx="6858000" cy="9144000"/>
@@ -733,25 +734,19 @@
           <a:p>
             <a:r>
               <a:rPr lang="en-US" sz="1400" b="0" dirty="0"/>
-              <a:t>Session 7 (19:30). Online, 19:30-22:30, with a 15-minute break at 20:45. Two halves: before the break we protect the patient and the science (ethics, integrity) and model Part 4 of the proposal. After the break we start writing the FLUID-ICU manuscript.</a:t>
+              <a:t>Session 7 (19:30-22:30, break 20:45-21:00). Before the break: ethics, integrity and Proposal Part 4. After the break: the Results section.</a:t>
             </a:r>
           </a:p>
           <a:p>
             <a:r>
               <a:rPr lang="en-US" sz="1400" b="0" dirty="0"/>
-              <a:t>Format: the whole class works together. Participants answer in polls, or the instructor calls on two or three people to answer with the microphone on. You (or a volunteer) type the class answer on the shared screen. No breakout rooms.</a:t>
+              <a:t>Before the session, email the exercise sheet, the five results packs, the manuscript template and the list of reviewer pairs.</a:t>
             </a:r>
           </a:p>
           <a:p>
             <a:r>
               <a:rPr lang="en-US" sz="1400" b="0" dirty="0"/>
-              <a:t>Before the session: send the PDFs (Session 7 exercise sheet, the five results packs Q1-Q5, Papers 1 and 2, the manuscript template). Load the polls. Open one shared document for the class answers.</a:t>
-            </a:r>
-          </a:p>
-          <a:p>
-            <a:r>
-              <a:rPr lang="en-US" sz="1400" b="0" dirty="0"/>
-              <a:t>Pace: slow. If time is short, drop slides from the 'Extra slides: Session 7' section at the end, never the workshop.</a:t>
+              <a:t>If time is short, drop extra slides, never the workshop.</a:t>
             </a:r>
           </a:p>
         </p:txBody>
@@ -832,37 +827,25 @@
           <a:p>
             <a:r>
               <a:rPr lang="en-US" sz="1400" b="0" dirty="0"/>
-              <a:t>This is the real-life ICU problem: most of our patients are sedated, delirious or in shock when they become eligible. This flowchart stays a picture because its branches are the message.</a:t>
+              <a:t>Most ICU patients cannot decide when they become eligible.</a:t>
             </a:r>
           </a:p>
           <a:p>
             <a:r>
               <a:rPr lang="en-US" sz="1400" b="0" dirty="0"/>
-              <a:t>Read the flowchart left to right. 1) Can the patient decide now? Then the patient consents. 2) If not, a legally authorised representative (surrogate: usually family, as defined by local law) consents, and the patient is asked again when able. 3) If no representative can be reached in time and the treatment cannot wait, research may proceed only if the protocol explains why and the ethics committee approved this emergency procedure in advance. Consent to continue is then sought as soon as possible. This is 'deferred consent'. The 2024 Declaration of Helsinki allows exactly this, under these conditions.</a:t>
+              <a:t>Patient, then legal representative, then deferred consent only if the committee approved it in advance. Paper 1 used this route. Paper 2 had a waiver for registry data.</a:t>
             </a:r>
           </a:p>
           <a:p>
             <a:r>
               <a:rPr lang="en-US" sz="1400" b="0" dirty="0"/>
-              <a:t>Paper 1 used this: written consent from the patient or legal surrogate 'before randomization or as soon as possible thereafter' (page 3).</a:t>
+              <a:t>Local law decides who may be the representative.</a:t>
             </a:r>
           </a:p>
           <a:p>
             <a:r>
               <a:rPr lang="en-US" sz="1400" b="0" dirty="0"/>
-              <a:t>Paper 2 is different: a registry using routine data. The committee waived individual consent and the data were de-identified before analysis (page 8).</a:t>
-            </a:r>
-          </a:p>
-          <a:p>
-            <a:r>
-              <a:rPr lang="en-US" sz="1400" b="0" dirty="0"/>
-              <a:t>Local law decides who may act as representative and whether deferred consent is allowed. Check with your committee before you write the protocol.</a:t>
-            </a:r>
-          </a:p>
-          <a:p>
-            <a:r>
-              <a:rPr lang="en-US" sz="1400" b="0" dirty="0"/>
-              <a:t>Ask: if a family refuses after the patient was enrolled under deferred consent, what happens? Expected: the patient leaves the study. Whether data already collected may be used depends on the approved protocol and what the family agrees to.</a:t>
+              <a:t>Ask: the family refuses after enrolment. What happens? Expected: the patient leaves the study.</a:t>
             </a:r>
           </a:p>
         </p:txBody>
@@ -943,31 +926,19 @@
           <a:p>
             <a:r>
               <a:rPr lang="en-US" sz="1400" b="0" dirty="0"/>
-              <a:t>Worked example, whole class. For each patient, call on someone to answer before you reveal the bottom line (click through slowly).</a:t>
+              <a:t>Call on someone for each patient before revealing.</a:t>
             </a:r>
           </a:p>
           <a:p>
             <a:r>
               <a:rPr lang="en-US" sz="1400" b="0" dirty="0"/>
-              <a:t>Mr A: capacity present, so the patient decides.</a:t>
+              <a:t>Mr A: consents himself. Mrs B: the representative consents, ask her when she can decide. Mr C: deferred consent, only if approved.</a:t>
             </a:r>
           </a:p>
           <a:p>
             <a:r>
               <a:rPr lang="en-US" sz="1400" b="0" dirty="0"/>
-              <a:t>Mrs B: lacks capacity now. The legally authorised representative (here the daughter, if local law allows) consents. Mrs B is asked to continue when she regains capacity, and she may withdraw.</a:t>
-            </a:r>
-          </a:p>
-          <a:p>
-            <a:r>
-              <a:rPr lang="en-US" sz="1400" b="0" dirty="0"/>
-              <a:t>Mr C: no representative in time and treatment cannot wait. Deferred consent applies only if the protocol describes it and the committee approved it. Seek consent from family or patient as soon as possible. Paper 1 used this route.</a:t>
-            </a:r>
-          </a:p>
-          <a:p>
-            <a:r>
-              <a:rPr lang="en-US" sz="1400" b="0" dirty="0"/>
-              <a:t>Misconception: 'the treating doctor can consent for the patient'. No. The treating doctor is not the representative.</a:t>
+              <a:t>Misconception: the treating doctor can consent for the patient. No.</a:t>
             </a:r>
           </a:p>
         </p:txBody>
@@ -1048,43 +1019,25 @@
           <a:p>
             <a:r>
               <a:rPr lang="en-US" sz="1400" b="0" dirty="0"/>
-              <a:t>Teaching point: confidentiality is protected by design, not by good intentions.</a:t>
+              <a:t>Confidentiality by design: study codes, age instead of birth date, month instead of exact date.</a:t>
             </a:r>
           </a:p>
           <a:p>
             <a:r>
               <a:rPr lang="en-US" sz="1400" b="0" dirty="0"/>
-              <a:t>Before: direct identifiers such as name, hospital number, exact date of birth, address, phone, photos. After: a study code, age instead of birth date, month instead of exact dates, and only the variables in your data dictionary. The invented example row is one patient before and after.</a:t>
+              <a:t>The key file is kept separately, locked, with one or two named people.</a:t>
             </a:r>
           </a:p>
           <a:p>
             <a:r>
               <a:rPr lang="en-US" sz="1400" b="0" dirty="0"/>
-              <a:t>The key file that links codes to identities is kept separately, password-protected and locked, with access for one or two named people only.</a:t>
+              <a:t>No patient data on personal phones, messaging apps or public AI tools.</a:t>
             </a:r>
           </a:p>
           <a:p>
             <a:r>
               <a:rPr lang="en-US" sz="1400" b="0" dirty="0"/>
-              <a:t>Beware indirect identification: 'the only 19-year-old with ECMO in March' is identifiable even without a name. Report very small groups with care.</a:t>
-            </a:r>
-          </a:p>
-          <a:p>
-            <a:r>
-              <a:rPr lang="en-US" sz="1400" b="0" dirty="0"/>
-              <a:t>Practical rules: no patient data on personal phones, messaging apps, private email or public cloud and AI tools. Encrypted, institution-approved storage only.</a:t>
-            </a:r>
-          </a:p>
-          <a:p>
-            <a:r>
-              <a:rPr lang="en-US" sz="1400" b="0" dirty="0"/>
-              <a:t>Running example: Paper 2 states that patient information was anonymised and de-identified before analysis.</a:t>
-            </a:r>
-          </a:p>
-          <a:p>
-            <a:r>
-              <a:rPr lang="en-US" sz="1400" b="0" dirty="0"/>
-              <a:t>Ask (call on two or three people, microphone on): where would the key file of your own study live? Expected answer: an institution-approved, password-protected location, not a USB stick in a pocket.</a:t>
+              <a:t>Ask: where would your key file live?</a:t>
             </a:r>
           </a:p>
         </p:txBody>
@@ -1165,19 +1118,19 @@
           <a:p>
             <a:r>
               <a:rPr lang="en-US" sz="1400" b="0" dirty="0"/>
-              <a:t>Worked example linking 7.1 to the manuscript. Make clear FLUID-ICU is a simulated teaching dataset with no real approval, so in their manuscripts participants write: 'This analysis used a simulated teaching dataset. No ethics approval or consent was required.' In a real cohort the paragraph would read like the four cards.</a:t>
+              <a:t>If FLUID-ICU were real, the ethics paragraph would answer these four questions in four sentences.</a:t>
             </a:r>
           </a:p>
           <a:p>
             <a:r>
               <a:rPr lang="en-US" sz="1400" b="0" dirty="0"/>
-              <a:t>Model sentence (real study): 'The study was approved by the ethics committees of the four participating hospitals (number, date), which waived individual consent because data were collected during routine care and analysed after de-identification.'</a:t>
+              <a:t>It is simulated: participants put the simulated-data sentence under their title, as the brief says. An ethics paragraph is only needed if they write the optional Methods.</a:t>
             </a:r>
           </a:p>
           <a:p>
             <a:r>
               <a:rPr lang="en-US" sz="1400" b="0" dirty="0"/>
-              <a:t>Ask: where does this paragraph go? Expected: the Methods. Most journals also ask for it in a 'Declarations' section.</a:t>
+              <a:t>Ask: where does this paragraph go in a real paper? Expected: the Methods.</a:t>
             </a:r>
           </a:p>
         </p:txBody>
@@ -1258,25 +1211,19 @@
           <a:p>
             <a:r>
               <a:rPr lang="en-US" sz="1400" b="0" dirty="0"/>
-              <a:t>Walk the five cards. Timeline: ethics approval alone can take 1-3 months. Recruitment always takes longer than planned. Budget: name the headings even if the amounts are small. People: who collects data on night shifts and weekends, who analyses, and is there protected time? Recruitment: Paper 1 screened 1201 patients in three ICUs over 17 months to randomise 50 (about 4%). Most eligible-looking patients are not eligible or not enrolled. Data: is the variable already recorded routinely? Paper 2 could not study diuretics because the registry never recorded them.</a:t>
+              <a:t>Walk the five cards. Ethics takes 1-3 months. Recruitment always takes longer: Paper 1 screened 1,201 patients to randomise 50.</a:t>
             </a:r>
           </a:p>
           <a:p>
             <a:r>
               <a:rPr lang="en-US" sz="1400" b="0" dirty="0"/>
-              <a:t>Rule of thumb: count how many patients meeting your criteria your unit saw last year, then assume you will enrol a fraction of them.</a:t>
+              <a:t>Rule of thumb: count last year's eligible patients and expect to enrol a fraction.</a:t>
             </a:r>
           </a:p>
           <a:p>
             <a:r>
               <a:rPr lang="en-US" sz="1400" b="0" dirty="0"/>
-              <a:t>Poll: which card is the biggest risk for your own study? Expected answers: recruitment and people (night-shift data collection).</a:t>
-            </a:r>
-          </a:p>
-          <a:p>
-            <a:r>
-              <a:rPr lang="en-US" sz="1400" b="0" dirty="0"/>
-              <a:t>This is the only feasibility slide in Level 1. Do not go deeper.</a:t>
+              <a:t>Poll: which card is the biggest risk for your study?</a:t>
             </a:r>
           </a:p>
         </p:txBody>
@@ -1357,19 +1304,19 @@
           <a:p>
             <a:r>
               <a:rPr lang="en-US" sz="1400" b="0" dirty="0"/>
-              <a:t>Section 7.2 (20:10-20:30). Six slides (about 2.5 minutes each), then the 5-minute scenario poll at 20:25.</a:t>
+              <a:t>Section 7.2 (20:10-20:30). Six slides, then a 5-minute scenario poll.</a:t>
             </a:r>
           </a:p>
           <a:p>
             <a:r>
               <a:rPr lang="en-US" sz="1400" b="0" dirty="0"/>
-              <a:t>Tone: this is not about catching cheats. Most integrity problems start as small shortcuts under pressure: a missing value 'filled in', an outlier 'cleaned', a boss added as author. We want people to recognise the slope early.</a:t>
+              <a:t>Tone: most integrity problems start as small shortcuts under pressure.</a:t>
             </a:r>
           </a:p>
           <a:p>
             <a:r>
               <a:rPr lang="en-US" sz="1400" b="0" dirty="0"/>
-              <a:t>Link to the manuscript: every participant's draft needs an authorship, conflicts-of-interest, data-availability and AI-use statement.</a:t>
+              <a:t>Every Results draft needs the AI-use statement.</a:t>
             </a:r>
           </a:p>
         </p:txBody>
@@ -1450,43 +1397,19 @@
           <a:p>
             <a:r>
               <a:rPr lang="en-US" sz="1400" b="0" dirty="0"/>
-              <a:t>Teaching point: the three classic forms of research misconduct (FFP).</a:t>
+              <a:t>Fabrication, falsification, plagiarism. An honest error is not misconduct: correct it openly.</a:t>
             </a:r>
           </a:p>
           <a:p>
             <a:r>
               <a:rPr lang="en-US" sz="1400" b="0" dirty="0"/>
-              <a:t>Fabrication: making up data or patients (e.g. filling day-3 fluid balances 'from memory' because the chart is lost).</a:t>
+              <a:t>The data-quality plan from Session 5 protects against accidental falsification.</a:t>
             </a:r>
           </a:p>
           <a:p>
             <a:r>
               <a:rPr lang="en-US" sz="1400" b="0" dirty="0"/>
-              <a:t>Falsification: changing, selecting or leaving out data, images or results so the story looks better (e.g. dropping two 'odd' patients after seeing they weaken the result).</a:t>
-            </a:r>
-          </a:p>
-          <a:p>
-            <a:r>
-              <a:rPr lang="en-US" sz="1400" b="0" dirty="0"/>
-              <a:t>Plagiarism: using other people's words, ideas or figures without credit, including copying a paragraph with a citation but without quotation marks.</a:t>
-            </a:r>
-          </a:p>
-          <a:p>
-            <a:r>
-              <a:rPr lang="en-US" sz="1400" b="0" dirty="0"/>
-              <a:t>Honest error is not misconduct, but it must be corrected openly (a correction or erratum).</a:t>
-            </a:r>
-          </a:p>
-          <a:p>
-            <a:r>
-              <a:rPr lang="en-US" sz="1400" b="0" dirty="0"/>
-              <a:t>Link to Session 5: the data-quality plan (range checks, pre-specified rules for outliers) is what protects you from accidental falsification.</a:t>
-            </a:r>
-          </a:p>
-          <a:p>
-            <a:r>
-              <a:rPr lang="en-US" sz="1400" b="0" dirty="0"/>
-              <a:t>Poll: which of these three is the most common in student theses? Expected answer: plagiarism, often copy-paste in the introduction. Similarity-check software will find it.</a:t>
+              <a:t>Poll: which is most common in student theses? Expected: plagiarism.</a:t>
             </a:r>
           </a:p>
         </p:txBody>
@@ -1567,31 +1490,19 @@
           <a:p>
             <a:r>
               <a:rPr lang="en-US" sz="1400" b="0" dirty="0"/>
-              <a:t>Teaching point: these practices distort the evidence that doctors and guideline panels rely on.</a:t>
+              <a:t>Duplicate publication counts the same patients twice. Salami slicing hides the whole study. Selective reporting is why trials register one primary outcome.</a:t>
             </a:r>
           </a:p>
           <a:p>
             <a:r>
               <a:rPr lang="en-US" sz="1400" b="0" dirty="0"/>
-              <a:t>Duplicate publication counts the same patients twice in a meta-analysis and can exaggerate an effect. A legitimate secondary paper is fine if it is clearly cross-referenced and adds something new.</a:t>
+              <a:t>Paper 1 reported its negative primary outcome plainly.</a:t>
             </a:r>
           </a:p>
           <a:p>
             <a:r>
               <a:rPr lang="en-US" sz="1400" b="0" dirty="0"/>
-              <a:t>Salami slicing: e.g. mortality in one paper, kidney injury in another and ICU stay in a third, from the same cohort, each without mentioning the others.</a:t>
-            </a:r>
-          </a:p>
-          <a:p>
-            <a:r>
-              <a:rPr lang="en-US" sz="1400" b="0" dirty="0"/>
-              <a:t>Selective reporting and outcome switching are why trials must be registered with one primary outcome before the first patient. Running example: Paper 1 registered its protocol at ClinicalTrials.gov on 1 July 2021, before recruitment began in September 2021, and reported its negative primary outcome plainly in the abstract. That is good practice.</a:t>
-            </a:r>
-          </a:p>
-          <a:p>
-            <a:r>
-              <a:rPr lang="en-US" sz="1400" b="0" dirty="0"/>
-              <a:t>Ask: Paper 1's primary outcome was negative. Why does it matter that it was published at all? Expected: publication bias. If only positive trials appear, the literature overstates benefit.</a:t>
+              <a:t>Ask: why does it matter that a negative trial is published? Expected: publication bias.</a:t>
             </a:r>
           </a:p>
         </p:txBody>
@@ -1672,37 +1583,25 @@
           <a:p>
             <a:r>
               <a:rPr lang="en-US" sz="1400" b="0" dirty="0"/>
-              <a:t>Teaching point: the International Committee of Medical Journal Editors (ICMJE) requires all four criteria for authorship: 1) substantial contribution to conception or design, or to acquisition, analysis or interpretation of data, 2) drafting or critically revising the work, 3) final approval of the version to be published, 4) agreement to be accountable for all aspects of the work.</a:t>
+              <a:t>An author meets all four ICMJE criteria. Others go in the Acknowledgements.</a:t>
             </a:r>
           </a:p>
           <a:p>
             <a:r>
               <a:rPr lang="en-US" sz="1400" b="0" dirty="0"/>
-              <a:t>Anyone who contributed but does not meet all four goes in the Acknowledgements (data collectors, a colleague who checked adherence, the department head who provided support).</a:t>
+              <a:t>Gift author: named without the work. Ghost author: did the work, not named.</a:t>
             </a:r>
           </a:p>
           <a:p>
             <a:r>
               <a:rPr lang="en-US" sz="1400" b="0" dirty="0"/>
-              <a:t>Gift author: a name added for seniority or friendship. Ghost author: someone who did the work (often a junior or a paid writer) but is not named. Both are misconduct.</a:t>
+              <a:t>Poll: is data collection alone enough for authorship? Expected: no.</a:t>
             </a:r>
           </a:p>
           <a:p>
             <a:r>
               <a:rPr lang="en-US" sz="1400" b="0" dirty="0"/>
-              <a:t>Running example: Paper 2 is published 'on behalf of' a study group, and the group members are listed in the Acknowledgements. That is a correct way to credit a large network.</a:t>
-            </a:r>
-          </a:p>
-          <a:p>
-            <a:r>
-              <a:rPr lang="en-US" sz="1400" b="0" dirty="0"/>
-              <a:t>Poll: data collection alone, is that enough for authorship? Expected answer: no, not without criteria 2, 3 and 4.</a:t>
-            </a:r>
-          </a:p>
-          <a:p>
-            <a:r>
-              <a:rPr lang="en-US" sz="1400" b="0" dirty="0"/>
-              <a:t>Practical tip: agree the author list and order in writing at the protocol stage and revisit it before submission. CRediT (who did what) is in the Extra slides.</a:t>
+              <a:t>Agree the author list at the protocol stage.</a:t>
             </a:r>
           </a:p>
         </p:txBody>
@@ -1783,31 +1682,19 @@
           <a:p>
             <a:r>
               <a:rPr lang="en-US" sz="1400" b="0" dirty="0"/>
-              <a:t>Teaching point: a conflict (competing) interest is anything that could be seen to influence your judgement, financial or not. Having one is common and not wrong. Hiding it is.</a:t>
+              <a:t>Having an interest is common. Hiding it is the problem. Most journals use the ICMJE form.</a:t>
             </a:r>
           </a:p>
           <a:p>
             <a:r>
               <a:rPr lang="en-US" sz="1400" b="0" dirty="0"/>
-              <a:t>Every author completes the journal's disclosure form (most journals use the ICMJE disclosure form), usually covering the last 36 months.</a:t>
+              <a:t>Paper 2 states its funder had no role. Paper 1 states an internal grant.</a:t>
             </a:r>
           </a:p>
           <a:p>
             <a:r>
               <a:rPr lang="en-US" sz="1400" b="0" dirty="0"/>
-              <a:t>Funding statement: who paid, the grant number, and the role of the funder in design, data collection, analysis, writing and the decision to publish.</a:t>
-            </a:r>
-          </a:p>
-          <a:p>
-            <a:r>
-              <a:rPr lang="en-US" sz="1400" b="0" dirty="0"/>
-              <a:t>Running example: Paper 2 states its funder had no role in the design, data collection and analysis or manuscript preparation, an ICMJE requirement that is often forgotten (annotation #39). Paper 1 states an internal hospital grant and no competing interests (page 12).</a:t>
-            </a:r>
-          </a:p>
-          <a:p>
-            <a:r>
-              <a:rPr lang="en-US" sz="1400" b="0" dirty="0"/>
-              <a:t>Ask: a drug company paid your travel to a congress last year. Do you declare it on a fluids paper? Expected: yes if it could be perceived as relevant. When in doubt, declare.</a:t>
+              <a:t>Ask: a company paid your travel last year. Declare it? Expected: if in doubt, declare.</a:t>
             </a:r>
           </a:p>
         </p:txBody>
@@ -1888,25 +1775,19 @@
           <a:p>
             <a:r>
               <a:rPr lang="en-US" sz="1400" b="0" dirty="0"/>
-              <a:t>Recap (19:30-19:40, including 1 minute of welcome and the 'Today' slide). Start by reading two or three answers to the Session 6 exit question (you read them during the week) and correct any misunderstanding.</a:t>
+              <a:t>Recap (19:30-19:40). Start with two or three Session 6 exit answers.</a:t>
             </a:r>
           </a:p>
           <a:p>
             <a:r>
               <a:rPr lang="en-US" sz="1400" b="0" dirty="0"/>
-              <a:t>Questions 1-4 are open questions. Read each one, give 30 seconds, then call on two or three people to answer, microphone on. Reveal the answer panel after each question. Spend longest where answers differ.</a:t>
+              <a:t>Questions 1-4: 30 seconds each, call on two or three people, then reveal. Question 1 leads to today: the Results report both crude and adjusted estimates.</a:t>
             </a:r>
           </a:p>
           <a:p>
             <a:r>
               <a:rPr lang="en-US" sz="1400" b="0" dirty="0"/>
-              <a:t>Question 1 links straight to today's writing: in the Results we report both crude and adjusted estimates (STROBE item 16), and in the Discussion we explain why they differ.</a:t>
-            </a:r>
-          </a:p>
-          <a:p>
-            <a:r>
-              <a:rPr lang="en-US" sz="1400" b="0" dirty="0"/>
-              <a:t>Question 5 goes in the chat. This is the number each participant will write about after the break. Anyone who has not yet chosen a question chooses one today (Q1 to Q5, results packs sent before the session).</a:t>
+              <a:t>Question 5 in the chat: the main result of the question each person chose. Anyone without a question chooses one now.</a:t>
             </a:r>
           </a:p>
         </p:txBody>
@@ -1987,31 +1868,19 @@
           <a:p>
             <a:r>
               <a:rPr lang="en-US" sz="1400" b="0" dirty="0"/>
-              <a:t>Teaching point: journals increasingly ask for a data-sharing statement. ICMJE requires one for clinical trials, and trials must describe their data-sharing plan when they register.</a:t>
+              <a:t>From 'available on request' (both papers) to an open repository with a DOI.</a:t>
             </a:r>
           </a:p>
           <a:p>
             <a:r>
               <a:rPr lang="en-US" sz="1400" b="0" dirty="0"/>
-              <a:t>The ladder: not available. 'Available on reasonable request' (the weakest promise, used by both papers, pages 12 and 8). A controlled-access repository (researchers apply). An open repository with a DOI (digital object identifier, for fully de-identified data).</a:t>
+              <a:t>Before sharing: consent and ethics must allow it, data de-identified, dictionary and code included.</a:t>
             </a:r>
           </a:p>
           <a:p>
             <a:r>
               <a:rPr lang="en-US" sz="1400" b="0" dirty="0"/>
-              <a:t>Before you share: the consent form and the ethics approval must allow it, data are de-identified, and you share the data dictionary and analysis code with the data so others can use them.</a:t>
-            </a:r>
-          </a:p>
-          <a:p>
-            <a:r>
-              <a:rPr lang="en-US" sz="1400" b="0" dirty="0"/>
-              <a:t>Link to Session 5: a clean data dictionary is what makes shared data usable.</a:t>
-            </a:r>
-          </a:p>
-          <a:p>
-            <a:r>
-              <a:rPr lang="en-US" sz="1400" b="0" dirty="0"/>
-              <a:t>Ask (call on two or three people, microphone on): what would you need to write in your consent form today so your data can be shared tomorrow? Expected: a sentence asking permission for de-identified data to be shared for future research.</a:t>
+              <a:t>Ask: what must your consent form say today so you can share tomorrow?</a:t>
             </a:r>
           </a:p>
         </p:txBody>
@@ -2092,37 +1961,19 @@
           <a:p>
             <a:r>
               <a:rPr lang="en-US" sz="1400" b="0" dirty="0"/>
-              <a:t>Teaching point: the current positions of ICMJE and COPE (Committee on Publication Ethics). AI tools cannot be authors, because they cannot take responsibility or be accountable for the work. Authors who use AI must disclose it (writing help usually in the Acknowledgements, use in data collection, analysis or figures in the Methods), and they remain fully responsible for every word, number and reference, including anything the tool produced.</a:t>
+              <a:t>AI cannot be an author. Disclose its use and check every claim and reference.</a:t>
             </a:r>
           </a:p>
           <a:p>
             <a:r>
               <a:rPr lang="en-US" sz="1400" b="0" dirty="0"/>
-              <a:t>Never paste identifiable patient data, or a manuscript you are reviewing, into a public AI tool: it breaches confidentiality, and reviewers are bound to keep manuscripts confidential.</a:t>
+              <a:t>Never paste patient data or a manuscript you review into a public AI tool.</a:t>
             </a:r>
           </a:p>
           <a:p>
             <a:r>
               <a:rPr lang="en-US" sz="1400" b="0" dirty="0"/>
-              <a:t>AI tools can invent references that look real. Check every citation against PubMed.</a:t>
-            </a:r>
-          </a:p>
-          <a:p>
-            <a:r>
-              <a:rPr lang="en-US" sz="1400" b="0" dirty="0"/>
-              <a:t>Images: AI-generated or AI-altered images are not acceptable as data.</a:t>
-            </a:r>
-          </a:p>
-          <a:p>
-            <a:r>
-              <a:rPr lang="en-US" sz="1400" b="0" dirty="0"/>
-              <a:t>Always check the target journal's own AI policy in its Guide for Authors, because policies change.</a:t>
-            </a:r>
-          </a:p>
-          <a:p>
-            <a:r>
-              <a:rPr lang="en-US" sz="1400" b="0" dirty="0"/>
-              <a:t>Ask: a colleague asks a chatbot to 'write the discussion' and submits it unread. Which never points does this hit? Expected: invented references and an unaccountable text, and it is undisclosed.</a:t>
+              <a:t>Ask: a colleague has a chatbot write the Discussion and submits it unread. Which rules does this break?</a:t>
             </a:r>
           </a:p>
         </p:txBody>
@@ -2203,25 +2054,19 @@
           <a:p>
             <a:r>
               <a:rPr lang="en-US" sz="1400" b="0" dirty="0"/>
-              <a:t>Quiz, whole class (20:25-20:30). Scenarios and answer key: Course/Practicals/s7_exercises.md (Part A) and Course/Solutions/s7_solutions.md.</a:t>
+              <a:t>Quiz (20:25-20:30). Scenarios and answers: s7_exercises Part A and s7_solutions.</a:t>
             </a:r>
           </a:p>
           <a:p>
             <a:r>
               <a:rPr lang="en-US" sz="1400" b="0" dirty="0"/>
-              <a:t>Use three: 1 (missing data 'filled from memory': red, fabrication), 3 (head of department as last author without contributing: red, gift authorship, offer the Acknowledgements), 4 (AI polish of the English, checked and disclosed: green, the same chatbot fed the patient spreadsheet: red).</a:t>
+              <a:t>Use scenarios 1 (red, fabrication), 3 (red, gift authorship) and 4 (green for checked and disclosed polishing, red for the patient spreadsheet).</a:t>
             </a:r>
           </a:p>
           <a:p>
             <a:r>
               <a:rPr lang="en-US" sz="1400" b="0" dirty="0"/>
-              <a:t>Run each as a three-option poll. Show the result, then ask one person from the largest and one from the smallest colour for a reason.</a:t>
-            </a:r>
-          </a:p>
-          <a:p>
-            <a:r>
-              <a:rPr lang="en-US" sz="1400" b="0" dirty="0"/>
-              <a:t>If the class is split, that is the teaching moment.</a:t>
+              <a:t>Ask one person from the largest and one from the smallest colour for a reason.</a:t>
             </a:r>
           </a:p>
         </p:txBody>
@@ -2302,25 +2147,19 @@
           <a:p>
             <a:r>
               <a:rPr lang="en-US" sz="1400" b="0" dirty="0"/>
-              <a:t>Proposal builder 7 (20:30-20:45). Whole class. Share the Part B worksheet and fill it in live for the running example: a retrospective cohort of fluid balance and 28-day mortality in adults with septic shock in our ICU (model answers: Course/Solutions/s7_solutions.md, Part B). For each answer, call on two or three people and type the best one.</a:t>
+              <a:t>Proposal builder 7 (20:30-20:45). Fill in Part B live for the running example. Answers: s7_solutions Part B.</a:t>
             </a:r>
           </a:p>
           <a:p>
             <a:r>
               <a:rPr lang="en-US" sz="1400" b="0" dirty="0"/>
-              <a:t>Raise the typical problems as you go: (1) 'consent will be obtained' with no who, when or how (use the ICU flowchart). (2) retrospective chart reviews assuming no ethics review is needed (wrong: the committee decides and may grant a waiver). (3) recruitment numbers taken from the sample-size calculation instead of the unit's admissions. (4) CONSORT chosen for an observational study.</a:t>
+              <a:t>Watch for: 'consent will be obtained' with no who or when, chart reviews assumed exempt, recruitment from the sample size, CONSORT for a cohort.</a:t>
             </a:r>
           </a:p>
           <a:p>
             <a:r>
               <a:rPr lang="en-US" sz="1400" b="0" dirty="0"/>
-              <a:t>Homework: each participant writes Part 4 for their own proposal this week. The journal choice and reporting guideline are checked again in 8.2 next Saturday.</a:t>
-            </a:r>
-          </a:p>
-          <a:p>
-            <a:r>
-              <a:rPr lang="en-US" sz="1400" b="0" dirty="0"/>
-              <a:t>Remind: everyone submits the written proposal and 6 presentation slides. About five volunteers present next Saturday (6 minutes each). Ask volunteers to tell you in the chat or by email this week.</a:t>
+              <a:t>Homework: Part 4 of their own proposal. Volunteers who want to present email the course lead by the Wednesday before Session 8.</a:t>
             </a:r>
           </a:p>
         </p:txBody>
@@ -2401,25 +2240,13 @@
           <a:p>
             <a:r>
               <a:rPr lang="en-US" sz="1400" b="0" dirty="0"/>
-              <a:t>The slide is only a picture on purpose. Before the break, say: we are back at 21:00 for 7.3, writing the paper (35 min), then manuscript workshop 1 (45 min). During the break, open the results pack for the question you chose (Q1 to Q5) and the manuscript template (Course/Templates/Manuscript_Template_IMRaD). If you have not chosen a question yet, choose one now.</a:t>
+              <a:t>Break (20:45-21:00). Say: we restart at 21:00 with the Results section. Open your results pack and the manuscript template.</a:t>
             </a:r>
           </a:p>
           <a:p>
             <a:r>
               <a:rPr lang="en-US" sz="1400" b="0" dirty="0"/>
-              <a:t>Break (20:45-21:00).</a:t>
-            </a:r>
-          </a:p>
-          <a:p>
-            <a:r>
-              <a:rPr lang="en-US" sz="1400" b="0" dirty="0"/>
-              <a:t>Keep the session open. Stay available in the chat for anyone who could not say their main result in the recap.</a:t>
-            </a:r>
-          </a:p>
-          <a:p>
-            <a:r>
-              <a:rPr lang="en-US" sz="1400" b="0" dirty="0"/>
-              <a:t>Prepare your screen for the workshop: the manuscript template and results pack Q1 side by side.</a:t>
+              <a:t>Prepare your screen: the template and results pack Q1 side by side.</a:t>
             </a:r>
           </a:p>
         </p:txBody>
@@ -2500,19 +2327,13 @@
           <a:p>
             <a:r>
               <a:rPr lang="en-US" sz="1400" b="0" dirty="0"/>
-              <a:t>Section 7.3 (21:00-21:35). Nine slides (about 3.5 minutes each) and a 3-minute check at 21:32.</a:t>
+              <a:t>Section 7.3 (21:00-21:35). Nine slides and a 3-minute check.</a:t>
             </a:r>
           </a:p>
           <a:p>
             <a:r>
               <a:rPr lang="en-US" sz="1400" b="0" dirty="0"/>
-              <a:t>Every example comes from the course dataset (Q1, the primary question) or from the two papers.</a:t>
-            </a:r>
-          </a:p>
-          <a:p>
-            <a:r>
-              <a:rPr lang="en-US" sz="1400" b="0" dirty="0"/>
-              <a:t>The two worked examples are the heart of the block. Read them slowly with the class.</a:t>
+              <a:t>The Results slides and their worked examples are the heart of the block. The Methods slides are shorter: Methods is optional for the manuscript.</a:t>
             </a:r>
           </a:p>
         </p:txBody>
@@ -2593,25 +2414,19 @@
           <a:p>
             <a:r>
               <a:rPr lang="en-US" sz="1400" b="0" dirty="0"/>
-              <a:t>Teaching point: readers go from title to abstract, introduction, methods, results and discussion. Writers should not. Start from the evidence: draft the tables and figures, then the Methods (it can be drafted from the protocol even before the data), then Results (describe the tables), then the Introduction (set up exactly the question you answered), then the Discussion, and only then the abstract and the title.</a:t>
+              <a:t>Writers start from the evidence: tables first, the title last.</a:t>
             </a:r>
           </a:p>
           <a:p>
             <a:r>
               <a:rPr lang="en-US" sz="1400" b="0" dirty="0"/>
-              <a:t>Why it works: each section is written from something that already exists, and the abstract and title summarise a paper that is finished, so they cannot promise more than the paper delivers.</a:t>
+              <a:t>For FLUID-ICU the tables already exist in your results pack, so your Results section starts from them.</a:t>
             </a:r>
           </a:p>
           <a:p>
             <a:r>
               <a:rPr lang="en-US" sz="1400" b="0" dirty="0"/>
-              <a:t>Misconception: 'I must finish the introduction before I can start'. Many first-time writers stall on the introduction for months.</a:t>
-            </a:r>
-          </a:p>
-          <a:p>
-            <a:r>
-              <a:rPr lang="en-US" sz="1400" b="0" dirty="0"/>
-              <a:t>For the FLUID-ICU manuscript the tables already exist: they are in your results pack.</a:t>
+              <a:t>Misconception: 'I must finish the Introduction before I can start'.</a:t>
             </a:r>
           </a:p>
         </p:txBody>
@@ -2692,25 +2507,19 @@
           <a:p>
             <a:r>
               <a:rPr lang="en-US" sz="1400" b="0" dirty="0"/>
-              <a:t>Teaching point: Methods = enough detail to repeat the study, in the order of the reporting checklist (CONSORT for trials or STROBE for observational studies).</a:t>
+              <a:t>Methods: enough detail to repeat the study, in STROBE order.</a:t>
             </a:r>
           </a:p>
           <a:p>
             <a:r>
               <a:rPr lang="en-US" sz="1400" b="0" dirty="0"/>
-              <a:t>Good practice: Paper 1 puts the ethics committee, approval number, consent procedure and funding inside the Methods (annotation #13). Describes the intervention well enough to replicate: staff training, a daily pharmacist check, dilution charts in a supplement (#16). Separates one primary outcome from secondary and safety outcomes (#17). States the software and version (#21). Paper 2 defines exactly which inputs and outputs make up fluid balance (#13) and cites its cohort-profile paper instead of repeating it (#12).</a:t>
+              <a:t>Good: Paper 1 describes its intervention well enough to replicate. To fix: Paper 2 never says how missing covariates were handled.</a:t>
             </a:r>
           </a:p>
           <a:p>
             <a:r>
               <a:rPr lang="en-US" sz="1400" b="0" dirty="0"/>
-              <a:t>To fix: Paper 1 is a 'pilot' with an efficacy sample size whose assumptions (70 vs 40 ml/kg) were not met (#18). It names a Mann-Whitney test but reports mean differences with CIs (#19). About 40 secondary p-values with no word on multiplicity (#20). Paper 2: 'caliper of 0.1' of what? How were missing covariates handled? Clustered by what? (#15, #17). No sample-size statement (#19).</a:t>
-            </a:r>
-          </a:p>
-          <a:p>
-            <a:r>
-              <a:rPr lang="en-US" sz="1400" b="0" dirty="0"/>
-              <a:t>The annotated papers are in Course/Papers (annotation numbers refer to them).</a:t>
+              <a:t>Methods is optional for the manuscript: all the facts are in the results pack, the SAP and the data dictionary.</a:t>
             </a:r>
           </a:p>
         </p:txBody>
@@ -2791,31 +2600,19 @@
           <a:p>
             <a:r>
               <a:rPr lang="en-US" sz="1400" b="0" dirty="0"/>
-              <a:t>Worked example (course dataset). Read each sentence and name its STROBE item.</a:t>
+              <a:t>For participants who write the optional Methods. One sentence per STROBE item, all from results pack Q1, section 2.</a:t>
             </a:r>
           </a:p>
           <a:p>
             <a:r>
               <a:rPr lang="en-US" sz="1400" b="0" dirty="0"/>
-              <a:t>All facts come from results pack Q1, section 2: prospective multicentre cohort, 4 ICUs, consecutive adults with sepsis, January 2023 to December 2024. Exposure = cumulative balance (in minus out, days 1-3) &gt; 0 ml/kg. Outcome = death within 28 days of ICU admission.</a:t>
+              <a:t>Item 10: for a fixed cohort, say all eligible patients were included.</a:t>
             </a:r>
           </a:p>
           <a:p>
             <a:r>
               <a:rPr lang="en-US" sz="1400" b="0" dirty="0"/>
-              <a:t>STROBE 10 (study size): for a fixed cohort we do not invent a sample-size calculation. We say all eligible patients were included.</a:t>
-            </a:r>
-          </a:p>
-          <a:p>
-            <a:r>
-              <a:rPr lang="en-US" sz="1400" b="0" dirty="0"/>
-              <a:t>The ethics sentence is specific to the course: FLUID-ICU is simulated, and every manuscript must say so.</a:t>
-            </a:r>
-          </a:p>
-          <a:p>
-            <a:r>
-              <a:rPr lang="en-US" sz="1400" b="0" dirty="0"/>
-              <a:t>Ask (call on two or three people, microphone on): which sentence would a reader need to repeat the study? Expected: the exposure definition (how fluid balance was calculated).</a:t>
+              <a:t>Ask: which sentence would a reader need to repeat the study? Expected: how fluid balance was calculated.</a:t>
             </a:r>
           </a:p>
         </p:txBody>
@@ -2896,31 +2693,13 @@
           <a:p>
             <a:r>
               <a:rPr lang="en-US" sz="1400" b="0" dirty="0"/>
-              <a:t>Worked example. This is STROBE item 12 written out for Q1 (results pack Q1, sections 2 and 4-5). SD = standard deviation. IQR = interquartile range. SOFA = Sequential Organ Failure Assessment.</a:t>
+              <a:t>STROBE item 12 for Q1. Covariates were chosen in the SAP before the data were seen.</a:t>
             </a:r>
           </a:p>
           <a:p>
             <a:r>
               <a:rPr lang="en-US" sz="1400" b="0" dirty="0"/>
-              <a:t>Covariates: age, SOFA, lactate, vasopressor, mechanical ventilation, chronic kidney disease. All were pre-specified in the statistical analysis plan (SAP, Session 6), not chosen by looking at p-values.</a:t>
-            </a:r>
-          </a:p>
-          <a:p>
-            <a:r>
-              <a:rPr lang="en-US" sz="1400" b="0" dirty="0"/>
-              <a:t>Missing data: lactate missing in 93/620 (15.0%). Main analysis on complete cases (n = 527), multiple imputation (m = 20) as sensitivity.</a:t>
-            </a:r>
-          </a:p>
-          <a:p>
-            <a:r>
-              <a:rPr lang="en-US" sz="1400" b="0" dirty="0"/>
-              <a:t>Effect modification: heart failure, pre-specified.</a:t>
-            </a:r>
-          </a:p>
-          <a:p>
-            <a:r>
-              <a:rPr lang="en-US" sz="1400" b="0" dirty="0"/>
-              <a:t>Misconception: 'the statistics paragraph is for the statistician'. Reviewers read it first. Every number in the Results must be traceable to one sentence here.</a:t>
+              <a:t>Every number in the Results must trace back to one sentence here. Reviewers read this paragraph first.</a:t>
             </a:r>
           </a:p>
         </p:txBody>
@@ -3001,25 +2780,19 @@
           <a:p>
             <a:r>
               <a:rPr lang="en-US" sz="1400" b="0" dirty="0"/>
-              <a:t>Two products, both individual. Product 1, each participant's own research proposal, gets its last part today (ethics, registration, feasibility, publication plan). Everyone submits it. About five volunteers present theirs next Saturday.</a:t>
+              <a:t>Two individual products. Proposal: Part 4 today, submitted next Saturday.</a:t>
             </a:r>
           </a:p>
           <a:p>
             <a:r>
               <a:rPr lang="en-US" sz="1400" b="0" dirty="0"/>
-              <a:t>Product 2, each participant's own draft manuscript, moves from 'reading the analysis' (Session 6) to writing. Say it plainly: we give you the results for your chosen FLUID-ICU question in a results pack, and you write the paper. Nobody calculates anything.</a:t>
+              <a:t>Results section: we give the results for each person's question, they write a submission-ready Results section. Methods, Introduction, Discussion and Abstract are optional.</a:t>
             </a:r>
           </a:p>
           <a:p>
             <a:r>
               <a:rPr lang="en-US" sz="1400" b="0" dirty="0"/>
-              <a:t>Name the two papers once more: Paper 1 (Boulet 2024) is a randomised trial of restrictive fluids in septic shock (48 patients). Paper 2 (Hyun 2023) is a cohort study of fluid balance and death in sepsis (2,516 patients). We use them all day as examples of good and less good practice.</a:t>
-            </a:r>
-          </a:p>
-          <a:p>
-            <a:r>
-              <a:rPr lang="en-US" sz="1400" b="0" dirty="0"/>
-              <a:t>Ask (call on two or three people, microphone on): which question (Q1-Q5) have you chosen?</a:t>
+              <a:t>Ask: which question (Q1-Q5) have you chosen?</a:t>
             </a:r>
           </a:p>
         </p:txBody>
@@ -3100,31 +2873,13 @@
           <a:p>
             <a:r>
               <a:rPr lang="en-US" sz="1400" b="0" dirty="0"/>
-              <a:t>Four rules. 1) Participants first: how many were screened, included, analysed and why some were lost, with a flow diagram. Paper 1 has its CONSORT flow chart in the main text (annotations #23, #27). Paper 2 keeps it in the supplement although 79% of the registry was excluded (#20).</a:t>
+              <a:t>Four rules. Participants first, with a flow. Effects with 95% CIs, not 'p = 0.42, NS'. No interpretation. One home per number, and text and tables must agree: Paper 1's text and Table 1 disagree on creatinine.</a:t>
             </a:r>
           </a:p>
           <a:p>
             <a:r>
               <a:rPr lang="en-US" sz="1400" b="0" dirty="0"/>
-              <a:t>2) Numbers with confidence intervals, not 'p = 0.42, NS'. Analysing 48 of 50 randomised patients is a modified intention-to-treat analysis and should be called that (#24).</a:t>
-            </a:r>
-          </a:p>
-          <a:p>
-            <a:r>
-              <a:rPr lang="en-US" sz="1400" b="0" dirty="0"/>
-              <a:t>3) No interpretation in the Results. Paper 2 reports its results in the order of the aims, each with HR, CI and P, and no comment (#25).</a:t>
-            </a:r>
-          </a:p>
-          <a:p>
-            <a:r>
-              <a:rPr lang="en-US" sz="1400" b="0" dirty="0"/>
-              <a:t>4) One home for each number: key numbers in the text, all details in the tables, and they must agree. Paper 1's text says creatinine was higher in the intervention group. Table 1 shows the opposite (#25). Text-table contradictions are a classic rejection reason.</a:t>
-            </a:r>
-          </a:p>
-          <a:p>
-            <a:r>
-              <a:rPr lang="en-US" sz="1400" b="0" dirty="0"/>
-              <a:t>Tell participants: before you submit your draft, check every number in your text against your results pack.</a:t>
+              <a:t>Before submitting, check every number against your results pack.</a:t>
             </a:r>
           </a:p>
         </p:txBody>
@@ -3205,37 +2960,19 @@
           <a:p>
             <a:r>
               <a:rPr lang="en-US" sz="1400" b="0" dirty="0"/>
-              <a:t>Worked example. All numbers from Course/Data/key_results.md (simulated data). OR = odds ratio. HR = hazard ratio.</a:t>
+              <a:t>All numbers from results pack Q1 (simulated). One sentence per STROBE item, 13 to 17.</a:t>
             </a:r>
           </a:p>
           <a:p>
             <a:r>
               <a:rPr lang="en-US" sz="1400" b="0" dirty="0"/>
-              <a:t>Flow: 620 enrolled, 618 with a day-3 balance, 527 in the complete-case adjusted model (91 without lactate or age).</a:t>
+              <a:t>Point out what is missing: no 'because', no 'significant', no reason why the OR shrank. That belongs in a Discussion.</a:t>
             </a:r>
           </a:p>
           <a:p>
             <a:r>
               <a:rPr lang="en-US" sz="1400" b="0" dirty="0"/>
-              <a:t>Positive balance 373/618 (60.4%). SOFA median 8 (6 to 10) vs 6 (4 to 8). Vasopressor 205/373 (55.0%) vs 61/245 (24.9%).</a:t>
-            </a:r>
-          </a:p>
-          <a:p>
-            <a:r>
-              <a:rPr lang="en-US" sz="1400" b="0" dirty="0"/>
-              <a:t>Deaths: 134/373 (35.9%) vs 45/245 (18.4%). Crude OR 2.49 (1.70 to 3.70), adjusted OR 1.62 (1.02 to 2.59), p 0.044. Sensitivity: multiple imputation OR 1.70 (1.09 to 2.64). Adjusted Cox HR 1.46 (1.00 to 2.13).</a:t>
-            </a:r>
-          </a:p>
-          <a:p>
-            <a:r>
-              <a:rPr lang="en-US" sz="1400" b="0" dirty="0"/>
-              <a:t>Point out what is not in the paragraph: no 'because', no 'significant', no explanation of why the OR shrank. That belongs to the Discussion next Saturday.</a:t>
-            </a:r>
-          </a:p>
-          <a:p>
-            <a:r>
-              <a:rPr lang="en-US" sz="1400" b="0" dirty="0"/>
-              <a:t>Poll: which STROBE item does the crude-and-adjusted sentence satisfy? Expected: 16.</a:t>
+              <a:t>Poll: which item asks for crude and adjusted estimates? Expected: 16.</a:t>
             </a:r>
           </a:p>
         </p:txBody>
@@ -3316,31 +3053,19 @@
           <a:p>
             <a:r>
               <a:rPr lang="en-US" sz="1400" b="0" dirty="0"/>
-              <a:t>Teaching point: reviewers and clinicians read tables more carefully than text. A table must stand alone: a title that says what, in whom and when, n in every column header. Units and the summary statistic in each row. Footnotes defining abbreviations and missing data. The picture is Paper 1's Table 1, redrawn.</a:t>
+              <a:t>A table must stand alone: a title that says what, who and when, n per column, units and summary per row, footnotes for abbreviations and missing data.</a:t>
             </a:r>
           </a:p>
           <a:p>
             <a:r>
               <a:rPr lang="en-US" sz="1400" b="0" dirty="0"/>
-              <a:t>Good practice: Paper 1's Table 1 has n in each column, SD or IQR per row and no baseline p-values, which is correct for a randomised trial (annotation #31). Paper 2's Table 1 adds SMDs (standardised mean differences) and footnotes with the number of patients with missing data (#30). Its timeline figure has a self-contained legend (#21).</a:t>
+              <a:t>Errors in the papers: wrong units (Paper 1), no numbers at risk under a Kaplan-Meier curve (Paper 2).</a:t>
             </a:r>
           </a:p>
           <a:p>
             <a:r>
               <a:rPr lang="en-US" sz="1400" b="0" dirty="0"/>
-              <a:t>Errors to avoid: sodium and potassium printed in umol per liter (should be mmol/L) in Paper 1 (#30). A copy-pasted row in Paper 1's Table 2 (#32). Wrong figure call-outs in Paper 1 (#28, #41). A vague table title (#34). White-cell units written '* 10^3/L' in Paper 2 (#30). Kaplan-Meier curves should show numbers at risk (Paper 2, #31).</a:t>
-            </a:r>
-          </a:p>
-          <a:p>
-            <a:r>
-              <a:rPr lang="en-US" sz="1400" b="0" dirty="0"/>
-              <a:t>Link to Session 5: the publication-quality table rules. The FLUID-ICU Table 1 in each results pack already follows them.</a:t>
-            </a:r>
-          </a:p>
-          <a:p>
-            <a:r>
-              <a:rPr lang="en-US" sz="1400" b="0" dirty="0"/>
-              <a:t>Ask: what is wrong with a table titled 'Results'? Expected: it says nothing about what, who or when.</a:t>
+              <a:t>Ask: what is wrong with a table titled 'Results'?</a:t>
             </a:r>
           </a:p>
         </p:txBody>
@@ -3421,31 +3146,13 @@
           <a:p>
             <a:r>
               <a:rPr lang="en-US" sz="1400" b="0" dirty="0"/>
-              <a:t>Worked example: from Table 1 to one Results sentence (STROBE 14).</a:t>
+              <a:t>From Table 1 to one Results sentence (STROBE 14): 'Patients with a positive balance were sicker at baseline (median SOFA 8 vs 6, vasopressors 55.0% vs 24.9%) and less often had heart failure (11.5% vs 22.0%).'</a:t>
             </a:r>
           </a:p>
           <a:p>
             <a:r>
               <a:rPr lang="en-US" sz="1400" b="0" dirty="0"/>
-              <a:t>Model sentence: 'Patients with a positive balance were sicker at baseline (median SOFA 8 vs 6, vasopressors 55.0% vs 24.9%) and less often had heart failure (11.5% vs 22.0%).'</a:t>
-            </a:r>
-          </a:p>
-          <a:p>
-            <a:r>
-              <a:rPr lang="en-US" sz="1400" b="0" dirty="0"/>
-              <a:t>Teaching point: the Table 1 sentence describes, it does not test, so no p-values are needed (observational Table 1s often show SMDs instead).</a:t>
-            </a:r>
-          </a:p>
-          <a:p>
-            <a:r>
-              <a:rPr lang="en-US" sz="1400" b="0" dirty="0"/>
-              <a:t>Heart failure is lower in the positive group because clinicians give less fluid in heart failure: a good example of how treatment decisions shape the data.</a:t>
-            </a:r>
-          </a:p>
-          <a:p>
-            <a:r>
-              <a:rPr lang="en-US" sz="1400" b="0" dirty="0"/>
-              <a:t>The full Table 1 with missing-data rows is in each results pack.</a:t>
+              <a:t>The sentence describes, it does not test: no p-values.</a:t>
             </a:r>
           </a:p>
         </p:txBody>
@@ -3526,25 +3233,19 @@
           <a:p>
             <a:r>
               <a:rPr lang="en-US" sz="1400" b="0" dirty="0"/>
-              <a:t>Teaching point: FLUID-ICU is a cohort, so the paper follows STROBE (STrengthening the Reporting of OBservational studies in Epidemiology), cohort version. Item 11 (quantitative variables) is covered inside items 7 and 12.</a:t>
+              <a:t>FLUID-ICU is a cohort, so STROBE. The Results section covers items 13 to 17.</a:t>
             </a:r>
           </a:p>
           <a:p>
             <a:r>
               <a:rPr lang="en-US" sz="1400" b="0" dirty="0"/>
-              <a:t>Items most often forgotten: 9 (bias: say how you addressed confounding by indication, i.e. adjustment for severity), 10 (study size: for a fixed dataset say 'all eligible patients in the cohort were included'), 12 (missing data: how lactate was handled), 16 (give both crude and adjusted estimates, with the variables adjusted for).</a:t>
+              <a:t>Most often forgotten: 16 (crude and adjusted, with the variables adjusted for) and missing data.</a:t>
             </a:r>
           </a:p>
           <a:p>
             <a:r>
               <a:rPr lang="en-US" sz="1400" b="0" dirty="0"/>
-              <a:t>The checklist is in the Session 7 exercise sheet (Part C) and on equator-network.org (demo next Saturday).</a:t>
-            </a:r>
-          </a:p>
-          <a:p>
-            <a:r>
-              <a:rPr lang="en-US" sz="1400" b="0" dirty="0"/>
-              <a:t>Poll: which item covers Table 1? Expected: 14 (descriptive data).</a:t>
+              <a:t>Poll: which item covers Table 1? Expected: 14.</a:t>
             </a:r>
           </a:p>
         </p:txBody>
@@ -3625,19 +3326,19 @@
           <a:p>
             <a:r>
               <a:rPr lang="en-US" sz="1400" b="0" dirty="0"/>
-              <a:t>Check (21:32-21:35). One poll per sentence with three options: Methods, Results, Discussion. All numbers are FLUID-ICU Q1 results (key_results.md).</a:t>
+              <a:t>Check (21:32-21:35). One poll per sentence.</a:t>
             </a:r>
           </a:p>
           <a:p>
             <a:r>
               <a:rPr lang="en-US" sz="1400" b="0" dirty="0"/>
-              <a:t>Sentence 4 is the trick: how missing data were handled is Methods. How many were missing is Results.</a:t>
+              <a:t>Sentence 4 is the trick: how missing data were handled is Methods, how many were missing is Results.</a:t>
             </a:r>
           </a:p>
           <a:p>
             <a:r>
               <a:rPr lang="en-US" sz="1400" b="0" dirty="0"/>
-              <a:t>Sentence 3 is the classic error: an interpretation slipped into the Results. Move it to the Discussion.</a:t>
+              <a:t>Sentence 3 is the classic error: interpretation in the Results.</a:t>
             </a:r>
           </a:p>
         </p:txBody>
@@ -3718,25 +3419,19 @@
           <a:p>
             <a:r>
               <a:rPr lang="en-US" sz="1400" b="0" dirty="0"/>
-              <a:t>Manuscript workshop 1 (21:35-22:20). Course dataset.</a:t>
+              <a:t>Manuscript workshop 1 (21:35-22:20).</a:t>
             </a:r>
           </a:p>
           <a:p>
             <a:r>
               <a:rPr lang="en-US" sz="1400" b="0" dirty="0"/>
-              <a:t>Part 1 (21:35-22:05): you draft the Methods and Results for Q1 live on the shared screen, calling on people to suggest sentences with the microphone on.</a:t>
+              <a:t>Part 1: you write the Q1 Results live, calling on people for sentences. Part 2: each participant starts the Results for their own question.</a:t>
             </a:r>
           </a:p>
           <a:p>
             <a:r>
               <a:rPr lang="en-US" sz="1400" b="0" dirty="0"/>
-              <a:t>Part 2 (22:05-22:20): each participant starts their own draft on the question they chose (Q1 to Q5) and finishes it at home.</a:t>
-            </a:r>
-          </a:p>
-          <a:p>
-            <a:r>
-              <a:rPr lang="en-US" sz="1400" b="0" dirty="0"/>
-              <a:t>Instructions: Course/Practicals/s7_exercises.md, Part C. Model paragraphs for Q1: Course/Solutions/s7_solutions.md (use them to steer the class draft, do not paste them).</a:t>
+              <a:t>Instructions: s7_exercises Part C. Model text: s7_solutions Part C (steer with it, do not paste it).</a:t>
             </a:r>
           </a:p>
         </p:txBody>
@@ -3817,25 +3512,25 @@
           <a:p>
             <a:r>
               <a:rPr lang="en-US" sz="1400" b="0" dirty="0"/>
-              <a:t>Workshop Part 1 (21:35-22:05). Whole class. Start a visible timer and call each phase.</a:t>
+              <a:t>Workshop part 1 (21:35-22:05). Keep a visible timer.</a:t>
             </a:r>
           </a:p>
           <a:p>
             <a:r>
               <a:rPr lang="en-US" sz="1400" b="0" dirty="0"/>
-              <a:t>Methods in this order: design and setting, participants, variables (exposure, outcome, confounders), data sources and bias, study size, statistical analysis, ethics sentence (simulated data). Results: participants and flow, Table 1 sentence, outcome numbers, crude and adjusted OR, one sensitivity result.</a:t>
+              <a:t>Order: flow, Table 1 sentence, deaths per group, crude and adjusted OR, Cox HR and imputation.</a:t>
             </a:r>
           </a:p>
           <a:p>
             <a:r>
               <a:rPr lang="en-US" sz="1400" b="0" dirty="0"/>
-              <a:t>Prompts to the class: 'Where is the statistical paragraph?' 'What did we adjust for?' 'Is there a number without a confidence interval?' 'Is there an adjective ("significant", "strong") that should be a number?' 'Is there any interpretation in our Results?'</a:t>
+              <a:t>Prompts: 'Is there a number without its CI?' 'Is there an adjective that should be a number?' 'Any interpretation?'</a:t>
             </a:r>
           </a:p>
           <a:p>
             <a:r>
               <a:rPr lang="en-US" sz="1400" b="0" dirty="0"/>
-              <a:t>Aim for about 300 words each. Save the class draft and share it as a PDF after the session: it is the model for everyone's own draft.</a:t>
+              <a:t>Aim for about 300 words. Send the class draft as a PDF after the session.</a:t>
             </a:r>
           </a:p>
         </p:txBody>
@@ -3916,25 +3611,19 @@
           <a:p>
             <a:r>
               <a:rPr lang="en-US" sz="1400" b="0" dirty="0"/>
-              <a:t>Workshop Part 2 (22:05-22:20). Individual, quiet writing. Keep the timer on screen and answer questions in the chat.</a:t>
+              <a:t>Workshop part 2 (22:05-22:20). Quiet individual writing. Answer questions in the chat.</a:t>
             </a:r>
           </a:p>
           <a:p>
             <a:r>
               <a:rPr lang="en-US" sz="1400" b="0" dirty="0"/>
-              <a:t>Participants who chose Q1 rewrite the class draft in their own words and add a figure or table. They do not copy it.</a:t>
+              <a:t>Q1: rewrite in your own words, do not copy the class draft. Q3: ventilator-free days count death as zero. Q4: report both complete-case and imputed estimates. Q5: survivors only, medians and IQR.</a:t>
             </a:r>
           </a:p>
           <a:p>
             <a:r>
               <a:rPr lang="en-US" sz="1400" b="0" dirty="0"/>
-              <a:t>Question-specific points to post in the chat: Q4 reports both complete-case and imputed estimates. Q5 uses medians and IQR (survivors only). Q3: ventilator-free days are skewed and count death as zero, so check the summary.</a:t>
-            </a:r>
-          </a:p>
-          <a:p>
-            <a:r>
-              <a:rPr lang="en-US" sz="1400" b="0" dirty="0"/>
-              <a:t>Deadline for the Methods and Results draft: before Session 8 (by email). Next Saturday's workshop adds the Introduction, Discussion, Abstract and Title.</a:t>
+              <a:t>Optional parts can be added if there is time.</a:t>
             </a:r>
           </a:p>
         </p:txBody>
@@ -4015,13 +3704,7 @@
           <a:p>
             <a:r>
               <a:rPr lang="en-US" sz="1400" b="0" dirty="0"/>
-              <a:t>Key words (22:20-22:23). Show the term, call on someone to explain it with the microphone on, then reveal the right-hand column.</a:t>
-            </a:r>
-          </a:p>
-          <a:p>
-            <a:r>
-              <a:rPr lang="en-US" sz="1400" b="0" dirty="0"/>
-              <a:t>These are also the words most likely to appear in the post-course quiz next Saturday.</a:t>
+              <a:t>Key words (22:20-22:22). Show the term, call on someone to explain it, then reveal.</a:t>
             </a:r>
           </a:p>
         </p:txBody>
@@ -4102,19 +3785,19 @@
           <a:p>
             <a:r>
               <a:rPr lang="en-US" sz="1400" b="0" dirty="0"/>
-              <a:t>Section 7.1 (19:40-20:10). Ten slides, about 3 minutes each, including two worked examples.</a:t>
+              <a:t>Section 7.1 (19:40-20:10). Ten slides, about 3 minutes each.</a:t>
             </a:r>
           </a:p>
           <a:p>
             <a:r>
               <a:rPr lang="en-US" sz="1400" b="0" dirty="0"/>
-              <a:t>The ICU consent slide and its worked example deserve the most time: it is the real-life problem of our ICUs.</a:t>
+              <a:t>Spend the most time on ICU consent: it is the real problem in our units.</a:t>
             </a:r>
           </a:p>
           <a:p>
             <a:r>
               <a:rPr lang="en-US" sz="1400" b="0" dirty="0"/>
-              <a:t>Link: everything in this block becomes a paragraph of Proposal Part 4 (Proposal builder 7 at 20:30).</a:t>
+              <a:t>Everything here becomes a paragraph of Proposal Part 4.</a:t>
             </a:r>
           </a:p>
         </p:txBody>
@@ -4195,19 +3878,13 @@
           <a:p>
             <a:r>
               <a:rPr lang="en-US" sz="1400" b="0" dirty="0"/>
-              <a:t>Wrap-up (22:23-22:30). Read the three take-home messages. Call on one person to add a fourth.</a:t>
+              <a:t>Peer review (22:22-22:24). Show the list of reviewer pairs on screen and say it was drawn at random. Everyone reviews one draft and receives one review.</a:t>
             </a:r>
           </a:p>
           <a:p>
             <a:r>
               <a:rPr lang="en-US" sz="1400" b="0" dirty="0"/>
-              <a:t>Exit question: its purpose is to check understanding. Read the answers before Session 8 and open Session 8 with them (the recap).</a:t>
-            </a:r>
-          </a:p>
-          <a:p>
-            <a:r>
-              <a:rPr lang="en-US" sz="1400" b="0" dirty="0"/>
-              <a:t>Homework: Part 4 of the proposal (worksheet Part B). The Methods + Results draft, 6 slides following the presentation guide (Course/Assignment/presentation_guide.md). Everyone submits slides and the written proposal. About five volunteers present (6 minutes each). Ask volunteers to tell you this week.</a:t>
+              <a:t>Sending the draft straight to the reviewer saves time: the review is due two weeks later, the revision four weeks after that.</a:t>
             </a:r>
           </a:p>
         </p:txBody>
@@ -4288,7 +3965,19 @@
           <a:p>
             <a:r>
               <a:rPr lang="en-US" sz="1400" b="0" dirty="0"/>
-              <a:t>Extra: the slides after this divider are optional. Use them if the class moves faster than planned, or point participants to them for self-study.</a:t>
+              <a:t>Wrap-up (22:24-22:30). Read the three messages and call on one person to add a fourth.</a:t>
+            </a:r>
+          </a:p>
+          <a:p>
+            <a:r>
+              <a:rPr lang="en-US" sz="1400" b="0" dirty="0"/>
+              <a:t>Read the exit answers before Session 8 and open with them.</a:t>
+            </a:r>
+          </a:p>
+          <a:p>
+            <a:r>
+              <a:rPr lang="en-US" sz="1400" b="0" dirty="0"/>
+              <a:t>Homework: Part 4 of the proposal, the Results draft, the 6 slides (Presentation_Guide).</a:t>
             </a:r>
           </a:p>
         </p:txBody>
@@ -4369,13 +4058,7 @@
           <a:p>
             <a:r>
               <a:rPr lang="en-US" sz="1400" b="0" dirty="0"/>
-              <a:t>Extra check (1 minute + 1 minute answers). One poll per scenario with three options: must, should, not needed. Then reveal.</a:t>
-            </a:r>
-          </a:p>
-          <a:p>
-            <a:r>
-              <a:rPr lang="en-US" sz="1400" b="0" dirty="0"/>
-              <a:t>Scenario 4 starts a useful discussion: an audit compares practice with a standard and is usually approved through the quality office, not registered. If you plan to publish it as research, ask the ethics committee first (Session 1: research vs audit vs quality improvement).</a:t>
+              <a:t>Extra slides: optional, for a fast class or self-study.</a:t>
             </a:r>
           </a:p>
         </p:txBody>
@@ -4456,25 +4139,13 @@
           <a:p>
             <a:r>
               <a:rPr lang="en-US" sz="1400" b="0" dirty="0"/>
-              <a:t>Extra: Teaching point: almost every clinical paper follows IMRaD (Introduction, Methods, Results and Discussion), framed by the title and abstract and closed by references and declarations.</a:t>
+              <a:t>Extra check. One poll per scenario: must, should or not needed.</a:t>
             </a:r>
           </a:p>
           <a:p>
             <a:r>
               <a:rPr lang="en-US" sz="1400" b="0" dirty="0"/>
-              <a:t>Introduction: from what is known, to what is not known, to your question (a funnel). Methods: enough detail for someone else to repeat the study. Results: numbers, without opinions. Discussion: answer the question first, compare with other studies, state the limitations, then say what it means.</a:t>
-            </a:r>
-          </a:p>
-          <a:p>
-            <a:r>
-              <a:rPr lang="en-US" sz="1400" b="0" dirty="0"/>
-              <a:t>Running example: Paper 1's introduction is a textbook funnel in three paragraphs (pages 2-3), ending 'The primary objective was to assess the fluid balance after the first 5 days'. Its Discussion opens by answering that question (page 8).</a:t>
-            </a:r>
-          </a:p>
-          <a:p>
-            <a:r>
-              <a:rPr lang="en-US" sz="1400" b="0" dirty="0"/>
-              <a:t>Tip for the appraisal in Session 8: the hourglass tells you where to look. PICO is in the last paragraph of the Introduction, design and outcome in the Methods, the main effect in the first paragraph of the Results, limitations near the end of the Discussion.</a:t>
+              <a:t>Scenario 4: an audit goes through the quality office, not a registry. To publish it as research, ask the ethics committee first.</a:t>
             </a:r>
           </a:p>
         </p:txBody>
@@ -4555,25 +4226,13 @@
           <a:p>
             <a:r>
               <a:rPr lang="en-US" sz="1400" b="0" dirty="0"/>
-              <a:t>Extra: CRediT (Contributor Roles Taxonomy) is a list of 14 standard roles. It does not replace the ICMJE criteria. It makes each person's contribution visible.</a:t>
+              <a:t>Extra. IMRaD: the Introduction narrows to the question, the Discussion widens back to practice.</a:t>
             </a:r>
           </a:p>
           <a:p>
             <a:r>
               <a:rPr lang="en-US" sz="1400" b="0" dirty="0"/>
-              <a:t>Running example: Paper 1 (page 12) gives a CRediT statement. For example, the statistician is credited for Methodology and Formal analysis. Paper 2 (page 8) describes contributions in free text and states that all authors read and approved the final manuscript. That is acceptable, but CRediT is the format most journals now ask for.</a:t>
-            </a:r>
-          </a:p>
-          <a:p>
-            <a:r>
-              <a:rPr lang="en-US" sz="1400" b="0" dirty="0"/>
-              <a:t>Ask each participant to write, in their own proposal, who would be first author and who would do what. It prevents painful conversations later.</a:t>
-            </a:r>
-          </a:p>
-          <a:p>
-            <a:r>
-              <a:rPr lang="en-US" sz="1400" b="0" dirty="0"/>
-              <a:t>Question: in a hospital, who usually ends up as last author, and why? Expected: the senior supervisor. That is legitimate if they meet all four criteria, and a gift if they do not.</a:t>
+              <a:t>Paper 1's Introduction is a three-paragraph funnel, and its Discussion opens by answering the question.</a:t>
             </a:r>
           </a:p>
         </p:txBody>
@@ -4654,7 +4313,100 @@
           <a:p>
             <a:r>
               <a:rPr lang="en-US" sz="1400" b="0" dirty="0"/>
-              <a:t>Copyright slide. Leave it on screen while participants leave the meeting.</a:t>
+              <a:t>Extra. CRediT names who did what (14 roles). It does not replace the ICMJE criteria.</a:t>
+            </a:r>
+          </a:p>
+          <a:p>
+            <a:r>
+              <a:rPr lang="en-US" sz="1400" b="0" dirty="0"/>
+              <a:t>Paper 1 gives a CRediT statement.</a:t>
+            </a:r>
+          </a:p>
+          <a:p>
+            <a:r>
+              <a:rPr lang="en-US" sz="1400" b="0" dirty="0"/>
+              <a:t>Ask each participant to write who would do what in their own proposal.</a:t>
+            </a:r>
+          </a:p>
+        </p:txBody>
+      </p:sp>
+      <p:sp>
+        <p:nvSpPr>
+          <p:cNvPr id="4" name="Slide Number Placeholder 3"/>
+          <p:cNvSpPr>
+            <a:spLocks noGrp="1"/>
+          </p:cNvSpPr>
+          <p:nvPr>
+            <p:ph type="sldNum" sz="quarter" idx="10"/>
+          </p:nvPr>
+        </p:nvSpPr>
+        <p:spPr/>
+        <p:txBody>
+          <a:bodyPr/>
+          <a:lstStyle/>
+          <a:p>
+            <a:fld id="{F7021451-1387-4CA6-816F-3879F97B5CBC}" type="slidenum">
+              <a:rPr lang="en-US"/>
+              <a:t>1</a:t>
+            </a:fld>
+          </a:p>
+        </p:txBody>
+      </p:sp>
+    </p:spTree>
+  </p:cSld>
+  <p:clrMapOvr>
+    <a:masterClrMapping/>
+  </p:clrMapOvr>
+</p:notes>
+</file>
+
+<file path=ppt/notesSlides/notesSlide46.xml><?xml version="1.0" encoding="utf-8"?>
+<p:notes xmlns:a="http://schemas.openxmlformats.org/drawingml/2006/main" xmlns:r="http://schemas.openxmlformats.org/officeDocument/2006/relationships" xmlns:p="http://schemas.openxmlformats.org/presentationml/2006/main">
+  <p:cSld>
+    <p:spTree>
+      <p:nvGrpSpPr>
+        <p:cNvPr id="1" name=""/>
+        <p:cNvGrpSpPr/>
+        <p:nvPr/>
+      </p:nvGrpSpPr>
+      <p:grpSpPr>
+        <a:xfrm>
+          <a:off x="0" y="0"/>
+          <a:ext cx="0" cy="0"/>
+          <a:chOff x="0" y="0"/>
+          <a:chExt cx="0" cy="0"/>
+        </a:xfrm>
+      </p:grpSpPr>
+      <p:sp>
+        <p:nvSpPr>
+          <p:cNvPr id="2" name="Slide Image Placeholder 1"/>
+          <p:cNvSpPr>
+            <a:spLocks noGrp="1" noRot="1" noChangeAspect="1"/>
+          </p:cNvSpPr>
+          <p:nvPr>
+            <p:ph type="sldImg"/>
+          </p:nvPr>
+        </p:nvSpPr>
+        <p:spPr/>
+      </p:sp>
+      <p:sp>
+        <p:nvSpPr>
+          <p:cNvPr id="3" name="Notes Placeholder 2"/>
+          <p:cNvSpPr>
+            <a:spLocks noGrp="1"/>
+          </p:cNvSpPr>
+          <p:nvPr>
+            <p:ph type="body" idx="1"/>
+          </p:nvPr>
+        </p:nvSpPr>
+        <p:spPr/>
+        <p:txBody>
+          <a:bodyPr/>
+          <a:lstStyle/>
+          <a:p>
+            <a:r>
+              <a:rPr lang="en-US" sz="1400" b="0" dirty="0"/>
+              <a:t>Leave on screen while people leave the meeting.</a:t>
             </a:r>
           </a:p>
         </p:txBody>
@@ -4735,31 +4487,25 @@
           <a:p>
             <a:r>
               <a:rPr lang="en-US" sz="1400" b="0" dirty="0"/>
-              <a:t>Teaching point: a protocol is the full written plan of the study, written and approved before the first patient is enrolled. SPIRIT 2025 (Standard Protocol Items: Recommendations for Interventional Trials) is the international checklist for what a trial protocol should contain. Observational studies follow the same logic.</a:t>
+              <a:t>A protocol is the full plan, approved before the first patient. SPIRIT 2025 is the checklist for trial protocols.</a:t>
             </a:r>
           </a:p>
           <a:p>
             <a:r>
               <a:rPr lang="en-US" sz="1400" b="0" dirty="0"/>
-              <a:t>Walk the four cards: who and what (title page, registration, team, funding), why (Part 1), how (Parts 2 and 3), protect and share (Part 4, today). PICO = Population, Intervention or exposure, Comparison, Outcome.</a:t>
+              <a:t>Walk the four cards: they are the four proposal parts.</a:t>
             </a:r>
           </a:p>
           <a:p>
             <a:r>
               <a:rPr lang="en-US" sz="1400" b="0" dirty="0"/>
-              <a:t>Changes after approval are made as formal amendments, approved before they are applied, never quietly.</a:t>
+              <a:t>Paper 1 registered its protocol and SAP before the first patient (NCT04947904).</a:t>
             </a:r>
           </a:p>
           <a:p>
             <a:r>
               <a:rPr lang="en-US" sz="1400" b="0" dirty="0"/>
-              <a:t>Running example: Paper 1 says its protocol and statistical analysis plan were registered at ClinicalTrials.gov (NCT04947904) before the first patient. That is what lets a reader check the authors did what they planned.</a:t>
-            </a:r>
-          </a:p>
-          <a:p>
-            <a:r>
-              <a:rPr lang="en-US" sz="1400" b="0" dirty="0"/>
-              <a:t>Poll: which part of your own proposal is weakest right now? Expected: How (sample size or analysis plan). Reassure: the proposal template (Course/Templates/Research_Proposal_Template) follows exactly this order.</a:t>
+              <a:t>Poll: which part of your proposal is weakest? Expected: sample size or analysis plan.</a:t>
             </a:r>
           </a:p>
         </p:txBody>
@@ -4840,31 +4586,19 @@
           <a:p>
             <a:r>
               <a:rPr lang="en-US" sz="1400" b="0" dirty="0"/>
-              <a:t>Teaching point: the Declaration of Helsinki (World Medical Association, latest revision October 2024) is the ethical foundation for research with people. Its core: the rights and interests of the individual participant come before the goal of new knowledge. A protocol approved by an independent research ethics committee before the study starts. Free, informed consent, risks minimised and justified, privacy protected. Every study registered before the first participant and all results made public, including negative and inconclusive ones.</a:t>
+              <a:t>Helsinki (2024): the participant comes before new knowledge. Ethics approval, free consent, privacy, registration, publish all results.</a:t>
             </a:r>
           </a:p>
           <a:p>
             <a:r>
               <a:rPr lang="en-US" sz="1400" b="0" dirty="0"/>
-              <a:t>The 2024 revision speaks of 'participants' rather than 'subjects', strengthens the protection of vulnerable groups and of people who cannot consent, and stresses scientific integrity.</a:t>
+              <a:t>GCP (ICH E6(R3), 2025): the quality standard for trials. Paper 1, an academic trial, followed it.</a:t>
             </a:r>
           </a:p>
           <a:p>
             <a:r>
               <a:rPr lang="en-US" sz="1400" b="0" dirty="0"/>
-              <a:t>ICH E6(R3) Good Clinical Practice (ICH = International Council for Harmonisation, adopted January 2025) is the international quality standard for clinical trials. Its spirit applies to every study.</a:t>
-            </a:r>
-          </a:p>
-          <a:p>
-            <a:r>
-              <a:rPr lang="en-US" sz="1400" b="0" dirty="0"/>
-              <a:t>Misconception: 'GCP is only for drug companies'. Paper 1, an academic ICU trial, states its analyses followed ICH-GCP.</a:t>
-            </a:r>
-          </a:p>
-          <a:p>
-            <a:r>
-              <a:rPr lang="en-US" sz="1400" b="0" dirty="0"/>
-              <a:t>Poll: which of these 12 points would be hardest in our unit? Typical answer: reliable data (charts incomplete) or protected time.</a:t>
+              <a:t>Poll: which of the 12 points would be hardest in our unit?</a:t>
             </a:r>
           </a:p>
         </p:txBody>
@@ -4945,37 +4679,25 @@
           <a:p>
             <a:r>
               <a:rPr lang="en-US" sz="1400" b="0" dirty="0"/>
-              <a:t>Walk the six steps left to right. Most institutions want a scientific or department review first. Then the dossier goes to the research ethics committee (also called IRB, institutional review board, or IEC, independent ethics committee).</a:t>
+              <a:t>Walk the six steps. Most institutions want a scientific review first.</a:t>
             </a:r>
           </a:p>
           <a:p>
             <a:r>
               <a:rPr lang="en-US" sz="1400" b="0" dirty="0"/>
-              <a:t>The dossier: protocol, participant information and consent form, case report form (CRF), investigator CVs and GCP training records, budget and insurance where required.</a:t>
+              <a:t>The committee decides the review type, not you. Plan 1 to 3 months.</a:t>
             </a:r>
           </a:p>
           <a:p>
             <a:r>
               <a:rPr lang="en-US" sz="1400" b="0" dirty="0"/>
-              <a:t>Review types: some low-risk studies are exempt or get an expedited review. Trials and anything with more than minimal risk go to the full committee. Your committee decides the category, not you.</a:t>
+              <a:t>Misconception: 'collect now, ask later'. Committees cannot approve retrospectively.</a:t>
             </a:r>
           </a:p>
           <a:p>
             <a:r>
               <a:rPr lang="en-US" sz="1400" b="0" dirty="0"/>
-              <a:t>During the study: amendments, adverse-event reports, progress and final reports go to the committee.</a:t>
-            </a:r>
-          </a:p>
-          <a:p>
-            <a:r>
-              <a:rPr lang="en-US" sz="1400" b="0" dirty="0"/>
-              <a:t>Misconception to correct: 'we can collect data now and ask for approval later'. Committees cannot approve retrospectively, and journals will reject the paper.</a:t>
-            </a:r>
-          </a:p>
-          <a:p>
-            <a:r>
-              <a:rPr lang="en-US" sz="1400" b="0" dirty="0"/>
-              <a:t>Running example: Paper 1 gives its committee name and approval number in the Methods. Paper 2 gives the IRB approval number in its Declarations.</a:t>
+              <a:t>Paper 1 gives its approval number in the Methods.</a:t>
             </a:r>
           </a:p>
         </p:txBody>
@@ -5056,37 +4778,25 @@
           <a:p>
             <a:r>
               <a:rPr lang="en-US" sz="1400" b="0" dirty="0"/>
-              <a:t>Teaching point: registration puts the study's existence, design and primary outcome on a public record before anyone is enrolled. It prevents hidden negative studies and outcome switching.</a:t>
+              <a:t>Registration puts the study and its primary outcome on public record before anyone is enrolled.</a:t>
             </a:r>
           </a:p>
           <a:p>
             <a:r>
               <a:rPr lang="en-US" sz="1400" b="0" dirty="0"/>
-              <a:t>Clinical trials: registration is mandatory. Journals that follow ICMJE (International Committee of Medical Journal Editors) will not publish a trial that was not registered before the first participant, and many countries require it by law. Use ClinicalTrials.gov or another who primary registry. The WHO ICTRP (International Clinical Trials Registry Platform) searches all of them at once. It is a search portal, not a registry itself.</a:t>
+              <a:t>Trials: mandatory. Reviews: PROSPERO. Observational: recommended.</a:t>
             </a:r>
           </a:p>
           <a:p>
             <a:r>
               <a:rPr lang="en-US" sz="1400" b="0" dirty="0"/>
-              <a:t>Systematic reviews: register the protocol on PROSPERO before data extraction. Many journals expect it.</a:t>
+              <a:t>Paper 1: registered 1 July 2021, first patient September 2021.</a:t>
             </a:r>
           </a:p>
           <a:p>
             <a:r>
               <a:rPr lang="en-US" sz="1400" b="0" dirty="0"/>
-              <a:t>Observational studies: registration is encouraged rather than required. The Declaration of Helsinki asks for every study with human participants to be registered.</a:t>
-            </a:r>
-          </a:p>
-          <a:p>
-            <a:r>
-              <a:rPr lang="en-US" sz="1400" b="0" dirty="0"/>
-              <a:t>Running example: Paper 1 was registered as NCT04947904 on 1 July 2021, and the first patient was enrolled in September 2021, so registration was prospective. Its registration number is in the abstract.</a:t>
-            </a:r>
-          </a:p>
-          <a:p>
-            <a:r>
-              <a:rPr lang="en-US" sz="1400" b="0" dirty="0"/>
-              <a:t>Ask (call on two or three people, microphone on): does your own study need registration? Expected: trials yes, most cohort proposals 'recommended'. A short poll on four scenarios is in the Extra slides if you have time.</a:t>
+              <a:t>Ask: does your study need registration?</a:t>
             </a:r>
           </a:p>
         </p:txBody>
@@ -5167,31 +4877,19 @@
           <a:p>
             <a:r>
               <a:rPr lang="en-US" sz="1400" b="0" dirty="0"/>
-              <a:t>Teaching point: valid consent needs all four: information, understanding, voluntariness and a record.</a:t>
+              <a:t>Valid consent needs all four: information, understanding, voluntariness, a record.</a:t>
             </a:r>
           </a:p>
           <a:p>
             <a:r>
               <a:rPr lang="en-US" sz="1400" b="0" dirty="0"/>
-              <a:t>Patients often ask the nurses and other team members afterwards 'what did I sign?', so this is everybody's job, not only the investigator's.</a:t>
+              <a:t>In Paper 1, two control patients withdrew and were not analysed: the right respected.</a:t>
             </a:r>
           </a:p>
           <a:p>
             <a:r>
               <a:rPr lang="en-US" sz="1400" b="0" dirty="0"/>
-              <a:t>Withdrawal: participants may leave at any time without giving a reason and without any effect on their care. Running example: in Paper 1, two control patients withdrew consent and were not analysed. That is the right being respected, and it is why the trial analysed 48 of 50.</a:t>
-            </a:r>
-          </a:p>
-          <a:p>
-            <a:r>
-              <a:rPr lang="en-US" sz="1400" b="0" dirty="0"/>
-              <a:t>Common mistake: a consent form written at university reading level, in a language the family does not read fluently. Ask the committee for its template (there is also one in Course/Templates/Informed_Consent_Template).</a:t>
-            </a:r>
-          </a:p>
-          <a:p>
-            <a:r>
-              <a:rPr lang="en-US" sz="1400" b="0" dirty="0"/>
-              <a:t>Ask (call on two or three people, microphone on): who would take consent in your own study, and when? Expected answer: a trained team member who is not the treating doctor under time pressure, if possible.</a:t>
+              <a:t>Ask: who takes consent in your study, and when? Expected: a trained team member, not the treating doctor under time pressure.</a:t>
             </a:r>
           </a:p>
         </p:txBody>
@@ -8272,7 +7970,7 @@
                 <a:latin typeface="Arial"/>
                 <a:cs typeface="Arial"/>
               </a:rPr>
-              <a:t>Session 7 · Protect &amp; write: ethics, integrity, Methods and Results</a:t>
+              <a:t>Session 7 · Protect &amp; write: ethics, integrity and the Results section</a:t>
             </a:r>
           </a:p>
         </p:txBody>
@@ -8441,7 +8139,7 @@
                 <a:latin typeface="Arial"/>
                 <a:cs typeface="Arial"/>
               </a:rPr>
-              <a:t>21:00  7.3  Writing the paper (I): Methods, Results, tables, STROBE</a:t>
+              <a:t>21:00  7.3  Writing the paper (I): the Results section, tables, STROBE</a:t>
             </a:r>
           </a:p>
           <a:p>
@@ -8460,7 +8158,7 @@
                 <a:latin typeface="Arial"/>
                 <a:cs typeface="Arial"/>
               </a:rPr>
-              <a:t>21:35  Manuscript workshop 1: Methods and Results, together then on your own</a:t>
+              <a:t>21:35  Manuscript workshop 1: the Results section, together then on your own</a:t>
             </a:r>
           </a:p>
         </p:txBody>
@@ -18315,7 +18013,7 @@
                 <a:latin typeface="Arial"/>
                 <a:cs typeface="Arial"/>
               </a:rPr>
-              <a:t>Writing the paper (I): Methods and Results</a:t>
+              <a:t>Writing the paper (I): the Results section</a:t>
             </a:r>
           </a:p>
           <a:p>
@@ -18333,7 +18031,7 @@
                 <a:latin typeface="Arial"/>
                 <a:cs typeface="Arial"/>
               </a:rPr>
-              <a:t>Write what you did and what you found, nothing more</a:t>
+              <a:t>Report what you found, nothing more</a:t>
             </a:r>
           </a:p>
         </p:txBody>
@@ -19422,7 +19120,7 @@
                 <a:latin typeface="Arial"/>
                 <a:cs typeface="Arial"/>
               </a:rPr>
-              <a:t>If a colleague could not redo your study from the Methods, add detail.</a:t>
+              <a:t>Optional for your manuscript. If a colleague could not redo the study from it, add detail.</a:t>
             </a:r>
           </a:p>
         </p:txBody>
@@ -20223,7 +19921,7 @@
                 <a:latin typeface="Arial"/>
                 <a:cs typeface="Arial"/>
               </a:rPr>
-              <a:t>Worked example: Methods for FLUID-ICU question 1</a:t>
+              <a:t>Optional: Methods for FLUID-ICU question 1</a:t>
             </a:r>
           </a:p>
         </p:txBody>
@@ -20599,7 +20297,7 @@
                 <a:latin typeface="Arial"/>
                 <a:cs typeface="Arial"/>
               </a:rPr>
-              <a:t>Worked example: the statistical-analysis paragraph</a:t>
+              <a:t>Optional: the statistical-analysis paragraph</a:t>
             </a:r>
           </a:p>
         </p:txBody>
@@ -21055,7 +20753,7 @@
         </p:nvSpPr>
         <p:spPr>
           <a:xfrm>
-            <a:off x="457200" y="1914275"/>
+            <a:off x="457200" y="1821670"/>
             <a:ext cx="3625866" cy="640000"/>
           </a:xfrm>
           <a:prstGeom prst="rect">
@@ -21098,8 +20796,8 @@
         </p:nvSpPr>
         <p:spPr>
           <a:xfrm>
-            <a:off x="457200" y="2554275"/>
-            <a:ext cx="3625866" cy="2480767"/>
+            <a:off x="457200" y="2461670"/>
+            <a:ext cx="3625866" cy="2758580"/>
           </a:xfrm>
           <a:prstGeom prst="rect">
             <a:avLst/>
@@ -21189,7 +20887,7 @@
         </p:nvSpPr>
         <p:spPr>
           <a:xfrm>
-            <a:off x="4283066" y="1914275"/>
+            <a:off x="4283066" y="1821670"/>
             <a:ext cx="3625866" cy="640000"/>
           </a:xfrm>
           <a:prstGeom prst="rect">
@@ -21219,7 +20917,7 @@
                 <a:latin typeface="Arial"/>
                 <a:cs typeface="Arial"/>
               </a:rPr>
-              <a:t>Product 2: your manuscript</a:t>
+              <a:t>Product 2: your Results section</a:t>
             </a:r>
           </a:p>
         </p:txBody>
@@ -21232,8 +20930,8 @@
         </p:nvSpPr>
         <p:spPr>
           <a:xfrm>
-            <a:off x="4283066" y="2554275"/>
-            <a:ext cx="3625866" cy="2480767"/>
+            <a:off x="4283066" y="2461670"/>
+            <a:ext cx="3625866" cy="2758580"/>
           </a:xfrm>
           <a:prstGeom prst="rect">
             <a:avLst/>
@@ -21310,7 +21008,7 @@
                 <a:latin typeface="Arial"/>
                 <a:cs typeface="Arial"/>
               </a:rPr>
-              <a:t>Today: Methods, Results</a:t>
+              <a:t>Today: the Results, live on Q1</a:t>
             </a:r>
           </a:p>
           <a:p>
@@ -21331,7 +21029,7 @@
                 <a:latin typeface="Arial"/>
                 <a:cs typeface="Arial"/>
               </a:rPr>
-              <a:t>Session 8: Introduction, Discussion, Abstract, Title</a:t>
+              <a:t>Session 8: improve it. Other parts optional</a:t>
             </a:r>
           </a:p>
         </p:txBody>
@@ -21344,7 +21042,7 @@
         </p:nvSpPr>
         <p:spPr>
           <a:xfrm>
-            <a:off x="8108932" y="1914275"/>
+            <a:off x="8108932" y="1821670"/>
             <a:ext cx="3625866" cy="640000"/>
           </a:xfrm>
           <a:prstGeom prst="rect">
@@ -21387,8 +21085,8 @@
         </p:nvSpPr>
         <p:spPr>
           <a:xfrm>
-            <a:off x="8108932" y="2554275"/>
-            <a:ext cx="3625866" cy="2480767"/>
+            <a:off x="8108932" y="2461670"/>
+            <a:ext cx="3625866" cy="2758580"/>
           </a:xfrm>
           <a:prstGeom prst="rect">
             <a:avLst/>
@@ -21465,7 +21163,7 @@
                 <a:latin typeface="Arial"/>
                 <a:cs typeface="Arial"/>
               </a:rPr>
-              <a:t>PDFs in Course/Papers</a:t>
+              <a:t>PDFs sent by email</a:t>
             </a:r>
           </a:p>
         </p:txBody>
@@ -21520,7 +21218,7 @@
                 <a:latin typeface="Arial"/>
                 <a:cs typeface="Arial"/>
               </a:rPr>
-              <a:t>Before the break: proposal Part 4. After the break: Methods and Results.</a:t>
+              <a:t>Before the break: proposal Part 4. After the break: the Results section.</a:t>
             </a:r>
           </a:p>
         </p:txBody>
@@ -24357,7 +24055,7 @@
                 <a:latin typeface="Arial"/>
                 <a:cs typeface="Arial"/>
               </a:rPr>
-              <a:t>Write with the STROBE checklist open and tick each item as you write it.</a:t>
+              <a:t>Your Results section: items 13 to 17. Methods (optional): items 4 to 12.</a:t>
             </a:r>
           </a:p>
         </p:txBody>
@@ -25133,7 +24831,7 @@
                 <a:latin typeface="Arial"/>
                 <a:cs typeface="Arial"/>
               </a:rPr>
-              <a:t>Write the Methods and Results: together, then on your own</a:t>
+              <a:t>Write the Results section: together, then on your own</a:t>
             </a:r>
           </a:p>
           <a:p>
@@ -25151,7 +24849,7 @@
                 <a:latin typeface="Arial"/>
                 <a:cs typeface="Arial"/>
               </a:rPr>
-              <a:t>30 minutes drafting Q1 live with the whole class, then 15 minutes on your own question</a:t>
+              <a:t>30 minutes on Q1 with the whole class, then 15 minutes on your own question</a:t>
             </a:r>
           </a:p>
         </p:txBody>
@@ -25464,7 +25162,7 @@
                 <a:latin typeface="Arial"/>
                 <a:cs typeface="Arial"/>
               </a:rPr>
-              <a:t>Methods (15 min): you suggest each sentence aloud when called on. The instructor types the best one</a:t>
+              <a:t>Participants and Table 1 (10 min): you suggest each sentence when called on</a:t>
             </a:r>
           </a:p>
           <a:p>
@@ -25489,7 +25187,7 @@
                 <a:latin typeface="Arial"/>
                 <a:cs typeface="Arial"/>
               </a:rPr>
-              <a:t>Results (12 min): participants, Table 1 sentence, crude and adjusted OR</a:t>
+              <a:t>Main results (12 min): deaths per group, crude and adjusted OR with 95% CI</a:t>
             </a:r>
           </a:p>
           <a:p>
@@ -25514,6 +25212,31 @@
                 <a:latin typeface="Arial"/>
                 <a:cs typeface="Arial"/>
               </a:rPr>
+              <a:t>Other analyses (5 min): Cox model and multiple imputation</a:t>
+            </a:r>
+          </a:p>
+          <a:p>
+            <a:pPr marL="380000" indent="-380000" algn="l">
+              <a:lnSpc>
+                <a:spcPct val="104000"/>
+              </a:lnSpc>
+              <a:spcBef>
+                <a:spcPts val="450"/>
+              </a:spcBef>
+              <a:buClr>
+                <a:srgbClr val="0D7377"/>
+              </a:buClr>
+              <a:buFont typeface="Arial"/>
+              <a:buChar char="•"/>
+            </a:pPr>
+            <a:r>
+              <a:rPr lang="en-US" sz="1650" dirty="0">
+                <a:solidFill>
+                  <a:srgbClr val="000000"/>
+                </a:solidFill>
+                <a:latin typeface="Arial"/>
+                <a:cs typeface="Arial"/>
+              </a:rPr>
               <a:t>Number check (3 min): a volunteer reads each number against the pack</a:t>
             </a:r>
           </a:p>
@@ -25528,7 +25251,7 @@
         <p:spPr>
           <a:xfrm>
             <a:off x="7423760" y="1720000"/>
-            <a:ext cx="4311040" cy="1968005"/>
+            <a:ext cx="4311040" cy="1729880"/>
           </a:xfrm>
           <a:prstGeom prst="roundRect">
             <a:avLst>
@@ -25580,7 +25303,7 @@
                 <a:latin typeface="Arial"/>
                 <a:cs typeface="Arial"/>
               </a:rPr>
-              <a:t>Results pack Q1 (sent before the session)</a:t>
+              <a:t>Results pack Q1</a:t>
             </a:r>
           </a:p>
           <a:p>
@@ -25601,7 +25324,7 @@
                 <a:latin typeface="Arial"/>
                 <a:cs typeface="Arial"/>
               </a:rPr>
-              <a:t>Manuscript template (Course/Templates)</a:t>
+              <a:t>Manuscript template</a:t>
             </a:r>
           </a:p>
           <a:p>
@@ -25622,7 +25345,7 @@
                 <a:latin typeface="Arial"/>
                 <a:cs typeface="Arial"/>
               </a:rPr>
-              <a:t>STROBE items 4-17</a:t>
+              <a:t>STROBE items 13-17</a:t>
             </a:r>
           </a:p>
           <a:p>
@@ -25700,7 +25423,7 @@
                 <a:latin typeface="Arial"/>
                 <a:cs typeface="Arial"/>
               </a:rPr>
-              <a:t>A class draft of the Q1 Methods and Results, shared as a PDF after the session</a:t>
+              <a:t>A class Results section for Q1, sent as a PDF after the session</a:t>
             </a:r>
           </a:p>
         </p:txBody>
@@ -26038,7 +25761,7 @@
                 <a:latin typeface="Arial"/>
                 <a:cs typeface="Arial"/>
               </a:rPr>
-              <a:t>Start with the Methods: design, participants, variables, statistics</a:t>
+              <a:t>Start with participants and the Table 1 sentence</a:t>
             </a:r>
           </a:p>
           <a:p>
@@ -26063,7 +25786,7 @@
                 <a:latin typeface="Arial"/>
                 <a:cs typeface="Arial"/>
               </a:rPr>
-              <a:t>Questions: raise your hand or use the chat. The instructor answers</a:t>
+              <a:t>Questions: raise your hand or use the chat</a:t>
             </a:r>
           </a:p>
           <a:p>
@@ -26088,7 +25811,7 @@
                 <a:latin typeface="Arial"/>
                 <a:cs typeface="Arial"/>
               </a:rPr>
-              <a:t>At home: finish the Methods and Results, Table 1 and one figure or table</a:t>
+              <a:t>At home: finish the Results, Table 1 and one main table or figure</a:t>
             </a:r>
           </a:p>
         </p:txBody>
@@ -26295,7 +26018,7 @@
                 <a:latin typeface="Arial"/>
                 <a:cs typeface="Arial"/>
               </a:rPr>
-              <a:t>Your own Methods and Results (about 600 words), sent by email before Session 8</a:t>
+              <a:t>Your Results section, due 23:59 on the day of Session 8</a:t>
             </a:r>
           </a:p>
         </p:txBody>
@@ -27328,7 +27051,7 @@
                 <a:latin typeface="Arial"/>
                 <a:cs typeface="Arial"/>
               </a:rPr>
-              <a:t>Wrap-up, exit question and homework</a:t>
+              <a:t>Peer review: your reviewer and your deadlines</a:t>
             </a:r>
           </a:p>
         </p:txBody>
@@ -27361,59 +27084,240 @@
           </a:p>
         </p:txBody>
       </p:sp>
-      <p:sp>
-        <p:nvSpPr>
-          <p:cNvPr id="50" name="Banner"/>
-          <p:cNvSpPr/>
-          <p:nvPr/>
-        </p:nvSpPr>
-        <p:spPr>
-          <a:xfrm>
-            <a:off x="457200" y="1120000"/>
-            <a:ext cx="11277600" cy="470000"/>
-          </a:xfrm>
-          <a:prstGeom prst="rect">
-            <a:avLst/>
-          </a:prstGeom>
-          <a:solidFill>
-            <a:srgbClr val="1F5C7A"/>
-          </a:solidFill>
-          <a:ln>
-            <a:noFill/>
-          </a:ln>
-        </p:spPr>
-        <p:txBody>
-          <a:bodyPr wrap="square" lIns="182880" tIns="45720" rIns="182880" bIns="45720" rtlCol="0" anchor="ctr">
-            <a:normAutofit/>
-          </a:bodyPr>
-          <a:lstStyle/>
-          <a:p>
-            <a:pPr marL="0" indent="0" algn="l">
-              <a:buNone/>
-            </a:pPr>
-            <a:r>
-              <a:rPr lang="en-US" sz="1500" b="1" dirty="0">
-                <a:solidFill>
-                  <a:srgbClr val="FFFFFF"/>
-                </a:solidFill>
-                <a:latin typeface="Arial"/>
-                <a:cs typeface="Arial"/>
-              </a:rPr>
-              <a:t>DISCUSSION   |   7 min</a:t>
-            </a:r>
-          </a:p>
-        </p:txBody>
-      </p:sp>
-      <p:sp>
-        <p:nvSpPr>
-          <p:cNvPr id="51" name="Steps"/>
+      <p:graphicFrame>
+        <p:nvGraphicFramePr>
+          <p:cNvPr id="30" name="Table"/>
+          <p:cNvGraphicFramePr/>
+          <p:nvPr/>
+        </p:nvGraphicFramePr>
+        <p:xfrm>
+          <a:off x="457200" y="1935901"/>
+          <a:ext cx="11277600" cy="2085920"/>
+        </p:xfrm>
+        <a:graphic>
+          <a:graphicData uri="http://schemas.openxmlformats.org/drawingml/2006/table">
+            <a:tbl>
+              <a:tblPr firstRow="1" bandRow="1">
+                <a:tableStyleId>{5C22544A-7EE6-4342-B048-85BDC9FD1C3A}</a:tableStyleId>
+              </a:tblPr>
+              <a:tblGrid>
+                <a:gridCol w="5638800"/>
+                <a:gridCol w="5638800"/>
+              </a:tblGrid>
+              <a:tr h="380000">
+                <a:tc>
+                  <a:txBody>
+                    <a:bodyPr/>
+                    <a:lstStyle/>
+                    <a:p>
+                      <a:pPr algn="l"/>
+                      <a:r>
+                        <a:rPr lang="en-US" sz="1500" b="1" dirty="0">
+                          <a:solidFill>
+                            <a:srgbClr val="FFFFFF"/>
+                          </a:solidFill>
+                          <a:latin typeface="Arial"/>
+                          <a:cs typeface="Arial"/>
+                        </a:rPr>
+                        <a:t>When</a:t>
+                      </a:r>
+                    </a:p>
+                  </a:txBody>
+                  <a:tcPr marL="73152" marR="73152" marT="45720" marB="45720" anchor="ctr">
+                    <a:solidFill>
+                      <a:srgbClr val="0D7377"/>
+                    </a:solidFill>
+                  </a:tcPr>
+                </a:tc>
+                <a:tc>
+                  <a:txBody>
+                    <a:bodyPr/>
+                    <a:lstStyle/>
+                    <a:p>
+                      <a:pPr algn="l"/>
+                      <a:r>
+                        <a:rPr lang="en-US" sz="1500" b="1" dirty="0">
+                          <a:solidFill>
+                            <a:srgbClr val="FFFFFF"/>
+                          </a:solidFill>
+                          <a:latin typeface="Arial"/>
+                          <a:cs typeface="Arial"/>
+                        </a:rPr>
+                        <a:t>What you do</a:t>
+                      </a:r>
+                    </a:p>
+                  </a:txBody>
+                  <a:tcPr marL="73152" marR="73152" marT="45720" marB="45720" anchor="ctr">
+                    <a:solidFill>
+                      <a:srgbClr val="0D7377"/>
+                    </a:solidFill>
+                  </a:tcPr>
+                </a:tc>
+              </a:tr>
+              <a:tr h="568640">
+                <a:tc>
+                  <a:txBody>
+                    <a:bodyPr/>
+                    <a:lstStyle/>
+                    <a:p>
+                      <a:pPr algn="l"/>
+                      <a:r>
+                        <a:rPr lang="en-US" sz="1500" dirty="0">
+                          <a:solidFill>
+                            <a:srgbClr val="000000"/>
+                          </a:solidFill>
+                          <a:latin typeface="Arial"/>
+                          <a:cs typeface="Arial"/>
+                        </a:rPr>
+                        <a:t>23:59, Saturday 19 December (Session 8)</a:t>
+                      </a:r>
+                    </a:p>
+                  </a:txBody>
+                  <a:tcPr marL="73152" marR="73152" marT="45720" marB="45720" anchor="ctr">
+                    <a:solidFill>
+                      <a:srgbClr val="FFFFFF"/>
+                    </a:solidFill>
+                  </a:tcPr>
+                </a:tc>
+                <a:tc>
+                  <a:txBody>
+                    <a:bodyPr/>
+                    <a:lstStyle/>
+                    <a:p>
+                      <a:pPr algn="l"/>
+                      <a:r>
+                        <a:rPr lang="en-US" sz="1500" dirty="0">
+                          <a:solidFill>
+                            <a:srgbClr val="000000"/>
+                          </a:solidFill>
+                          <a:latin typeface="Arial"/>
+                          <a:cs typeface="Arial"/>
+                        </a:rPr>
+                        <a:t>Email your Results section to your reviewer and the course lead</a:t>
+                      </a:r>
+                    </a:p>
+                  </a:txBody>
+                  <a:tcPr marL="73152" marR="73152" marT="45720" marB="45720" anchor="ctr">
+                    <a:solidFill>
+                      <a:srgbClr val="FFFFFF"/>
+                    </a:solidFill>
+                  </a:tcPr>
+                </a:tc>
+              </a:tr>
+              <a:tr h="568640">
+                <a:tc>
+                  <a:txBody>
+                    <a:bodyPr/>
+                    <a:lstStyle/>
+                    <a:p>
+                      <a:pPr algn="l"/>
+                      <a:r>
+                        <a:rPr lang="en-US" sz="1500" dirty="0">
+                          <a:solidFill>
+                            <a:srgbClr val="000000"/>
+                          </a:solidFill>
+                          <a:latin typeface="Arial"/>
+                          <a:cs typeface="Arial"/>
+                        </a:rPr>
+                        <a:t>Saturday 2 January</a:t>
+                      </a:r>
+                    </a:p>
+                  </a:txBody>
+                  <a:tcPr marL="73152" marR="73152" marT="45720" marB="45720" anchor="ctr">
+                    <a:solidFill>
+                      <a:srgbClr val="F5F9FA"/>
+                    </a:solidFill>
+                  </a:tcPr>
+                </a:tc>
+                <a:tc>
+                  <a:txBody>
+                    <a:bodyPr/>
+                    <a:lstStyle/>
+                    <a:p>
+                      <a:pPr algn="l"/>
+                      <a:r>
+                        <a:rPr lang="en-US" sz="1500" dirty="0">
+                          <a:solidFill>
+                            <a:srgbClr val="000000"/>
+                          </a:solidFill>
+                          <a:latin typeface="Arial"/>
+                          <a:cs typeface="Arial"/>
+                        </a:rPr>
+                        <a:t>Reviewers email their review to the author and the course lead</a:t>
+                      </a:r>
+                    </a:p>
+                  </a:txBody>
+                  <a:tcPr marL="73152" marR="73152" marT="45720" marB="45720" anchor="ctr">
+                    <a:solidFill>
+                      <a:srgbClr val="F5F9FA"/>
+                    </a:solidFill>
+                  </a:tcPr>
+                </a:tc>
+              </a:tr>
+              <a:tr h="568640">
+                <a:tc>
+                  <a:txBody>
+                    <a:bodyPr/>
+                    <a:lstStyle/>
+                    <a:p>
+                      <a:pPr algn="l"/>
+                      <a:r>
+                        <a:rPr lang="en-US" sz="1500" dirty="0">
+                          <a:solidFill>
+                            <a:srgbClr val="000000"/>
+                          </a:solidFill>
+                          <a:latin typeface="Arial"/>
+                          <a:cs typeface="Arial"/>
+                        </a:rPr>
+                        <a:t>Saturday 30 January</a:t>
+                      </a:r>
+                    </a:p>
+                  </a:txBody>
+                  <a:tcPr marL="73152" marR="73152" marT="45720" marB="45720" anchor="ctr">
+                    <a:solidFill>
+                      <a:srgbClr val="FFFFFF"/>
+                    </a:solidFill>
+                  </a:tcPr>
+                </a:tc>
+                <a:tc>
+                  <a:txBody>
+                    <a:bodyPr/>
+                    <a:lstStyle/>
+                    <a:p>
+                      <a:pPr algn="l"/>
+                      <a:r>
+                        <a:rPr lang="en-US" sz="1500" dirty="0">
+                          <a:solidFill>
+                            <a:srgbClr val="000000"/>
+                          </a:solidFill>
+                          <a:latin typeface="Arial"/>
+                          <a:cs typeface="Arial"/>
+                        </a:rPr>
+                        <a:t>Email your revised Results section and response letter to the course lead</a:t>
+                      </a:r>
+                    </a:p>
+                  </a:txBody>
+                  <a:tcPr marL="73152" marR="73152" marT="45720" marB="45720" anchor="ctr">
+                    <a:solidFill>
+                      <a:srgbClr val="FFFFFF"/>
+                    </a:solidFill>
+                  </a:tcPr>
+                </a:tc>
+              </a:tr>
+            </a:tbl>
+          </a:graphicData>
+        </a:graphic>
+      </p:graphicFrame>
+      <p:sp>
+        <p:nvSpPr>
+          <p:cNvPr id="31" name="Caption"/>
           <p:cNvSpPr txBox="1"/>
           <p:nvPr/>
         </p:nvSpPr>
         <p:spPr>
           <a:xfrm>
-            <a:off x="457200" y="1720000"/>
-            <a:ext cx="6766560" cy="3510000"/>
+            <a:off x="457200" y="4111821"/>
+            <a:ext cx="11277600" cy="356375"/>
           </a:xfrm>
           <a:prstGeom prst="rect">
             <a:avLst/>
@@ -27427,293 +27331,18 @@
           <a:bodyPr wrap="square" lIns="91440" tIns="45720" rIns="91440" bIns="45720" rtlCol="0" anchor="t"/>
           <a:lstStyle/>
           <a:p>
-            <a:pPr marL="380000" indent="-380000" algn="l">
-              <a:lnSpc>
-                <a:spcPct val="104000"/>
-              </a:lnSpc>
-              <a:spcBef>
-                <a:spcPts val="450"/>
-              </a:spcBef>
-              <a:buClr>
-                <a:srgbClr val="1F5C7A"/>
-              </a:buClr>
-              <a:buFont typeface="Arial"/>
-              <a:buChar char="•"/>
-            </a:pPr>
-            <a:r>
-              <a:rPr lang="en-US" sz="1650" dirty="0">
-                <a:solidFill>
-                  <a:srgbClr val="000000"/>
-                </a:solidFill>
-                <a:latin typeface="Arial"/>
-                <a:cs typeface="Arial"/>
-              </a:rPr>
-              <a:t>Three take-home messages (right)</a:t>
-            </a:r>
-          </a:p>
-          <a:p>
-            <a:pPr marL="380000" indent="-380000" algn="l">
-              <a:lnSpc>
-                <a:spcPct val="104000"/>
-              </a:lnSpc>
-              <a:spcBef>
-                <a:spcPts val="450"/>
-              </a:spcBef>
-              <a:buClr>
-                <a:srgbClr val="1F5C7A"/>
-              </a:buClr>
-              <a:buFont typeface="Arial"/>
-              <a:buChar char="•"/>
-            </a:pPr>
-            <a:r>
-              <a:rPr lang="en-US" sz="1650" dirty="0">
-                <a:solidFill>
-                  <a:srgbClr val="000000"/>
-                </a:solidFill>
-                <a:latin typeface="Arial"/>
-                <a:cs typeface="Arial"/>
-              </a:rPr>
-              <a:t>Exit question in the chat: 'Who consents for a sedated patient in septic shock, and when?'</a:t>
-            </a:r>
-          </a:p>
-          <a:p>
-            <a:pPr marL="380000" indent="-380000" algn="l">
-              <a:lnSpc>
-                <a:spcPct val="104000"/>
-              </a:lnSpc>
-              <a:spcBef>
-                <a:spcPts val="450"/>
-              </a:spcBef>
-              <a:buClr>
-                <a:srgbClr val="1F5C7A"/>
-              </a:buClr>
-              <a:buFont typeface="Arial"/>
-              <a:buChar char="•"/>
-            </a:pPr>
-            <a:r>
-              <a:rPr lang="en-US" sz="1650" dirty="0">
-                <a:solidFill>
-                  <a:srgbClr val="000000"/>
-                </a:solidFill>
-                <a:latin typeface="Arial"/>
-                <a:cs typeface="Arial"/>
-              </a:rPr>
-              <a:t>Homework 1: write Part 4 of your own proposal</a:t>
-            </a:r>
-          </a:p>
-          <a:p>
-            <a:pPr marL="380000" indent="-380000" algn="l">
-              <a:lnSpc>
-                <a:spcPct val="104000"/>
-              </a:lnSpc>
-              <a:spcBef>
-                <a:spcPts val="450"/>
-              </a:spcBef>
-              <a:buClr>
-                <a:srgbClr val="1F5C7A"/>
-              </a:buClr>
-              <a:buFont typeface="Arial"/>
-              <a:buChar char="•"/>
-            </a:pPr>
-            <a:r>
-              <a:rPr lang="en-US" sz="1650" dirty="0">
-                <a:solidFill>
-                  <a:srgbClr val="000000"/>
-                </a:solidFill>
-                <a:latin typeface="Arial"/>
-                <a:cs typeface="Arial"/>
-              </a:rPr>
-              <a:t>Homework 2: finish your Methods and Results draft before Session 8</a:t>
-            </a:r>
-          </a:p>
-          <a:p>
-            <a:pPr marL="380000" indent="-380000" algn="l">
-              <a:lnSpc>
-                <a:spcPct val="104000"/>
-              </a:lnSpc>
-              <a:spcBef>
-                <a:spcPts val="450"/>
-              </a:spcBef>
-              <a:buClr>
-                <a:srgbClr val="1F5C7A"/>
-              </a:buClr>
-              <a:buFont typeface="Arial"/>
-              <a:buChar char="•"/>
-            </a:pPr>
-            <a:r>
-              <a:rPr lang="en-US" sz="1650" dirty="0">
-                <a:solidFill>
-                  <a:srgbClr val="000000"/>
-                </a:solidFill>
-                <a:latin typeface="Arial"/>
-                <a:cs typeface="Arial"/>
-              </a:rPr>
-              <a:t>Homework 3: prepare your 6 presentation slides (everyone submits them)</a:t>
-            </a:r>
-          </a:p>
-        </p:txBody>
-      </p:sp>
-      <p:sp>
-        <p:nvSpPr>
-          <p:cNvPr id="52" name="Side"/>
-          <p:cNvSpPr/>
-          <p:nvPr/>
-        </p:nvSpPr>
-        <p:spPr>
-          <a:xfrm>
-            <a:off x="7423760" y="1720000"/>
-            <a:ext cx="4311040" cy="2168030"/>
-          </a:xfrm>
-          <a:prstGeom prst="roundRect">
-            <a:avLst>
-              <a:gd name="adj" fmla="val 5000"/>
-            </a:avLst>
-          </a:prstGeom>
-          <a:solidFill>
-            <a:srgbClr val="EAF2F5"/>
-          </a:solidFill>
-          <a:ln>
-            <a:noFill/>
-          </a:ln>
-        </p:spPr>
-        <p:txBody>
-          <a:bodyPr wrap="square" lIns="137160" tIns="91440" rIns="137160" bIns="91440" rtlCol="0" anchor="ctr">
-            <a:normAutofit/>
-          </a:bodyPr>
-          <a:lstStyle/>
-          <a:p>
-            <a:pPr marL="0" indent="0" algn="ctr">
-              <a:buNone/>
-            </a:pPr>
-            <a:r>
-              <a:rPr lang="en-US" sz="1600" b="1" dirty="0">
-                <a:solidFill>
-                  <a:srgbClr val="1F5C7A"/>
-                </a:solidFill>
-                <a:latin typeface="Arial"/>
-                <a:cs typeface="Arial"/>
-              </a:rPr>
-              <a:t>Take home</a:t>
-            </a:r>
-          </a:p>
-          <a:p>
-            <a:pPr marL="0" indent="0" algn="ctr">
-              <a:lnSpc>
-                <a:spcPct val="104000"/>
-              </a:lnSpc>
-              <a:spcBef>
-                <a:spcPts val="300"/>
-              </a:spcBef>
-              <a:buNone/>
-            </a:pPr>
-            <a:r>
-              <a:rPr lang="en-US" sz="1500" dirty="0">
-                <a:solidFill>
-                  <a:srgbClr val="000000"/>
-                </a:solidFill>
-                <a:latin typeface="Arial"/>
-                <a:cs typeface="Arial"/>
-              </a:rPr>
-              <a:t>No approval, no data: not even 'a few patients'</a:t>
-            </a:r>
-          </a:p>
-          <a:p>
-            <a:pPr marL="0" indent="0" algn="ctr">
-              <a:lnSpc>
-                <a:spcPct val="104000"/>
-              </a:lnSpc>
-              <a:spcBef>
-                <a:spcPts val="300"/>
-              </a:spcBef>
-              <a:buNone/>
-            </a:pPr>
-            <a:r>
-              <a:rPr lang="en-US" sz="1500" dirty="0">
-                <a:solidFill>
-                  <a:srgbClr val="000000"/>
-                </a:solidFill>
-                <a:latin typeface="Arial"/>
-                <a:cs typeface="Arial"/>
-              </a:rPr>
-              <a:t>Every author meets all four criteria. Declare every interest</a:t>
-            </a:r>
-          </a:p>
-          <a:p>
-            <a:pPr marL="0" indent="0" algn="ctr">
-              <a:lnSpc>
-                <a:spcPct val="104000"/>
-              </a:lnSpc>
-              <a:spcBef>
-                <a:spcPts val="300"/>
-              </a:spcBef>
-              <a:buNone/>
-            </a:pPr>
-            <a:r>
-              <a:rPr lang="en-US" sz="1500" dirty="0">
-                <a:solidFill>
-                  <a:srgbClr val="000000"/>
-                </a:solidFill>
-                <a:latin typeface="Arial"/>
-                <a:cs typeface="Arial"/>
-              </a:rPr>
-              <a:t>Methods = what you did. Results = numbers with CIs, no opinions</a:t>
-            </a:r>
-          </a:p>
-        </p:txBody>
-      </p:sp>
-      <p:sp>
-        <p:nvSpPr>
-          <p:cNvPr id="53" name="Deliverable"/>
-          <p:cNvSpPr/>
-          <p:nvPr/>
-        </p:nvSpPr>
-        <p:spPr>
-          <a:xfrm>
-            <a:off x="457200" y="5350000"/>
-            <a:ext cx="11277600" cy="600000"/>
-          </a:xfrm>
-          <a:prstGeom prst="roundRect">
-            <a:avLst>
-              <a:gd name="adj" fmla="val 12000"/>
-            </a:avLst>
-          </a:prstGeom>
-          <a:solidFill>
-            <a:srgbClr val="FFFFFF"/>
-          </a:solidFill>
-          <a:ln w="15875">
-            <a:solidFill>
-              <a:srgbClr val="1F5C7A"/>
-            </a:solidFill>
-          </a:ln>
-        </p:spPr>
-        <p:txBody>
-          <a:bodyPr wrap="square" lIns="182880" tIns="45720" rIns="182880" bIns="45720" rtlCol="0" anchor="ctr">
-            <a:normAutofit/>
-          </a:bodyPr>
-          <a:lstStyle/>
-          <a:p>
-            <a:pPr marL="0" indent="0" algn="ctr">
-              <a:buNone/>
-            </a:pPr>
-            <a:r>
-              <a:rPr lang="en-US" sz="1300" b="1" dirty="0">
-                <a:solidFill>
-                  <a:srgbClr val="1F5C7A"/>
-                </a:solidFill>
-                <a:latin typeface="Arial"/>
-                <a:cs typeface="Arial"/>
-              </a:rPr>
-              <a:t>OUTPUT   </a:t>
-            </a:r>
-            <a:r>
-              <a:rPr lang="en-US" sz="1500" dirty="0">
-                <a:solidFill>
-                  <a:srgbClr val="000000"/>
-                </a:solidFill>
-                <a:latin typeface="Arial"/>
-                <a:cs typeface="Arial"/>
-              </a:rPr>
-              <a:t>Exit answers read before Session 8. Part 4 and Methods + Results drafted</a:t>
+            <a:pPr marL="0" indent="0" algn="l">
+              <a:buNone/>
+            </a:pPr>
+            <a:r>
+              <a:rPr lang="en-US" sz="1300" i="1" dirty="0">
+                <a:solidFill>
+                  <a:srgbClr val="595959"/>
+                </a:solidFill>
+                <a:latin typeface="Arial"/>
+                <a:cs typeface="Arial"/>
+              </a:rPr>
+              <a:t>Reviewers were assigned at random: see the list on screen and in your email. Course lead: myluong1710@gmail.com</a:t>
             </a:r>
           </a:p>
         </p:txBody>
@@ -27881,7 +27510,7 @@
                 <a:latin typeface="Arial"/>
                 <a:cs typeface="Arial"/>
               </a:rPr>
-              <a:t>Extra slides  |  Session 7</a:t>
+              <a:t>Wrap-up, exit question and homework</a:t>
             </a:r>
           </a:p>
         </p:txBody>
@@ -27916,14 +27545,57 @@
       </p:sp>
       <p:sp>
         <p:nvSpPr>
-          <p:cNvPr id="20" name="Statement"/>
+          <p:cNvPr id="50" name="Banner"/>
+          <p:cNvSpPr/>
+          <p:nvPr/>
+        </p:nvSpPr>
+        <p:spPr>
+          <a:xfrm>
+            <a:off x="457200" y="1120000"/>
+            <a:ext cx="11277600" cy="470000"/>
+          </a:xfrm>
+          <a:prstGeom prst="rect">
+            <a:avLst/>
+          </a:prstGeom>
+          <a:solidFill>
+            <a:srgbClr val="1F5C7A"/>
+          </a:solidFill>
+          <a:ln>
+            <a:noFill/>
+          </a:ln>
+        </p:spPr>
+        <p:txBody>
+          <a:bodyPr wrap="square" lIns="182880" tIns="45720" rIns="182880" bIns="45720" rtlCol="0" anchor="ctr">
+            <a:normAutofit/>
+          </a:bodyPr>
+          <a:lstStyle/>
+          <a:p>
+            <a:pPr marL="0" indent="0" algn="l">
+              <a:buNone/>
+            </a:pPr>
+            <a:r>
+              <a:rPr lang="en-US" sz="1500" b="1" dirty="0">
+                <a:solidFill>
+                  <a:srgbClr val="FFFFFF"/>
+                </a:solidFill>
+                <a:latin typeface="Arial"/>
+                <a:cs typeface="Arial"/>
+              </a:rPr>
+              <a:t>DISCUSSION   |   7 min</a:t>
+            </a:r>
+          </a:p>
+        </p:txBody>
+      </p:sp>
+      <p:sp>
+        <p:nvSpPr>
+          <p:cNvPr id="51" name="Steps"/>
           <p:cNvSpPr txBox="1"/>
           <p:nvPr/>
         </p:nvSpPr>
         <p:spPr>
           <a:xfrm>
-            <a:off x="1057200" y="1280000"/>
-            <a:ext cx="10077600" cy="4470000"/>
+            <a:off x="457200" y="1720000"/>
+            <a:ext cx="6766560" cy="3510000"/>
           </a:xfrm>
           <a:prstGeom prst="rect">
             <a:avLst/>
@@ -27934,42 +27606,296 @@
           </a:ln>
         </p:spPr>
         <p:txBody>
-          <a:bodyPr wrap="square" lIns="91440" tIns="45720" rIns="91440" bIns="45720" rtlCol="0" anchor="ctr"/>
-          <a:lstStyle/>
+          <a:bodyPr wrap="square" lIns="91440" tIns="45720" rIns="91440" bIns="45720" rtlCol="0" anchor="t"/>
+          <a:lstStyle/>
+          <a:p>
+            <a:pPr marL="380000" indent="-380000" algn="l">
+              <a:lnSpc>
+                <a:spcPct val="104000"/>
+              </a:lnSpc>
+              <a:spcBef>
+                <a:spcPts val="450"/>
+              </a:spcBef>
+              <a:buClr>
+                <a:srgbClr val="1F5C7A"/>
+              </a:buClr>
+              <a:buFont typeface="Arial"/>
+              <a:buChar char="•"/>
+            </a:pPr>
+            <a:r>
+              <a:rPr lang="en-US" sz="1650" dirty="0">
+                <a:solidFill>
+                  <a:srgbClr val="000000"/>
+                </a:solidFill>
+                <a:latin typeface="Arial"/>
+                <a:cs typeface="Arial"/>
+              </a:rPr>
+              <a:t>Three take-home messages (right)</a:t>
+            </a:r>
+          </a:p>
+          <a:p>
+            <a:pPr marL="380000" indent="-380000" algn="l">
+              <a:lnSpc>
+                <a:spcPct val="104000"/>
+              </a:lnSpc>
+              <a:spcBef>
+                <a:spcPts val="450"/>
+              </a:spcBef>
+              <a:buClr>
+                <a:srgbClr val="1F5C7A"/>
+              </a:buClr>
+              <a:buFont typeface="Arial"/>
+              <a:buChar char="•"/>
+            </a:pPr>
+            <a:r>
+              <a:rPr lang="en-US" sz="1650" dirty="0">
+                <a:solidFill>
+                  <a:srgbClr val="000000"/>
+                </a:solidFill>
+                <a:latin typeface="Arial"/>
+                <a:cs typeface="Arial"/>
+              </a:rPr>
+              <a:t>Exit question in the chat: 'Who consents for a sedated patient in septic shock, and when?'</a:t>
+            </a:r>
+          </a:p>
+          <a:p>
+            <a:pPr marL="380000" indent="-380000" algn="l">
+              <a:lnSpc>
+                <a:spcPct val="104000"/>
+              </a:lnSpc>
+              <a:spcBef>
+                <a:spcPts val="450"/>
+              </a:spcBef>
+              <a:buClr>
+                <a:srgbClr val="1F5C7A"/>
+              </a:buClr>
+              <a:buFont typeface="Arial"/>
+              <a:buChar char="•"/>
+            </a:pPr>
+            <a:r>
+              <a:rPr lang="en-US" sz="1650" dirty="0">
+                <a:solidFill>
+                  <a:srgbClr val="000000"/>
+                </a:solidFill>
+                <a:latin typeface="Arial"/>
+                <a:cs typeface="Arial"/>
+              </a:rPr>
+              <a:t>Homework 1: write Part 4 of your own proposal</a:t>
+            </a:r>
+          </a:p>
+          <a:p>
+            <a:pPr marL="380000" indent="-380000" algn="l">
+              <a:lnSpc>
+                <a:spcPct val="104000"/>
+              </a:lnSpc>
+              <a:spcBef>
+                <a:spcPts val="450"/>
+              </a:spcBef>
+              <a:buClr>
+                <a:srgbClr val="1F5C7A"/>
+              </a:buClr>
+              <a:buFont typeface="Arial"/>
+              <a:buChar char="•"/>
+            </a:pPr>
+            <a:r>
+              <a:rPr lang="en-US" sz="1650" dirty="0">
+                <a:solidFill>
+                  <a:srgbClr val="000000"/>
+                </a:solidFill>
+                <a:latin typeface="Arial"/>
+                <a:cs typeface="Arial"/>
+              </a:rPr>
+              <a:t>Homework 2: write your Results section (due 23:59 on the day of Session 8)</a:t>
+            </a:r>
+          </a:p>
+          <a:p>
+            <a:pPr marL="380000" indent="-380000" algn="l">
+              <a:lnSpc>
+                <a:spcPct val="104000"/>
+              </a:lnSpc>
+              <a:spcBef>
+                <a:spcPts val="450"/>
+              </a:spcBef>
+              <a:buClr>
+                <a:srgbClr val="1F5C7A"/>
+              </a:buClr>
+              <a:buFont typeface="Arial"/>
+              <a:buChar char="•"/>
+            </a:pPr>
+            <a:r>
+              <a:rPr lang="en-US" sz="1650" dirty="0">
+                <a:solidFill>
+                  <a:srgbClr val="000000"/>
+                </a:solidFill>
+                <a:latin typeface="Arial"/>
+                <a:cs typeface="Arial"/>
+              </a:rPr>
+              <a:t>Homework 3: prepare your 6 presentation slides (everyone submits them)</a:t>
+            </a:r>
+          </a:p>
+        </p:txBody>
+      </p:sp>
+      <p:sp>
+        <p:nvSpPr>
+          <p:cNvPr id="52" name="Side"/>
+          <p:cNvSpPr/>
+          <p:nvPr/>
+        </p:nvSpPr>
+        <p:spPr>
+          <a:xfrm>
+            <a:off x="7423760" y="1720000"/>
+            <a:ext cx="4311040" cy="1929905"/>
+          </a:xfrm>
+          <a:prstGeom prst="roundRect">
+            <a:avLst>
+              <a:gd name="adj" fmla="val 5000"/>
+            </a:avLst>
+          </a:prstGeom>
+          <a:solidFill>
+            <a:srgbClr val="EAF2F5"/>
+          </a:solidFill>
+          <a:ln>
+            <a:noFill/>
+          </a:ln>
+        </p:spPr>
+        <p:txBody>
+          <a:bodyPr wrap="square" lIns="137160" tIns="91440" rIns="137160" bIns="91440" rtlCol="0" anchor="ctr">
+            <a:normAutofit/>
+          </a:bodyPr>
+          <a:lstStyle/>
+          <a:p>
+            <a:pPr marL="0" indent="0" algn="ctr">
+              <a:buNone/>
+            </a:pPr>
+            <a:r>
+              <a:rPr lang="en-US" sz="1600" b="1" dirty="0">
+                <a:solidFill>
+                  <a:srgbClr val="1F5C7A"/>
+                </a:solidFill>
+                <a:latin typeface="Arial"/>
+                <a:cs typeface="Arial"/>
+              </a:rPr>
+              <a:t>Take home</a:t>
+            </a:r>
+          </a:p>
           <a:p>
             <a:pPr marL="0" indent="0" algn="ctr">
               <a:lnSpc>
-                <a:spcPct val="110000"/>
+                <a:spcPct val="104000"/>
               </a:lnSpc>
-              <a:buNone/>
-            </a:pPr>
-            <a:r>
-              <a:rPr lang="en-US" sz="3200" b="1" dirty="0">
-                <a:solidFill>
-                  <a:srgbClr val="0D7377"/>
-                </a:solidFill>
-                <a:latin typeface="Arial"/>
-                <a:cs typeface="Arial"/>
-              </a:rPr>
-              <a:t>Extra slides: Session 7</a:t>
+              <a:spcBef>
+                <a:spcPts val="300"/>
+              </a:spcBef>
+              <a:buNone/>
+            </a:pPr>
+            <a:r>
+              <a:rPr lang="en-US" sz="1500" dirty="0">
+                <a:solidFill>
+                  <a:srgbClr val="000000"/>
+                </a:solidFill>
+                <a:latin typeface="Arial"/>
+                <a:cs typeface="Arial"/>
+              </a:rPr>
+              <a:t>No approval, no data: not even 'a few patients'</a:t>
             </a:r>
           </a:p>
           <a:p>
             <a:pPr marL="0" indent="0" algn="ctr">
+              <a:lnSpc>
+                <a:spcPct val="104000"/>
+              </a:lnSpc>
               <a:spcBef>
-                <a:spcPts val="1200"/>
+                <a:spcPts val="300"/>
               </a:spcBef>
               <a:buNone/>
             </a:pPr>
             <a:r>
-              <a:rPr lang="en-US" sz="1900" i="1" dirty="0">
-                <a:solidFill>
-                  <a:srgbClr val="595959"/>
-                </a:solidFill>
-                <a:latin typeface="Arial"/>
-                <a:cs typeface="Arial"/>
-              </a:rPr>
-              <a:t>Use only if time allows, or for self-study</a:t>
+              <a:rPr lang="en-US" sz="1500" dirty="0">
+                <a:solidFill>
+                  <a:srgbClr val="000000"/>
+                </a:solidFill>
+                <a:latin typeface="Arial"/>
+                <a:cs typeface="Arial"/>
+              </a:rPr>
+              <a:t>Every author meets all four criteria. Declare every interest</a:t>
+            </a:r>
+          </a:p>
+          <a:p>
+            <a:pPr marL="0" indent="0" algn="ctr">
+              <a:lnSpc>
+                <a:spcPct val="104000"/>
+              </a:lnSpc>
+              <a:spcBef>
+                <a:spcPts val="300"/>
+              </a:spcBef>
+              <a:buNone/>
+            </a:pPr>
+            <a:r>
+              <a:rPr lang="en-US" sz="1500" dirty="0">
+                <a:solidFill>
+                  <a:srgbClr val="000000"/>
+                </a:solidFill>
+                <a:latin typeface="Arial"/>
+                <a:cs typeface="Arial"/>
+              </a:rPr>
+              <a:t>Results = numbers with CIs, no opinions</a:t>
+            </a:r>
+          </a:p>
+        </p:txBody>
+      </p:sp>
+      <p:sp>
+        <p:nvSpPr>
+          <p:cNvPr id="53" name="Deliverable"/>
+          <p:cNvSpPr/>
+          <p:nvPr/>
+        </p:nvSpPr>
+        <p:spPr>
+          <a:xfrm>
+            <a:off x="457200" y="5350000"/>
+            <a:ext cx="11277600" cy="600000"/>
+          </a:xfrm>
+          <a:prstGeom prst="roundRect">
+            <a:avLst>
+              <a:gd name="adj" fmla="val 12000"/>
+            </a:avLst>
+          </a:prstGeom>
+          <a:solidFill>
+            <a:srgbClr val="FFFFFF"/>
+          </a:solidFill>
+          <a:ln w="15875">
+            <a:solidFill>
+              <a:srgbClr val="1F5C7A"/>
+            </a:solidFill>
+          </a:ln>
+        </p:spPr>
+        <p:txBody>
+          <a:bodyPr wrap="square" lIns="182880" tIns="45720" rIns="182880" bIns="45720" rtlCol="0" anchor="ctr">
+            <a:normAutofit/>
+          </a:bodyPr>
+          <a:lstStyle/>
+          <a:p>
+            <a:pPr marL="0" indent="0" algn="ctr">
+              <a:buNone/>
+            </a:pPr>
+            <a:r>
+              <a:rPr lang="en-US" sz="1300" b="1" dirty="0">
+                <a:solidFill>
+                  <a:srgbClr val="1F5C7A"/>
+                </a:solidFill>
+                <a:latin typeface="Arial"/>
+                <a:cs typeface="Arial"/>
+              </a:rPr>
+              <a:t>OUTPUT   </a:t>
+            </a:r>
+            <a:r>
+              <a:rPr lang="en-US" sz="1500" dirty="0">
+                <a:solidFill>
+                  <a:srgbClr val="000000"/>
+                </a:solidFill>
+                <a:latin typeface="Arial"/>
+                <a:cs typeface="Arial"/>
+              </a:rPr>
+              <a:t>Exit answers read before Session 8. Part 4 and the Results drafted</a:t>
             </a:r>
           </a:p>
         </p:txBody>
@@ -28137,7 +28063,7 @@
                 <a:latin typeface="Arial"/>
                 <a:cs typeface="Arial"/>
               </a:rPr>
-              <a:t>Check: register or not?</a:t>
+              <a:t>Extra slides  |  Session 7</a:t>
             </a:r>
           </a:p>
         </p:txBody>
@@ -28172,57 +28098,14 @@
       </p:sp>
       <p:sp>
         <p:nvSpPr>
-          <p:cNvPr id="50" name="Banner"/>
-          <p:cNvSpPr/>
-          <p:nvPr/>
-        </p:nvSpPr>
-        <p:spPr>
-          <a:xfrm>
-            <a:off x="457200" y="1120000"/>
-            <a:ext cx="11277600" cy="470000"/>
-          </a:xfrm>
-          <a:prstGeom prst="rect">
-            <a:avLst/>
-          </a:prstGeom>
-          <a:solidFill>
-            <a:srgbClr val="6C3483"/>
-          </a:solidFill>
-          <a:ln>
-            <a:noFill/>
-          </a:ln>
-        </p:spPr>
-        <p:txBody>
-          <a:bodyPr wrap="square" lIns="182880" tIns="45720" rIns="182880" bIns="45720" rtlCol="0" anchor="ctr">
-            <a:normAutofit/>
-          </a:bodyPr>
-          <a:lstStyle/>
-          <a:p>
-            <a:pPr marL="0" indent="0" algn="l">
-              <a:buNone/>
-            </a:pPr>
-            <a:r>
-              <a:rPr lang="en-US" sz="1500" b="1" dirty="0">
-                <a:solidFill>
-                  <a:srgbClr val="FFFFFF"/>
-                </a:solidFill>
-                <a:latin typeface="Arial"/>
-                <a:cs typeface="Arial"/>
-              </a:rPr>
-              <a:t>QUICK QUIZ   |   2 min</a:t>
-            </a:r>
-          </a:p>
-        </p:txBody>
-      </p:sp>
-      <p:sp>
-        <p:nvSpPr>
-          <p:cNvPr id="51" name="Steps"/>
+          <p:cNvPr id="20" name="Statement"/>
           <p:cNvSpPr txBox="1"/>
           <p:nvPr/>
         </p:nvSpPr>
         <p:spPr>
           <a:xfrm>
-            <a:off x="457200" y="1720000"/>
-            <a:ext cx="6766560" cy="4230000"/>
+            <a:off x="1057200" y="1280000"/>
+            <a:ext cx="10077600" cy="4470000"/>
           </a:xfrm>
           <a:prstGeom prst="rect">
             <a:avLst/>
@@ -28233,235 +28116,42 @@
           </a:ln>
         </p:spPr>
         <p:txBody>
-          <a:bodyPr wrap="square" lIns="91440" tIns="45720" rIns="91440" bIns="45720" rtlCol="0" anchor="t"/>
-          <a:lstStyle/>
-          <a:p>
-            <a:pPr marL="380000" indent="-380000" algn="l">
-              <a:lnSpc>
-                <a:spcPct val="104000"/>
-              </a:lnSpc>
-              <a:spcBef>
-                <a:spcPts val="450"/>
-              </a:spcBef>
-              <a:buClr>
-                <a:srgbClr val="6C3483"/>
-              </a:buClr>
-              <a:buFont typeface="Arial"/>
-              <a:buChar char="•"/>
-            </a:pPr>
-            <a:r>
-              <a:rPr lang="en-US" sz="1650" dirty="0">
-                <a:solidFill>
-                  <a:srgbClr val="000000"/>
-                </a:solidFill>
-                <a:latin typeface="Arial"/>
-                <a:cs typeface="Arial"/>
-              </a:rPr>
-              <a:t>A randomised trial of restrictive vs usual fluids in septic shock</a:t>
-            </a:r>
-          </a:p>
-          <a:p>
-            <a:pPr marL="380000" indent="-380000" algn="l">
-              <a:lnSpc>
-                <a:spcPct val="104000"/>
-              </a:lnSpc>
-              <a:spcBef>
-                <a:spcPts val="450"/>
-              </a:spcBef>
-              <a:buClr>
-                <a:srgbClr val="6C3483"/>
-              </a:buClr>
-              <a:buFont typeface="Arial"/>
-              <a:buChar char="•"/>
-            </a:pPr>
-            <a:r>
-              <a:rPr lang="en-US" sz="1650" dirty="0">
-                <a:solidFill>
-                  <a:srgbClr val="000000"/>
-                </a:solidFill>
-                <a:latin typeface="Arial"/>
-                <a:cs typeface="Arial"/>
-              </a:rPr>
-              <a:t>A systematic review of fluid strategies in sepsis</a:t>
-            </a:r>
-          </a:p>
-          <a:p>
-            <a:pPr marL="380000" indent="-380000" algn="l">
-              <a:lnSpc>
-                <a:spcPct val="104000"/>
-              </a:lnSpc>
-              <a:spcBef>
-                <a:spcPts val="450"/>
-              </a:spcBef>
-              <a:buClr>
-                <a:srgbClr val="6C3483"/>
-              </a:buClr>
-              <a:buFont typeface="Arial"/>
-              <a:buChar char="•"/>
-            </a:pPr>
-            <a:r>
-              <a:rPr lang="en-US" sz="1650" dirty="0">
-                <a:solidFill>
-                  <a:srgbClr val="000000"/>
-                </a:solidFill>
-                <a:latin typeface="Arial"/>
-                <a:cs typeface="Arial"/>
-              </a:rPr>
-              <a:t>A retrospective cohort from ICU charts (like FLUID-ICU)</a:t>
-            </a:r>
-          </a:p>
-          <a:p>
-            <a:pPr marL="380000" indent="-380000" algn="l">
-              <a:lnSpc>
-                <a:spcPct val="104000"/>
-              </a:lnSpc>
-              <a:spcBef>
-                <a:spcPts val="450"/>
-              </a:spcBef>
-              <a:buClr>
-                <a:srgbClr val="6C3483"/>
-              </a:buClr>
-              <a:buFont typeface="Arial"/>
-              <a:buChar char="•"/>
-            </a:pPr>
-            <a:r>
-              <a:rPr lang="en-US" sz="1650" dirty="0">
-                <a:solidFill>
-                  <a:srgbClr val="000000"/>
-                </a:solidFill>
-                <a:latin typeface="Arial"/>
-                <a:cs typeface="Arial"/>
-              </a:rPr>
-              <a:t>A clinical audit of fluid-balance charting against the unit standard</a:t>
-            </a:r>
-          </a:p>
-        </p:txBody>
-      </p:sp>
-      <p:sp>
-        <p:nvSpPr>
-          <p:cNvPr id="52" name="Side"/>
-          <p:cNvSpPr/>
-          <p:nvPr/>
-        </p:nvSpPr>
-        <p:spPr>
-          <a:xfrm>
-            <a:off x="7423760" y="1720000"/>
-            <a:ext cx="4311040" cy="1968005"/>
-          </a:xfrm>
-          <a:prstGeom prst="roundRect">
-            <a:avLst>
-              <a:gd name="adj" fmla="val 5000"/>
-            </a:avLst>
-          </a:prstGeom>
-          <a:solidFill>
-            <a:srgbClr val="EAF2F5"/>
-          </a:solidFill>
-          <a:ln>
-            <a:noFill/>
-          </a:ln>
-        </p:spPr>
-        <p:txBody>
-          <a:bodyPr wrap="square" lIns="137160" tIns="91440" rIns="137160" bIns="91440" rtlCol="0" anchor="ctr">
-            <a:normAutofit/>
-          </a:bodyPr>
-          <a:lstStyle/>
-          <a:p>
-            <a:pPr marL="0" indent="0" algn="ctr">
-              <a:buNone/>
-            </a:pPr>
-            <a:r>
-              <a:rPr lang="en-US" sz="1600" b="1" dirty="0">
-                <a:solidFill>
-                  <a:srgbClr val="6C3483"/>
-                </a:solidFill>
-                <a:latin typeface="Arial"/>
-                <a:cs typeface="Arial"/>
-              </a:rPr>
-              <a:t>Answers</a:t>
-            </a:r>
-          </a:p>
+          <a:bodyPr wrap="square" lIns="91440" tIns="45720" rIns="91440" bIns="45720" rtlCol="0" anchor="ctr"/>
+          <a:lstStyle/>
           <a:p>
             <a:pPr marL="0" indent="0" algn="ctr">
               <a:lnSpc>
-                <a:spcPct val="104000"/>
+                <a:spcPct val="110000"/>
               </a:lnSpc>
+              <a:buNone/>
+            </a:pPr>
+            <a:r>
+              <a:rPr lang="en-US" sz="3200" b="1" dirty="0">
+                <a:solidFill>
+                  <a:srgbClr val="0D7377"/>
+                </a:solidFill>
+                <a:latin typeface="Arial"/>
+                <a:cs typeface="Arial"/>
+              </a:rPr>
+              <a:t>Extra slides: Session 7</a:t>
+            </a:r>
+          </a:p>
+          <a:p>
+            <a:pPr marL="0" indent="0" algn="ctr">
               <a:spcBef>
-                <a:spcPts val="300"/>
+                <a:spcPts val="1200"/>
               </a:spcBef>
               <a:buNone/>
             </a:pPr>
             <a:r>
-              <a:rPr lang="en-US" sz="1500" dirty="0">
-                <a:solidFill>
-                  <a:srgbClr val="000000"/>
-                </a:solidFill>
-                <a:latin typeface="Arial"/>
-                <a:cs typeface="Arial"/>
-              </a:rPr>
-              <a:t>Must: a trial registry, before patient 1</a:t>
-            </a:r>
-          </a:p>
-          <a:p>
-            <a:pPr marL="0" indent="0" algn="ctr">
-              <a:lnSpc>
-                <a:spcPct val="104000"/>
-              </a:lnSpc>
-              <a:spcBef>
-                <a:spcPts val="300"/>
-              </a:spcBef>
-              <a:buNone/>
-            </a:pPr>
-            <a:r>
-              <a:rPr lang="en-US" sz="1500" dirty="0">
-                <a:solidFill>
-                  <a:srgbClr val="000000"/>
-                </a:solidFill>
-                <a:latin typeface="Arial"/>
-                <a:cs typeface="Arial"/>
-              </a:rPr>
-              <a:t>Should: PROSPERO</a:t>
-            </a:r>
-          </a:p>
-          <a:p>
-            <a:pPr marL="0" indent="0" algn="ctr">
-              <a:lnSpc>
-                <a:spcPct val="104000"/>
-              </a:lnSpc>
-              <a:spcBef>
-                <a:spcPts val="300"/>
-              </a:spcBef>
-              <a:buNone/>
-            </a:pPr>
-            <a:r>
-              <a:rPr lang="en-US" sz="1500" dirty="0">
-                <a:solidFill>
-                  <a:srgbClr val="000000"/>
-                </a:solidFill>
-                <a:latin typeface="Arial"/>
-                <a:cs typeface="Arial"/>
-              </a:rPr>
-              <a:t>Recommended, not required</a:t>
-            </a:r>
-          </a:p>
-          <a:p>
-            <a:pPr marL="0" indent="0" algn="ctr">
-              <a:lnSpc>
-                <a:spcPct val="104000"/>
-              </a:lnSpc>
-              <a:spcBef>
-                <a:spcPts val="300"/>
-              </a:spcBef>
-              <a:buNone/>
-            </a:pPr>
-            <a:r>
-              <a:rPr lang="en-US" sz="1500" dirty="0">
-                <a:solidFill>
-                  <a:srgbClr val="000000"/>
-                </a:solidFill>
-                <a:latin typeface="Arial"/>
-                <a:cs typeface="Arial"/>
-              </a:rPr>
-              <a:t>Audit: no research registration, local approval</a:t>
+              <a:rPr lang="en-US" sz="1900" i="1" dirty="0">
+                <a:solidFill>
+                  <a:srgbClr val="595959"/>
+                </a:solidFill>
+                <a:latin typeface="Arial"/>
+                <a:cs typeface="Arial"/>
+              </a:rPr>
+              <a:t>Use only if time allows, or for self-study</a:t>
             </a:r>
           </a:p>
         </p:txBody>
@@ -28629,7 +28319,7 @@
                 <a:latin typeface="Arial"/>
                 <a:cs typeface="Arial"/>
               </a:rPr>
-              <a:t>IMRaD: the hourglass shape of every paper</a:t>
+              <a:t>Check: register or not?</a:t>
             </a:r>
           </a:p>
         </p:txBody>
@@ -28662,48 +28352,22 @@
           </a:p>
         </p:txBody>
       </p:sp>
-      <p:pic>
-        <p:nvPicPr>
-          <p:cNvPr id="25" name="Figure"/>
-          <p:cNvPicPr>
-            <a:picLocks noChangeAspect="1"/>
-          </p:cNvPicPr>
-          <p:nvPr/>
-        </p:nvPicPr>
-        <p:blipFill>
-          <a:blip r:embed="rId4"/>
-          <a:stretch>
-            <a:fillRect/>
-          </a:stretch>
-        </p:blipFill>
-        <p:spPr>
-          <a:xfrm>
-            <a:off x="908500" y="1150000"/>
-            <a:ext cx="10375000" cy="4150000"/>
+      <p:sp>
+        <p:nvSpPr>
+          <p:cNvPr id="50" name="Banner"/>
+          <p:cNvSpPr/>
+          <p:nvPr/>
+        </p:nvSpPr>
+        <p:spPr>
+          <a:xfrm>
+            <a:off x="457200" y="1120000"/>
+            <a:ext cx="11277600" cy="470000"/>
           </a:xfrm>
           <a:prstGeom prst="rect">
             <a:avLst/>
           </a:prstGeom>
-        </p:spPr>
-      </p:pic>
-      <p:sp>
-        <p:nvSpPr>
-          <p:cNvPr id="60" name="Takeaway"/>
-          <p:cNvSpPr/>
-          <p:nvPr/>
-        </p:nvSpPr>
-        <p:spPr>
-          <a:xfrm>
-            <a:off x="457200" y="5390000"/>
-            <a:ext cx="11277600" cy="560000"/>
-          </a:xfrm>
-          <a:prstGeom prst="roundRect">
-            <a:avLst>
-              <a:gd name="adj" fmla="val 12000"/>
-            </a:avLst>
-          </a:prstGeom>
           <a:solidFill>
-            <a:srgbClr val="0D7377"/>
+            <a:srgbClr val="6C3483"/>
           </a:solidFill>
           <a:ln>
             <a:noFill/>
@@ -28715,28 +28379,271 @@
           </a:bodyPr>
           <a:lstStyle/>
           <a:p>
+            <a:pPr marL="0" indent="0" algn="l">
+              <a:buNone/>
+            </a:pPr>
+            <a:r>
+              <a:rPr lang="en-US" sz="1500" b="1" dirty="0">
+                <a:solidFill>
+                  <a:srgbClr val="FFFFFF"/>
+                </a:solidFill>
+                <a:latin typeface="Arial"/>
+                <a:cs typeface="Arial"/>
+              </a:rPr>
+              <a:t>QUICK QUIZ   |   2 min</a:t>
+            </a:r>
+          </a:p>
+        </p:txBody>
+      </p:sp>
+      <p:sp>
+        <p:nvSpPr>
+          <p:cNvPr id="51" name="Steps"/>
+          <p:cNvSpPr txBox="1"/>
+          <p:nvPr/>
+        </p:nvSpPr>
+        <p:spPr>
+          <a:xfrm>
+            <a:off x="457200" y="1720000"/>
+            <a:ext cx="6766560" cy="4230000"/>
+          </a:xfrm>
+          <a:prstGeom prst="rect">
+            <a:avLst/>
+          </a:prstGeom>
+          <a:noFill/>
+          <a:ln>
+            <a:noFill/>
+          </a:ln>
+        </p:spPr>
+        <p:txBody>
+          <a:bodyPr wrap="square" lIns="91440" tIns="45720" rIns="91440" bIns="45720" rtlCol="0" anchor="t"/>
+          <a:lstStyle/>
+          <a:p>
+            <a:pPr marL="380000" indent="-380000" algn="l">
+              <a:lnSpc>
+                <a:spcPct val="104000"/>
+              </a:lnSpc>
+              <a:spcBef>
+                <a:spcPts val="450"/>
+              </a:spcBef>
+              <a:buClr>
+                <a:srgbClr val="6C3483"/>
+              </a:buClr>
+              <a:buFont typeface="Arial"/>
+              <a:buChar char="•"/>
+            </a:pPr>
+            <a:r>
+              <a:rPr lang="en-US" sz="1650" dirty="0">
+                <a:solidFill>
+                  <a:srgbClr val="000000"/>
+                </a:solidFill>
+                <a:latin typeface="Arial"/>
+                <a:cs typeface="Arial"/>
+              </a:rPr>
+              <a:t>A randomised trial of restrictive vs usual fluids in septic shock</a:t>
+            </a:r>
+          </a:p>
+          <a:p>
+            <a:pPr marL="380000" indent="-380000" algn="l">
+              <a:lnSpc>
+                <a:spcPct val="104000"/>
+              </a:lnSpc>
+              <a:spcBef>
+                <a:spcPts val="450"/>
+              </a:spcBef>
+              <a:buClr>
+                <a:srgbClr val="6C3483"/>
+              </a:buClr>
+              <a:buFont typeface="Arial"/>
+              <a:buChar char="•"/>
+            </a:pPr>
+            <a:r>
+              <a:rPr lang="en-US" sz="1650" dirty="0">
+                <a:solidFill>
+                  <a:srgbClr val="000000"/>
+                </a:solidFill>
+                <a:latin typeface="Arial"/>
+                <a:cs typeface="Arial"/>
+              </a:rPr>
+              <a:t>A systematic review of fluid strategies in sepsis</a:t>
+            </a:r>
+          </a:p>
+          <a:p>
+            <a:pPr marL="380000" indent="-380000" algn="l">
+              <a:lnSpc>
+                <a:spcPct val="104000"/>
+              </a:lnSpc>
+              <a:spcBef>
+                <a:spcPts val="450"/>
+              </a:spcBef>
+              <a:buClr>
+                <a:srgbClr val="6C3483"/>
+              </a:buClr>
+              <a:buFont typeface="Arial"/>
+              <a:buChar char="•"/>
+            </a:pPr>
+            <a:r>
+              <a:rPr lang="en-US" sz="1650" dirty="0">
+                <a:solidFill>
+                  <a:srgbClr val="000000"/>
+                </a:solidFill>
+                <a:latin typeface="Arial"/>
+                <a:cs typeface="Arial"/>
+              </a:rPr>
+              <a:t>A retrospective cohort from ICU charts (like FLUID-ICU)</a:t>
+            </a:r>
+          </a:p>
+          <a:p>
+            <a:pPr marL="380000" indent="-380000" algn="l">
+              <a:lnSpc>
+                <a:spcPct val="104000"/>
+              </a:lnSpc>
+              <a:spcBef>
+                <a:spcPts val="450"/>
+              </a:spcBef>
+              <a:buClr>
+                <a:srgbClr val="6C3483"/>
+              </a:buClr>
+              <a:buFont typeface="Arial"/>
+              <a:buChar char="•"/>
+            </a:pPr>
+            <a:r>
+              <a:rPr lang="en-US" sz="1650" dirty="0">
+                <a:solidFill>
+                  <a:srgbClr val="000000"/>
+                </a:solidFill>
+                <a:latin typeface="Arial"/>
+                <a:cs typeface="Arial"/>
+              </a:rPr>
+              <a:t>A clinical audit of fluid-balance charting against the unit standard</a:t>
+            </a:r>
+          </a:p>
+        </p:txBody>
+      </p:sp>
+      <p:sp>
+        <p:nvSpPr>
+          <p:cNvPr id="52" name="Side"/>
+          <p:cNvSpPr/>
+          <p:nvPr/>
+        </p:nvSpPr>
+        <p:spPr>
+          <a:xfrm>
+            <a:off x="7423760" y="1720000"/>
+            <a:ext cx="4311040" cy="1968005"/>
+          </a:xfrm>
+          <a:prstGeom prst="roundRect">
+            <a:avLst>
+              <a:gd name="adj" fmla="val 5000"/>
+            </a:avLst>
+          </a:prstGeom>
+          <a:solidFill>
+            <a:srgbClr val="EAF2F5"/>
+          </a:solidFill>
+          <a:ln>
+            <a:noFill/>
+          </a:ln>
+        </p:spPr>
+        <p:txBody>
+          <a:bodyPr wrap="square" lIns="137160" tIns="91440" rIns="137160" bIns="91440" rtlCol="0" anchor="ctr">
+            <a:normAutofit/>
+          </a:bodyPr>
+          <a:lstStyle/>
+          <a:p>
             <a:pPr marL="0" indent="0" algn="ctr">
               <a:buNone/>
             </a:pPr>
             <a:r>
-              <a:rPr lang="en-US" sz="1300" b="1" dirty="0">
-                <a:solidFill>
-                  <a:srgbClr val="FFFFFF"/>
-                </a:solidFill>
-                <a:latin typeface="Arial"/>
-                <a:cs typeface="Arial"/>
-              </a:rPr>
-              <a:t>KEY MESSAGE   </a:t>
-            </a:r>
-            <a:r>
-              <a:rPr lang="en-US" sz="1550" dirty="0">
-                <a:solidFill>
-                  <a:srgbClr val="FFFFFF"/>
-                </a:solidFill>
-                <a:latin typeface="Arial"/>
-                <a:cs typeface="Arial"/>
-              </a:rPr>
-              <a:t>Introduction narrows to your question. Discussion widens back to practice.</a:t>
+              <a:rPr lang="en-US" sz="1600" b="1" dirty="0">
+                <a:solidFill>
+                  <a:srgbClr val="6C3483"/>
+                </a:solidFill>
+                <a:latin typeface="Arial"/>
+                <a:cs typeface="Arial"/>
+              </a:rPr>
+              <a:t>Answers</a:t>
+            </a:r>
+          </a:p>
+          <a:p>
+            <a:pPr marL="0" indent="0" algn="ctr">
+              <a:lnSpc>
+                <a:spcPct val="104000"/>
+              </a:lnSpc>
+              <a:spcBef>
+                <a:spcPts val="300"/>
+              </a:spcBef>
+              <a:buNone/>
+            </a:pPr>
+            <a:r>
+              <a:rPr lang="en-US" sz="1500" dirty="0">
+                <a:solidFill>
+                  <a:srgbClr val="000000"/>
+                </a:solidFill>
+                <a:latin typeface="Arial"/>
+                <a:cs typeface="Arial"/>
+              </a:rPr>
+              <a:t>Must: a trial registry, before patient 1</a:t>
+            </a:r>
+          </a:p>
+          <a:p>
+            <a:pPr marL="0" indent="0" algn="ctr">
+              <a:lnSpc>
+                <a:spcPct val="104000"/>
+              </a:lnSpc>
+              <a:spcBef>
+                <a:spcPts val="300"/>
+              </a:spcBef>
+              <a:buNone/>
+            </a:pPr>
+            <a:r>
+              <a:rPr lang="en-US" sz="1500" dirty="0">
+                <a:solidFill>
+                  <a:srgbClr val="000000"/>
+                </a:solidFill>
+                <a:latin typeface="Arial"/>
+                <a:cs typeface="Arial"/>
+              </a:rPr>
+              <a:t>Should: PROSPERO</a:t>
+            </a:r>
+          </a:p>
+          <a:p>
+            <a:pPr marL="0" indent="0" algn="ctr">
+              <a:lnSpc>
+                <a:spcPct val="104000"/>
+              </a:lnSpc>
+              <a:spcBef>
+                <a:spcPts val="300"/>
+              </a:spcBef>
+              <a:buNone/>
+            </a:pPr>
+            <a:r>
+              <a:rPr lang="en-US" sz="1500" dirty="0">
+                <a:solidFill>
+                  <a:srgbClr val="000000"/>
+                </a:solidFill>
+                <a:latin typeface="Arial"/>
+                <a:cs typeface="Arial"/>
+              </a:rPr>
+              <a:t>Recommended, not required</a:t>
+            </a:r>
+          </a:p>
+          <a:p>
+            <a:pPr marL="0" indent="0" algn="ctr">
+              <a:lnSpc>
+                <a:spcPct val="104000"/>
+              </a:lnSpc>
+              <a:spcBef>
+                <a:spcPts val="300"/>
+              </a:spcBef>
+              <a:buNone/>
+            </a:pPr>
+            <a:r>
+              <a:rPr lang="en-US" sz="1500" dirty="0">
+                <a:solidFill>
+                  <a:srgbClr val="000000"/>
+                </a:solidFill>
+                <a:latin typeface="Arial"/>
+                <a:cs typeface="Arial"/>
+              </a:rPr>
+              <a:t>Audit: no research registration, local approval</a:t>
             </a:r>
           </a:p>
         </p:txBody>
@@ -28904,7 +28811,7 @@
                 <a:latin typeface="Arial"/>
                 <a:cs typeface="Arial"/>
               </a:rPr>
-              <a:t>CRediT: say who did what</a:t>
+              <a:t>IMRaD: the hourglass shape of every paper</a:t>
             </a:r>
           </a:p>
         </p:txBody>
@@ -28937,58 +28844,45 @@
           </a:p>
         </p:txBody>
       </p:sp>
-      <p:sp>
-        <p:nvSpPr>
-          <p:cNvPr id="19" name="Intro"/>
-          <p:cNvSpPr txBox="1"/>
-          <p:nvPr/>
-        </p:nvSpPr>
-        <p:spPr>
-          <a:xfrm>
-            <a:off x="457200" y="1100000"/>
-            <a:ext cx="11277600" cy="480000"/>
+      <p:pic>
+        <p:nvPicPr>
+          <p:cNvPr id="25" name="Figure"/>
+          <p:cNvPicPr>
+            <a:picLocks noChangeAspect="1"/>
+          </p:cNvPicPr>
+          <p:nvPr/>
+        </p:nvPicPr>
+        <p:blipFill>
+          <a:blip r:embed="rId4"/>
+          <a:stretch>
+            <a:fillRect/>
+          </a:stretch>
+        </p:blipFill>
+        <p:spPr>
+          <a:xfrm>
+            <a:off x="908500" y="1150000"/>
+            <a:ext cx="10375000" cy="4150000"/>
           </a:xfrm>
           <a:prstGeom prst="rect">
             <a:avLst/>
           </a:prstGeom>
-          <a:noFill/>
-          <a:ln>
-            <a:noFill/>
-          </a:ln>
-        </p:spPr>
-        <p:txBody>
-          <a:bodyPr wrap="square" lIns="91440" tIns="45720" rIns="91440" bIns="45720" rtlCol="0" anchor="t"/>
-          <a:lstStyle/>
-          <a:p>
-            <a:pPr marL="0" indent="0" algn="l">
-              <a:buNone/>
-            </a:pPr>
-            <a:r>
-              <a:rPr lang="en-US" sz="1700" i="1" dirty="0">
-                <a:solidFill>
-                  <a:srgbClr val="595959"/>
-                </a:solidFill>
-                <a:latin typeface="Arial"/>
-                <a:cs typeface="Arial"/>
-              </a:rPr>
-              <a:t>CRediT (Contributor Roles Taxonomy): 14 standard roles that journals now ask for.</a:t>
-            </a:r>
-          </a:p>
-        </p:txBody>
-      </p:sp>
-      <p:sp>
-        <p:nvSpPr>
-          <p:cNvPr id="70" name="CardHead"/>
+        </p:spPr>
+      </p:pic>
+      <p:sp>
+        <p:nvSpPr>
+          <p:cNvPr id="60" name="Takeaway"/>
           <p:cNvSpPr/>
           <p:nvPr/>
         </p:nvSpPr>
         <p:spPr>
           <a:xfrm>
-            <a:off x="457200" y="1765612"/>
-            <a:ext cx="3625866" cy="640000"/>
-          </a:xfrm>
-          <a:prstGeom prst="rect">
-            <a:avLst/>
+            <a:off x="457200" y="5390000"/>
+            <a:ext cx="11277600" cy="560000"/>
+          </a:xfrm>
+          <a:prstGeom prst="roundRect">
+            <a:avLst>
+              <a:gd name="adj" fmla="val 12000"/>
+            </a:avLst>
           </a:prstGeom>
           <a:solidFill>
             <a:srgbClr val="0D7377"/>
@@ -28998,494 +28892,6 @@
           </a:ln>
         </p:spPr>
         <p:txBody>
-          <a:bodyPr wrap="square" lIns="91440" tIns="45720" rIns="91440" bIns="45720" rtlCol="0" anchor="ctr">
-            <a:normAutofit/>
-          </a:bodyPr>
-          <a:lstStyle/>
-          <a:p>
-            <a:pPr marL="0" indent="0" algn="ctr">
-              <a:buNone/>
-            </a:pPr>
-            <a:r>
-              <a:rPr lang="en-US" sz="1900" b="1" dirty="0">
-                <a:solidFill>
-                  <a:srgbClr val="FFFFFF"/>
-                </a:solidFill>
-                <a:latin typeface="Arial"/>
-                <a:cs typeface="Arial"/>
-              </a:rPr>
-              <a:t>Some of the 14 roles</a:t>
-            </a:r>
-          </a:p>
-        </p:txBody>
-      </p:sp>
-      <p:sp>
-        <p:nvSpPr>
-          <p:cNvPr id="71" name="CardBody"/>
-          <p:cNvSpPr/>
-          <p:nvPr/>
-        </p:nvSpPr>
-        <p:spPr>
-          <a:xfrm>
-            <a:off x="457200" y="2405612"/>
-            <a:ext cx="3625866" cy="2633164"/>
-          </a:xfrm>
-          <a:prstGeom prst="rect">
-            <a:avLst/>
-          </a:prstGeom>
-          <a:solidFill>
-            <a:srgbClr val="EAF2F5"/>
-          </a:solidFill>
-          <a:ln>
-            <a:noFill/>
-          </a:ln>
-        </p:spPr>
-        <p:txBody>
-          <a:bodyPr wrap="square" lIns="137160" tIns="91440" rIns="137160" bIns="91440" rtlCol="0" anchor="ctr">
-            <a:normAutofit/>
-          </a:bodyPr>
-          <a:lstStyle/>
-          <a:p>
-            <a:pPr marL="0" indent="0" algn="ctr">
-              <a:lnSpc>
-                <a:spcPct val="104000"/>
-              </a:lnSpc>
-              <a:spcBef>
-                <a:spcPts val="400"/>
-              </a:spcBef>
-              <a:buNone/>
-            </a:pPr>
-            <a:r>
-              <a:rPr lang="en-US" sz="1750" dirty="0">
-                <a:solidFill>
-                  <a:srgbClr val="000000"/>
-                </a:solidFill>
-                <a:latin typeface="Arial"/>
-                <a:cs typeface="Arial"/>
-              </a:rPr>
-              <a:t>Conceptualization</a:t>
-            </a:r>
-          </a:p>
-          <a:p>
-            <a:pPr marL="0" indent="0" algn="ctr">
-              <a:lnSpc>
-                <a:spcPct val="104000"/>
-              </a:lnSpc>
-              <a:spcBef>
-                <a:spcPts val="400"/>
-              </a:spcBef>
-              <a:buNone/>
-            </a:pPr>
-            <a:r>
-              <a:rPr lang="en-US" sz="1750" dirty="0">
-                <a:solidFill>
-                  <a:srgbClr val="000000"/>
-                </a:solidFill>
-                <a:latin typeface="Arial"/>
-                <a:cs typeface="Arial"/>
-              </a:rPr>
-              <a:t>Methodology</a:t>
-            </a:r>
-          </a:p>
-          <a:p>
-            <a:pPr marL="0" indent="0" algn="ctr">
-              <a:lnSpc>
-                <a:spcPct val="104000"/>
-              </a:lnSpc>
-              <a:spcBef>
-                <a:spcPts val="400"/>
-              </a:spcBef>
-              <a:buNone/>
-            </a:pPr>
-            <a:r>
-              <a:rPr lang="en-US" sz="1750" dirty="0">
-                <a:solidFill>
-                  <a:srgbClr val="000000"/>
-                </a:solidFill>
-                <a:latin typeface="Arial"/>
-                <a:cs typeface="Arial"/>
-              </a:rPr>
-              <a:t>Investigation</a:t>
-            </a:r>
-          </a:p>
-          <a:p>
-            <a:pPr marL="0" indent="0" algn="ctr">
-              <a:lnSpc>
-                <a:spcPct val="104000"/>
-              </a:lnSpc>
-              <a:spcBef>
-                <a:spcPts val="400"/>
-              </a:spcBef>
-              <a:buNone/>
-            </a:pPr>
-            <a:r>
-              <a:rPr lang="en-US" sz="1750" dirty="0">
-                <a:solidFill>
-                  <a:srgbClr val="000000"/>
-                </a:solidFill>
-                <a:latin typeface="Arial"/>
-                <a:cs typeface="Arial"/>
-              </a:rPr>
-              <a:t>Formal analysis</a:t>
-            </a:r>
-          </a:p>
-          <a:p>
-            <a:pPr marL="0" indent="0" algn="ctr">
-              <a:lnSpc>
-                <a:spcPct val="104000"/>
-              </a:lnSpc>
-              <a:spcBef>
-                <a:spcPts val="400"/>
-              </a:spcBef>
-              <a:buNone/>
-            </a:pPr>
-            <a:r>
-              <a:rPr lang="en-US" sz="1750" dirty="0">
-                <a:solidFill>
-                  <a:srgbClr val="000000"/>
-                </a:solidFill>
-                <a:latin typeface="Arial"/>
-                <a:cs typeface="Arial"/>
-              </a:rPr>
-              <a:t>Writing (original draft)</a:t>
-            </a:r>
-          </a:p>
-          <a:p>
-            <a:pPr marL="0" indent="0" algn="ctr">
-              <a:lnSpc>
-                <a:spcPct val="104000"/>
-              </a:lnSpc>
-              <a:spcBef>
-                <a:spcPts val="400"/>
-              </a:spcBef>
-              <a:buNone/>
-            </a:pPr>
-            <a:r>
-              <a:rPr lang="en-US" sz="1750" dirty="0">
-                <a:solidFill>
-                  <a:srgbClr val="000000"/>
-                </a:solidFill>
-                <a:latin typeface="Arial"/>
-                <a:cs typeface="Arial"/>
-              </a:rPr>
-              <a:t>Writing (review and editing)</a:t>
-            </a:r>
-          </a:p>
-          <a:p>
-            <a:pPr marL="0" indent="0" algn="ctr">
-              <a:lnSpc>
-                <a:spcPct val="104000"/>
-              </a:lnSpc>
-              <a:spcBef>
-                <a:spcPts val="400"/>
-              </a:spcBef>
-              <a:buNone/>
-            </a:pPr>
-            <a:r>
-              <a:rPr lang="en-US" sz="1750" dirty="0">
-                <a:solidFill>
-                  <a:srgbClr val="000000"/>
-                </a:solidFill>
-                <a:latin typeface="Arial"/>
-                <a:cs typeface="Arial"/>
-              </a:rPr>
-              <a:t>Supervision</a:t>
-            </a:r>
-          </a:p>
-        </p:txBody>
-      </p:sp>
-      <p:sp>
-        <p:nvSpPr>
-          <p:cNvPr id="72" name="CardHead"/>
-          <p:cNvSpPr/>
-          <p:nvPr/>
-        </p:nvSpPr>
-        <p:spPr>
-          <a:xfrm>
-            <a:off x="4283066" y="1765612"/>
-            <a:ext cx="3625866" cy="640000"/>
-          </a:xfrm>
-          <a:prstGeom prst="rect">
-            <a:avLst/>
-          </a:prstGeom>
-          <a:solidFill>
-            <a:srgbClr val="0B376C"/>
-          </a:solidFill>
-          <a:ln>
-            <a:noFill/>
-          </a:ln>
-        </p:spPr>
-        <p:txBody>
-          <a:bodyPr wrap="square" lIns="91440" tIns="45720" rIns="91440" bIns="45720" rtlCol="0" anchor="ctr">
-            <a:normAutofit/>
-          </a:bodyPr>
-          <a:lstStyle/>
-          <a:p>
-            <a:pPr marL="0" indent="0" algn="ctr">
-              <a:buNone/>
-            </a:pPr>
-            <a:r>
-              <a:rPr lang="en-US" sz="1900" b="1" dirty="0">
-                <a:solidFill>
-                  <a:srgbClr val="FFFFFF"/>
-                </a:solidFill>
-                <a:latin typeface="Arial"/>
-                <a:cs typeface="Arial"/>
-              </a:rPr>
-              <a:t>Paper 1 did it</a:t>
-            </a:r>
-          </a:p>
-        </p:txBody>
-      </p:sp>
-      <p:sp>
-        <p:nvSpPr>
-          <p:cNvPr id="73" name="CardBody"/>
-          <p:cNvSpPr/>
-          <p:nvPr/>
-        </p:nvSpPr>
-        <p:spPr>
-          <a:xfrm>
-            <a:off x="4283066" y="2405612"/>
-            <a:ext cx="3625866" cy="2633164"/>
-          </a:xfrm>
-          <a:prstGeom prst="rect">
-            <a:avLst/>
-          </a:prstGeom>
-          <a:solidFill>
-            <a:srgbClr val="EAF2F5"/>
-          </a:solidFill>
-          <a:ln>
-            <a:noFill/>
-          </a:ln>
-        </p:spPr>
-        <p:txBody>
-          <a:bodyPr wrap="square" lIns="137160" tIns="91440" rIns="137160" bIns="91440" rtlCol="0" anchor="ctr">
-            <a:normAutofit/>
-          </a:bodyPr>
-          <a:lstStyle/>
-          <a:p>
-            <a:pPr marL="0" indent="0" algn="ctr">
-              <a:lnSpc>
-                <a:spcPct val="104000"/>
-              </a:lnSpc>
-              <a:spcBef>
-                <a:spcPts val="400"/>
-              </a:spcBef>
-              <a:buNone/>
-            </a:pPr>
-            <a:r>
-              <a:rPr lang="en-US" sz="1750" dirty="0">
-                <a:solidFill>
-                  <a:srgbClr val="000000"/>
-                </a:solidFill>
-                <a:latin typeface="Arial"/>
-                <a:cs typeface="Arial"/>
-              </a:rPr>
-              <a:t>NB: Writing (original draft)</a:t>
-            </a:r>
-          </a:p>
-          <a:p>
-            <a:pPr marL="0" indent="0" algn="ctr">
-              <a:lnSpc>
-                <a:spcPct val="104000"/>
-              </a:lnSpc>
-              <a:spcBef>
-                <a:spcPts val="400"/>
-              </a:spcBef>
-              <a:buNone/>
-            </a:pPr>
-            <a:r>
-              <a:rPr lang="en-US" sz="1750" dirty="0">
-                <a:solidFill>
-                  <a:srgbClr val="000000"/>
-                </a:solidFill>
-                <a:latin typeface="Arial"/>
-                <a:cs typeface="Arial"/>
-              </a:rPr>
-              <a:t>CS: Methodology, Formal analysis</a:t>
-            </a:r>
-          </a:p>
-          <a:p>
-            <a:pPr marL="0" indent="0" algn="ctr">
-              <a:lnSpc>
-                <a:spcPct val="104000"/>
-              </a:lnSpc>
-              <a:spcBef>
-                <a:spcPts val="400"/>
-              </a:spcBef>
-              <a:buNone/>
-            </a:pPr>
-            <a:r>
-              <a:rPr lang="en-US" sz="1750" dirty="0">
-                <a:solidFill>
-                  <a:srgbClr val="000000"/>
-                </a:solidFill>
-                <a:latin typeface="Arial"/>
-                <a:cs typeface="Arial"/>
-              </a:rPr>
-              <a:t>SDB: Conceptualization, Supervision, Funding acquisition</a:t>
-            </a:r>
-          </a:p>
-        </p:txBody>
-      </p:sp>
-      <p:sp>
-        <p:nvSpPr>
-          <p:cNvPr id="74" name="CardHead"/>
-          <p:cNvSpPr/>
-          <p:nvPr/>
-        </p:nvSpPr>
-        <p:spPr>
-          <a:xfrm>
-            <a:off x="8108932" y="1765612"/>
-            <a:ext cx="3625866" cy="640000"/>
-          </a:xfrm>
-          <a:prstGeom prst="rect">
-            <a:avLst/>
-          </a:prstGeom>
-          <a:solidFill>
-            <a:srgbClr val="5FA39B"/>
-          </a:solidFill>
-          <a:ln>
-            <a:noFill/>
-          </a:ln>
-        </p:spPr>
-        <p:txBody>
-          <a:bodyPr wrap="square" lIns="91440" tIns="45720" rIns="91440" bIns="45720" rtlCol="0" anchor="ctr">
-            <a:normAutofit/>
-          </a:bodyPr>
-          <a:lstStyle/>
-          <a:p>
-            <a:pPr marL="0" indent="0" algn="ctr">
-              <a:buNone/>
-            </a:pPr>
-            <a:r>
-              <a:rPr lang="en-US" sz="1900" b="1" dirty="0">
-                <a:solidFill>
-                  <a:srgbClr val="FFFFFF"/>
-                </a:solidFill>
-                <a:latin typeface="Arial"/>
-                <a:cs typeface="Arial"/>
-              </a:rPr>
-              <a:t>Your proposal</a:t>
-            </a:r>
-          </a:p>
-        </p:txBody>
-      </p:sp>
-      <p:sp>
-        <p:nvSpPr>
-          <p:cNvPr id="75" name="CardBody"/>
-          <p:cNvSpPr/>
-          <p:nvPr/>
-        </p:nvSpPr>
-        <p:spPr>
-          <a:xfrm>
-            <a:off x="8108932" y="2405612"/>
-            <a:ext cx="3625866" cy="2633164"/>
-          </a:xfrm>
-          <a:prstGeom prst="rect">
-            <a:avLst/>
-          </a:prstGeom>
-          <a:solidFill>
-            <a:srgbClr val="EAF2F5"/>
-          </a:solidFill>
-          <a:ln>
-            <a:noFill/>
-          </a:ln>
-        </p:spPr>
-        <p:txBody>
-          <a:bodyPr wrap="square" lIns="137160" tIns="91440" rIns="137160" bIns="91440" rtlCol="0" anchor="ctr">
-            <a:normAutofit/>
-          </a:bodyPr>
-          <a:lstStyle/>
-          <a:p>
-            <a:pPr marL="0" indent="0" algn="ctr">
-              <a:lnSpc>
-                <a:spcPct val="104000"/>
-              </a:lnSpc>
-              <a:spcBef>
-                <a:spcPts val="400"/>
-              </a:spcBef>
-              <a:buNone/>
-            </a:pPr>
-            <a:r>
-              <a:rPr lang="en-US" sz="1750" dirty="0">
-                <a:solidFill>
-                  <a:srgbClr val="000000"/>
-                </a:solidFill>
-                <a:latin typeface="Arial"/>
-                <a:cs typeface="Arial"/>
-              </a:rPr>
-              <a:t>Agree the author list now</a:t>
-            </a:r>
-          </a:p>
-          <a:p>
-            <a:pPr marL="0" indent="0" algn="ctr">
-              <a:lnSpc>
-                <a:spcPct val="104000"/>
-              </a:lnSpc>
-              <a:spcBef>
-                <a:spcPts val="400"/>
-              </a:spcBef>
-              <a:buNone/>
-            </a:pPr>
-            <a:r>
-              <a:rPr lang="en-US" sz="1750" dirty="0">
-                <a:solidFill>
-                  <a:srgbClr val="000000"/>
-                </a:solidFill>
-                <a:latin typeface="Arial"/>
-                <a:cs typeface="Arial"/>
-              </a:rPr>
-              <a:t>Write each person's roles</a:t>
-            </a:r>
-          </a:p>
-          <a:p>
-            <a:pPr marL="0" indent="0" algn="ctr">
-              <a:lnSpc>
-                <a:spcPct val="104000"/>
-              </a:lnSpc>
-              <a:spcBef>
-                <a:spcPts val="400"/>
-              </a:spcBef>
-              <a:buNone/>
-            </a:pPr>
-            <a:r>
-              <a:rPr lang="en-US" sz="1750" dirty="0">
-                <a:solidFill>
-                  <a:srgbClr val="000000"/>
-                </a:solidFill>
-                <a:latin typeface="Arial"/>
-                <a:cs typeface="Arial"/>
-              </a:rPr>
-              <a:t>Revisit before submission</a:t>
-            </a:r>
-          </a:p>
-        </p:txBody>
-      </p:sp>
-      <p:sp>
-        <p:nvSpPr>
-          <p:cNvPr id="60" name="Takeaway"/>
-          <p:cNvSpPr/>
-          <p:nvPr/>
-        </p:nvSpPr>
-        <p:spPr>
-          <a:xfrm>
-            <a:off x="457200" y="5390000"/>
-            <a:ext cx="11277600" cy="560000"/>
-          </a:xfrm>
-          <a:prstGeom prst="roundRect">
-            <a:avLst>
-              <a:gd name="adj" fmla="val 12000"/>
-            </a:avLst>
-          </a:prstGeom>
-          <a:solidFill>
-            <a:srgbClr val="0D7377"/>
-          </a:solidFill>
-          <a:ln>
-            <a:noFill/>
-          </a:ln>
-        </p:spPr>
-        <p:txBody>
           <a:bodyPr wrap="square" lIns="182880" tIns="45720" rIns="182880" bIns="45720" rtlCol="0" anchor="ctr">
             <a:normAutofit/>
           </a:bodyPr>
@@ -29512,7 +28918,7 @@
                 <a:latin typeface="Arial"/>
                 <a:cs typeface="Arial"/>
               </a:rPr>
-              <a:t>Transparent roles prevent gift and ghost authorship.</a:t>
+              <a:t>Introduction narrows to your question. Discussion widens back to practice.</a:t>
             </a:r>
           </a:p>
         </p:txBody>
@@ -29622,6 +29028,782 @@
 </file>
 
 <file path=ppt/slides/slide45.xml><?xml version="1.0" encoding="utf-8"?>
+<p:sld xmlns:a="http://schemas.openxmlformats.org/drawingml/2006/main" xmlns:r="http://schemas.openxmlformats.org/officeDocument/2006/relationships" xmlns:p="http://schemas.openxmlformats.org/presentationml/2006/main">
+  <p:cSld>
+    <p:bg>
+      <p:bgPr>
+        <a:solidFill>
+          <a:schemeClr val="bg1"/>
+        </a:solidFill>
+        <a:effectLst/>
+      </p:bgPr>
+    </p:bg>
+    <p:spTree>
+      <p:nvGrpSpPr>
+        <p:cNvPr id="1" name=""/>
+        <p:cNvGrpSpPr/>
+        <p:nvPr/>
+      </p:nvGrpSpPr>
+      <p:grpSpPr>
+        <a:xfrm>
+          <a:off x="0" y="0"/>
+          <a:ext cx="0" cy="0"/>
+          <a:chOff x="0" y="0"/>
+          <a:chExt cx="0" cy="0"/>
+        </a:xfrm>
+      </p:grpSpPr>
+      <p:sp>
+        <p:nvSpPr>
+          <p:cNvPr id="10" name="Title"/>
+          <p:cNvSpPr txBox="1"/>
+          <p:nvPr/>
+        </p:nvSpPr>
+        <p:spPr>
+          <a:xfrm>
+            <a:off x="457200" y="160000"/>
+            <a:ext cx="11277600" cy="750000"/>
+          </a:xfrm>
+          <a:prstGeom prst="rect">
+            <a:avLst/>
+          </a:prstGeom>
+          <a:noFill/>
+          <a:ln>
+            <a:noFill/>
+          </a:ln>
+        </p:spPr>
+        <p:txBody>
+          <a:bodyPr wrap="square" lIns="91440" tIns="45720" rIns="91440" bIns="45720" rtlCol="0" anchor="ctr"/>
+          <a:lstStyle/>
+          <a:p>
+            <a:pPr marL="0" indent="0" algn="l">
+              <a:buNone/>
+            </a:pPr>
+            <a:r>
+              <a:rPr lang="en-US" sz="2800" b="1" dirty="0">
+                <a:solidFill>
+                  <a:srgbClr val="0D7377"/>
+                </a:solidFill>
+                <a:latin typeface="Arial"/>
+                <a:cs typeface="Arial"/>
+              </a:rPr>
+              <a:t>CRediT: say who did what</a:t>
+            </a:r>
+          </a:p>
+        </p:txBody>
+      </p:sp>
+      <p:sp>
+        <p:nvSpPr>
+          <p:cNvPr id="11" name="Rule"/>
+          <p:cNvSpPr/>
+          <p:nvPr/>
+        </p:nvSpPr>
+        <p:spPr>
+          <a:xfrm>
+            <a:off x="457200" y="940000"/>
+            <a:ext cx="11277600" cy="0"/>
+          </a:xfrm>
+          <a:prstGeom prst="line">
+            <a:avLst/>
+          </a:prstGeom>
+          <a:ln w="19050">
+            <a:solidFill>
+              <a:srgbClr val="0D7377"/>
+            </a:solidFill>
+          </a:ln>
+        </p:spPr>
+        <p:txBody>
+          <a:bodyPr/>
+          <a:lstStyle/>
+          <a:p>
+            <a:endParaRPr/>
+          </a:p>
+        </p:txBody>
+      </p:sp>
+      <p:sp>
+        <p:nvSpPr>
+          <p:cNvPr id="19" name="Intro"/>
+          <p:cNvSpPr txBox="1"/>
+          <p:nvPr/>
+        </p:nvSpPr>
+        <p:spPr>
+          <a:xfrm>
+            <a:off x="457200" y="1100000"/>
+            <a:ext cx="11277600" cy="480000"/>
+          </a:xfrm>
+          <a:prstGeom prst="rect">
+            <a:avLst/>
+          </a:prstGeom>
+          <a:noFill/>
+          <a:ln>
+            <a:noFill/>
+          </a:ln>
+        </p:spPr>
+        <p:txBody>
+          <a:bodyPr wrap="square" lIns="91440" tIns="45720" rIns="91440" bIns="45720" rtlCol="0" anchor="t"/>
+          <a:lstStyle/>
+          <a:p>
+            <a:pPr marL="0" indent="0" algn="l">
+              <a:buNone/>
+            </a:pPr>
+            <a:r>
+              <a:rPr lang="en-US" sz="1700" i="1" dirty="0">
+                <a:solidFill>
+                  <a:srgbClr val="595959"/>
+                </a:solidFill>
+                <a:latin typeface="Arial"/>
+                <a:cs typeface="Arial"/>
+              </a:rPr>
+              <a:t>CRediT (Contributor Roles Taxonomy): 14 standard roles that journals now ask for.</a:t>
+            </a:r>
+          </a:p>
+        </p:txBody>
+      </p:sp>
+      <p:sp>
+        <p:nvSpPr>
+          <p:cNvPr id="70" name="CardHead"/>
+          <p:cNvSpPr/>
+          <p:nvPr/>
+        </p:nvSpPr>
+        <p:spPr>
+          <a:xfrm>
+            <a:off x="457200" y="1765612"/>
+            <a:ext cx="3625866" cy="640000"/>
+          </a:xfrm>
+          <a:prstGeom prst="rect">
+            <a:avLst/>
+          </a:prstGeom>
+          <a:solidFill>
+            <a:srgbClr val="0D7377"/>
+          </a:solidFill>
+          <a:ln>
+            <a:noFill/>
+          </a:ln>
+        </p:spPr>
+        <p:txBody>
+          <a:bodyPr wrap="square" lIns="91440" tIns="45720" rIns="91440" bIns="45720" rtlCol="0" anchor="ctr">
+            <a:normAutofit/>
+          </a:bodyPr>
+          <a:lstStyle/>
+          <a:p>
+            <a:pPr marL="0" indent="0" algn="ctr">
+              <a:buNone/>
+            </a:pPr>
+            <a:r>
+              <a:rPr lang="en-US" sz="1900" b="1" dirty="0">
+                <a:solidFill>
+                  <a:srgbClr val="FFFFFF"/>
+                </a:solidFill>
+                <a:latin typeface="Arial"/>
+                <a:cs typeface="Arial"/>
+              </a:rPr>
+              <a:t>Some of the 14 roles</a:t>
+            </a:r>
+          </a:p>
+        </p:txBody>
+      </p:sp>
+      <p:sp>
+        <p:nvSpPr>
+          <p:cNvPr id="71" name="CardBody"/>
+          <p:cNvSpPr/>
+          <p:nvPr/>
+        </p:nvSpPr>
+        <p:spPr>
+          <a:xfrm>
+            <a:off x="457200" y="2405612"/>
+            <a:ext cx="3625866" cy="2633164"/>
+          </a:xfrm>
+          <a:prstGeom prst="rect">
+            <a:avLst/>
+          </a:prstGeom>
+          <a:solidFill>
+            <a:srgbClr val="EAF2F5"/>
+          </a:solidFill>
+          <a:ln>
+            <a:noFill/>
+          </a:ln>
+        </p:spPr>
+        <p:txBody>
+          <a:bodyPr wrap="square" lIns="137160" tIns="91440" rIns="137160" bIns="91440" rtlCol="0" anchor="ctr">
+            <a:normAutofit/>
+          </a:bodyPr>
+          <a:lstStyle/>
+          <a:p>
+            <a:pPr marL="0" indent="0" algn="ctr">
+              <a:lnSpc>
+                <a:spcPct val="104000"/>
+              </a:lnSpc>
+              <a:spcBef>
+                <a:spcPts val="400"/>
+              </a:spcBef>
+              <a:buNone/>
+            </a:pPr>
+            <a:r>
+              <a:rPr lang="en-US" sz="1750" dirty="0">
+                <a:solidFill>
+                  <a:srgbClr val="000000"/>
+                </a:solidFill>
+                <a:latin typeface="Arial"/>
+                <a:cs typeface="Arial"/>
+              </a:rPr>
+              <a:t>Conceptualization</a:t>
+            </a:r>
+          </a:p>
+          <a:p>
+            <a:pPr marL="0" indent="0" algn="ctr">
+              <a:lnSpc>
+                <a:spcPct val="104000"/>
+              </a:lnSpc>
+              <a:spcBef>
+                <a:spcPts val="400"/>
+              </a:spcBef>
+              <a:buNone/>
+            </a:pPr>
+            <a:r>
+              <a:rPr lang="en-US" sz="1750" dirty="0">
+                <a:solidFill>
+                  <a:srgbClr val="000000"/>
+                </a:solidFill>
+                <a:latin typeface="Arial"/>
+                <a:cs typeface="Arial"/>
+              </a:rPr>
+              <a:t>Methodology</a:t>
+            </a:r>
+          </a:p>
+          <a:p>
+            <a:pPr marL="0" indent="0" algn="ctr">
+              <a:lnSpc>
+                <a:spcPct val="104000"/>
+              </a:lnSpc>
+              <a:spcBef>
+                <a:spcPts val="400"/>
+              </a:spcBef>
+              <a:buNone/>
+            </a:pPr>
+            <a:r>
+              <a:rPr lang="en-US" sz="1750" dirty="0">
+                <a:solidFill>
+                  <a:srgbClr val="000000"/>
+                </a:solidFill>
+                <a:latin typeface="Arial"/>
+                <a:cs typeface="Arial"/>
+              </a:rPr>
+              <a:t>Investigation</a:t>
+            </a:r>
+          </a:p>
+          <a:p>
+            <a:pPr marL="0" indent="0" algn="ctr">
+              <a:lnSpc>
+                <a:spcPct val="104000"/>
+              </a:lnSpc>
+              <a:spcBef>
+                <a:spcPts val="400"/>
+              </a:spcBef>
+              <a:buNone/>
+            </a:pPr>
+            <a:r>
+              <a:rPr lang="en-US" sz="1750" dirty="0">
+                <a:solidFill>
+                  <a:srgbClr val="000000"/>
+                </a:solidFill>
+                <a:latin typeface="Arial"/>
+                <a:cs typeface="Arial"/>
+              </a:rPr>
+              <a:t>Formal analysis</a:t>
+            </a:r>
+          </a:p>
+          <a:p>
+            <a:pPr marL="0" indent="0" algn="ctr">
+              <a:lnSpc>
+                <a:spcPct val="104000"/>
+              </a:lnSpc>
+              <a:spcBef>
+                <a:spcPts val="400"/>
+              </a:spcBef>
+              <a:buNone/>
+            </a:pPr>
+            <a:r>
+              <a:rPr lang="en-US" sz="1750" dirty="0">
+                <a:solidFill>
+                  <a:srgbClr val="000000"/>
+                </a:solidFill>
+                <a:latin typeface="Arial"/>
+                <a:cs typeface="Arial"/>
+              </a:rPr>
+              <a:t>Writing (original draft)</a:t>
+            </a:r>
+          </a:p>
+          <a:p>
+            <a:pPr marL="0" indent="0" algn="ctr">
+              <a:lnSpc>
+                <a:spcPct val="104000"/>
+              </a:lnSpc>
+              <a:spcBef>
+                <a:spcPts val="400"/>
+              </a:spcBef>
+              <a:buNone/>
+            </a:pPr>
+            <a:r>
+              <a:rPr lang="en-US" sz="1750" dirty="0">
+                <a:solidFill>
+                  <a:srgbClr val="000000"/>
+                </a:solidFill>
+                <a:latin typeface="Arial"/>
+                <a:cs typeface="Arial"/>
+              </a:rPr>
+              <a:t>Writing (review and editing)</a:t>
+            </a:r>
+          </a:p>
+          <a:p>
+            <a:pPr marL="0" indent="0" algn="ctr">
+              <a:lnSpc>
+                <a:spcPct val="104000"/>
+              </a:lnSpc>
+              <a:spcBef>
+                <a:spcPts val="400"/>
+              </a:spcBef>
+              <a:buNone/>
+            </a:pPr>
+            <a:r>
+              <a:rPr lang="en-US" sz="1750" dirty="0">
+                <a:solidFill>
+                  <a:srgbClr val="000000"/>
+                </a:solidFill>
+                <a:latin typeface="Arial"/>
+                <a:cs typeface="Arial"/>
+              </a:rPr>
+              <a:t>Supervision</a:t>
+            </a:r>
+          </a:p>
+        </p:txBody>
+      </p:sp>
+      <p:sp>
+        <p:nvSpPr>
+          <p:cNvPr id="72" name="CardHead"/>
+          <p:cNvSpPr/>
+          <p:nvPr/>
+        </p:nvSpPr>
+        <p:spPr>
+          <a:xfrm>
+            <a:off x="4283066" y="1765612"/>
+            <a:ext cx="3625866" cy="640000"/>
+          </a:xfrm>
+          <a:prstGeom prst="rect">
+            <a:avLst/>
+          </a:prstGeom>
+          <a:solidFill>
+            <a:srgbClr val="0B376C"/>
+          </a:solidFill>
+          <a:ln>
+            <a:noFill/>
+          </a:ln>
+        </p:spPr>
+        <p:txBody>
+          <a:bodyPr wrap="square" lIns="91440" tIns="45720" rIns="91440" bIns="45720" rtlCol="0" anchor="ctr">
+            <a:normAutofit/>
+          </a:bodyPr>
+          <a:lstStyle/>
+          <a:p>
+            <a:pPr marL="0" indent="0" algn="ctr">
+              <a:buNone/>
+            </a:pPr>
+            <a:r>
+              <a:rPr lang="en-US" sz="1900" b="1" dirty="0">
+                <a:solidFill>
+                  <a:srgbClr val="FFFFFF"/>
+                </a:solidFill>
+                <a:latin typeface="Arial"/>
+                <a:cs typeface="Arial"/>
+              </a:rPr>
+              <a:t>Paper 1 did it</a:t>
+            </a:r>
+          </a:p>
+        </p:txBody>
+      </p:sp>
+      <p:sp>
+        <p:nvSpPr>
+          <p:cNvPr id="73" name="CardBody"/>
+          <p:cNvSpPr/>
+          <p:nvPr/>
+        </p:nvSpPr>
+        <p:spPr>
+          <a:xfrm>
+            <a:off x="4283066" y="2405612"/>
+            <a:ext cx="3625866" cy="2633164"/>
+          </a:xfrm>
+          <a:prstGeom prst="rect">
+            <a:avLst/>
+          </a:prstGeom>
+          <a:solidFill>
+            <a:srgbClr val="EAF2F5"/>
+          </a:solidFill>
+          <a:ln>
+            <a:noFill/>
+          </a:ln>
+        </p:spPr>
+        <p:txBody>
+          <a:bodyPr wrap="square" lIns="137160" tIns="91440" rIns="137160" bIns="91440" rtlCol="0" anchor="ctr">
+            <a:normAutofit/>
+          </a:bodyPr>
+          <a:lstStyle/>
+          <a:p>
+            <a:pPr marL="0" indent="0" algn="ctr">
+              <a:lnSpc>
+                <a:spcPct val="104000"/>
+              </a:lnSpc>
+              <a:spcBef>
+                <a:spcPts val="400"/>
+              </a:spcBef>
+              <a:buNone/>
+            </a:pPr>
+            <a:r>
+              <a:rPr lang="en-US" sz="1750" dirty="0">
+                <a:solidFill>
+                  <a:srgbClr val="000000"/>
+                </a:solidFill>
+                <a:latin typeface="Arial"/>
+                <a:cs typeface="Arial"/>
+              </a:rPr>
+              <a:t>NB: Writing (original draft)</a:t>
+            </a:r>
+          </a:p>
+          <a:p>
+            <a:pPr marL="0" indent="0" algn="ctr">
+              <a:lnSpc>
+                <a:spcPct val="104000"/>
+              </a:lnSpc>
+              <a:spcBef>
+                <a:spcPts val="400"/>
+              </a:spcBef>
+              <a:buNone/>
+            </a:pPr>
+            <a:r>
+              <a:rPr lang="en-US" sz="1750" dirty="0">
+                <a:solidFill>
+                  <a:srgbClr val="000000"/>
+                </a:solidFill>
+                <a:latin typeface="Arial"/>
+                <a:cs typeface="Arial"/>
+              </a:rPr>
+              <a:t>CS: Methodology, Formal analysis</a:t>
+            </a:r>
+          </a:p>
+          <a:p>
+            <a:pPr marL="0" indent="0" algn="ctr">
+              <a:lnSpc>
+                <a:spcPct val="104000"/>
+              </a:lnSpc>
+              <a:spcBef>
+                <a:spcPts val="400"/>
+              </a:spcBef>
+              <a:buNone/>
+            </a:pPr>
+            <a:r>
+              <a:rPr lang="en-US" sz="1750" dirty="0">
+                <a:solidFill>
+                  <a:srgbClr val="000000"/>
+                </a:solidFill>
+                <a:latin typeface="Arial"/>
+                <a:cs typeface="Arial"/>
+              </a:rPr>
+              <a:t>SDB: Conceptualization, Supervision, Funding acquisition</a:t>
+            </a:r>
+          </a:p>
+        </p:txBody>
+      </p:sp>
+      <p:sp>
+        <p:nvSpPr>
+          <p:cNvPr id="74" name="CardHead"/>
+          <p:cNvSpPr/>
+          <p:nvPr/>
+        </p:nvSpPr>
+        <p:spPr>
+          <a:xfrm>
+            <a:off x="8108932" y="1765612"/>
+            <a:ext cx="3625866" cy="640000"/>
+          </a:xfrm>
+          <a:prstGeom prst="rect">
+            <a:avLst/>
+          </a:prstGeom>
+          <a:solidFill>
+            <a:srgbClr val="5FA39B"/>
+          </a:solidFill>
+          <a:ln>
+            <a:noFill/>
+          </a:ln>
+        </p:spPr>
+        <p:txBody>
+          <a:bodyPr wrap="square" lIns="91440" tIns="45720" rIns="91440" bIns="45720" rtlCol="0" anchor="ctr">
+            <a:normAutofit/>
+          </a:bodyPr>
+          <a:lstStyle/>
+          <a:p>
+            <a:pPr marL="0" indent="0" algn="ctr">
+              <a:buNone/>
+            </a:pPr>
+            <a:r>
+              <a:rPr lang="en-US" sz="1900" b="1" dirty="0">
+                <a:solidFill>
+                  <a:srgbClr val="FFFFFF"/>
+                </a:solidFill>
+                <a:latin typeface="Arial"/>
+                <a:cs typeface="Arial"/>
+              </a:rPr>
+              <a:t>Your proposal</a:t>
+            </a:r>
+          </a:p>
+        </p:txBody>
+      </p:sp>
+      <p:sp>
+        <p:nvSpPr>
+          <p:cNvPr id="75" name="CardBody"/>
+          <p:cNvSpPr/>
+          <p:nvPr/>
+        </p:nvSpPr>
+        <p:spPr>
+          <a:xfrm>
+            <a:off x="8108932" y="2405612"/>
+            <a:ext cx="3625866" cy="2633164"/>
+          </a:xfrm>
+          <a:prstGeom prst="rect">
+            <a:avLst/>
+          </a:prstGeom>
+          <a:solidFill>
+            <a:srgbClr val="EAF2F5"/>
+          </a:solidFill>
+          <a:ln>
+            <a:noFill/>
+          </a:ln>
+        </p:spPr>
+        <p:txBody>
+          <a:bodyPr wrap="square" lIns="137160" tIns="91440" rIns="137160" bIns="91440" rtlCol="0" anchor="ctr">
+            <a:normAutofit/>
+          </a:bodyPr>
+          <a:lstStyle/>
+          <a:p>
+            <a:pPr marL="0" indent="0" algn="ctr">
+              <a:lnSpc>
+                <a:spcPct val="104000"/>
+              </a:lnSpc>
+              <a:spcBef>
+                <a:spcPts val="400"/>
+              </a:spcBef>
+              <a:buNone/>
+            </a:pPr>
+            <a:r>
+              <a:rPr lang="en-US" sz="1750" dirty="0">
+                <a:solidFill>
+                  <a:srgbClr val="000000"/>
+                </a:solidFill>
+                <a:latin typeface="Arial"/>
+                <a:cs typeface="Arial"/>
+              </a:rPr>
+              <a:t>Agree the author list now</a:t>
+            </a:r>
+          </a:p>
+          <a:p>
+            <a:pPr marL="0" indent="0" algn="ctr">
+              <a:lnSpc>
+                <a:spcPct val="104000"/>
+              </a:lnSpc>
+              <a:spcBef>
+                <a:spcPts val="400"/>
+              </a:spcBef>
+              <a:buNone/>
+            </a:pPr>
+            <a:r>
+              <a:rPr lang="en-US" sz="1750" dirty="0">
+                <a:solidFill>
+                  <a:srgbClr val="000000"/>
+                </a:solidFill>
+                <a:latin typeface="Arial"/>
+                <a:cs typeface="Arial"/>
+              </a:rPr>
+              <a:t>Write each person's roles</a:t>
+            </a:r>
+          </a:p>
+          <a:p>
+            <a:pPr marL="0" indent="0" algn="ctr">
+              <a:lnSpc>
+                <a:spcPct val="104000"/>
+              </a:lnSpc>
+              <a:spcBef>
+                <a:spcPts val="400"/>
+              </a:spcBef>
+              <a:buNone/>
+            </a:pPr>
+            <a:r>
+              <a:rPr lang="en-US" sz="1750" dirty="0">
+                <a:solidFill>
+                  <a:srgbClr val="000000"/>
+                </a:solidFill>
+                <a:latin typeface="Arial"/>
+                <a:cs typeface="Arial"/>
+              </a:rPr>
+              <a:t>Revisit before submission</a:t>
+            </a:r>
+          </a:p>
+        </p:txBody>
+      </p:sp>
+      <p:sp>
+        <p:nvSpPr>
+          <p:cNvPr id="60" name="Takeaway"/>
+          <p:cNvSpPr/>
+          <p:nvPr/>
+        </p:nvSpPr>
+        <p:spPr>
+          <a:xfrm>
+            <a:off x="457200" y="5390000"/>
+            <a:ext cx="11277600" cy="560000"/>
+          </a:xfrm>
+          <a:prstGeom prst="roundRect">
+            <a:avLst>
+              <a:gd name="adj" fmla="val 12000"/>
+            </a:avLst>
+          </a:prstGeom>
+          <a:solidFill>
+            <a:srgbClr val="0D7377"/>
+          </a:solidFill>
+          <a:ln>
+            <a:noFill/>
+          </a:ln>
+        </p:spPr>
+        <p:txBody>
+          <a:bodyPr wrap="square" lIns="182880" tIns="45720" rIns="182880" bIns="45720" rtlCol="0" anchor="ctr">
+            <a:normAutofit/>
+          </a:bodyPr>
+          <a:lstStyle/>
+          <a:p>
+            <a:pPr marL="0" indent="0" algn="ctr">
+              <a:buNone/>
+            </a:pPr>
+            <a:r>
+              <a:rPr lang="en-US" sz="1300" b="1" dirty="0">
+                <a:solidFill>
+                  <a:srgbClr val="FFFFFF"/>
+                </a:solidFill>
+                <a:latin typeface="Arial"/>
+                <a:cs typeface="Arial"/>
+              </a:rPr>
+              <a:t>KEY MESSAGE   </a:t>
+            </a:r>
+            <a:r>
+              <a:rPr lang="en-US" sz="1550" dirty="0">
+                <a:solidFill>
+                  <a:srgbClr val="FFFFFF"/>
+                </a:solidFill>
+                <a:latin typeface="Arial"/>
+                <a:cs typeface="Arial"/>
+              </a:rPr>
+              <a:t>Transparent roles prevent gift and ghost authorship.</a:t>
+            </a:r>
+          </a:p>
+        </p:txBody>
+      </p:sp>
+      <p:sp>
+        <p:nvSpPr>
+          <p:cNvPr id="901" name="Footer"/>
+          <p:cNvSpPr txBox="1"/>
+          <p:nvPr/>
+        </p:nvSpPr>
+        <p:spPr>
+          <a:xfrm>
+            <a:off x="4599946" y="6458701"/>
+            <a:ext cx="2845651" cy="276999"/>
+          </a:xfrm>
+          <a:prstGeom prst="rect">
+            <a:avLst/>
+          </a:prstGeom>
+          <a:noFill/>
+          <a:ln>
+            <a:noFill/>
+          </a:ln>
+        </p:spPr>
+        <p:txBody>
+          <a:bodyPr wrap="none" lIns="91440" tIns="45720" rIns="91440" bIns="45720" rtlCol="0" anchor="t"/>
+          <a:lstStyle/>
+          <a:p>
+            <a:r>
+              <a:rPr lang="en-US" sz="1200" dirty="0">
+                <a:solidFill>
+                  <a:schemeClr val="accent5">
+                    <a:lumMod val="50000"/>
+                  </a:schemeClr>
+                </a:solidFill>
+                <a:latin typeface="Arial"/>
+              </a:rPr>
+              <a:t>Neudata | #ClearDataClearImpact</a:t>
+            </a:r>
+          </a:p>
+        </p:txBody>
+      </p:sp>
+      <p:pic>
+        <p:nvPicPr>
+          <p:cNvPr id="902" name="Logo"/>
+          <p:cNvPicPr>
+            <a:picLocks noChangeAspect="1"/>
+          </p:cNvPicPr>
+          <p:nvPr/>
+        </p:nvPicPr>
+        <p:blipFill>
+          <a:blip r:embed="rId3"/>
+          <a:stretch>
+            <a:fillRect/>
+          </a:stretch>
+        </p:blipFill>
+        <p:spPr>
+          <a:xfrm>
+            <a:off x="138853" y="6122125"/>
+            <a:ext cx="716763" cy="683623"/>
+          </a:xfrm>
+          <a:prstGeom prst="rect">
+            <a:avLst/>
+          </a:prstGeom>
+        </p:spPr>
+      </p:pic>
+      <p:sp>
+        <p:nvSpPr>
+          <p:cNvPr id="903" name="Slide Number"/>
+          <p:cNvSpPr>
+            <a:spLocks noGrp="1"/>
+          </p:cNvSpPr>
+          <p:nvPr>
+            <p:ph type="sldNum" sz="quarter" idx="12"/>
+          </p:nvPr>
+        </p:nvSpPr>
+        <p:spPr>
+          <a:xfrm>
+            <a:off x="11330000" y="6470000"/>
+            <a:ext cx="620000" cy="320000"/>
+          </a:xfrm>
+        </p:spPr>
+        <p:txBody>
+          <a:bodyPr/>
+          <a:lstStyle/>
+          <a:p>
+            <a:pPr algn="r"/>
+            <a:fld id="{C1FF6DA9-008F-8B48-92A6-B652298478BF}" type="slidenum">
+              <a:rPr lang="en-US" sz="1050" smtClean="0">
+                <a:solidFill>
+                  <a:schemeClr val="accent5">
+                    <a:lumMod val="50000"/>
+                  </a:schemeClr>
+                </a:solidFill>
+              </a:rPr>
+              <a:t>2</a:t>
+            </a:fld>
+            <a:endParaRPr lang="en-US"/>
+          </a:p>
+        </p:txBody>
+      </p:sp>
+    </p:spTree>
+  </p:cSld>
+  <p:clrMapOvr>
+    <a:masterClrMapping/>
+  </p:clrMapOvr>
+</p:sld>
+</file>
+
+<file path=ppt/slides/slide46.xml><?xml version="1.0" encoding="utf-8"?>
 <p:sld xmlns:a="http://schemas.openxmlformats.org/drawingml/2006/main" xmlns:r="http://schemas.openxmlformats.org/officeDocument/2006/relationships" xmlns:p="http://schemas.openxmlformats.org/presentationml/2006/main">
   <p:cSld>
     <p:bg>

--- a/en/files/slides/Session_7_EN.pptx
+++ b/en/files/slides/Session_7_EN.pptx
@@ -734,7 +734,7 @@
           <a:p>
             <a:r>
               <a:rPr lang="en-US" sz="1400" b="0" dirty="0"/>
-              <a:t>Session 7 (19:30-22:30, break 20:45-21:00). Before the break: ethics, integrity and Proposal Part 4. After the break: the Results section.</a:t>
+              <a:t>Session 7 (19:30-22:30, break 20:45-21:00). Before the break: ethics, integrity and Proposal Part 4. After the break: IMRaD, Methods and Results.</a:t>
             </a:r>
           </a:p>
           <a:p>
@@ -1124,12 +1124,6 @@
           <a:p>
             <a:r>
               <a:rPr lang="en-US" sz="1400" b="0" dirty="0"/>
-              <a:t>It is simulated: participants put the simulated-data sentence under their title, as the brief says. An ethics paragraph is only needed if they write the optional Methods.</a:t>
-            </a:r>
-          </a:p>
-          <a:p>
-            <a:r>
-              <a:rPr lang="en-US" sz="1400" b="0" dirty="0"/>
               <a:t>Ask: where does this paragraph go in a real paper? Expected: the Methods.</a:t>
             </a:r>
           </a:p>
@@ -2159,7 +2153,7 @@
           <a:p>
             <a:r>
               <a:rPr lang="en-US" sz="1400" b="0" dirty="0"/>
-              <a:t>Homework: Part 4 of their own proposal. Volunteers who want to present email the course lead by the Wednesday before Session 8.</a:t>
+              <a:t>Homework: Part 4 of their own proposal. Volunteers who want to present email the course lead by Wednesday 16 December.</a:t>
             </a:r>
           </a:p>
         </p:txBody>
@@ -2327,13 +2321,13 @@
           <a:p>
             <a:r>
               <a:rPr lang="en-US" sz="1400" b="0" dirty="0"/>
-              <a:t>Section 7.3 (21:00-21:35). Nine slides and a 3-minute check.</a:t>
+              <a:t>Section 7.3 (21:00-21:35). Ten slides and a 3-minute check.</a:t>
             </a:r>
           </a:p>
           <a:p>
             <a:r>
               <a:rPr lang="en-US" sz="1400" b="0" dirty="0"/>
-              <a:t>The Results slides and their worked examples are the heart of the block. The Methods slides are shorter: Methods is optional for the manuscript.</a:t>
+              <a:t>IMRaD first, then Methods and Results, each with a worked example on Q1. The check practises both.</a:t>
             </a:r>
           </a:p>
         </p:txBody>
@@ -2414,19 +2408,19 @@
           <a:p>
             <a:r>
               <a:rPr lang="en-US" sz="1400" b="0" dirty="0"/>
-              <a:t>Writers start from the evidence: tables first, the title last.</a:t>
+              <a:t>IMRaD: Introduction (why), Methods (what we did), Results (what we found), Discussion (what it means). The abstract and title summarise it.</a:t>
             </a:r>
           </a:p>
           <a:p>
             <a:r>
               <a:rPr lang="en-US" sz="1400" b="0" dirty="0"/>
-              <a:t>For FLUID-ICU the tables already exist in your results pack, so your Results section starts from them.</a:t>
+              <a:t>The Introduction narrows to the question, the Discussion widens back to practice. Paper 1's Introduction is a three-paragraph funnel, and its Discussion opens by answering the question.</a:t>
             </a:r>
           </a:p>
           <a:p>
             <a:r>
               <a:rPr lang="en-US" sz="1400" b="0" dirty="0"/>
-              <a:t>Misconception: 'I must finish the Introduction before I can start'.</a:t>
+              <a:t>Today: Methods and Results. Next Saturday: Introduction, Discussion, abstract and title.</a:t>
             </a:r>
           </a:p>
         </p:txBody>
@@ -2507,19 +2501,19 @@
           <a:p>
             <a:r>
               <a:rPr lang="en-US" sz="1400" b="0" dirty="0"/>
-              <a:t>Methods: enough detail to repeat the study, in STROBE order.</a:t>
+              <a:t>Writers start from the evidence: tables first, the title last.</a:t>
             </a:r>
           </a:p>
           <a:p>
             <a:r>
               <a:rPr lang="en-US" sz="1400" b="0" dirty="0"/>
-              <a:t>Good: Paper 1 describes its intervention well enough to replicate. To fix: Paper 2 never says how missing covariates were handled.</a:t>
+              <a:t>For FLUID-ICU the tables already exist in your results pack, so your Results section starts from them.</a:t>
             </a:r>
           </a:p>
           <a:p>
             <a:r>
               <a:rPr lang="en-US" sz="1400" b="0" dirty="0"/>
-              <a:t>Methods is optional for the manuscript: all the facts are in the results pack, the SAP and the data dictionary.</a:t>
+              <a:t>Misconception: 'I must finish the Introduction before I can start'.</a:t>
             </a:r>
           </a:p>
         </p:txBody>
@@ -2600,19 +2594,19 @@
           <a:p>
             <a:r>
               <a:rPr lang="en-US" sz="1400" b="0" dirty="0"/>
-              <a:t>For participants who write the optional Methods. One sentence per STROBE item, all from results pack Q1, section 2.</a:t>
+              <a:t>Methods: enough detail to repeat the study, in STROBE order.</a:t>
             </a:r>
           </a:p>
           <a:p>
             <a:r>
               <a:rPr lang="en-US" sz="1400" b="0" dirty="0"/>
-              <a:t>Item 10: for a fixed cohort, say all eligible patients were included.</a:t>
+              <a:t>Good: Paper 1 describes its intervention well enough to replicate. To fix: Paper 2 never says how missing covariates were handled.</a:t>
             </a:r>
           </a:p>
           <a:p>
             <a:r>
               <a:rPr lang="en-US" sz="1400" b="0" dirty="0"/>
-              <a:t>Ask: which sentence would a reader need to repeat the study? Expected: how fluid balance was calculated.</a:t>
+              <a:t>For FLUID-ICU, all the facts are in the results pack, the SAP and the data dictionary.</a:t>
             </a:r>
           </a:p>
         </p:txBody>
@@ -2693,13 +2687,19 @@
           <a:p>
             <a:r>
               <a:rPr lang="en-US" sz="1400" b="0" dirty="0"/>
-              <a:t>STROBE item 12 for Q1. Covariates were chosen in the SAP before the data were seen.</a:t>
+              <a:t>One sentence per STROBE item, all from results pack Q1, section 2.</a:t>
             </a:r>
           </a:p>
           <a:p>
             <a:r>
               <a:rPr lang="en-US" sz="1400" b="0" dirty="0"/>
-              <a:t>Every number in the Results must trace back to one sentence here. Reviewers read this paragraph first.</a:t>
+              <a:t>Item 10: for a fixed cohort, say all eligible patients were included.</a:t>
+            </a:r>
+          </a:p>
+          <a:p>
+            <a:r>
+              <a:rPr lang="en-US" sz="1400" b="0" dirty="0"/>
+              <a:t>Ask: which sentence would a reader need to repeat the study? Expected: how fluid balance was calculated.</a:t>
             </a:r>
           </a:p>
         </p:txBody>
@@ -2786,7 +2786,13 @@
           <a:p>
             <a:r>
               <a:rPr lang="en-US" sz="1400" b="0" dirty="0"/>
-              <a:t>Results section: we give the results for each person's question, they write a submission-ready Results section. Methods, Introduction, Discussion and Abstract are optional.</a:t>
+              <a:t>Results section: we give the results for each person's question, they write a submission-ready Results section.</a:t>
+            </a:r>
+          </a:p>
+          <a:p>
+            <a:r>
+              <a:rPr lang="en-US" sz="1400" b="0" dirty="0"/>
+              <a:t>Every section is taught: Methods and Results today, Introduction, Discussion, abstract and title next week. Only the Results must be submitted.</a:t>
             </a:r>
           </a:p>
           <a:p>
@@ -2873,13 +2879,13 @@
           <a:p>
             <a:r>
               <a:rPr lang="en-US" sz="1400" b="0" dirty="0"/>
-              <a:t>Four rules. Participants first, with a flow. Effects with 95% CIs, not 'p = 0.42, NS'. No interpretation. One home per number, and text and tables must agree: Paper 1's text and Table 1 disagree on creatinine.</a:t>
+              <a:t>STROBE item 12 for Q1. Covariates were chosen in the SAP before the data were seen.</a:t>
             </a:r>
           </a:p>
           <a:p>
             <a:r>
               <a:rPr lang="en-US" sz="1400" b="0" dirty="0"/>
-              <a:t>Before submitting, check every number against your results pack.</a:t>
+              <a:t>Every number in the Results must trace back to one sentence here. Reviewers read this paragraph first.</a:t>
             </a:r>
           </a:p>
         </p:txBody>
@@ -2960,19 +2966,13 @@
           <a:p>
             <a:r>
               <a:rPr lang="en-US" sz="1400" b="0" dirty="0"/>
-              <a:t>All numbers from results pack Q1 (simulated). One sentence per STROBE item, 13 to 17.</a:t>
+              <a:t>Four rules. Participants first, with a flow. Effects with 95% CIs, not 'p = 0.42, NS'. No interpretation. One home per number, and text and tables must agree: Paper 1's text and Table 1 disagree on creatinine.</a:t>
             </a:r>
           </a:p>
           <a:p>
             <a:r>
               <a:rPr lang="en-US" sz="1400" b="0" dirty="0"/>
-              <a:t>Point out what is missing: no 'because', no 'significant', no reason why the OR shrank. That belongs in a Discussion.</a:t>
-            </a:r>
-          </a:p>
-          <a:p>
-            <a:r>
-              <a:rPr lang="en-US" sz="1400" b="0" dirty="0"/>
-              <a:t>Poll: which item asks for crude and adjusted estimates? Expected: 16.</a:t>
+              <a:t>Before submitting, check every number against your results pack.</a:t>
             </a:r>
           </a:p>
         </p:txBody>
@@ -3053,19 +3053,19 @@
           <a:p>
             <a:r>
               <a:rPr lang="en-US" sz="1400" b="0" dirty="0"/>
-              <a:t>A table must stand alone: a title that says what, who and when, n per column, units and summary per row, footnotes for abbreviations and missing data.</a:t>
+              <a:t>All numbers from results pack Q1 (simulated). One sentence per STROBE item, 13 to 17.</a:t>
             </a:r>
           </a:p>
           <a:p>
             <a:r>
               <a:rPr lang="en-US" sz="1400" b="0" dirty="0"/>
-              <a:t>Errors in the papers: wrong units (Paper 1), no numbers at risk under a Kaplan-Meier curve (Paper 2).</a:t>
+              <a:t>Point out what is missing: no 'because', no 'significant', no reason why the OR shrank. That belongs in a Discussion.</a:t>
             </a:r>
           </a:p>
           <a:p>
             <a:r>
               <a:rPr lang="en-US" sz="1400" b="0" dirty="0"/>
-              <a:t>Ask: what is wrong with a table titled 'Results'?</a:t>
+              <a:t>Poll: which item asks for crude and adjusted estimates? Expected: 16.</a:t>
             </a:r>
           </a:p>
         </p:txBody>
@@ -3146,13 +3146,19 @@
           <a:p>
             <a:r>
               <a:rPr lang="en-US" sz="1400" b="0" dirty="0"/>
-              <a:t>From Table 1 to one Results sentence (STROBE 14): 'Patients with a positive balance were sicker at baseline (median SOFA 8 vs 6, vasopressors 55.0% vs 24.9%) and less often had heart failure (11.5% vs 22.0%).'</a:t>
+              <a:t>A table must stand alone: a title that says what, who and when, n per column, units and summary per row, footnotes for abbreviations and missing data.</a:t>
             </a:r>
           </a:p>
           <a:p>
             <a:r>
               <a:rPr lang="en-US" sz="1400" b="0" dirty="0"/>
-              <a:t>The sentence describes, it does not test: no p-values.</a:t>
+              <a:t>Errors in the papers: wrong units (Paper 1), no numbers at risk under a Kaplan-Meier curve (Paper 2).</a:t>
+            </a:r>
+          </a:p>
+          <a:p>
+            <a:r>
+              <a:rPr lang="en-US" sz="1400" b="0" dirty="0"/>
+              <a:t>Ask: what is wrong with a table titled 'Results'?</a:t>
             </a:r>
           </a:p>
         </p:txBody>
@@ -3233,19 +3239,13 @@
           <a:p>
             <a:r>
               <a:rPr lang="en-US" sz="1400" b="0" dirty="0"/>
-              <a:t>FLUID-ICU is a cohort, so STROBE. The Results section covers items 13 to 17.</a:t>
+              <a:t>From Table 1 to one Results sentence (STROBE 14): 'Patients with a positive balance were sicker at baseline (median SOFA 8 vs 6, vasopressors 55.0% vs 24.9%) and less often had heart failure (11.5% vs 22.0%).'</a:t>
             </a:r>
           </a:p>
           <a:p>
             <a:r>
               <a:rPr lang="en-US" sz="1400" b="0" dirty="0"/>
-              <a:t>Most often forgotten: 16 (crude and adjusted, with the variables adjusted for) and missing data.</a:t>
-            </a:r>
-          </a:p>
-          <a:p>
-            <a:r>
-              <a:rPr lang="en-US" sz="1400" b="0" dirty="0"/>
-              <a:t>Poll: which item covers Table 1? Expected: 14.</a:t>
+              <a:t>The sentence describes, it does not test: no p-values.</a:t>
             </a:r>
           </a:p>
         </p:txBody>
@@ -3326,19 +3326,19 @@
           <a:p>
             <a:r>
               <a:rPr lang="en-US" sz="1400" b="0" dirty="0"/>
-              <a:t>Check (21:32-21:35). One poll per sentence.</a:t>
+              <a:t>FLUID-ICU is a cohort, so STROBE. The Results section covers items 13 to 17.</a:t>
             </a:r>
           </a:p>
           <a:p>
             <a:r>
               <a:rPr lang="en-US" sz="1400" b="0" dirty="0"/>
-              <a:t>Sentence 4 is the trick: how missing data were handled is Methods, how many were missing is Results.</a:t>
+              <a:t>Most often forgotten: 16 (crude and adjusted, with the variables adjusted for) and missing data.</a:t>
             </a:r>
           </a:p>
           <a:p>
             <a:r>
               <a:rPr lang="en-US" sz="1400" b="0" dirty="0"/>
-              <a:t>Sentence 3 is the classic error: interpretation in the Results.</a:t>
+              <a:t>Poll: which item covers Table 1? Expected: 14.</a:t>
             </a:r>
           </a:p>
         </p:txBody>
@@ -3419,19 +3419,19 @@
           <a:p>
             <a:r>
               <a:rPr lang="en-US" sz="1400" b="0" dirty="0"/>
-              <a:t>Manuscript workshop 1 (21:35-22:20).</a:t>
+              <a:t>Check (21:32-21:35). One poll per sentence.</a:t>
             </a:r>
           </a:p>
           <a:p>
             <a:r>
               <a:rPr lang="en-US" sz="1400" b="0" dirty="0"/>
-              <a:t>Part 1: you write the Q1 Results live, calling on people for sentences. Part 2: each participant starts the Results for their own question.</a:t>
+              <a:t>Sentence 4 is the trick: how missing data were handled is Methods, how many were missing is Results.</a:t>
             </a:r>
           </a:p>
           <a:p>
             <a:r>
               <a:rPr lang="en-US" sz="1400" b="0" dirty="0"/>
-              <a:t>Instructions: s7_exercises Part C. Model text: s7_solutions Part C (steer with it, do not paste it).</a:t>
+              <a:t>Sentence 3 is the classic error: interpretation in the Results.</a:t>
             </a:r>
           </a:p>
         </p:txBody>
@@ -3512,25 +3512,19 @@
           <a:p>
             <a:r>
               <a:rPr lang="en-US" sz="1400" b="0" dirty="0"/>
-              <a:t>Workshop part 1 (21:35-22:05). Keep a visible timer.</a:t>
+              <a:t>Manuscript workshop 1 (21:35-22:20).</a:t>
             </a:r>
           </a:p>
           <a:p>
             <a:r>
               <a:rPr lang="en-US" sz="1400" b="0" dirty="0"/>
-              <a:t>Order: flow, Table 1 sentence, deaths per group, crude and adjusted OR, Cox HR and imputation.</a:t>
+              <a:t>Part 1: you write the Q1 Results live, calling on people for sentences. Part 2: each participant starts the Results for their own question.</a:t>
             </a:r>
           </a:p>
           <a:p>
             <a:r>
               <a:rPr lang="en-US" sz="1400" b="0" dirty="0"/>
-              <a:t>Prompts: 'Is there a number without its CI?' 'Is there an adjective that should be a number?' 'Any interpretation?'</a:t>
-            </a:r>
-          </a:p>
-          <a:p>
-            <a:r>
-              <a:rPr lang="en-US" sz="1400" b="0" dirty="0"/>
-              <a:t>Aim for about 300 words. Send the class draft as a PDF after the session.</a:t>
+              <a:t>Instructions: s7_exercises Part C. Model text: s7_solutions Part C (steer with it, do not paste it).</a:t>
             </a:r>
           </a:p>
         </p:txBody>
@@ -3611,19 +3605,25 @@
           <a:p>
             <a:r>
               <a:rPr lang="en-US" sz="1400" b="0" dirty="0"/>
-              <a:t>Workshop part 2 (22:05-22:20). Quiet individual writing. Answer questions in the chat.</a:t>
+              <a:t>Workshop part 1 (21:35-22:05). Keep a visible timer.</a:t>
             </a:r>
           </a:p>
           <a:p>
             <a:r>
               <a:rPr lang="en-US" sz="1400" b="0" dirty="0"/>
-              <a:t>Q1: rewrite in your own words, do not copy the class draft. Q3: ventilator-free days count death as zero. Q4: report both complete-case and imputed estimates. Q5: survivors only, medians and IQR.</a:t>
+              <a:t>Order: flow, Table 1 sentence, deaths per group, crude and adjusted OR, Cox HR and imputation.</a:t>
             </a:r>
           </a:p>
           <a:p>
             <a:r>
               <a:rPr lang="en-US" sz="1400" b="0" dirty="0"/>
-              <a:t>Optional parts can be added if there is time.</a:t>
+              <a:t>Prompts: 'Is there a number without its CI?' 'Is there an adjective that should be a number?' 'Any interpretation?'</a:t>
+            </a:r>
+          </a:p>
+          <a:p>
+            <a:r>
+              <a:rPr lang="en-US" sz="1400" b="0" dirty="0"/>
+              <a:t>Aim for about 300 words. Send the class draft as a PDF after the session.</a:t>
             </a:r>
           </a:p>
         </p:txBody>
@@ -3704,7 +3704,19 @@
           <a:p>
             <a:r>
               <a:rPr lang="en-US" sz="1400" b="0" dirty="0"/>
-              <a:t>Key words (22:20-22:22). Show the term, call on someone to explain it, then reveal.</a:t>
+              <a:t>Workshop part 2 (22:05-22:20). Quiet individual writing. Answer questions in the chat.</a:t>
+            </a:r>
+          </a:p>
+          <a:p>
+            <a:r>
+              <a:rPr lang="en-US" sz="1400" b="0" dirty="0"/>
+              <a:t>Q1: rewrite in your own words, do not copy the class draft. Q3: ventilator-free days count death as zero. Q4: report both complete-case and imputed estimates. Q5: survivors only, medians and IQR.</a:t>
+            </a:r>
+          </a:p>
+          <a:p>
+            <a:r>
+              <a:rPr lang="en-US" sz="1400" b="0" dirty="0"/>
+              <a:t>Other sections may be added, but only the Results must be submitted.</a:t>
             </a:r>
           </a:p>
         </p:txBody>
@@ -3878,13 +3890,7 @@
           <a:p>
             <a:r>
               <a:rPr lang="en-US" sz="1400" b="0" dirty="0"/>
-              <a:t>Peer review (22:22-22:24). Show the list of reviewer pairs on screen and say it was drawn at random. Everyone reviews one draft and receives one review.</a:t>
-            </a:r>
-          </a:p>
-          <a:p>
-            <a:r>
-              <a:rPr lang="en-US" sz="1400" b="0" dirty="0"/>
-              <a:t>Sending the draft straight to the reviewer saves time: the review is due two weeks later, the revision four weeks after that.</a:t>
+              <a:t>Key words (22:20-22:22). Show the term, call on someone to explain it, then reveal.</a:t>
             </a:r>
           </a:p>
         </p:txBody>
@@ -3965,19 +3971,13 @@
           <a:p>
             <a:r>
               <a:rPr lang="en-US" sz="1400" b="0" dirty="0"/>
-              <a:t>Wrap-up (22:24-22:30). Read the three messages and call on one person to add a fourth.</a:t>
+              <a:t>Peer review (22:22-22:24). Show the list of reviewer pairs on screen and say it was drawn at random. Everyone reviews one draft and receives one review.</a:t>
             </a:r>
           </a:p>
           <a:p>
             <a:r>
               <a:rPr lang="en-US" sz="1400" b="0" dirty="0"/>
-              <a:t>Read the exit answers before Session 8 and open with them.</a:t>
-            </a:r>
-          </a:p>
-          <a:p>
-            <a:r>
-              <a:rPr lang="en-US" sz="1400" b="0" dirty="0"/>
-              <a:t>Homework: Part 4 of the proposal, the Results draft, the 6 slides (Presentation_Guide).</a:t>
+              <a:t>Sending the draft straight to the reviewer saves time: the review is due ten days later, the revision ten days after that.</a:t>
             </a:r>
           </a:p>
         </p:txBody>
@@ -4058,7 +4058,19 @@
           <a:p>
             <a:r>
               <a:rPr lang="en-US" sz="1400" b="0" dirty="0"/>
-              <a:t>Extra slides: optional, for a fast class or self-study.</a:t>
+              <a:t>Wrap-up (22:24-22:30). Read the three messages and call on one person to add a fourth.</a:t>
+            </a:r>
+          </a:p>
+          <a:p>
+            <a:r>
+              <a:rPr lang="en-US" sz="1400" b="0" dirty="0"/>
+              <a:t>Read the exit answers before Session 8 and open with them.</a:t>
+            </a:r>
+          </a:p>
+          <a:p>
+            <a:r>
+              <a:rPr lang="en-US" sz="1400" b="0" dirty="0"/>
+              <a:t>Homework: Part 4 of the proposal, the Results draft, the 6 slides (Presentation_Guide).</a:t>
             </a:r>
           </a:p>
         </p:txBody>
@@ -4139,13 +4151,7 @@
           <a:p>
             <a:r>
               <a:rPr lang="en-US" sz="1400" b="0" dirty="0"/>
-              <a:t>Extra check. One poll per scenario: must, should or not needed.</a:t>
-            </a:r>
-          </a:p>
-          <a:p>
-            <a:r>
-              <a:rPr lang="en-US" sz="1400" b="0" dirty="0"/>
-              <a:t>Scenario 4: an audit goes through the quality office, not a registry. To publish it as research, ask the ethics committee first.</a:t>
+              <a:t>Extra slides: optional, for a fast class or self-study.</a:t>
             </a:r>
           </a:p>
         </p:txBody>
@@ -4226,13 +4232,13 @@
           <a:p>
             <a:r>
               <a:rPr lang="en-US" sz="1400" b="0" dirty="0"/>
-              <a:t>Extra. IMRaD: the Introduction narrows to the question, the Discussion widens back to practice.</a:t>
+              <a:t>Extra check. One poll per scenario: must, should or not needed.</a:t>
             </a:r>
           </a:p>
           <a:p>
             <a:r>
               <a:rPr lang="en-US" sz="1400" b="0" dirty="0"/>
-              <a:t>Paper 1's Introduction is a three-paragraph funnel, and its Discussion opens by answering the question.</a:t>
+              <a:t>Scenario 4: an audit goes through the quality office, not a registry. To publish it as research, ask the ethics committee first.</a:t>
             </a:r>
           </a:p>
         </p:txBody>
@@ -7970,7 +7976,7 @@
                 <a:latin typeface="Arial"/>
                 <a:cs typeface="Arial"/>
               </a:rPr>
-              <a:t>Session 7 · Protect &amp; write: ethics, integrity and the Results section</a:t>
+              <a:t>Session 7 · Protect &amp; write: ethics, integrity, Methods and Results</a:t>
             </a:r>
           </a:p>
         </p:txBody>
@@ -8139,7 +8145,7 @@
                 <a:latin typeface="Arial"/>
                 <a:cs typeface="Arial"/>
               </a:rPr>
-              <a:t>21:00  7.3  Writing the paper (I): the Results section, tables, STROBE</a:t>
+              <a:t>21:00  7.3  Writing the paper (I): IMRaD, Methods and Results</a:t>
             </a:r>
           </a:p>
           <a:p>
@@ -18013,7 +18019,7 @@
                 <a:latin typeface="Arial"/>
                 <a:cs typeface="Arial"/>
               </a:rPr>
-              <a:t>Writing the paper (I): the Results section</a:t>
+              <a:t>Writing the paper (I): IMRaD, Methods and Results</a:t>
             </a:r>
           </a:p>
           <a:p>
@@ -18031,7 +18037,7 @@
                 <a:latin typeface="Arial"/>
                 <a:cs typeface="Arial"/>
               </a:rPr>
-              <a:t>Report what you found, nothing more</a:t>
+              <a:t>Say what you did, then report what you found</a:t>
             </a:r>
           </a:p>
         </p:txBody>
@@ -18199,7 +18205,7 @@
                 <a:latin typeface="Arial"/>
                 <a:cs typeface="Arial"/>
               </a:rPr>
-              <a:t>Write in a different order from the one readers read</a:t>
+              <a:t>IMRaD: the hourglass shape of every paper</a:t>
             </a:r>
           </a:p>
         </p:txBody>
@@ -18232,59 +18238,44 @@
           </a:p>
         </p:txBody>
       </p:sp>
-      <p:sp>
-        <p:nvSpPr>
-          <p:cNvPr id="19" name="Intro"/>
-          <p:cNvSpPr txBox="1"/>
-          <p:nvPr/>
-        </p:nvSpPr>
-        <p:spPr>
-          <a:xfrm>
-            <a:off x="457200" y="1100000"/>
-            <a:ext cx="11277600" cy="626796"/>
+      <p:pic>
+        <p:nvPicPr>
+          <p:cNvPr id="25" name="Figure"/>
+          <p:cNvPicPr>
+            <a:picLocks noChangeAspect="1"/>
+          </p:cNvPicPr>
+          <p:nvPr/>
+        </p:nvPicPr>
+        <p:blipFill>
+          <a:blip r:embed="rId4"/>
+          <a:stretch>
+            <a:fillRect/>
+          </a:stretch>
+        </p:blipFill>
+        <p:spPr>
+          <a:xfrm>
+            <a:off x="908500" y="1150000"/>
+            <a:ext cx="10375000" cy="4150000"/>
           </a:xfrm>
           <a:prstGeom prst="rect">
             <a:avLst/>
           </a:prstGeom>
-          <a:noFill/>
-          <a:ln>
-            <a:noFill/>
-          </a:ln>
-        </p:spPr>
-        <p:txBody>
-          <a:bodyPr wrap="square" lIns="91440" tIns="45720" rIns="91440" bIns="45720" rtlCol="0" anchor="t"/>
-          <a:lstStyle/>
-          <a:p>
-            <a:pPr marL="0" indent="0" algn="l">
-              <a:buNone/>
-            </a:pPr>
-            <a:r>
-              <a:rPr lang="en-US" sz="1700" i="1" dirty="0">
-                <a:solidFill>
-                  <a:srgbClr val="595959"/>
-                </a:solidFill>
-                <a:latin typeface="Arial"/>
-                <a:cs typeface="Arial"/>
-              </a:rPr>
-              <a:t>Readers read: Title, Abstract, Introduction, Methods, Results, Discussion. Writers start from the data.</a:t>
-            </a:r>
-          </a:p>
-        </p:txBody>
-      </p:sp>
-      <p:sp>
-        <p:nvSpPr>
-          <p:cNvPr id="80" name="Step"/>
+        </p:spPr>
+      </p:pic>
+      <p:sp>
+        <p:nvSpPr>
+          <p:cNvPr id="60" name="Takeaway"/>
           <p:cNvSpPr/>
           <p:nvPr/>
         </p:nvSpPr>
         <p:spPr>
           <a:xfrm>
-            <a:off x="457200" y="1806796"/>
-            <a:ext cx="1929600" cy="760000"/>
-          </a:xfrm>
-          <a:prstGeom prst="homePlate">
+            <a:off x="457200" y="5390000"/>
+            <a:ext cx="11277600" cy="560000"/>
+          </a:xfrm>
+          <a:prstGeom prst="roundRect">
             <a:avLst>
-              <a:gd name="adj" fmla="val 28000"/>
+              <a:gd name="adj" fmla="val 12000"/>
             </a:avLst>
           </a:prstGeom>
           <a:solidFill>
@@ -18295,570 +18286,6 @@
           </a:ln>
         </p:spPr>
         <p:txBody>
-          <a:bodyPr wrap="square" lIns="200000" tIns="45720" rIns="200000" bIns="45720" rtlCol="0" anchor="ctr">
-            <a:normAutofit/>
-          </a:bodyPr>
-          <a:lstStyle/>
-          <a:p>
-            <a:pPr marL="0" indent="0" algn="ctr">
-              <a:buNone/>
-            </a:pPr>
-            <a:r>
-              <a:rPr lang="en-US" sz="1400" b="1" dirty="0">
-                <a:solidFill>
-                  <a:srgbClr val="FFFFFF"/>
-                </a:solidFill>
-                <a:latin typeface="Arial"/>
-                <a:cs typeface="Arial"/>
-              </a:rPr>
-              <a:t>1 Tables</a:t>
-            </a:r>
-          </a:p>
-        </p:txBody>
-      </p:sp>
-      <p:sp>
-        <p:nvSpPr>
-          <p:cNvPr id="81" name="StepText"/>
-          <p:cNvSpPr/>
-          <p:nvPr/>
-        </p:nvSpPr>
-        <p:spPr>
-          <a:xfrm>
-            <a:off x="497200" y="2726796"/>
-            <a:ext cx="1789600" cy="1100000"/>
-          </a:xfrm>
-          <a:prstGeom prst="rect">
-            <a:avLst/>
-          </a:prstGeom>
-          <a:solidFill>
-            <a:srgbClr val="EAF2F5"/>
-          </a:solidFill>
-          <a:ln>
-            <a:noFill/>
-          </a:ln>
-        </p:spPr>
-        <p:txBody>
-          <a:bodyPr wrap="square" lIns="110000" tIns="91440" rIns="110000" bIns="91440" rtlCol="0" anchor="ctr">
-            <a:normAutofit/>
-          </a:bodyPr>
-          <a:lstStyle/>
-          <a:p>
-            <a:pPr marL="0" indent="0" algn="ctr">
-              <a:lnSpc>
-                <a:spcPct val="104000"/>
-              </a:lnSpc>
-              <a:spcBef>
-                <a:spcPts val="200"/>
-              </a:spcBef>
-              <a:buNone/>
-            </a:pPr>
-            <a:r>
-              <a:rPr lang="en-US" sz="1500" dirty="0">
-                <a:solidFill>
-                  <a:srgbClr val="000000"/>
-                </a:solidFill>
-                <a:latin typeface="Arial"/>
-                <a:cs typeface="Arial"/>
-              </a:rPr>
-              <a:t>Tables and figures: the story is in your data</a:t>
-            </a:r>
-          </a:p>
-        </p:txBody>
-      </p:sp>
-      <p:sp>
-        <p:nvSpPr>
-          <p:cNvPr id="82" name="Step"/>
-          <p:cNvSpPr/>
-          <p:nvPr/>
-        </p:nvSpPr>
-        <p:spPr>
-          <a:xfrm>
-            <a:off x="2326800" y="1806796"/>
-            <a:ext cx="1929600" cy="760000"/>
-          </a:xfrm>
-          <a:prstGeom prst="chevron">
-            <a:avLst>
-              <a:gd name="adj" fmla="val 28000"/>
-            </a:avLst>
-          </a:prstGeom>
-          <a:solidFill>
-            <a:srgbClr val="0B376C"/>
-          </a:solidFill>
-          <a:ln>
-            <a:noFill/>
-          </a:ln>
-        </p:spPr>
-        <p:txBody>
-          <a:bodyPr wrap="square" lIns="200000" tIns="45720" rIns="200000" bIns="45720" rtlCol="0" anchor="ctr">
-            <a:normAutofit/>
-          </a:bodyPr>
-          <a:lstStyle/>
-          <a:p>
-            <a:pPr marL="0" indent="0" algn="ctr">
-              <a:buNone/>
-            </a:pPr>
-            <a:r>
-              <a:rPr lang="en-US" sz="1400" b="1" dirty="0">
-                <a:solidFill>
-                  <a:srgbClr val="FFFFFF"/>
-                </a:solidFill>
-                <a:latin typeface="Arial"/>
-                <a:cs typeface="Arial"/>
-              </a:rPr>
-              <a:t>2 Methods</a:t>
-            </a:r>
-          </a:p>
-        </p:txBody>
-      </p:sp>
-      <p:sp>
-        <p:nvSpPr>
-          <p:cNvPr id="83" name="StepText"/>
-          <p:cNvSpPr/>
-          <p:nvPr/>
-        </p:nvSpPr>
-        <p:spPr>
-          <a:xfrm>
-            <a:off x="2366800" y="2726796"/>
-            <a:ext cx="1789600" cy="1100000"/>
-          </a:xfrm>
-          <a:prstGeom prst="rect">
-            <a:avLst/>
-          </a:prstGeom>
-          <a:solidFill>
-            <a:srgbClr val="EAF2F5"/>
-          </a:solidFill>
-          <a:ln>
-            <a:noFill/>
-          </a:ln>
-        </p:spPr>
-        <p:txBody>
-          <a:bodyPr wrap="square" lIns="110000" tIns="91440" rIns="110000" bIns="91440" rtlCol="0" anchor="ctr">
-            <a:normAutofit/>
-          </a:bodyPr>
-          <a:lstStyle/>
-          <a:p>
-            <a:pPr marL="0" indent="0" algn="ctr">
-              <a:lnSpc>
-                <a:spcPct val="104000"/>
-              </a:lnSpc>
-              <a:spcBef>
-                <a:spcPts val="200"/>
-              </a:spcBef>
-              <a:buNone/>
-            </a:pPr>
-            <a:r>
-              <a:rPr lang="en-US" sz="1500" dirty="0">
-                <a:solidFill>
-                  <a:srgbClr val="000000"/>
-                </a:solidFill>
-                <a:latin typeface="Arial"/>
-                <a:cs typeface="Arial"/>
-              </a:rPr>
-              <a:t>You know what you did</a:t>
-            </a:r>
-          </a:p>
-        </p:txBody>
-      </p:sp>
-      <p:sp>
-        <p:nvSpPr>
-          <p:cNvPr id="84" name="Step"/>
-          <p:cNvSpPr/>
-          <p:nvPr/>
-        </p:nvSpPr>
-        <p:spPr>
-          <a:xfrm>
-            <a:off x="4196400" y="1806796"/>
-            <a:ext cx="1929600" cy="760000"/>
-          </a:xfrm>
-          <a:prstGeom prst="chevron">
-            <a:avLst>
-              <a:gd name="adj" fmla="val 28000"/>
-            </a:avLst>
-          </a:prstGeom>
-          <a:solidFill>
-            <a:srgbClr val="5FA39B"/>
-          </a:solidFill>
-          <a:ln>
-            <a:noFill/>
-          </a:ln>
-        </p:spPr>
-        <p:txBody>
-          <a:bodyPr wrap="square" lIns="200000" tIns="45720" rIns="200000" bIns="45720" rtlCol="0" anchor="ctr">
-            <a:normAutofit/>
-          </a:bodyPr>
-          <a:lstStyle/>
-          <a:p>
-            <a:pPr marL="0" indent="0" algn="ctr">
-              <a:buNone/>
-            </a:pPr>
-            <a:r>
-              <a:rPr lang="en-US" sz="1400" b="1" dirty="0">
-                <a:solidFill>
-                  <a:srgbClr val="FFFFFF"/>
-                </a:solidFill>
-                <a:latin typeface="Arial"/>
-                <a:cs typeface="Arial"/>
-              </a:rPr>
-              <a:t>3 Results</a:t>
-            </a:r>
-          </a:p>
-        </p:txBody>
-      </p:sp>
-      <p:sp>
-        <p:nvSpPr>
-          <p:cNvPr id="85" name="StepText"/>
-          <p:cNvSpPr/>
-          <p:nvPr/>
-        </p:nvSpPr>
-        <p:spPr>
-          <a:xfrm>
-            <a:off x="4236400" y="2726796"/>
-            <a:ext cx="1789600" cy="1100000"/>
-          </a:xfrm>
-          <a:prstGeom prst="rect">
-            <a:avLst/>
-          </a:prstGeom>
-          <a:solidFill>
-            <a:srgbClr val="EAF2F5"/>
-          </a:solidFill>
-          <a:ln>
-            <a:noFill/>
-          </a:ln>
-        </p:spPr>
-        <p:txBody>
-          <a:bodyPr wrap="square" lIns="110000" tIns="91440" rIns="110000" bIns="91440" rtlCol="0" anchor="ctr">
-            <a:normAutofit/>
-          </a:bodyPr>
-          <a:lstStyle/>
-          <a:p>
-            <a:pPr marL="0" indent="0" algn="ctr">
-              <a:lnSpc>
-                <a:spcPct val="104000"/>
-              </a:lnSpc>
-              <a:spcBef>
-                <a:spcPts val="200"/>
-              </a:spcBef>
-              <a:buNone/>
-            </a:pPr>
-            <a:r>
-              <a:rPr lang="en-US" sz="1500" dirty="0">
-                <a:solidFill>
-                  <a:srgbClr val="000000"/>
-                </a:solidFill>
-                <a:latin typeface="Arial"/>
-                <a:cs typeface="Arial"/>
-              </a:rPr>
-              <a:t>Describe your tables</a:t>
-            </a:r>
-          </a:p>
-        </p:txBody>
-      </p:sp>
-      <p:sp>
-        <p:nvSpPr>
-          <p:cNvPr id="86" name="Step"/>
-          <p:cNvSpPr/>
-          <p:nvPr/>
-        </p:nvSpPr>
-        <p:spPr>
-          <a:xfrm>
-            <a:off x="6066000" y="1806796"/>
-            <a:ext cx="1929600" cy="760000"/>
-          </a:xfrm>
-          <a:prstGeom prst="chevron">
-            <a:avLst>
-              <a:gd name="adj" fmla="val 28000"/>
-            </a:avLst>
-          </a:prstGeom>
-          <a:solidFill>
-            <a:srgbClr val="0070C0"/>
-          </a:solidFill>
-          <a:ln>
-            <a:noFill/>
-          </a:ln>
-        </p:spPr>
-        <p:txBody>
-          <a:bodyPr wrap="square" lIns="200000" tIns="45720" rIns="200000" bIns="45720" rtlCol="0" anchor="ctr">
-            <a:normAutofit/>
-          </a:bodyPr>
-          <a:lstStyle/>
-          <a:p>
-            <a:pPr marL="0" indent="0" algn="ctr">
-              <a:buNone/>
-            </a:pPr>
-            <a:r>
-              <a:rPr lang="en-US" sz="1400" b="1" dirty="0">
-                <a:solidFill>
-                  <a:srgbClr val="FFFFFF"/>
-                </a:solidFill>
-                <a:latin typeface="Arial"/>
-                <a:cs typeface="Arial"/>
-              </a:rPr>
-              <a:t>4 Introduction</a:t>
-            </a:r>
-          </a:p>
-        </p:txBody>
-      </p:sp>
-      <p:sp>
-        <p:nvSpPr>
-          <p:cNvPr id="87" name="StepText"/>
-          <p:cNvSpPr/>
-          <p:nvPr/>
-        </p:nvSpPr>
-        <p:spPr>
-          <a:xfrm>
-            <a:off x="6106000" y="2726796"/>
-            <a:ext cx="1789600" cy="1100000"/>
-          </a:xfrm>
-          <a:prstGeom prst="rect">
-            <a:avLst/>
-          </a:prstGeom>
-          <a:solidFill>
-            <a:srgbClr val="EAF2F5"/>
-          </a:solidFill>
-          <a:ln>
-            <a:noFill/>
-          </a:ln>
-        </p:spPr>
-        <p:txBody>
-          <a:bodyPr wrap="square" lIns="110000" tIns="91440" rIns="110000" bIns="91440" rtlCol="0" anchor="ctr">
-            <a:normAutofit/>
-          </a:bodyPr>
-          <a:lstStyle/>
-          <a:p>
-            <a:pPr marL="0" indent="0" algn="ctr">
-              <a:lnSpc>
-                <a:spcPct val="104000"/>
-              </a:lnSpc>
-              <a:spcBef>
-                <a:spcPts val="200"/>
-              </a:spcBef>
-              <a:buNone/>
-            </a:pPr>
-            <a:r>
-              <a:rPr lang="en-US" sz="1500" dirty="0">
-                <a:solidFill>
-                  <a:srgbClr val="000000"/>
-                </a:solidFill>
-                <a:latin typeface="Arial"/>
-                <a:cs typeface="Arial"/>
-              </a:rPr>
-              <a:t>Set up the question you answered</a:t>
-            </a:r>
-          </a:p>
-        </p:txBody>
-      </p:sp>
-      <p:sp>
-        <p:nvSpPr>
-          <p:cNvPr id="88" name="Step"/>
-          <p:cNvSpPr/>
-          <p:nvPr/>
-        </p:nvSpPr>
-        <p:spPr>
-          <a:xfrm>
-            <a:off x="7935600" y="1806796"/>
-            <a:ext cx="1929600" cy="760000"/>
-          </a:xfrm>
-          <a:prstGeom prst="chevron">
-            <a:avLst>
-              <a:gd name="adj" fmla="val 28000"/>
-            </a:avLst>
-          </a:prstGeom>
-          <a:solidFill>
-            <a:srgbClr val="055F56"/>
-          </a:solidFill>
-          <a:ln>
-            <a:noFill/>
-          </a:ln>
-        </p:spPr>
-        <p:txBody>
-          <a:bodyPr wrap="square" lIns="200000" tIns="45720" rIns="200000" bIns="45720" rtlCol="0" anchor="ctr">
-            <a:normAutofit/>
-          </a:bodyPr>
-          <a:lstStyle/>
-          <a:p>
-            <a:pPr marL="0" indent="0" algn="ctr">
-              <a:buNone/>
-            </a:pPr>
-            <a:r>
-              <a:rPr lang="en-US" sz="1400" b="1" dirty="0">
-                <a:solidFill>
-                  <a:srgbClr val="FFFFFF"/>
-                </a:solidFill>
-                <a:latin typeface="Arial"/>
-                <a:cs typeface="Arial"/>
-              </a:rPr>
-              <a:t>5 Discussion</a:t>
-            </a:r>
-          </a:p>
-        </p:txBody>
-      </p:sp>
-      <p:sp>
-        <p:nvSpPr>
-          <p:cNvPr id="89" name="StepText"/>
-          <p:cNvSpPr/>
-          <p:nvPr/>
-        </p:nvSpPr>
-        <p:spPr>
-          <a:xfrm>
-            <a:off x="7975600" y="2726796"/>
-            <a:ext cx="1789600" cy="1100000"/>
-          </a:xfrm>
-          <a:prstGeom prst="rect">
-            <a:avLst/>
-          </a:prstGeom>
-          <a:solidFill>
-            <a:srgbClr val="EAF2F5"/>
-          </a:solidFill>
-          <a:ln>
-            <a:noFill/>
-          </a:ln>
-        </p:spPr>
-        <p:txBody>
-          <a:bodyPr wrap="square" lIns="110000" tIns="91440" rIns="110000" bIns="91440" rtlCol="0" anchor="ctr">
-            <a:normAutofit/>
-          </a:bodyPr>
-          <a:lstStyle/>
-          <a:p>
-            <a:pPr marL="0" indent="0" algn="ctr">
-              <a:lnSpc>
-                <a:spcPct val="104000"/>
-              </a:lnSpc>
-              <a:spcBef>
-                <a:spcPts val="200"/>
-              </a:spcBef>
-              <a:buNone/>
-            </a:pPr>
-            <a:r>
-              <a:rPr lang="en-US" sz="1500" dirty="0">
-                <a:solidFill>
-                  <a:srgbClr val="000000"/>
-                </a:solidFill>
-                <a:latin typeface="Arial"/>
-                <a:cs typeface="Arial"/>
-              </a:rPr>
-              <a:t>Answer, compare, explain</a:t>
-            </a:r>
-          </a:p>
-        </p:txBody>
-      </p:sp>
-      <p:sp>
-        <p:nvSpPr>
-          <p:cNvPr id="90" name="Step"/>
-          <p:cNvSpPr/>
-          <p:nvPr/>
-        </p:nvSpPr>
-        <p:spPr>
-          <a:xfrm>
-            <a:off x="9805200" y="1806796"/>
-            <a:ext cx="1929600" cy="760000"/>
-          </a:xfrm>
-          <a:prstGeom prst="chevron">
-            <a:avLst>
-              <a:gd name="adj" fmla="val 28000"/>
-            </a:avLst>
-          </a:prstGeom>
-          <a:solidFill>
-            <a:srgbClr val="8A99A3"/>
-          </a:solidFill>
-          <a:ln>
-            <a:noFill/>
-          </a:ln>
-        </p:spPr>
-        <p:txBody>
-          <a:bodyPr wrap="square" lIns="200000" tIns="45720" rIns="200000" bIns="45720" rtlCol="0" anchor="ctr">
-            <a:normAutofit/>
-          </a:bodyPr>
-          <a:lstStyle/>
-          <a:p>
-            <a:pPr marL="0" indent="0" algn="ctr">
-              <a:buNone/>
-            </a:pPr>
-            <a:r>
-              <a:rPr lang="en-US" sz="1400" b="1" dirty="0">
-                <a:solidFill>
-                  <a:srgbClr val="FFFFFF"/>
-                </a:solidFill>
-                <a:latin typeface="Arial"/>
-                <a:cs typeface="Arial"/>
-              </a:rPr>
-              <a:t>6 Abstract, title</a:t>
-            </a:r>
-          </a:p>
-        </p:txBody>
-      </p:sp>
-      <p:sp>
-        <p:nvSpPr>
-          <p:cNvPr id="91" name="StepText"/>
-          <p:cNvSpPr/>
-          <p:nvPr/>
-        </p:nvSpPr>
-        <p:spPr>
-          <a:xfrm>
-            <a:off x="9845200" y="2726796"/>
-            <a:ext cx="1789600" cy="1100000"/>
-          </a:xfrm>
-          <a:prstGeom prst="rect">
-            <a:avLst/>
-          </a:prstGeom>
-          <a:solidFill>
-            <a:srgbClr val="EAF2F5"/>
-          </a:solidFill>
-          <a:ln>
-            <a:noFill/>
-          </a:ln>
-        </p:spPr>
-        <p:txBody>
-          <a:bodyPr wrap="square" lIns="110000" tIns="91440" rIns="110000" bIns="91440" rtlCol="0" anchor="ctr">
-            <a:normAutofit/>
-          </a:bodyPr>
-          <a:lstStyle/>
-          <a:p>
-            <a:pPr marL="0" indent="0" algn="ctr">
-              <a:lnSpc>
-                <a:spcPct val="104000"/>
-              </a:lnSpc>
-              <a:spcBef>
-                <a:spcPts val="200"/>
-              </a:spcBef>
-              <a:buNone/>
-            </a:pPr>
-            <a:r>
-              <a:rPr lang="en-US" sz="1500" dirty="0">
-                <a:solidFill>
-                  <a:srgbClr val="000000"/>
-                </a:solidFill>
-                <a:latin typeface="Arial"/>
-                <a:cs typeface="Arial"/>
-              </a:rPr>
-              <a:t>Summarise the paper, name it last</a:t>
-            </a:r>
-          </a:p>
-        </p:txBody>
-      </p:sp>
-      <p:sp>
-        <p:nvSpPr>
-          <p:cNvPr id="60" name="Takeaway"/>
-          <p:cNvSpPr/>
-          <p:nvPr/>
-        </p:nvSpPr>
-        <p:spPr>
-          <a:xfrm>
-            <a:off x="457200" y="5390000"/>
-            <a:ext cx="11277600" cy="560000"/>
-          </a:xfrm>
-          <a:prstGeom prst="roundRect">
-            <a:avLst>
-              <a:gd name="adj" fmla="val 12000"/>
-            </a:avLst>
-          </a:prstGeom>
-          <a:solidFill>
-            <a:srgbClr val="0D7377"/>
-          </a:solidFill>
-          <a:ln>
-            <a:noFill/>
-          </a:ln>
-        </p:spPr>
-        <p:txBody>
           <a:bodyPr wrap="square" lIns="182880" tIns="45720" rIns="182880" bIns="45720" rtlCol="0" anchor="ctr">
             <a:normAutofit/>
           </a:bodyPr>
@@ -18885,7 +18312,7 @@
                 <a:latin typeface="Arial"/>
                 <a:cs typeface="Arial"/>
               </a:rPr>
-              <a:t>Start with your tables. Write the title last.</a:t>
+              <a:t>Introduction narrows to your question. Discussion widens back to practice.</a:t>
             </a:r>
           </a:p>
         </p:txBody>
@@ -19053,7 +18480,7 @@
                 <a:latin typeface="Arial"/>
                 <a:cs typeface="Arial"/>
               </a:rPr>
-              <a:t>Methods: enough detail for someone to repeat it</a:t>
+              <a:t>Write in a different order from the one readers read</a:t>
             </a:r>
           </a:p>
         </p:txBody>
@@ -19095,7 +18522,7 @@
         <p:spPr>
           <a:xfrm>
             <a:off x="457200" y="1100000"/>
-            <a:ext cx="11277600" cy="480000"/>
+            <a:ext cx="11277600" cy="626796"/>
           </a:xfrm>
           <a:prstGeom prst="rect">
             <a:avLst/>
@@ -19120,24 +18547,26 @@
                 <a:latin typeface="Arial"/>
                 <a:cs typeface="Arial"/>
               </a:rPr>
-              <a:t>Optional for your manuscript. If a colleague could not redo the study from it, add detail.</a:t>
-            </a:r>
-          </a:p>
-        </p:txBody>
-      </p:sp>
-      <p:sp>
-        <p:nvSpPr>
-          <p:cNvPr id="70" name="CardHead"/>
+              <a:t>Readers read: Title, Abstract, Introduction, Methods, Results, Discussion. Writers start from the data.</a:t>
+            </a:r>
+          </a:p>
+        </p:txBody>
+      </p:sp>
+      <p:sp>
+        <p:nvSpPr>
+          <p:cNvPr id="80" name="Step"/>
           <p:cNvSpPr/>
           <p:nvPr/>
         </p:nvSpPr>
         <p:spPr>
           <a:xfrm>
-            <a:off x="457200" y="1871973"/>
-            <a:ext cx="2669400" cy="640000"/>
-          </a:xfrm>
-          <a:prstGeom prst="rect">
-            <a:avLst/>
+            <a:off x="457200" y="1806796"/>
+            <a:ext cx="1929600" cy="760000"/>
+          </a:xfrm>
+          <a:prstGeom prst="homePlate">
+            <a:avLst>
+              <a:gd name="adj" fmla="val 28000"/>
+            </a:avLst>
           </a:prstGeom>
           <a:solidFill>
             <a:srgbClr val="0D7377"/>
@@ -19147,7 +18576,7 @@
           </a:ln>
         </p:spPr>
         <p:txBody>
-          <a:bodyPr wrap="square" lIns="91440" tIns="45720" rIns="91440" bIns="45720" rtlCol="0" anchor="ctr">
+          <a:bodyPr wrap="square" lIns="200000" tIns="45720" rIns="200000" bIns="45720" rtlCol="0" anchor="ctr">
             <a:normAutofit/>
           </a:bodyPr>
           <a:lstStyle/>
@@ -19156,28 +18585,28 @@
               <a:buNone/>
             </a:pPr>
             <a:r>
-              <a:rPr lang="en-US" sz="1700" b="1" dirty="0">
+              <a:rPr lang="en-US" sz="1400" b="1" dirty="0">
                 <a:solidFill>
                   <a:srgbClr val="FFFFFF"/>
                 </a:solidFill>
                 <a:latin typeface="Arial"/>
                 <a:cs typeface="Arial"/>
               </a:rPr>
-              <a:t>Who and where</a:t>
-            </a:r>
-          </a:p>
-        </p:txBody>
-      </p:sp>
-      <p:sp>
-        <p:nvSpPr>
-          <p:cNvPr id="71" name="CardBody"/>
+              <a:t>1 Tables</a:t>
+            </a:r>
+          </a:p>
+        </p:txBody>
+      </p:sp>
+      <p:sp>
+        <p:nvSpPr>
+          <p:cNvPr id="81" name="StepText"/>
           <p:cNvSpPr/>
           <p:nvPr/>
         </p:nvSpPr>
         <p:spPr>
           <a:xfrm>
-            <a:off x="457200" y="2511973"/>
-            <a:ext cx="2669400" cy="2314080"/>
+            <a:off x="497200" y="2726796"/>
+            <a:ext cx="1789600" cy="1100000"/>
           </a:xfrm>
           <a:prstGeom prst="rect">
             <a:avLst/>
@@ -19190,7 +18619,7 @@
           </a:ln>
         </p:spPr>
         <p:txBody>
-          <a:bodyPr wrap="square" lIns="137160" tIns="91440" rIns="137160" bIns="91440" rtlCol="0" anchor="ctr">
+          <a:bodyPr wrap="square" lIns="110000" tIns="91440" rIns="110000" bIns="91440" rtlCol="0" anchor="ctr">
             <a:normAutofit/>
           </a:bodyPr>
           <a:lstStyle/>
@@ -19200,109 +18629,330 @@
                 <a:spcPct val="104000"/>
               </a:lnSpc>
               <a:spcBef>
-                <a:spcPts val="400"/>
+                <a:spcPts val="200"/>
               </a:spcBef>
               <a:buNone/>
             </a:pPr>
             <a:r>
-              <a:rPr lang="en-US" sz="1600" dirty="0">
+              <a:rPr lang="en-US" sz="1500" dirty="0">
                 <a:solidFill>
                   <a:srgbClr val="000000"/>
                 </a:solidFill>
                 <a:latin typeface="Arial"/>
                 <a:cs typeface="Arial"/>
               </a:rPr>
-              <a:t>Design, setting, dates</a:t>
-            </a:r>
-          </a:p>
+              <a:t>Tables and figures: the story is in your data</a:t>
+            </a:r>
+          </a:p>
+        </p:txBody>
+      </p:sp>
+      <p:sp>
+        <p:nvSpPr>
+          <p:cNvPr id="82" name="Step"/>
+          <p:cNvSpPr/>
+          <p:nvPr/>
+        </p:nvSpPr>
+        <p:spPr>
+          <a:xfrm>
+            <a:off x="2326800" y="1806796"/>
+            <a:ext cx="1929600" cy="760000"/>
+          </a:xfrm>
+          <a:prstGeom prst="chevron">
+            <a:avLst>
+              <a:gd name="adj" fmla="val 28000"/>
+            </a:avLst>
+          </a:prstGeom>
+          <a:solidFill>
+            <a:srgbClr val="0B376C"/>
+          </a:solidFill>
+          <a:ln>
+            <a:noFill/>
+          </a:ln>
+        </p:spPr>
+        <p:txBody>
+          <a:bodyPr wrap="square" lIns="200000" tIns="45720" rIns="200000" bIns="45720" rtlCol="0" anchor="ctr">
+            <a:normAutofit/>
+          </a:bodyPr>
+          <a:lstStyle/>
+          <a:p>
+            <a:pPr marL="0" indent="0" algn="ctr">
+              <a:buNone/>
+            </a:pPr>
+            <a:r>
+              <a:rPr lang="en-US" sz="1400" b="1" dirty="0">
+                <a:solidFill>
+                  <a:srgbClr val="FFFFFF"/>
+                </a:solidFill>
+                <a:latin typeface="Arial"/>
+                <a:cs typeface="Arial"/>
+              </a:rPr>
+              <a:t>2 Methods</a:t>
+            </a:r>
+          </a:p>
+        </p:txBody>
+      </p:sp>
+      <p:sp>
+        <p:nvSpPr>
+          <p:cNvPr id="83" name="StepText"/>
+          <p:cNvSpPr/>
+          <p:nvPr/>
+        </p:nvSpPr>
+        <p:spPr>
+          <a:xfrm>
+            <a:off x="2366800" y="2726796"/>
+            <a:ext cx="1789600" cy="1100000"/>
+          </a:xfrm>
+          <a:prstGeom prst="rect">
+            <a:avLst/>
+          </a:prstGeom>
+          <a:solidFill>
+            <a:srgbClr val="EAF2F5"/>
+          </a:solidFill>
+          <a:ln>
+            <a:noFill/>
+          </a:ln>
+        </p:spPr>
+        <p:txBody>
+          <a:bodyPr wrap="square" lIns="110000" tIns="91440" rIns="110000" bIns="91440" rtlCol="0" anchor="ctr">
+            <a:normAutofit/>
+          </a:bodyPr>
+          <a:lstStyle/>
           <a:p>
             <a:pPr marL="0" indent="0" algn="ctr">
               <a:lnSpc>
                 <a:spcPct val="104000"/>
               </a:lnSpc>
               <a:spcBef>
-                <a:spcPts val="400"/>
+                <a:spcPts val="200"/>
               </a:spcBef>
               <a:buNone/>
             </a:pPr>
             <a:r>
-              <a:rPr lang="en-US" sz="1600" dirty="0">
+              <a:rPr lang="en-US" sz="1500" dirty="0">
                 <a:solidFill>
                   <a:srgbClr val="000000"/>
                 </a:solidFill>
                 <a:latin typeface="Arial"/>
                 <a:cs typeface="Arial"/>
               </a:rPr>
-              <a:t>Eligibility criteria</a:t>
-            </a:r>
-          </a:p>
+              <a:t>You know what you did</a:t>
+            </a:r>
+          </a:p>
+        </p:txBody>
+      </p:sp>
+      <p:sp>
+        <p:nvSpPr>
+          <p:cNvPr id="84" name="Step"/>
+          <p:cNvSpPr/>
+          <p:nvPr/>
+        </p:nvSpPr>
+        <p:spPr>
+          <a:xfrm>
+            <a:off x="4196400" y="1806796"/>
+            <a:ext cx="1929600" cy="760000"/>
+          </a:xfrm>
+          <a:prstGeom prst="chevron">
+            <a:avLst>
+              <a:gd name="adj" fmla="val 28000"/>
+            </a:avLst>
+          </a:prstGeom>
+          <a:solidFill>
+            <a:srgbClr val="5FA39B"/>
+          </a:solidFill>
+          <a:ln>
+            <a:noFill/>
+          </a:ln>
+        </p:spPr>
+        <p:txBody>
+          <a:bodyPr wrap="square" lIns="200000" tIns="45720" rIns="200000" bIns="45720" rtlCol="0" anchor="ctr">
+            <a:normAutofit/>
+          </a:bodyPr>
+          <a:lstStyle/>
+          <a:p>
+            <a:pPr marL="0" indent="0" algn="ctr">
+              <a:buNone/>
+            </a:pPr>
+            <a:r>
+              <a:rPr lang="en-US" sz="1400" b="1" dirty="0">
+                <a:solidFill>
+                  <a:srgbClr val="FFFFFF"/>
+                </a:solidFill>
+                <a:latin typeface="Arial"/>
+                <a:cs typeface="Arial"/>
+              </a:rPr>
+              <a:t>3 Results</a:t>
+            </a:r>
+          </a:p>
+        </p:txBody>
+      </p:sp>
+      <p:sp>
+        <p:nvSpPr>
+          <p:cNvPr id="85" name="StepText"/>
+          <p:cNvSpPr/>
+          <p:nvPr/>
+        </p:nvSpPr>
+        <p:spPr>
+          <a:xfrm>
+            <a:off x="4236400" y="2726796"/>
+            <a:ext cx="1789600" cy="1100000"/>
+          </a:xfrm>
+          <a:prstGeom prst="rect">
+            <a:avLst/>
+          </a:prstGeom>
+          <a:solidFill>
+            <a:srgbClr val="EAF2F5"/>
+          </a:solidFill>
+          <a:ln>
+            <a:noFill/>
+          </a:ln>
+        </p:spPr>
+        <p:txBody>
+          <a:bodyPr wrap="square" lIns="110000" tIns="91440" rIns="110000" bIns="91440" rtlCol="0" anchor="ctr">
+            <a:normAutofit/>
+          </a:bodyPr>
+          <a:lstStyle/>
           <a:p>
             <a:pPr marL="0" indent="0" algn="ctr">
               <a:lnSpc>
                 <a:spcPct val="104000"/>
               </a:lnSpc>
               <a:spcBef>
-                <a:spcPts val="400"/>
+                <a:spcPts val="200"/>
               </a:spcBef>
               <a:buNone/>
             </a:pPr>
             <a:r>
-              <a:rPr lang="en-US" sz="1600" dirty="0">
+              <a:rPr lang="en-US" sz="1500" dirty="0">
                 <a:solidFill>
                   <a:srgbClr val="000000"/>
                 </a:solidFill>
                 <a:latin typeface="Arial"/>
                 <a:cs typeface="Arial"/>
               </a:rPr>
-              <a:t>Ethics approval and consent</a:t>
-            </a:r>
-          </a:p>
+              <a:t>Describe your tables</a:t>
+            </a:r>
+          </a:p>
+        </p:txBody>
+      </p:sp>
+      <p:sp>
+        <p:nvSpPr>
+          <p:cNvPr id="86" name="Step"/>
+          <p:cNvSpPr/>
+          <p:nvPr/>
+        </p:nvSpPr>
+        <p:spPr>
+          <a:xfrm>
+            <a:off x="6066000" y="1806796"/>
+            <a:ext cx="1929600" cy="760000"/>
+          </a:xfrm>
+          <a:prstGeom prst="chevron">
+            <a:avLst>
+              <a:gd name="adj" fmla="val 28000"/>
+            </a:avLst>
+          </a:prstGeom>
+          <a:solidFill>
+            <a:srgbClr val="0070C0"/>
+          </a:solidFill>
+          <a:ln>
+            <a:noFill/>
+          </a:ln>
+        </p:spPr>
+        <p:txBody>
+          <a:bodyPr wrap="square" lIns="200000" tIns="45720" rIns="200000" bIns="45720" rtlCol="0" anchor="ctr">
+            <a:normAutofit/>
+          </a:bodyPr>
+          <a:lstStyle/>
+          <a:p>
+            <a:pPr marL="0" indent="0" algn="ctr">
+              <a:buNone/>
+            </a:pPr>
+            <a:r>
+              <a:rPr lang="en-US" sz="1400" b="1" dirty="0">
+                <a:solidFill>
+                  <a:srgbClr val="FFFFFF"/>
+                </a:solidFill>
+                <a:latin typeface="Arial"/>
+                <a:cs typeface="Arial"/>
+              </a:rPr>
+              <a:t>4 Introduction</a:t>
+            </a:r>
+          </a:p>
+        </p:txBody>
+      </p:sp>
+      <p:sp>
+        <p:nvSpPr>
+          <p:cNvPr id="87" name="StepText"/>
+          <p:cNvSpPr/>
+          <p:nvPr/>
+        </p:nvSpPr>
+        <p:spPr>
+          <a:xfrm>
+            <a:off x="6106000" y="2726796"/>
+            <a:ext cx="1789600" cy="1100000"/>
+          </a:xfrm>
+          <a:prstGeom prst="rect">
+            <a:avLst/>
+          </a:prstGeom>
+          <a:solidFill>
+            <a:srgbClr val="EAF2F5"/>
+          </a:solidFill>
+          <a:ln>
+            <a:noFill/>
+          </a:ln>
+        </p:spPr>
+        <p:txBody>
+          <a:bodyPr wrap="square" lIns="110000" tIns="91440" rIns="110000" bIns="91440" rtlCol="0" anchor="ctr">
+            <a:normAutofit/>
+          </a:bodyPr>
+          <a:lstStyle/>
           <a:p>
             <a:pPr marL="0" indent="0" algn="ctr">
               <a:lnSpc>
                 <a:spcPct val="104000"/>
               </a:lnSpc>
               <a:spcBef>
-                <a:spcPts val="400"/>
+                <a:spcPts val="200"/>
               </a:spcBef>
               <a:buNone/>
             </a:pPr>
             <a:r>
-              <a:rPr lang="en-US" sz="1600" dirty="0">
+              <a:rPr lang="en-US" sz="1500" dirty="0">
                 <a:solidFill>
                   <a:srgbClr val="000000"/>
                 </a:solidFill>
                 <a:latin typeface="Arial"/>
                 <a:cs typeface="Arial"/>
               </a:rPr>
-              <a:t>Registration number</a:t>
-            </a:r>
-          </a:p>
-        </p:txBody>
-      </p:sp>
-      <p:sp>
-        <p:nvSpPr>
-          <p:cNvPr id="72" name="CardHead"/>
+              <a:t>Set up the question you answered</a:t>
+            </a:r>
+          </a:p>
+        </p:txBody>
+      </p:sp>
+      <p:sp>
+        <p:nvSpPr>
+          <p:cNvPr id="88" name="Step"/>
           <p:cNvSpPr/>
           <p:nvPr/>
         </p:nvSpPr>
         <p:spPr>
           <a:xfrm>
-            <a:off x="3326600" y="1871973"/>
-            <a:ext cx="2669400" cy="640000"/>
-          </a:xfrm>
-          <a:prstGeom prst="rect">
-            <a:avLst/>
+            <a:off x="7935600" y="1806796"/>
+            <a:ext cx="1929600" cy="760000"/>
+          </a:xfrm>
+          <a:prstGeom prst="chevron">
+            <a:avLst>
+              <a:gd name="adj" fmla="val 28000"/>
+            </a:avLst>
           </a:prstGeom>
           <a:solidFill>
-            <a:srgbClr val="0B376C"/>
+            <a:srgbClr val="055F56"/>
           </a:solidFill>
           <a:ln>
             <a:noFill/>
           </a:ln>
         </p:spPr>
         <p:txBody>
-          <a:bodyPr wrap="square" lIns="91440" tIns="45720" rIns="91440" bIns="45720" rtlCol="0" anchor="ctr">
+          <a:bodyPr wrap="square" lIns="200000" tIns="45720" rIns="200000" bIns="45720" rtlCol="0" anchor="ctr">
             <a:normAutofit/>
           </a:bodyPr>
           <a:lstStyle/>
@@ -19311,28 +18961,28 @@
               <a:buNone/>
             </a:pPr>
             <a:r>
-              <a:rPr lang="en-US" sz="1700" b="1" dirty="0">
+              <a:rPr lang="en-US" sz="1400" b="1" dirty="0">
                 <a:solidFill>
                   <a:srgbClr val="FFFFFF"/>
                 </a:solidFill>
                 <a:latin typeface="Arial"/>
                 <a:cs typeface="Arial"/>
               </a:rPr>
-              <a:t>What was done</a:t>
-            </a:r>
-          </a:p>
-        </p:txBody>
-      </p:sp>
-      <p:sp>
-        <p:nvSpPr>
-          <p:cNvPr id="73" name="CardBody"/>
+              <a:t>5 Discussion</a:t>
+            </a:r>
+          </a:p>
+        </p:txBody>
+      </p:sp>
+      <p:sp>
+        <p:nvSpPr>
+          <p:cNvPr id="89" name="StepText"/>
           <p:cNvSpPr/>
           <p:nvPr/>
         </p:nvSpPr>
         <p:spPr>
           <a:xfrm>
-            <a:off x="3326600" y="2511973"/>
-            <a:ext cx="2669400" cy="2314080"/>
+            <a:off x="7975600" y="2726796"/>
+            <a:ext cx="1789600" cy="1100000"/>
           </a:xfrm>
           <a:prstGeom prst="rect">
             <a:avLst/>
@@ -19345,7 +18995,7 @@
           </a:ln>
         </p:spPr>
         <p:txBody>
-          <a:bodyPr wrap="square" lIns="137160" tIns="91440" rIns="137160" bIns="91440" rtlCol="0" anchor="ctr">
+          <a:bodyPr wrap="square" lIns="110000" tIns="91440" rIns="110000" bIns="91440" rtlCol="0" anchor="ctr">
             <a:normAutofit/>
           </a:bodyPr>
           <a:lstStyle/>
@@ -19355,350 +19005,113 @@
                 <a:spcPct val="104000"/>
               </a:lnSpc>
               <a:spcBef>
-                <a:spcPts val="400"/>
+                <a:spcPts val="200"/>
               </a:spcBef>
               <a:buNone/>
             </a:pPr>
             <a:r>
-              <a:rPr lang="en-US" sz="1600" dirty="0">
+              <a:rPr lang="en-US" sz="1500" dirty="0">
                 <a:solidFill>
                   <a:srgbClr val="000000"/>
                 </a:solidFill>
                 <a:latin typeface="Arial"/>
                 <a:cs typeface="Arial"/>
               </a:rPr>
-              <a:t>Intervention or exposure in full</a:t>
-            </a:r>
-          </a:p>
+              <a:t>Answer, compare, explain</a:t>
+            </a:r>
+          </a:p>
+        </p:txBody>
+      </p:sp>
+      <p:sp>
+        <p:nvSpPr>
+          <p:cNvPr id="90" name="Step"/>
+          <p:cNvSpPr/>
+          <p:nvPr/>
+        </p:nvSpPr>
+        <p:spPr>
+          <a:xfrm>
+            <a:off x="9805200" y="1806796"/>
+            <a:ext cx="1929600" cy="760000"/>
+          </a:xfrm>
+          <a:prstGeom prst="chevron">
+            <a:avLst>
+              <a:gd name="adj" fmla="val 28000"/>
+            </a:avLst>
+          </a:prstGeom>
+          <a:solidFill>
+            <a:srgbClr val="8A99A3"/>
+          </a:solidFill>
+          <a:ln>
+            <a:noFill/>
+          </a:ln>
+        </p:spPr>
+        <p:txBody>
+          <a:bodyPr wrap="square" lIns="200000" tIns="45720" rIns="200000" bIns="45720" rtlCol="0" anchor="ctr">
+            <a:normAutofit/>
+          </a:bodyPr>
+          <a:lstStyle/>
+          <a:p>
+            <a:pPr marL="0" indent="0" algn="ctr">
+              <a:buNone/>
+            </a:pPr>
+            <a:r>
+              <a:rPr lang="en-US" sz="1400" b="1" dirty="0">
+                <a:solidFill>
+                  <a:srgbClr val="FFFFFF"/>
+                </a:solidFill>
+                <a:latin typeface="Arial"/>
+                <a:cs typeface="Arial"/>
+              </a:rPr>
+              <a:t>6 Abstract, title</a:t>
+            </a:r>
+          </a:p>
+        </p:txBody>
+      </p:sp>
+      <p:sp>
+        <p:nvSpPr>
+          <p:cNvPr id="91" name="StepText"/>
+          <p:cNvSpPr/>
+          <p:nvPr/>
+        </p:nvSpPr>
+        <p:spPr>
+          <a:xfrm>
+            <a:off x="9845200" y="2726796"/>
+            <a:ext cx="1789600" cy="1100000"/>
+          </a:xfrm>
+          <a:prstGeom prst="rect">
+            <a:avLst/>
+          </a:prstGeom>
+          <a:solidFill>
+            <a:srgbClr val="EAF2F5"/>
+          </a:solidFill>
+          <a:ln>
+            <a:noFill/>
+          </a:ln>
+        </p:spPr>
+        <p:txBody>
+          <a:bodyPr wrap="square" lIns="110000" tIns="91440" rIns="110000" bIns="91440" rtlCol="0" anchor="ctr">
+            <a:normAutofit/>
+          </a:bodyPr>
+          <a:lstStyle/>
           <a:p>
             <a:pPr marL="0" indent="0" algn="ctr">
               <a:lnSpc>
                 <a:spcPct val="104000"/>
               </a:lnSpc>
               <a:spcBef>
-                <a:spcPts val="400"/>
+                <a:spcPts val="200"/>
               </a:spcBef>
               <a:buNone/>
             </a:pPr>
             <a:r>
-              <a:rPr lang="en-US" sz="1600" dirty="0">
+              <a:rPr lang="en-US" sz="1500" dirty="0">
                 <a:solidFill>
                   <a:srgbClr val="000000"/>
                 </a:solidFill>
                 <a:latin typeface="Arial"/>
                 <a:cs typeface="Arial"/>
               </a:rPr>
-              <a:t>Variables defined</a:t>
-            </a:r>
-          </a:p>
-          <a:p>
-            <a:pPr marL="0" indent="0" algn="ctr">
-              <a:lnSpc>
-                <a:spcPct val="104000"/>
-              </a:lnSpc>
-              <a:spcBef>
-                <a:spcPts val="400"/>
-              </a:spcBef>
-              <a:buNone/>
-            </a:pPr>
-            <a:r>
-              <a:rPr lang="en-US" sz="1600" dirty="0">
-                <a:solidFill>
-                  <a:srgbClr val="000000"/>
-                </a:solidFill>
-                <a:latin typeface="Arial"/>
-                <a:cs typeface="Arial"/>
-              </a:rPr>
-              <a:t>Paper 1: staff training, daily pharmacist check</a:t>
-            </a:r>
-          </a:p>
-        </p:txBody>
-      </p:sp>
-      <p:sp>
-        <p:nvSpPr>
-          <p:cNvPr id="74" name="CardHead"/>
-          <p:cNvSpPr/>
-          <p:nvPr/>
-        </p:nvSpPr>
-        <p:spPr>
-          <a:xfrm>
-            <a:off x="6196000" y="1871973"/>
-            <a:ext cx="2669400" cy="640000"/>
-          </a:xfrm>
-          <a:prstGeom prst="rect">
-            <a:avLst/>
-          </a:prstGeom>
-          <a:solidFill>
-            <a:srgbClr val="5FA39B"/>
-          </a:solidFill>
-          <a:ln>
-            <a:noFill/>
-          </a:ln>
-        </p:spPr>
-        <p:txBody>
-          <a:bodyPr wrap="square" lIns="91440" tIns="45720" rIns="91440" bIns="45720" rtlCol="0" anchor="ctr">
-            <a:normAutofit/>
-          </a:bodyPr>
-          <a:lstStyle/>
-          <a:p>
-            <a:pPr marL="0" indent="0" algn="ctr">
-              <a:buNone/>
-            </a:pPr>
-            <a:r>
-              <a:rPr lang="en-US" sz="1700" b="1" dirty="0">
-                <a:solidFill>
-                  <a:srgbClr val="FFFFFF"/>
-                </a:solidFill>
-                <a:latin typeface="Arial"/>
-                <a:cs typeface="Arial"/>
-              </a:rPr>
-              <a:t>Outcomes and size</a:t>
-            </a:r>
-          </a:p>
-        </p:txBody>
-      </p:sp>
-      <p:sp>
-        <p:nvSpPr>
-          <p:cNvPr id="75" name="CardBody"/>
-          <p:cNvSpPr/>
-          <p:nvPr/>
-        </p:nvSpPr>
-        <p:spPr>
-          <a:xfrm>
-            <a:off x="6196000" y="2511973"/>
-            <a:ext cx="2669400" cy="2314080"/>
-          </a:xfrm>
-          <a:prstGeom prst="rect">
-            <a:avLst/>
-          </a:prstGeom>
-          <a:solidFill>
-            <a:srgbClr val="EAF2F5"/>
-          </a:solidFill>
-          <a:ln>
-            <a:noFill/>
-          </a:ln>
-        </p:spPr>
-        <p:txBody>
-          <a:bodyPr wrap="square" lIns="137160" tIns="91440" rIns="137160" bIns="91440" rtlCol="0" anchor="ctr">
-            <a:normAutofit/>
-          </a:bodyPr>
-          <a:lstStyle/>
-          <a:p>
-            <a:pPr marL="0" indent="0" algn="ctr">
-              <a:lnSpc>
-                <a:spcPct val="104000"/>
-              </a:lnSpc>
-              <a:spcBef>
-                <a:spcPts val="400"/>
-              </a:spcBef>
-              <a:buNone/>
-            </a:pPr>
-            <a:r>
-              <a:rPr lang="en-US" sz="1600" dirty="0">
-                <a:solidFill>
-                  <a:srgbClr val="000000"/>
-                </a:solidFill>
-                <a:latin typeface="Arial"/>
-                <a:cs typeface="Arial"/>
-              </a:rPr>
-              <a:t>One primary outcome: how and when</a:t>
-            </a:r>
-          </a:p>
-          <a:p>
-            <a:pPr marL="0" indent="0" algn="ctr">
-              <a:lnSpc>
-                <a:spcPct val="104000"/>
-              </a:lnSpc>
-              <a:spcBef>
-                <a:spcPts val="400"/>
-              </a:spcBef>
-              <a:buNone/>
-            </a:pPr>
-            <a:r>
-              <a:rPr lang="en-US" sz="1600" dirty="0">
-                <a:solidFill>
-                  <a:srgbClr val="000000"/>
-                </a:solidFill>
-                <a:latin typeface="Arial"/>
-                <a:cs typeface="Arial"/>
-              </a:rPr>
-              <a:t>Sample size: assumptions and source</a:t>
-            </a:r>
-          </a:p>
-          <a:p>
-            <a:pPr marL="0" indent="0" algn="ctr">
-              <a:lnSpc>
-                <a:spcPct val="104000"/>
-              </a:lnSpc>
-              <a:spcBef>
-                <a:spcPts val="400"/>
-              </a:spcBef>
-              <a:buNone/>
-            </a:pPr>
-            <a:r>
-              <a:rPr lang="en-US" sz="1600" dirty="0">
-                <a:solidFill>
-                  <a:srgbClr val="000000"/>
-                </a:solidFill>
-                <a:latin typeface="Arial"/>
-                <a:cs typeface="Arial"/>
-              </a:rPr>
-              <a:t>Paper 2: no sample-size statement</a:t>
-            </a:r>
-          </a:p>
-        </p:txBody>
-      </p:sp>
-      <p:sp>
-        <p:nvSpPr>
-          <p:cNvPr id="76" name="CardHead"/>
-          <p:cNvSpPr/>
-          <p:nvPr/>
-        </p:nvSpPr>
-        <p:spPr>
-          <a:xfrm>
-            <a:off x="9065400" y="1871973"/>
-            <a:ext cx="2669400" cy="640000"/>
-          </a:xfrm>
-          <a:prstGeom prst="rect">
-            <a:avLst/>
-          </a:prstGeom>
-          <a:solidFill>
-            <a:srgbClr val="0070C0"/>
-          </a:solidFill>
-          <a:ln>
-            <a:noFill/>
-          </a:ln>
-        </p:spPr>
-        <p:txBody>
-          <a:bodyPr wrap="square" lIns="91440" tIns="45720" rIns="91440" bIns="45720" rtlCol="0" anchor="ctr">
-            <a:normAutofit/>
-          </a:bodyPr>
-          <a:lstStyle/>
-          <a:p>
-            <a:pPr marL="0" indent="0" algn="ctr">
-              <a:buNone/>
-            </a:pPr>
-            <a:r>
-              <a:rPr lang="en-US" sz="1700" b="1" dirty="0">
-                <a:solidFill>
-                  <a:srgbClr val="FFFFFF"/>
-                </a:solidFill>
-                <a:latin typeface="Arial"/>
-                <a:cs typeface="Arial"/>
-              </a:rPr>
-              <a:t>Statistical analysis</a:t>
-            </a:r>
-          </a:p>
-        </p:txBody>
-      </p:sp>
-      <p:sp>
-        <p:nvSpPr>
-          <p:cNvPr id="77" name="CardBody"/>
-          <p:cNvSpPr/>
-          <p:nvPr/>
-        </p:nvSpPr>
-        <p:spPr>
-          <a:xfrm>
-            <a:off x="9065400" y="2511973"/>
-            <a:ext cx="2669400" cy="2314080"/>
-          </a:xfrm>
-          <a:prstGeom prst="rect">
-            <a:avLst/>
-          </a:prstGeom>
-          <a:solidFill>
-            <a:srgbClr val="EAF2F5"/>
-          </a:solidFill>
-          <a:ln>
-            <a:noFill/>
-          </a:ln>
-        </p:spPr>
-        <p:txBody>
-          <a:bodyPr wrap="square" lIns="137160" tIns="91440" rIns="137160" bIns="91440" rtlCol="0" anchor="ctr">
-            <a:normAutofit/>
-          </a:bodyPr>
-          <a:lstStyle/>
-          <a:p>
-            <a:pPr marL="0" indent="0" algn="ctr">
-              <a:lnSpc>
-                <a:spcPct val="104000"/>
-              </a:lnSpc>
-              <a:spcBef>
-                <a:spcPts val="400"/>
-              </a:spcBef>
-              <a:buNone/>
-            </a:pPr>
-            <a:r>
-              <a:rPr lang="en-US" sz="1600" dirty="0">
-                <a:solidFill>
-                  <a:srgbClr val="000000"/>
-                </a:solidFill>
-                <a:latin typeface="Arial"/>
-                <a:cs typeface="Arial"/>
-              </a:rPr>
-              <a:t>A method for each comparison</a:t>
-            </a:r>
-          </a:p>
-          <a:p>
-            <a:pPr marL="0" indent="0" algn="ctr">
-              <a:lnSpc>
-                <a:spcPct val="104000"/>
-              </a:lnSpc>
-              <a:spcBef>
-                <a:spcPts val="400"/>
-              </a:spcBef>
-              <a:buNone/>
-            </a:pPr>
-            <a:r>
-              <a:rPr lang="en-US" sz="1600" dirty="0">
-                <a:solidFill>
-                  <a:srgbClr val="000000"/>
-                </a:solidFill>
-                <a:latin typeface="Arial"/>
-                <a:cs typeface="Arial"/>
-              </a:rPr>
-              <a:t>Estimate matches the test</a:t>
-            </a:r>
-          </a:p>
-          <a:p>
-            <a:pPr marL="0" indent="0" algn="ctr">
-              <a:lnSpc>
-                <a:spcPct val="104000"/>
-              </a:lnSpc>
-              <a:spcBef>
-                <a:spcPts val="400"/>
-              </a:spcBef>
-              <a:buNone/>
-            </a:pPr>
-            <a:r>
-              <a:rPr lang="en-US" sz="1600" dirty="0">
-                <a:solidFill>
-                  <a:srgbClr val="000000"/>
-                </a:solidFill>
-                <a:latin typeface="Arial"/>
-                <a:cs typeface="Arial"/>
-              </a:rPr>
-              <a:t>Missing data, multiple comparisons</a:t>
-            </a:r>
-          </a:p>
-          <a:p>
-            <a:pPr marL="0" indent="0" algn="ctr">
-              <a:lnSpc>
-                <a:spcPct val="104000"/>
-              </a:lnSpc>
-              <a:spcBef>
-                <a:spcPts val="400"/>
-              </a:spcBef>
-              <a:buNone/>
-            </a:pPr>
-            <a:r>
-              <a:rPr lang="en-US" sz="1600" dirty="0">
-                <a:solidFill>
-                  <a:srgbClr val="000000"/>
-                </a:solidFill>
-                <a:latin typeface="Arial"/>
-                <a:cs typeface="Arial"/>
-              </a:rPr>
-              <a:t>Software and version</a:t>
+              <a:t>Summarise the paper, name it last</a:t>
             </a:r>
           </a:p>
         </p:txBody>
@@ -19753,7 +19166,7 @@
                 <a:latin typeface="Arial"/>
                 <a:cs typeface="Arial"/>
               </a:rPr>
-              <a:t>The statistical paragraph names a method for every comparison you report.</a:t>
+              <a:t>Start with your tables. Write the title last.</a:t>
             </a:r>
           </a:p>
         </p:txBody>
@@ -19921,7 +19334,7 @@
                 <a:latin typeface="Arial"/>
                 <a:cs typeface="Arial"/>
               </a:rPr>
-              <a:t>Optional: Methods for FLUID-ICU question 1</a:t>
+              <a:t>Methods: enough detail for someone to repeat it</a:t>
             </a:r>
           </a:p>
         </p:txBody>
@@ -19956,14 +19369,14 @@
       </p:sp>
       <p:sp>
         <p:nvSpPr>
-          <p:cNvPr id="20" name="Body"/>
+          <p:cNvPr id="19" name="Intro"/>
           <p:cNvSpPr txBox="1"/>
           <p:nvPr/>
         </p:nvSpPr>
         <p:spPr>
           <a:xfrm>
-            <a:off x="457200" y="1080000"/>
-            <a:ext cx="11277600" cy="4780000"/>
+            <a:off x="457200" y="1100000"/>
+            <a:ext cx="11277600" cy="480000"/>
           </a:xfrm>
           <a:prstGeom prst="rect">
             <a:avLst/>
@@ -19974,162 +19387,654 @@
           </a:ln>
         </p:spPr>
         <p:txBody>
-          <a:bodyPr wrap="square" lIns="91440" tIns="45720" rIns="91440" bIns="45720" rtlCol="0" anchor="ctr"/>
+          <a:bodyPr wrap="square" lIns="91440" tIns="45720" rIns="91440" bIns="45720" rtlCol="0" anchor="t"/>
           <a:lstStyle/>
           <a:p>
             <a:pPr marL="0" indent="0" algn="l">
+              <a:buNone/>
+            </a:pPr>
+            <a:r>
+              <a:rPr lang="en-US" sz="1700" i="1" dirty="0">
+                <a:solidFill>
+                  <a:srgbClr val="595959"/>
+                </a:solidFill>
+                <a:latin typeface="Arial"/>
+                <a:cs typeface="Arial"/>
+              </a:rPr>
+              <a:t>Methods say what you did. If a colleague could not redo the study from it, add detail.</a:t>
+            </a:r>
+          </a:p>
+        </p:txBody>
+      </p:sp>
+      <p:sp>
+        <p:nvSpPr>
+          <p:cNvPr id="70" name="CardHead"/>
+          <p:cNvSpPr/>
+          <p:nvPr/>
+        </p:nvSpPr>
+        <p:spPr>
+          <a:xfrm>
+            <a:off x="457200" y="1871973"/>
+            <a:ext cx="2669400" cy="640000"/>
+          </a:xfrm>
+          <a:prstGeom prst="rect">
+            <a:avLst/>
+          </a:prstGeom>
+          <a:solidFill>
+            <a:srgbClr val="0D7377"/>
+          </a:solidFill>
+          <a:ln>
+            <a:noFill/>
+          </a:ln>
+        </p:spPr>
+        <p:txBody>
+          <a:bodyPr wrap="square" lIns="91440" tIns="45720" rIns="91440" bIns="45720" rtlCol="0" anchor="ctr">
+            <a:normAutofit/>
+          </a:bodyPr>
+          <a:lstStyle/>
+          <a:p>
+            <a:pPr marL="0" indent="0" algn="ctr">
+              <a:buNone/>
+            </a:pPr>
+            <a:r>
+              <a:rPr lang="en-US" sz="1700" b="1" dirty="0">
+                <a:solidFill>
+                  <a:srgbClr val="FFFFFF"/>
+                </a:solidFill>
+                <a:latin typeface="Arial"/>
+                <a:cs typeface="Arial"/>
+              </a:rPr>
+              <a:t>Who and where</a:t>
+            </a:r>
+          </a:p>
+        </p:txBody>
+      </p:sp>
+      <p:sp>
+        <p:nvSpPr>
+          <p:cNvPr id="71" name="CardBody"/>
+          <p:cNvSpPr/>
+          <p:nvPr/>
+        </p:nvSpPr>
+        <p:spPr>
+          <a:xfrm>
+            <a:off x="457200" y="2511973"/>
+            <a:ext cx="2669400" cy="2314080"/>
+          </a:xfrm>
+          <a:prstGeom prst="rect">
+            <a:avLst/>
+          </a:prstGeom>
+          <a:solidFill>
+            <a:srgbClr val="EAF2F5"/>
+          </a:solidFill>
+          <a:ln>
+            <a:noFill/>
+          </a:ln>
+        </p:spPr>
+        <p:txBody>
+          <a:bodyPr wrap="square" lIns="137160" tIns="91440" rIns="137160" bIns="91440" rtlCol="0" anchor="ctr">
+            <a:normAutofit/>
+          </a:bodyPr>
+          <a:lstStyle/>
+          <a:p>
+            <a:pPr marL="0" indent="0" algn="ctr">
               <a:lnSpc>
-                <a:spcPct val="108000"/>
-              </a:lnSpc>
-              <a:buNone/>
-            </a:pPr>
-            <a:r>
-              <a:rPr lang="en-US" sz="1900" i="1" dirty="0">
-                <a:solidFill>
-                  <a:srgbClr val="595959"/>
-                </a:solidFill>
-                <a:latin typeface="Arial"/>
-                <a:cs typeface="Arial"/>
-              </a:rPr>
-              <a:t>One sentence per STROBE item (simulated data). STROBE = the reporting checklist for observational studies.</a:t>
-            </a:r>
-          </a:p>
-          <a:p>
-            <a:pPr>
-              <a:buNone/>
-            </a:pPr>
-            <a:endParaRPr sz="950"/>
-          </a:p>
-          <a:p>
-            <a:pPr marL="274320" indent="-274320" algn="l">
-              <a:lnSpc>
-                <a:spcPct val="106000"/>
+                <a:spcPct val="104000"/>
               </a:lnSpc>
               <a:spcBef>
-                <a:spcPts val="560"/>
+                <a:spcPts val="400"/>
               </a:spcBef>
-              <a:buFont typeface="Arial"/>
-              <a:buChar char="•"/>
-            </a:pPr>
-            <a:r>
-              <a:rPr lang="en-US" sz="1700" dirty="0">
+              <a:buNone/>
+            </a:pPr>
+            <a:r>
+              <a:rPr lang="en-US" sz="1600" dirty="0">
                 <a:solidFill>
                   <a:srgbClr val="000000"/>
                 </a:solidFill>
                 <a:latin typeface="Arial"/>
                 <a:cs typeface="Arial"/>
               </a:rPr>
-              <a:t>Items 4-6: We analysed FLUID-ICU, a prospective cohort of consecutive adults with sepsis admitted to four ICUs between January 2023 and December 2024.</a:t>
-            </a:r>
-          </a:p>
-          <a:p>
-            <a:pPr marL="274320" indent="-274320" algn="l">
+              <a:t>Design, setting, dates</a:t>
+            </a:r>
+          </a:p>
+          <a:p>
+            <a:pPr marL="0" indent="0" algn="ctr">
               <a:lnSpc>
-                <a:spcPct val="106000"/>
+                <a:spcPct val="104000"/>
               </a:lnSpc>
               <a:spcBef>
-                <a:spcPts val="560"/>
+                <a:spcPts val="400"/>
               </a:spcBef>
-              <a:buFont typeface="Arial"/>
-              <a:buChar char="•"/>
-            </a:pPr>
-            <a:r>
-              <a:rPr lang="en-US" sz="1700" dirty="0">
+              <a:buNone/>
+            </a:pPr>
+            <a:r>
+              <a:rPr lang="en-US" sz="1600" dirty="0">
                 <a:solidFill>
                   <a:srgbClr val="000000"/>
                 </a:solidFill>
                 <a:latin typeface="Arial"/>
                 <a:cs typeface="Arial"/>
               </a:rPr>
-              <a:t>Item 7: The exposure was a positive cumulative fluid balance by ICU day 3 (fluid in minus fluid out over days 1-3, &gt; 0 ml/kg). The outcome was death from any cause within 28 days of ICU admission.</a:t>
-            </a:r>
-          </a:p>
-          <a:p>
-            <a:pPr marL="274320" indent="-274320" algn="l">
+              <a:t>Eligibility criteria</a:t>
+            </a:r>
+          </a:p>
+          <a:p>
+            <a:pPr marL="0" indent="0" algn="ctr">
               <a:lnSpc>
-                <a:spcPct val="106000"/>
+                <a:spcPct val="104000"/>
               </a:lnSpc>
               <a:spcBef>
-                <a:spcPts val="560"/>
+                <a:spcPts val="400"/>
               </a:spcBef>
-              <a:buFont typeface="Arial"/>
-              <a:buChar char="•"/>
-            </a:pPr>
-            <a:r>
-              <a:rPr lang="en-US" sz="1700" dirty="0">
+              <a:buNone/>
+            </a:pPr>
+            <a:r>
+              <a:rPr lang="en-US" sz="1600" dirty="0">
                 <a:solidFill>
                   <a:srgbClr val="000000"/>
                 </a:solidFill>
                 <a:latin typeface="Arial"/>
                 <a:cs typeface="Arial"/>
               </a:rPr>
-              <a:t>Item 8: Data came from ICU charts on a standard case report form.</a:t>
-            </a:r>
-          </a:p>
-          <a:p>
-            <a:pPr marL="274320" indent="-274320" algn="l">
+              <a:t>Ethics approval and consent</a:t>
+            </a:r>
+          </a:p>
+          <a:p>
+            <a:pPr marL="0" indent="0" algn="ctr">
               <a:lnSpc>
-                <a:spcPct val="106000"/>
+                <a:spcPct val="104000"/>
               </a:lnSpc>
               <a:spcBef>
-                <a:spcPts val="560"/>
+                <a:spcPts val="400"/>
               </a:spcBef>
-              <a:buFont typeface="Arial"/>
-              <a:buChar char="•"/>
-            </a:pPr>
-            <a:r>
-              <a:rPr lang="en-US" sz="1700" dirty="0">
+              <a:buNone/>
+            </a:pPr>
+            <a:r>
+              <a:rPr lang="en-US" sz="1600" dirty="0">
                 <a:solidFill>
                   <a:srgbClr val="000000"/>
                 </a:solidFill>
                 <a:latin typeface="Arial"/>
                 <a:cs typeface="Arial"/>
               </a:rPr>
-              <a:t>Item 9: To address confounding by indication, we adjusted for severity and comorbidity pre-specified in the analysis plan.</a:t>
-            </a:r>
-          </a:p>
-          <a:p>
-            <a:pPr marL="274320" indent="-274320" algn="l">
+              <a:t>Registration number</a:t>
+            </a:r>
+          </a:p>
+        </p:txBody>
+      </p:sp>
+      <p:sp>
+        <p:nvSpPr>
+          <p:cNvPr id="72" name="CardHead"/>
+          <p:cNvSpPr/>
+          <p:nvPr/>
+        </p:nvSpPr>
+        <p:spPr>
+          <a:xfrm>
+            <a:off x="3326600" y="1871973"/>
+            <a:ext cx="2669400" cy="640000"/>
+          </a:xfrm>
+          <a:prstGeom prst="rect">
+            <a:avLst/>
+          </a:prstGeom>
+          <a:solidFill>
+            <a:srgbClr val="0B376C"/>
+          </a:solidFill>
+          <a:ln>
+            <a:noFill/>
+          </a:ln>
+        </p:spPr>
+        <p:txBody>
+          <a:bodyPr wrap="square" lIns="91440" tIns="45720" rIns="91440" bIns="45720" rtlCol="0" anchor="ctr">
+            <a:normAutofit/>
+          </a:bodyPr>
+          <a:lstStyle/>
+          <a:p>
+            <a:pPr marL="0" indent="0" algn="ctr">
+              <a:buNone/>
+            </a:pPr>
+            <a:r>
+              <a:rPr lang="en-US" sz="1700" b="1" dirty="0">
+                <a:solidFill>
+                  <a:srgbClr val="FFFFFF"/>
+                </a:solidFill>
+                <a:latin typeface="Arial"/>
+                <a:cs typeface="Arial"/>
+              </a:rPr>
+              <a:t>What was done</a:t>
+            </a:r>
+          </a:p>
+        </p:txBody>
+      </p:sp>
+      <p:sp>
+        <p:nvSpPr>
+          <p:cNvPr id="73" name="CardBody"/>
+          <p:cNvSpPr/>
+          <p:nvPr/>
+        </p:nvSpPr>
+        <p:spPr>
+          <a:xfrm>
+            <a:off x="3326600" y="2511973"/>
+            <a:ext cx="2669400" cy="2314080"/>
+          </a:xfrm>
+          <a:prstGeom prst="rect">
+            <a:avLst/>
+          </a:prstGeom>
+          <a:solidFill>
+            <a:srgbClr val="EAF2F5"/>
+          </a:solidFill>
+          <a:ln>
+            <a:noFill/>
+          </a:ln>
+        </p:spPr>
+        <p:txBody>
+          <a:bodyPr wrap="square" lIns="137160" tIns="91440" rIns="137160" bIns="91440" rtlCol="0" anchor="ctr">
+            <a:normAutofit/>
+          </a:bodyPr>
+          <a:lstStyle/>
+          <a:p>
+            <a:pPr marL="0" indent="0" algn="ctr">
               <a:lnSpc>
-                <a:spcPct val="106000"/>
+                <a:spcPct val="104000"/>
               </a:lnSpc>
               <a:spcBef>
-                <a:spcPts val="560"/>
+                <a:spcPts val="400"/>
               </a:spcBef>
-              <a:buFont typeface="Arial"/>
-              <a:buChar char="•"/>
-            </a:pPr>
-            <a:r>
-              <a:rPr lang="en-US" sz="1700" dirty="0">
+              <a:buNone/>
+            </a:pPr>
+            <a:r>
+              <a:rPr lang="en-US" sz="1600" dirty="0">
                 <a:solidFill>
                   <a:srgbClr val="000000"/>
                 </a:solidFill>
                 <a:latin typeface="Arial"/>
                 <a:cs typeface="Arial"/>
               </a:rPr>
-              <a:t>Item 10: All eligible patients in the cohort were included (no separate sample size).</a:t>
-            </a:r>
-          </a:p>
-          <a:p>
-            <a:pPr marL="274320" indent="-274320" algn="l">
+              <a:t>Intervention or exposure in full</a:t>
+            </a:r>
+          </a:p>
+          <a:p>
+            <a:pPr marL="0" indent="0" algn="ctr">
               <a:lnSpc>
-                <a:spcPct val="106000"/>
+                <a:spcPct val="104000"/>
               </a:lnSpc>
               <a:spcBef>
-                <a:spcPts val="560"/>
+                <a:spcPts val="400"/>
               </a:spcBef>
-              <a:buFont typeface="Arial"/>
-              <a:buChar char="•"/>
-            </a:pPr>
-            <a:r>
-              <a:rPr lang="en-US" sz="1700" dirty="0">
-                <a:solidFill>
-                  <a:srgbClr val="0B376C"/>
-                </a:solidFill>
-                <a:latin typeface="Arial"/>
-                <a:cs typeface="Arial"/>
-              </a:rPr>
-              <a:t>Ethics (course version): This analysis used a simulated teaching dataset. No ethics approval or consent was required.</a:t>
+              <a:buNone/>
+            </a:pPr>
+            <a:r>
+              <a:rPr lang="en-US" sz="1600" dirty="0">
+                <a:solidFill>
+                  <a:srgbClr val="000000"/>
+                </a:solidFill>
+                <a:latin typeface="Arial"/>
+                <a:cs typeface="Arial"/>
+              </a:rPr>
+              <a:t>Variables defined</a:t>
+            </a:r>
+          </a:p>
+          <a:p>
+            <a:pPr marL="0" indent="0" algn="ctr">
+              <a:lnSpc>
+                <a:spcPct val="104000"/>
+              </a:lnSpc>
+              <a:spcBef>
+                <a:spcPts val="400"/>
+              </a:spcBef>
+              <a:buNone/>
+            </a:pPr>
+            <a:r>
+              <a:rPr lang="en-US" sz="1600" dirty="0">
+                <a:solidFill>
+                  <a:srgbClr val="000000"/>
+                </a:solidFill>
+                <a:latin typeface="Arial"/>
+                <a:cs typeface="Arial"/>
+              </a:rPr>
+              <a:t>Paper 1: staff training, daily pharmacist check</a:t>
+            </a:r>
+          </a:p>
+        </p:txBody>
+      </p:sp>
+      <p:sp>
+        <p:nvSpPr>
+          <p:cNvPr id="74" name="CardHead"/>
+          <p:cNvSpPr/>
+          <p:nvPr/>
+        </p:nvSpPr>
+        <p:spPr>
+          <a:xfrm>
+            <a:off x="6196000" y="1871973"/>
+            <a:ext cx="2669400" cy="640000"/>
+          </a:xfrm>
+          <a:prstGeom prst="rect">
+            <a:avLst/>
+          </a:prstGeom>
+          <a:solidFill>
+            <a:srgbClr val="5FA39B"/>
+          </a:solidFill>
+          <a:ln>
+            <a:noFill/>
+          </a:ln>
+        </p:spPr>
+        <p:txBody>
+          <a:bodyPr wrap="square" lIns="91440" tIns="45720" rIns="91440" bIns="45720" rtlCol="0" anchor="ctr">
+            <a:normAutofit/>
+          </a:bodyPr>
+          <a:lstStyle/>
+          <a:p>
+            <a:pPr marL="0" indent="0" algn="ctr">
+              <a:buNone/>
+            </a:pPr>
+            <a:r>
+              <a:rPr lang="en-US" sz="1700" b="1" dirty="0">
+                <a:solidFill>
+                  <a:srgbClr val="FFFFFF"/>
+                </a:solidFill>
+                <a:latin typeface="Arial"/>
+                <a:cs typeface="Arial"/>
+              </a:rPr>
+              <a:t>Outcomes and size</a:t>
+            </a:r>
+          </a:p>
+        </p:txBody>
+      </p:sp>
+      <p:sp>
+        <p:nvSpPr>
+          <p:cNvPr id="75" name="CardBody"/>
+          <p:cNvSpPr/>
+          <p:nvPr/>
+        </p:nvSpPr>
+        <p:spPr>
+          <a:xfrm>
+            <a:off x="6196000" y="2511973"/>
+            <a:ext cx="2669400" cy="2314080"/>
+          </a:xfrm>
+          <a:prstGeom prst="rect">
+            <a:avLst/>
+          </a:prstGeom>
+          <a:solidFill>
+            <a:srgbClr val="EAF2F5"/>
+          </a:solidFill>
+          <a:ln>
+            <a:noFill/>
+          </a:ln>
+        </p:spPr>
+        <p:txBody>
+          <a:bodyPr wrap="square" lIns="137160" tIns="91440" rIns="137160" bIns="91440" rtlCol="0" anchor="ctr">
+            <a:normAutofit/>
+          </a:bodyPr>
+          <a:lstStyle/>
+          <a:p>
+            <a:pPr marL="0" indent="0" algn="ctr">
+              <a:lnSpc>
+                <a:spcPct val="104000"/>
+              </a:lnSpc>
+              <a:spcBef>
+                <a:spcPts val="400"/>
+              </a:spcBef>
+              <a:buNone/>
+            </a:pPr>
+            <a:r>
+              <a:rPr lang="en-US" sz="1600" dirty="0">
+                <a:solidFill>
+                  <a:srgbClr val="000000"/>
+                </a:solidFill>
+                <a:latin typeface="Arial"/>
+                <a:cs typeface="Arial"/>
+              </a:rPr>
+              <a:t>One primary outcome: how and when</a:t>
+            </a:r>
+          </a:p>
+          <a:p>
+            <a:pPr marL="0" indent="0" algn="ctr">
+              <a:lnSpc>
+                <a:spcPct val="104000"/>
+              </a:lnSpc>
+              <a:spcBef>
+                <a:spcPts val="400"/>
+              </a:spcBef>
+              <a:buNone/>
+            </a:pPr>
+            <a:r>
+              <a:rPr lang="en-US" sz="1600" dirty="0">
+                <a:solidFill>
+                  <a:srgbClr val="000000"/>
+                </a:solidFill>
+                <a:latin typeface="Arial"/>
+                <a:cs typeface="Arial"/>
+              </a:rPr>
+              <a:t>Sample size: assumptions and source</a:t>
+            </a:r>
+          </a:p>
+          <a:p>
+            <a:pPr marL="0" indent="0" algn="ctr">
+              <a:lnSpc>
+                <a:spcPct val="104000"/>
+              </a:lnSpc>
+              <a:spcBef>
+                <a:spcPts val="400"/>
+              </a:spcBef>
+              <a:buNone/>
+            </a:pPr>
+            <a:r>
+              <a:rPr lang="en-US" sz="1600" dirty="0">
+                <a:solidFill>
+                  <a:srgbClr val="000000"/>
+                </a:solidFill>
+                <a:latin typeface="Arial"/>
+                <a:cs typeface="Arial"/>
+              </a:rPr>
+              <a:t>Paper 2: no sample-size statement</a:t>
+            </a:r>
+          </a:p>
+        </p:txBody>
+      </p:sp>
+      <p:sp>
+        <p:nvSpPr>
+          <p:cNvPr id="76" name="CardHead"/>
+          <p:cNvSpPr/>
+          <p:nvPr/>
+        </p:nvSpPr>
+        <p:spPr>
+          <a:xfrm>
+            <a:off x="9065400" y="1871973"/>
+            <a:ext cx="2669400" cy="640000"/>
+          </a:xfrm>
+          <a:prstGeom prst="rect">
+            <a:avLst/>
+          </a:prstGeom>
+          <a:solidFill>
+            <a:srgbClr val="0070C0"/>
+          </a:solidFill>
+          <a:ln>
+            <a:noFill/>
+          </a:ln>
+        </p:spPr>
+        <p:txBody>
+          <a:bodyPr wrap="square" lIns="91440" tIns="45720" rIns="91440" bIns="45720" rtlCol="0" anchor="ctr">
+            <a:normAutofit/>
+          </a:bodyPr>
+          <a:lstStyle/>
+          <a:p>
+            <a:pPr marL="0" indent="0" algn="ctr">
+              <a:buNone/>
+            </a:pPr>
+            <a:r>
+              <a:rPr lang="en-US" sz="1700" b="1" dirty="0">
+                <a:solidFill>
+                  <a:srgbClr val="FFFFFF"/>
+                </a:solidFill>
+                <a:latin typeface="Arial"/>
+                <a:cs typeface="Arial"/>
+              </a:rPr>
+              <a:t>Statistical analysis</a:t>
+            </a:r>
+          </a:p>
+        </p:txBody>
+      </p:sp>
+      <p:sp>
+        <p:nvSpPr>
+          <p:cNvPr id="77" name="CardBody"/>
+          <p:cNvSpPr/>
+          <p:nvPr/>
+        </p:nvSpPr>
+        <p:spPr>
+          <a:xfrm>
+            <a:off x="9065400" y="2511973"/>
+            <a:ext cx="2669400" cy="2314080"/>
+          </a:xfrm>
+          <a:prstGeom prst="rect">
+            <a:avLst/>
+          </a:prstGeom>
+          <a:solidFill>
+            <a:srgbClr val="EAF2F5"/>
+          </a:solidFill>
+          <a:ln>
+            <a:noFill/>
+          </a:ln>
+        </p:spPr>
+        <p:txBody>
+          <a:bodyPr wrap="square" lIns="137160" tIns="91440" rIns="137160" bIns="91440" rtlCol="0" anchor="ctr">
+            <a:normAutofit/>
+          </a:bodyPr>
+          <a:lstStyle/>
+          <a:p>
+            <a:pPr marL="0" indent="0" algn="ctr">
+              <a:lnSpc>
+                <a:spcPct val="104000"/>
+              </a:lnSpc>
+              <a:spcBef>
+                <a:spcPts val="400"/>
+              </a:spcBef>
+              <a:buNone/>
+            </a:pPr>
+            <a:r>
+              <a:rPr lang="en-US" sz="1600" dirty="0">
+                <a:solidFill>
+                  <a:srgbClr val="000000"/>
+                </a:solidFill>
+                <a:latin typeface="Arial"/>
+                <a:cs typeface="Arial"/>
+              </a:rPr>
+              <a:t>A method for each comparison</a:t>
+            </a:r>
+          </a:p>
+          <a:p>
+            <a:pPr marL="0" indent="0" algn="ctr">
+              <a:lnSpc>
+                <a:spcPct val="104000"/>
+              </a:lnSpc>
+              <a:spcBef>
+                <a:spcPts val="400"/>
+              </a:spcBef>
+              <a:buNone/>
+            </a:pPr>
+            <a:r>
+              <a:rPr lang="en-US" sz="1600" dirty="0">
+                <a:solidFill>
+                  <a:srgbClr val="000000"/>
+                </a:solidFill>
+                <a:latin typeface="Arial"/>
+                <a:cs typeface="Arial"/>
+              </a:rPr>
+              <a:t>Estimate matches the test</a:t>
+            </a:r>
+          </a:p>
+          <a:p>
+            <a:pPr marL="0" indent="0" algn="ctr">
+              <a:lnSpc>
+                <a:spcPct val="104000"/>
+              </a:lnSpc>
+              <a:spcBef>
+                <a:spcPts val="400"/>
+              </a:spcBef>
+              <a:buNone/>
+            </a:pPr>
+            <a:r>
+              <a:rPr lang="en-US" sz="1600" dirty="0">
+                <a:solidFill>
+                  <a:srgbClr val="000000"/>
+                </a:solidFill>
+                <a:latin typeface="Arial"/>
+                <a:cs typeface="Arial"/>
+              </a:rPr>
+              <a:t>Missing data, multiple comparisons</a:t>
+            </a:r>
+          </a:p>
+          <a:p>
+            <a:pPr marL="0" indent="0" algn="ctr">
+              <a:lnSpc>
+                <a:spcPct val="104000"/>
+              </a:lnSpc>
+              <a:spcBef>
+                <a:spcPts val="400"/>
+              </a:spcBef>
+              <a:buNone/>
+            </a:pPr>
+            <a:r>
+              <a:rPr lang="en-US" sz="1600" dirty="0">
+                <a:solidFill>
+                  <a:srgbClr val="000000"/>
+                </a:solidFill>
+                <a:latin typeface="Arial"/>
+                <a:cs typeface="Arial"/>
+              </a:rPr>
+              <a:t>Software and version</a:t>
+            </a:r>
+          </a:p>
+        </p:txBody>
+      </p:sp>
+      <p:sp>
+        <p:nvSpPr>
+          <p:cNvPr id="60" name="Takeaway"/>
+          <p:cNvSpPr/>
+          <p:nvPr/>
+        </p:nvSpPr>
+        <p:spPr>
+          <a:xfrm>
+            <a:off x="457200" y="5390000"/>
+            <a:ext cx="11277600" cy="560000"/>
+          </a:xfrm>
+          <a:prstGeom prst="roundRect">
+            <a:avLst>
+              <a:gd name="adj" fmla="val 12000"/>
+            </a:avLst>
+          </a:prstGeom>
+          <a:solidFill>
+            <a:srgbClr val="0D7377"/>
+          </a:solidFill>
+          <a:ln>
+            <a:noFill/>
+          </a:ln>
+        </p:spPr>
+        <p:txBody>
+          <a:bodyPr wrap="square" lIns="182880" tIns="45720" rIns="182880" bIns="45720" rtlCol="0" anchor="ctr">
+            <a:normAutofit/>
+          </a:bodyPr>
+          <a:lstStyle/>
+          <a:p>
+            <a:pPr marL="0" indent="0" algn="ctr">
+              <a:buNone/>
+            </a:pPr>
+            <a:r>
+              <a:rPr lang="en-US" sz="1300" b="1" dirty="0">
+                <a:solidFill>
+                  <a:srgbClr val="FFFFFF"/>
+                </a:solidFill>
+                <a:latin typeface="Arial"/>
+                <a:cs typeface="Arial"/>
+              </a:rPr>
+              <a:t>KEY MESSAGE   </a:t>
+            </a:r>
+            <a:r>
+              <a:rPr lang="en-US" sz="1550" dirty="0">
+                <a:solidFill>
+                  <a:srgbClr val="FFFFFF"/>
+                </a:solidFill>
+                <a:latin typeface="Arial"/>
+                <a:cs typeface="Arial"/>
+              </a:rPr>
+              <a:t>The statistical paragraph names a method for every comparison you report.</a:t>
             </a:r>
           </a:p>
         </p:txBody>
@@ -20297,7 +20202,7 @@
                 <a:latin typeface="Arial"/>
                 <a:cs typeface="Arial"/>
               </a:rPr>
-              <a:t>Optional: the statistical-analysis paragraph</a:t>
+              <a:t>Worked example: Methods for FLUID-ICU question 1</a:t>
             </a:r>
           </a:p>
         </p:txBody>
@@ -20367,7 +20272,7 @@
                 <a:latin typeface="Arial"/>
                 <a:cs typeface="Arial"/>
               </a:rPr>
-              <a:t>STROBE item 12 for Q1: one sentence per decision, all chosen before seeing the data.</a:t>
+              <a:t>One sentence per STROBE item (simulated data). STROBE = the reporting checklist for observational studies.</a:t>
             </a:r>
           </a:p>
           <a:p>
@@ -20395,7 +20300,7 @@
                 <a:latin typeface="Arial"/>
                 <a:cs typeface="Arial"/>
               </a:rPr>
-              <a:t>Baseline characteristics: mean (SD), median (IQR) or n (%), by balance group.</a:t>
+              <a:t>Items 4-6: We analysed FLUID-ICU, a prospective cohort of consecutive adults with sepsis admitted to four ICUs between January 2023 and December 2024.</a:t>
             </a:r>
           </a:p>
           <a:p>
@@ -20417,7 +20322,7 @@
                 <a:latin typeface="Arial"/>
                 <a:cs typeface="Arial"/>
               </a:rPr>
-              <a:t>28-day mortality: chi-square test. Crude and adjusted odds ratios from logistic regression (age, SOFA score, lactate, vasopressor, mechanical ventilation, chronic kidney disease).</a:t>
+              <a:t>Item 7: The exposure was a positive cumulative fluid balance by ICU day 3 (fluid in minus fluid out over days 1-3, &gt; 0 ml/kg). The outcome was death from any cause within 28 days of ICU admission.</a:t>
             </a:r>
           </a:p>
           <a:p>
@@ -20439,7 +20344,7 @@
                 <a:latin typeface="Arial"/>
                 <a:cs typeface="Arial"/>
               </a:rPr>
-              <a:t>Time to death: Kaplan-Meier curves (log-rank test) and Cox regression with the same covariates. Proportional hazards checked.</a:t>
+              <a:t>Item 8: Data came from ICU charts on a standard case report form.</a:t>
             </a:r>
           </a:p>
           <a:p>
@@ -20461,7 +20366,7 @@
                 <a:latin typeface="Arial"/>
                 <a:cs typeface="Arial"/>
               </a:rPr>
-              <a:t>Effect modification by heart failure: an interaction term (pre-specified).</a:t>
+              <a:t>Item 9: To address confounding by indication, we adjusted for severity and comorbidity pre-specified in the analysis plan.</a:t>
             </a:r>
           </a:p>
           <a:p>
@@ -20483,7 +20388,7 @@
                 <a:latin typeface="Arial"/>
                 <a:cs typeface="Arial"/>
               </a:rPr>
-              <a:t>Main analysis on complete cases. Missing lactate (15%) handled by multiple imputation (20 data sets) as a sensitivity analysis.</a:t>
+              <a:t>Item 10: All eligible patients in the cohort were included (no separate sample size).</a:t>
             </a:r>
           </a:p>
           <a:p>
@@ -20500,12 +20405,12 @@
             <a:r>
               <a:rPr lang="en-US" sz="1700" dirty="0">
                 <a:solidFill>
-                  <a:srgbClr val="000000"/>
-                </a:solidFill>
-                <a:latin typeface="Arial"/>
-                <a:cs typeface="Arial"/>
-              </a:rPr>
-              <a:t>Estimates with 95% confidence intervals. Analyses in R 4.6.</a:t>
+                  <a:srgbClr val="0B376C"/>
+                </a:solidFill>
+                <a:latin typeface="Arial"/>
+                <a:cs typeface="Arial"/>
+              </a:rPr>
+              <a:t>Ethics (course version): This analysis used a simulated teaching dataset. No ethics approval or consent was required.</a:t>
             </a:r>
           </a:p>
         </p:txBody>
@@ -21008,7 +20913,7 @@
                 <a:latin typeface="Arial"/>
                 <a:cs typeface="Arial"/>
               </a:rPr>
-              <a:t>Today: the Results, live on Q1</a:t>
+              <a:t>Today: Methods, Results (live on Q1)</a:t>
             </a:r>
           </a:p>
           <a:p>
@@ -21029,7 +20934,7 @@
                 <a:latin typeface="Arial"/>
                 <a:cs typeface="Arial"/>
               </a:rPr>
-              <a:t>Session 8: improve it. Other parts optional</a:t>
+              <a:t>Session 8: Introduction, Discussion, abstract, title</a:t>
             </a:r>
           </a:p>
         </p:txBody>
@@ -21218,7 +21123,7 @@
                 <a:latin typeface="Arial"/>
                 <a:cs typeface="Arial"/>
               </a:rPr>
-              <a:t>Before the break: proposal Part 4. After the break: the Results section.</a:t>
+              <a:t>Before the break: proposal Part 4. After the break: Methods and Results.</a:t>
             </a:r>
           </a:p>
         </p:txBody>
@@ -21386,7 +21291,7 @@
                 <a:latin typeface="Arial"/>
                 <a:cs typeface="Arial"/>
               </a:rPr>
-              <a:t>Results: report, do not interpret</a:t>
+              <a:t>Worked example: the statistical-analysis paragraph</a:t>
             </a:r>
           </a:p>
         </p:txBody>
@@ -21421,507 +21326,180 @@
       </p:sp>
       <p:sp>
         <p:nvSpPr>
-          <p:cNvPr id="70" name="CardHead"/>
-          <p:cNvSpPr/>
-          <p:nvPr/>
-        </p:nvSpPr>
-        <p:spPr>
-          <a:xfrm>
-            <a:off x="457200" y="1697173"/>
-            <a:ext cx="2669400" cy="640000"/>
+          <p:cNvPr id="20" name="Body"/>
+          <p:cNvSpPr txBox="1"/>
+          <p:nvPr/>
+        </p:nvSpPr>
+        <p:spPr>
+          <a:xfrm>
+            <a:off x="457200" y="1080000"/>
+            <a:ext cx="11277600" cy="4780000"/>
           </a:xfrm>
           <a:prstGeom prst="rect">
             <a:avLst/>
           </a:prstGeom>
-          <a:solidFill>
-            <a:srgbClr val="0D7377"/>
-          </a:solidFill>
+          <a:noFill/>
           <a:ln>
             <a:noFill/>
           </a:ln>
         </p:spPr>
         <p:txBody>
-          <a:bodyPr wrap="square" lIns="91440" tIns="45720" rIns="91440" bIns="45720" rtlCol="0" anchor="ctr">
-            <a:normAutofit/>
-          </a:bodyPr>
-          <a:lstStyle/>
-          <a:p>
-            <a:pPr marL="0" indent="0" algn="ctr">
-              <a:buNone/>
-            </a:pPr>
-            <a:r>
-              <a:rPr lang="en-US" sz="1700" b="1" dirty="0">
-                <a:solidFill>
-                  <a:srgbClr val="FFFFFF"/>
-                </a:solidFill>
-                <a:latin typeface="Arial"/>
-                <a:cs typeface="Arial"/>
-              </a:rPr>
-              <a:t>1  Participants first</a:t>
-            </a:r>
-          </a:p>
-        </p:txBody>
-      </p:sp>
-      <p:sp>
-        <p:nvSpPr>
-          <p:cNvPr id="71" name="CardBody"/>
-          <p:cNvSpPr/>
-          <p:nvPr/>
-        </p:nvSpPr>
-        <p:spPr>
-          <a:xfrm>
-            <a:off x="457200" y="2337173"/>
-            <a:ext cx="2669400" cy="1958480"/>
-          </a:xfrm>
-          <a:prstGeom prst="rect">
-            <a:avLst/>
-          </a:prstGeom>
-          <a:solidFill>
-            <a:srgbClr val="EAF2F5"/>
-          </a:solidFill>
-          <a:ln>
-            <a:noFill/>
-          </a:ln>
-        </p:spPr>
-        <p:txBody>
-          <a:bodyPr wrap="square" lIns="137160" tIns="91440" rIns="137160" bIns="91440" rtlCol="0" anchor="ctr">
-            <a:normAutofit/>
-          </a:bodyPr>
-          <a:lstStyle/>
-          <a:p>
-            <a:pPr marL="0" indent="0" algn="ctr">
+          <a:bodyPr wrap="square" lIns="91440" tIns="45720" rIns="91440" bIns="45720" rtlCol="0" anchor="ctr"/>
+          <a:lstStyle/>
+          <a:p>
+            <a:pPr marL="0" indent="0" algn="l">
               <a:lnSpc>
-                <a:spcPct val="104000"/>
+                <a:spcPct val="108000"/>
+              </a:lnSpc>
+              <a:buNone/>
+            </a:pPr>
+            <a:r>
+              <a:rPr lang="en-US" sz="1900" i="1" dirty="0">
+                <a:solidFill>
+                  <a:srgbClr val="595959"/>
+                </a:solidFill>
+                <a:latin typeface="Arial"/>
+                <a:cs typeface="Arial"/>
+              </a:rPr>
+              <a:t>STROBE item 12 for Q1: one sentence per decision, all chosen before seeing the data.</a:t>
+            </a:r>
+          </a:p>
+          <a:p>
+            <a:pPr>
+              <a:buNone/>
+            </a:pPr>
+            <a:endParaRPr sz="950"/>
+          </a:p>
+          <a:p>
+            <a:pPr marL="274320" indent="-274320" algn="l">
+              <a:lnSpc>
+                <a:spcPct val="106000"/>
               </a:lnSpc>
               <a:spcBef>
-                <a:spcPts val="400"/>
+                <a:spcPts val="560"/>
               </a:spcBef>
-              <a:buNone/>
-            </a:pPr>
-            <a:r>
-              <a:rPr lang="en-US" sz="1600" dirty="0">
+              <a:buFont typeface="Arial"/>
+              <a:buChar char="•"/>
+            </a:pPr>
+            <a:r>
+              <a:rPr lang="en-US" sz="1700" dirty="0">
                 <a:solidFill>
                   <a:srgbClr val="000000"/>
                 </a:solidFill>
                 <a:latin typeface="Arial"/>
                 <a:cs typeface="Arial"/>
               </a:rPr>
-              <a:t>Screened, included, analysed, and why some were lost</a:t>
-            </a:r>
-          </a:p>
-          <a:p>
-            <a:pPr marL="0" indent="0" algn="ctr">
+              <a:t>Baseline characteristics: mean (SD), median (IQR) or n (%), by balance group.</a:t>
+            </a:r>
+          </a:p>
+          <a:p>
+            <a:pPr marL="274320" indent="-274320" algn="l">
               <a:lnSpc>
-                <a:spcPct val="104000"/>
+                <a:spcPct val="106000"/>
               </a:lnSpc>
               <a:spcBef>
-                <a:spcPts val="400"/>
+                <a:spcPts val="560"/>
               </a:spcBef>
-              <a:buNone/>
-            </a:pPr>
-            <a:r>
-              <a:rPr lang="en-US" sz="1600" dirty="0">
+              <a:buFont typeface="Arial"/>
+              <a:buChar char="•"/>
+            </a:pPr>
+            <a:r>
+              <a:rPr lang="en-US" sz="1700" dirty="0">
                 <a:solidFill>
                   <a:srgbClr val="000000"/>
                 </a:solidFill>
                 <a:latin typeface="Arial"/>
                 <a:cs typeface="Arial"/>
               </a:rPr>
-              <a:t>Paper 1: 1201 screened, 50 randomised, 48 analysed</a:t>
-            </a:r>
-          </a:p>
-        </p:txBody>
-      </p:sp>
-      <p:sp>
-        <p:nvSpPr>
-          <p:cNvPr id="72" name="CardHead"/>
-          <p:cNvSpPr/>
-          <p:nvPr/>
-        </p:nvSpPr>
-        <p:spPr>
-          <a:xfrm>
-            <a:off x="3326600" y="1697173"/>
-            <a:ext cx="2669400" cy="640000"/>
-          </a:xfrm>
-          <a:prstGeom prst="rect">
-            <a:avLst/>
-          </a:prstGeom>
-          <a:solidFill>
-            <a:srgbClr val="0B376C"/>
-          </a:solidFill>
-          <a:ln>
-            <a:noFill/>
-          </a:ln>
-        </p:spPr>
-        <p:txBody>
-          <a:bodyPr wrap="square" lIns="91440" tIns="45720" rIns="91440" bIns="45720" rtlCol="0" anchor="ctr">
-            <a:normAutofit/>
-          </a:bodyPr>
-          <a:lstStyle/>
-          <a:p>
-            <a:pPr marL="0" indent="0" algn="ctr">
-              <a:buNone/>
-            </a:pPr>
-            <a:r>
-              <a:rPr lang="en-US" sz="1700" b="1" dirty="0">
-                <a:solidFill>
-                  <a:srgbClr val="FFFFFF"/>
-                </a:solidFill>
-                <a:latin typeface="Arial"/>
-                <a:cs typeface="Arial"/>
-              </a:rPr>
-              <a:t>2  Numbers with CIs</a:t>
-            </a:r>
-          </a:p>
-        </p:txBody>
-      </p:sp>
-      <p:sp>
-        <p:nvSpPr>
-          <p:cNvPr id="73" name="CardBody"/>
-          <p:cNvSpPr/>
-          <p:nvPr/>
-        </p:nvSpPr>
-        <p:spPr>
-          <a:xfrm>
-            <a:off x="3326600" y="2337173"/>
-            <a:ext cx="2669400" cy="1958480"/>
-          </a:xfrm>
-          <a:prstGeom prst="rect">
-            <a:avLst/>
-          </a:prstGeom>
-          <a:solidFill>
-            <a:srgbClr val="EAF2F5"/>
-          </a:solidFill>
-          <a:ln>
-            <a:noFill/>
-          </a:ln>
-        </p:spPr>
-        <p:txBody>
-          <a:bodyPr wrap="square" lIns="137160" tIns="91440" rIns="137160" bIns="91440" rtlCol="0" anchor="ctr">
-            <a:normAutofit/>
-          </a:bodyPr>
-          <a:lstStyle/>
-          <a:p>
-            <a:pPr marL="0" indent="0" algn="ctr">
+              <a:t>28-day mortality: chi-square test. Crude and adjusted odds ratios from logistic regression (age, SOFA score, lactate, vasopressor, mechanical ventilation, chronic kidney disease).</a:t>
+            </a:r>
+          </a:p>
+          <a:p>
+            <a:pPr marL="274320" indent="-274320" algn="l">
               <a:lnSpc>
-                <a:spcPct val="104000"/>
+                <a:spcPct val="106000"/>
               </a:lnSpc>
               <a:spcBef>
-                <a:spcPts val="400"/>
+                <a:spcPts val="560"/>
               </a:spcBef>
-              <a:buNone/>
-            </a:pPr>
-            <a:r>
-              <a:rPr lang="en-US" sz="1600" dirty="0">
+              <a:buFont typeface="Arial"/>
+              <a:buChar char="•"/>
+            </a:pPr>
+            <a:r>
+              <a:rPr lang="en-US" sz="1700" dirty="0">
                 <a:solidFill>
                   <a:srgbClr val="000000"/>
                 </a:solidFill>
                 <a:latin typeface="Arial"/>
                 <a:cs typeface="Arial"/>
               </a:rPr>
-              <a:t>Effect size with its 95% confidence interval (CI)</a:t>
-            </a:r>
-          </a:p>
-          <a:p>
-            <a:pPr marL="0" indent="0" algn="ctr">
+              <a:t>Time to death: Kaplan-Meier curves (log-rank test) and Cox regression with the same covariates. Proportional hazards checked.</a:t>
+            </a:r>
+          </a:p>
+          <a:p>
+            <a:pPr marL="274320" indent="-274320" algn="l">
               <a:lnSpc>
-                <a:spcPct val="104000"/>
+                <a:spcPct val="106000"/>
               </a:lnSpc>
               <a:spcBef>
-                <a:spcPts val="400"/>
+                <a:spcPts val="560"/>
               </a:spcBef>
-              <a:buNone/>
-            </a:pPr>
-            <a:r>
-              <a:rPr lang="en-US" sz="1600" dirty="0">
+              <a:buFont typeface="Arial"/>
+              <a:buChar char="•"/>
+            </a:pPr>
+            <a:r>
+              <a:rPr lang="en-US" sz="1700" dirty="0">
                 <a:solidFill>
                   <a:srgbClr val="000000"/>
                 </a:solidFill>
                 <a:latin typeface="Arial"/>
                 <a:cs typeface="Arial"/>
               </a:rPr>
-              <a:t>Not 'p = 0.42, not significant'</a:t>
-            </a:r>
-          </a:p>
-        </p:txBody>
-      </p:sp>
-      <p:sp>
-        <p:nvSpPr>
-          <p:cNvPr id="74" name="CardHead"/>
-          <p:cNvSpPr/>
-          <p:nvPr/>
-        </p:nvSpPr>
-        <p:spPr>
-          <a:xfrm>
-            <a:off x="6196000" y="1697173"/>
-            <a:ext cx="2669400" cy="640000"/>
-          </a:xfrm>
-          <a:prstGeom prst="rect">
-            <a:avLst/>
-          </a:prstGeom>
-          <a:solidFill>
-            <a:srgbClr val="5FA39B"/>
-          </a:solidFill>
-          <a:ln>
-            <a:noFill/>
-          </a:ln>
-        </p:spPr>
-        <p:txBody>
-          <a:bodyPr wrap="square" lIns="91440" tIns="45720" rIns="91440" bIns="45720" rtlCol="0" anchor="ctr">
-            <a:normAutofit/>
-          </a:bodyPr>
-          <a:lstStyle/>
-          <a:p>
-            <a:pPr marL="0" indent="0" algn="ctr">
-              <a:buNone/>
-            </a:pPr>
-            <a:r>
-              <a:rPr lang="en-US" sz="1700" b="1" dirty="0">
-                <a:solidFill>
-                  <a:srgbClr val="FFFFFF"/>
-                </a:solidFill>
-                <a:latin typeface="Arial"/>
-                <a:cs typeface="Arial"/>
-              </a:rPr>
-              <a:t>3  No interpretation</a:t>
-            </a:r>
-          </a:p>
-        </p:txBody>
-      </p:sp>
-      <p:sp>
-        <p:nvSpPr>
-          <p:cNvPr id="75" name="CardBody"/>
-          <p:cNvSpPr/>
-          <p:nvPr/>
-        </p:nvSpPr>
-        <p:spPr>
-          <a:xfrm>
-            <a:off x="6196000" y="2337173"/>
-            <a:ext cx="2669400" cy="1958480"/>
-          </a:xfrm>
-          <a:prstGeom prst="rect">
-            <a:avLst/>
-          </a:prstGeom>
-          <a:solidFill>
-            <a:srgbClr val="EAF2F5"/>
-          </a:solidFill>
-          <a:ln>
-            <a:noFill/>
-          </a:ln>
-        </p:spPr>
-        <p:txBody>
-          <a:bodyPr wrap="square" lIns="137160" tIns="91440" rIns="137160" bIns="91440" rtlCol="0" anchor="ctr">
-            <a:normAutofit/>
-          </a:bodyPr>
-          <a:lstStyle/>
-          <a:p>
-            <a:pPr marL="0" indent="0" algn="ctr">
+              <a:t>Effect modification by heart failure: an interaction term (pre-specified).</a:t>
+            </a:r>
+          </a:p>
+          <a:p>
+            <a:pPr marL="274320" indent="-274320" algn="l">
               <a:lnSpc>
-                <a:spcPct val="104000"/>
+                <a:spcPct val="106000"/>
               </a:lnSpc>
               <a:spcBef>
-                <a:spcPts val="400"/>
+                <a:spcPts val="560"/>
               </a:spcBef>
-              <a:buNone/>
-            </a:pPr>
-            <a:r>
-              <a:rPr lang="en-US" sz="1600" dirty="0">
+              <a:buFont typeface="Arial"/>
+              <a:buChar char="•"/>
+            </a:pPr>
+            <a:r>
+              <a:rPr lang="en-US" sz="1700" dirty="0">
                 <a:solidFill>
                   <a:srgbClr val="000000"/>
                 </a:solidFill>
                 <a:latin typeface="Arial"/>
                 <a:cs typeface="Arial"/>
               </a:rPr>
-              <a:t>Results report, the Discussion interprets</a:t>
-            </a:r>
-          </a:p>
-          <a:p>
-            <a:pPr marL="0" indent="0" algn="ctr">
+              <a:t>Main analysis on complete cases. Missing lactate (15%) handled by multiple imputation (20 data sets) as a sensitivity analysis.</a:t>
+            </a:r>
+          </a:p>
+          <a:p>
+            <a:pPr marL="274320" indent="-274320" algn="l">
               <a:lnSpc>
-                <a:spcPct val="104000"/>
+                <a:spcPct val="106000"/>
               </a:lnSpc>
               <a:spcBef>
-                <a:spcPts val="400"/>
+                <a:spcPts val="560"/>
               </a:spcBef>
-              <a:buNone/>
-            </a:pPr>
-            <a:r>
-              <a:rPr lang="en-US" sz="1600" dirty="0">
+              <a:buFont typeface="Arial"/>
+              <a:buChar char="•"/>
+            </a:pPr>
+            <a:r>
+              <a:rPr lang="en-US" sz="1700" dirty="0">
                 <a:solidFill>
                   <a:srgbClr val="000000"/>
                 </a:solidFill>
                 <a:latin typeface="Arial"/>
                 <a:cs typeface="Arial"/>
               </a:rPr>
-              <a:t>Paper 2: results in the order of the aims</a:t>
-            </a:r>
-          </a:p>
-        </p:txBody>
-      </p:sp>
-      <p:sp>
-        <p:nvSpPr>
-          <p:cNvPr id="76" name="CardHead"/>
-          <p:cNvSpPr/>
-          <p:nvPr/>
-        </p:nvSpPr>
-        <p:spPr>
-          <a:xfrm>
-            <a:off x="9065400" y="1697173"/>
-            <a:ext cx="2669400" cy="640000"/>
-          </a:xfrm>
-          <a:prstGeom prst="rect">
-            <a:avLst/>
-          </a:prstGeom>
-          <a:solidFill>
-            <a:srgbClr val="0070C0"/>
-          </a:solidFill>
-          <a:ln>
-            <a:noFill/>
-          </a:ln>
-        </p:spPr>
-        <p:txBody>
-          <a:bodyPr wrap="square" lIns="91440" tIns="45720" rIns="91440" bIns="45720" rtlCol="0" anchor="ctr">
-            <a:normAutofit/>
-          </a:bodyPr>
-          <a:lstStyle/>
-          <a:p>
-            <a:pPr marL="0" indent="0" algn="ctr">
-              <a:buNone/>
-            </a:pPr>
-            <a:r>
-              <a:rPr lang="en-US" sz="1700" b="1" dirty="0">
-                <a:solidFill>
-                  <a:srgbClr val="FFFFFF"/>
-                </a:solidFill>
-                <a:latin typeface="Arial"/>
-                <a:cs typeface="Arial"/>
-              </a:rPr>
-              <a:t>4  One home per number</a:t>
-            </a:r>
-          </a:p>
-        </p:txBody>
-      </p:sp>
-      <p:sp>
-        <p:nvSpPr>
-          <p:cNvPr id="77" name="CardBody"/>
-          <p:cNvSpPr/>
-          <p:nvPr/>
-        </p:nvSpPr>
-        <p:spPr>
-          <a:xfrm>
-            <a:off x="9065400" y="2337173"/>
-            <a:ext cx="2669400" cy="1958480"/>
-          </a:xfrm>
-          <a:prstGeom prst="rect">
-            <a:avLst/>
-          </a:prstGeom>
-          <a:solidFill>
-            <a:srgbClr val="EAF2F5"/>
-          </a:solidFill>
-          <a:ln>
-            <a:noFill/>
-          </a:ln>
-        </p:spPr>
-        <p:txBody>
-          <a:bodyPr wrap="square" lIns="137160" tIns="91440" rIns="137160" bIns="91440" rtlCol="0" anchor="ctr">
-            <a:normAutofit/>
-          </a:bodyPr>
-          <a:lstStyle/>
-          <a:p>
-            <a:pPr marL="0" indent="0" algn="ctr">
-              <a:lnSpc>
-                <a:spcPct val="104000"/>
-              </a:lnSpc>
-              <a:spcBef>
-                <a:spcPts val="400"/>
-              </a:spcBef>
-              <a:buNone/>
-            </a:pPr>
-            <a:r>
-              <a:rPr lang="en-US" sz="1600" dirty="0">
-                <a:solidFill>
-                  <a:srgbClr val="000000"/>
-                </a:solidFill>
-                <a:latin typeface="Arial"/>
-                <a:cs typeface="Arial"/>
-              </a:rPr>
-              <a:t>Key numbers in the text, details in the tables</a:t>
-            </a:r>
-          </a:p>
-          <a:p>
-            <a:pPr marL="0" indent="0" algn="ctr">
-              <a:lnSpc>
-                <a:spcPct val="104000"/>
-              </a:lnSpc>
-              <a:spcBef>
-                <a:spcPts val="400"/>
-              </a:spcBef>
-              <a:buNone/>
-            </a:pPr>
-            <a:r>
-              <a:rPr lang="en-US" sz="1600" dirty="0">
-                <a:solidFill>
-                  <a:srgbClr val="000000"/>
-                </a:solidFill>
-                <a:latin typeface="Arial"/>
-                <a:cs typeface="Arial"/>
-              </a:rPr>
-              <a:t>Paper 1: text and Table 1 disagree on creatinine</a:t>
-            </a:r>
-          </a:p>
-        </p:txBody>
-      </p:sp>
-      <p:sp>
-        <p:nvSpPr>
-          <p:cNvPr id="60" name="Takeaway"/>
-          <p:cNvSpPr/>
-          <p:nvPr/>
-        </p:nvSpPr>
-        <p:spPr>
-          <a:xfrm>
-            <a:off x="457200" y="5390000"/>
-            <a:ext cx="11277600" cy="560000"/>
-          </a:xfrm>
-          <a:prstGeom prst="roundRect">
-            <a:avLst>
-              <a:gd name="adj" fmla="val 12000"/>
-            </a:avLst>
-          </a:prstGeom>
-          <a:solidFill>
-            <a:srgbClr val="0D7377"/>
-          </a:solidFill>
-          <a:ln>
-            <a:noFill/>
-          </a:ln>
-        </p:spPr>
-        <p:txBody>
-          <a:bodyPr wrap="square" lIns="182880" tIns="45720" rIns="182880" bIns="45720" rtlCol="0" anchor="ctr">
-            <a:normAutofit/>
-          </a:bodyPr>
-          <a:lstStyle/>
-          <a:p>
-            <a:pPr marL="0" indent="0" algn="ctr">
-              <a:buNone/>
-            </a:pPr>
-            <a:r>
-              <a:rPr lang="en-US" sz="1300" b="1" dirty="0">
-                <a:solidFill>
-                  <a:srgbClr val="FFFFFF"/>
-                </a:solidFill>
-                <a:latin typeface="Arial"/>
-                <a:cs typeface="Arial"/>
-              </a:rPr>
-              <a:t>KEY MESSAGE   </a:t>
-            </a:r>
-            <a:r>
-              <a:rPr lang="en-US" sz="1550" dirty="0">
-                <a:solidFill>
-                  <a:srgbClr val="FFFFFF"/>
-                </a:solidFill>
-                <a:latin typeface="Arial"/>
-                <a:cs typeface="Arial"/>
-              </a:rPr>
-              <a:t>Participants first, then each outcome as an effect size with its 95% CI.</a:t>
+              <a:t>Estimates with 95% confidence intervals. Analyses in R 4.6.</a:t>
             </a:r>
           </a:p>
         </p:txBody>
@@ -22089,7 +21667,7 @@
                 <a:latin typeface="Arial"/>
                 <a:cs typeface="Arial"/>
               </a:rPr>
-              <a:t>Worked example: Results for FLUID-ICU question 1</a:t>
+              <a:t>Results: report, do not interpret</a:t>
             </a:r>
           </a:p>
         </p:txBody>
@@ -22124,180 +21702,507 @@
       </p:sp>
       <p:sp>
         <p:nvSpPr>
-          <p:cNvPr id="20" name="Body"/>
-          <p:cNvSpPr txBox="1"/>
-          <p:nvPr/>
-        </p:nvSpPr>
-        <p:spPr>
-          <a:xfrm>
-            <a:off x="457200" y="1080000"/>
-            <a:ext cx="11277600" cy="4780000"/>
+          <p:cNvPr id="70" name="CardHead"/>
+          <p:cNvSpPr/>
+          <p:nvPr/>
+        </p:nvSpPr>
+        <p:spPr>
+          <a:xfrm>
+            <a:off x="457200" y="1697173"/>
+            <a:ext cx="2669400" cy="640000"/>
           </a:xfrm>
           <a:prstGeom prst="rect">
             <a:avLst/>
           </a:prstGeom>
-          <a:noFill/>
+          <a:solidFill>
+            <a:srgbClr val="0D7377"/>
+          </a:solidFill>
           <a:ln>
             <a:noFill/>
           </a:ln>
         </p:spPr>
         <p:txBody>
-          <a:bodyPr wrap="square" lIns="91440" tIns="45720" rIns="91440" bIns="45720" rtlCol="0" anchor="ctr"/>
-          <a:lstStyle/>
-          <a:p>
-            <a:pPr marL="0" indent="0" algn="l">
+          <a:bodyPr wrap="square" lIns="91440" tIns="45720" rIns="91440" bIns="45720" rtlCol="0" anchor="ctr">
+            <a:normAutofit/>
+          </a:bodyPr>
+          <a:lstStyle/>
+          <a:p>
+            <a:pPr marL="0" indent="0" algn="ctr">
+              <a:buNone/>
+            </a:pPr>
+            <a:r>
+              <a:rPr lang="en-US" sz="1700" b="1" dirty="0">
+                <a:solidFill>
+                  <a:srgbClr val="FFFFFF"/>
+                </a:solidFill>
+                <a:latin typeface="Arial"/>
+                <a:cs typeface="Arial"/>
+              </a:rPr>
+              <a:t>1  Participants first</a:t>
+            </a:r>
+          </a:p>
+        </p:txBody>
+      </p:sp>
+      <p:sp>
+        <p:nvSpPr>
+          <p:cNvPr id="71" name="CardBody"/>
+          <p:cNvSpPr/>
+          <p:nvPr/>
+        </p:nvSpPr>
+        <p:spPr>
+          <a:xfrm>
+            <a:off x="457200" y="2337173"/>
+            <a:ext cx="2669400" cy="1958480"/>
+          </a:xfrm>
+          <a:prstGeom prst="rect">
+            <a:avLst/>
+          </a:prstGeom>
+          <a:solidFill>
+            <a:srgbClr val="EAF2F5"/>
+          </a:solidFill>
+          <a:ln>
+            <a:noFill/>
+          </a:ln>
+        </p:spPr>
+        <p:txBody>
+          <a:bodyPr wrap="square" lIns="137160" tIns="91440" rIns="137160" bIns="91440" rtlCol="0" anchor="ctr">
+            <a:normAutofit/>
+          </a:bodyPr>
+          <a:lstStyle/>
+          <a:p>
+            <a:pPr marL="0" indent="0" algn="ctr">
               <a:lnSpc>
-                <a:spcPct val="108000"/>
-              </a:lnSpc>
-              <a:buNone/>
-            </a:pPr>
-            <a:r>
-              <a:rPr lang="en-US" sz="1900" i="1" dirty="0">
-                <a:solidFill>
-                  <a:srgbClr val="595959"/>
-                </a:solidFill>
-                <a:latin typeface="Arial"/>
-                <a:cs typeface="Arial"/>
-              </a:rPr>
-              <a:t>Participants, Table 1, outcome numbers, crude and adjusted estimates (simulated data).</a:t>
-            </a:r>
-          </a:p>
-          <a:p>
-            <a:pPr>
-              <a:buNone/>
-            </a:pPr>
-            <a:endParaRPr sz="950"/>
-          </a:p>
-          <a:p>
-            <a:pPr marL="274320" indent="-274320" algn="l">
-              <a:lnSpc>
-                <a:spcPct val="106000"/>
+                <a:spcPct val="104000"/>
               </a:lnSpc>
               <a:spcBef>
-                <a:spcPts val="560"/>
+                <a:spcPts val="400"/>
               </a:spcBef>
-              <a:buFont typeface="Arial"/>
-              <a:buChar char="•"/>
-            </a:pPr>
-            <a:r>
-              <a:rPr lang="en-US" sz="1700" dirty="0">
+              <a:buNone/>
+            </a:pPr>
+            <a:r>
+              <a:rPr lang="en-US" sz="1600" dirty="0">
                 <a:solidFill>
                   <a:srgbClr val="000000"/>
                 </a:solidFill>
                 <a:latin typeface="Arial"/>
                 <a:cs typeface="Arial"/>
               </a:rPr>
-              <a:t>Item 13: Of 620 patients enrolled, 618 had a day-3 fluid balance and were analysed, 527 had complete data for the adjusted model.</a:t>
-            </a:r>
-          </a:p>
-          <a:p>
-            <a:pPr marL="274320" indent="-274320" algn="l">
+              <a:t>Screened, included, analysed, and why some were lost</a:t>
+            </a:r>
+          </a:p>
+          <a:p>
+            <a:pPr marL="0" indent="0" algn="ctr">
               <a:lnSpc>
-                <a:spcPct val="106000"/>
+                <a:spcPct val="104000"/>
               </a:lnSpc>
               <a:spcBef>
-                <a:spcPts val="560"/>
+                <a:spcPts val="400"/>
               </a:spcBef>
-              <a:buFont typeface="Arial"/>
-              <a:buChar char="•"/>
-            </a:pPr>
-            <a:r>
-              <a:rPr lang="en-US" sz="1700" dirty="0">
+              <a:buNone/>
+            </a:pPr>
+            <a:r>
+              <a:rPr lang="en-US" sz="1600" dirty="0">
                 <a:solidFill>
                   <a:srgbClr val="000000"/>
                 </a:solidFill>
                 <a:latin typeface="Arial"/>
                 <a:cs typeface="Arial"/>
               </a:rPr>
-              <a:t>Item 14: 373 (60.4%) had a positive balance. They were sicker: median SOFA 8 vs 6. Vasopressors 55.0% vs 24.9% (Table 1).</a:t>
-            </a:r>
-          </a:p>
-          <a:p>
-            <a:pPr marL="274320" indent="-274320" algn="l">
+              <a:t>Paper 1: 1201 screened, 50 randomised, 48 analysed</a:t>
+            </a:r>
+          </a:p>
+        </p:txBody>
+      </p:sp>
+      <p:sp>
+        <p:nvSpPr>
+          <p:cNvPr id="72" name="CardHead"/>
+          <p:cNvSpPr/>
+          <p:nvPr/>
+        </p:nvSpPr>
+        <p:spPr>
+          <a:xfrm>
+            <a:off x="3326600" y="1697173"/>
+            <a:ext cx="2669400" cy="640000"/>
+          </a:xfrm>
+          <a:prstGeom prst="rect">
+            <a:avLst/>
+          </a:prstGeom>
+          <a:solidFill>
+            <a:srgbClr val="0B376C"/>
+          </a:solidFill>
+          <a:ln>
+            <a:noFill/>
+          </a:ln>
+        </p:spPr>
+        <p:txBody>
+          <a:bodyPr wrap="square" lIns="91440" tIns="45720" rIns="91440" bIns="45720" rtlCol="0" anchor="ctr">
+            <a:normAutofit/>
+          </a:bodyPr>
+          <a:lstStyle/>
+          <a:p>
+            <a:pPr marL="0" indent="0" algn="ctr">
+              <a:buNone/>
+            </a:pPr>
+            <a:r>
+              <a:rPr lang="en-US" sz="1700" b="1" dirty="0">
+                <a:solidFill>
+                  <a:srgbClr val="FFFFFF"/>
+                </a:solidFill>
+                <a:latin typeface="Arial"/>
+                <a:cs typeface="Arial"/>
+              </a:rPr>
+              <a:t>2  Numbers with CIs</a:t>
+            </a:r>
+          </a:p>
+        </p:txBody>
+      </p:sp>
+      <p:sp>
+        <p:nvSpPr>
+          <p:cNvPr id="73" name="CardBody"/>
+          <p:cNvSpPr/>
+          <p:nvPr/>
+        </p:nvSpPr>
+        <p:spPr>
+          <a:xfrm>
+            <a:off x="3326600" y="2337173"/>
+            <a:ext cx="2669400" cy="1958480"/>
+          </a:xfrm>
+          <a:prstGeom prst="rect">
+            <a:avLst/>
+          </a:prstGeom>
+          <a:solidFill>
+            <a:srgbClr val="EAF2F5"/>
+          </a:solidFill>
+          <a:ln>
+            <a:noFill/>
+          </a:ln>
+        </p:spPr>
+        <p:txBody>
+          <a:bodyPr wrap="square" lIns="137160" tIns="91440" rIns="137160" bIns="91440" rtlCol="0" anchor="ctr">
+            <a:normAutofit/>
+          </a:bodyPr>
+          <a:lstStyle/>
+          <a:p>
+            <a:pPr marL="0" indent="0" algn="ctr">
               <a:lnSpc>
-                <a:spcPct val="106000"/>
+                <a:spcPct val="104000"/>
               </a:lnSpc>
               <a:spcBef>
-                <a:spcPts val="560"/>
+                <a:spcPts val="400"/>
               </a:spcBef>
-              <a:buFont typeface="Arial"/>
-              <a:buChar char="•"/>
-            </a:pPr>
-            <a:r>
-              <a:rPr lang="en-US" sz="1700" dirty="0">
+              <a:buNone/>
+            </a:pPr>
+            <a:r>
+              <a:rPr lang="en-US" sz="1600" dirty="0">
                 <a:solidFill>
                   <a:srgbClr val="000000"/>
                 </a:solidFill>
                 <a:latin typeface="Arial"/>
                 <a:cs typeface="Arial"/>
               </a:rPr>
-              <a:t>Item 15: By day 28, 134 of 373 (35.9%) patients with a positive balance and 45 of 245 (18.4%) with a negative balance had died.</a:t>
-            </a:r>
-          </a:p>
-          <a:p>
-            <a:pPr marL="274320" indent="-274320" algn="l">
+              <a:t>Effect size with its 95% confidence interval (CI)</a:t>
+            </a:r>
+          </a:p>
+          <a:p>
+            <a:pPr marL="0" indent="0" algn="ctr">
               <a:lnSpc>
-                <a:spcPct val="106000"/>
+                <a:spcPct val="104000"/>
               </a:lnSpc>
               <a:spcBef>
-                <a:spcPts val="560"/>
+                <a:spcPts val="400"/>
               </a:spcBef>
-              <a:buFont typeface="Arial"/>
-              <a:buChar char="•"/>
-            </a:pPr>
-            <a:r>
-              <a:rPr lang="en-US" sz="1700" dirty="0">
+              <a:buNone/>
+            </a:pPr>
+            <a:r>
+              <a:rPr lang="en-US" sz="1600" dirty="0">
                 <a:solidFill>
                   <a:srgbClr val="000000"/>
                 </a:solidFill>
                 <a:latin typeface="Arial"/>
                 <a:cs typeface="Arial"/>
               </a:rPr>
-              <a:t>Item 16: Crude OR 2.49 (95% CI 1.70 to 3.70), adjusted OR 1.62 (95% CI 1.02 to 2.59).</a:t>
-            </a:r>
-          </a:p>
-          <a:p>
-            <a:pPr marL="274320" indent="-274320" algn="l">
+              <a:t>Not 'p = 0.42, not significant'</a:t>
+            </a:r>
+          </a:p>
+        </p:txBody>
+      </p:sp>
+      <p:sp>
+        <p:nvSpPr>
+          <p:cNvPr id="74" name="CardHead"/>
+          <p:cNvSpPr/>
+          <p:nvPr/>
+        </p:nvSpPr>
+        <p:spPr>
+          <a:xfrm>
+            <a:off x="6196000" y="1697173"/>
+            <a:ext cx="2669400" cy="640000"/>
+          </a:xfrm>
+          <a:prstGeom prst="rect">
+            <a:avLst/>
+          </a:prstGeom>
+          <a:solidFill>
+            <a:srgbClr val="5FA39B"/>
+          </a:solidFill>
+          <a:ln>
+            <a:noFill/>
+          </a:ln>
+        </p:spPr>
+        <p:txBody>
+          <a:bodyPr wrap="square" lIns="91440" tIns="45720" rIns="91440" bIns="45720" rtlCol="0" anchor="ctr">
+            <a:normAutofit/>
+          </a:bodyPr>
+          <a:lstStyle/>
+          <a:p>
+            <a:pPr marL="0" indent="0" algn="ctr">
+              <a:buNone/>
+            </a:pPr>
+            <a:r>
+              <a:rPr lang="en-US" sz="1700" b="1" dirty="0">
+                <a:solidFill>
+                  <a:srgbClr val="FFFFFF"/>
+                </a:solidFill>
+                <a:latin typeface="Arial"/>
+                <a:cs typeface="Arial"/>
+              </a:rPr>
+              <a:t>3  No interpretation</a:t>
+            </a:r>
+          </a:p>
+        </p:txBody>
+      </p:sp>
+      <p:sp>
+        <p:nvSpPr>
+          <p:cNvPr id="75" name="CardBody"/>
+          <p:cNvSpPr/>
+          <p:nvPr/>
+        </p:nvSpPr>
+        <p:spPr>
+          <a:xfrm>
+            <a:off x="6196000" y="2337173"/>
+            <a:ext cx="2669400" cy="1958480"/>
+          </a:xfrm>
+          <a:prstGeom prst="rect">
+            <a:avLst/>
+          </a:prstGeom>
+          <a:solidFill>
+            <a:srgbClr val="EAF2F5"/>
+          </a:solidFill>
+          <a:ln>
+            <a:noFill/>
+          </a:ln>
+        </p:spPr>
+        <p:txBody>
+          <a:bodyPr wrap="square" lIns="137160" tIns="91440" rIns="137160" bIns="91440" rtlCol="0" anchor="ctr">
+            <a:normAutofit/>
+          </a:bodyPr>
+          <a:lstStyle/>
+          <a:p>
+            <a:pPr marL="0" indent="0" algn="ctr">
               <a:lnSpc>
-                <a:spcPct val="106000"/>
+                <a:spcPct val="104000"/>
               </a:lnSpc>
               <a:spcBef>
-                <a:spcPts val="560"/>
+                <a:spcPts val="400"/>
               </a:spcBef>
-              <a:buFont typeface="Arial"/>
-              <a:buChar char="•"/>
-            </a:pPr>
-            <a:r>
-              <a:rPr lang="en-US" sz="1700" dirty="0">
+              <a:buNone/>
+            </a:pPr>
+            <a:r>
+              <a:rPr lang="en-US" sz="1600" dirty="0">
                 <a:solidFill>
                   <a:srgbClr val="000000"/>
                 </a:solidFill>
                 <a:latin typeface="Arial"/>
                 <a:cs typeface="Arial"/>
               </a:rPr>
-              <a:t>Item 17: Multiple imputation: adjusted OR 1.70 (1.09 to 2.64). Adjusted Cox HR 1.46 (1.00 to 2.13).</a:t>
-            </a:r>
-          </a:p>
-          <a:p>
-            <a:pPr marL="274320" indent="-274320" algn="l">
+              <a:t>Results report, the Discussion interprets</a:t>
+            </a:r>
+          </a:p>
+          <a:p>
+            <a:pPr marL="0" indent="0" algn="ctr">
               <a:lnSpc>
-                <a:spcPct val="106000"/>
+                <a:spcPct val="104000"/>
               </a:lnSpc>
               <a:spcBef>
-                <a:spcPts val="560"/>
+                <a:spcPts val="400"/>
               </a:spcBef>
-              <a:buFont typeface="Arial"/>
-              <a:buChar char="•"/>
-            </a:pPr>
-            <a:r>
-              <a:rPr lang="en-US" sz="1700" dirty="0">
-                <a:solidFill>
-                  <a:srgbClr val="0B376C"/>
-                </a:solidFill>
-                <a:latin typeface="Arial"/>
-                <a:cs typeface="Arial"/>
-              </a:rPr>
-              <a:t>No 'because', no 'significant', no 'suggests': numbers with 95% CIs only.</a:t>
+              <a:buNone/>
+            </a:pPr>
+            <a:r>
+              <a:rPr lang="en-US" sz="1600" dirty="0">
+                <a:solidFill>
+                  <a:srgbClr val="000000"/>
+                </a:solidFill>
+                <a:latin typeface="Arial"/>
+                <a:cs typeface="Arial"/>
+              </a:rPr>
+              <a:t>Paper 2: results in the order of the aims</a:t>
+            </a:r>
+          </a:p>
+        </p:txBody>
+      </p:sp>
+      <p:sp>
+        <p:nvSpPr>
+          <p:cNvPr id="76" name="CardHead"/>
+          <p:cNvSpPr/>
+          <p:nvPr/>
+        </p:nvSpPr>
+        <p:spPr>
+          <a:xfrm>
+            <a:off x="9065400" y="1697173"/>
+            <a:ext cx="2669400" cy="640000"/>
+          </a:xfrm>
+          <a:prstGeom prst="rect">
+            <a:avLst/>
+          </a:prstGeom>
+          <a:solidFill>
+            <a:srgbClr val="0070C0"/>
+          </a:solidFill>
+          <a:ln>
+            <a:noFill/>
+          </a:ln>
+        </p:spPr>
+        <p:txBody>
+          <a:bodyPr wrap="square" lIns="91440" tIns="45720" rIns="91440" bIns="45720" rtlCol="0" anchor="ctr">
+            <a:normAutofit/>
+          </a:bodyPr>
+          <a:lstStyle/>
+          <a:p>
+            <a:pPr marL="0" indent="0" algn="ctr">
+              <a:buNone/>
+            </a:pPr>
+            <a:r>
+              <a:rPr lang="en-US" sz="1700" b="1" dirty="0">
+                <a:solidFill>
+                  <a:srgbClr val="FFFFFF"/>
+                </a:solidFill>
+                <a:latin typeface="Arial"/>
+                <a:cs typeface="Arial"/>
+              </a:rPr>
+              <a:t>4  One home per number</a:t>
+            </a:r>
+          </a:p>
+        </p:txBody>
+      </p:sp>
+      <p:sp>
+        <p:nvSpPr>
+          <p:cNvPr id="77" name="CardBody"/>
+          <p:cNvSpPr/>
+          <p:nvPr/>
+        </p:nvSpPr>
+        <p:spPr>
+          <a:xfrm>
+            <a:off x="9065400" y="2337173"/>
+            <a:ext cx="2669400" cy="1958480"/>
+          </a:xfrm>
+          <a:prstGeom prst="rect">
+            <a:avLst/>
+          </a:prstGeom>
+          <a:solidFill>
+            <a:srgbClr val="EAF2F5"/>
+          </a:solidFill>
+          <a:ln>
+            <a:noFill/>
+          </a:ln>
+        </p:spPr>
+        <p:txBody>
+          <a:bodyPr wrap="square" lIns="137160" tIns="91440" rIns="137160" bIns="91440" rtlCol="0" anchor="ctr">
+            <a:normAutofit/>
+          </a:bodyPr>
+          <a:lstStyle/>
+          <a:p>
+            <a:pPr marL="0" indent="0" algn="ctr">
+              <a:lnSpc>
+                <a:spcPct val="104000"/>
+              </a:lnSpc>
+              <a:spcBef>
+                <a:spcPts val="400"/>
+              </a:spcBef>
+              <a:buNone/>
+            </a:pPr>
+            <a:r>
+              <a:rPr lang="en-US" sz="1600" dirty="0">
+                <a:solidFill>
+                  <a:srgbClr val="000000"/>
+                </a:solidFill>
+                <a:latin typeface="Arial"/>
+                <a:cs typeface="Arial"/>
+              </a:rPr>
+              <a:t>Key numbers in the text, details in the tables</a:t>
+            </a:r>
+          </a:p>
+          <a:p>
+            <a:pPr marL="0" indent="0" algn="ctr">
+              <a:lnSpc>
+                <a:spcPct val="104000"/>
+              </a:lnSpc>
+              <a:spcBef>
+                <a:spcPts val="400"/>
+              </a:spcBef>
+              <a:buNone/>
+            </a:pPr>
+            <a:r>
+              <a:rPr lang="en-US" sz="1600" dirty="0">
+                <a:solidFill>
+                  <a:srgbClr val="000000"/>
+                </a:solidFill>
+                <a:latin typeface="Arial"/>
+                <a:cs typeface="Arial"/>
+              </a:rPr>
+              <a:t>Paper 1: text and Table 1 disagree on creatinine</a:t>
+            </a:r>
+          </a:p>
+        </p:txBody>
+      </p:sp>
+      <p:sp>
+        <p:nvSpPr>
+          <p:cNvPr id="60" name="Takeaway"/>
+          <p:cNvSpPr/>
+          <p:nvPr/>
+        </p:nvSpPr>
+        <p:spPr>
+          <a:xfrm>
+            <a:off x="457200" y="5390000"/>
+            <a:ext cx="11277600" cy="560000"/>
+          </a:xfrm>
+          <a:prstGeom prst="roundRect">
+            <a:avLst>
+              <a:gd name="adj" fmla="val 12000"/>
+            </a:avLst>
+          </a:prstGeom>
+          <a:solidFill>
+            <a:srgbClr val="0D7377"/>
+          </a:solidFill>
+          <a:ln>
+            <a:noFill/>
+          </a:ln>
+        </p:spPr>
+        <p:txBody>
+          <a:bodyPr wrap="square" lIns="182880" tIns="45720" rIns="182880" bIns="45720" rtlCol="0" anchor="ctr">
+            <a:normAutofit/>
+          </a:bodyPr>
+          <a:lstStyle/>
+          <a:p>
+            <a:pPr marL="0" indent="0" algn="ctr">
+              <a:buNone/>
+            </a:pPr>
+            <a:r>
+              <a:rPr lang="en-US" sz="1300" b="1" dirty="0">
+                <a:solidFill>
+                  <a:srgbClr val="FFFFFF"/>
+                </a:solidFill>
+                <a:latin typeface="Arial"/>
+                <a:cs typeface="Arial"/>
+              </a:rPr>
+              <a:t>KEY MESSAGE   </a:t>
+            </a:r>
+            <a:r>
+              <a:rPr lang="en-US" sz="1550" dirty="0">
+                <a:solidFill>
+                  <a:srgbClr val="FFFFFF"/>
+                </a:solidFill>
+                <a:latin typeface="Arial"/>
+                <a:cs typeface="Arial"/>
+              </a:rPr>
+              <a:t>Participants first, then each outcome as an effect size with its 95% CI.</a:t>
             </a:r>
           </a:p>
         </p:txBody>
@@ -22465,7 +22370,7 @@
                 <a:latin typeface="Arial"/>
                 <a:cs typeface="Arial"/>
               </a:rPr>
-              <a:t>Tables and figures that stand alone</a:t>
+              <a:t>Worked example: Results for FLUID-ICU question 1</a:t>
             </a:r>
           </a:p>
         </p:txBody>
@@ -22498,81 +22403,182 @@
           </a:p>
         </p:txBody>
       </p:sp>
-      <p:pic>
-        <p:nvPicPr>
-          <p:cNvPr id="25" name="Figure"/>
-          <p:cNvPicPr>
-            <a:picLocks noChangeAspect="1"/>
-          </p:cNvPicPr>
-          <p:nvPr/>
-        </p:nvPicPr>
-        <p:blipFill>
-          <a:blip r:embed="rId4"/>
-          <a:stretch>
-            <a:fillRect/>
-          </a:stretch>
-        </p:blipFill>
-        <p:spPr>
-          <a:xfrm>
-            <a:off x="908500" y="1150000"/>
-            <a:ext cx="10375000" cy="4150000"/>
+      <p:sp>
+        <p:nvSpPr>
+          <p:cNvPr id="20" name="Body"/>
+          <p:cNvSpPr txBox="1"/>
+          <p:nvPr/>
+        </p:nvSpPr>
+        <p:spPr>
+          <a:xfrm>
+            <a:off x="457200" y="1080000"/>
+            <a:ext cx="11277600" cy="4780000"/>
           </a:xfrm>
           <a:prstGeom prst="rect">
             <a:avLst/>
           </a:prstGeom>
-        </p:spPr>
-      </p:pic>
-      <p:sp>
-        <p:nvSpPr>
-          <p:cNvPr id="60" name="Takeaway"/>
-          <p:cNvSpPr/>
-          <p:nvPr/>
-        </p:nvSpPr>
-        <p:spPr>
-          <a:xfrm>
-            <a:off x="457200" y="5390000"/>
-            <a:ext cx="11277600" cy="560000"/>
-          </a:xfrm>
-          <a:prstGeom prst="roundRect">
-            <a:avLst>
-              <a:gd name="adj" fmla="val 12000"/>
-            </a:avLst>
-          </a:prstGeom>
-          <a:solidFill>
-            <a:srgbClr val="0D7377"/>
-          </a:solidFill>
+          <a:noFill/>
           <a:ln>
             <a:noFill/>
           </a:ln>
         </p:spPr>
         <p:txBody>
-          <a:bodyPr wrap="square" lIns="182880" tIns="45720" rIns="182880" bIns="45720" rtlCol="0" anchor="ctr">
-            <a:normAutofit/>
-          </a:bodyPr>
-          <a:lstStyle/>
-          <a:p>
-            <a:pPr marL="0" indent="0" algn="ctr">
-              <a:buNone/>
-            </a:pPr>
-            <a:r>
-              <a:rPr lang="en-US" sz="1300" b="1" dirty="0">
-                <a:solidFill>
-                  <a:srgbClr val="FFFFFF"/>
-                </a:solidFill>
-                <a:latin typeface="Arial"/>
-                <a:cs typeface="Arial"/>
-              </a:rPr>
-              <a:t>KEY MESSAGE   </a:t>
-            </a:r>
-            <a:r>
-              <a:rPr lang="en-US" sz="1550" dirty="0">
-                <a:solidFill>
-                  <a:srgbClr val="FFFFFF"/>
-                </a:solidFill>
-                <a:latin typeface="Arial"/>
-                <a:cs typeface="Arial"/>
-              </a:rPr>
-              <a:t>A reader should understand each table without reading the text.</a:t>
+          <a:bodyPr wrap="square" lIns="91440" tIns="45720" rIns="91440" bIns="45720" rtlCol="0" anchor="ctr"/>
+          <a:lstStyle/>
+          <a:p>
+            <a:pPr marL="0" indent="0" algn="l">
+              <a:lnSpc>
+                <a:spcPct val="108000"/>
+              </a:lnSpc>
+              <a:buNone/>
+            </a:pPr>
+            <a:r>
+              <a:rPr lang="en-US" sz="1900" i="1" dirty="0">
+                <a:solidFill>
+                  <a:srgbClr val="595959"/>
+                </a:solidFill>
+                <a:latin typeface="Arial"/>
+                <a:cs typeface="Arial"/>
+              </a:rPr>
+              <a:t>Participants, Table 1, outcome numbers, crude and adjusted estimates (simulated data).</a:t>
+            </a:r>
+          </a:p>
+          <a:p>
+            <a:pPr>
+              <a:buNone/>
+            </a:pPr>
+            <a:endParaRPr sz="950"/>
+          </a:p>
+          <a:p>
+            <a:pPr marL="274320" indent="-274320" algn="l">
+              <a:lnSpc>
+                <a:spcPct val="106000"/>
+              </a:lnSpc>
+              <a:spcBef>
+                <a:spcPts val="560"/>
+              </a:spcBef>
+              <a:buFont typeface="Arial"/>
+              <a:buChar char="•"/>
+            </a:pPr>
+            <a:r>
+              <a:rPr lang="en-US" sz="1700" dirty="0">
+                <a:solidFill>
+                  <a:srgbClr val="000000"/>
+                </a:solidFill>
+                <a:latin typeface="Arial"/>
+                <a:cs typeface="Arial"/>
+              </a:rPr>
+              <a:t>Item 13: Of 620 patients enrolled, 618 had a day-3 fluid balance and were analysed, 527 had complete data for the adjusted model.</a:t>
+            </a:r>
+          </a:p>
+          <a:p>
+            <a:pPr marL="274320" indent="-274320" algn="l">
+              <a:lnSpc>
+                <a:spcPct val="106000"/>
+              </a:lnSpc>
+              <a:spcBef>
+                <a:spcPts val="560"/>
+              </a:spcBef>
+              <a:buFont typeface="Arial"/>
+              <a:buChar char="•"/>
+            </a:pPr>
+            <a:r>
+              <a:rPr lang="en-US" sz="1700" dirty="0">
+                <a:solidFill>
+                  <a:srgbClr val="000000"/>
+                </a:solidFill>
+                <a:latin typeface="Arial"/>
+                <a:cs typeface="Arial"/>
+              </a:rPr>
+              <a:t>Item 14: 373 (60.4%) had a positive balance. They were sicker: median SOFA 8 vs 6. Vasopressors 55.0% vs 24.9% (Table 1).</a:t>
+            </a:r>
+          </a:p>
+          <a:p>
+            <a:pPr marL="274320" indent="-274320" algn="l">
+              <a:lnSpc>
+                <a:spcPct val="106000"/>
+              </a:lnSpc>
+              <a:spcBef>
+                <a:spcPts val="560"/>
+              </a:spcBef>
+              <a:buFont typeface="Arial"/>
+              <a:buChar char="•"/>
+            </a:pPr>
+            <a:r>
+              <a:rPr lang="en-US" sz="1700" dirty="0">
+                <a:solidFill>
+                  <a:srgbClr val="000000"/>
+                </a:solidFill>
+                <a:latin typeface="Arial"/>
+                <a:cs typeface="Arial"/>
+              </a:rPr>
+              <a:t>Item 15: By day 28, 134 of 373 (35.9%) patients with a positive balance and 45 of 245 (18.4%) with a negative balance had died.</a:t>
+            </a:r>
+          </a:p>
+          <a:p>
+            <a:pPr marL="274320" indent="-274320" algn="l">
+              <a:lnSpc>
+                <a:spcPct val="106000"/>
+              </a:lnSpc>
+              <a:spcBef>
+                <a:spcPts val="560"/>
+              </a:spcBef>
+              <a:buFont typeface="Arial"/>
+              <a:buChar char="•"/>
+            </a:pPr>
+            <a:r>
+              <a:rPr lang="en-US" sz="1700" dirty="0">
+                <a:solidFill>
+                  <a:srgbClr val="000000"/>
+                </a:solidFill>
+                <a:latin typeface="Arial"/>
+                <a:cs typeface="Arial"/>
+              </a:rPr>
+              <a:t>Item 16: Crude OR 2.49 (95% CI 1.70 to 3.70), adjusted OR 1.62 (95% CI 1.02 to 2.59).</a:t>
+            </a:r>
+          </a:p>
+          <a:p>
+            <a:pPr marL="274320" indent="-274320" algn="l">
+              <a:lnSpc>
+                <a:spcPct val="106000"/>
+              </a:lnSpc>
+              <a:spcBef>
+                <a:spcPts val="560"/>
+              </a:spcBef>
+              <a:buFont typeface="Arial"/>
+              <a:buChar char="•"/>
+            </a:pPr>
+            <a:r>
+              <a:rPr lang="en-US" sz="1700" dirty="0">
+                <a:solidFill>
+                  <a:srgbClr val="000000"/>
+                </a:solidFill>
+                <a:latin typeface="Arial"/>
+                <a:cs typeface="Arial"/>
+              </a:rPr>
+              <a:t>Item 17: Multiple imputation: adjusted OR 1.70 (1.09 to 2.64). Adjusted Cox HR 1.46 (1.00 to 2.13).</a:t>
+            </a:r>
+          </a:p>
+          <a:p>
+            <a:pPr marL="274320" indent="-274320" algn="l">
+              <a:lnSpc>
+                <a:spcPct val="106000"/>
+              </a:lnSpc>
+              <a:spcBef>
+                <a:spcPts val="560"/>
+              </a:spcBef>
+              <a:buFont typeface="Arial"/>
+              <a:buChar char="•"/>
+            </a:pPr>
+            <a:r>
+              <a:rPr lang="en-US" sz="1700" dirty="0">
+                <a:solidFill>
+                  <a:srgbClr val="0B376C"/>
+                </a:solidFill>
+                <a:latin typeface="Arial"/>
+                <a:cs typeface="Arial"/>
+              </a:rPr>
+              <a:t>No 'because', no 'significant', no 'suggests': numbers with 95% CIs only.</a:t>
             </a:r>
           </a:p>
         </p:txBody>
@@ -22682,6 +22688,281 @@
 </file>
 
 <file path=ppt/slides/slide33.xml><?xml version="1.0" encoding="utf-8"?>
+<p:sld xmlns:a="http://schemas.openxmlformats.org/drawingml/2006/main" xmlns:r="http://schemas.openxmlformats.org/officeDocument/2006/relationships" xmlns:p="http://schemas.openxmlformats.org/presentationml/2006/main">
+  <p:cSld>
+    <p:bg>
+      <p:bgPr>
+        <a:solidFill>
+          <a:schemeClr val="bg1"/>
+        </a:solidFill>
+        <a:effectLst/>
+      </p:bgPr>
+    </p:bg>
+    <p:spTree>
+      <p:nvGrpSpPr>
+        <p:cNvPr id="1" name=""/>
+        <p:cNvGrpSpPr/>
+        <p:nvPr/>
+      </p:nvGrpSpPr>
+      <p:grpSpPr>
+        <a:xfrm>
+          <a:off x="0" y="0"/>
+          <a:ext cx="0" cy="0"/>
+          <a:chOff x="0" y="0"/>
+          <a:chExt cx="0" cy="0"/>
+        </a:xfrm>
+      </p:grpSpPr>
+      <p:sp>
+        <p:nvSpPr>
+          <p:cNvPr id="10" name="Title"/>
+          <p:cNvSpPr txBox="1"/>
+          <p:nvPr/>
+        </p:nvSpPr>
+        <p:spPr>
+          <a:xfrm>
+            <a:off x="457200" y="160000"/>
+            <a:ext cx="11277600" cy="750000"/>
+          </a:xfrm>
+          <a:prstGeom prst="rect">
+            <a:avLst/>
+          </a:prstGeom>
+          <a:noFill/>
+          <a:ln>
+            <a:noFill/>
+          </a:ln>
+        </p:spPr>
+        <p:txBody>
+          <a:bodyPr wrap="square" lIns="91440" tIns="45720" rIns="91440" bIns="45720" rtlCol="0" anchor="ctr"/>
+          <a:lstStyle/>
+          <a:p>
+            <a:pPr marL="0" indent="0" algn="l">
+              <a:buNone/>
+            </a:pPr>
+            <a:r>
+              <a:rPr lang="en-US" sz="2800" b="1" dirty="0">
+                <a:solidFill>
+                  <a:srgbClr val="0D7377"/>
+                </a:solidFill>
+                <a:latin typeface="Arial"/>
+                <a:cs typeface="Arial"/>
+              </a:rPr>
+              <a:t>Tables and figures that stand alone</a:t>
+            </a:r>
+          </a:p>
+        </p:txBody>
+      </p:sp>
+      <p:sp>
+        <p:nvSpPr>
+          <p:cNvPr id="11" name="Rule"/>
+          <p:cNvSpPr/>
+          <p:nvPr/>
+        </p:nvSpPr>
+        <p:spPr>
+          <a:xfrm>
+            <a:off x="457200" y="940000"/>
+            <a:ext cx="11277600" cy="0"/>
+          </a:xfrm>
+          <a:prstGeom prst="line">
+            <a:avLst/>
+          </a:prstGeom>
+          <a:ln w="19050">
+            <a:solidFill>
+              <a:srgbClr val="0D7377"/>
+            </a:solidFill>
+          </a:ln>
+        </p:spPr>
+        <p:txBody>
+          <a:bodyPr/>
+          <a:lstStyle/>
+          <a:p>
+            <a:endParaRPr/>
+          </a:p>
+        </p:txBody>
+      </p:sp>
+      <p:pic>
+        <p:nvPicPr>
+          <p:cNvPr id="25" name="Figure"/>
+          <p:cNvPicPr>
+            <a:picLocks noChangeAspect="1"/>
+          </p:cNvPicPr>
+          <p:nvPr/>
+        </p:nvPicPr>
+        <p:blipFill>
+          <a:blip r:embed="rId4"/>
+          <a:stretch>
+            <a:fillRect/>
+          </a:stretch>
+        </p:blipFill>
+        <p:spPr>
+          <a:xfrm>
+            <a:off x="908500" y="1150000"/>
+            <a:ext cx="10375000" cy="4150000"/>
+          </a:xfrm>
+          <a:prstGeom prst="rect">
+            <a:avLst/>
+          </a:prstGeom>
+        </p:spPr>
+      </p:pic>
+      <p:sp>
+        <p:nvSpPr>
+          <p:cNvPr id="60" name="Takeaway"/>
+          <p:cNvSpPr/>
+          <p:nvPr/>
+        </p:nvSpPr>
+        <p:spPr>
+          <a:xfrm>
+            <a:off x="457200" y="5390000"/>
+            <a:ext cx="11277600" cy="560000"/>
+          </a:xfrm>
+          <a:prstGeom prst="roundRect">
+            <a:avLst>
+              <a:gd name="adj" fmla="val 12000"/>
+            </a:avLst>
+          </a:prstGeom>
+          <a:solidFill>
+            <a:srgbClr val="0D7377"/>
+          </a:solidFill>
+          <a:ln>
+            <a:noFill/>
+          </a:ln>
+        </p:spPr>
+        <p:txBody>
+          <a:bodyPr wrap="square" lIns="182880" tIns="45720" rIns="182880" bIns="45720" rtlCol="0" anchor="ctr">
+            <a:normAutofit/>
+          </a:bodyPr>
+          <a:lstStyle/>
+          <a:p>
+            <a:pPr marL="0" indent="0" algn="ctr">
+              <a:buNone/>
+            </a:pPr>
+            <a:r>
+              <a:rPr lang="en-US" sz="1300" b="1" dirty="0">
+                <a:solidFill>
+                  <a:srgbClr val="FFFFFF"/>
+                </a:solidFill>
+                <a:latin typeface="Arial"/>
+                <a:cs typeface="Arial"/>
+              </a:rPr>
+              <a:t>KEY MESSAGE   </a:t>
+            </a:r>
+            <a:r>
+              <a:rPr lang="en-US" sz="1550" dirty="0">
+                <a:solidFill>
+                  <a:srgbClr val="FFFFFF"/>
+                </a:solidFill>
+                <a:latin typeface="Arial"/>
+                <a:cs typeface="Arial"/>
+              </a:rPr>
+              <a:t>A reader should understand each table without reading the text.</a:t>
+            </a:r>
+          </a:p>
+        </p:txBody>
+      </p:sp>
+      <p:sp>
+        <p:nvSpPr>
+          <p:cNvPr id="901" name="Footer"/>
+          <p:cNvSpPr txBox="1"/>
+          <p:nvPr/>
+        </p:nvSpPr>
+        <p:spPr>
+          <a:xfrm>
+            <a:off x="4599946" y="6458701"/>
+            <a:ext cx="2845651" cy="276999"/>
+          </a:xfrm>
+          <a:prstGeom prst="rect">
+            <a:avLst/>
+          </a:prstGeom>
+          <a:noFill/>
+          <a:ln>
+            <a:noFill/>
+          </a:ln>
+        </p:spPr>
+        <p:txBody>
+          <a:bodyPr wrap="none" lIns="91440" tIns="45720" rIns="91440" bIns="45720" rtlCol="0" anchor="t"/>
+          <a:lstStyle/>
+          <a:p>
+            <a:r>
+              <a:rPr lang="en-US" sz="1200" dirty="0">
+                <a:solidFill>
+                  <a:schemeClr val="accent5">
+                    <a:lumMod val="50000"/>
+                  </a:schemeClr>
+                </a:solidFill>
+                <a:latin typeface="Arial"/>
+              </a:rPr>
+              <a:t>Neudata | #ClearDataClearImpact</a:t>
+            </a:r>
+          </a:p>
+        </p:txBody>
+      </p:sp>
+      <p:pic>
+        <p:nvPicPr>
+          <p:cNvPr id="902" name="Logo"/>
+          <p:cNvPicPr>
+            <a:picLocks noChangeAspect="1"/>
+          </p:cNvPicPr>
+          <p:nvPr/>
+        </p:nvPicPr>
+        <p:blipFill>
+          <a:blip r:embed="rId3"/>
+          <a:stretch>
+            <a:fillRect/>
+          </a:stretch>
+        </p:blipFill>
+        <p:spPr>
+          <a:xfrm>
+            <a:off x="138853" y="6122125"/>
+            <a:ext cx="716763" cy="683623"/>
+          </a:xfrm>
+          <a:prstGeom prst="rect">
+            <a:avLst/>
+          </a:prstGeom>
+        </p:spPr>
+      </p:pic>
+      <p:sp>
+        <p:nvSpPr>
+          <p:cNvPr id="903" name="Slide Number"/>
+          <p:cNvSpPr>
+            <a:spLocks noGrp="1"/>
+          </p:cNvSpPr>
+          <p:nvPr>
+            <p:ph type="sldNum" sz="quarter" idx="12"/>
+          </p:nvPr>
+        </p:nvSpPr>
+        <p:spPr>
+          <a:xfrm>
+            <a:off x="11330000" y="6470000"/>
+            <a:ext cx="620000" cy="320000"/>
+          </a:xfrm>
+        </p:spPr>
+        <p:txBody>
+          <a:bodyPr/>
+          <a:lstStyle/>
+          <a:p>
+            <a:pPr algn="r"/>
+            <a:fld id="{C1FF6DA9-008F-8B48-92A6-B652298478BF}" type="slidenum">
+              <a:rPr lang="en-US" sz="1050" smtClean="0">
+                <a:solidFill>
+                  <a:schemeClr val="accent5">
+                    <a:lumMod val="50000"/>
+                  </a:schemeClr>
+                </a:solidFill>
+              </a:rPr>
+              <a:t>2</a:t>
+            </a:fld>
+            <a:endParaRPr lang="en-US"/>
+          </a:p>
+        </p:txBody>
+      </p:sp>
+    </p:spTree>
+  </p:cSld>
+  <p:clrMapOvr>
+    <a:masterClrMapping/>
+  </p:clrMapOvr>
+</p:sld>
+</file>
+
+<file path=ppt/slides/slide34.xml><?xml version="1.0" encoding="utf-8"?>
 <p:sld xmlns:a="http://schemas.openxmlformats.org/drawingml/2006/main" xmlns:r="http://schemas.openxmlformats.org/officeDocument/2006/relationships" xmlns:p="http://schemas.openxmlformats.org/presentationml/2006/main">
   <p:cSld>
     <p:bg>
@@ -23459,711 +23740,6 @@
 </p:sld>
 </file>
 
-<file path=ppt/slides/slide34.xml><?xml version="1.0" encoding="utf-8"?>
-<p:sld xmlns:a="http://schemas.openxmlformats.org/drawingml/2006/main" xmlns:r="http://schemas.openxmlformats.org/officeDocument/2006/relationships" xmlns:p="http://schemas.openxmlformats.org/presentationml/2006/main">
-  <p:cSld>
-    <p:bg>
-      <p:bgPr>
-        <a:solidFill>
-          <a:schemeClr val="bg1"/>
-        </a:solidFill>
-        <a:effectLst/>
-      </p:bgPr>
-    </p:bg>
-    <p:spTree>
-      <p:nvGrpSpPr>
-        <p:cNvPr id="1" name=""/>
-        <p:cNvGrpSpPr/>
-        <p:nvPr/>
-      </p:nvGrpSpPr>
-      <p:grpSpPr>
-        <a:xfrm>
-          <a:off x="0" y="0"/>
-          <a:ext cx="0" cy="0"/>
-          <a:chOff x="0" y="0"/>
-          <a:chExt cx="0" cy="0"/>
-        </a:xfrm>
-      </p:grpSpPr>
-      <p:sp>
-        <p:nvSpPr>
-          <p:cNvPr id="10" name="Title"/>
-          <p:cNvSpPr txBox="1"/>
-          <p:nvPr/>
-        </p:nvSpPr>
-        <p:spPr>
-          <a:xfrm>
-            <a:off x="457200" y="160000"/>
-            <a:ext cx="11277600" cy="750000"/>
-          </a:xfrm>
-          <a:prstGeom prst="rect">
-            <a:avLst/>
-          </a:prstGeom>
-          <a:noFill/>
-          <a:ln>
-            <a:noFill/>
-          </a:ln>
-        </p:spPr>
-        <p:txBody>
-          <a:bodyPr wrap="square" lIns="91440" tIns="45720" rIns="91440" bIns="45720" rtlCol="0" anchor="ctr"/>
-          <a:lstStyle/>
-          <a:p>
-            <a:pPr marL="0" indent="0" algn="l">
-              <a:buNone/>
-            </a:pPr>
-            <a:r>
-              <a:rPr lang="en-US" sz="2800" b="1" dirty="0">
-                <a:solidFill>
-                  <a:srgbClr val="0D7377"/>
-                </a:solidFill>
-                <a:latin typeface="Arial"/>
-                <a:cs typeface="Arial"/>
-              </a:rPr>
-              <a:t>STROBE for the FLUID-ICU paper: which item goes where</a:t>
-            </a:r>
-          </a:p>
-        </p:txBody>
-      </p:sp>
-      <p:sp>
-        <p:nvSpPr>
-          <p:cNvPr id="11" name="Rule"/>
-          <p:cNvSpPr/>
-          <p:nvPr/>
-        </p:nvSpPr>
-        <p:spPr>
-          <a:xfrm>
-            <a:off x="457200" y="940000"/>
-            <a:ext cx="11277600" cy="0"/>
-          </a:xfrm>
-          <a:prstGeom prst="line">
-            <a:avLst/>
-          </a:prstGeom>
-          <a:ln w="19050">
-            <a:solidFill>
-              <a:srgbClr val="0D7377"/>
-            </a:solidFill>
-          </a:ln>
-        </p:spPr>
-        <p:txBody>
-          <a:bodyPr/>
-          <a:lstStyle/>
-          <a:p>
-            <a:endParaRPr/>
-          </a:p>
-        </p:txBody>
-      </p:sp>
-      <p:sp>
-        <p:nvSpPr>
-          <p:cNvPr id="19" name="Intro"/>
-          <p:cNvSpPr txBox="1"/>
-          <p:nvPr/>
-        </p:nvSpPr>
-        <p:spPr>
-          <a:xfrm>
-            <a:off x="457200" y="1100000"/>
-            <a:ext cx="11277600" cy="480000"/>
-          </a:xfrm>
-          <a:prstGeom prst="rect">
-            <a:avLst/>
-          </a:prstGeom>
-          <a:noFill/>
-          <a:ln>
-            <a:noFill/>
-          </a:ln>
-        </p:spPr>
-        <p:txBody>
-          <a:bodyPr wrap="square" lIns="91440" tIns="45720" rIns="91440" bIns="45720" rtlCol="0" anchor="t"/>
-          <a:lstStyle/>
-          <a:p>
-            <a:pPr marL="0" indent="0" algn="l">
-              <a:buNone/>
-            </a:pPr>
-            <a:r>
-              <a:rPr lang="en-US" sz="1700" i="1" dirty="0">
-                <a:solidFill>
-                  <a:srgbClr val="595959"/>
-                </a:solidFill>
-                <a:latin typeface="Arial"/>
-                <a:cs typeface="Arial"/>
-              </a:rPr>
-              <a:t>FLUID-ICU is a cohort, so the paper follows STROBE. Numbers are STROBE item numbers.</a:t>
-            </a:r>
-          </a:p>
-        </p:txBody>
-      </p:sp>
-      <p:sp>
-        <p:nvSpPr>
-          <p:cNvPr id="70" name="CardHead"/>
-          <p:cNvSpPr/>
-          <p:nvPr/>
-        </p:nvSpPr>
-        <p:spPr>
-          <a:xfrm>
-            <a:off x="457200" y="1761906"/>
-            <a:ext cx="5538800" cy="640000"/>
-          </a:xfrm>
-          <a:prstGeom prst="rect">
-            <a:avLst/>
-          </a:prstGeom>
-          <a:solidFill>
-            <a:srgbClr val="0D7377"/>
-          </a:solidFill>
-          <a:ln>
-            <a:noFill/>
-          </a:ln>
-        </p:spPr>
-        <p:txBody>
-          <a:bodyPr wrap="square" lIns="91440" tIns="45720" rIns="91440" bIns="45720" rtlCol="0" anchor="ctr">
-            <a:normAutofit/>
-          </a:bodyPr>
-          <a:lstStyle/>
-          <a:p>
-            <a:pPr marL="0" indent="0" algn="ctr">
-              <a:buNone/>
-            </a:pPr>
-            <a:r>
-              <a:rPr lang="en-US" sz="1900" b="1" dirty="0">
-                <a:solidFill>
-                  <a:srgbClr val="FFFFFF"/>
-                </a:solidFill>
-                <a:latin typeface="Arial"/>
-                <a:cs typeface="Arial"/>
-              </a:rPr>
-              <a:t>Methods (items 4-12)</a:t>
-            </a:r>
-          </a:p>
-        </p:txBody>
-      </p:sp>
-      <p:sp>
-        <p:nvSpPr>
-          <p:cNvPr id="71" name="CardBody"/>
-          <p:cNvSpPr/>
-          <p:nvPr/>
-        </p:nvSpPr>
-        <p:spPr>
-          <a:xfrm>
-            <a:off x="457200" y="2401906"/>
-            <a:ext cx="5538800" cy="2644280"/>
-          </a:xfrm>
-          <a:prstGeom prst="rect">
-            <a:avLst/>
-          </a:prstGeom>
-          <a:solidFill>
-            <a:srgbClr val="EAF2F5"/>
-          </a:solidFill>
-          <a:ln>
-            <a:noFill/>
-          </a:ln>
-        </p:spPr>
-        <p:txBody>
-          <a:bodyPr wrap="square" lIns="137160" tIns="91440" rIns="137160" bIns="91440" rtlCol="0" anchor="ctr">
-            <a:normAutofit/>
-          </a:bodyPr>
-          <a:lstStyle/>
-          <a:p>
-            <a:pPr marL="0" indent="0" algn="ctr">
-              <a:lnSpc>
-                <a:spcPct val="104000"/>
-              </a:lnSpc>
-              <a:spcBef>
-                <a:spcPts val="400"/>
-              </a:spcBef>
-              <a:buNone/>
-            </a:pPr>
-            <a:r>
-              <a:rPr lang="en-US" sz="1500" dirty="0">
-                <a:solidFill>
-                  <a:srgbClr val="000000"/>
-                </a:solidFill>
-                <a:latin typeface="Arial"/>
-                <a:cs typeface="Arial"/>
-              </a:rPr>
-              <a:t>4  Design</a:t>
-            </a:r>
-          </a:p>
-          <a:p>
-            <a:pPr marL="0" indent="0" algn="ctr">
-              <a:lnSpc>
-                <a:spcPct val="104000"/>
-              </a:lnSpc>
-              <a:spcBef>
-                <a:spcPts val="400"/>
-              </a:spcBef>
-              <a:buNone/>
-            </a:pPr>
-            <a:r>
-              <a:rPr lang="en-US" sz="1500" dirty="0">
-                <a:solidFill>
-                  <a:srgbClr val="000000"/>
-                </a:solidFill>
-                <a:latin typeface="Arial"/>
-                <a:cs typeface="Arial"/>
-              </a:rPr>
-              <a:t>5  Setting, dates</a:t>
-            </a:r>
-          </a:p>
-          <a:p>
-            <a:pPr marL="0" indent="0" algn="ctr">
-              <a:lnSpc>
-                <a:spcPct val="104000"/>
-              </a:lnSpc>
-              <a:spcBef>
-                <a:spcPts val="400"/>
-              </a:spcBef>
-              <a:buNone/>
-            </a:pPr>
-            <a:r>
-              <a:rPr lang="en-US" sz="1500" dirty="0">
-                <a:solidFill>
-                  <a:srgbClr val="000000"/>
-                </a:solidFill>
-                <a:latin typeface="Arial"/>
-                <a:cs typeface="Arial"/>
-              </a:rPr>
-              <a:t>6  Participants</a:t>
-            </a:r>
-          </a:p>
-          <a:p>
-            <a:pPr marL="0" indent="0" algn="ctr">
-              <a:lnSpc>
-                <a:spcPct val="104000"/>
-              </a:lnSpc>
-              <a:spcBef>
-                <a:spcPts val="400"/>
-              </a:spcBef>
-              <a:buNone/>
-            </a:pPr>
-            <a:r>
-              <a:rPr lang="en-US" sz="1500" dirty="0">
-                <a:solidFill>
-                  <a:srgbClr val="000000"/>
-                </a:solidFill>
-                <a:latin typeface="Arial"/>
-                <a:cs typeface="Arial"/>
-              </a:rPr>
-              <a:t>7  Variables</a:t>
-            </a:r>
-          </a:p>
-          <a:p>
-            <a:pPr marL="0" indent="0" algn="ctr">
-              <a:lnSpc>
-                <a:spcPct val="104000"/>
-              </a:lnSpc>
-              <a:spcBef>
-                <a:spcPts val="400"/>
-              </a:spcBef>
-              <a:buNone/>
-            </a:pPr>
-            <a:r>
-              <a:rPr lang="en-US" sz="1500" dirty="0">
-                <a:solidFill>
-                  <a:srgbClr val="000000"/>
-                </a:solidFill>
-                <a:latin typeface="Arial"/>
-                <a:cs typeface="Arial"/>
-              </a:rPr>
-              <a:t>8  Data sources</a:t>
-            </a:r>
-          </a:p>
-          <a:p>
-            <a:pPr marL="0" indent="0" algn="ctr">
-              <a:lnSpc>
-                <a:spcPct val="104000"/>
-              </a:lnSpc>
-              <a:spcBef>
-                <a:spcPts val="400"/>
-              </a:spcBef>
-              <a:buNone/>
-            </a:pPr>
-            <a:r>
-              <a:rPr lang="en-US" sz="1500" dirty="0">
-                <a:solidFill>
-                  <a:srgbClr val="000000"/>
-                </a:solidFill>
-                <a:latin typeface="Arial"/>
-                <a:cs typeface="Arial"/>
-              </a:rPr>
-              <a:t>9  Bias</a:t>
-            </a:r>
-          </a:p>
-          <a:p>
-            <a:pPr marL="0" indent="0" algn="ctr">
-              <a:lnSpc>
-                <a:spcPct val="104000"/>
-              </a:lnSpc>
-              <a:spcBef>
-                <a:spcPts val="400"/>
-              </a:spcBef>
-              <a:buNone/>
-            </a:pPr>
-            <a:r>
-              <a:rPr lang="en-US" sz="1500" dirty="0">
-                <a:solidFill>
-                  <a:srgbClr val="000000"/>
-                </a:solidFill>
-                <a:latin typeface="Arial"/>
-                <a:cs typeface="Arial"/>
-              </a:rPr>
-              <a:t>10  Study size</a:t>
-            </a:r>
-          </a:p>
-          <a:p>
-            <a:pPr marL="0" indent="0" algn="ctr">
-              <a:lnSpc>
-                <a:spcPct val="104000"/>
-              </a:lnSpc>
-              <a:spcBef>
-                <a:spcPts val="400"/>
-              </a:spcBef>
-              <a:buNone/>
-            </a:pPr>
-            <a:r>
-              <a:rPr lang="en-US" sz="1500" dirty="0">
-                <a:solidFill>
-                  <a:srgbClr val="000000"/>
-                </a:solidFill>
-                <a:latin typeface="Arial"/>
-                <a:cs typeface="Arial"/>
-              </a:rPr>
-              <a:t>12  Statistics, missing data</a:t>
-            </a:r>
-          </a:p>
-        </p:txBody>
-      </p:sp>
-      <p:sp>
-        <p:nvSpPr>
-          <p:cNvPr id="72" name="CardHead"/>
-          <p:cNvSpPr/>
-          <p:nvPr/>
-        </p:nvSpPr>
-        <p:spPr>
-          <a:xfrm>
-            <a:off x="6196000" y="1761906"/>
-            <a:ext cx="5538800" cy="640000"/>
-          </a:xfrm>
-          <a:prstGeom prst="rect">
-            <a:avLst/>
-          </a:prstGeom>
-          <a:solidFill>
-            <a:srgbClr val="0B376C"/>
-          </a:solidFill>
-          <a:ln>
-            <a:noFill/>
-          </a:ln>
-        </p:spPr>
-        <p:txBody>
-          <a:bodyPr wrap="square" lIns="91440" tIns="45720" rIns="91440" bIns="45720" rtlCol="0" anchor="ctr">
-            <a:normAutofit/>
-          </a:bodyPr>
-          <a:lstStyle/>
-          <a:p>
-            <a:pPr marL="0" indent="0" algn="ctr">
-              <a:buNone/>
-            </a:pPr>
-            <a:r>
-              <a:rPr lang="en-US" sz="1900" b="1" dirty="0">
-                <a:solidFill>
-                  <a:srgbClr val="FFFFFF"/>
-                </a:solidFill>
-                <a:latin typeface="Arial"/>
-                <a:cs typeface="Arial"/>
-              </a:rPr>
-              <a:t>Results (items 13-17)</a:t>
-            </a:r>
-          </a:p>
-        </p:txBody>
-      </p:sp>
-      <p:sp>
-        <p:nvSpPr>
-          <p:cNvPr id="73" name="CardBody"/>
-          <p:cNvSpPr/>
-          <p:nvPr/>
-        </p:nvSpPr>
-        <p:spPr>
-          <a:xfrm>
-            <a:off x="6196000" y="2401906"/>
-            <a:ext cx="5538800" cy="2644280"/>
-          </a:xfrm>
-          <a:prstGeom prst="rect">
-            <a:avLst/>
-          </a:prstGeom>
-          <a:solidFill>
-            <a:srgbClr val="EAF2F5"/>
-          </a:solidFill>
-          <a:ln>
-            <a:noFill/>
-          </a:ln>
-        </p:spPr>
-        <p:txBody>
-          <a:bodyPr wrap="square" lIns="137160" tIns="91440" rIns="137160" bIns="91440" rtlCol="0" anchor="ctr">
-            <a:normAutofit/>
-          </a:bodyPr>
-          <a:lstStyle/>
-          <a:p>
-            <a:pPr marL="0" indent="0" algn="ctr">
-              <a:lnSpc>
-                <a:spcPct val="104000"/>
-              </a:lnSpc>
-              <a:spcBef>
-                <a:spcPts val="400"/>
-              </a:spcBef>
-              <a:buNone/>
-            </a:pPr>
-            <a:r>
-              <a:rPr lang="en-US" sz="1500" dirty="0">
-                <a:solidFill>
-                  <a:srgbClr val="000000"/>
-                </a:solidFill>
-                <a:latin typeface="Arial"/>
-                <a:cs typeface="Arial"/>
-              </a:rPr>
-              <a:t>13  Participants and flow</a:t>
-            </a:r>
-          </a:p>
-          <a:p>
-            <a:pPr marL="0" indent="0" algn="ctr">
-              <a:lnSpc>
-                <a:spcPct val="104000"/>
-              </a:lnSpc>
-              <a:spcBef>
-                <a:spcPts val="400"/>
-              </a:spcBef>
-              <a:buNone/>
-            </a:pPr>
-            <a:r>
-              <a:rPr lang="en-US" sz="1500" dirty="0">
-                <a:solidFill>
-                  <a:srgbClr val="000000"/>
-                </a:solidFill>
-                <a:latin typeface="Arial"/>
-                <a:cs typeface="Arial"/>
-              </a:rPr>
-              <a:t>14  Descriptive data (Table 1)</a:t>
-            </a:r>
-          </a:p>
-          <a:p>
-            <a:pPr marL="0" indent="0" algn="ctr">
-              <a:lnSpc>
-                <a:spcPct val="104000"/>
-              </a:lnSpc>
-              <a:spcBef>
-                <a:spcPts val="400"/>
-              </a:spcBef>
-              <a:buNone/>
-            </a:pPr>
-            <a:r>
-              <a:rPr lang="en-US" sz="1500" dirty="0">
-                <a:solidFill>
-                  <a:srgbClr val="000000"/>
-                </a:solidFill>
-                <a:latin typeface="Arial"/>
-                <a:cs typeface="Arial"/>
-              </a:rPr>
-              <a:t>15  Outcome data</a:t>
-            </a:r>
-          </a:p>
-          <a:p>
-            <a:pPr marL="0" indent="0" algn="ctr">
-              <a:lnSpc>
-                <a:spcPct val="104000"/>
-              </a:lnSpc>
-              <a:spcBef>
-                <a:spcPts val="400"/>
-              </a:spcBef>
-              <a:buNone/>
-            </a:pPr>
-            <a:r>
-              <a:rPr lang="en-US" sz="1500" dirty="0">
-                <a:solidFill>
-                  <a:srgbClr val="000000"/>
-                </a:solidFill>
-                <a:latin typeface="Arial"/>
-                <a:cs typeface="Arial"/>
-              </a:rPr>
-              <a:t>16  Main results: crude and adjusted, 95% CI</a:t>
-            </a:r>
-          </a:p>
-          <a:p>
-            <a:pPr marL="0" indent="0" algn="ctr">
-              <a:lnSpc>
-                <a:spcPct val="104000"/>
-              </a:lnSpc>
-              <a:spcBef>
-                <a:spcPts val="400"/>
-              </a:spcBef>
-              <a:buNone/>
-            </a:pPr>
-            <a:r>
-              <a:rPr lang="en-US" sz="1500" dirty="0">
-                <a:solidFill>
-                  <a:srgbClr val="000000"/>
-                </a:solidFill>
-                <a:latin typeface="Arial"/>
-                <a:cs typeface="Arial"/>
-              </a:rPr>
-              <a:t>17  Other analyses</a:t>
-            </a:r>
-          </a:p>
-        </p:txBody>
-      </p:sp>
-      <p:sp>
-        <p:nvSpPr>
-          <p:cNvPr id="60" name="Takeaway"/>
-          <p:cNvSpPr/>
-          <p:nvPr/>
-        </p:nvSpPr>
-        <p:spPr>
-          <a:xfrm>
-            <a:off x="457200" y="5390000"/>
-            <a:ext cx="11277600" cy="560000"/>
-          </a:xfrm>
-          <a:prstGeom prst="roundRect">
-            <a:avLst>
-              <a:gd name="adj" fmla="val 12000"/>
-            </a:avLst>
-          </a:prstGeom>
-          <a:solidFill>
-            <a:srgbClr val="0D7377"/>
-          </a:solidFill>
-          <a:ln>
-            <a:noFill/>
-          </a:ln>
-        </p:spPr>
-        <p:txBody>
-          <a:bodyPr wrap="square" lIns="182880" tIns="45720" rIns="182880" bIns="45720" rtlCol="0" anchor="ctr">
-            <a:normAutofit/>
-          </a:bodyPr>
-          <a:lstStyle/>
-          <a:p>
-            <a:pPr marL="0" indent="0" algn="ctr">
-              <a:buNone/>
-            </a:pPr>
-            <a:r>
-              <a:rPr lang="en-US" sz="1300" b="1" dirty="0">
-                <a:solidFill>
-                  <a:srgbClr val="FFFFFF"/>
-                </a:solidFill>
-                <a:latin typeface="Arial"/>
-                <a:cs typeface="Arial"/>
-              </a:rPr>
-              <a:t>KEY MESSAGE   </a:t>
-            </a:r>
-            <a:r>
-              <a:rPr lang="en-US" sz="1550" dirty="0">
-                <a:solidFill>
-                  <a:srgbClr val="FFFFFF"/>
-                </a:solidFill>
-                <a:latin typeface="Arial"/>
-                <a:cs typeface="Arial"/>
-              </a:rPr>
-              <a:t>Your Results section: items 13 to 17. Methods (optional): items 4 to 12.</a:t>
-            </a:r>
-          </a:p>
-        </p:txBody>
-      </p:sp>
-      <p:sp>
-        <p:nvSpPr>
-          <p:cNvPr id="901" name="Footer"/>
-          <p:cNvSpPr txBox="1"/>
-          <p:nvPr/>
-        </p:nvSpPr>
-        <p:spPr>
-          <a:xfrm>
-            <a:off x="4599946" y="6458701"/>
-            <a:ext cx="2845651" cy="276999"/>
-          </a:xfrm>
-          <a:prstGeom prst="rect">
-            <a:avLst/>
-          </a:prstGeom>
-          <a:noFill/>
-          <a:ln>
-            <a:noFill/>
-          </a:ln>
-        </p:spPr>
-        <p:txBody>
-          <a:bodyPr wrap="none" lIns="91440" tIns="45720" rIns="91440" bIns="45720" rtlCol="0" anchor="t"/>
-          <a:lstStyle/>
-          <a:p>
-            <a:r>
-              <a:rPr lang="en-US" sz="1200" dirty="0">
-                <a:solidFill>
-                  <a:schemeClr val="accent5">
-                    <a:lumMod val="50000"/>
-                  </a:schemeClr>
-                </a:solidFill>
-                <a:latin typeface="Arial"/>
-              </a:rPr>
-              <a:t>Neudata | #ClearDataClearImpact</a:t>
-            </a:r>
-          </a:p>
-        </p:txBody>
-      </p:sp>
-      <p:pic>
-        <p:nvPicPr>
-          <p:cNvPr id="902" name="Logo"/>
-          <p:cNvPicPr>
-            <a:picLocks noChangeAspect="1"/>
-          </p:cNvPicPr>
-          <p:nvPr/>
-        </p:nvPicPr>
-        <p:blipFill>
-          <a:blip r:embed="rId3"/>
-          <a:stretch>
-            <a:fillRect/>
-          </a:stretch>
-        </p:blipFill>
-        <p:spPr>
-          <a:xfrm>
-            <a:off x="138853" y="6122125"/>
-            <a:ext cx="716763" cy="683623"/>
-          </a:xfrm>
-          <a:prstGeom prst="rect">
-            <a:avLst/>
-          </a:prstGeom>
-        </p:spPr>
-      </p:pic>
-      <p:sp>
-        <p:nvSpPr>
-          <p:cNvPr id="903" name="Slide Number"/>
-          <p:cNvSpPr>
-            <a:spLocks noGrp="1"/>
-          </p:cNvSpPr>
-          <p:nvPr>
-            <p:ph type="sldNum" sz="quarter" idx="12"/>
-          </p:nvPr>
-        </p:nvSpPr>
-        <p:spPr>
-          <a:xfrm>
-            <a:off x="11330000" y="6470000"/>
-            <a:ext cx="620000" cy="320000"/>
-          </a:xfrm>
-        </p:spPr>
-        <p:txBody>
-          <a:bodyPr/>
-          <a:lstStyle/>
-          <a:p>
-            <a:pPr algn="r"/>
-            <a:fld id="{C1FF6DA9-008F-8B48-92A6-B652298478BF}" type="slidenum">
-              <a:rPr lang="en-US" sz="1050" smtClean="0">
-                <a:solidFill>
-                  <a:schemeClr val="accent5">
-                    <a:lumMod val="50000"/>
-                  </a:schemeClr>
-                </a:solidFill>
-              </a:rPr>
-              <a:t>2</a:t>
-            </a:fld>
-            <a:endParaRPr lang="en-US"/>
-          </a:p>
-        </p:txBody>
-      </p:sp>
-    </p:spTree>
-  </p:cSld>
-  <p:clrMapOvr>
-    <a:masterClrMapping/>
-  </p:clrMapOvr>
-</p:sld>
-</file>
-
 <file path=ppt/slides/slide35.xml><?xml version="1.0" encoding="utf-8"?>
 <p:sld xmlns:a="http://schemas.openxmlformats.org/drawingml/2006/main" xmlns:r="http://schemas.openxmlformats.org/officeDocument/2006/relationships" xmlns:p="http://schemas.openxmlformats.org/presentationml/2006/main">
   <p:cSld>
@@ -24223,7 +23799,7 @@
                 <a:latin typeface="Arial"/>
                 <a:cs typeface="Arial"/>
               </a:rPr>
-              <a:t>Check: Methods, Results or Discussion?</a:t>
+              <a:t>STROBE for the FLUID-ICU paper: which item goes where</a:t>
             </a:r>
           </a:p>
         </p:txBody>
@@ -24258,211 +23834,99 @@
       </p:sp>
       <p:sp>
         <p:nvSpPr>
-          <p:cNvPr id="50" name="Banner"/>
+          <p:cNvPr id="19" name="Intro"/>
+          <p:cNvSpPr txBox="1"/>
+          <p:nvPr/>
+        </p:nvSpPr>
+        <p:spPr>
+          <a:xfrm>
+            <a:off x="457200" y="1100000"/>
+            <a:ext cx="11277600" cy="480000"/>
+          </a:xfrm>
+          <a:prstGeom prst="rect">
+            <a:avLst/>
+          </a:prstGeom>
+          <a:noFill/>
+          <a:ln>
+            <a:noFill/>
+          </a:ln>
+        </p:spPr>
+        <p:txBody>
+          <a:bodyPr wrap="square" lIns="91440" tIns="45720" rIns="91440" bIns="45720" rtlCol="0" anchor="t"/>
+          <a:lstStyle/>
+          <a:p>
+            <a:pPr marL="0" indent="0" algn="l">
+              <a:buNone/>
+            </a:pPr>
+            <a:r>
+              <a:rPr lang="en-US" sz="1700" i="1" dirty="0">
+                <a:solidFill>
+                  <a:srgbClr val="595959"/>
+                </a:solidFill>
+                <a:latin typeface="Arial"/>
+                <a:cs typeface="Arial"/>
+              </a:rPr>
+              <a:t>FLUID-ICU is a cohort, so the paper follows STROBE. Numbers are STROBE item numbers.</a:t>
+            </a:r>
+          </a:p>
+        </p:txBody>
+      </p:sp>
+      <p:sp>
+        <p:nvSpPr>
+          <p:cNvPr id="70" name="CardHead"/>
           <p:cNvSpPr/>
           <p:nvPr/>
         </p:nvSpPr>
         <p:spPr>
           <a:xfrm>
-            <a:off x="457200" y="1120000"/>
-            <a:ext cx="11277600" cy="470000"/>
+            <a:off x="457200" y="1761906"/>
+            <a:ext cx="5538800" cy="640000"/>
           </a:xfrm>
           <a:prstGeom prst="rect">
             <a:avLst/>
           </a:prstGeom>
           <a:solidFill>
-            <a:srgbClr val="6C3483"/>
+            <a:srgbClr val="0D7377"/>
           </a:solidFill>
           <a:ln>
             <a:noFill/>
           </a:ln>
         </p:spPr>
         <p:txBody>
-          <a:bodyPr wrap="square" lIns="182880" tIns="45720" rIns="182880" bIns="45720" rtlCol="0" anchor="ctr">
+          <a:bodyPr wrap="square" lIns="91440" tIns="45720" rIns="91440" bIns="45720" rtlCol="0" anchor="ctr">
             <a:normAutofit/>
           </a:bodyPr>
           <a:lstStyle/>
           <a:p>
-            <a:pPr marL="0" indent="0" algn="l">
-              <a:buNone/>
-            </a:pPr>
-            <a:r>
-              <a:rPr lang="en-US" sz="1500" b="1" dirty="0">
+            <a:pPr marL="0" indent="0" algn="ctr">
+              <a:buNone/>
+            </a:pPr>
+            <a:r>
+              <a:rPr lang="en-US" sz="1900" b="1" dirty="0">
                 <a:solidFill>
                   <a:srgbClr val="FFFFFF"/>
                 </a:solidFill>
                 <a:latin typeface="Arial"/>
                 <a:cs typeface="Arial"/>
               </a:rPr>
-              <a:t>QUICK QUIZ   |   3 min</a:t>
-            </a:r>
-          </a:p>
-        </p:txBody>
-      </p:sp>
-      <p:sp>
-        <p:nvSpPr>
-          <p:cNvPr id="51" name="Steps"/>
-          <p:cNvSpPr txBox="1"/>
-          <p:nvPr/>
-        </p:nvSpPr>
-        <p:spPr>
-          <a:xfrm>
-            <a:off x="457200" y="1720000"/>
-            <a:ext cx="6766560" cy="4230000"/>
+              <a:t>Methods (items 4-12)</a:t>
+            </a:r>
+          </a:p>
+        </p:txBody>
+      </p:sp>
+      <p:sp>
+        <p:nvSpPr>
+          <p:cNvPr id="71" name="CardBody"/>
+          <p:cNvSpPr/>
+          <p:nvPr/>
+        </p:nvSpPr>
+        <p:spPr>
+          <a:xfrm>
+            <a:off x="457200" y="2401906"/>
+            <a:ext cx="5538800" cy="2644280"/>
           </a:xfrm>
           <a:prstGeom prst="rect">
             <a:avLst/>
-          </a:prstGeom>
-          <a:noFill/>
-          <a:ln>
-            <a:noFill/>
-          </a:ln>
-        </p:spPr>
-        <p:txBody>
-          <a:bodyPr wrap="square" lIns="91440" tIns="45720" rIns="91440" bIns="45720" rtlCol="0" anchor="t"/>
-          <a:lstStyle/>
-          <a:p>
-            <a:pPr marL="380000" indent="-380000" algn="l">
-              <a:lnSpc>
-                <a:spcPct val="104000"/>
-              </a:lnSpc>
-              <a:spcBef>
-                <a:spcPts val="450"/>
-              </a:spcBef>
-              <a:buClr>
-                <a:srgbClr val="6C3483"/>
-              </a:buClr>
-              <a:buFont typeface="Arial"/>
-              <a:buChar char="•"/>
-            </a:pPr>
-            <a:r>
-              <a:rPr lang="en-US" sz="1650" dirty="0">
-                <a:solidFill>
-                  <a:srgbClr val="000000"/>
-                </a:solidFill>
-                <a:latin typeface="Arial"/>
-                <a:cs typeface="Arial"/>
-              </a:rPr>
-              <a:t>'We used logistic regression adjusted for SOFA score and age.'</a:t>
-            </a:r>
-          </a:p>
-          <a:p>
-            <a:pPr marL="380000" indent="-380000" algn="l">
-              <a:lnSpc>
-                <a:spcPct val="104000"/>
-              </a:lnSpc>
-              <a:spcBef>
-                <a:spcPts val="450"/>
-              </a:spcBef>
-              <a:buClr>
-                <a:srgbClr val="6C3483"/>
-              </a:buClr>
-              <a:buFont typeface="Arial"/>
-              <a:buChar char="•"/>
-            </a:pPr>
-            <a:r>
-              <a:rPr lang="en-US" sz="1650" dirty="0">
-                <a:solidFill>
-                  <a:srgbClr val="000000"/>
-                </a:solidFill>
-                <a:latin typeface="Arial"/>
-                <a:cs typeface="Arial"/>
-              </a:rPr>
-              <a:t>'Of 620 patients enrolled, 618 had a day-3 fluid balance.'</a:t>
-            </a:r>
-          </a:p>
-          <a:p>
-            <a:pPr marL="380000" indent="-380000" algn="l">
-              <a:lnSpc>
-                <a:spcPct val="104000"/>
-              </a:lnSpc>
-              <a:spcBef>
-                <a:spcPts val="450"/>
-              </a:spcBef>
-              <a:buClr>
-                <a:srgbClr val="6C3483"/>
-              </a:buClr>
-              <a:buFont typeface="Arial"/>
-              <a:buChar char="•"/>
-            </a:pPr>
-            <a:r>
-              <a:rPr lang="en-US" sz="1650" dirty="0">
-                <a:solidFill>
-                  <a:srgbClr val="000000"/>
-                </a:solidFill>
-                <a:latin typeface="Arial"/>
-                <a:cs typeface="Arial"/>
-              </a:rPr>
-              <a:t>'This may be because sicker patients received more fluid.'</a:t>
-            </a:r>
-          </a:p>
-          <a:p>
-            <a:pPr marL="380000" indent="-380000" algn="l">
-              <a:lnSpc>
-                <a:spcPct val="104000"/>
-              </a:lnSpc>
-              <a:spcBef>
-                <a:spcPts val="450"/>
-              </a:spcBef>
-              <a:buClr>
-                <a:srgbClr val="6C3483"/>
-              </a:buClr>
-              <a:buFont typeface="Arial"/>
-              <a:buChar char="•"/>
-            </a:pPr>
-            <a:r>
-              <a:rPr lang="en-US" sz="1650" dirty="0">
-                <a:solidFill>
-                  <a:srgbClr val="000000"/>
-                </a:solidFill>
-                <a:latin typeface="Arial"/>
-                <a:cs typeface="Arial"/>
-              </a:rPr>
-              <a:t>'Lactate was missing in 15.0% of patients and was imputed.'</a:t>
-            </a:r>
-          </a:p>
-          <a:p>
-            <a:pPr marL="380000" indent="-380000" algn="l">
-              <a:lnSpc>
-                <a:spcPct val="104000"/>
-              </a:lnSpc>
-              <a:spcBef>
-                <a:spcPts val="450"/>
-              </a:spcBef>
-              <a:buClr>
-                <a:srgbClr val="6C3483"/>
-              </a:buClr>
-              <a:buFont typeface="Arial"/>
-              <a:buChar char="•"/>
-            </a:pPr>
-            <a:r>
-              <a:rPr lang="en-US" sz="1650" dirty="0">
-                <a:solidFill>
-                  <a:srgbClr val="000000"/>
-                </a:solidFill>
-                <a:latin typeface="Arial"/>
-                <a:cs typeface="Arial"/>
-              </a:rPr>
-              <a:t>'28-day mortality was higher with a positive balance (adjusted OR 1.62, 95% CI 1.02 to 2.59).'</a:t>
-            </a:r>
-          </a:p>
-        </p:txBody>
-      </p:sp>
-      <p:sp>
-        <p:nvSpPr>
-          <p:cNvPr id="52" name="Side"/>
-          <p:cNvSpPr/>
-          <p:nvPr/>
-        </p:nvSpPr>
-        <p:spPr>
-          <a:xfrm>
-            <a:off x="7423760" y="1720000"/>
-            <a:ext cx="4311040" cy="2006105"/>
-          </a:xfrm>
-          <a:prstGeom prst="roundRect">
-            <a:avLst>
-              <a:gd name="adj" fmla="val 5000"/>
-            </a:avLst>
           </a:prstGeom>
           <a:solidFill>
             <a:srgbClr val="EAF2F5"/>
@@ -24478,17 +23942,23 @@
           <a:lstStyle/>
           <a:p>
             <a:pPr marL="0" indent="0" algn="ctr">
-              <a:buNone/>
-            </a:pPr>
-            <a:r>
-              <a:rPr lang="en-US" sz="1600" b="1" dirty="0">
-                <a:solidFill>
-                  <a:srgbClr val="6C3483"/>
-                </a:solidFill>
-                <a:latin typeface="Arial"/>
-                <a:cs typeface="Arial"/>
-              </a:rPr>
-              <a:t>Answers</a:t>
+              <a:lnSpc>
+                <a:spcPct val="104000"/>
+              </a:lnSpc>
+              <a:spcBef>
+                <a:spcPts val="400"/>
+              </a:spcBef>
+              <a:buNone/>
+            </a:pPr>
+            <a:r>
+              <a:rPr lang="en-US" sz="1500" dirty="0">
+                <a:solidFill>
+                  <a:srgbClr val="000000"/>
+                </a:solidFill>
+                <a:latin typeface="Arial"/>
+                <a:cs typeface="Arial"/>
+              </a:rPr>
+              <a:t>4  Design</a:t>
             </a:r>
           </a:p>
           <a:p>
@@ -24497,7 +23967,7 @@
                 <a:spcPct val="104000"/>
               </a:lnSpc>
               <a:spcBef>
-                <a:spcPts val="300"/>
+                <a:spcPts val="400"/>
               </a:spcBef>
               <a:buNone/>
             </a:pPr>
@@ -24509,7 +23979,7 @@
                 <a:latin typeface="Arial"/>
                 <a:cs typeface="Arial"/>
               </a:rPr>
-              <a:t>Methods</a:t>
+              <a:t>5  Setting, dates</a:t>
             </a:r>
           </a:p>
           <a:p>
@@ -24518,7 +23988,7 @@
                 <a:spcPct val="104000"/>
               </a:lnSpc>
               <a:spcBef>
-                <a:spcPts val="300"/>
+                <a:spcPts val="400"/>
               </a:spcBef>
               <a:buNone/>
             </a:pPr>
@@ -24530,7 +24000,7 @@
                 <a:latin typeface="Arial"/>
                 <a:cs typeface="Arial"/>
               </a:rPr>
-              <a:t>Results (participants)</a:t>
+              <a:t>6  Participants</a:t>
             </a:r>
           </a:p>
           <a:p>
@@ -24539,7 +24009,7 @@
                 <a:spcPct val="104000"/>
               </a:lnSpc>
               <a:spcBef>
-                <a:spcPts val="300"/>
+                <a:spcPts val="400"/>
               </a:spcBef>
               <a:buNone/>
             </a:pPr>
@@ -24551,7 +24021,7 @@
                 <a:latin typeface="Arial"/>
                 <a:cs typeface="Arial"/>
               </a:rPr>
-              <a:t>Discussion (explains)</a:t>
+              <a:t>7  Variables</a:t>
             </a:r>
           </a:p>
           <a:p>
@@ -24560,7 +24030,7 @@
                 <a:spcPct val="104000"/>
               </a:lnSpc>
               <a:spcBef>
-                <a:spcPts val="300"/>
+                <a:spcPts val="400"/>
               </a:spcBef>
               <a:buNone/>
             </a:pPr>
@@ -24572,7 +24042,7 @@
                 <a:latin typeface="Arial"/>
                 <a:cs typeface="Arial"/>
               </a:rPr>
-              <a:t>Methods (how) and Results (how many)</a:t>
+              <a:t>8  Data sources</a:t>
             </a:r>
           </a:p>
           <a:p>
@@ -24581,7 +24051,7 @@
                 <a:spcPct val="104000"/>
               </a:lnSpc>
               <a:spcBef>
-                <a:spcPts val="300"/>
+                <a:spcPts val="400"/>
               </a:spcBef>
               <a:buNone/>
             </a:pPr>
@@ -24593,7 +24063,280 @@
                 <a:latin typeface="Arial"/>
                 <a:cs typeface="Arial"/>
               </a:rPr>
-              <a:t>Results</a:t>
+              <a:t>9  Bias</a:t>
+            </a:r>
+          </a:p>
+          <a:p>
+            <a:pPr marL="0" indent="0" algn="ctr">
+              <a:lnSpc>
+                <a:spcPct val="104000"/>
+              </a:lnSpc>
+              <a:spcBef>
+                <a:spcPts val="400"/>
+              </a:spcBef>
+              <a:buNone/>
+            </a:pPr>
+            <a:r>
+              <a:rPr lang="en-US" sz="1500" dirty="0">
+                <a:solidFill>
+                  <a:srgbClr val="000000"/>
+                </a:solidFill>
+                <a:latin typeface="Arial"/>
+                <a:cs typeface="Arial"/>
+              </a:rPr>
+              <a:t>10  Study size</a:t>
+            </a:r>
+          </a:p>
+          <a:p>
+            <a:pPr marL="0" indent="0" algn="ctr">
+              <a:lnSpc>
+                <a:spcPct val="104000"/>
+              </a:lnSpc>
+              <a:spcBef>
+                <a:spcPts val="400"/>
+              </a:spcBef>
+              <a:buNone/>
+            </a:pPr>
+            <a:r>
+              <a:rPr lang="en-US" sz="1500" dirty="0">
+                <a:solidFill>
+                  <a:srgbClr val="000000"/>
+                </a:solidFill>
+                <a:latin typeface="Arial"/>
+                <a:cs typeface="Arial"/>
+              </a:rPr>
+              <a:t>12  Statistics, missing data</a:t>
+            </a:r>
+          </a:p>
+        </p:txBody>
+      </p:sp>
+      <p:sp>
+        <p:nvSpPr>
+          <p:cNvPr id="72" name="CardHead"/>
+          <p:cNvSpPr/>
+          <p:nvPr/>
+        </p:nvSpPr>
+        <p:spPr>
+          <a:xfrm>
+            <a:off x="6196000" y="1761906"/>
+            <a:ext cx="5538800" cy="640000"/>
+          </a:xfrm>
+          <a:prstGeom prst="rect">
+            <a:avLst/>
+          </a:prstGeom>
+          <a:solidFill>
+            <a:srgbClr val="0B376C"/>
+          </a:solidFill>
+          <a:ln>
+            <a:noFill/>
+          </a:ln>
+        </p:spPr>
+        <p:txBody>
+          <a:bodyPr wrap="square" lIns="91440" tIns="45720" rIns="91440" bIns="45720" rtlCol="0" anchor="ctr">
+            <a:normAutofit/>
+          </a:bodyPr>
+          <a:lstStyle/>
+          <a:p>
+            <a:pPr marL="0" indent="0" algn="ctr">
+              <a:buNone/>
+            </a:pPr>
+            <a:r>
+              <a:rPr lang="en-US" sz="1900" b="1" dirty="0">
+                <a:solidFill>
+                  <a:srgbClr val="FFFFFF"/>
+                </a:solidFill>
+                <a:latin typeface="Arial"/>
+                <a:cs typeface="Arial"/>
+              </a:rPr>
+              <a:t>Results (items 13-17)</a:t>
+            </a:r>
+          </a:p>
+        </p:txBody>
+      </p:sp>
+      <p:sp>
+        <p:nvSpPr>
+          <p:cNvPr id="73" name="CardBody"/>
+          <p:cNvSpPr/>
+          <p:nvPr/>
+        </p:nvSpPr>
+        <p:spPr>
+          <a:xfrm>
+            <a:off x="6196000" y="2401906"/>
+            <a:ext cx="5538800" cy="2644280"/>
+          </a:xfrm>
+          <a:prstGeom prst="rect">
+            <a:avLst/>
+          </a:prstGeom>
+          <a:solidFill>
+            <a:srgbClr val="EAF2F5"/>
+          </a:solidFill>
+          <a:ln>
+            <a:noFill/>
+          </a:ln>
+        </p:spPr>
+        <p:txBody>
+          <a:bodyPr wrap="square" lIns="137160" tIns="91440" rIns="137160" bIns="91440" rtlCol="0" anchor="ctr">
+            <a:normAutofit/>
+          </a:bodyPr>
+          <a:lstStyle/>
+          <a:p>
+            <a:pPr marL="0" indent="0" algn="ctr">
+              <a:lnSpc>
+                <a:spcPct val="104000"/>
+              </a:lnSpc>
+              <a:spcBef>
+                <a:spcPts val="400"/>
+              </a:spcBef>
+              <a:buNone/>
+            </a:pPr>
+            <a:r>
+              <a:rPr lang="en-US" sz="1500" dirty="0">
+                <a:solidFill>
+                  <a:srgbClr val="000000"/>
+                </a:solidFill>
+                <a:latin typeface="Arial"/>
+                <a:cs typeface="Arial"/>
+              </a:rPr>
+              <a:t>13  Participants and flow</a:t>
+            </a:r>
+          </a:p>
+          <a:p>
+            <a:pPr marL="0" indent="0" algn="ctr">
+              <a:lnSpc>
+                <a:spcPct val="104000"/>
+              </a:lnSpc>
+              <a:spcBef>
+                <a:spcPts val="400"/>
+              </a:spcBef>
+              <a:buNone/>
+            </a:pPr>
+            <a:r>
+              <a:rPr lang="en-US" sz="1500" dirty="0">
+                <a:solidFill>
+                  <a:srgbClr val="000000"/>
+                </a:solidFill>
+                <a:latin typeface="Arial"/>
+                <a:cs typeface="Arial"/>
+              </a:rPr>
+              <a:t>14  Descriptive data (Table 1)</a:t>
+            </a:r>
+          </a:p>
+          <a:p>
+            <a:pPr marL="0" indent="0" algn="ctr">
+              <a:lnSpc>
+                <a:spcPct val="104000"/>
+              </a:lnSpc>
+              <a:spcBef>
+                <a:spcPts val="400"/>
+              </a:spcBef>
+              <a:buNone/>
+            </a:pPr>
+            <a:r>
+              <a:rPr lang="en-US" sz="1500" dirty="0">
+                <a:solidFill>
+                  <a:srgbClr val="000000"/>
+                </a:solidFill>
+                <a:latin typeface="Arial"/>
+                <a:cs typeface="Arial"/>
+              </a:rPr>
+              <a:t>15  Outcome data</a:t>
+            </a:r>
+          </a:p>
+          <a:p>
+            <a:pPr marL="0" indent="0" algn="ctr">
+              <a:lnSpc>
+                <a:spcPct val="104000"/>
+              </a:lnSpc>
+              <a:spcBef>
+                <a:spcPts val="400"/>
+              </a:spcBef>
+              <a:buNone/>
+            </a:pPr>
+            <a:r>
+              <a:rPr lang="en-US" sz="1500" dirty="0">
+                <a:solidFill>
+                  <a:srgbClr val="000000"/>
+                </a:solidFill>
+                <a:latin typeface="Arial"/>
+                <a:cs typeface="Arial"/>
+              </a:rPr>
+              <a:t>16  Main results: crude and adjusted, 95% CI</a:t>
+            </a:r>
+          </a:p>
+          <a:p>
+            <a:pPr marL="0" indent="0" algn="ctr">
+              <a:lnSpc>
+                <a:spcPct val="104000"/>
+              </a:lnSpc>
+              <a:spcBef>
+                <a:spcPts val="400"/>
+              </a:spcBef>
+              <a:buNone/>
+            </a:pPr>
+            <a:r>
+              <a:rPr lang="en-US" sz="1500" dirty="0">
+                <a:solidFill>
+                  <a:srgbClr val="000000"/>
+                </a:solidFill>
+                <a:latin typeface="Arial"/>
+                <a:cs typeface="Arial"/>
+              </a:rPr>
+              <a:t>17  Other analyses</a:t>
+            </a:r>
+          </a:p>
+        </p:txBody>
+      </p:sp>
+      <p:sp>
+        <p:nvSpPr>
+          <p:cNvPr id="60" name="Takeaway"/>
+          <p:cNvSpPr/>
+          <p:nvPr/>
+        </p:nvSpPr>
+        <p:spPr>
+          <a:xfrm>
+            <a:off x="457200" y="5390000"/>
+            <a:ext cx="11277600" cy="560000"/>
+          </a:xfrm>
+          <a:prstGeom prst="roundRect">
+            <a:avLst>
+              <a:gd name="adj" fmla="val 12000"/>
+            </a:avLst>
+          </a:prstGeom>
+          <a:solidFill>
+            <a:srgbClr val="0D7377"/>
+          </a:solidFill>
+          <a:ln>
+            <a:noFill/>
+          </a:ln>
+        </p:spPr>
+        <p:txBody>
+          <a:bodyPr wrap="square" lIns="182880" tIns="45720" rIns="182880" bIns="45720" rtlCol="0" anchor="ctr">
+            <a:normAutofit/>
+          </a:bodyPr>
+          <a:lstStyle/>
+          <a:p>
+            <a:pPr marL="0" indent="0" algn="ctr">
+              <a:buNone/>
+            </a:pPr>
+            <a:r>
+              <a:rPr lang="en-US" sz="1300" b="1" dirty="0">
+                <a:solidFill>
+                  <a:srgbClr val="FFFFFF"/>
+                </a:solidFill>
+                <a:latin typeface="Arial"/>
+                <a:cs typeface="Arial"/>
+              </a:rPr>
+              <a:t>KEY MESSAGE   </a:t>
+            </a:r>
+            <a:r>
+              <a:rPr lang="en-US" sz="1550" dirty="0">
+                <a:solidFill>
+                  <a:srgbClr val="FFFFFF"/>
+                </a:solidFill>
+                <a:latin typeface="Arial"/>
+                <a:cs typeface="Arial"/>
+              </a:rPr>
+              <a:t>Methods: items 4 to 12. Results: items 13 to 17.</a:t>
             </a:r>
           </a:p>
         </p:txBody>
@@ -24761,7 +24504,7 @@
                 <a:latin typeface="Arial"/>
                 <a:cs typeface="Arial"/>
               </a:rPr>
-              <a:t>Manuscript workshop 1  |  45 minutes</a:t>
+              <a:t>Check: Methods, Results or Discussion?</a:t>
             </a:r>
           </a:p>
         </p:txBody>
@@ -24796,14 +24539,57 @@
       </p:sp>
       <p:sp>
         <p:nvSpPr>
-          <p:cNvPr id="20" name="Statement"/>
+          <p:cNvPr id="50" name="Banner"/>
+          <p:cNvSpPr/>
+          <p:nvPr/>
+        </p:nvSpPr>
+        <p:spPr>
+          <a:xfrm>
+            <a:off x="457200" y="1120000"/>
+            <a:ext cx="11277600" cy="470000"/>
+          </a:xfrm>
+          <a:prstGeom prst="rect">
+            <a:avLst/>
+          </a:prstGeom>
+          <a:solidFill>
+            <a:srgbClr val="6C3483"/>
+          </a:solidFill>
+          <a:ln>
+            <a:noFill/>
+          </a:ln>
+        </p:spPr>
+        <p:txBody>
+          <a:bodyPr wrap="square" lIns="182880" tIns="45720" rIns="182880" bIns="45720" rtlCol="0" anchor="ctr">
+            <a:normAutofit/>
+          </a:bodyPr>
+          <a:lstStyle/>
+          <a:p>
+            <a:pPr marL="0" indent="0" algn="l">
+              <a:buNone/>
+            </a:pPr>
+            <a:r>
+              <a:rPr lang="en-US" sz="1500" b="1" dirty="0">
+                <a:solidFill>
+                  <a:srgbClr val="FFFFFF"/>
+                </a:solidFill>
+                <a:latin typeface="Arial"/>
+                <a:cs typeface="Arial"/>
+              </a:rPr>
+              <a:t>QUICK QUIZ   |   3 min</a:t>
+            </a:r>
+          </a:p>
+        </p:txBody>
+      </p:sp>
+      <p:sp>
+        <p:nvSpPr>
+          <p:cNvPr id="51" name="Steps"/>
           <p:cNvSpPr txBox="1"/>
           <p:nvPr/>
         </p:nvSpPr>
         <p:spPr>
           <a:xfrm>
-            <a:off x="1057200" y="1280000"/>
-            <a:ext cx="10077600" cy="4470000"/>
+            <a:off x="457200" y="1720000"/>
+            <a:ext cx="6766560" cy="4230000"/>
           </a:xfrm>
           <a:prstGeom prst="rect">
             <a:avLst/>
@@ -24814,42 +24600,281 @@
           </a:ln>
         </p:spPr>
         <p:txBody>
-          <a:bodyPr wrap="square" lIns="91440" tIns="45720" rIns="91440" bIns="45720" rtlCol="0" anchor="ctr"/>
-          <a:lstStyle/>
+          <a:bodyPr wrap="square" lIns="91440" tIns="45720" rIns="91440" bIns="45720" rtlCol="0" anchor="t"/>
+          <a:lstStyle/>
+          <a:p>
+            <a:pPr marL="380000" indent="-380000" algn="l">
+              <a:lnSpc>
+                <a:spcPct val="104000"/>
+              </a:lnSpc>
+              <a:spcBef>
+                <a:spcPts val="450"/>
+              </a:spcBef>
+              <a:buClr>
+                <a:srgbClr val="6C3483"/>
+              </a:buClr>
+              <a:buFont typeface="Arial"/>
+              <a:buChar char="•"/>
+            </a:pPr>
+            <a:r>
+              <a:rPr lang="en-US" sz="1650" dirty="0">
+                <a:solidFill>
+                  <a:srgbClr val="000000"/>
+                </a:solidFill>
+                <a:latin typeface="Arial"/>
+                <a:cs typeface="Arial"/>
+              </a:rPr>
+              <a:t>'We used logistic regression adjusted for SOFA score and age.'</a:t>
+            </a:r>
+          </a:p>
+          <a:p>
+            <a:pPr marL="380000" indent="-380000" algn="l">
+              <a:lnSpc>
+                <a:spcPct val="104000"/>
+              </a:lnSpc>
+              <a:spcBef>
+                <a:spcPts val="450"/>
+              </a:spcBef>
+              <a:buClr>
+                <a:srgbClr val="6C3483"/>
+              </a:buClr>
+              <a:buFont typeface="Arial"/>
+              <a:buChar char="•"/>
+            </a:pPr>
+            <a:r>
+              <a:rPr lang="en-US" sz="1650" dirty="0">
+                <a:solidFill>
+                  <a:srgbClr val="000000"/>
+                </a:solidFill>
+                <a:latin typeface="Arial"/>
+                <a:cs typeface="Arial"/>
+              </a:rPr>
+              <a:t>'Of 620 patients enrolled, 618 had a day-3 fluid balance.'</a:t>
+            </a:r>
+          </a:p>
+          <a:p>
+            <a:pPr marL="380000" indent="-380000" algn="l">
+              <a:lnSpc>
+                <a:spcPct val="104000"/>
+              </a:lnSpc>
+              <a:spcBef>
+                <a:spcPts val="450"/>
+              </a:spcBef>
+              <a:buClr>
+                <a:srgbClr val="6C3483"/>
+              </a:buClr>
+              <a:buFont typeface="Arial"/>
+              <a:buChar char="•"/>
+            </a:pPr>
+            <a:r>
+              <a:rPr lang="en-US" sz="1650" dirty="0">
+                <a:solidFill>
+                  <a:srgbClr val="000000"/>
+                </a:solidFill>
+                <a:latin typeface="Arial"/>
+                <a:cs typeface="Arial"/>
+              </a:rPr>
+              <a:t>'This may be because sicker patients received more fluid.'</a:t>
+            </a:r>
+          </a:p>
+          <a:p>
+            <a:pPr marL="380000" indent="-380000" algn="l">
+              <a:lnSpc>
+                <a:spcPct val="104000"/>
+              </a:lnSpc>
+              <a:spcBef>
+                <a:spcPts val="450"/>
+              </a:spcBef>
+              <a:buClr>
+                <a:srgbClr val="6C3483"/>
+              </a:buClr>
+              <a:buFont typeface="Arial"/>
+              <a:buChar char="•"/>
+            </a:pPr>
+            <a:r>
+              <a:rPr lang="en-US" sz="1650" dirty="0">
+                <a:solidFill>
+                  <a:srgbClr val="000000"/>
+                </a:solidFill>
+                <a:latin typeface="Arial"/>
+                <a:cs typeface="Arial"/>
+              </a:rPr>
+              <a:t>'Lactate was missing in 15.0% of patients and was imputed.'</a:t>
+            </a:r>
+          </a:p>
+          <a:p>
+            <a:pPr marL="380000" indent="-380000" algn="l">
+              <a:lnSpc>
+                <a:spcPct val="104000"/>
+              </a:lnSpc>
+              <a:spcBef>
+                <a:spcPts val="450"/>
+              </a:spcBef>
+              <a:buClr>
+                <a:srgbClr val="6C3483"/>
+              </a:buClr>
+              <a:buFont typeface="Arial"/>
+              <a:buChar char="•"/>
+            </a:pPr>
+            <a:r>
+              <a:rPr lang="en-US" sz="1650" dirty="0">
+                <a:solidFill>
+                  <a:srgbClr val="000000"/>
+                </a:solidFill>
+                <a:latin typeface="Arial"/>
+                <a:cs typeface="Arial"/>
+              </a:rPr>
+              <a:t>'28-day mortality was higher with a positive balance (adjusted OR 1.62, 95% CI 1.02 to 2.59).'</a:t>
+            </a:r>
+          </a:p>
+        </p:txBody>
+      </p:sp>
+      <p:sp>
+        <p:nvSpPr>
+          <p:cNvPr id="52" name="Side"/>
+          <p:cNvSpPr/>
+          <p:nvPr/>
+        </p:nvSpPr>
+        <p:spPr>
+          <a:xfrm>
+            <a:off x="7423760" y="1720000"/>
+            <a:ext cx="4311040" cy="2006105"/>
+          </a:xfrm>
+          <a:prstGeom prst="roundRect">
+            <a:avLst>
+              <a:gd name="adj" fmla="val 5000"/>
+            </a:avLst>
+          </a:prstGeom>
+          <a:solidFill>
+            <a:srgbClr val="EAF2F5"/>
+          </a:solidFill>
+          <a:ln>
+            <a:noFill/>
+          </a:ln>
+        </p:spPr>
+        <p:txBody>
+          <a:bodyPr wrap="square" lIns="137160" tIns="91440" rIns="137160" bIns="91440" rtlCol="0" anchor="ctr">
+            <a:normAutofit/>
+          </a:bodyPr>
+          <a:lstStyle/>
+          <a:p>
+            <a:pPr marL="0" indent="0" algn="ctr">
+              <a:buNone/>
+            </a:pPr>
+            <a:r>
+              <a:rPr lang="en-US" sz="1600" b="1" dirty="0">
+                <a:solidFill>
+                  <a:srgbClr val="6C3483"/>
+                </a:solidFill>
+                <a:latin typeface="Arial"/>
+                <a:cs typeface="Arial"/>
+              </a:rPr>
+              <a:t>Answers</a:t>
+            </a:r>
+          </a:p>
           <a:p>
             <a:pPr marL="0" indent="0" algn="ctr">
               <a:lnSpc>
-                <a:spcPct val="110000"/>
+                <a:spcPct val="104000"/>
               </a:lnSpc>
-              <a:buNone/>
-            </a:pPr>
-            <a:r>
-              <a:rPr lang="en-US" sz="3200" b="1" dirty="0">
-                <a:solidFill>
-                  <a:srgbClr val="0D7377"/>
-                </a:solidFill>
-                <a:latin typeface="Arial"/>
-                <a:cs typeface="Arial"/>
-              </a:rPr>
-              <a:t>Write the Results section: together, then on your own</a:t>
+              <a:spcBef>
+                <a:spcPts val="300"/>
+              </a:spcBef>
+              <a:buNone/>
+            </a:pPr>
+            <a:r>
+              <a:rPr lang="en-US" sz="1500" dirty="0">
+                <a:solidFill>
+                  <a:srgbClr val="000000"/>
+                </a:solidFill>
+                <a:latin typeface="Arial"/>
+                <a:cs typeface="Arial"/>
+              </a:rPr>
+              <a:t>Methods</a:t>
             </a:r>
           </a:p>
           <a:p>
             <a:pPr marL="0" indent="0" algn="ctr">
+              <a:lnSpc>
+                <a:spcPct val="104000"/>
+              </a:lnSpc>
               <a:spcBef>
-                <a:spcPts val="1200"/>
+                <a:spcPts val="300"/>
               </a:spcBef>
               <a:buNone/>
             </a:pPr>
             <a:r>
-              <a:rPr lang="en-US" sz="1900" i="1" dirty="0">
-                <a:solidFill>
-                  <a:srgbClr val="595959"/>
-                </a:solidFill>
-                <a:latin typeface="Arial"/>
-                <a:cs typeface="Arial"/>
-              </a:rPr>
-              <a:t>30 minutes on Q1 with the whole class, then 15 minutes on your own question</a:t>
+              <a:rPr lang="en-US" sz="1500" dirty="0">
+                <a:solidFill>
+                  <a:srgbClr val="000000"/>
+                </a:solidFill>
+                <a:latin typeface="Arial"/>
+                <a:cs typeface="Arial"/>
+              </a:rPr>
+              <a:t>Results (participants)</a:t>
+            </a:r>
+          </a:p>
+          <a:p>
+            <a:pPr marL="0" indent="0" algn="ctr">
+              <a:lnSpc>
+                <a:spcPct val="104000"/>
+              </a:lnSpc>
+              <a:spcBef>
+                <a:spcPts val="300"/>
+              </a:spcBef>
+              <a:buNone/>
+            </a:pPr>
+            <a:r>
+              <a:rPr lang="en-US" sz="1500" dirty="0">
+                <a:solidFill>
+                  <a:srgbClr val="000000"/>
+                </a:solidFill>
+                <a:latin typeface="Arial"/>
+                <a:cs typeface="Arial"/>
+              </a:rPr>
+              <a:t>Discussion (explains)</a:t>
+            </a:r>
+          </a:p>
+          <a:p>
+            <a:pPr marL="0" indent="0" algn="ctr">
+              <a:lnSpc>
+                <a:spcPct val="104000"/>
+              </a:lnSpc>
+              <a:spcBef>
+                <a:spcPts val="300"/>
+              </a:spcBef>
+              <a:buNone/>
+            </a:pPr>
+            <a:r>
+              <a:rPr lang="en-US" sz="1500" dirty="0">
+                <a:solidFill>
+                  <a:srgbClr val="000000"/>
+                </a:solidFill>
+                <a:latin typeface="Arial"/>
+                <a:cs typeface="Arial"/>
+              </a:rPr>
+              <a:t>Methods (how) and Results (how many)</a:t>
+            </a:r>
+          </a:p>
+          <a:p>
+            <a:pPr marL="0" indent="0" algn="ctr">
+              <a:lnSpc>
+                <a:spcPct val="104000"/>
+              </a:lnSpc>
+              <a:spcBef>
+                <a:spcPts val="300"/>
+              </a:spcBef>
+              <a:buNone/>
+            </a:pPr>
+            <a:r>
+              <a:rPr lang="en-US" sz="1500" dirty="0">
+                <a:solidFill>
+                  <a:srgbClr val="000000"/>
+                </a:solidFill>
+                <a:latin typeface="Arial"/>
+                <a:cs typeface="Arial"/>
+              </a:rPr>
+              <a:t>Results</a:t>
             </a:r>
           </a:p>
         </p:txBody>
@@ -25017,7 +25042,7 @@
                 <a:latin typeface="Arial"/>
                 <a:cs typeface="Arial"/>
               </a:rPr>
-              <a:t>Manuscript workshop 1, part 1: we draft Q1 together</a:t>
+              <a:t>Manuscript workshop 1  |  45 minutes</a:t>
             </a:r>
           </a:p>
         </p:txBody>
@@ -25052,57 +25077,14 @@
       </p:sp>
       <p:sp>
         <p:nvSpPr>
-          <p:cNvPr id="50" name="Banner"/>
-          <p:cNvSpPr/>
-          <p:nvPr/>
-        </p:nvSpPr>
-        <p:spPr>
-          <a:xfrm>
-            <a:off x="457200" y="1120000"/>
-            <a:ext cx="11277600" cy="470000"/>
-          </a:xfrm>
-          <a:prstGeom prst="rect">
-            <a:avLst/>
-          </a:prstGeom>
-          <a:solidFill>
-            <a:srgbClr val="0D7377"/>
-          </a:solidFill>
-          <a:ln>
-            <a:noFill/>
-          </a:ln>
-        </p:spPr>
-        <p:txBody>
-          <a:bodyPr wrap="square" lIns="182880" tIns="45720" rIns="182880" bIns="45720" rtlCol="0" anchor="ctr">
-            <a:normAutofit/>
-          </a:bodyPr>
-          <a:lstStyle/>
-          <a:p>
-            <a:pPr marL="0" indent="0" algn="l">
-              <a:buNone/>
-            </a:pPr>
-            <a:r>
-              <a:rPr lang="en-US" sz="1500" b="1" dirty="0">
-                <a:solidFill>
-                  <a:srgbClr val="FFFFFF"/>
-                </a:solidFill>
-                <a:latin typeface="Arial"/>
-                <a:cs typeface="Arial"/>
-              </a:rPr>
-              <a:t>WHOLE-CLASS TASK   |   30 min</a:t>
-            </a:r>
-          </a:p>
-        </p:txBody>
-      </p:sp>
-      <p:sp>
-        <p:nvSpPr>
-          <p:cNvPr id="51" name="Steps"/>
+          <p:cNvPr id="20" name="Statement"/>
           <p:cNvSpPr txBox="1"/>
           <p:nvPr/>
         </p:nvSpPr>
         <p:spPr>
           <a:xfrm>
-            <a:off x="457200" y="1720000"/>
-            <a:ext cx="6766560" cy="3510000"/>
+            <a:off x="1057200" y="1280000"/>
+            <a:ext cx="10077600" cy="4470000"/>
           </a:xfrm>
           <a:prstGeom prst="rect">
             <a:avLst/>
@@ -25113,317 +25095,42 @@
           </a:ln>
         </p:spPr>
         <p:txBody>
-          <a:bodyPr wrap="square" lIns="91440" tIns="45720" rIns="91440" bIns="45720" rtlCol="0" anchor="t"/>
-          <a:lstStyle/>
-          <a:p>
-            <a:pPr marL="380000" indent="-380000" algn="l">
-              <a:lnSpc>
-                <a:spcPct val="104000"/>
-              </a:lnSpc>
-              <a:spcBef>
-                <a:spcPts val="450"/>
-              </a:spcBef>
-              <a:buClr>
-                <a:srgbClr val="0D7377"/>
-              </a:buClr>
-              <a:buFont typeface="Arial"/>
-              <a:buChar char="•"/>
-            </a:pPr>
-            <a:r>
-              <a:rPr lang="en-US" sz="1650" dirty="0">
-                <a:solidFill>
-                  <a:srgbClr val="000000"/>
-                </a:solidFill>
-                <a:latin typeface="Arial"/>
-                <a:cs typeface="Arial"/>
-              </a:rPr>
-              <a:t>The instructor shares the manuscript template and results pack Q1</a:t>
-            </a:r>
-          </a:p>
-          <a:p>
-            <a:pPr marL="380000" indent="-380000" algn="l">
-              <a:lnSpc>
-                <a:spcPct val="104000"/>
-              </a:lnSpc>
-              <a:spcBef>
-                <a:spcPts val="450"/>
-              </a:spcBef>
-              <a:buClr>
-                <a:srgbClr val="0D7377"/>
-              </a:buClr>
-              <a:buFont typeface="Arial"/>
-              <a:buChar char="•"/>
-            </a:pPr>
-            <a:r>
-              <a:rPr lang="en-US" sz="1650" dirty="0">
-                <a:solidFill>
-                  <a:srgbClr val="000000"/>
-                </a:solidFill>
-                <a:latin typeface="Arial"/>
-                <a:cs typeface="Arial"/>
-              </a:rPr>
-              <a:t>Participants and Table 1 (10 min): you suggest each sentence when called on</a:t>
-            </a:r>
-          </a:p>
-          <a:p>
-            <a:pPr marL="380000" indent="-380000" algn="l">
-              <a:lnSpc>
-                <a:spcPct val="104000"/>
-              </a:lnSpc>
-              <a:spcBef>
-                <a:spcPts val="450"/>
-              </a:spcBef>
-              <a:buClr>
-                <a:srgbClr val="0D7377"/>
-              </a:buClr>
-              <a:buFont typeface="Arial"/>
-              <a:buChar char="•"/>
-            </a:pPr>
-            <a:r>
-              <a:rPr lang="en-US" sz="1650" dirty="0">
-                <a:solidFill>
-                  <a:srgbClr val="000000"/>
-                </a:solidFill>
-                <a:latin typeface="Arial"/>
-                <a:cs typeface="Arial"/>
-              </a:rPr>
-              <a:t>Main results (12 min): deaths per group, crude and adjusted OR with 95% CI</a:t>
-            </a:r>
-          </a:p>
-          <a:p>
-            <a:pPr marL="380000" indent="-380000" algn="l">
-              <a:lnSpc>
-                <a:spcPct val="104000"/>
-              </a:lnSpc>
-              <a:spcBef>
-                <a:spcPts val="450"/>
-              </a:spcBef>
-              <a:buClr>
-                <a:srgbClr val="0D7377"/>
-              </a:buClr>
-              <a:buFont typeface="Arial"/>
-              <a:buChar char="•"/>
-            </a:pPr>
-            <a:r>
-              <a:rPr lang="en-US" sz="1650" dirty="0">
-                <a:solidFill>
-                  <a:srgbClr val="000000"/>
-                </a:solidFill>
-                <a:latin typeface="Arial"/>
-                <a:cs typeface="Arial"/>
-              </a:rPr>
-              <a:t>Other analyses (5 min): Cox model and multiple imputation</a:t>
-            </a:r>
-          </a:p>
-          <a:p>
-            <a:pPr marL="380000" indent="-380000" algn="l">
-              <a:lnSpc>
-                <a:spcPct val="104000"/>
-              </a:lnSpc>
-              <a:spcBef>
-                <a:spcPts val="450"/>
-              </a:spcBef>
-              <a:buClr>
-                <a:srgbClr val="0D7377"/>
-              </a:buClr>
-              <a:buFont typeface="Arial"/>
-              <a:buChar char="•"/>
-            </a:pPr>
-            <a:r>
-              <a:rPr lang="en-US" sz="1650" dirty="0">
-                <a:solidFill>
-                  <a:srgbClr val="000000"/>
-                </a:solidFill>
-                <a:latin typeface="Arial"/>
-                <a:cs typeface="Arial"/>
-              </a:rPr>
-              <a:t>Number check (3 min): a volunteer reads each number against the pack</a:t>
-            </a:r>
-          </a:p>
-        </p:txBody>
-      </p:sp>
-      <p:sp>
-        <p:nvSpPr>
-          <p:cNvPr id="52" name="Side"/>
-          <p:cNvSpPr/>
-          <p:nvPr/>
-        </p:nvSpPr>
-        <p:spPr>
-          <a:xfrm>
-            <a:off x="7423760" y="1720000"/>
-            <a:ext cx="4311040" cy="1729880"/>
-          </a:xfrm>
-          <a:prstGeom prst="roundRect">
-            <a:avLst>
-              <a:gd name="adj" fmla="val 5000"/>
-            </a:avLst>
-          </a:prstGeom>
-          <a:solidFill>
-            <a:srgbClr val="EAF2F5"/>
-          </a:solidFill>
-          <a:ln>
-            <a:noFill/>
-          </a:ln>
-        </p:spPr>
-        <p:txBody>
-          <a:bodyPr wrap="square" lIns="137160" tIns="91440" rIns="137160" bIns="91440" rtlCol="0" anchor="ctr">
-            <a:normAutofit/>
-          </a:bodyPr>
-          <a:lstStyle/>
-          <a:p>
-            <a:pPr marL="0" indent="0" algn="ctr">
-              <a:buNone/>
-            </a:pPr>
-            <a:r>
-              <a:rPr lang="en-US" sz="1600" b="1" dirty="0">
-                <a:solidFill>
-                  <a:srgbClr val="0D7377"/>
-                </a:solidFill>
-                <a:latin typeface="Arial"/>
-                <a:cs typeface="Arial"/>
-              </a:rPr>
-              <a:t>Use</a:t>
-            </a:r>
-          </a:p>
+          <a:bodyPr wrap="square" lIns="91440" tIns="45720" rIns="91440" bIns="45720" rtlCol="0" anchor="ctr"/>
+          <a:lstStyle/>
           <a:p>
             <a:pPr marL="0" indent="0" algn="ctr">
               <a:lnSpc>
-                <a:spcPct val="104000"/>
+                <a:spcPct val="110000"/>
               </a:lnSpc>
+              <a:buNone/>
+            </a:pPr>
+            <a:r>
+              <a:rPr lang="en-US" sz="3200" b="1" dirty="0">
+                <a:solidFill>
+                  <a:srgbClr val="0D7377"/>
+                </a:solidFill>
+                <a:latin typeface="Arial"/>
+                <a:cs typeface="Arial"/>
+              </a:rPr>
+              <a:t>Write the Results section: together, then on your own</a:t>
+            </a:r>
+          </a:p>
+          <a:p>
+            <a:pPr marL="0" indent="0" algn="ctr">
               <a:spcBef>
-                <a:spcPts val="300"/>
+                <a:spcPts val="1200"/>
               </a:spcBef>
               <a:buNone/>
             </a:pPr>
             <a:r>
-              <a:rPr lang="en-US" sz="1500" dirty="0">
-                <a:solidFill>
-                  <a:srgbClr val="000000"/>
-                </a:solidFill>
-                <a:latin typeface="Arial"/>
-                <a:cs typeface="Arial"/>
-              </a:rPr>
-              <a:t>Results pack Q1</a:t>
-            </a:r>
-          </a:p>
-          <a:p>
-            <a:pPr marL="0" indent="0" algn="ctr">
-              <a:lnSpc>
-                <a:spcPct val="104000"/>
-              </a:lnSpc>
-              <a:spcBef>
-                <a:spcPts val="300"/>
-              </a:spcBef>
-              <a:buNone/>
-            </a:pPr>
-            <a:r>
-              <a:rPr lang="en-US" sz="1500" dirty="0">
-                <a:solidFill>
-                  <a:srgbClr val="000000"/>
-                </a:solidFill>
-                <a:latin typeface="Arial"/>
-                <a:cs typeface="Arial"/>
-              </a:rPr>
-              <a:t>Manuscript template</a:t>
-            </a:r>
-          </a:p>
-          <a:p>
-            <a:pPr marL="0" indent="0" algn="ctr">
-              <a:lnSpc>
-                <a:spcPct val="104000"/>
-              </a:lnSpc>
-              <a:spcBef>
-                <a:spcPts val="300"/>
-              </a:spcBef>
-              <a:buNone/>
-            </a:pPr>
-            <a:r>
-              <a:rPr lang="en-US" sz="1500" dirty="0">
-                <a:solidFill>
-                  <a:srgbClr val="000000"/>
-                </a:solidFill>
-                <a:latin typeface="Arial"/>
-                <a:cs typeface="Arial"/>
-              </a:rPr>
-              <a:t>STROBE items 13-17</a:t>
-            </a:r>
-          </a:p>
-          <a:p>
-            <a:pPr marL="0" indent="0" algn="ctr">
-              <a:lnSpc>
-                <a:spcPct val="104000"/>
-              </a:lnSpc>
-              <a:spcBef>
-                <a:spcPts val="300"/>
-              </a:spcBef>
-              <a:buNone/>
-            </a:pPr>
-            <a:r>
-              <a:rPr lang="en-US" sz="1500" dirty="0">
-                <a:solidFill>
-                  <a:srgbClr val="000000"/>
-                </a:solidFill>
-                <a:latin typeface="Arial"/>
-                <a:cs typeface="Arial"/>
-              </a:rPr>
-              <a:t>The worked examples (slides)</a:t>
-            </a:r>
-          </a:p>
-        </p:txBody>
-      </p:sp>
-      <p:sp>
-        <p:nvSpPr>
-          <p:cNvPr id="53" name="Deliverable"/>
-          <p:cNvSpPr/>
-          <p:nvPr/>
-        </p:nvSpPr>
-        <p:spPr>
-          <a:xfrm>
-            <a:off x="457200" y="5350000"/>
-            <a:ext cx="11277600" cy="600000"/>
-          </a:xfrm>
-          <a:prstGeom prst="roundRect">
-            <a:avLst>
-              <a:gd name="adj" fmla="val 12000"/>
-            </a:avLst>
-          </a:prstGeom>
-          <a:solidFill>
-            <a:srgbClr val="FFFFFF"/>
-          </a:solidFill>
-          <a:ln w="15875">
-            <a:solidFill>
-              <a:srgbClr val="0D7377"/>
-            </a:solidFill>
-          </a:ln>
-        </p:spPr>
-        <p:txBody>
-          <a:bodyPr wrap="square" lIns="182880" tIns="45720" rIns="182880" bIns="45720" rtlCol="0" anchor="ctr">
-            <a:normAutofit/>
-          </a:bodyPr>
-          <a:lstStyle/>
-          <a:p>
-            <a:pPr marL="0" indent="0" algn="ctr">
-              <a:buNone/>
-            </a:pPr>
-            <a:r>
-              <a:rPr lang="en-US" sz="1300" b="1" dirty="0">
-                <a:solidFill>
-                  <a:srgbClr val="0D7377"/>
-                </a:solidFill>
-                <a:latin typeface="Arial"/>
-                <a:cs typeface="Arial"/>
-              </a:rPr>
-              <a:t>OUTPUT   </a:t>
-            </a:r>
-            <a:r>
-              <a:rPr lang="en-US" sz="1500" dirty="0">
-                <a:solidFill>
-                  <a:srgbClr val="000000"/>
-                </a:solidFill>
-                <a:latin typeface="Arial"/>
-                <a:cs typeface="Arial"/>
-              </a:rPr>
-              <a:t>A class Results section for Q1, sent as a PDF after the session</a:t>
+              <a:rPr lang="en-US" sz="1900" i="1" dirty="0">
+                <a:solidFill>
+                  <a:srgbClr val="595959"/>
+                </a:solidFill>
+                <a:latin typeface="Arial"/>
+                <a:cs typeface="Arial"/>
+              </a:rPr>
+              <a:t>30 minutes on Q1 with the whole class, then 15 minutes on your own question</a:t>
             </a:r>
           </a:p>
         </p:txBody>
@@ -25591,6 +25298,580 @@
                 <a:latin typeface="Arial"/>
                 <a:cs typeface="Arial"/>
               </a:rPr>
+              <a:t>Manuscript workshop 1, part 1: we draft Q1 together</a:t>
+            </a:r>
+          </a:p>
+        </p:txBody>
+      </p:sp>
+      <p:sp>
+        <p:nvSpPr>
+          <p:cNvPr id="11" name="Rule"/>
+          <p:cNvSpPr/>
+          <p:nvPr/>
+        </p:nvSpPr>
+        <p:spPr>
+          <a:xfrm>
+            <a:off x="457200" y="940000"/>
+            <a:ext cx="11277600" cy="0"/>
+          </a:xfrm>
+          <a:prstGeom prst="line">
+            <a:avLst/>
+          </a:prstGeom>
+          <a:ln w="19050">
+            <a:solidFill>
+              <a:srgbClr val="0D7377"/>
+            </a:solidFill>
+          </a:ln>
+        </p:spPr>
+        <p:txBody>
+          <a:bodyPr/>
+          <a:lstStyle/>
+          <a:p>
+            <a:endParaRPr/>
+          </a:p>
+        </p:txBody>
+      </p:sp>
+      <p:sp>
+        <p:nvSpPr>
+          <p:cNvPr id="50" name="Banner"/>
+          <p:cNvSpPr/>
+          <p:nvPr/>
+        </p:nvSpPr>
+        <p:spPr>
+          <a:xfrm>
+            <a:off x="457200" y="1120000"/>
+            <a:ext cx="11277600" cy="470000"/>
+          </a:xfrm>
+          <a:prstGeom prst="rect">
+            <a:avLst/>
+          </a:prstGeom>
+          <a:solidFill>
+            <a:srgbClr val="0D7377"/>
+          </a:solidFill>
+          <a:ln>
+            <a:noFill/>
+          </a:ln>
+        </p:spPr>
+        <p:txBody>
+          <a:bodyPr wrap="square" lIns="182880" tIns="45720" rIns="182880" bIns="45720" rtlCol="0" anchor="ctr">
+            <a:normAutofit/>
+          </a:bodyPr>
+          <a:lstStyle/>
+          <a:p>
+            <a:pPr marL="0" indent="0" algn="l">
+              <a:buNone/>
+            </a:pPr>
+            <a:r>
+              <a:rPr lang="en-US" sz="1500" b="1" dirty="0">
+                <a:solidFill>
+                  <a:srgbClr val="FFFFFF"/>
+                </a:solidFill>
+                <a:latin typeface="Arial"/>
+                <a:cs typeface="Arial"/>
+              </a:rPr>
+              <a:t>WHOLE-CLASS TASK   |   30 min</a:t>
+            </a:r>
+          </a:p>
+        </p:txBody>
+      </p:sp>
+      <p:sp>
+        <p:nvSpPr>
+          <p:cNvPr id="51" name="Steps"/>
+          <p:cNvSpPr txBox="1"/>
+          <p:nvPr/>
+        </p:nvSpPr>
+        <p:spPr>
+          <a:xfrm>
+            <a:off x="457200" y="1720000"/>
+            <a:ext cx="6766560" cy="3510000"/>
+          </a:xfrm>
+          <a:prstGeom prst="rect">
+            <a:avLst/>
+          </a:prstGeom>
+          <a:noFill/>
+          <a:ln>
+            <a:noFill/>
+          </a:ln>
+        </p:spPr>
+        <p:txBody>
+          <a:bodyPr wrap="square" lIns="91440" tIns="45720" rIns="91440" bIns="45720" rtlCol="0" anchor="t"/>
+          <a:lstStyle/>
+          <a:p>
+            <a:pPr marL="380000" indent="-380000" algn="l">
+              <a:lnSpc>
+                <a:spcPct val="104000"/>
+              </a:lnSpc>
+              <a:spcBef>
+                <a:spcPts val="450"/>
+              </a:spcBef>
+              <a:buClr>
+                <a:srgbClr val="0D7377"/>
+              </a:buClr>
+              <a:buFont typeface="Arial"/>
+              <a:buChar char="•"/>
+            </a:pPr>
+            <a:r>
+              <a:rPr lang="en-US" sz="1650" dirty="0">
+                <a:solidFill>
+                  <a:srgbClr val="000000"/>
+                </a:solidFill>
+                <a:latin typeface="Arial"/>
+                <a:cs typeface="Arial"/>
+              </a:rPr>
+              <a:t>The instructor shares the manuscript template and results pack Q1</a:t>
+            </a:r>
+          </a:p>
+          <a:p>
+            <a:pPr marL="380000" indent="-380000" algn="l">
+              <a:lnSpc>
+                <a:spcPct val="104000"/>
+              </a:lnSpc>
+              <a:spcBef>
+                <a:spcPts val="450"/>
+              </a:spcBef>
+              <a:buClr>
+                <a:srgbClr val="0D7377"/>
+              </a:buClr>
+              <a:buFont typeface="Arial"/>
+              <a:buChar char="•"/>
+            </a:pPr>
+            <a:r>
+              <a:rPr lang="en-US" sz="1650" dirty="0">
+                <a:solidFill>
+                  <a:srgbClr val="000000"/>
+                </a:solidFill>
+                <a:latin typeface="Arial"/>
+                <a:cs typeface="Arial"/>
+              </a:rPr>
+              <a:t>Participants and Table 1 (10 min): you suggest each sentence when called on</a:t>
+            </a:r>
+          </a:p>
+          <a:p>
+            <a:pPr marL="380000" indent="-380000" algn="l">
+              <a:lnSpc>
+                <a:spcPct val="104000"/>
+              </a:lnSpc>
+              <a:spcBef>
+                <a:spcPts val="450"/>
+              </a:spcBef>
+              <a:buClr>
+                <a:srgbClr val="0D7377"/>
+              </a:buClr>
+              <a:buFont typeface="Arial"/>
+              <a:buChar char="•"/>
+            </a:pPr>
+            <a:r>
+              <a:rPr lang="en-US" sz="1650" dirty="0">
+                <a:solidFill>
+                  <a:srgbClr val="000000"/>
+                </a:solidFill>
+                <a:latin typeface="Arial"/>
+                <a:cs typeface="Arial"/>
+              </a:rPr>
+              <a:t>Main results (12 min): deaths per group, crude and adjusted OR with 95% CI</a:t>
+            </a:r>
+          </a:p>
+          <a:p>
+            <a:pPr marL="380000" indent="-380000" algn="l">
+              <a:lnSpc>
+                <a:spcPct val="104000"/>
+              </a:lnSpc>
+              <a:spcBef>
+                <a:spcPts val="450"/>
+              </a:spcBef>
+              <a:buClr>
+                <a:srgbClr val="0D7377"/>
+              </a:buClr>
+              <a:buFont typeface="Arial"/>
+              <a:buChar char="•"/>
+            </a:pPr>
+            <a:r>
+              <a:rPr lang="en-US" sz="1650" dirty="0">
+                <a:solidFill>
+                  <a:srgbClr val="000000"/>
+                </a:solidFill>
+                <a:latin typeface="Arial"/>
+                <a:cs typeface="Arial"/>
+              </a:rPr>
+              <a:t>Other analyses (5 min): Cox model and multiple imputation</a:t>
+            </a:r>
+          </a:p>
+          <a:p>
+            <a:pPr marL="380000" indent="-380000" algn="l">
+              <a:lnSpc>
+                <a:spcPct val="104000"/>
+              </a:lnSpc>
+              <a:spcBef>
+                <a:spcPts val="450"/>
+              </a:spcBef>
+              <a:buClr>
+                <a:srgbClr val="0D7377"/>
+              </a:buClr>
+              <a:buFont typeface="Arial"/>
+              <a:buChar char="•"/>
+            </a:pPr>
+            <a:r>
+              <a:rPr lang="en-US" sz="1650" dirty="0">
+                <a:solidFill>
+                  <a:srgbClr val="000000"/>
+                </a:solidFill>
+                <a:latin typeface="Arial"/>
+                <a:cs typeface="Arial"/>
+              </a:rPr>
+              <a:t>Number check (3 min): a volunteer reads each number against the pack</a:t>
+            </a:r>
+          </a:p>
+        </p:txBody>
+      </p:sp>
+      <p:sp>
+        <p:nvSpPr>
+          <p:cNvPr id="52" name="Side"/>
+          <p:cNvSpPr/>
+          <p:nvPr/>
+        </p:nvSpPr>
+        <p:spPr>
+          <a:xfrm>
+            <a:off x="7423760" y="1720000"/>
+            <a:ext cx="4311040" cy="1729880"/>
+          </a:xfrm>
+          <a:prstGeom prst="roundRect">
+            <a:avLst>
+              <a:gd name="adj" fmla="val 5000"/>
+            </a:avLst>
+          </a:prstGeom>
+          <a:solidFill>
+            <a:srgbClr val="EAF2F5"/>
+          </a:solidFill>
+          <a:ln>
+            <a:noFill/>
+          </a:ln>
+        </p:spPr>
+        <p:txBody>
+          <a:bodyPr wrap="square" lIns="137160" tIns="91440" rIns="137160" bIns="91440" rtlCol="0" anchor="ctr">
+            <a:normAutofit/>
+          </a:bodyPr>
+          <a:lstStyle/>
+          <a:p>
+            <a:pPr marL="0" indent="0" algn="ctr">
+              <a:buNone/>
+            </a:pPr>
+            <a:r>
+              <a:rPr lang="en-US" sz="1600" b="1" dirty="0">
+                <a:solidFill>
+                  <a:srgbClr val="0D7377"/>
+                </a:solidFill>
+                <a:latin typeface="Arial"/>
+                <a:cs typeface="Arial"/>
+              </a:rPr>
+              <a:t>Use</a:t>
+            </a:r>
+          </a:p>
+          <a:p>
+            <a:pPr marL="0" indent="0" algn="ctr">
+              <a:lnSpc>
+                <a:spcPct val="104000"/>
+              </a:lnSpc>
+              <a:spcBef>
+                <a:spcPts val="300"/>
+              </a:spcBef>
+              <a:buNone/>
+            </a:pPr>
+            <a:r>
+              <a:rPr lang="en-US" sz="1500" dirty="0">
+                <a:solidFill>
+                  <a:srgbClr val="000000"/>
+                </a:solidFill>
+                <a:latin typeface="Arial"/>
+                <a:cs typeface="Arial"/>
+              </a:rPr>
+              <a:t>Results pack Q1</a:t>
+            </a:r>
+          </a:p>
+          <a:p>
+            <a:pPr marL="0" indent="0" algn="ctr">
+              <a:lnSpc>
+                <a:spcPct val="104000"/>
+              </a:lnSpc>
+              <a:spcBef>
+                <a:spcPts val="300"/>
+              </a:spcBef>
+              <a:buNone/>
+            </a:pPr>
+            <a:r>
+              <a:rPr lang="en-US" sz="1500" dirty="0">
+                <a:solidFill>
+                  <a:srgbClr val="000000"/>
+                </a:solidFill>
+                <a:latin typeface="Arial"/>
+                <a:cs typeface="Arial"/>
+              </a:rPr>
+              <a:t>Manuscript template</a:t>
+            </a:r>
+          </a:p>
+          <a:p>
+            <a:pPr marL="0" indent="0" algn="ctr">
+              <a:lnSpc>
+                <a:spcPct val="104000"/>
+              </a:lnSpc>
+              <a:spcBef>
+                <a:spcPts val="300"/>
+              </a:spcBef>
+              <a:buNone/>
+            </a:pPr>
+            <a:r>
+              <a:rPr lang="en-US" sz="1500" dirty="0">
+                <a:solidFill>
+                  <a:srgbClr val="000000"/>
+                </a:solidFill>
+                <a:latin typeface="Arial"/>
+                <a:cs typeface="Arial"/>
+              </a:rPr>
+              <a:t>STROBE items 13-17</a:t>
+            </a:r>
+          </a:p>
+          <a:p>
+            <a:pPr marL="0" indent="0" algn="ctr">
+              <a:lnSpc>
+                <a:spcPct val="104000"/>
+              </a:lnSpc>
+              <a:spcBef>
+                <a:spcPts val="300"/>
+              </a:spcBef>
+              <a:buNone/>
+            </a:pPr>
+            <a:r>
+              <a:rPr lang="en-US" sz="1500" dirty="0">
+                <a:solidFill>
+                  <a:srgbClr val="000000"/>
+                </a:solidFill>
+                <a:latin typeface="Arial"/>
+                <a:cs typeface="Arial"/>
+              </a:rPr>
+              <a:t>The worked examples (slides)</a:t>
+            </a:r>
+          </a:p>
+        </p:txBody>
+      </p:sp>
+      <p:sp>
+        <p:nvSpPr>
+          <p:cNvPr id="53" name="Deliverable"/>
+          <p:cNvSpPr/>
+          <p:nvPr/>
+        </p:nvSpPr>
+        <p:spPr>
+          <a:xfrm>
+            <a:off x="457200" y="5350000"/>
+            <a:ext cx="11277600" cy="600000"/>
+          </a:xfrm>
+          <a:prstGeom prst="roundRect">
+            <a:avLst>
+              <a:gd name="adj" fmla="val 12000"/>
+            </a:avLst>
+          </a:prstGeom>
+          <a:solidFill>
+            <a:srgbClr val="FFFFFF"/>
+          </a:solidFill>
+          <a:ln w="15875">
+            <a:solidFill>
+              <a:srgbClr val="0D7377"/>
+            </a:solidFill>
+          </a:ln>
+        </p:spPr>
+        <p:txBody>
+          <a:bodyPr wrap="square" lIns="182880" tIns="45720" rIns="182880" bIns="45720" rtlCol="0" anchor="ctr">
+            <a:normAutofit/>
+          </a:bodyPr>
+          <a:lstStyle/>
+          <a:p>
+            <a:pPr marL="0" indent="0" algn="ctr">
+              <a:buNone/>
+            </a:pPr>
+            <a:r>
+              <a:rPr lang="en-US" sz="1300" b="1" dirty="0">
+                <a:solidFill>
+                  <a:srgbClr val="0D7377"/>
+                </a:solidFill>
+                <a:latin typeface="Arial"/>
+                <a:cs typeface="Arial"/>
+              </a:rPr>
+              <a:t>OUTPUT   </a:t>
+            </a:r>
+            <a:r>
+              <a:rPr lang="en-US" sz="1500" dirty="0">
+                <a:solidFill>
+                  <a:srgbClr val="000000"/>
+                </a:solidFill>
+                <a:latin typeface="Arial"/>
+                <a:cs typeface="Arial"/>
+              </a:rPr>
+              <a:t>A class Results section for Q1, sent as a PDF after the session</a:t>
+            </a:r>
+          </a:p>
+        </p:txBody>
+      </p:sp>
+      <p:sp>
+        <p:nvSpPr>
+          <p:cNvPr id="901" name="Footer"/>
+          <p:cNvSpPr txBox="1"/>
+          <p:nvPr/>
+        </p:nvSpPr>
+        <p:spPr>
+          <a:xfrm>
+            <a:off x="4599946" y="6458701"/>
+            <a:ext cx="2845651" cy="276999"/>
+          </a:xfrm>
+          <a:prstGeom prst="rect">
+            <a:avLst/>
+          </a:prstGeom>
+          <a:noFill/>
+          <a:ln>
+            <a:noFill/>
+          </a:ln>
+        </p:spPr>
+        <p:txBody>
+          <a:bodyPr wrap="none" lIns="91440" tIns="45720" rIns="91440" bIns="45720" rtlCol="0" anchor="t"/>
+          <a:lstStyle/>
+          <a:p>
+            <a:r>
+              <a:rPr lang="en-US" sz="1200" dirty="0">
+                <a:solidFill>
+                  <a:schemeClr val="accent5">
+                    <a:lumMod val="50000"/>
+                  </a:schemeClr>
+                </a:solidFill>
+                <a:latin typeface="Arial"/>
+              </a:rPr>
+              <a:t>Neudata | #ClearDataClearImpact</a:t>
+            </a:r>
+          </a:p>
+        </p:txBody>
+      </p:sp>
+      <p:pic>
+        <p:nvPicPr>
+          <p:cNvPr id="902" name="Logo"/>
+          <p:cNvPicPr>
+            <a:picLocks noChangeAspect="1"/>
+          </p:cNvPicPr>
+          <p:nvPr/>
+        </p:nvPicPr>
+        <p:blipFill>
+          <a:blip r:embed="rId3"/>
+          <a:stretch>
+            <a:fillRect/>
+          </a:stretch>
+        </p:blipFill>
+        <p:spPr>
+          <a:xfrm>
+            <a:off x="138853" y="6122125"/>
+            <a:ext cx="716763" cy="683623"/>
+          </a:xfrm>
+          <a:prstGeom prst="rect">
+            <a:avLst/>
+          </a:prstGeom>
+        </p:spPr>
+      </p:pic>
+      <p:sp>
+        <p:nvSpPr>
+          <p:cNvPr id="903" name="Slide Number"/>
+          <p:cNvSpPr>
+            <a:spLocks noGrp="1"/>
+          </p:cNvSpPr>
+          <p:nvPr>
+            <p:ph type="sldNum" sz="quarter" idx="12"/>
+          </p:nvPr>
+        </p:nvSpPr>
+        <p:spPr>
+          <a:xfrm>
+            <a:off x="11330000" y="6470000"/>
+            <a:ext cx="620000" cy="320000"/>
+          </a:xfrm>
+        </p:spPr>
+        <p:txBody>
+          <a:bodyPr/>
+          <a:lstStyle/>
+          <a:p>
+            <a:pPr algn="r"/>
+            <a:fld id="{C1FF6DA9-008F-8B48-92A6-B652298478BF}" type="slidenum">
+              <a:rPr lang="en-US" sz="1050" smtClean="0">
+                <a:solidFill>
+                  <a:schemeClr val="accent5">
+                    <a:lumMod val="50000"/>
+                  </a:schemeClr>
+                </a:solidFill>
+              </a:rPr>
+              <a:t>2</a:t>
+            </a:fld>
+            <a:endParaRPr lang="en-US"/>
+          </a:p>
+        </p:txBody>
+      </p:sp>
+    </p:spTree>
+  </p:cSld>
+  <p:clrMapOvr>
+    <a:masterClrMapping/>
+  </p:clrMapOvr>
+</p:sld>
+</file>
+
+<file path=ppt/slides/slide39.xml><?xml version="1.0" encoding="utf-8"?>
+<p:sld xmlns:a="http://schemas.openxmlformats.org/drawingml/2006/main" xmlns:r="http://schemas.openxmlformats.org/officeDocument/2006/relationships" xmlns:p="http://schemas.openxmlformats.org/presentationml/2006/main">
+  <p:cSld>
+    <p:bg>
+      <p:bgPr>
+        <a:solidFill>
+          <a:schemeClr val="bg1"/>
+        </a:solidFill>
+        <a:effectLst/>
+      </p:bgPr>
+    </p:bg>
+    <p:spTree>
+      <p:nvGrpSpPr>
+        <p:cNvPr id="1" name=""/>
+        <p:cNvGrpSpPr/>
+        <p:nvPr/>
+      </p:nvGrpSpPr>
+      <p:grpSpPr>
+        <a:xfrm>
+          <a:off x="0" y="0"/>
+          <a:ext cx="0" cy="0"/>
+          <a:chOff x="0" y="0"/>
+          <a:chExt cx="0" cy="0"/>
+        </a:xfrm>
+      </p:grpSpPr>
+      <p:sp>
+        <p:nvSpPr>
+          <p:cNvPr id="10" name="Title"/>
+          <p:cNvSpPr txBox="1"/>
+          <p:nvPr/>
+        </p:nvSpPr>
+        <p:spPr>
+          <a:xfrm>
+            <a:off x="457200" y="160000"/>
+            <a:ext cx="11277600" cy="750000"/>
+          </a:xfrm>
+          <a:prstGeom prst="rect">
+            <a:avLst/>
+          </a:prstGeom>
+          <a:noFill/>
+          <a:ln>
+            <a:noFill/>
+          </a:ln>
+        </p:spPr>
+        <p:txBody>
+          <a:bodyPr wrap="square" lIns="91440" tIns="45720" rIns="91440" bIns="45720" rtlCol="0" anchor="ctr"/>
+          <a:lstStyle/>
+          <a:p>
+            <a:pPr marL="0" indent="0" algn="l">
+              <a:buNone/>
+            </a:pPr>
+            <a:r>
+              <a:rPr lang="en-US" sz="2800" b="1" dirty="0">
+                <a:solidFill>
+                  <a:srgbClr val="0D7377"/>
+                </a:solidFill>
+                <a:latin typeface="Arial"/>
+                <a:cs typeface="Arial"/>
+              </a:rPr>
               <a:t>Manuscript workshop 1, part 2: start your own draft</a:t>
             </a:r>
           </a:p>
@@ -26018,7 +26299,7 @@
                 <a:latin typeface="Arial"/>
                 <a:cs typeface="Arial"/>
               </a:rPr>
-              <a:t>Your Results section, due 23:59 on the day of Session 8</a:t>
+              <a:t>Your Results section, due 23:59 on Sunday 20 December</a:t>
             </a:r>
           </a:p>
         </p:txBody>
@@ -26127,7 +26408,263 @@
 </p:sld>
 </file>
 
-<file path=ppt/slides/slide39.xml><?xml version="1.0" encoding="utf-8"?>
+<file path=ppt/slides/slide4.xml><?xml version="1.0" encoding="utf-8"?>
+<p:sld xmlns:a="http://schemas.openxmlformats.org/drawingml/2006/main" xmlns:r="http://schemas.openxmlformats.org/officeDocument/2006/relationships" xmlns:p="http://schemas.openxmlformats.org/presentationml/2006/main">
+  <p:cSld>
+    <p:bg>
+      <p:bgPr>
+        <a:solidFill>
+          <a:schemeClr val="bg1"/>
+        </a:solidFill>
+        <a:effectLst/>
+      </p:bgPr>
+    </p:bg>
+    <p:spTree>
+      <p:nvGrpSpPr>
+        <p:cNvPr id="1" name=""/>
+        <p:cNvGrpSpPr/>
+        <p:nvPr/>
+      </p:nvGrpSpPr>
+      <p:grpSpPr>
+        <a:xfrm>
+          <a:off x="0" y="0"/>
+          <a:ext cx="0" cy="0"/>
+          <a:chOff x="0" y="0"/>
+          <a:chExt cx="0" cy="0"/>
+        </a:xfrm>
+      </p:grpSpPr>
+      <p:sp>
+        <p:nvSpPr>
+          <p:cNvPr id="10" name="Title"/>
+          <p:cNvSpPr txBox="1"/>
+          <p:nvPr/>
+        </p:nvSpPr>
+        <p:spPr>
+          <a:xfrm>
+            <a:off x="457200" y="160000"/>
+            <a:ext cx="11277600" cy="750000"/>
+          </a:xfrm>
+          <a:prstGeom prst="rect">
+            <a:avLst/>
+          </a:prstGeom>
+          <a:noFill/>
+          <a:ln>
+            <a:noFill/>
+          </a:ln>
+        </p:spPr>
+        <p:txBody>
+          <a:bodyPr wrap="square" lIns="91440" tIns="45720" rIns="91440" bIns="45720" rtlCol="0" anchor="ctr"/>
+          <a:lstStyle/>
+          <a:p>
+            <a:pPr marL="0" indent="0" algn="l">
+              <a:buNone/>
+            </a:pPr>
+            <a:r>
+              <a:rPr lang="en-US" sz="2800" b="1" dirty="0">
+                <a:solidFill>
+                  <a:srgbClr val="0D7377"/>
+                </a:solidFill>
+                <a:latin typeface="Arial"/>
+                <a:cs typeface="Arial"/>
+              </a:rPr>
+              <a:t>7.1  |  30 minutes</a:t>
+            </a:r>
+          </a:p>
+        </p:txBody>
+      </p:sp>
+      <p:sp>
+        <p:nvSpPr>
+          <p:cNvPr id="11" name="Rule"/>
+          <p:cNvSpPr/>
+          <p:nvPr/>
+        </p:nvSpPr>
+        <p:spPr>
+          <a:xfrm>
+            <a:off x="457200" y="940000"/>
+            <a:ext cx="11277600" cy="0"/>
+          </a:xfrm>
+          <a:prstGeom prst="line">
+            <a:avLst/>
+          </a:prstGeom>
+          <a:ln w="19050">
+            <a:solidFill>
+              <a:srgbClr val="0D7377"/>
+            </a:solidFill>
+          </a:ln>
+        </p:spPr>
+        <p:txBody>
+          <a:bodyPr/>
+          <a:lstStyle/>
+          <a:p>
+            <a:endParaRPr/>
+          </a:p>
+        </p:txBody>
+      </p:sp>
+      <p:sp>
+        <p:nvSpPr>
+          <p:cNvPr id="20" name="Statement"/>
+          <p:cNvSpPr txBox="1"/>
+          <p:nvPr/>
+        </p:nvSpPr>
+        <p:spPr>
+          <a:xfrm>
+            <a:off x="1057200" y="1280000"/>
+            <a:ext cx="10077600" cy="4470000"/>
+          </a:xfrm>
+          <a:prstGeom prst="rect">
+            <a:avLst/>
+          </a:prstGeom>
+          <a:noFill/>
+          <a:ln>
+            <a:noFill/>
+          </a:ln>
+        </p:spPr>
+        <p:txBody>
+          <a:bodyPr wrap="square" lIns="91440" tIns="45720" rIns="91440" bIns="45720" rtlCol="0" anchor="ctr"/>
+          <a:lstStyle/>
+          <a:p>
+            <a:pPr marL="0" indent="0" algn="ctr">
+              <a:lnSpc>
+                <a:spcPct val="110000"/>
+              </a:lnSpc>
+              <a:buNone/>
+            </a:pPr>
+            <a:r>
+              <a:rPr lang="en-US" sz="3200" b="1" dirty="0">
+                <a:solidFill>
+                  <a:srgbClr val="0D7377"/>
+                </a:solidFill>
+                <a:latin typeface="Arial"/>
+                <a:cs typeface="Arial"/>
+              </a:rPr>
+              <a:t>Protocol, ethics and consent</a:t>
+            </a:r>
+          </a:p>
+          <a:p>
+            <a:pPr marL="0" indent="0" algn="ctr">
+              <a:spcBef>
+                <a:spcPts val="1200"/>
+              </a:spcBef>
+              <a:buNone/>
+            </a:pPr>
+            <a:r>
+              <a:rPr lang="en-US" sz="1900" i="1" dirty="0">
+                <a:solidFill>
+                  <a:srgbClr val="595959"/>
+                </a:solidFill>
+                <a:latin typeface="Arial"/>
+                <a:cs typeface="Arial"/>
+              </a:rPr>
+              <a:t>Protect the patient before the first data point</a:t>
+            </a:r>
+          </a:p>
+        </p:txBody>
+      </p:sp>
+      <p:sp>
+        <p:nvSpPr>
+          <p:cNvPr id="901" name="Footer"/>
+          <p:cNvSpPr txBox="1"/>
+          <p:nvPr/>
+        </p:nvSpPr>
+        <p:spPr>
+          <a:xfrm>
+            <a:off x="4599946" y="6458701"/>
+            <a:ext cx="2845651" cy="276999"/>
+          </a:xfrm>
+          <a:prstGeom prst="rect">
+            <a:avLst/>
+          </a:prstGeom>
+          <a:noFill/>
+          <a:ln>
+            <a:noFill/>
+          </a:ln>
+        </p:spPr>
+        <p:txBody>
+          <a:bodyPr wrap="none" lIns="91440" tIns="45720" rIns="91440" bIns="45720" rtlCol="0" anchor="t"/>
+          <a:lstStyle/>
+          <a:p>
+            <a:r>
+              <a:rPr lang="en-US" sz="1200" dirty="0">
+                <a:solidFill>
+                  <a:schemeClr val="accent5">
+                    <a:lumMod val="50000"/>
+                  </a:schemeClr>
+                </a:solidFill>
+                <a:latin typeface="Arial"/>
+              </a:rPr>
+              <a:t>Neudata | #ClearDataClearImpact</a:t>
+            </a:r>
+          </a:p>
+        </p:txBody>
+      </p:sp>
+      <p:pic>
+        <p:nvPicPr>
+          <p:cNvPr id="902" name="Logo"/>
+          <p:cNvPicPr>
+            <a:picLocks noChangeAspect="1"/>
+          </p:cNvPicPr>
+          <p:nvPr/>
+        </p:nvPicPr>
+        <p:blipFill>
+          <a:blip r:embed="rId3"/>
+          <a:stretch>
+            <a:fillRect/>
+          </a:stretch>
+        </p:blipFill>
+        <p:spPr>
+          <a:xfrm>
+            <a:off x="138853" y="6122125"/>
+            <a:ext cx="716763" cy="683623"/>
+          </a:xfrm>
+          <a:prstGeom prst="rect">
+            <a:avLst/>
+          </a:prstGeom>
+        </p:spPr>
+      </p:pic>
+      <p:sp>
+        <p:nvSpPr>
+          <p:cNvPr id="903" name="Slide Number"/>
+          <p:cNvSpPr>
+            <a:spLocks noGrp="1"/>
+          </p:cNvSpPr>
+          <p:nvPr>
+            <p:ph type="sldNum" sz="quarter" idx="12"/>
+          </p:nvPr>
+        </p:nvSpPr>
+        <p:spPr>
+          <a:xfrm>
+            <a:off x="11330000" y="6470000"/>
+            <a:ext cx="620000" cy="320000"/>
+          </a:xfrm>
+        </p:spPr>
+        <p:txBody>
+          <a:bodyPr/>
+          <a:lstStyle/>
+          <a:p>
+            <a:pPr algn="r"/>
+            <a:fld id="{C1FF6DA9-008F-8B48-92A6-B652298478BF}" type="slidenum">
+              <a:rPr lang="en-US" sz="1050" smtClean="0">
+                <a:solidFill>
+                  <a:schemeClr val="accent5">
+                    <a:lumMod val="50000"/>
+                  </a:schemeClr>
+                </a:solidFill>
+              </a:rPr>
+              <a:t>2</a:t>
+            </a:fld>
+            <a:endParaRPr lang="en-US"/>
+          </a:p>
+        </p:txBody>
+      </p:sp>
+    </p:spTree>
+  </p:cSld>
+  <p:clrMapOvr>
+    <a:masterClrMapping/>
+  </p:clrMapOvr>
+</p:sld>
+</file>
+
+<file path=ppt/slides/slide40.xml><?xml version="1.0" encoding="utf-8"?>
 <p:sld xmlns:a="http://schemas.openxmlformats.org/drawingml/2006/main" xmlns:r="http://schemas.openxmlformats.org/officeDocument/2006/relationships" xmlns:p="http://schemas.openxmlformats.org/presentationml/2006/main">
   <p:cSld>
     <p:bg>
@@ -26736,263 +27273,7 @@
 </p:sld>
 </file>
 
-<file path=ppt/slides/slide4.xml><?xml version="1.0" encoding="utf-8"?>
-<p:sld xmlns:a="http://schemas.openxmlformats.org/drawingml/2006/main" xmlns:r="http://schemas.openxmlformats.org/officeDocument/2006/relationships" xmlns:p="http://schemas.openxmlformats.org/presentationml/2006/main">
-  <p:cSld>
-    <p:bg>
-      <p:bgPr>
-        <a:solidFill>
-          <a:schemeClr val="bg1"/>
-        </a:solidFill>
-        <a:effectLst/>
-      </p:bgPr>
-    </p:bg>
-    <p:spTree>
-      <p:nvGrpSpPr>
-        <p:cNvPr id="1" name=""/>
-        <p:cNvGrpSpPr/>
-        <p:nvPr/>
-      </p:nvGrpSpPr>
-      <p:grpSpPr>
-        <a:xfrm>
-          <a:off x="0" y="0"/>
-          <a:ext cx="0" cy="0"/>
-          <a:chOff x="0" y="0"/>
-          <a:chExt cx="0" cy="0"/>
-        </a:xfrm>
-      </p:grpSpPr>
-      <p:sp>
-        <p:nvSpPr>
-          <p:cNvPr id="10" name="Title"/>
-          <p:cNvSpPr txBox="1"/>
-          <p:nvPr/>
-        </p:nvSpPr>
-        <p:spPr>
-          <a:xfrm>
-            <a:off x="457200" y="160000"/>
-            <a:ext cx="11277600" cy="750000"/>
-          </a:xfrm>
-          <a:prstGeom prst="rect">
-            <a:avLst/>
-          </a:prstGeom>
-          <a:noFill/>
-          <a:ln>
-            <a:noFill/>
-          </a:ln>
-        </p:spPr>
-        <p:txBody>
-          <a:bodyPr wrap="square" lIns="91440" tIns="45720" rIns="91440" bIns="45720" rtlCol="0" anchor="ctr"/>
-          <a:lstStyle/>
-          <a:p>
-            <a:pPr marL="0" indent="0" algn="l">
-              <a:buNone/>
-            </a:pPr>
-            <a:r>
-              <a:rPr lang="en-US" sz="2800" b="1" dirty="0">
-                <a:solidFill>
-                  <a:srgbClr val="0D7377"/>
-                </a:solidFill>
-                <a:latin typeface="Arial"/>
-                <a:cs typeface="Arial"/>
-              </a:rPr>
-              <a:t>7.1  |  30 minutes</a:t>
-            </a:r>
-          </a:p>
-        </p:txBody>
-      </p:sp>
-      <p:sp>
-        <p:nvSpPr>
-          <p:cNvPr id="11" name="Rule"/>
-          <p:cNvSpPr/>
-          <p:nvPr/>
-        </p:nvSpPr>
-        <p:spPr>
-          <a:xfrm>
-            <a:off x="457200" y="940000"/>
-            <a:ext cx="11277600" cy="0"/>
-          </a:xfrm>
-          <a:prstGeom prst="line">
-            <a:avLst/>
-          </a:prstGeom>
-          <a:ln w="19050">
-            <a:solidFill>
-              <a:srgbClr val="0D7377"/>
-            </a:solidFill>
-          </a:ln>
-        </p:spPr>
-        <p:txBody>
-          <a:bodyPr/>
-          <a:lstStyle/>
-          <a:p>
-            <a:endParaRPr/>
-          </a:p>
-        </p:txBody>
-      </p:sp>
-      <p:sp>
-        <p:nvSpPr>
-          <p:cNvPr id="20" name="Statement"/>
-          <p:cNvSpPr txBox="1"/>
-          <p:nvPr/>
-        </p:nvSpPr>
-        <p:spPr>
-          <a:xfrm>
-            <a:off x="1057200" y="1280000"/>
-            <a:ext cx="10077600" cy="4470000"/>
-          </a:xfrm>
-          <a:prstGeom prst="rect">
-            <a:avLst/>
-          </a:prstGeom>
-          <a:noFill/>
-          <a:ln>
-            <a:noFill/>
-          </a:ln>
-        </p:spPr>
-        <p:txBody>
-          <a:bodyPr wrap="square" lIns="91440" tIns="45720" rIns="91440" bIns="45720" rtlCol="0" anchor="ctr"/>
-          <a:lstStyle/>
-          <a:p>
-            <a:pPr marL="0" indent="0" algn="ctr">
-              <a:lnSpc>
-                <a:spcPct val="110000"/>
-              </a:lnSpc>
-              <a:buNone/>
-            </a:pPr>
-            <a:r>
-              <a:rPr lang="en-US" sz="3200" b="1" dirty="0">
-                <a:solidFill>
-                  <a:srgbClr val="0D7377"/>
-                </a:solidFill>
-                <a:latin typeface="Arial"/>
-                <a:cs typeface="Arial"/>
-              </a:rPr>
-              <a:t>Protocol, ethics and consent</a:t>
-            </a:r>
-          </a:p>
-          <a:p>
-            <a:pPr marL="0" indent="0" algn="ctr">
-              <a:spcBef>
-                <a:spcPts val="1200"/>
-              </a:spcBef>
-              <a:buNone/>
-            </a:pPr>
-            <a:r>
-              <a:rPr lang="en-US" sz="1900" i="1" dirty="0">
-                <a:solidFill>
-                  <a:srgbClr val="595959"/>
-                </a:solidFill>
-                <a:latin typeface="Arial"/>
-                <a:cs typeface="Arial"/>
-              </a:rPr>
-              <a:t>Protect the patient before the first data point</a:t>
-            </a:r>
-          </a:p>
-        </p:txBody>
-      </p:sp>
-      <p:sp>
-        <p:nvSpPr>
-          <p:cNvPr id="901" name="Footer"/>
-          <p:cNvSpPr txBox="1"/>
-          <p:nvPr/>
-        </p:nvSpPr>
-        <p:spPr>
-          <a:xfrm>
-            <a:off x="4599946" y="6458701"/>
-            <a:ext cx="2845651" cy="276999"/>
-          </a:xfrm>
-          <a:prstGeom prst="rect">
-            <a:avLst/>
-          </a:prstGeom>
-          <a:noFill/>
-          <a:ln>
-            <a:noFill/>
-          </a:ln>
-        </p:spPr>
-        <p:txBody>
-          <a:bodyPr wrap="none" lIns="91440" tIns="45720" rIns="91440" bIns="45720" rtlCol="0" anchor="t"/>
-          <a:lstStyle/>
-          <a:p>
-            <a:r>
-              <a:rPr lang="en-US" sz="1200" dirty="0">
-                <a:solidFill>
-                  <a:schemeClr val="accent5">
-                    <a:lumMod val="50000"/>
-                  </a:schemeClr>
-                </a:solidFill>
-                <a:latin typeface="Arial"/>
-              </a:rPr>
-              <a:t>Neudata | #ClearDataClearImpact</a:t>
-            </a:r>
-          </a:p>
-        </p:txBody>
-      </p:sp>
-      <p:pic>
-        <p:nvPicPr>
-          <p:cNvPr id="902" name="Logo"/>
-          <p:cNvPicPr>
-            <a:picLocks noChangeAspect="1"/>
-          </p:cNvPicPr>
-          <p:nvPr/>
-        </p:nvPicPr>
-        <p:blipFill>
-          <a:blip r:embed="rId3"/>
-          <a:stretch>
-            <a:fillRect/>
-          </a:stretch>
-        </p:blipFill>
-        <p:spPr>
-          <a:xfrm>
-            <a:off x="138853" y="6122125"/>
-            <a:ext cx="716763" cy="683623"/>
-          </a:xfrm>
-          <a:prstGeom prst="rect">
-            <a:avLst/>
-          </a:prstGeom>
-        </p:spPr>
-      </p:pic>
-      <p:sp>
-        <p:nvSpPr>
-          <p:cNvPr id="903" name="Slide Number"/>
-          <p:cNvSpPr>
-            <a:spLocks noGrp="1"/>
-          </p:cNvSpPr>
-          <p:nvPr>
-            <p:ph type="sldNum" sz="quarter" idx="12"/>
-          </p:nvPr>
-        </p:nvSpPr>
-        <p:spPr>
-          <a:xfrm>
-            <a:off x="11330000" y="6470000"/>
-            <a:ext cx="620000" cy="320000"/>
-          </a:xfrm>
-        </p:spPr>
-        <p:txBody>
-          <a:bodyPr/>
-          <a:lstStyle/>
-          <a:p>
-            <a:pPr algn="r"/>
-            <a:fld id="{C1FF6DA9-008F-8B48-92A6-B652298478BF}" type="slidenum">
-              <a:rPr lang="en-US" sz="1050" smtClean="0">
-                <a:solidFill>
-                  <a:schemeClr val="accent5">
-                    <a:lumMod val="50000"/>
-                  </a:schemeClr>
-                </a:solidFill>
-              </a:rPr>
-              <a:t>2</a:t>
-            </a:fld>
-            <a:endParaRPr lang="en-US"/>
-          </a:p>
-        </p:txBody>
-      </p:sp>
-    </p:spTree>
-  </p:cSld>
-  <p:clrMapOvr>
-    <a:masterClrMapping/>
-  </p:clrMapOvr>
-</p:sld>
-</file>
-
-<file path=ppt/slides/slide40.xml><?xml version="1.0" encoding="utf-8"?>
+<file path=ppt/slides/slide41.xml><?xml version="1.0" encoding="utf-8"?>
 <p:sld xmlns:a="http://schemas.openxmlformats.org/drawingml/2006/main" xmlns:r="http://schemas.openxmlformats.org/officeDocument/2006/relationships" xmlns:p="http://schemas.openxmlformats.org/presentationml/2006/main">
   <p:cSld>
     <p:bg>
@@ -27169,7 +27450,7 @@
                           <a:latin typeface="Arial"/>
                           <a:cs typeface="Arial"/>
                         </a:rPr>
-                        <a:t>23:59, Saturday 19 December (Session 8)</a:t>
+                        <a:t>23:59, Sunday 20 December</a:t>
                       </a:r>
                     </a:p>
                   </a:txBody>
@@ -27219,7 +27500,7 @@
                           <a:latin typeface="Arial"/>
                           <a:cs typeface="Arial"/>
                         </a:rPr>
-                        <a:t>Saturday 2 January</a:t>
+                        <a:t>Wednesday 30 December</a:t>
                       </a:r>
                     </a:p>
                   </a:txBody>
@@ -27269,7 +27550,7 @@
                           <a:latin typeface="Arial"/>
                           <a:cs typeface="Arial"/>
                         </a:rPr>
-                        <a:t>Saturday 30 January</a:t>
+                        <a:t>Saturday 9 January 2027</a:t>
                       </a:r>
                     </a:p>
                   </a:txBody>
@@ -27451,559 +27732,6 @@
 </p:sld>
 </file>
 
-<file path=ppt/slides/slide41.xml><?xml version="1.0" encoding="utf-8"?>
-<p:sld xmlns:a="http://schemas.openxmlformats.org/drawingml/2006/main" xmlns:r="http://schemas.openxmlformats.org/officeDocument/2006/relationships" xmlns:p="http://schemas.openxmlformats.org/presentationml/2006/main">
-  <p:cSld>
-    <p:bg>
-      <p:bgPr>
-        <a:solidFill>
-          <a:schemeClr val="bg1"/>
-        </a:solidFill>
-        <a:effectLst/>
-      </p:bgPr>
-    </p:bg>
-    <p:spTree>
-      <p:nvGrpSpPr>
-        <p:cNvPr id="1" name=""/>
-        <p:cNvGrpSpPr/>
-        <p:nvPr/>
-      </p:nvGrpSpPr>
-      <p:grpSpPr>
-        <a:xfrm>
-          <a:off x="0" y="0"/>
-          <a:ext cx="0" cy="0"/>
-          <a:chOff x="0" y="0"/>
-          <a:chExt cx="0" cy="0"/>
-        </a:xfrm>
-      </p:grpSpPr>
-      <p:sp>
-        <p:nvSpPr>
-          <p:cNvPr id="10" name="Title"/>
-          <p:cNvSpPr txBox="1"/>
-          <p:nvPr/>
-        </p:nvSpPr>
-        <p:spPr>
-          <a:xfrm>
-            <a:off x="457200" y="160000"/>
-            <a:ext cx="11277600" cy="750000"/>
-          </a:xfrm>
-          <a:prstGeom prst="rect">
-            <a:avLst/>
-          </a:prstGeom>
-          <a:noFill/>
-          <a:ln>
-            <a:noFill/>
-          </a:ln>
-        </p:spPr>
-        <p:txBody>
-          <a:bodyPr wrap="square" lIns="91440" tIns="45720" rIns="91440" bIns="45720" rtlCol="0" anchor="ctr"/>
-          <a:lstStyle/>
-          <a:p>
-            <a:pPr marL="0" indent="0" algn="l">
-              <a:buNone/>
-            </a:pPr>
-            <a:r>
-              <a:rPr lang="en-US" sz="2800" b="1" dirty="0">
-                <a:solidFill>
-                  <a:srgbClr val="0D7377"/>
-                </a:solidFill>
-                <a:latin typeface="Arial"/>
-                <a:cs typeface="Arial"/>
-              </a:rPr>
-              <a:t>Wrap-up, exit question and homework</a:t>
-            </a:r>
-          </a:p>
-        </p:txBody>
-      </p:sp>
-      <p:sp>
-        <p:nvSpPr>
-          <p:cNvPr id="11" name="Rule"/>
-          <p:cNvSpPr/>
-          <p:nvPr/>
-        </p:nvSpPr>
-        <p:spPr>
-          <a:xfrm>
-            <a:off x="457200" y="940000"/>
-            <a:ext cx="11277600" cy="0"/>
-          </a:xfrm>
-          <a:prstGeom prst="line">
-            <a:avLst/>
-          </a:prstGeom>
-          <a:ln w="19050">
-            <a:solidFill>
-              <a:srgbClr val="0D7377"/>
-            </a:solidFill>
-          </a:ln>
-        </p:spPr>
-        <p:txBody>
-          <a:bodyPr/>
-          <a:lstStyle/>
-          <a:p>
-            <a:endParaRPr/>
-          </a:p>
-        </p:txBody>
-      </p:sp>
-      <p:sp>
-        <p:nvSpPr>
-          <p:cNvPr id="50" name="Banner"/>
-          <p:cNvSpPr/>
-          <p:nvPr/>
-        </p:nvSpPr>
-        <p:spPr>
-          <a:xfrm>
-            <a:off x="457200" y="1120000"/>
-            <a:ext cx="11277600" cy="470000"/>
-          </a:xfrm>
-          <a:prstGeom prst="rect">
-            <a:avLst/>
-          </a:prstGeom>
-          <a:solidFill>
-            <a:srgbClr val="1F5C7A"/>
-          </a:solidFill>
-          <a:ln>
-            <a:noFill/>
-          </a:ln>
-        </p:spPr>
-        <p:txBody>
-          <a:bodyPr wrap="square" lIns="182880" tIns="45720" rIns="182880" bIns="45720" rtlCol="0" anchor="ctr">
-            <a:normAutofit/>
-          </a:bodyPr>
-          <a:lstStyle/>
-          <a:p>
-            <a:pPr marL="0" indent="0" algn="l">
-              <a:buNone/>
-            </a:pPr>
-            <a:r>
-              <a:rPr lang="en-US" sz="1500" b="1" dirty="0">
-                <a:solidFill>
-                  <a:srgbClr val="FFFFFF"/>
-                </a:solidFill>
-                <a:latin typeface="Arial"/>
-                <a:cs typeface="Arial"/>
-              </a:rPr>
-              <a:t>DISCUSSION   |   7 min</a:t>
-            </a:r>
-          </a:p>
-        </p:txBody>
-      </p:sp>
-      <p:sp>
-        <p:nvSpPr>
-          <p:cNvPr id="51" name="Steps"/>
-          <p:cNvSpPr txBox="1"/>
-          <p:nvPr/>
-        </p:nvSpPr>
-        <p:spPr>
-          <a:xfrm>
-            <a:off x="457200" y="1720000"/>
-            <a:ext cx="6766560" cy="3510000"/>
-          </a:xfrm>
-          <a:prstGeom prst="rect">
-            <a:avLst/>
-          </a:prstGeom>
-          <a:noFill/>
-          <a:ln>
-            <a:noFill/>
-          </a:ln>
-        </p:spPr>
-        <p:txBody>
-          <a:bodyPr wrap="square" lIns="91440" tIns="45720" rIns="91440" bIns="45720" rtlCol="0" anchor="t"/>
-          <a:lstStyle/>
-          <a:p>
-            <a:pPr marL="380000" indent="-380000" algn="l">
-              <a:lnSpc>
-                <a:spcPct val="104000"/>
-              </a:lnSpc>
-              <a:spcBef>
-                <a:spcPts val="450"/>
-              </a:spcBef>
-              <a:buClr>
-                <a:srgbClr val="1F5C7A"/>
-              </a:buClr>
-              <a:buFont typeface="Arial"/>
-              <a:buChar char="•"/>
-            </a:pPr>
-            <a:r>
-              <a:rPr lang="en-US" sz="1650" dirty="0">
-                <a:solidFill>
-                  <a:srgbClr val="000000"/>
-                </a:solidFill>
-                <a:latin typeface="Arial"/>
-                <a:cs typeface="Arial"/>
-              </a:rPr>
-              <a:t>Three take-home messages (right)</a:t>
-            </a:r>
-          </a:p>
-          <a:p>
-            <a:pPr marL="380000" indent="-380000" algn="l">
-              <a:lnSpc>
-                <a:spcPct val="104000"/>
-              </a:lnSpc>
-              <a:spcBef>
-                <a:spcPts val="450"/>
-              </a:spcBef>
-              <a:buClr>
-                <a:srgbClr val="1F5C7A"/>
-              </a:buClr>
-              <a:buFont typeface="Arial"/>
-              <a:buChar char="•"/>
-            </a:pPr>
-            <a:r>
-              <a:rPr lang="en-US" sz="1650" dirty="0">
-                <a:solidFill>
-                  <a:srgbClr val="000000"/>
-                </a:solidFill>
-                <a:latin typeface="Arial"/>
-                <a:cs typeface="Arial"/>
-              </a:rPr>
-              <a:t>Exit question in the chat: 'Who consents for a sedated patient in septic shock, and when?'</a:t>
-            </a:r>
-          </a:p>
-          <a:p>
-            <a:pPr marL="380000" indent="-380000" algn="l">
-              <a:lnSpc>
-                <a:spcPct val="104000"/>
-              </a:lnSpc>
-              <a:spcBef>
-                <a:spcPts val="450"/>
-              </a:spcBef>
-              <a:buClr>
-                <a:srgbClr val="1F5C7A"/>
-              </a:buClr>
-              <a:buFont typeface="Arial"/>
-              <a:buChar char="•"/>
-            </a:pPr>
-            <a:r>
-              <a:rPr lang="en-US" sz="1650" dirty="0">
-                <a:solidFill>
-                  <a:srgbClr val="000000"/>
-                </a:solidFill>
-                <a:latin typeface="Arial"/>
-                <a:cs typeface="Arial"/>
-              </a:rPr>
-              <a:t>Homework 1: write Part 4 of your own proposal</a:t>
-            </a:r>
-          </a:p>
-          <a:p>
-            <a:pPr marL="380000" indent="-380000" algn="l">
-              <a:lnSpc>
-                <a:spcPct val="104000"/>
-              </a:lnSpc>
-              <a:spcBef>
-                <a:spcPts val="450"/>
-              </a:spcBef>
-              <a:buClr>
-                <a:srgbClr val="1F5C7A"/>
-              </a:buClr>
-              <a:buFont typeface="Arial"/>
-              <a:buChar char="•"/>
-            </a:pPr>
-            <a:r>
-              <a:rPr lang="en-US" sz="1650" dirty="0">
-                <a:solidFill>
-                  <a:srgbClr val="000000"/>
-                </a:solidFill>
-                <a:latin typeface="Arial"/>
-                <a:cs typeface="Arial"/>
-              </a:rPr>
-              <a:t>Homework 2: write your Results section (due 23:59 on the day of Session 8)</a:t>
-            </a:r>
-          </a:p>
-          <a:p>
-            <a:pPr marL="380000" indent="-380000" algn="l">
-              <a:lnSpc>
-                <a:spcPct val="104000"/>
-              </a:lnSpc>
-              <a:spcBef>
-                <a:spcPts val="450"/>
-              </a:spcBef>
-              <a:buClr>
-                <a:srgbClr val="1F5C7A"/>
-              </a:buClr>
-              <a:buFont typeface="Arial"/>
-              <a:buChar char="•"/>
-            </a:pPr>
-            <a:r>
-              <a:rPr lang="en-US" sz="1650" dirty="0">
-                <a:solidFill>
-                  <a:srgbClr val="000000"/>
-                </a:solidFill>
-                <a:latin typeface="Arial"/>
-                <a:cs typeface="Arial"/>
-              </a:rPr>
-              <a:t>Homework 3: prepare your 6 presentation slides (everyone submits them)</a:t>
-            </a:r>
-          </a:p>
-        </p:txBody>
-      </p:sp>
-      <p:sp>
-        <p:nvSpPr>
-          <p:cNvPr id="52" name="Side"/>
-          <p:cNvSpPr/>
-          <p:nvPr/>
-        </p:nvSpPr>
-        <p:spPr>
-          <a:xfrm>
-            <a:off x="7423760" y="1720000"/>
-            <a:ext cx="4311040" cy="1929905"/>
-          </a:xfrm>
-          <a:prstGeom prst="roundRect">
-            <a:avLst>
-              <a:gd name="adj" fmla="val 5000"/>
-            </a:avLst>
-          </a:prstGeom>
-          <a:solidFill>
-            <a:srgbClr val="EAF2F5"/>
-          </a:solidFill>
-          <a:ln>
-            <a:noFill/>
-          </a:ln>
-        </p:spPr>
-        <p:txBody>
-          <a:bodyPr wrap="square" lIns="137160" tIns="91440" rIns="137160" bIns="91440" rtlCol="0" anchor="ctr">
-            <a:normAutofit/>
-          </a:bodyPr>
-          <a:lstStyle/>
-          <a:p>
-            <a:pPr marL="0" indent="0" algn="ctr">
-              <a:buNone/>
-            </a:pPr>
-            <a:r>
-              <a:rPr lang="en-US" sz="1600" b="1" dirty="0">
-                <a:solidFill>
-                  <a:srgbClr val="1F5C7A"/>
-                </a:solidFill>
-                <a:latin typeface="Arial"/>
-                <a:cs typeface="Arial"/>
-              </a:rPr>
-              <a:t>Take home</a:t>
-            </a:r>
-          </a:p>
-          <a:p>
-            <a:pPr marL="0" indent="0" algn="ctr">
-              <a:lnSpc>
-                <a:spcPct val="104000"/>
-              </a:lnSpc>
-              <a:spcBef>
-                <a:spcPts val="300"/>
-              </a:spcBef>
-              <a:buNone/>
-            </a:pPr>
-            <a:r>
-              <a:rPr lang="en-US" sz="1500" dirty="0">
-                <a:solidFill>
-                  <a:srgbClr val="000000"/>
-                </a:solidFill>
-                <a:latin typeface="Arial"/>
-                <a:cs typeface="Arial"/>
-              </a:rPr>
-              <a:t>No approval, no data: not even 'a few patients'</a:t>
-            </a:r>
-          </a:p>
-          <a:p>
-            <a:pPr marL="0" indent="0" algn="ctr">
-              <a:lnSpc>
-                <a:spcPct val="104000"/>
-              </a:lnSpc>
-              <a:spcBef>
-                <a:spcPts val="300"/>
-              </a:spcBef>
-              <a:buNone/>
-            </a:pPr>
-            <a:r>
-              <a:rPr lang="en-US" sz="1500" dirty="0">
-                <a:solidFill>
-                  <a:srgbClr val="000000"/>
-                </a:solidFill>
-                <a:latin typeface="Arial"/>
-                <a:cs typeface="Arial"/>
-              </a:rPr>
-              <a:t>Every author meets all four criteria. Declare every interest</a:t>
-            </a:r>
-          </a:p>
-          <a:p>
-            <a:pPr marL="0" indent="0" algn="ctr">
-              <a:lnSpc>
-                <a:spcPct val="104000"/>
-              </a:lnSpc>
-              <a:spcBef>
-                <a:spcPts val="300"/>
-              </a:spcBef>
-              <a:buNone/>
-            </a:pPr>
-            <a:r>
-              <a:rPr lang="en-US" sz="1500" dirty="0">
-                <a:solidFill>
-                  <a:srgbClr val="000000"/>
-                </a:solidFill>
-                <a:latin typeface="Arial"/>
-                <a:cs typeface="Arial"/>
-              </a:rPr>
-              <a:t>Results = numbers with CIs, no opinions</a:t>
-            </a:r>
-          </a:p>
-        </p:txBody>
-      </p:sp>
-      <p:sp>
-        <p:nvSpPr>
-          <p:cNvPr id="53" name="Deliverable"/>
-          <p:cNvSpPr/>
-          <p:nvPr/>
-        </p:nvSpPr>
-        <p:spPr>
-          <a:xfrm>
-            <a:off x="457200" y="5350000"/>
-            <a:ext cx="11277600" cy="600000"/>
-          </a:xfrm>
-          <a:prstGeom prst="roundRect">
-            <a:avLst>
-              <a:gd name="adj" fmla="val 12000"/>
-            </a:avLst>
-          </a:prstGeom>
-          <a:solidFill>
-            <a:srgbClr val="FFFFFF"/>
-          </a:solidFill>
-          <a:ln w="15875">
-            <a:solidFill>
-              <a:srgbClr val="1F5C7A"/>
-            </a:solidFill>
-          </a:ln>
-        </p:spPr>
-        <p:txBody>
-          <a:bodyPr wrap="square" lIns="182880" tIns="45720" rIns="182880" bIns="45720" rtlCol="0" anchor="ctr">
-            <a:normAutofit/>
-          </a:bodyPr>
-          <a:lstStyle/>
-          <a:p>
-            <a:pPr marL="0" indent="0" algn="ctr">
-              <a:buNone/>
-            </a:pPr>
-            <a:r>
-              <a:rPr lang="en-US" sz="1300" b="1" dirty="0">
-                <a:solidFill>
-                  <a:srgbClr val="1F5C7A"/>
-                </a:solidFill>
-                <a:latin typeface="Arial"/>
-                <a:cs typeface="Arial"/>
-              </a:rPr>
-              <a:t>OUTPUT   </a:t>
-            </a:r>
-            <a:r>
-              <a:rPr lang="en-US" sz="1500" dirty="0">
-                <a:solidFill>
-                  <a:srgbClr val="000000"/>
-                </a:solidFill>
-                <a:latin typeface="Arial"/>
-                <a:cs typeface="Arial"/>
-              </a:rPr>
-              <a:t>Exit answers read before Session 8. Part 4 and the Results drafted</a:t>
-            </a:r>
-          </a:p>
-        </p:txBody>
-      </p:sp>
-      <p:sp>
-        <p:nvSpPr>
-          <p:cNvPr id="901" name="Footer"/>
-          <p:cNvSpPr txBox="1"/>
-          <p:nvPr/>
-        </p:nvSpPr>
-        <p:spPr>
-          <a:xfrm>
-            <a:off x="4599946" y="6458701"/>
-            <a:ext cx="2845651" cy="276999"/>
-          </a:xfrm>
-          <a:prstGeom prst="rect">
-            <a:avLst/>
-          </a:prstGeom>
-          <a:noFill/>
-          <a:ln>
-            <a:noFill/>
-          </a:ln>
-        </p:spPr>
-        <p:txBody>
-          <a:bodyPr wrap="none" lIns="91440" tIns="45720" rIns="91440" bIns="45720" rtlCol="0" anchor="t"/>
-          <a:lstStyle/>
-          <a:p>
-            <a:r>
-              <a:rPr lang="en-US" sz="1200" dirty="0">
-                <a:solidFill>
-                  <a:schemeClr val="accent5">
-                    <a:lumMod val="50000"/>
-                  </a:schemeClr>
-                </a:solidFill>
-                <a:latin typeface="Arial"/>
-              </a:rPr>
-              <a:t>Neudata | #ClearDataClearImpact</a:t>
-            </a:r>
-          </a:p>
-        </p:txBody>
-      </p:sp>
-      <p:pic>
-        <p:nvPicPr>
-          <p:cNvPr id="902" name="Logo"/>
-          <p:cNvPicPr>
-            <a:picLocks noChangeAspect="1"/>
-          </p:cNvPicPr>
-          <p:nvPr/>
-        </p:nvPicPr>
-        <p:blipFill>
-          <a:blip r:embed="rId3"/>
-          <a:stretch>
-            <a:fillRect/>
-          </a:stretch>
-        </p:blipFill>
-        <p:spPr>
-          <a:xfrm>
-            <a:off x="138853" y="6122125"/>
-            <a:ext cx="716763" cy="683623"/>
-          </a:xfrm>
-          <a:prstGeom prst="rect">
-            <a:avLst/>
-          </a:prstGeom>
-        </p:spPr>
-      </p:pic>
-      <p:sp>
-        <p:nvSpPr>
-          <p:cNvPr id="903" name="Slide Number"/>
-          <p:cNvSpPr>
-            <a:spLocks noGrp="1"/>
-          </p:cNvSpPr>
-          <p:nvPr>
-            <p:ph type="sldNum" sz="quarter" idx="12"/>
-          </p:nvPr>
-        </p:nvSpPr>
-        <p:spPr>
-          <a:xfrm>
-            <a:off x="11330000" y="6470000"/>
-            <a:ext cx="620000" cy="320000"/>
-          </a:xfrm>
-        </p:spPr>
-        <p:txBody>
-          <a:bodyPr/>
-          <a:lstStyle/>
-          <a:p>
-            <a:pPr algn="r"/>
-            <a:fld id="{C1FF6DA9-008F-8B48-92A6-B652298478BF}" type="slidenum">
-              <a:rPr lang="en-US" sz="1050" smtClean="0">
-                <a:solidFill>
-                  <a:schemeClr val="accent5">
-                    <a:lumMod val="50000"/>
-                  </a:schemeClr>
-                </a:solidFill>
-              </a:rPr>
-              <a:t>2</a:t>
-            </a:fld>
-            <a:endParaRPr lang="en-US"/>
-          </a:p>
-        </p:txBody>
-      </p:sp>
-    </p:spTree>
-  </p:cSld>
-  <p:clrMapOvr>
-    <a:masterClrMapping/>
-  </p:clrMapOvr>
-</p:sld>
-</file>
-
 <file path=ppt/slides/slide42.xml><?xml version="1.0" encoding="utf-8"?>
 <p:sld xmlns:a="http://schemas.openxmlformats.org/drawingml/2006/main" xmlns:r="http://schemas.openxmlformats.org/officeDocument/2006/relationships" xmlns:p="http://schemas.openxmlformats.org/presentationml/2006/main">
   <p:cSld>
@@ -28063,7 +27791,7 @@
                 <a:latin typeface="Arial"/>
                 <a:cs typeface="Arial"/>
               </a:rPr>
-              <a:t>Extra slides  |  Session 7</a:t>
+              <a:t>Wrap-up, exit question and homework</a:t>
             </a:r>
           </a:p>
         </p:txBody>
@@ -28098,14 +27826,57 @@
       </p:sp>
       <p:sp>
         <p:nvSpPr>
-          <p:cNvPr id="20" name="Statement"/>
+          <p:cNvPr id="50" name="Banner"/>
+          <p:cNvSpPr/>
+          <p:nvPr/>
+        </p:nvSpPr>
+        <p:spPr>
+          <a:xfrm>
+            <a:off x="457200" y="1120000"/>
+            <a:ext cx="11277600" cy="470000"/>
+          </a:xfrm>
+          <a:prstGeom prst="rect">
+            <a:avLst/>
+          </a:prstGeom>
+          <a:solidFill>
+            <a:srgbClr val="1F5C7A"/>
+          </a:solidFill>
+          <a:ln>
+            <a:noFill/>
+          </a:ln>
+        </p:spPr>
+        <p:txBody>
+          <a:bodyPr wrap="square" lIns="182880" tIns="45720" rIns="182880" bIns="45720" rtlCol="0" anchor="ctr">
+            <a:normAutofit/>
+          </a:bodyPr>
+          <a:lstStyle/>
+          <a:p>
+            <a:pPr marL="0" indent="0" algn="l">
+              <a:buNone/>
+            </a:pPr>
+            <a:r>
+              <a:rPr lang="en-US" sz="1500" b="1" dirty="0">
+                <a:solidFill>
+                  <a:srgbClr val="FFFFFF"/>
+                </a:solidFill>
+                <a:latin typeface="Arial"/>
+                <a:cs typeface="Arial"/>
+              </a:rPr>
+              <a:t>DISCUSSION   |   6 min</a:t>
+            </a:r>
+          </a:p>
+        </p:txBody>
+      </p:sp>
+      <p:sp>
+        <p:nvSpPr>
+          <p:cNvPr id="51" name="Steps"/>
           <p:cNvSpPr txBox="1"/>
           <p:nvPr/>
         </p:nvSpPr>
         <p:spPr>
           <a:xfrm>
-            <a:off x="1057200" y="1280000"/>
-            <a:ext cx="10077600" cy="4470000"/>
+            <a:off x="457200" y="1720000"/>
+            <a:ext cx="6766560" cy="3510000"/>
           </a:xfrm>
           <a:prstGeom prst="rect">
             <a:avLst/>
@@ -28116,42 +27887,296 @@
           </a:ln>
         </p:spPr>
         <p:txBody>
-          <a:bodyPr wrap="square" lIns="91440" tIns="45720" rIns="91440" bIns="45720" rtlCol="0" anchor="ctr"/>
-          <a:lstStyle/>
+          <a:bodyPr wrap="square" lIns="91440" tIns="45720" rIns="91440" bIns="45720" rtlCol="0" anchor="t"/>
+          <a:lstStyle/>
+          <a:p>
+            <a:pPr marL="380000" indent="-380000" algn="l">
+              <a:lnSpc>
+                <a:spcPct val="104000"/>
+              </a:lnSpc>
+              <a:spcBef>
+                <a:spcPts val="450"/>
+              </a:spcBef>
+              <a:buClr>
+                <a:srgbClr val="1F5C7A"/>
+              </a:buClr>
+              <a:buFont typeface="Arial"/>
+              <a:buChar char="•"/>
+            </a:pPr>
+            <a:r>
+              <a:rPr lang="en-US" sz="1650" dirty="0">
+                <a:solidFill>
+                  <a:srgbClr val="000000"/>
+                </a:solidFill>
+                <a:latin typeface="Arial"/>
+                <a:cs typeface="Arial"/>
+              </a:rPr>
+              <a:t>Three take-home messages (right)</a:t>
+            </a:r>
+          </a:p>
+          <a:p>
+            <a:pPr marL="380000" indent="-380000" algn="l">
+              <a:lnSpc>
+                <a:spcPct val="104000"/>
+              </a:lnSpc>
+              <a:spcBef>
+                <a:spcPts val="450"/>
+              </a:spcBef>
+              <a:buClr>
+                <a:srgbClr val="1F5C7A"/>
+              </a:buClr>
+              <a:buFont typeface="Arial"/>
+              <a:buChar char="•"/>
+            </a:pPr>
+            <a:r>
+              <a:rPr lang="en-US" sz="1650" dirty="0">
+                <a:solidFill>
+                  <a:srgbClr val="000000"/>
+                </a:solidFill>
+                <a:latin typeface="Arial"/>
+                <a:cs typeface="Arial"/>
+              </a:rPr>
+              <a:t>Exit question in the chat: 'Who consents for a sedated patient in septic shock, and when?'</a:t>
+            </a:r>
+          </a:p>
+          <a:p>
+            <a:pPr marL="380000" indent="-380000" algn="l">
+              <a:lnSpc>
+                <a:spcPct val="104000"/>
+              </a:lnSpc>
+              <a:spcBef>
+                <a:spcPts val="450"/>
+              </a:spcBef>
+              <a:buClr>
+                <a:srgbClr val="1F5C7A"/>
+              </a:buClr>
+              <a:buFont typeface="Arial"/>
+              <a:buChar char="•"/>
+            </a:pPr>
+            <a:r>
+              <a:rPr lang="en-US" sz="1650" dirty="0">
+                <a:solidFill>
+                  <a:srgbClr val="000000"/>
+                </a:solidFill>
+                <a:latin typeface="Arial"/>
+                <a:cs typeface="Arial"/>
+              </a:rPr>
+              <a:t>Homework 1: write Part 4 of your own proposal</a:t>
+            </a:r>
+          </a:p>
+          <a:p>
+            <a:pPr marL="380000" indent="-380000" algn="l">
+              <a:lnSpc>
+                <a:spcPct val="104000"/>
+              </a:lnSpc>
+              <a:spcBef>
+                <a:spcPts val="450"/>
+              </a:spcBef>
+              <a:buClr>
+                <a:srgbClr val="1F5C7A"/>
+              </a:buClr>
+              <a:buFont typeface="Arial"/>
+              <a:buChar char="•"/>
+            </a:pPr>
+            <a:r>
+              <a:rPr lang="en-US" sz="1650" dirty="0">
+                <a:solidFill>
+                  <a:srgbClr val="000000"/>
+                </a:solidFill>
+                <a:latin typeface="Arial"/>
+                <a:cs typeface="Arial"/>
+              </a:rPr>
+              <a:t>Homework 2: write your Results section (due 23:59, Sunday 20 December)</a:t>
+            </a:r>
+          </a:p>
+          <a:p>
+            <a:pPr marL="380000" indent="-380000" algn="l">
+              <a:lnSpc>
+                <a:spcPct val="104000"/>
+              </a:lnSpc>
+              <a:spcBef>
+                <a:spcPts val="450"/>
+              </a:spcBef>
+              <a:buClr>
+                <a:srgbClr val="1F5C7A"/>
+              </a:buClr>
+              <a:buFont typeface="Arial"/>
+              <a:buChar char="•"/>
+            </a:pPr>
+            <a:r>
+              <a:rPr lang="en-US" sz="1650" dirty="0">
+                <a:solidFill>
+                  <a:srgbClr val="000000"/>
+                </a:solidFill>
+                <a:latin typeface="Arial"/>
+                <a:cs typeface="Arial"/>
+              </a:rPr>
+              <a:t>Homework 3: prepare your 6 presentation slides (everyone submits them)</a:t>
+            </a:r>
+          </a:p>
+        </p:txBody>
+      </p:sp>
+      <p:sp>
+        <p:nvSpPr>
+          <p:cNvPr id="52" name="Side"/>
+          <p:cNvSpPr/>
+          <p:nvPr/>
+        </p:nvSpPr>
+        <p:spPr>
+          <a:xfrm>
+            <a:off x="7423760" y="1720000"/>
+            <a:ext cx="4311040" cy="1929905"/>
+          </a:xfrm>
+          <a:prstGeom prst="roundRect">
+            <a:avLst>
+              <a:gd name="adj" fmla="val 5000"/>
+            </a:avLst>
+          </a:prstGeom>
+          <a:solidFill>
+            <a:srgbClr val="EAF2F5"/>
+          </a:solidFill>
+          <a:ln>
+            <a:noFill/>
+          </a:ln>
+        </p:spPr>
+        <p:txBody>
+          <a:bodyPr wrap="square" lIns="137160" tIns="91440" rIns="137160" bIns="91440" rtlCol="0" anchor="ctr">
+            <a:normAutofit/>
+          </a:bodyPr>
+          <a:lstStyle/>
+          <a:p>
+            <a:pPr marL="0" indent="0" algn="ctr">
+              <a:buNone/>
+            </a:pPr>
+            <a:r>
+              <a:rPr lang="en-US" sz="1600" b="1" dirty="0">
+                <a:solidFill>
+                  <a:srgbClr val="1F5C7A"/>
+                </a:solidFill>
+                <a:latin typeface="Arial"/>
+                <a:cs typeface="Arial"/>
+              </a:rPr>
+              <a:t>Take home</a:t>
+            </a:r>
+          </a:p>
           <a:p>
             <a:pPr marL="0" indent="0" algn="ctr">
               <a:lnSpc>
-                <a:spcPct val="110000"/>
+                <a:spcPct val="104000"/>
               </a:lnSpc>
-              <a:buNone/>
-            </a:pPr>
-            <a:r>
-              <a:rPr lang="en-US" sz="3200" b="1" dirty="0">
-                <a:solidFill>
-                  <a:srgbClr val="0D7377"/>
-                </a:solidFill>
-                <a:latin typeface="Arial"/>
-                <a:cs typeface="Arial"/>
-              </a:rPr>
-              <a:t>Extra slides: Session 7</a:t>
+              <a:spcBef>
+                <a:spcPts val="300"/>
+              </a:spcBef>
+              <a:buNone/>
+            </a:pPr>
+            <a:r>
+              <a:rPr lang="en-US" sz="1500" dirty="0">
+                <a:solidFill>
+                  <a:srgbClr val="000000"/>
+                </a:solidFill>
+                <a:latin typeface="Arial"/>
+                <a:cs typeface="Arial"/>
+              </a:rPr>
+              <a:t>No approval, no data: not even 'a few patients'</a:t>
             </a:r>
           </a:p>
           <a:p>
             <a:pPr marL="0" indent="0" algn="ctr">
+              <a:lnSpc>
+                <a:spcPct val="104000"/>
+              </a:lnSpc>
               <a:spcBef>
-                <a:spcPts val="1200"/>
+                <a:spcPts val="300"/>
               </a:spcBef>
               <a:buNone/>
             </a:pPr>
             <a:r>
-              <a:rPr lang="en-US" sz="1900" i="1" dirty="0">
-                <a:solidFill>
-                  <a:srgbClr val="595959"/>
-                </a:solidFill>
-                <a:latin typeface="Arial"/>
-                <a:cs typeface="Arial"/>
-              </a:rPr>
-              <a:t>Use only if time allows, or for self-study</a:t>
+              <a:rPr lang="en-US" sz="1500" dirty="0">
+                <a:solidFill>
+                  <a:srgbClr val="000000"/>
+                </a:solidFill>
+                <a:latin typeface="Arial"/>
+                <a:cs typeface="Arial"/>
+              </a:rPr>
+              <a:t>Every author meets all four criteria. Declare every interest</a:t>
+            </a:r>
+          </a:p>
+          <a:p>
+            <a:pPr marL="0" indent="0" algn="ctr">
+              <a:lnSpc>
+                <a:spcPct val="104000"/>
+              </a:lnSpc>
+              <a:spcBef>
+                <a:spcPts val="300"/>
+              </a:spcBef>
+              <a:buNone/>
+            </a:pPr>
+            <a:r>
+              <a:rPr lang="en-US" sz="1500" dirty="0">
+                <a:solidFill>
+                  <a:srgbClr val="000000"/>
+                </a:solidFill>
+                <a:latin typeface="Arial"/>
+                <a:cs typeface="Arial"/>
+              </a:rPr>
+              <a:t>Results = numbers with CIs, no opinions</a:t>
+            </a:r>
+          </a:p>
+        </p:txBody>
+      </p:sp>
+      <p:sp>
+        <p:nvSpPr>
+          <p:cNvPr id="53" name="Deliverable"/>
+          <p:cNvSpPr/>
+          <p:nvPr/>
+        </p:nvSpPr>
+        <p:spPr>
+          <a:xfrm>
+            <a:off x="457200" y="5350000"/>
+            <a:ext cx="11277600" cy="600000"/>
+          </a:xfrm>
+          <a:prstGeom prst="roundRect">
+            <a:avLst>
+              <a:gd name="adj" fmla="val 12000"/>
+            </a:avLst>
+          </a:prstGeom>
+          <a:solidFill>
+            <a:srgbClr val="FFFFFF"/>
+          </a:solidFill>
+          <a:ln w="15875">
+            <a:solidFill>
+              <a:srgbClr val="1F5C7A"/>
+            </a:solidFill>
+          </a:ln>
+        </p:spPr>
+        <p:txBody>
+          <a:bodyPr wrap="square" lIns="182880" tIns="45720" rIns="182880" bIns="45720" rtlCol="0" anchor="ctr">
+            <a:normAutofit/>
+          </a:bodyPr>
+          <a:lstStyle/>
+          <a:p>
+            <a:pPr marL="0" indent="0" algn="ctr">
+              <a:buNone/>
+            </a:pPr>
+            <a:r>
+              <a:rPr lang="en-US" sz="1300" b="1" dirty="0">
+                <a:solidFill>
+                  <a:srgbClr val="1F5C7A"/>
+                </a:solidFill>
+                <a:latin typeface="Arial"/>
+                <a:cs typeface="Arial"/>
+              </a:rPr>
+              <a:t>OUTPUT   </a:t>
+            </a:r>
+            <a:r>
+              <a:rPr lang="en-US" sz="1500" dirty="0">
+                <a:solidFill>
+                  <a:srgbClr val="000000"/>
+                </a:solidFill>
+                <a:latin typeface="Arial"/>
+                <a:cs typeface="Arial"/>
+              </a:rPr>
+              <a:t>Exit answers read before Session 8. Part 4 and the Results drafted</a:t>
             </a:r>
           </a:p>
         </p:txBody>
@@ -28319,7 +28344,7 @@
                 <a:latin typeface="Arial"/>
                 <a:cs typeface="Arial"/>
               </a:rPr>
-              <a:t>Check: register or not?</a:t>
+              <a:t>Extra slides  |  Session 7</a:t>
             </a:r>
           </a:p>
         </p:txBody>
@@ -28354,57 +28379,14 @@
       </p:sp>
       <p:sp>
         <p:nvSpPr>
-          <p:cNvPr id="50" name="Banner"/>
-          <p:cNvSpPr/>
-          <p:nvPr/>
-        </p:nvSpPr>
-        <p:spPr>
-          <a:xfrm>
-            <a:off x="457200" y="1120000"/>
-            <a:ext cx="11277600" cy="470000"/>
-          </a:xfrm>
-          <a:prstGeom prst="rect">
-            <a:avLst/>
-          </a:prstGeom>
-          <a:solidFill>
-            <a:srgbClr val="6C3483"/>
-          </a:solidFill>
-          <a:ln>
-            <a:noFill/>
-          </a:ln>
-        </p:spPr>
-        <p:txBody>
-          <a:bodyPr wrap="square" lIns="182880" tIns="45720" rIns="182880" bIns="45720" rtlCol="0" anchor="ctr">
-            <a:normAutofit/>
-          </a:bodyPr>
-          <a:lstStyle/>
-          <a:p>
-            <a:pPr marL="0" indent="0" algn="l">
-              <a:buNone/>
-            </a:pPr>
-            <a:r>
-              <a:rPr lang="en-US" sz="1500" b="1" dirty="0">
-                <a:solidFill>
-                  <a:srgbClr val="FFFFFF"/>
-                </a:solidFill>
-                <a:latin typeface="Arial"/>
-                <a:cs typeface="Arial"/>
-              </a:rPr>
-              <a:t>QUICK QUIZ   |   2 min</a:t>
-            </a:r>
-          </a:p>
-        </p:txBody>
-      </p:sp>
-      <p:sp>
-        <p:nvSpPr>
-          <p:cNvPr id="51" name="Steps"/>
+          <p:cNvPr id="20" name="Statement"/>
           <p:cNvSpPr txBox="1"/>
           <p:nvPr/>
         </p:nvSpPr>
         <p:spPr>
           <a:xfrm>
-            <a:off x="457200" y="1720000"/>
-            <a:ext cx="6766560" cy="4230000"/>
+            <a:off x="1057200" y="1280000"/>
+            <a:ext cx="10077600" cy="4470000"/>
           </a:xfrm>
           <a:prstGeom prst="rect">
             <a:avLst/>
@@ -28415,235 +28397,42 @@
           </a:ln>
         </p:spPr>
         <p:txBody>
-          <a:bodyPr wrap="square" lIns="91440" tIns="45720" rIns="91440" bIns="45720" rtlCol="0" anchor="t"/>
-          <a:lstStyle/>
-          <a:p>
-            <a:pPr marL="380000" indent="-380000" algn="l">
-              <a:lnSpc>
-                <a:spcPct val="104000"/>
-              </a:lnSpc>
-              <a:spcBef>
-                <a:spcPts val="450"/>
-              </a:spcBef>
-              <a:buClr>
-                <a:srgbClr val="6C3483"/>
-              </a:buClr>
-              <a:buFont typeface="Arial"/>
-              <a:buChar char="•"/>
-            </a:pPr>
-            <a:r>
-              <a:rPr lang="en-US" sz="1650" dirty="0">
-                <a:solidFill>
-                  <a:srgbClr val="000000"/>
-                </a:solidFill>
-                <a:latin typeface="Arial"/>
-                <a:cs typeface="Arial"/>
-              </a:rPr>
-              <a:t>A randomised trial of restrictive vs usual fluids in septic shock</a:t>
-            </a:r>
-          </a:p>
-          <a:p>
-            <a:pPr marL="380000" indent="-380000" algn="l">
-              <a:lnSpc>
-                <a:spcPct val="104000"/>
-              </a:lnSpc>
-              <a:spcBef>
-                <a:spcPts val="450"/>
-              </a:spcBef>
-              <a:buClr>
-                <a:srgbClr val="6C3483"/>
-              </a:buClr>
-              <a:buFont typeface="Arial"/>
-              <a:buChar char="•"/>
-            </a:pPr>
-            <a:r>
-              <a:rPr lang="en-US" sz="1650" dirty="0">
-                <a:solidFill>
-                  <a:srgbClr val="000000"/>
-                </a:solidFill>
-                <a:latin typeface="Arial"/>
-                <a:cs typeface="Arial"/>
-              </a:rPr>
-              <a:t>A systematic review of fluid strategies in sepsis</a:t>
-            </a:r>
-          </a:p>
-          <a:p>
-            <a:pPr marL="380000" indent="-380000" algn="l">
-              <a:lnSpc>
-                <a:spcPct val="104000"/>
-              </a:lnSpc>
-              <a:spcBef>
-                <a:spcPts val="450"/>
-              </a:spcBef>
-              <a:buClr>
-                <a:srgbClr val="6C3483"/>
-              </a:buClr>
-              <a:buFont typeface="Arial"/>
-              <a:buChar char="•"/>
-            </a:pPr>
-            <a:r>
-              <a:rPr lang="en-US" sz="1650" dirty="0">
-                <a:solidFill>
-                  <a:srgbClr val="000000"/>
-                </a:solidFill>
-                <a:latin typeface="Arial"/>
-                <a:cs typeface="Arial"/>
-              </a:rPr>
-              <a:t>A retrospective cohort from ICU charts (like FLUID-ICU)</a:t>
-            </a:r>
-          </a:p>
-          <a:p>
-            <a:pPr marL="380000" indent="-380000" algn="l">
-              <a:lnSpc>
-                <a:spcPct val="104000"/>
-              </a:lnSpc>
-              <a:spcBef>
-                <a:spcPts val="450"/>
-              </a:spcBef>
-              <a:buClr>
-                <a:srgbClr val="6C3483"/>
-              </a:buClr>
-              <a:buFont typeface="Arial"/>
-              <a:buChar char="•"/>
-            </a:pPr>
-            <a:r>
-              <a:rPr lang="en-US" sz="1650" dirty="0">
-                <a:solidFill>
-                  <a:srgbClr val="000000"/>
-                </a:solidFill>
-                <a:latin typeface="Arial"/>
-                <a:cs typeface="Arial"/>
-              </a:rPr>
-              <a:t>A clinical audit of fluid-balance charting against the unit standard</a:t>
-            </a:r>
-          </a:p>
-        </p:txBody>
-      </p:sp>
-      <p:sp>
-        <p:nvSpPr>
-          <p:cNvPr id="52" name="Side"/>
-          <p:cNvSpPr/>
-          <p:nvPr/>
-        </p:nvSpPr>
-        <p:spPr>
-          <a:xfrm>
-            <a:off x="7423760" y="1720000"/>
-            <a:ext cx="4311040" cy="1968005"/>
-          </a:xfrm>
-          <a:prstGeom prst="roundRect">
-            <a:avLst>
-              <a:gd name="adj" fmla="val 5000"/>
-            </a:avLst>
-          </a:prstGeom>
-          <a:solidFill>
-            <a:srgbClr val="EAF2F5"/>
-          </a:solidFill>
-          <a:ln>
-            <a:noFill/>
-          </a:ln>
-        </p:spPr>
-        <p:txBody>
-          <a:bodyPr wrap="square" lIns="137160" tIns="91440" rIns="137160" bIns="91440" rtlCol="0" anchor="ctr">
-            <a:normAutofit/>
-          </a:bodyPr>
-          <a:lstStyle/>
-          <a:p>
-            <a:pPr marL="0" indent="0" algn="ctr">
-              <a:buNone/>
-            </a:pPr>
-            <a:r>
-              <a:rPr lang="en-US" sz="1600" b="1" dirty="0">
-                <a:solidFill>
-                  <a:srgbClr val="6C3483"/>
-                </a:solidFill>
-                <a:latin typeface="Arial"/>
-                <a:cs typeface="Arial"/>
-              </a:rPr>
-              <a:t>Answers</a:t>
-            </a:r>
-          </a:p>
+          <a:bodyPr wrap="square" lIns="91440" tIns="45720" rIns="91440" bIns="45720" rtlCol="0" anchor="ctr"/>
+          <a:lstStyle/>
           <a:p>
             <a:pPr marL="0" indent="0" algn="ctr">
               <a:lnSpc>
-                <a:spcPct val="104000"/>
+                <a:spcPct val="110000"/>
               </a:lnSpc>
+              <a:buNone/>
+            </a:pPr>
+            <a:r>
+              <a:rPr lang="en-US" sz="3200" b="1" dirty="0">
+                <a:solidFill>
+                  <a:srgbClr val="0D7377"/>
+                </a:solidFill>
+                <a:latin typeface="Arial"/>
+                <a:cs typeface="Arial"/>
+              </a:rPr>
+              <a:t>Extra slides: Session 7</a:t>
+            </a:r>
+          </a:p>
+          <a:p>
+            <a:pPr marL="0" indent="0" algn="ctr">
               <a:spcBef>
-                <a:spcPts val="300"/>
+                <a:spcPts val="1200"/>
               </a:spcBef>
               <a:buNone/>
             </a:pPr>
             <a:r>
-              <a:rPr lang="en-US" sz="1500" dirty="0">
-                <a:solidFill>
-                  <a:srgbClr val="000000"/>
-                </a:solidFill>
-                <a:latin typeface="Arial"/>
-                <a:cs typeface="Arial"/>
-              </a:rPr>
-              <a:t>Must: a trial registry, before patient 1</a:t>
-            </a:r>
-          </a:p>
-          <a:p>
-            <a:pPr marL="0" indent="0" algn="ctr">
-              <a:lnSpc>
-                <a:spcPct val="104000"/>
-              </a:lnSpc>
-              <a:spcBef>
-                <a:spcPts val="300"/>
-              </a:spcBef>
-              <a:buNone/>
-            </a:pPr>
-            <a:r>
-              <a:rPr lang="en-US" sz="1500" dirty="0">
-                <a:solidFill>
-                  <a:srgbClr val="000000"/>
-                </a:solidFill>
-                <a:latin typeface="Arial"/>
-                <a:cs typeface="Arial"/>
-              </a:rPr>
-              <a:t>Should: PROSPERO</a:t>
-            </a:r>
-          </a:p>
-          <a:p>
-            <a:pPr marL="0" indent="0" algn="ctr">
-              <a:lnSpc>
-                <a:spcPct val="104000"/>
-              </a:lnSpc>
-              <a:spcBef>
-                <a:spcPts val="300"/>
-              </a:spcBef>
-              <a:buNone/>
-            </a:pPr>
-            <a:r>
-              <a:rPr lang="en-US" sz="1500" dirty="0">
-                <a:solidFill>
-                  <a:srgbClr val="000000"/>
-                </a:solidFill>
-                <a:latin typeface="Arial"/>
-                <a:cs typeface="Arial"/>
-              </a:rPr>
-              <a:t>Recommended, not required</a:t>
-            </a:r>
-          </a:p>
-          <a:p>
-            <a:pPr marL="0" indent="0" algn="ctr">
-              <a:lnSpc>
-                <a:spcPct val="104000"/>
-              </a:lnSpc>
-              <a:spcBef>
-                <a:spcPts val="300"/>
-              </a:spcBef>
-              <a:buNone/>
-            </a:pPr>
-            <a:r>
-              <a:rPr lang="en-US" sz="1500" dirty="0">
-                <a:solidFill>
-                  <a:srgbClr val="000000"/>
-                </a:solidFill>
-                <a:latin typeface="Arial"/>
-                <a:cs typeface="Arial"/>
-              </a:rPr>
-              <a:t>Audit: no research registration, local approval</a:t>
+              <a:rPr lang="en-US" sz="1900" i="1" dirty="0">
+                <a:solidFill>
+                  <a:srgbClr val="595959"/>
+                </a:solidFill>
+                <a:latin typeface="Arial"/>
+                <a:cs typeface="Arial"/>
+              </a:rPr>
+              <a:t>Use only if time allows, or for self-study</a:t>
             </a:r>
           </a:p>
         </p:txBody>
@@ -28811,7 +28600,7 @@
                 <a:latin typeface="Arial"/>
                 <a:cs typeface="Arial"/>
               </a:rPr>
-              <a:t>IMRaD: the hourglass shape of every paper</a:t>
+              <a:t>Check: register or not?</a:t>
             </a:r>
           </a:p>
         </p:txBody>
@@ -28844,48 +28633,22 @@
           </a:p>
         </p:txBody>
       </p:sp>
-      <p:pic>
-        <p:nvPicPr>
-          <p:cNvPr id="25" name="Figure"/>
-          <p:cNvPicPr>
-            <a:picLocks noChangeAspect="1"/>
-          </p:cNvPicPr>
-          <p:nvPr/>
-        </p:nvPicPr>
-        <p:blipFill>
-          <a:blip r:embed="rId4"/>
-          <a:stretch>
-            <a:fillRect/>
-          </a:stretch>
-        </p:blipFill>
-        <p:spPr>
-          <a:xfrm>
-            <a:off x="908500" y="1150000"/>
-            <a:ext cx="10375000" cy="4150000"/>
+      <p:sp>
+        <p:nvSpPr>
+          <p:cNvPr id="50" name="Banner"/>
+          <p:cNvSpPr/>
+          <p:nvPr/>
+        </p:nvSpPr>
+        <p:spPr>
+          <a:xfrm>
+            <a:off x="457200" y="1120000"/>
+            <a:ext cx="11277600" cy="470000"/>
           </a:xfrm>
           <a:prstGeom prst="rect">
             <a:avLst/>
           </a:prstGeom>
-        </p:spPr>
-      </p:pic>
-      <p:sp>
-        <p:nvSpPr>
-          <p:cNvPr id="60" name="Takeaway"/>
-          <p:cNvSpPr/>
-          <p:nvPr/>
-        </p:nvSpPr>
-        <p:spPr>
-          <a:xfrm>
-            <a:off x="457200" y="5390000"/>
-            <a:ext cx="11277600" cy="560000"/>
-          </a:xfrm>
-          <a:prstGeom prst="roundRect">
-            <a:avLst>
-              <a:gd name="adj" fmla="val 12000"/>
-            </a:avLst>
-          </a:prstGeom>
           <a:solidFill>
-            <a:srgbClr val="0D7377"/>
+            <a:srgbClr val="6C3483"/>
           </a:solidFill>
           <a:ln>
             <a:noFill/>
@@ -28897,28 +28660,271 @@
           </a:bodyPr>
           <a:lstStyle/>
           <a:p>
+            <a:pPr marL="0" indent="0" algn="l">
+              <a:buNone/>
+            </a:pPr>
+            <a:r>
+              <a:rPr lang="en-US" sz="1500" b="1" dirty="0">
+                <a:solidFill>
+                  <a:srgbClr val="FFFFFF"/>
+                </a:solidFill>
+                <a:latin typeface="Arial"/>
+                <a:cs typeface="Arial"/>
+              </a:rPr>
+              <a:t>QUICK QUIZ   |   2 min</a:t>
+            </a:r>
+          </a:p>
+        </p:txBody>
+      </p:sp>
+      <p:sp>
+        <p:nvSpPr>
+          <p:cNvPr id="51" name="Steps"/>
+          <p:cNvSpPr txBox="1"/>
+          <p:nvPr/>
+        </p:nvSpPr>
+        <p:spPr>
+          <a:xfrm>
+            <a:off x="457200" y="1720000"/>
+            <a:ext cx="6766560" cy="4230000"/>
+          </a:xfrm>
+          <a:prstGeom prst="rect">
+            <a:avLst/>
+          </a:prstGeom>
+          <a:noFill/>
+          <a:ln>
+            <a:noFill/>
+          </a:ln>
+        </p:spPr>
+        <p:txBody>
+          <a:bodyPr wrap="square" lIns="91440" tIns="45720" rIns="91440" bIns="45720" rtlCol="0" anchor="t"/>
+          <a:lstStyle/>
+          <a:p>
+            <a:pPr marL="380000" indent="-380000" algn="l">
+              <a:lnSpc>
+                <a:spcPct val="104000"/>
+              </a:lnSpc>
+              <a:spcBef>
+                <a:spcPts val="450"/>
+              </a:spcBef>
+              <a:buClr>
+                <a:srgbClr val="6C3483"/>
+              </a:buClr>
+              <a:buFont typeface="Arial"/>
+              <a:buChar char="•"/>
+            </a:pPr>
+            <a:r>
+              <a:rPr lang="en-US" sz="1650" dirty="0">
+                <a:solidFill>
+                  <a:srgbClr val="000000"/>
+                </a:solidFill>
+                <a:latin typeface="Arial"/>
+                <a:cs typeface="Arial"/>
+              </a:rPr>
+              <a:t>A randomised trial of restrictive vs usual fluids in septic shock</a:t>
+            </a:r>
+          </a:p>
+          <a:p>
+            <a:pPr marL="380000" indent="-380000" algn="l">
+              <a:lnSpc>
+                <a:spcPct val="104000"/>
+              </a:lnSpc>
+              <a:spcBef>
+                <a:spcPts val="450"/>
+              </a:spcBef>
+              <a:buClr>
+                <a:srgbClr val="6C3483"/>
+              </a:buClr>
+              <a:buFont typeface="Arial"/>
+              <a:buChar char="•"/>
+            </a:pPr>
+            <a:r>
+              <a:rPr lang="en-US" sz="1650" dirty="0">
+                <a:solidFill>
+                  <a:srgbClr val="000000"/>
+                </a:solidFill>
+                <a:latin typeface="Arial"/>
+                <a:cs typeface="Arial"/>
+              </a:rPr>
+              <a:t>A systematic review of fluid strategies in sepsis</a:t>
+            </a:r>
+          </a:p>
+          <a:p>
+            <a:pPr marL="380000" indent="-380000" algn="l">
+              <a:lnSpc>
+                <a:spcPct val="104000"/>
+              </a:lnSpc>
+              <a:spcBef>
+                <a:spcPts val="450"/>
+              </a:spcBef>
+              <a:buClr>
+                <a:srgbClr val="6C3483"/>
+              </a:buClr>
+              <a:buFont typeface="Arial"/>
+              <a:buChar char="•"/>
+            </a:pPr>
+            <a:r>
+              <a:rPr lang="en-US" sz="1650" dirty="0">
+                <a:solidFill>
+                  <a:srgbClr val="000000"/>
+                </a:solidFill>
+                <a:latin typeface="Arial"/>
+                <a:cs typeface="Arial"/>
+              </a:rPr>
+              <a:t>A retrospective cohort from ICU charts (like FLUID-ICU)</a:t>
+            </a:r>
+          </a:p>
+          <a:p>
+            <a:pPr marL="380000" indent="-380000" algn="l">
+              <a:lnSpc>
+                <a:spcPct val="104000"/>
+              </a:lnSpc>
+              <a:spcBef>
+                <a:spcPts val="450"/>
+              </a:spcBef>
+              <a:buClr>
+                <a:srgbClr val="6C3483"/>
+              </a:buClr>
+              <a:buFont typeface="Arial"/>
+              <a:buChar char="•"/>
+            </a:pPr>
+            <a:r>
+              <a:rPr lang="en-US" sz="1650" dirty="0">
+                <a:solidFill>
+                  <a:srgbClr val="000000"/>
+                </a:solidFill>
+                <a:latin typeface="Arial"/>
+                <a:cs typeface="Arial"/>
+              </a:rPr>
+              <a:t>A clinical audit of fluid-balance charting against the unit standard</a:t>
+            </a:r>
+          </a:p>
+        </p:txBody>
+      </p:sp>
+      <p:sp>
+        <p:nvSpPr>
+          <p:cNvPr id="52" name="Side"/>
+          <p:cNvSpPr/>
+          <p:nvPr/>
+        </p:nvSpPr>
+        <p:spPr>
+          <a:xfrm>
+            <a:off x="7423760" y="1720000"/>
+            <a:ext cx="4311040" cy="1968005"/>
+          </a:xfrm>
+          <a:prstGeom prst="roundRect">
+            <a:avLst>
+              <a:gd name="adj" fmla="val 5000"/>
+            </a:avLst>
+          </a:prstGeom>
+          <a:solidFill>
+            <a:srgbClr val="EAF2F5"/>
+          </a:solidFill>
+          <a:ln>
+            <a:noFill/>
+          </a:ln>
+        </p:spPr>
+        <p:txBody>
+          <a:bodyPr wrap="square" lIns="137160" tIns="91440" rIns="137160" bIns="91440" rtlCol="0" anchor="ctr">
+            <a:normAutofit/>
+          </a:bodyPr>
+          <a:lstStyle/>
+          <a:p>
             <a:pPr marL="0" indent="0" algn="ctr">
               <a:buNone/>
             </a:pPr>
             <a:r>
-              <a:rPr lang="en-US" sz="1300" b="1" dirty="0">
-                <a:solidFill>
-                  <a:srgbClr val="FFFFFF"/>
-                </a:solidFill>
-                <a:latin typeface="Arial"/>
-                <a:cs typeface="Arial"/>
-              </a:rPr>
-              <a:t>KEY MESSAGE   </a:t>
-            </a:r>
-            <a:r>
-              <a:rPr lang="en-US" sz="1550" dirty="0">
-                <a:solidFill>
-                  <a:srgbClr val="FFFFFF"/>
-                </a:solidFill>
-                <a:latin typeface="Arial"/>
-                <a:cs typeface="Arial"/>
-              </a:rPr>
-              <a:t>Introduction narrows to your question. Discussion widens back to practice.</a:t>
+              <a:rPr lang="en-US" sz="1600" b="1" dirty="0">
+                <a:solidFill>
+                  <a:srgbClr val="6C3483"/>
+                </a:solidFill>
+                <a:latin typeface="Arial"/>
+                <a:cs typeface="Arial"/>
+              </a:rPr>
+              <a:t>Answers</a:t>
+            </a:r>
+          </a:p>
+          <a:p>
+            <a:pPr marL="0" indent="0" algn="ctr">
+              <a:lnSpc>
+                <a:spcPct val="104000"/>
+              </a:lnSpc>
+              <a:spcBef>
+                <a:spcPts val="300"/>
+              </a:spcBef>
+              <a:buNone/>
+            </a:pPr>
+            <a:r>
+              <a:rPr lang="en-US" sz="1500" dirty="0">
+                <a:solidFill>
+                  <a:srgbClr val="000000"/>
+                </a:solidFill>
+                <a:latin typeface="Arial"/>
+                <a:cs typeface="Arial"/>
+              </a:rPr>
+              <a:t>Must: a trial registry, before patient 1</a:t>
+            </a:r>
+          </a:p>
+          <a:p>
+            <a:pPr marL="0" indent="0" algn="ctr">
+              <a:lnSpc>
+                <a:spcPct val="104000"/>
+              </a:lnSpc>
+              <a:spcBef>
+                <a:spcPts val="300"/>
+              </a:spcBef>
+              <a:buNone/>
+            </a:pPr>
+            <a:r>
+              <a:rPr lang="en-US" sz="1500" dirty="0">
+                <a:solidFill>
+                  <a:srgbClr val="000000"/>
+                </a:solidFill>
+                <a:latin typeface="Arial"/>
+                <a:cs typeface="Arial"/>
+              </a:rPr>
+              <a:t>Should: PROSPERO</a:t>
+            </a:r>
+          </a:p>
+          <a:p>
+            <a:pPr marL="0" indent="0" algn="ctr">
+              <a:lnSpc>
+                <a:spcPct val="104000"/>
+              </a:lnSpc>
+              <a:spcBef>
+                <a:spcPts val="300"/>
+              </a:spcBef>
+              <a:buNone/>
+            </a:pPr>
+            <a:r>
+              <a:rPr lang="en-US" sz="1500" dirty="0">
+                <a:solidFill>
+                  <a:srgbClr val="000000"/>
+                </a:solidFill>
+                <a:latin typeface="Arial"/>
+                <a:cs typeface="Arial"/>
+              </a:rPr>
+              <a:t>Recommended, not required</a:t>
+            </a:r>
+          </a:p>
+          <a:p>
+            <a:pPr marL="0" indent="0" algn="ctr">
+              <a:lnSpc>
+                <a:spcPct val="104000"/>
+              </a:lnSpc>
+              <a:spcBef>
+                <a:spcPts val="300"/>
+              </a:spcBef>
+              <a:buNone/>
+            </a:pPr>
+            <a:r>
+              <a:rPr lang="en-US" sz="1500" dirty="0">
+                <a:solidFill>
+                  <a:srgbClr val="000000"/>
+                </a:solidFill>
+                <a:latin typeface="Arial"/>
+                <a:cs typeface="Arial"/>
+              </a:rPr>
+              <a:t>Audit: no research registration, local approval</a:t>
             </a:r>
           </a:p>
         </p:txBody>

--- a/en/files/slides/Session_7_EN.pptx
+++ b/en/files/slides/Session_7_EN.pptx
@@ -2153,7 +2153,7 @@
           <a:p>
             <a:r>
               <a:rPr lang="en-US" sz="1400" b="0" dirty="0"/>
-              <a:t>Homework: Part 4 of their own proposal. Volunteers who want to present email the course lead by Wednesday 16 December.</a:t>
+              <a:t>Homework: Part 4 of their own proposal. Volunteers who want to present email the instructor by Wednesday 16 December.</a:t>
             </a:r>
           </a:p>
         </p:txBody>
@@ -27474,7 +27474,7 @@
                           <a:latin typeface="Arial"/>
                           <a:cs typeface="Arial"/>
                         </a:rPr>
-                        <a:t>Email your Results section to your reviewer and the course lead</a:t>
+                        <a:t>Email your Results section to your reviewer and the instructor</a:t>
                       </a:r>
                     </a:p>
                   </a:txBody>
@@ -27524,7 +27524,7 @@
                           <a:latin typeface="Arial"/>
                           <a:cs typeface="Arial"/>
                         </a:rPr>
-                        <a:t>Reviewers email their review to the author and the course lead</a:t>
+                        <a:t>Reviewers email their review to the author and the instructor</a:t>
                       </a:r>
                     </a:p>
                   </a:txBody>
@@ -27574,7 +27574,7 @@
                           <a:latin typeface="Arial"/>
                           <a:cs typeface="Arial"/>
                         </a:rPr>
-                        <a:t>Email your revised Results section and response letter to the course lead</a:t>
+                        <a:t>Email your revised Results section and response letter to the instructor</a:t>
                       </a:r>
                     </a:p>
                   </a:txBody>
@@ -27623,7 +27623,7 @@
                 <a:latin typeface="Arial"/>
                 <a:cs typeface="Arial"/>
               </a:rPr>
-              <a:t>Reviewers were assigned at random: see the list on screen and in your email. Course lead: myluong1710@gmail.com</a:t>
+              <a:t>Reviewers were assigned at random: see the list on screen and in your email. Instructor: myluong1710@gmail.com</a:t>
             </a:r>
           </a:p>
         </p:txBody>
